--- a/ground-vehicle/docs/courses/advanced/l1_architecture_and_toolchain.pptx
+++ b/ground-vehicle/docs/courses/advanced/l1_architecture_and_toolchain.pptx
@@ -3148,9 +3148,33 @@
           </a:p>
         </p:txBody>
       </p:sp>
-      <p:sp>
-        <p:nvSpPr>
-          <p:cNvPr id="3" name="TextBox 2"/>
+      <p:pic>
+        <p:nvPicPr>
+          <p:cNvPr id="3" name="Picture 2" descr="porpoise-logo.png"/>
+          <p:cNvPicPr>
+            <a:picLocks noChangeAspect="1"/>
+          </p:cNvPicPr>
+          <p:nvPr/>
+        </p:nvPicPr>
+        <p:blipFill>
+          <a:blip r:embed="rId2"/>
+          <a:stretch>
+            <a:fillRect/>
+          </a:stretch>
+        </p:blipFill>
+        <p:spPr>
+          <a:xfrm>
+            <a:off x="10922762" y="457200"/>
+            <a:ext cx="766013" cy="777240"/>
+          </a:xfrm>
+          <a:prstGeom prst="rect">
+            <a:avLst/>
+          </a:prstGeom>
+        </p:spPr>
+      </p:pic>
+      <p:sp>
+        <p:nvSpPr>
+          <p:cNvPr id="4" name="TextBox 3"/>
           <p:cNvSpPr txBox="1"/>
           <p:nvPr/>
         </p:nvSpPr>
@@ -3198,7 +3222,7 @@
       </p:sp>
       <p:sp>
         <p:nvSpPr>
-          <p:cNvPr id="4" name="TextBox 3"/>
+          <p:cNvPr id="5" name="TextBox 4"/>
           <p:cNvSpPr txBox="1"/>
           <p:nvPr/>
         </p:nvSpPr>
@@ -3246,7 +3270,7 @@
       </p:sp>
       <p:sp>
         <p:nvSpPr>
-          <p:cNvPr id="5" name="TextBox 4"/>
+          <p:cNvPr id="6" name="TextBox 5"/>
           <p:cNvSpPr txBox="1"/>
           <p:nvPr/>
         </p:nvSpPr>
@@ -3294,7 +3318,7 @@
       </p:sp>
       <p:sp>
         <p:nvSpPr>
-          <p:cNvPr id="6" name="TextBox 5"/>
+          <p:cNvPr id="7" name="TextBox 6"/>
           <p:cNvSpPr txBox="1"/>
           <p:nvPr/>
         </p:nvSpPr>
@@ -3408,14 +3432,14 @@
       </p:sp>
       <p:pic>
         <p:nvPicPr>
-          <p:cNvPr id="7" name="Picture 6" descr="vehicle-top-plate-esp32.jpg"/>
+          <p:cNvPr id="8" name="Picture 7" descr="vehicle-top-plate-esp32.jpg"/>
           <p:cNvPicPr>
             <a:picLocks noChangeAspect="1"/>
           </p:cNvPicPr>
           <p:nvPr/>
         </p:nvPicPr>
         <p:blipFill>
-          <a:blip r:embed="rId2"/>
+          <a:blip r:embed="rId3"/>
           <a:stretch>
             <a:fillRect/>
           </a:stretch>
@@ -3432,7 +3456,7 @@
       </p:pic>
       <p:sp>
         <p:nvSpPr>
-          <p:cNvPr id="8" name="TextBox 7"/>
+          <p:cNvPr id="9" name="TextBox 8"/>
           <p:cNvSpPr txBox="1"/>
           <p:nvPr/>
         </p:nvSpPr>

--- a/ground-vehicle/docs/courses/advanced/l1_architecture_and_toolchain.pptx
+++ b/ground-vehicle/docs/courses/advanced/l1_architecture_and_toolchain.pptx
@@ -4279,7 +4279,7 @@
       </p:sp>
       <p:sp>
         <p:nvSpPr>
-          <p:cNvPr id="7" name="Rounded Rectangle 6"/>
+          <p:cNvPr id="7" name="CODE_PANEL"/>
           <p:cNvSpPr/>
           <p:nvPr/>
         </p:nvSpPr>
@@ -5715,7 +5715,7 @@
       </p:sp>
       <p:sp>
         <p:nvSpPr>
-          <p:cNvPr id="7" name="Rounded Rectangle 6"/>
+          <p:cNvPr id="7" name="CODE_PANEL"/>
           <p:cNvSpPr/>
           <p:nvPr/>
         </p:nvSpPr>

--- a/ground-vehicle/docs/courses/advanced/l1_architecture_and_toolchain.pptx
+++ b/ground-vehicle/docs/courses/advanced/l1_architecture_and_toolchain.pptx
@@ -29,6 +29,9 @@
     <p:sldId id="277" r:id="rId28"/>
     <p:sldId id="278" r:id="rId29"/>
     <p:sldId id="279" r:id="rId30"/>
+    <p:sldId id="280" r:id="rId31"/>
+    <p:sldId id="281" r:id="rId32"/>
+    <p:sldId id="282" r:id="rId33"/>
   </p:sldIdLst>
   <p:sldSz cx="12191695" cy="6858000" type="screen4x3"/>
   <p:notesSz cx="6858000" cy="9144000"/>
@@ -3331,8 +3334,8 @@
         </p:nvSpPr>
         <p:spPr>
           <a:xfrm>
-            <a:off x="502920" y="4224528"/>
-            <a:ext cx="6492240" cy="1371600"/>
+            <a:off x="502920" y="3931920"/>
+            <a:ext cx="6492240" cy="2148840"/>
           </a:xfrm>
           <a:prstGeom prst="rect">
             <a:avLst/>
@@ -3350,9 +3353,9 @@
                 <a:spcPct val="100000"/>
               </a:lnSpc>
               <a:spcAft>
-                <a:spcPts val="200"/>
-              </a:spcAft>
-              <a:defRPr sz="1300" b="0">
+                <a:spcPts val="100"/>
+              </a:spcAft>
+              <a:defRPr sz="1200" b="0">
                 <a:solidFill>
                   <a:srgbClr val="666666"/>
                 </a:solidFill>
@@ -3360,24 +3363,24 @@
               </a:defRPr>
             </a:pPr>
             <a:r>
-              <a:rPr sz="1300" b="0">
+              <a:rPr sz="1200" b="0">
                 <a:solidFill>
                   <a:srgbClr val="666666"/>
                 </a:solidFill>
                 <a:latin typeface="Calibri"/>
               </a:rPr>
-              <a:t>Porpoise Robotics  -  porpoiserobotics.org</a:t>
-            </a:r>
-          </a:p>
-          <a:p>
-            <a:pPr algn="l">
-              <a:lnSpc>
-                <a:spcPct val="100000"/>
-              </a:lnSpc>
-              <a:spcAft>
-                <a:spcPts val="200"/>
-              </a:spcAft>
-              <a:defRPr sz="1300" b="0">
+              <a:t>PORPOISE ROBOTICS  -  Precision Oceanographic Program On and In the Sea Environment</a:t>
+            </a:r>
+          </a:p>
+          <a:p>
+            <a:pPr algn="l">
+              <a:lnSpc>
+                <a:spcPct val="100000"/>
+              </a:lnSpc>
+              <a:spcAft>
+                <a:spcPts val="100"/>
+              </a:spcAft>
+              <a:defRPr sz="1200" b="0">
                 <a:solidFill>
                   <a:srgbClr val="666666"/>
                 </a:solidFill>
@@ -3385,24 +3388,24 @@
               </a:defRPr>
             </a:pPr>
             <a:r>
-              <a:rPr sz="1300" b="0">
+              <a:rPr sz="1200" b="0">
                 <a:solidFill>
                   <a:srgbClr val="666666"/>
                 </a:solidFill>
                 <a:latin typeface="Calibri"/>
               </a:rPr>
-              <a:t>Kevin P. Bowen, President  -  kbowen6@icloud.com</a:t>
-            </a:r>
-          </a:p>
-          <a:p>
-            <a:pPr algn="l">
-              <a:lnSpc>
-                <a:spcPct val="100000"/>
-              </a:lnSpc>
-              <a:spcAft>
-                <a:spcPts val="200"/>
-              </a:spcAft>
-              <a:defRPr sz="1300" b="0">
+              <a:t>porpoiserobotics.org</a:t>
+            </a:r>
+          </a:p>
+          <a:p>
+            <a:pPr algn="l">
+              <a:lnSpc>
+                <a:spcPct val="100000"/>
+              </a:lnSpc>
+              <a:spcAft>
+                <a:spcPts val="100"/>
+              </a:spcAft>
+              <a:defRPr sz="1200" b="0">
                 <a:solidFill>
                   <a:srgbClr val="666666"/>
                 </a:solidFill>
@@ -3416,9 +3419,9 @@
                 <a:spcPct val="100000"/>
               </a:lnSpc>
               <a:spcAft>
-                <a:spcPts val="200"/>
-              </a:spcAft>
-              <a:defRPr sz="1300" b="0">
+                <a:spcPts val="100"/>
+              </a:spcAft>
+              <a:defRPr sz="1200" b="0">
                 <a:solidFill>
                   <a:srgbClr val="666666"/>
                 </a:solidFill>
@@ -3426,7 +3429,148 @@
               </a:defRPr>
             </a:pPr>
             <a:r>
-              <a:rPr sz="1300" b="0">
+              <a:rPr sz="1200" b="0">
+                <a:solidFill>
+                  <a:srgbClr val="666666"/>
+                </a:solidFill>
+                <a:latin typeface="Calibri"/>
+              </a:rPr>
+              <a:t>Kevin Bowen, President  -  kbowen6@icloud.com</a:t>
+            </a:r>
+          </a:p>
+          <a:p>
+            <a:pPr algn="l">
+              <a:lnSpc>
+                <a:spcPct val="100000"/>
+              </a:lnSpc>
+              <a:spcAft>
+                <a:spcPts val="100"/>
+              </a:spcAft>
+              <a:defRPr sz="1200" b="0">
+                <a:solidFill>
+                  <a:srgbClr val="666666"/>
+                </a:solidFill>
+                <a:latin typeface="Calibri"/>
+              </a:defRPr>
+            </a:pPr>
+            <a:r>
+              <a:rPr sz="1200" b="0">
+                <a:solidFill>
+                  <a:srgbClr val="666666"/>
+                </a:solidFill>
+                <a:latin typeface="Calibri"/>
+              </a:rPr>
+              <a:t>Malcom Graham, VP Education      Louis Parker, VP Technology</a:t>
+            </a:r>
+          </a:p>
+          <a:p>
+            <a:pPr algn="l">
+              <a:lnSpc>
+                <a:spcPct val="100000"/>
+              </a:lnSpc>
+              <a:spcAft>
+                <a:spcPts val="100"/>
+              </a:spcAft>
+              <a:defRPr sz="1200" b="0">
+                <a:solidFill>
+                  <a:srgbClr val="666666"/>
+                </a:solidFill>
+                <a:latin typeface="Calibri"/>
+              </a:defRPr>
+            </a:pPr>
+            <a:r>
+              <a:rPr sz="1200" b="0">
+                <a:solidFill>
+                  <a:srgbClr val="666666"/>
+                </a:solidFill>
+                <a:latin typeface="Calibri"/>
+              </a:rPr>
+              <a:t>Valen Farre, System Engineer      Gary Howland, Animation</a:t>
+            </a:r>
+          </a:p>
+          <a:p>
+            <a:pPr algn="l">
+              <a:lnSpc>
+                <a:spcPct val="100000"/>
+              </a:lnSpc>
+              <a:spcAft>
+                <a:spcPts val="100"/>
+              </a:spcAft>
+              <a:defRPr sz="1200" b="0">
+                <a:solidFill>
+                  <a:srgbClr val="666666"/>
+                </a:solidFill>
+                <a:latin typeface="Calibri"/>
+              </a:defRPr>
+            </a:pPr>
+            <a:r>
+              <a:rPr sz="1200" b="0">
+                <a:solidFill>
+                  <a:srgbClr val="666666"/>
+                </a:solidFill>
+                <a:latin typeface="Calibri"/>
+              </a:rPr>
+              <a:t>Eddie Revollo, Artificial Intelligence</a:t>
+            </a:r>
+          </a:p>
+          <a:p>
+            <a:pPr algn="l">
+              <a:lnSpc>
+                <a:spcPct val="100000"/>
+              </a:lnSpc>
+              <a:spcAft>
+                <a:spcPts val="100"/>
+              </a:spcAft>
+              <a:defRPr sz="1200" b="0">
+                <a:solidFill>
+                  <a:srgbClr val="666666"/>
+                </a:solidFill>
+                <a:latin typeface="Calibri"/>
+              </a:defRPr>
+            </a:pPr>
+            <a:r>
+              <a:rPr sz="1200" b="0">
+                <a:solidFill>
+                  <a:srgbClr val="666666"/>
+                </a:solidFill>
+                <a:latin typeface="Calibri"/>
+              </a:rPr>
+              <a:t>Interns: Oscar Canazales, Krishnansh Vemulapalli, Soham Gangal, Erik Olsen</a:t>
+            </a:r>
+          </a:p>
+          <a:p>
+            <a:pPr algn="l">
+              <a:lnSpc>
+                <a:spcPct val="100000"/>
+              </a:lnSpc>
+              <a:spcAft>
+                <a:spcPts val="100"/>
+              </a:spcAft>
+              <a:defRPr sz="1200" b="0">
+                <a:solidFill>
+                  <a:srgbClr val="666666"/>
+                </a:solidFill>
+                <a:latin typeface="Calibri"/>
+              </a:defRPr>
+            </a:pPr>
+          </a:p>
+          <a:p>
+            <a:pPr algn="l">
+              <a:lnSpc>
+                <a:spcPct val="100000"/>
+              </a:lnSpc>
+              <a:spcAft>
+                <a:spcPts val="100"/>
+              </a:spcAft>
+              <a:defRPr sz="1200" b="0">
+                <a:solidFill>
+                  <a:srgbClr val="666666"/>
+                </a:solidFill>
+                <a:latin typeface="Calibri"/>
+              </a:defRPr>
+            </a:pPr>
+            <a:r>
+              <a:rPr sz="1200" b="0">
                 <a:solidFill>
                   <a:srgbClr val="666666"/>
                 </a:solidFill>
@@ -3568,7 +3712,7 @@
                 </a:solidFill>
                 <a:latin typeface="Calibri"/>
               </a:rPr>
-              <a:t>How Arduino tabs actually work  (continued)</a:t>
+              <a:t>How Arduino tabs actually work</a:t>
             </a:r>
           </a:p>
         </p:txBody>
@@ -3722,7 +3866,7 @@
         <p:spPr>
           <a:xfrm>
             <a:off x="502920" y="1188720"/>
-            <a:ext cx="11185855" cy="5074920"/>
+            <a:ext cx="11185855" cy="530352"/>
           </a:xfrm>
           <a:prstGeom prst="rect">
             <a:avLst/>
@@ -3735,6 +3879,161 @@
           </a:bodyPr>
           <a:lstStyle/>
           <a:p>
+            <a:pPr algn="l">
+              <a:lnSpc>
+                <a:spcPct val="100000"/>
+              </a:lnSpc>
+              <a:spcAft>
+                <a:spcPts val="600"/>
+              </a:spcAft>
+              <a:defRPr sz="1900" b="1">
+                <a:solidFill>
+                  <a:srgbClr val="0E7C86"/>
+                </a:solidFill>
+                <a:latin typeface="Calibri"/>
+              </a:defRPr>
+            </a:pPr>
+            <a:r>
+              <a:rPr sz="1900" b="1">
+                <a:solidFill>
+                  <a:srgbClr val="0E7C86"/>
+                </a:solidFill>
+                <a:latin typeface="Calibri"/>
+              </a:rPr>
+              <a:t>Convenient, and exactly one trap</a:t>
+            </a:r>
+          </a:p>
+        </p:txBody>
+      </p:sp>
+      <p:sp>
+        <p:nvSpPr>
+          <p:cNvPr id="7" name="TextBox 6"/>
+          <p:cNvSpPr txBox="1"/>
+          <p:nvPr/>
+        </p:nvSpPr>
+        <p:spPr>
+          <a:xfrm>
+            <a:off x="502920" y="1755648"/>
+            <a:ext cx="11185855" cy="4507992"/>
+          </a:xfrm>
+          <a:prstGeom prst="rect">
+            <a:avLst/>
+          </a:prstGeom>
+          <a:noFill/>
+        </p:spPr>
+        <p:txBody>
+          <a:bodyPr wrap="square" lIns="0" tIns="0" rIns="0" bIns="0">
+            <a:spAutoFit/>
+          </a:bodyPr>
+          <a:lstStyle/>
+          <a:p>
+            <a:pPr algn="l">
+              <a:lnSpc>
+                <a:spcPct val="100000"/>
+              </a:lnSpc>
+              <a:spcAft>
+                <a:spcPts val="900"/>
+              </a:spcAft>
+              <a:defRPr sz="1800" b="0">
+                <a:solidFill>
+                  <a:srgbClr val="222222"/>
+                </a:solidFill>
+                <a:latin typeface="Calibri"/>
+              </a:defRPr>
+            </a:pPr>
+            <a:r>
+              <a:rPr sz="1800" b="0">
+                <a:solidFill>
+                  <a:srgbClr val="222222"/>
+                </a:solidFill>
+                <a:latin typeface="Calibri"/>
+              </a:rPr>
+              <a:t>Every .ino file in the sketch folder is a tab in the IDE.</a:t>
+            </a:r>
+          </a:p>
+          <a:p>
+            <a:pPr algn="l">
+              <a:lnSpc>
+                <a:spcPct val="100000"/>
+              </a:lnSpc>
+              <a:spcAft>
+                <a:spcPts val="900"/>
+              </a:spcAft>
+              <a:defRPr sz="1800" b="0">
+                <a:solidFill>
+                  <a:srgbClr val="222222"/>
+                </a:solidFill>
+                <a:latin typeface="Calibri"/>
+              </a:defRPr>
+            </a:pPr>
+            <a:r>
+              <a:rPr sz="1800" b="0">
+                <a:solidFill>
+                  <a:srgbClr val="222222"/>
+                </a:solidFill>
+                <a:latin typeface="Calibri"/>
+              </a:rPr>
+              <a:t>Before compiling, the IDE CONCATENATES them into one file - the one named after the folder first, then the rest alphabetically - and generates function prototypes at the top.</a:t>
+            </a:r>
+          </a:p>
+          <a:p>
+            <a:pPr algn="l">
+              <a:lnSpc>
+                <a:spcPct val="100000"/>
+              </a:lnSpc>
+              <a:spcAft>
+                <a:spcPts val="900"/>
+              </a:spcAft>
+              <a:defRPr sz="1800" b="0">
+                <a:solidFill>
+                  <a:srgbClr val="222222"/>
+                </a:solidFill>
+                <a:latin typeface="Calibri"/>
+              </a:defRPr>
+            </a:pPr>
+          </a:p>
+          <a:p>
+            <a:pPr algn="l">
+              <a:lnSpc>
+                <a:spcPct val="100000"/>
+              </a:lnSpc>
+              <a:spcAft>
+                <a:spcPts val="900"/>
+              </a:spcAft>
+              <a:defRPr sz="1800" b="0">
+                <a:solidFill>
+                  <a:srgbClr val="222222"/>
+                </a:solidFill>
+                <a:latin typeface="Calibri"/>
+              </a:defRPr>
+            </a:pPr>
+            <a:r>
+              <a:rPr sz="1800" b="0">
+                <a:solidFill>
+                  <a:srgbClr val="222222"/>
+                </a:solidFill>
+                <a:latin typeface="Calibri"/>
+              </a:rPr>
+              <a:t>Two consequences you have to know:</a:t>
+            </a:r>
+          </a:p>
+          <a:p>
+            <a:pPr algn="l">
+              <a:lnSpc>
+                <a:spcPct val="100000"/>
+              </a:lnSpc>
+              <a:spcAft>
+                <a:spcPts val="900"/>
+              </a:spcAft>
+              <a:defRPr sz="1800" b="0">
+                <a:solidFill>
+                  <a:srgbClr val="222222"/>
+                </a:solidFill>
+                <a:latin typeface="Calibri"/>
+              </a:defRPr>
+            </a:pPr>
+          </a:p>
+          <a:p>
             <a:pPr lvl="1" algn="l">
               <a:lnSpc>
                 <a:spcPct val="100000"/>
@@ -3756,7 +4055,7 @@
                 </a:solidFill>
                 <a:latin typeface="Calibri"/>
               </a:rPr>
-              <a:t>TYPES are not. The generated prototypes go ABOVE your code, so a prototype mentioning an enum or struct you declared in a tab will not compile - the type is not defined yet at that point.</a:t>
+              <a:t>Functions and globals are shared across tabs with NO header needed. Lighting.ino can call strip and read NUM_LEDS with no include.</a:t>
             </a:r>
           </a:p>
         </p:txBody>
@@ -3974,7 +4273,7 @@
         <p:spPr>
           <a:xfrm>
             <a:off x="502920" y="1188720"/>
-            <a:ext cx="11185855" cy="4023360"/>
+            <a:ext cx="11185855" cy="5074920"/>
           </a:xfrm>
           <a:prstGeom prst="rect">
             <a:avLst/>
@@ -3987,7 +4286,7 @@
           </a:bodyPr>
           <a:lstStyle/>
           <a:p>
-            <a:pPr algn="l">
+            <a:pPr lvl="1" algn="l">
               <a:lnSpc>
                 <a:spcPct val="100000"/>
               </a:lnSpc>
@@ -4001,22 +4300,6 @@
                 <a:latin typeface="Calibri"/>
               </a:defRPr>
             </a:pPr>
-          </a:p>
-          <a:p>
-            <a:pPr algn="l">
-              <a:lnSpc>
-                <a:spcPct val="100000"/>
-              </a:lnSpc>
-              <a:spcAft>
-                <a:spcPts val="900"/>
-              </a:spcAft>
-              <a:defRPr sz="1800" b="0">
-                <a:solidFill>
-                  <a:srgbClr val="222222"/>
-                </a:solidFill>
-                <a:latin typeface="Calibri"/>
-              </a:defRPr>
-            </a:pPr>
             <a:r>
               <a:rPr sz="1800" b="0">
                 <a:solidFill>
@@ -4024,73 +4307,7 @@
                 </a:solidFill>
                 <a:latin typeface="Calibri"/>
               </a:rPr>
-              <a:t>That is precisely why Config.h is a real header rather than a ninth tab. A header is #included by the main sketch, so everything in it is defined before the generated prototypes appear.</a:t>
-            </a:r>
-          </a:p>
-        </p:txBody>
-      </p:sp>
-      <p:sp>
-        <p:nvSpPr>
-          <p:cNvPr id="7" name="Rounded Rectangle 6"/>
-          <p:cNvSpPr/>
-          <p:nvPr/>
-        </p:nvSpPr>
-        <p:spPr>
-          <a:xfrm>
-            <a:off x="502920" y="5303520"/>
-            <a:ext cx="11185855" cy="960120"/>
-          </a:xfrm>
-          <a:prstGeom prst="roundRect">
-            <a:avLst>
-              <a:gd name="adj" fmla="val 4000"/>
-            </a:avLst>
-          </a:prstGeom>
-          <a:solidFill>
-            <a:srgbClr val="EEF3F8"/>
-          </a:solidFill>
-          <a:ln w="12700">
-            <a:solidFill>
-              <a:srgbClr val="0E7C86"/>
-            </a:solidFill>
-          </a:ln>
-          <a:effectLst/>
-        </p:spPr>
-        <p:style>
-          <a:lnRef idx="1">
-            <a:schemeClr val="accent1"/>
-          </a:lnRef>
-          <a:fillRef idx="3">
-            <a:schemeClr val="accent1"/>
-          </a:fillRef>
-          <a:effectRef idx="2">
-            <a:schemeClr val="accent1"/>
-          </a:effectRef>
-          <a:fontRef idx="minor">
-            <a:schemeClr val="lt1"/>
-          </a:fontRef>
-        </p:style>
-        <p:txBody>
-          <a:bodyPr rtlCol="0" anchor="ctr" wrap="square" lIns="164592" rIns="164592" tIns="73152" bIns="73152"/>
-          <a:lstStyle/>
-          <a:p>
-            <a:pPr algn="l"/>
-            <a:r>
-              <a:rPr sz="1300" b="1">
-                <a:solidFill>
-                  <a:srgbClr val="0E7C86"/>
-                </a:solidFill>
-                <a:latin typeface="Calibri"/>
-              </a:rPr>
-              <a:t>KEY POINT   </a:t>
-            </a:r>
-            <a:r>
-              <a:rPr sz="1500">
-                <a:solidFill>
-                  <a:srgbClr val="222222"/>
-                </a:solidFill>
-                <a:latin typeface="Calibri"/>
-              </a:rPr>
-              <a:t>Op 12's Config.h opens with a paragraph saying this. Now you know what it is warning you about.</a:t>
+              <a:t>TYPES are not. The generated prototypes go ABOVE your code, so a prototype mentioning an enum or struct you declared in a tab will not compile - the type is not defined yet at that point.</a:t>
             </a:r>
           </a:p>
         </p:txBody>
@@ -4154,7 +4371,7 @@
                 </a:solidFill>
                 <a:latin typeface="Calibri"/>
               </a:rPr>
-              <a:t>The eight files, and what each one owns</a:t>
+              <a:t>How Arduino tabs actually work  (continued)</a:t>
             </a:r>
           </a:p>
         </p:txBody>
@@ -4295,6 +4512,340 @@
                 <a:latin typeface="Calibri"/>
               </a:rPr>
               <a:t>11</a:t>
+            </a:r>
+          </a:p>
+        </p:txBody>
+      </p:sp>
+      <p:sp>
+        <p:nvSpPr>
+          <p:cNvPr id="6" name="TextBox 5"/>
+          <p:cNvSpPr txBox="1"/>
+          <p:nvPr/>
+        </p:nvSpPr>
+        <p:spPr>
+          <a:xfrm>
+            <a:off x="502920" y="1188720"/>
+            <a:ext cx="11185855" cy="4023360"/>
+          </a:xfrm>
+          <a:prstGeom prst="rect">
+            <a:avLst/>
+          </a:prstGeom>
+          <a:noFill/>
+        </p:spPr>
+        <p:txBody>
+          <a:bodyPr wrap="square" lIns="0" tIns="0" rIns="0" bIns="0">
+            <a:spAutoFit/>
+          </a:bodyPr>
+          <a:lstStyle/>
+          <a:p>
+            <a:pPr algn="l">
+              <a:lnSpc>
+                <a:spcPct val="100000"/>
+              </a:lnSpc>
+              <a:spcAft>
+                <a:spcPts val="900"/>
+              </a:spcAft>
+              <a:defRPr sz="1800" b="0">
+                <a:solidFill>
+                  <a:srgbClr val="222222"/>
+                </a:solidFill>
+                <a:latin typeface="Calibri"/>
+              </a:defRPr>
+            </a:pPr>
+          </a:p>
+          <a:p>
+            <a:pPr algn="l">
+              <a:lnSpc>
+                <a:spcPct val="100000"/>
+              </a:lnSpc>
+              <a:spcAft>
+                <a:spcPts val="900"/>
+              </a:spcAft>
+              <a:defRPr sz="1800" b="0">
+                <a:solidFill>
+                  <a:srgbClr val="222222"/>
+                </a:solidFill>
+                <a:latin typeface="Calibri"/>
+              </a:defRPr>
+            </a:pPr>
+            <a:r>
+              <a:rPr sz="1800" b="0">
+                <a:solidFill>
+                  <a:srgbClr val="222222"/>
+                </a:solidFill>
+                <a:latin typeface="Calibri"/>
+              </a:rPr>
+              <a:t>That is precisely why Config.h is a real header rather than a ninth tab. A header is #included by the main sketch, so everything in it is defined before the generated prototypes appear.</a:t>
+            </a:r>
+          </a:p>
+        </p:txBody>
+      </p:sp>
+      <p:sp>
+        <p:nvSpPr>
+          <p:cNvPr id="7" name="Rounded Rectangle 6"/>
+          <p:cNvSpPr/>
+          <p:nvPr/>
+        </p:nvSpPr>
+        <p:spPr>
+          <a:xfrm>
+            <a:off x="502920" y="5303520"/>
+            <a:ext cx="11185855" cy="960120"/>
+          </a:xfrm>
+          <a:prstGeom prst="roundRect">
+            <a:avLst>
+              <a:gd name="adj" fmla="val 4000"/>
+            </a:avLst>
+          </a:prstGeom>
+          <a:solidFill>
+            <a:srgbClr val="EEF3F8"/>
+          </a:solidFill>
+          <a:ln w="12700">
+            <a:solidFill>
+              <a:srgbClr val="0E7C86"/>
+            </a:solidFill>
+          </a:ln>
+          <a:effectLst/>
+        </p:spPr>
+        <p:style>
+          <a:lnRef idx="1">
+            <a:schemeClr val="accent1"/>
+          </a:lnRef>
+          <a:fillRef idx="3">
+            <a:schemeClr val="accent1"/>
+          </a:fillRef>
+          <a:effectRef idx="2">
+            <a:schemeClr val="accent1"/>
+          </a:effectRef>
+          <a:fontRef idx="minor">
+            <a:schemeClr val="lt1"/>
+          </a:fontRef>
+        </p:style>
+        <p:txBody>
+          <a:bodyPr rtlCol="0" anchor="ctr" wrap="square" lIns="164592" rIns="164592" tIns="73152" bIns="73152"/>
+          <a:lstStyle/>
+          <a:p>
+            <a:pPr algn="l"/>
+            <a:r>
+              <a:rPr sz="1300" b="1">
+                <a:solidFill>
+                  <a:srgbClr val="0E7C86"/>
+                </a:solidFill>
+                <a:latin typeface="Calibri"/>
+              </a:rPr>
+              <a:t>KEY POINT   </a:t>
+            </a:r>
+            <a:r>
+              <a:rPr sz="1500">
+                <a:solidFill>
+                  <a:srgbClr val="222222"/>
+                </a:solidFill>
+                <a:latin typeface="Calibri"/>
+              </a:rPr>
+              <a:t>Op 12's Config.h opens with a paragraph saying this. Now you know what it is warning you about.</a:t>
+            </a:r>
+          </a:p>
+        </p:txBody>
+      </p:sp>
+    </p:spTree>
+  </p:cSld>
+  <p:clrMapOvr>
+    <a:masterClrMapping/>
+  </p:clrMapOvr>
+</p:sld>
+</file>
+
+<file path=ppt/slides/slide13.xml><?xml version="1.0" encoding="utf-8"?>
+<p:sld xmlns:a="http://schemas.openxmlformats.org/drawingml/2006/main" xmlns:p="http://schemas.openxmlformats.org/presentationml/2006/main" xmlns:r="http://schemas.openxmlformats.org/officeDocument/2006/relationships">
+  <p:cSld>
+    <p:spTree>
+      <p:nvGrpSpPr>
+        <p:cNvPr id="1" name=""/>
+        <p:cNvGrpSpPr/>
+        <p:nvPr/>
+      </p:nvGrpSpPr>
+      <p:grpSpPr/>
+      <p:sp>
+        <p:nvSpPr>
+          <p:cNvPr id="2" name="Title 1"/>
+          <p:cNvSpPr>
+            <a:spLocks noGrp="1"/>
+          </p:cNvSpPr>
+          <p:nvPr>
+            <p:ph type="title"/>
+          </p:nvPr>
+        </p:nvSpPr>
+        <p:spPr>
+          <a:xfrm>
+            <a:off x="502920" y="274320"/>
+            <a:ext cx="11185855" cy="777240"/>
+          </a:xfrm>
+        </p:spPr>
+        <p:txBody>
+          <a:bodyPr wrap="square" anchor="b"/>
+          <a:lstStyle/>
+          <a:p>
+            <a:pPr algn="l">
+              <a:lnSpc>
+                <a:spcPct val="100000"/>
+              </a:lnSpc>
+              <a:spcAft>
+                <a:spcPts val="0"/>
+              </a:spcAft>
+              <a:defRPr sz="2800" b="1">
+                <a:solidFill>
+                  <a:srgbClr val="1F3A5F"/>
+                </a:solidFill>
+                <a:latin typeface="Calibri"/>
+              </a:defRPr>
+            </a:pPr>
+            <a:r>
+              <a:rPr sz="2800" b="1">
+                <a:solidFill>
+                  <a:srgbClr val="1F3A5F"/>
+                </a:solidFill>
+                <a:latin typeface="Calibri"/>
+              </a:rPr>
+              <a:t>The eight files, and what each one owns</a:t>
+            </a:r>
+          </a:p>
+        </p:txBody>
+      </p:sp>
+      <p:sp>
+        <p:nvSpPr>
+          <p:cNvPr id="3" name="Rectangle 2"/>
+          <p:cNvSpPr/>
+          <p:nvPr/>
+        </p:nvSpPr>
+        <p:spPr>
+          <a:xfrm>
+            <a:off x="502920" y="1097280"/>
+            <a:ext cx="11185855" cy="19050"/>
+          </a:xfrm>
+          <a:prstGeom prst="rect">
+            <a:avLst/>
+          </a:prstGeom>
+          <a:solidFill>
+            <a:srgbClr val="C8D2DE"/>
+          </a:solidFill>
+          <a:ln>
+            <a:noFill/>
+          </a:ln>
+          <a:effectLst/>
+        </p:spPr>
+        <p:style>
+          <a:lnRef idx="1">
+            <a:schemeClr val="accent1"/>
+          </a:lnRef>
+          <a:fillRef idx="3">
+            <a:schemeClr val="accent1"/>
+          </a:fillRef>
+          <a:effectRef idx="2">
+            <a:schemeClr val="accent1"/>
+          </a:effectRef>
+          <a:fontRef idx="minor">
+            <a:schemeClr val="lt1"/>
+          </a:fontRef>
+        </p:style>
+        <p:txBody>
+          <a:bodyPr rtlCol="0" anchor="ctr"/>
+          <a:lstStyle/>
+          <a:p>
+            <a:pPr algn="ctr"/>
+          </a:p>
+        </p:txBody>
+      </p:sp>
+      <p:sp>
+        <p:nvSpPr>
+          <p:cNvPr id="4" name="TextBox 3"/>
+          <p:cNvSpPr txBox="1"/>
+          <p:nvPr/>
+        </p:nvSpPr>
+        <p:spPr>
+          <a:xfrm>
+            <a:off x="502920" y="6382512"/>
+            <a:ext cx="10545775" cy="274320"/>
+          </a:xfrm>
+          <a:prstGeom prst="rect">
+            <a:avLst/>
+          </a:prstGeom>
+          <a:noFill/>
+        </p:spPr>
+        <p:txBody>
+          <a:bodyPr wrap="square" lIns="0" tIns="0">
+            <a:spAutoFit/>
+          </a:bodyPr>
+          <a:lstStyle/>
+          <a:p>
+            <a:pPr algn="l">
+              <a:lnSpc>
+                <a:spcPct val="100000"/>
+              </a:lnSpc>
+              <a:spcAft>
+                <a:spcPts val="0"/>
+              </a:spcAft>
+              <a:defRPr sz="1000" b="0">
+                <a:solidFill>
+                  <a:srgbClr val="666666"/>
+                </a:solidFill>
+                <a:latin typeface="Calibri"/>
+              </a:defRPr>
+            </a:pPr>
+            <a:r>
+              <a:rPr sz="1000" b="0">
+                <a:solidFill>
+                  <a:srgbClr val="666666"/>
+                </a:solidFill>
+                <a:latin typeface="Calibri"/>
+              </a:rPr>
+              <a:t>Pathfinder Advanced - Op Program 12  |  Lesson 1</a:t>
+            </a:r>
+          </a:p>
+        </p:txBody>
+      </p:sp>
+      <p:sp>
+        <p:nvSpPr>
+          <p:cNvPr id="5" name="TextBox 4"/>
+          <p:cNvSpPr txBox="1"/>
+          <p:nvPr/>
+        </p:nvSpPr>
+        <p:spPr>
+          <a:xfrm>
+            <a:off x="11231575" y="6382512"/>
+            <a:ext cx="457200" cy="274320"/>
+          </a:xfrm>
+          <a:prstGeom prst="rect">
+            <a:avLst/>
+          </a:prstGeom>
+          <a:noFill/>
+        </p:spPr>
+        <p:txBody>
+          <a:bodyPr wrap="square" lIns="0" tIns="0">
+            <a:spAutoFit/>
+          </a:bodyPr>
+          <a:lstStyle/>
+          <a:p>
+            <a:pPr algn="r">
+              <a:lnSpc>
+                <a:spcPct val="100000"/>
+              </a:lnSpc>
+              <a:spcAft>
+                <a:spcPts val="0"/>
+              </a:spcAft>
+              <a:defRPr sz="1000" b="0">
+                <a:solidFill>
+                  <a:srgbClr val="666666"/>
+                </a:solidFill>
+                <a:latin typeface="Calibri"/>
+              </a:defRPr>
+            </a:pPr>
+            <a:r>
+              <a:rPr sz="1000" b="0">
+                <a:solidFill>
+                  <a:srgbClr val="666666"/>
+                </a:solidFill>
+                <a:latin typeface="Calibri"/>
+              </a:rPr>
+              <a:t>12</a:t>
             </a:r>
           </a:p>
         </p:txBody>
@@ -4861,7 +5412,7 @@
 </p:sld>
 </file>
 
-<file path=ppt/slides/slide13.xml><?xml version="1.0" encoding="utf-8"?>
+<file path=ppt/slides/slide14.xml><?xml version="1.0" encoding="utf-8"?>
 <p:sld xmlns:a="http://schemas.openxmlformats.org/drawingml/2006/main" xmlns:p="http://schemas.openxmlformats.org/presentationml/2006/main" xmlns:r="http://schemas.openxmlformats.org/officeDocument/2006/relationships">
   <p:cSld>
     <p:spTree>
@@ -4912,7 +5463,7 @@
                 </a:solidFill>
                 <a:latin typeface="Calibri"/>
               </a:rPr>
-              <a:t>Do it now  -  three files, one program</a:t>
+              <a:t>Where we are</a:t>
             </a:r>
           </a:p>
         </p:txBody>
@@ -5052,7 +5603,7 @@
                 </a:solidFill>
                 <a:latin typeface="Calibri"/>
               </a:rPr>
-              <a:t>12</a:t>
+              <a:t>13</a:t>
             </a:r>
           </a:p>
         </p:txBody>
@@ -5065,19 +5616,21 @@
         </p:nvSpPr>
         <p:spPr>
           <a:xfrm>
-            <a:off x="502920" y="1188720"/>
-            <a:ext cx="11185855" cy="530352"/>
+            <a:off x="502920" y="2240280"/>
+            <a:ext cx="3631082" cy="1737360"/>
           </a:xfrm>
           <a:prstGeom prst="roundRect">
             <a:avLst>
-              <a:gd name="adj" fmla="val 4000"/>
+              <a:gd name="adj" fmla="val 8000"/>
             </a:avLst>
           </a:prstGeom>
           <a:solidFill>
-            <a:srgbClr val="0E7C86"/>
+            <a:srgbClr val="EEF3F8"/>
           </a:solidFill>
-          <a:ln>
-            <a:noFill/>
+          <a:ln w="12700">
+            <a:solidFill>
+              <a:srgbClr val="0E7C86"/>
+            </a:solidFill>
           </a:ln>
           <a:effectLst/>
         </p:spPr>
@@ -5096,36 +5649,31 @@
           </a:fontRef>
         </p:style>
         <p:txBody>
-          <a:bodyPr rtlCol="0" anchor="ctr" wrap="square" lIns="182880"/>
-          <a:lstStyle/>
-          <a:p>
-            <a:pPr algn="l"/>
-            <a:r>
-              <a:rPr sz="1300" b="1">
-                <a:solidFill>
-                  <a:srgbClr val="FFFFFF"/>
-                </a:solidFill>
-                <a:latin typeface="Calibri"/>
-              </a:rPr>
-              <a:t>UPLOAD AND RUN:   </a:t>
-            </a:r>
-            <a:r>
-              <a:rPr sz="1500" b="1">
-                <a:solidFill>
-                  <a:srgbClr val="FFFFFF"/>
-                </a:solidFill>
-                <a:latin typeface="Consolas"/>
-              </a:rPr>
-              <a:t>a1a_tabs_and_config</a:t>
-            </a:r>
-            <a:r>
-              <a:rPr sz="1200">
-                <a:solidFill>
-                  <a:srgbClr val="FFFFFF"/>
-                </a:solidFill>
-                <a:latin typeface="Calibri"/>
-              </a:rPr>
-              <a:t>     (30 minutes)</a:t>
+          <a:bodyPr rtlCol="0" anchor="ctr" wrap="square" lIns="73152" rIns="73152"/>
+          <a:lstStyle/>
+          <a:p>
+            <a:pPr algn="ctr">
+              <a:lnSpc>
+                <a:spcPct val="100000"/>
+              </a:lnSpc>
+              <a:spcAft>
+                <a:spcPts val="0"/>
+              </a:spcAft>
+              <a:defRPr sz="1700" b="0">
+                <a:solidFill>
+                  <a:srgbClr val="1F3A5F"/>
+                </a:solidFill>
+                <a:latin typeface="Calibri"/>
+              </a:defRPr>
+            </a:pPr>
+            <a:r>
+              <a:rPr sz="1700" b="0">
+                <a:solidFill>
+                  <a:srgbClr val="1F3A5F"/>
+                </a:solidFill>
+                <a:latin typeface="Calibri"/>
+              </a:rPr>
+              <a:t>Architecture</a:t>
             </a:r>
           </a:p>
         </p:txBody>
@@ -5138,8 +5686,8 @@
         </p:nvSpPr>
         <p:spPr>
           <a:xfrm>
-            <a:off x="502920" y="1901952"/>
-            <a:ext cx="5387187" cy="4361688"/>
+            <a:off x="502920" y="1856232"/>
+            <a:ext cx="3631082" cy="347472"/>
           </a:xfrm>
           <a:prstGeom prst="rect">
             <a:avLst/>
@@ -5152,187 +5700,14 @@
           </a:bodyPr>
           <a:lstStyle/>
           <a:p>
-            <a:pPr algn="l">
-              <a:lnSpc>
-                <a:spcPct val="100000"/>
-              </a:lnSpc>
-              <a:spcAft>
-                <a:spcPts val="400"/>
-              </a:spcAft>
-              <a:defRPr sz="1800" b="0">
-                <a:solidFill>
-                  <a:srgbClr val="222222"/>
-                </a:solidFill>
-                <a:latin typeface="Calibri"/>
-              </a:defRPr>
-            </a:pPr>
-            <a:r>
-              <a:rPr sz="1800" b="0">
-                <a:solidFill>
-                  <a:srgbClr val="222222"/>
-                </a:solidFill>
-                <a:latin typeface="Calibri"/>
-              </a:rPr>
-              <a:t>1.  Open it. Look at the tab bar: the sketch, Config.h, Blinker.ino.</a:t>
-            </a:r>
-          </a:p>
-          <a:p>
-            <a:pPr algn="l">
-              <a:lnSpc>
-                <a:spcPct val="100000"/>
-              </a:lnSpc>
-              <a:spcAft>
-                <a:spcPts val="400"/>
-              </a:spcAft>
-              <a:defRPr sz="1800" b="0">
-                <a:solidFill>
-                  <a:srgbClr val="222222"/>
-                </a:solidFill>
-                <a:latin typeface="Calibri"/>
-              </a:defRPr>
-            </a:pPr>
-            <a:r>
-              <a:rPr sz="1800" b="0">
-                <a:solidFill>
-                  <a:srgbClr val="222222"/>
-                </a:solidFill>
-                <a:latin typeface="Calibri"/>
-              </a:rPr>
-              <a:t>2.  Upload it. It blinks and reports, and swaps speed every 5 s.</a:t>
-            </a:r>
-          </a:p>
-          <a:p>
-            <a:pPr algn="l">
-              <a:lnSpc>
-                <a:spcPct val="100000"/>
-              </a:lnSpc>
-              <a:spcAft>
-                <a:spcPts val="400"/>
-              </a:spcAft>
-              <a:defRPr sz="1800" b="0">
-                <a:solidFill>
-                  <a:srgbClr val="222222"/>
-                </a:solidFill>
-                <a:latin typeface="Calibri"/>
-              </a:defRPr>
-            </a:pPr>
-            <a:r>
-              <a:rPr sz="1800" b="0">
-                <a:solidFill>
-                  <a:srgbClr val="222222"/>
-                </a:solidFill>
-                <a:latin typeface="Calibri"/>
-              </a:rPr>
-              <a:t>3.  Change BLINK_SLOW_MS in Config.h. Notice you touched neither .ino file.</a:t>
-            </a:r>
-          </a:p>
-          <a:p>
-            <a:pPr algn="l">
-              <a:lnSpc>
-                <a:spcPct val="100000"/>
-              </a:lnSpc>
-              <a:spcAft>
-                <a:spcPts val="400"/>
-              </a:spcAft>
-              <a:defRPr sz="1800" b="0">
-                <a:solidFill>
-                  <a:srgbClr val="222222"/>
-                </a:solidFill>
-                <a:latin typeface="Calibri"/>
-              </a:defRPr>
-            </a:pPr>
-            <a:r>
-              <a:rPr sz="1800" b="0">
-                <a:solidFill>
-                  <a:srgbClr val="222222"/>
-                </a:solidFill>
-                <a:latin typeface="Calibri"/>
-              </a:rPr>
-              <a:t>4.  Add a fourth file, Reporter.ino, with a function in it. Call it from loop(). Notice you declared it nowhere.</a:t>
-            </a:r>
-          </a:p>
-          <a:p>
-            <a:pPr algn="l">
-              <a:lnSpc>
-                <a:spcPct val="100000"/>
-              </a:lnSpc>
-              <a:spcAft>
-                <a:spcPts val="400"/>
-              </a:spcAft>
-              <a:defRPr sz="1800" b="0">
-                <a:solidFill>
-                  <a:srgbClr val="222222"/>
-                </a:solidFill>
-                <a:latin typeface="Calibri"/>
-              </a:defRPr>
-            </a:pPr>
-            <a:r>
-              <a:rPr sz="1800" b="0">
-                <a:solidFill>
-                  <a:srgbClr val="222222"/>
-                </a:solidFill>
-                <a:latin typeface="Calibri"/>
-              </a:rPr>
-              <a:t>5.  Now MOVE the BlinkMode enum out of Config.h and into Blinker.ino. Compile. READ THE ERROR CAREFULLY.</a:t>
-            </a:r>
-          </a:p>
-          <a:p>
-            <a:pPr algn="l">
-              <a:lnSpc>
-                <a:spcPct val="100000"/>
-              </a:lnSpc>
-              <a:spcAft>
-                <a:spcPts val="400"/>
-              </a:spcAft>
-              <a:defRPr sz="1800" b="0">
-                <a:solidFill>
-                  <a:srgbClr val="222222"/>
-                </a:solidFill>
-                <a:latin typeface="Calibri"/>
-              </a:defRPr>
-            </a:pPr>
-            <a:r>
-              <a:rPr sz="1800" b="0">
-                <a:solidFill>
-                  <a:srgbClr val="222222"/>
-                </a:solidFill>
-                <a:latin typeface="Calibri"/>
-              </a:rPr>
-              <a:t>6.  Put it back.</a:t>
-            </a:r>
-          </a:p>
-        </p:txBody>
-      </p:sp>
-      <p:sp>
-        <p:nvSpPr>
-          <p:cNvPr id="8" name="TextBox 7"/>
-          <p:cNvSpPr txBox="1"/>
-          <p:nvPr/>
-        </p:nvSpPr>
-        <p:spPr>
-          <a:xfrm>
-            <a:off x="6301587" y="1901952"/>
-            <a:ext cx="5387187" cy="365760"/>
-          </a:xfrm>
-          <a:prstGeom prst="rect">
-            <a:avLst/>
-          </a:prstGeom>
-          <a:noFill/>
-        </p:spPr>
-        <p:txBody>
-          <a:bodyPr wrap="square" lIns="0" tIns="0" rIns="0" bIns="0">
-            <a:spAutoFit/>
-          </a:bodyPr>
-          <a:lstStyle/>
-          <a:p>
-            <a:pPr algn="l">
-              <a:lnSpc>
-                <a:spcPct val="100000"/>
-              </a:lnSpc>
-              <a:spcAft>
-                <a:spcPts val="200"/>
-              </a:spcAft>
-              <a:defRPr sz="1800" b="1">
+            <a:pPr algn="ctr">
+              <a:lnSpc>
+                <a:spcPct val="100000"/>
+              </a:lnSpc>
+              <a:spcAft>
+                <a:spcPts val="600"/>
+              </a:spcAft>
+              <a:defRPr sz="1200" b="1">
                 <a:solidFill>
                   <a:srgbClr val="0E7C86"/>
                 </a:solidFill>
@@ -5340,269 +5715,40 @@
               </a:defRPr>
             </a:pPr>
             <a:r>
-              <a:rPr sz="1800" b="1">
+              <a:rPr sz="1200" b="1">
                 <a:solidFill>
                   <a:srgbClr val="0E7C86"/>
                 </a:solidFill>
                 <a:latin typeface="Calibri"/>
               </a:rPr>
-              <a:t>What you should see</a:t>
-            </a:r>
-          </a:p>
-        </p:txBody>
-      </p:sp>
-      <p:sp>
-        <p:nvSpPr>
-          <p:cNvPr id="9" name="TextBox 8"/>
-          <p:cNvSpPr txBox="1"/>
-          <p:nvPr/>
-        </p:nvSpPr>
-        <p:spPr>
-          <a:xfrm>
-            <a:off x="6301587" y="2304288"/>
-            <a:ext cx="5387187" cy="1778508"/>
-          </a:xfrm>
-          <a:prstGeom prst="rect">
-            <a:avLst/>
-          </a:prstGeom>
-          <a:noFill/>
-        </p:spPr>
-        <p:txBody>
-          <a:bodyPr wrap="square" lIns="0" tIns="0" rIns="0" bIns="0">
-            <a:spAutoFit/>
-          </a:bodyPr>
-          <a:lstStyle/>
-          <a:p>
-            <a:pPr algn="l">
-              <a:lnSpc>
-                <a:spcPct val="100000"/>
-              </a:lnSpc>
-              <a:spcAft>
-                <a:spcPts val="200"/>
-              </a:spcAft>
-              <a:defRPr sz="1800" b="0">
-                <a:solidFill>
-                  <a:srgbClr val="222222"/>
-                </a:solidFill>
-                <a:latin typeface="Calibri"/>
-              </a:defRPr>
-            </a:pPr>
-            <a:r>
-              <a:rPr sz="1800" b="0">
-                <a:solidFill>
-                  <a:srgbClr val="222222"/>
-                </a:solidFill>
-                <a:latin typeface="Calibri"/>
-              </a:rPr>
-              <a:t>Step 5 fails with an error about BlinkMode not naming a type, pointing at a line you did not write.</a:t>
-            </a:r>
-          </a:p>
-        </p:txBody>
-      </p:sp>
-      <p:sp>
-        <p:nvSpPr>
-          <p:cNvPr id="10" name="TextBox 9"/>
-          <p:cNvSpPr txBox="1"/>
-          <p:nvPr/>
-        </p:nvSpPr>
-        <p:spPr>
-          <a:xfrm>
-            <a:off x="6301587" y="4119372"/>
-            <a:ext cx="5387187" cy="365760"/>
-          </a:xfrm>
-          <a:prstGeom prst="rect">
-            <a:avLst/>
-          </a:prstGeom>
-          <a:noFill/>
-        </p:spPr>
-        <p:txBody>
-          <a:bodyPr wrap="square" lIns="0" tIns="0" rIns="0" bIns="0">
-            <a:spAutoFit/>
-          </a:bodyPr>
-          <a:lstStyle/>
-          <a:p>
-            <a:pPr algn="l">
-              <a:lnSpc>
-                <a:spcPct val="100000"/>
-              </a:lnSpc>
-              <a:spcAft>
-                <a:spcPts val="200"/>
-              </a:spcAft>
-              <a:defRPr sz="1800" b="1">
-                <a:solidFill>
-                  <a:srgbClr val="0E7C86"/>
-                </a:solidFill>
-                <a:latin typeface="Calibri"/>
-              </a:defRPr>
-            </a:pPr>
-            <a:r>
-              <a:rPr sz="1800" b="1">
-                <a:solidFill>
-                  <a:srgbClr val="0E7C86"/>
-                </a:solidFill>
-                <a:latin typeface="Calibri"/>
-              </a:rPr>
-              <a:t>Answer these</a:t>
-            </a:r>
-          </a:p>
-        </p:txBody>
-      </p:sp>
-      <p:sp>
-        <p:nvSpPr>
-          <p:cNvPr id="11" name="TextBox 10"/>
-          <p:cNvSpPr txBox="1"/>
-          <p:nvPr/>
-        </p:nvSpPr>
-        <p:spPr>
-          <a:xfrm>
-            <a:off x="6301587" y="4521708"/>
-            <a:ext cx="5387187" cy="1778508"/>
-          </a:xfrm>
-          <a:prstGeom prst="rect">
-            <a:avLst/>
-          </a:prstGeom>
-          <a:noFill/>
-        </p:spPr>
-        <p:txBody>
-          <a:bodyPr wrap="square" lIns="0" tIns="0" rIns="0" bIns="0">
-            <a:spAutoFit/>
-          </a:bodyPr>
-          <a:lstStyle/>
-          <a:p>
-            <a:pPr algn="l">
-              <a:lnSpc>
-                <a:spcPct val="100000"/>
-              </a:lnSpc>
-              <a:spcAft>
-                <a:spcPts val="200"/>
-              </a:spcAft>
-              <a:defRPr sz="1800" b="0">
-                <a:solidFill>
-                  <a:srgbClr val="222222"/>
-                </a:solidFill>
-                <a:latin typeface="Calibri"/>
-              </a:defRPr>
-            </a:pPr>
-            <a:r>
-              <a:rPr sz="1800" b="0">
-                <a:solidFill>
-                  <a:srgbClr val="222222"/>
-                </a:solidFill>
-                <a:latin typeface="Calibri"/>
-              </a:rPr>
-              <a:t>Whose line is the error actually on?</a:t>
-            </a:r>
-          </a:p>
-          <a:p>
-            <a:pPr algn="l">
-              <a:lnSpc>
-                <a:spcPct val="100000"/>
-              </a:lnSpc>
-              <a:spcAft>
-                <a:spcPts val="200"/>
-              </a:spcAft>
-              <a:defRPr sz="1800" b="0">
-                <a:solidFill>
-                  <a:srgbClr val="222222"/>
-                </a:solidFill>
-                <a:latin typeface="Calibri"/>
-              </a:defRPr>
-            </a:pPr>
-            <a:r>
-              <a:rPr sz="1800" b="0">
-                <a:solidFill>
-                  <a:srgbClr val="222222"/>
-                </a:solidFill>
-                <a:latin typeface="Calibri"/>
-              </a:rPr>
-              <a:t>Why does moving a FUNCTION between tabs work fine, but moving a TYPE does not?</a:t>
-            </a:r>
-          </a:p>
-        </p:txBody>
-      </p:sp>
-    </p:spTree>
-  </p:cSld>
-  <p:clrMapOvr>
-    <a:masterClrMapping/>
-  </p:clrMapOvr>
-</p:sld>
-</file>
-
-<file path=ppt/slides/slide14.xml><?xml version="1.0" encoding="utf-8"?>
-<p:sld xmlns:a="http://schemas.openxmlformats.org/drawingml/2006/main" xmlns:p="http://schemas.openxmlformats.org/presentationml/2006/main" xmlns:r="http://schemas.openxmlformats.org/officeDocument/2006/relationships">
-  <p:cSld>
-    <p:spTree>
-      <p:nvGrpSpPr>
-        <p:cNvPr id="1" name=""/>
-        <p:cNvGrpSpPr/>
-        <p:nvPr/>
-      </p:nvGrpSpPr>
-      <p:grpSpPr/>
-      <p:sp>
-        <p:nvSpPr>
-          <p:cNvPr id="2" name="Title 1"/>
-          <p:cNvSpPr>
-            <a:spLocks noGrp="1"/>
-          </p:cNvSpPr>
-          <p:nvPr>
-            <p:ph type="title"/>
-          </p:nvPr>
-        </p:nvSpPr>
-        <p:spPr>
-          <a:xfrm>
-            <a:off x="502920" y="274320"/>
-            <a:ext cx="11185855" cy="777240"/>
-          </a:xfrm>
-        </p:spPr>
-        <p:txBody>
-          <a:bodyPr wrap="square" anchor="b"/>
-          <a:lstStyle/>
-          <a:p>
-            <a:pPr algn="l">
-              <a:lnSpc>
-                <a:spcPct val="100000"/>
-              </a:lnSpc>
-              <a:spcAft>
-                <a:spcPts val="0"/>
-              </a:spcAft>
-              <a:defRPr sz="2800" b="1">
-                <a:solidFill>
-                  <a:srgbClr val="1F3A5F"/>
-                </a:solidFill>
-                <a:latin typeface="Calibri"/>
-              </a:defRPr>
-            </a:pPr>
-            <a:r>
-              <a:rPr sz="2800" b="1">
-                <a:solidFill>
-                  <a:srgbClr val="1F3A5F"/>
-                </a:solidFill>
-                <a:latin typeface="Calibri"/>
-              </a:rPr>
-              <a:t>Why a console changes what a vehicle is</a:t>
-            </a:r>
-          </a:p>
-        </p:txBody>
-      </p:sp>
-      <p:sp>
-        <p:nvSpPr>
-          <p:cNvPr id="3" name="Rectangle 2"/>
+              <a:t>done</a:t>
+            </a:r>
+          </a:p>
+        </p:txBody>
+      </p:sp>
+      <p:sp>
+        <p:nvSpPr>
+          <p:cNvPr id="8" name="Rounded Rectangle 7"/>
           <p:cNvSpPr/>
           <p:nvPr/>
         </p:nvSpPr>
         <p:spPr>
           <a:xfrm>
-            <a:off x="502920" y="1097280"/>
-            <a:ext cx="11185855" cy="19050"/>
-          </a:xfrm>
-          <a:prstGeom prst="rect">
-            <a:avLst/>
+            <a:off x="4280306" y="2240280"/>
+            <a:ext cx="3631082" cy="1737360"/>
+          </a:xfrm>
+          <a:prstGeom prst="roundRect">
+            <a:avLst>
+              <a:gd name="adj" fmla="val 8000"/>
+            </a:avLst>
           </a:prstGeom>
           <a:solidFill>
-            <a:srgbClr val="C8D2DE"/>
+            <a:srgbClr val="D6ECEE"/>
           </a:solidFill>
-          <a:ln>
-            <a:noFill/>
+          <a:ln w="25400">
+            <a:solidFill>
+              <a:srgbClr val="0E7C86"/>
+            </a:solidFill>
           </a:ln>
           <a:effectLst/>
         </p:spPr>
@@ -5621,23 +5767,45 @@
           </a:fontRef>
         </p:style>
         <p:txBody>
-          <a:bodyPr rtlCol="0" anchor="ctr"/>
-          <a:lstStyle/>
-          <a:p>
-            <a:pPr algn="ctr"/>
-          </a:p>
-        </p:txBody>
-      </p:sp>
-      <p:sp>
-        <p:nvSpPr>
-          <p:cNvPr id="4" name="TextBox 3"/>
+          <a:bodyPr rtlCol="0" anchor="ctr" wrap="square" lIns="73152" rIns="73152"/>
+          <a:lstStyle/>
+          <a:p>
+            <a:pPr algn="ctr">
+              <a:lnSpc>
+                <a:spcPct val="100000"/>
+              </a:lnSpc>
+              <a:spcAft>
+                <a:spcPts val="0"/>
+              </a:spcAft>
+              <a:defRPr sz="1700" b="1">
+                <a:solidFill>
+                  <a:srgbClr val="1F3A5F"/>
+                </a:solidFill>
+                <a:latin typeface="Calibri"/>
+              </a:defRPr>
+            </a:pPr>
+            <a:r>
+              <a:rPr sz="1700" b="1">
+                <a:solidFill>
+                  <a:srgbClr val="1F3A5F"/>
+                </a:solidFill>
+                <a:latin typeface="Calibri"/>
+              </a:rPr>
+              <a:t>Tabs and Config.h</a:t>
+            </a:r>
+          </a:p>
+        </p:txBody>
+      </p:sp>
+      <p:sp>
+        <p:nvSpPr>
+          <p:cNvPr id="9" name="TextBox 8"/>
           <p:cNvSpPr txBox="1"/>
           <p:nvPr/>
         </p:nvSpPr>
         <p:spPr>
           <a:xfrm>
-            <a:off x="502920" y="6382512"/>
-            <a:ext cx="10545775" cy="274320"/>
+            <a:off x="4280306" y="1856232"/>
+            <a:ext cx="3631082" cy="347472"/>
           </a:xfrm>
           <a:prstGeom prst="rect">
             <a:avLst/>
@@ -5645,115 +5813,19 @@
           <a:noFill/>
         </p:spPr>
         <p:txBody>
-          <a:bodyPr wrap="square" lIns="0" tIns="0">
-            <a:spAutoFit/>
-          </a:bodyPr>
-          <a:lstStyle/>
-          <a:p>
-            <a:pPr algn="l">
-              <a:lnSpc>
-                <a:spcPct val="100000"/>
-              </a:lnSpc>
-              <a:spcAft>
-                <a:spcPts val="0"/>
-              </a:spcAft>
-              <a:defRPr sz="1000" b="0">
-                <a:solidFill>
-                  <a:srgbClr val="666666"/>
-                </a:solidFill>
-                <a:latin typeface="Calibri"/>
-              </a:defRPr>
-            </a:pPr>
-            <a:r>
-              <a:rPr sz="1000" b="0">
-                <a:solidFill>
-                  <a:srgbClr val="666666"/>
-                </a:solidFill>
-                <a:latin typeface="Calibri"/>
-              </a:rPr>
-              <a:t>Pathfinder Advanced - Op Program 12  |  Lesson 1</a:t>
-            </a:r>
-          </a:p>
-        </p:txBody>
-      </p:sp>
-      <p:sp>
-        <p:nvSpPr>
-          <p:cNvPr id="5" name="TextBox 4"/>
-          <p:cNvSpPr txBox="1"/>
-          <p:nvPr/>
-        </p:nvSpPr>
-        <p:spPr>
-          <a:xfrm>
-            <a:off x="11231575" y="6382512"/>
-            <a:ext cx="457200" cy="274320"/>
-          </a:xfrm>
-          <a:prstGeom prst="rect">
-            <a:avLst/>
-          </a:prstGeom>
-          <a:noFill/>
-        </p:spPr>
-        <p:txBody>
-          <a:bodyPr wrap="square" lIns="0" tIns="0">
-            <a:spAutoFit/>
-          </a:bodyPr>
-          <a:lstStyle/>
-          <a:p>
-            <a:pPr algn="r">
-              <a:lnSpc>
-                <a:spcPct val="100000"/>
-              </a:lnSpc>
-              <a:spcAft>
-                <a:spcPts val="0"/>
-              </a:spcAft>
-              <a:defRPr sz="1000" b="0">
-                <a:solidFill>
-                  <a:srgbClr val="666666"/>
-                </a:solidFill>
-                <a:latin typeface="Calibri"/>
-              </a:defRPr>
-            </a:pPr>
-            <a:r>
-              <a:rPr sz="1000" b="0">
-                <a:solidFill>
-                  <a:srgbClr val="666666"/>
-                </a:solidFill>
-                <a:latin typeface="Calibri"/>
-              </a:rPr>
-              <a:t>13</a:t>
-            </a:r>
-          </a:p>
-        </p:txBody>
-      </p:sp>
-      <p:sp>
-        <p:nvSpPr>
-          <p:cNvPr id="6" name="TextBox 5"/>
-          <p:cNvSpPr txBox="1"/>
-          <p:nvPr/>
-        </p:nvSpPr>
-        <p:spPr>
-          <a:xfrm>
-            <a:off x="502920" y="1188720"/>
-            <a:ext cx="11185855" cy="530352"/>
-          </a:xfrm>
-          <a:prstGeom prst="rect">
-            <a:avLst/>
-          </a:prstGeom>
-          <a:noFill/>
-        </p:spPr>
-        <p:txBody>
           <a:bodyPr wrap="square" lIns="0" tIns="0" rIns="0" bIns="0">
             <a:spAutoFit/>
           </a:bodyPr>
           <a:lstStyle/>
           <a:p>
-            <a:pPr algn="l">
+            <a:pPr algn="ctr">
               <a:lnSpc>
                 <a:spcPct val="100000"/>
               </a:lnSpc>
               <a:spcAft>
                 <a:spcPts val="600"/>
               </a:spcAft>
-              <a:defRPr sz="1900" b="1">
+              <a:defRPr sz="1200" b="1">
                 <a:solidFill>
                   <a:srgbClr val="0E7C86"/>
                 </a:solidFill>
@@ -5761,243 +5833,83 @@
               </a:defRPr>
             </a:pPr>
             <a:r>
-              <a:rPr sz="1900" b="1">
+              <a:rPr sz="1200" b="1">
                 <a:solidFill>
                   <a:srgbClr val="0E7C86"/>
                 </a:solidFill>
                 <a:latin typeface="Calibri"/>
               </a:rPr>
-              <a:t>From opaque binary to something you can ask questions</a:t>
-            </a:r>
-          </a:p>
-        </p:txBody>
-      </p:sp>
-      <p:sp>
-        <p:nvSpPr>
-          <p:cNvPr id="7" name="TextBox 6"/>
-          <p:cNvSpPr txBox="1"/>
+              <a:t>NOW</a:t>
+            </a:r>
+          </a:p>
+        </p:txBody>
+      </p:sp>
+      <p:sp>
+        <p:nvSpPr>
+          <p:cNvPr id="10" name="Rounded Rectangle 9"/>
+          <p:cNvSpPr/>
           <p:nvPr/>
         </p:nvSpPr>
         <p:spPr>
           <a:xfrm>
-            <a:off x="502920" y="1755648"/>
-            <a:ext cx="11185855" cy="4507992"/>
-          </a:xfrm>
-          <a:prstGeom prst="rect">
-            <a:avLst/>
+            <a:off x="8057692" y="2240280"/>
+            <a:ext cx="3631082" cy="1737360"/>
+          </a:xfrm>
+          <a:prstGeom prst="roundRect">
+            <a:avLst>
+              <a:gd name="adj" fmla="val 8000"/>
+            </a:avLst>
           </a:prstGeom>
-          <a:noFill/>
-        </p:spPr>
-        <p:txBody>
-          <a:bodyPr wrap="square" lIns="0" tIns="0" rIns="0" bIns="0">
-            <a:spAutoFit/>
-          </a:bodyPr>
-          <a:lstStyle/>
-          <a:p>
-            <a:pPr algn="l">
-              <a:lnSpc>
-                <a:spcPct val="100000"/>
-              </a:lnSpc>
-              <a:spcAft>
-                <a:spcPts val="900"/>
-              </a:spcAft>
-              <a:defRPr sz="1800" b="0">
-                <a:solidFill>
-                  <a:srgbClr val="222222"/>
-                </a:solidFill>
-                <a:latin typeface="Calibri"/>
-              </a:defRPr>
-            </a:pPr>
-            <a:r>
-              <a:rPr sz="1800" b="0">
-                <a:solidFill>
-                  <a:srgbClr val="222222"/>
-                </a:solidFill>
-                <a:latin typeface="Calibri"/>
-              </a:rPr>
-              <a:t>A compiled binary is opaque. You can see what it does, not what it thinks.</a:t>
-            </a:r>
-          </a:p>
-          <a:p>
-            <a:pPr algn="l">
-              <a:lnSpc>
-                <a:spcPct val="100000"/>
-              </a:lnSpc>
-              <a:spcAft>
-                <a:spcPts val="900"/>
-              </a:spcAft>
-              <a:defRPr sz="1800" b="0">
-                <a:solidFill>
-                  <a:srgbClr val="222222"/>
-                </a:solidFill>
-                <a:latin typeface="Calibri"/>
-              </a:defRPr>
-            </a:pPr>
-          </a:p>
-          <a:p>
-            <a:pPr algn="l">
-              <a:lnSpc>
-                <a:spcPct val="100000"/>
-              </a:lnSpc>
-              <a:spcAft>
-                <a:spcPts val="900"/>
-              </a:spcAft>
-              <a:defRPr sz="1800" b="0">
-                <a:solidFill>
-                  <a:srgbClr val="222222"/>
-                </a:solidFill>
-                <a:latin typeface="Calibri"/>
-              </a:defRPr>
-            </a:pPr>
-            <a:r>
-              <a:rPr sz="1800" b="0">
-                <a:solidFill>
-                  <a:srgbClr val="222222"/>
-                </a:solidFill>
-                <a:latin typeface="Calibri"/>
-              </a:rPr>
-              <a:t>A serial console turns it into something you can interrogate:</a:t>
-            </a:r>
-          </a:p>
-          <a:p>
-            <a:pPr lvl="1" algn="l">
-              <a:lnSpc>
-                <a:spcPct val="100000"/>
-              </a:lnSpc>
-              <a:spcAft>
-                <a:spcPts val="900"/>
-              </a:spcAft>
-              <a:defRPr sz="1800" b="0">
-                <a:solidFill>
-                  <a:srgbClr val="222222"/>
-                </a:solidFill>
-                <a:latin typeface="Calibri"/>
-              </a:defRPr>
-            </a:pPr>
-            <a:r>
-              <a:rPr sz="1800" b="0">
-                <a:solidFill>
-                  <a:srgbClr val="222222"/>
-                </a:solidFill>
-                <a:latin typeface="Calibri"/>
-              </a:rPr>
-              <a:t>help      what can this thing do</a:t>
-            </a:r>
-          </a:p>
-          <a:p>
-            <a:pPr lvl="1" algn="l">
-              <a:lnSpc>
-                <a:spcPct val="100000"/>
-              </a:lnSpc>
-              <a:spcAft>
-                <a:spcPts val="900"/>
-              </a:spcAft>
-              <a:defRPr sz="1800" b="0">
-                <a:solidFill>
-                  <a:srgbClr val="222222"/>
-                </a:solidFill>
-                <a:latin typeface="Calibri"/>
-              </a:defRPr>
-            </a:pPr>
-            <a:r>
-              <a:rPr sz="1800" b="0">
-                <a:solidFill>
-                  <a:srgbClr val="222222"/>
-                </a:solidFill>
-                <a:latin typeface="Calibri"/>
-              </a:rPr>
-              <a:t>diag      what does it think is happening right now</a:t>
-            </a:r>
-          </a:p>
-          <a:p>
-            <a:pPr lvl="1" algn="l">
-              <a:lnSpc>
-                <a:spcPct val="100000"/>
-              </a:lnSpc>
-              <a:spcAft>
-                <a:spcPts val="900"/>
-              </a:spcAft>
-              <a:defRPr sz="1800" b="0">
-                <a:solidFill>
-                  <a:srgbClr val="222222"/>
-                </a:solidFill>
-                <a:latin typeface="Calibri"/>
-              </a:defRPr>
-            </a:pPr>
-            <a:r>
-              <a:rPr sz="1800" b="0">
-                <a:solidFill>
-                  <a:srgbClr val="222222"/>
-                </a:solidFill>
-                <a:latin typeface="Calibri"/>
-              </a:rPr>
-              <a:t>pair      change its behaviour without a laptop full of toolchains</a:t>
-            </a:r>
-          </a:p>
-          <a:p>
-            <a:pPr lvl="1" algn="l">
-              <a:lnSpc>
-                <a:spcPct val="100000"/>
-              </a:lnSpc>
-              <a:spcAft>
-                <a:spcPts val="900"/>
-              </a:spcAft>
-              <a:defRPr sz="1800" b="0">
-                <a:solidFill>
-                  <a:srgbClr val="222222"/>
-                </a:solidFill>
-                <a:latin typeface="Calibri"/>
-              </a:defRPr>
-            </a:pPr>
-            <a:r>
-              <a:rPr sz="1800" b="0">
-                <a:solidFill>
-                  <a:srgbClr val="222222"/>
-                </a:solidFill>
-                <a:latin typeface="Calibri"/>
-              </a:rPr>
-              <a:t>dynamics  retune the deadzones between races</a:t>
-            </a:r>
-          </a:p>
-          <a:p>
-            <a:pPr algn="l">
-              <a:lnSpc>
-                <a:spcPct val="100000"/>
-              </a:lnSpc>
-              <a:spcAft>
-                <a:spcPts val="900"/>
-              </a:spcAft>
-              <a:defRPr sz="1800" b="0">
-                <a:solidFill>
-                  <a:srgbClr val="222222"/>
-                </a:solidFill>
-                <a:latin typeface="Calibri"/>
-              </a:defRPr>
-            </a:pPr>
-          </a:p>
-          <a:p>
-            <a:pPr algn="l">
-              <a:lnSpc>
-                <a:spcPct val="100000"/>
-              </a:lnSpc>
-              <a:spcAft>
-                <a:spcPts val="900"/>
-              </a:spcAft>
-              <a:defRPr sz="1800" b="0">
-                <a:solidFill>
-                  <a:srgbClr val="222222"/>
-                </a:solidFill>
-                <a:latin typeface="Calibri"/>
-              </a:defRPr>
-            </a:pPr>
-            <a:r>
-              <a:rPr sz="1800" b="0">
-                <a:solidFill>
-                  <a:srgbClr val="222222"/>
-                </a:solidFill>
-                <a:latin typeface="Calibri"/>
-              </a:rPr>
-              <a:t>The practical difference: at a track event, tuning a vehicle stops being an edit-compile-upload cycle and becomes a conversation. On Op 12 those settings then go to EEPROM, so the tuning survives.</a:t>
+          <a:solidFill>
+            <a:srgbClr val="FFFFFF"/>
+          </a:solidFill>
+          <a:ln w="12700">
+            <a:solidFill>
+              <a:srgbClr val="C8D2DE"/>
+            </a:solidFill>
+          </a:ln>
+          <a:effectLst/>
+        </p:spPr>
+        <p:style>
+          <a:lnRef idx="1">
+            <a:schemeClr val="accent1"/>
+          </a:lnRef>
+          <a:fillRef idx="3">
+            <a:schemeClr val="accent1"/>
+          </a:fillRef>
+          <a:effectRef idx="2">
+            <a:schemeClr val="accent1"/>
+          </a:effectRef>
+          <a:fontRef idx="minor">
+            <a:schemeClr val="lt1"/>
+          </a:fontRef>
+        </p:style>
+        <p:txBody>
+          <a:bodyPr rtlCol="0" anchor="ctr" wrap="square" lIns="73152" rIns="73152"/>
+          <a:lstStyle/>
+          <a:p>
+            <a:pPr algn="ctr">
+              <a:lnSpc>
+                <a:spcPct val="100000"/>
+              </a:lnSpc>
+              <a:spcAft>
+                <a:spcPts val="0"/>
+              </a:spcAft>
+              <a:defRPr sz="1700" b="0">
+                <a:solidFill>
+                  <a:srgbClr val="666666"/>
+                </a:solidFill>
+                <a:latin typeface="Calibri"/>
+              </a:defRPr>
+            </a:pPr>
+            <a:r>
+              <a:rPr sz="1700" b="0">
+                <a:solidFill>
+                  <a:srgbClr val="666666"/>
+                </a:solidFill>
+                <a:latin typeface="Calibri"/>
+              </a:rPr>
+              <a:t>The console</a:t>
             </a:r>
           </a:p>
         </p:txBody>
@@ -6061,7 +5973,7 @@
                 </a:solidFill>
                 <a:latin typeface="Calibri"/>
               </a:rPr>
-              <a:t>Why a console changes what a vehicle is  (continued)</a:t>
+              <a:t>Do it now  -  three files, one program</a:t>
             </a:r>
           </a:p>
         </p:txBody>
@@ -6208,14 +6120,87 @@
       </p:sp>
       <p:sp>
         <p:nvSpPr>
-          <p:cNvPr id="6" name="TextBox 5"/>
+          <p:cNvPr id="6" name="Rounded Rectangle 5"/>
+          <p:cNvSpPr/>
+          <p:nvPr/>
+        </p:nvSpPr>
+        <p:spPr>
+          <a:xfrm>
+            <a:off x="502920" y="1188720"/>
+            <a:ext cx="11185855" cy="530352"/>
+          </a:xfrm>
+          <a:prstGeom prst="roundRect">
+            <a:avLst>
+              <a:gd name="adj" fmla="val 4000"/>
+            </a:avLst>
+          </a:prstGeom>
+          <a:solidFill>
+            <a:srgbClr val="0E7C86"/>
+          </a:solidFill>
+          <a:ln>
+            <a:noFill/>
+          </a:ln>
+          <a:effectLst/>
+        </p:spPr>
+        <p:style>
+          <a:lnRef idx="1">
+            <a:schemeClr val="accent1"/>
+          </a:lnRef>
+          <a:fillRef idx="3">
+            <a:schemeClr val="accent1"/>
+          </a:fillRef>
+          <a:effectRef idx="2">
+            <a:schemeClr val="accent1"/>
+          </a:effectRef>
+          <a:fontRef idx="minor">
+            <a:schemeClr val="lt1"/>
+          </a:fontRef>
+        </p:style>
+        <p:txBody>
+          <a:bodyPr rtlCol="0" anchor="ctr" wrap="square" lIns="182880"/>
+          <a:lstStyle/>
+          <a:p>
+            <a:pPr algn="l"/>
+            <a:r>
+              <a:rPr sz="1300" b="1">
+                <a:solidFill>
+                  <a:srgbClr val="FFFFFF"/>
+                </a:solidFill>
+                <a:latin typeface="Calibri"/>
+              </a:rPr>
+              <a:t>UPLOAD AND RUN:   </a:t>
+            </a:r>
+            <a:r>
+              <a:rPr sz="1500" b="1">
+                <a:solidFill>
+                  <a:srgbClr val="FFFFFF"/>
+                </a:solidFill>
+                <a:latin typeface="Consolas"/>
+              </a:rPr>
+              <a:t>a1a_tabs_and_config</a:t>
+            </a:r>
+            <a:r>
+              <a:rPr sz="1200">
+                <a:solidFill>
+                  <a:srgbClr val="FFFFFF"/>
+                </a:solidFill>
+                <a:latin typeface="Calibri"/>
+              </a:rPr>
+              <a:t>     (30 minutes)</a:t>
+            </a:r>
+          </a:p>
+        </p:txBody>
+      </p:sp>
+      <p:sp>
+        <p:nvSpPr>
+          <p:cNvPr id="7" name="TextBox 6"/>
           <p:cNvSpPr txBox="1"/>
           <p:nvPr/>
         </p:nvSpPr>
         <p:spPr>
           <a:xfrm>
-            <a:off x="502920" y="1188720"/>
-            <a:ext cx="11185855" cy="5074920"/>
+            <a:off x="502920" y="1901952"/>
+            <a:ext cx="5387187" cy="4361688"/>
           </a:xfrm>
           <a:prstGeom prst="rect">
             <a:avLst/>
@@ -6233,7 +6218,7 @@
                 <a:spcPct val="100000"/>
               </a:lnSpc>
               <a:spcAft>
-                <a:spcPts val="900"/>
+                <a:spcPts val="400"/>
               </a:spcAft>
               <a:defRPr sz="1800" b="0">
                 <a:solidFill>
@@ -6242,14 +6227,23 @@
                 <a:latin typeface="Calibri"/>
               </a:defRPr>
             </a:pPr>
-          </a:p>
-          <a:p>
-            <a:pPr algn="l">
-              <a:lnSpc>
-                <a:spcPct val="100000"/>
-              </a:lnSpc>
-              <a:spcAft>
-                <a:spcPts val="900"/>
+            <a:r>
+              <a:rPr sz="1800" b="0">
+                <a:solidFill>
+                  <a:srgbClr val="222222"/>
+                </a:solidFill>
+                <a:latin typeface="Calibri"/>
+              </a:rPr>
+              <a:t>1.  Open it. Look at the tab bar: the sketch, Config.h, Blinker.ino.</a:t>
+            </a:r>
+          </a:p>
+          <a:p>
+            <a:pPr algn="l">
+              <a:lnSpc>
+                <a:spcPct val="100000"/>
+              </a:lnSpc>
+              <a:spcAft>
+                <a:spcPts val="400"/>
               </a:spcAft>
               <a:defRPr sz="1800" b="0">
                 <a:solidFill>
@@ -6265,7 +6259,324 @@
                 </a:solidFill>
                 <a:latin typeface="Calibri"/>
               </a:rPr>
-              <a:t>This is not a toy idea. Industrial controllers, network switches and flight computers all have one, for exactly this reason.</a:t>
+              <a:t>2.  Upload it. It blinks and reports, and swaps speed every 5 s.</a:t>
+            </a:r>
+          </a:p>
+          <a:p>
+            <a:pPr algn="l">
+              <a:lnSpc>
+                <a:spcPct val="100000"/>
+              </a:lnSpc>
+              <a:spcAft>
+                <a:spcPts val="400"/>
+              </a:spcAft>
+              <a:defRPr sz="1800" b="0">
+                <a:solidFill>
+                  <a:srgbClr val="222222"/>
+                </a:solidFill>
+                <a:latin typeface="Calibri"/>
+              </a:defRPr>
+            </a:pPr>
+            <a:r>
+              <a:rPr sz="1800" b="0">
+                <a:solidFill>
+                  <a:srgbClr val="222222"/>
+                </a:solidFill>
+                <a:latin typeface="Calibri"/>
+              </a:rPr>
+              <a:t>3.  Change BLINK_SLOW_MS in Config.h. Notice you touched neither .ino file.</a:t>
+            </a:r>
+          </a:p>
+          <a:p>
+            <a:pPr algn="l">
+              <a:lnSpc>
+                <a:spcPct val="100000"/>
+              </a:lnSpc>
+              <a:spcAft>
+                <a:spcPts val="400"/>
+              </a:spcAft>
+              <a:defRPr sz="1800" b="0">
+                <a:solidFill>
+                  <a:srgbClr val="222222"/>
+                </a:solidFill>
+                <a:latin typeface="Calibri"/>
+              </a:defRPr>
+            </a:pPr>
+            <a:r>
+              <a:rPr sz="1800" b="0">
+                <a:solidFill>
+                  <a:srgbClr val="222222"/>
+                </a:solidFill>
+                <a:latin typeface="Calibri"/>
+              </a:rPr>
+              <a:t>4.  Add a fourth file, Reporter.ino, with a function in it. Call it from loop(). Notice you declared it nowhere.</a:t>
+            </a:r>
+          </a:p>
+          <a:p>
+            <a:pPr algn="l">
+              <a:lnSpc>
+                <a:spcPct val="100000"/>
+              </a:lnSpc>
+              <a:spcAft>
+                <a:spcPts val="400"/>
+              </a:spcAft>
+              <a:defRPr sz="1800" b="0">
+                <a:solidFill>
+                  <a:srgbClr val="222222"/>
+                </a:solidFill>
+                <a:latin typeface="Calibri"/>
+              </a:defRPr>
+            </a:pPr>
+            <a:r>
+              <a:rPr sz="1800" b="0">
+                <a:solidFill>
+                  <a:srgbClr val="222222"/>
+                </a:solidFill>
+                <a:latin typeface="Calibri"/>
+              </a:rPr>
+              <a:t>5.  Now MOVE the BlinkMode enum out of Config.h and into Blinker.ino. Compile. READ THE ERROR CAREFULLY.</a:t>
+            </a:r>
+          </a:p>
+          <a:p>
+            <a:pPr algn="l">
+              <a:lnSpc>
+                <a:spcPct val="100000"/>
+              </a:lnSpc>
+              <a:spcAft>
+                <a:spcPts val="400"/>
+              </a:spcAft>
+              <a:defRPr sz="1800" b="0">
+                <a:solidFill>
+                  <a:srgbClr val="222222"/>
+                </a:solidFill>
+                <a:latin typeface="Calibri"/>
+              </a:defRPr>
+            </a:pPr>
+            <a:r>
+              <a:rPr sz="1800" b="0">
+                <a:solidFill>
+                  <a:srgbClr val="222222"/>
+                </a:solidFill>
+                <a:latin typeface="Calibri"/>
+              </a:rPr>
+              <a:t>6.  Put it back.</a:t>
+            </a:r>
+          </a:p>
+        </p:txBody>
+      </p:sp>
+      <p:sp>
+        <p:nvSpPr>
+          <p:cNvPr id="8" name="TextBox 7"/>
+          <p:cNvSpPr txBox="1"/>
+          <p:nvPr/>
+        </p:nvSpPr>
+        <p:spPr>
+          <a:xfrm>
+            <a:off x="6301587" y="1901952"/>
+            <a:ext cx="5387187" cy="365760"/>
+          </a:xfrm>
+          <a:prstGeom prst="rect">
+            <a:avLst/>
+          </a:prstGeom>
+          <a:noFill/>
+        </p:spPr>
+        <p:txBody>
+          <a:bodyPr wrap="square" lIns="0" tIns="0" rIns="0" bIns="0">
+            <a:spAutoFit/>
+          </a:bodyPr>
+          <a:lstStyle/>
+          <a:p>
+            <a:pPr algn="l">
+              <a:lnSpc>
+                <a:spcPct val="100000"/>
+              </a:lnSpc>
+              <a:spcAft>
+                <a:spcPts val="200"/>
+              </a:spcAft>
+              <a:defRPr sz="1800" b="1">
+                <a:solidFill>
+                  <a:srgbClr val="0E7C86"/>
+                </a:solidFill>
+                <a:latin typeface="Calibri"/>
+              </a:defRPr>
+            </a:pPr>
+            <a:r>
+              <a:rPr sz="1800" b="1">
+                <a:solidFill>
+                  <a:srgbClr val="0E7C86"/>
+                </a:solidFill>
+                <a:latin typeface="Calibri"/>
+              </a:rPr>
+              <a:t>What you should see</a:t>
+            </a:r>
+          </a:p>
+        </p:txBody>
+      </p:sp>
+      <p:sp>
+        <p:nvSpPr>
+          <p:cNvPr id="9" name="TextBox 8"/>
+          <p:cNvSpPr txBox="1"/>
+          <p:nvPr/>
+        </p:nvSpPr>
+        <p:spPr>
+          <a:xfrm>
+            <a:off x="6301587" y="2304288"/>
+            <a:ext cx="5387187" cy="1778508"/>
+          </a:xfrm>
+          <a:prstGeom prst="rect">
+            <a:avLst/>
+          </a:prstGeom>
+          <a:noFill/>
+        </p:spPr>
+        <p:txBody>
+          <a:bodyPr wrap="square" lIns="0" tIns="0" rIns="0" bIns="0">
+            <a:spAutoFit/>
+          </a:bodyPr>
+          <a:lstStyle/>
+          <a:p>
+            <a:pPr algn="l">
+              <a:lnSpc>
+                <a:spcPct val="100000"/>
+              </a:lnSpc>
+              <a:spcAft>
+                <a:spcPts val="200"/>
+              </a:spcAft>
+              <a:defRPr sz="1800" b="0">
+                <a:solidFill>
+                  <a:srgbClr val="222222"/>
+                </a:solidFill>
+                <a:latin typeface="Calibri"/>
+              </a:defRPr>
+            </a:pPr>
+            <a:r>
+              <a:rPr sz="1800" b="0">
+                <a:solidFill>
+                  <a:srgbClr val="222222"/>
+                </a:solidFill>
+                <a:latin typeface="Calibri"/>
+              </a:rPr>
+              <a:t>Step 5 fails with an error about BlinkMode not naming a type, pointing at a line you did not write.</a:t>
+            </a:r>
+          </a:p>
+        </p:txBody>
+      </p:sp>
+      <p:sp>
+        <p:nvSpPr>
+          <p:cNvPr id="10" name="TextBox 9"/>
+          <p:cNvSpPr txBox="1"/>
+          <p:nvPr/>
+        </p:nvSpPr>
+        <p:spPr>
+          <a:xfrm>
+            <a:off x="6301587" y="4119372"/>
+            <a:ext cx="5387187" cy="365760"/>
+          </a:xfrm>
+          <a:prstGeom prst="rect">
+            <a:avLst/>
+          </a:prstGeom>
+          <a:noFill/>
+        </p:spPr>
+        <p:txBody>
+          <a:bodyPr wrap="square" lIns="0" tIns="0" rIns="0" bIns="0">
+            <a:spAutoFit/>
+          </a:bodyPr>
+          <a:lstStyle/>
+          <a:p>
+            <a:pPr algn="l">
+              <a:lnSpc>
+                <a:spcPct val="100000"/>
+              </a:lnSpc>
+              <a:spcAft>
+                <a:spcPts val="200"/>
+              </a:spcAft>
+              <a:defRPr sz="1800" b="1">
+                <a:solidFill>
+                  <a:srgbClr val="0E7C86"/>
+                </a:solidFill>
+                <a:latin typeface="Calibri"/>
+              </a:defRPr>
+            </a:pPr>
+            <a:r>
+              <a:rPr sz="1800" b="1">
+                <a:solidFill>
+                  <a:srgbClr val="0E7C86"/>
+                </a:solidFill>
+                <a:latin typeface="Calibri"/>
+              </a:rPr>
+              <a:t>Answer these</a:t>
+            </a:r>
+          </a:p>
+        </p:txBody>
+      </p:sp>
+      <p:sp>
+        <p:nvSpPr>
+          <p:cNvPr id="11" name="TextBox 10"/>
+          <p:cNvSpPr txBox="1"/>
+          <p:nvPr/>
+        </p:nvSpPr>
+        <p:spPr>
+          <a:xfrm>
+            <a:off x="6301587" y="4521708"/>
+            <a:ext cx="5387187" cy="1778508"/>
+          </a:xfrm>
+          <a:prstGeom prst="rect">
+            <a:avLst/>
+          </a:prstGeom>
+          <a:noFill/>
+        </p:spPr>
+        <p:txBody>
+          <a:bodyPr wrap="square" lIns="0" tIns="0" rIns="0" bIns="0">
+            <a:spAutoFit/>
+          </a:bodyPr>
+          <a:lstStyle/>
+          <a:p>
+            <a:pPr algn="l">
+              <a:lnSpc>
+                <a:spcPct val="100000"/>
+              </a:lnSpc>
+              <a:spcAft>
+                <a:spcPts val="200"/>
+              </a:spcAft>
+              <a:defRPr sz="1800" b="0">
+                <a:solidFill>
+                  <a:srgbClr val="222222"/>
+                </a:solidFill>
+                <a:latin typeface="Calibri"/>
+              </a:defRPr>
+            </a:pPr>
+            <a:r>
+              <a:rPr sz="1800" b="0">
+                <a:solidFill>
+                  <a:srgbClr val="222222"/>
+                </a:solidFill>
+                <a:latin typeface="Calibri"/>
+              </a:rPr>
+              <a:t>Whose line is the error actually on?</a:t>
+            </a:r>
+          </a:p>
+          <a:p>
+            <a:pPr algn="l">
+              <a:lnSpc>
+                <a:spcPct val="100000"/>
+              </a:lnSpc>
+              <a:spcAft>
+                <a:spcPts val="200"/>
+              </a:spcAft>
+              <a:defRPr sz="1800" b="0">
+                <a:solidFill>
+                  <a:srgbClr val="222222"/>
+                </a:solidFill>
+                <a:latin typeface="Calibri"/>
+              </a:defRPr>
+            </a:pPr>
+            <a:r>
+              <a:rPr sz="1800" b="0">
+                <a:solidFill>
+                  <a:srgbClr val="222222"/>
+                </a:solidFill>
+                <a:latin typeface="Calibri"/>
+              </a:rPr>
+              <a:t>Why does moving a FUNCTION between tabs work fine, but moving a TYPE does not?</a:t>
             </a:r>
           </a:p>
         </p:txBody>
@@ -6329,7 +6640,7 @@
                 </a:solidFill>
                 <a:latin typeface="Calibri"/>
               </a:rPr>
-              <a:t>Reading a line without stopping the vehicle</a:t>
+              <a:t>Why a console changes what a vehicle is</a:t>
             </a:r>
           </a:p>
         </p:txBody>
@@ -6483,7 +6794,7 @@
         <p:spPr>
           <a:xfrm>
             <a:off x="502920" y="1188720"/>
-            <a:ext cx="7047088" cy="274320"/>
+            <a:ext cx="11185855" cy="530352"/>
           </a:xfrm>
           <a:prstGeom prst="rect">
             <a:avLst/>
@@ -6501,456 +6812,37 @@
                 <a:spcPct val="100000"/>
               </a:lnSpc>
               <a:spcAft>
-                <a:spcPts val="200"/>
-              </a:spcAft>
-              <a:defRPr sz="1200" b="1">
+                <a:spcPts val="600"/>
+              </a:spcAft>
+              <a:defRPr sz="1900" b="1">
                 <a:solidFill>
                   <a:srgbClr val="0E7C86"/>
                 </a:solidFill>
-                <a:latin typeface="Consolas"/>
-              </a:defRPr>
-            </a:pPr>
-            <a:r>
-              <a:rPr sz="1200" b="1">
+                <a:latin typeface="Calibri"/>
+              </a:defRPr>
+            </a:pPr>
+            <a:r>
+              <a:rPr sz="1900" b="1">
                 <a:solidFill>
                   <a:srgbClr val="0E7C86"/>
                 </a:solidFill>
-                <a:latin typeface="Consolas"/>
-              </a:rPr>
-              <a:t>a1b_serial_console.ino</a:t>
-            </a:r>
-          </a:p>
-        </p:txBody>
-      </p:sp>
-      <p:sp>
-        <p:nvSpPr>
-          <p:cNvPr id="7" name="CODE_PANEL"/>
-          <p:cNvSpPr/>
-          <p:nvPr/>
-        </p:nvSpPr>
-        <p:spPr>
-          <a:xfrm>
-            <a:off x="502920" y="1517904"/>
-            <a:ext cx="7047088" cy="4745736"/>
-          </a:xfrm>
-          <a:prstGeom prst="roundRect">
-            <a:avLst>
-              <a:gd name="adj" fmla="val 4000"/>
-            </a:avLst>
-          </a:prstGeom>
-          <a:solidFill>
-            <a:srgbClr val="F4F6F8"/>
-          </a:solidFill>
-          <a:ln w="12700">
-            <a:solidFill>
-              <a:srgbClr val="C8D2DE"/>
-            </a:solidFill>
-          </a:ln>
-          <a:effectLst/>
-        </p:spPr>
-        <p:style>
-          <a:lnRef idx="1">
-            <a:schemeClr val="accent1"/>
-          </a:lnRef>
-          <a:fillRef idx="3">
-            <a:schemeClr val="accent1"/>
-          </a:fillRef>
-          <a:effectRef idx="2">
-            <a:schemeClr val="accent1"/>
-          </a:effectRef>
-          <a:fontRef idx="minor">
-            <a:schemeClr val="lt1"/>
-          </a:fontRef>
-        </p:style>
-        <p:txBody>
-          <a:bodyPr rtlCol="0" anchor="t" wrap="square" lIns="146304" tIns="91440" bIns="73152"/>
-          <a:lstStyle/>
-          <a:p>
-            <a:pPr algn="l">
-              <a:lnSpc>
-                <a:spcPct val="100000"/>
-              </a:lnSpc>
-              <a:spcAft>
-                <a:spcPts val="0"/>
-              </a:spcAft>
-              <a:defRPr sz="1300">
-                <a:latin typeface="Consolas"/>
-              </a:defRPr>
-            </a:pPr>
-            <a:r>
-              <a:rPr sz="1300">
-                <a:solidFill>
-                  <a:srgbClr val="222222"/>
-                </a:solidFill>
-                <a:latin typeface="Consolas"/>
-              </a:rPr>
-              <a:t>void handleSerial() {</a:t>
-            </a:r>
-          </a:p>
-          <a:p>
-            <a:pPr algn="l">
-              <a:lnSpc>
-                <a:spcPct val="100000"/>
-              </a:lnSpc>
-              <a:spcAft>
-                <a:spcPts val="0"/>
-              </a:spcAft>
-              <a:defRPr sz="1300">
-                <a:latin typeface="Consolas"/>
-              </a:defRPr>
-            </a:pPr>
-            <a:r>
-              <a:rPr sz="1300" b="1">
-                <a:solidFill>
-                  <a:srgbClr val="0E7C86"/>
-                </a:solidFill>
-                <a:latin typeface="Consolas"/>
-              </a:rPr>
-              <a:t>  while (Serial.available() &gt; 0) {</a:t>
-            </a:r>
-          </a:p>
-          <a:p>
-            <a:pPr algn="l">
-              <a:lnSpc>
-                <a:spcPct val="100000"/>
-              </a:lnSpc>
-              <a:spcAft>
-                <a:spcPts val="0"/>
-              </a:spcAft>
-              <a:defRPr sz="1300">
-                <a:latin typeface="Consolas"/>
-              </a:defRPr>
-            </a:pPr>
-            <a:r>
-              <a:rPr sz="1300">
-                <a:solidFill>
-                  <a:srgbClr val="222222"/>
-                </a:solidFill>
-                <a:latin typeface="Consolas"/>
-              </a:rPr>
-              <a:t>    char c = (char)Serial.read();</a:t>
-            </a:r>
-          </a:p>
-          <a:p>
-            <a:pPr algn="l">
-              <a:lnSpc>
-                <a:spcPct val="100000"/>
-              </a:lnSpc>
-              <a:spcAft>
-                <a:spcPts val="0"/>
-              </a:spcAft>
-              <a:defRPr sz="1300">
-                <a:latin typeface="Consolas"/>
-              </a:defRPr>
-            </a:pPr>
-            <a:r>
-              <a:rPr sz="1300">
-                <a:solidFill>
-                  <a:srgbClr val="222222"/>
-                </a:solidFill>
-                <a:latin typeface="Consolas"/>
-              </a:rPr>
-              <a:t> </a:t>
-            </a:r>
-          </a:p>
-          <a:p>
-            <a:pPr algn="l">
-              <a:lnSpc>
-                <a:spcPct val="100000"/>
-              </a:lnSpc>
-              <a:spcAft>
-                <a:spcPts val="0"/>
-              </a:spcAft>
-              <a:defRPr sz="1300">
-                <a:latin typeface="Consolas"/>
-              </a:defRPr>
-            </a:pPr>
-            <a:r>
-              <a:rPr sz="1300" b="1">
-                <a:solidFill>
-                  <a:srgbClr val="0E7C86"/>
-                </a:solidFill>
-                <a:latin typeface="Consolas"/>
-              </a:rPr>
-              <a:t>    if (c == '\n' || c == '\r') {      // accept both</a:t>
-            </a:r>
-          </a:p>
-          <a:p>
-            <a:pPr algn="l">
-              <a:lnSpc>
-                <a:spcPct val="100000"/>
-              </a:lnSpc>
-              <a:spcAft>
-                <a:spcPts val="0"/>
-              </a:spcAft>
-              <a:defRPr sz="1300">
-                <a:latin typeface="Consolas"/>
-              </a:defRPr>
-            </a:pPr>
-            <a:r>
-              <a:rPr sz="1300">
-                <a:solidFill>
-                  <a:srgbClr val="222222"/>
-                </a:solidFill>
-                <a:latin typeface="Consolas"/>
-              </a:rPr>
-              <a:t>      if (input_line.length() &gt; 0) {</a:t>
-            </a:r>
-          </a:p>
-          <a:p>
-            <a:pPr algn="l">
-              <a:lnSpc>
-                <a:spcPct val="100000"/>
-              </a:lnSpc>
-              <a:spcAft>
-                <a:spcPts val="0"/>
-              </a:spcAft>
-              <a:defRPr sz="1300">
-                <a:latin typeface="Consolas"/>
-              </a:defRPr>
-            </a:pPr>
-            <a:r>
-              <a:rPr sz="1300">
-                <a:solidFill>
-                  <a:srgbClr val="222222"/>
-                </a:solidFill>
-                <a:latin typeface="Consolas"/>
-              </a:rPr>
-              <a:t>        runCommand(input_line);</a:t>
-            </a:r>
-          </a:p>
-          <a:p>
-            <a:pPr algn="l">
-              <a:lnSpc>
-                <a:spcPct val="100000"/>
-              </a:lnSpc>
-              <a:spcAft>
-                <a:spcPts val="0"/>
-              </a:spcAft>
-              <a:defRPr sz="1300">
-                <a:latin typeface="Consolas"/>
-              </a:defRPr>
-            </a:pPr>
-            <a:r>
-              <a:rPr sz="1300">
-                <a:solidFill>
-                  <a:srgbClr val="222222"/>
-                </a:solidFill>
-                <a:latin typeface="Consolas"/>
-              </a:rPr>
-              <a:t>        input_line = "";</a:t>
-            </a:r>
-          </a:p>
-          <a:p>
-            <a:pPr algn="l">
-              <a:lnSpc>
-                <a:spcPct val="100000"/>
-              </a:lnSpc>
-              <a:spcAft>
-                <a:spcPts val="0"/>
-              </a:spcAft>
-              <a:defRPr sz="1300">
-                <a:latin typeface="Consolas"/>
-              </a:defRPr>
-            </a:pPr>
-            <a:r>
-              <a:rPr sz="1300">
-                <a:solidFill>
-                  <a:srgbClr val="222222"/>
-                </a:solidFill>
-                <a:latin typeface="Consolas"/>
-              </a:rPr>
-              <a:t>      }</a:t>
-            </a:r>
-          </a:p>
-          <a:p>
-            <a:pPr algn="l">
-              <a:lnSpc>
-                <a:spcPct val="100000"/>
-              </a:lnSpc>
-              <a:spcAft>
-                <a:spcPts val="0"/>
-              </a:spcAft>
-              <a:defRPr sz="1300">
-                <a:latin typeface="Consolas"/>
-              </a:defRPr>
-            </a:pPr>
-            <a:r>
-              <a:rPr sz="1300">
-                <a:solidFill>
-                  <a:srgbClr val="222222"/>
-                </a:solidFill>
-                <a:latin typeface="Consolas"/>
-              </a:rPr>
-              <a:t>      continue;</a:t>
-            </a:r>
-          </a:p>
-          <a:p>
-            <a:pPr algn="l">
-              <a:lnSpc>
-                <a:spcPct val="100000"/>
-              </a:lnSpc>
-              <a:spcAft>
-                <a:spcPts val="0"/>
-              </a:spcAft>
-              <a:defRPr sz="1300">
-                <a:latin typeface="Consolas"/>
-              </a:defRPr>
-            </a:pPr>
-            <a:r>
-              <a:rPr sz="1300">
-                <a:solidFill>
-                  <a:srgbClr val="222222"/>
-                </a:solidFill>
-                <a:latin typeface="Consolas"/>
-              </a:rPr>
-              <a:t>    }</a:t>
-            </a:r>
-          </a:p>
-          <a:p>
-            <a:pPr algn="l">
-              <a:lnSpc>
-                <a:spcPct val="100000"/>
-              </a:lnSpc>
-              <a:spcAft>
-                <a:spcPts val="0"/>
-              </a:spcAft>
-              <a:defRPr sz="1300">
-                <a:latin typeface="Consolas"/>
-              </a:defRPr>
-            </a:pPr>
-            <a:r>
-              <a:rPr sz="1300">
-                <a:solidFill>
-                  <a:srgbClr val="222222"/>
-                </a:solidFill>
-                <a:latin typeface="Consolas"/>
-              </a:rPr>
-              <a:t> </a:t>
-            </a:r>
-          </a:p>
-          <a:p>
-            <a:pPr algn="l">
-              <a:lnSpc>
-                <a:spcPct val="100000"/>
-              </a:lnSpc>
-              <a:spcAft>
-                <a:spcPts val="0"/>
-              </a:spcAft>
-              <a:defRPr sz="1300">
-                <a:latin typeface="Consolas"/>
-              </a:defRPr>
-            </a:pPr>
-            <a:r>
-              <a:rPr sz="1300" b="1">
-                <a:solidFill>
-                  <a:srgbClr val="0E7C86"/>
-                </a:solidFill>
-                <a:latin typeface="Consolas"/>
-              </a:rPr>
-              <a:t>    if (c &gt;= 32 &amp;&amp; c &lt; 127 &amp;&amp; input_line.length() &lt; 80) {</a:t>
-            </a:r>
-          </a:p>
-          <a:p>
-            <a:pPr algn="l">
-              <a:lnSpc>
-                <a:spcPct val="100000"/>
-              </a:lnSpc>
-              <a:spcAft>
-                <a:spcPts val="0"/>
-              </a:spcAft>
-              <a:defRPr sz="1300">
-                <a:latin typeface="Consolas"/>
-              </a:defRPr>
-            </a:pPr>
-            <a:r>
-              <a:rPr sz="1300">
-                <a:solidFill>
-                  <a:srgbClr val="222222"/>
-                </a:solidFill>
-                <a:latin typeface="Consolas"/>
-              </a:rPr>
-              <a:t>      input_line += c;</a:t>
-            </a:r>
-          </a:p>
-          <a:p>
-            <a:pPr algn="l">
-              <a:lnSpc>
-                <a:spcPct val="100000"/>
-              </a:lnSpc>
-              <a:spcAft>
-                <a:spcPts val="0"/>
-              </a:spcAft>
-              <a:defRPr sz="1300">
-                <a:latin typeface="Consolas"/>
-              </a:defRPr>
-            </a:pPr>
-            <a:r>
-              <a:rPr sz="1300">
-                <a:solidFill>
-                  <a:srgbClr val="222222"/>
-                </a:solidFill>
-                <a:latin typeface="Consolas"/>
-              </a:rPr>
-              <a:t>    }</a:t>
-            </a:r>
-          </a:p>
-          <a:p>
-            <a:pPr algn="l">
-              <a:lnSpc>
-                <a:spcPct val="100000"/>
-              </a:lnSpc>
-              <a:spcAft>
-                <a:spcPts val="0"/>
-              </a:spcAft>
-              <a:defRPr sz="1300">
-                <a:latin typeface="Consolas"/>
-              </a:defRPr>
-            </a:pPr>
-            <a:r>
-              <a:rPr sz="1300">
-                <a:solidFill>
-                  <a:srgbClr val="222222"/>
-                </a:solidFill>
-                <a:latin typeface="Consolas"/>
-              </a:rPr>
-              <a:t>  }</a:t>
-            </a:r>
-          </a:p>
-          <a:p>
-            <a:pPr algn="l">
-              <a:lnSpc>
-                <a:spcPct val="100000"/>
-              </a:lnSpc>
-              <a:spcAft>
-                <a:spcPts val="0"/>
-              </a:spcAft>
-              <a:defRPr sz="1300">
-                <a:latin typeface="Consolas"/>
-              </a:defRPr>
-            </a:pPr>
-            <a:r>
-              <a:rPr sz="1300">
-                <a:solidFill>
-                  <a:srgbClr val="222222"/>
-                </a:solidFill>
-                <a:latin typeface="Consolas"/>
-              </a:rPr>
-              <a:t>}</a:t>
-            </a:r>
-          </a:p>
-        </p:txBody>
-      </p:sp>
-      <p:sp>
-        <p:nvSpPr>
-          <p:cNvPr id="8" name="TextBox 7"/>
+                <a:latin typeface="Calibri"/>
+              </a:rPr>
+              <a:t>From opaque binary to something you can ask questions</a:t>
+            </a:r>
+          </a:p>
+        </p:txBody>
+      </p:sp>
+      <p:sp>
+        <p:nvSpPr>
+          <p:cNvPr id="7" name="TextBox 6"/>
           <p:cNvSpPr txBox="1"/>
           <p:nvPr/>
         </p:nvSpPr>
         <p:spPr>
           <a:xfrm>
-            <a:off x="7870048" y="1517904"/>
-            <a:ext cx="3818727" cy="4745736"/>
+            <a:off x="502920" y="1755648"/>
+            <a:ext cx="11185855" cy="4507992"/>
           </a:xfrm>
           <a:prstGeom prst="rect">
             <a:avLst/>
@@ -6968,7 +6860,7 @@
                 <a:spcPct val="100000"/>
               </a:lnSpc>
               <a:spcAft>
-                <a:spcPts val="600"/>
+                <a:spcPts val="900"/>
               </a:spcAft>
               <a:defRPr sz="1800" b="0">
                 <a:solidFill>
@@ -6984,16 +6876,16 @@
                 </a:solidFill>
                 <a:latin typeface="Calibri"/>
               </a:rPr>
-              <a:t>Serial.readStringUntil() would WAIT for a newline. While it waits the vehicle is not driving. Never use it on a moving machine.</a:t>
-            </a:r>
-          </a:p>
-          <a:p>
-            <a:pPr algn="l">
-              <a:lnSpc>
-                <a:spcPct val="100000"/>
-              </a:lnSpc>
-              <a:spcAft>
-                <a:spcPts val="600"/>
+              <a:t>A compiled binary is opaque. You can see what it does, not what it thinks.</a:t>
+            </a:r>
+          </a:p>
+          <a:p>
+            <a:pPr algn="l">
+              <a:lnSpc>
+                <a:spcPct val="100000"/>
+              </a:lnSpc>
+              <a:spcAft>
+                <a:spcPts val="900"/>
               </a:spcAft>
               <a:defRPr sz="1800" b="0">
                 <a:solidFill>
@@ -7002,6 +6894,22 @@
                 <a:latin typeface="Calibri"/>
               </a:defRPr>
             </a:pPr>
+          </a:p>
+          <a:p>
+            <a:pPr algn="l">
+              <a:lnSpc>
+                <a:spcPct val="100000"/>
+              </a:lnSpc>
+              <a:spcAft>
+                <a:spcPts val="900"/>
+              </a:spcAft>
+              <a:defRPr sz="1800" b="0">
+                <a:solidFill>
+                  <a:srgbClr val="222222"/>
+                </a:solidFill>
+                <a:latin typeface="Calibri"/>
+              </a:defRPr>
+            </a:pPr>
             <a:r>
               <a:rPr sz="1800" b="0">
                 <a:solidFill>
@@ -7009,16 +6917,16 @@
                 </a:solidFill>
                 <a:latin typeface="Calibri"/>
               </a:rPr>
-              <a:t>This takes whatever bytes have arrived and returns immediately, every time.</a:t>
-            </a:r>
-          </a:p>
-          <a:p>
-            <a:pPr algn="l">
-              <a:lnSpc>
-                <a:spcPct val="100000"/>
-              </a:lnSpc>
-              <a:spcAft>
-                <a:spcPts val="600"/>
+              <a:t>A serial console turns it into something you can interrogate:</a:t>
+            </a:r>
+          </a:p>
+          <a:p>
+            <a:pPr lvl="1" algn="l">
+              <a:lnSpc>
+                <a:spcPct val="100000"/>
+              </a:lnSpc>
+              <a:spcAft>
+                <a:spcPts val="900"/>
               </a:spcAft>
               <a:defRPr sz="1800" b="0">
                 <a:solidFill>
@@ -7034,16 +6942,16 @@
                 </a:solidFill>
                 <a:latin typeface="Calibri"/>
               </a:rPr>
-              <a:t>The Serial Monitor sends whatever its line-ending dropdown says: nothing, LF, CR, or both. Handle all four or the console looks broken to whoever set theirs differently.</a:t>
-            </a:r>
-          </a:p>
-          <a:p>
-            <a:pPr algn="l">
-              <a:lnSpc>
-                <a:spcPct val="100000"/>
-              </a:lnSpc>
-              <a:spcAft>
-                <a:spcPts val="600"/>
+              <a:t>help      what can this thing do</a:t>
+            </a:r>
+          </a:p>
+          <a:p>
+            <a:pPr lvl="1" algn="l">
+              <a:lnSpc>
+                <a:spcPct val="100000"/>
+              </a:lnSpc>
+              <a:spcAft>
+                <a:spcPts val="900"/>
               </a:spcAft>
               <a:defRPr sz="1800" b="0">
                 <a:solidFill>
@@ -7059,7 +6967,98 @@
                 </a:solidFill>
                 <a:latin typeface="Calibri"/>
               </a:rPr>
-              <a:t>The length cap matters. Without it a stuck sender grows the String until the ESP32 runs out of heap.</a:t>
+              <a:t>diag      what does it think is happening right now</a:t>
+            </a:r>
+          </a:p>
+          <a:p>
+            <a:pPr lvl="1" algn="l">
+              <a:lnSpc>
+                <a:spcPct val="100000"/>
+              </a:lnSpc>
+              <a:spcAft>
+                <a:spcPts val="900"/>
+              </a:spcAft>
+              <a:defRPr sz="1800" b="0">
+                <a:solidFill>
+                  <a:srgbClr val="222222"/>
+                </a:solidFill>
+                <a:latin typeface="Calibri"/>
+              </a:defRPr>
+            </a:pPr>
+            <a:r>
+              <a:rPr sz="1800" b="0">
+                <a:solidFill>
+                  <a:srgbClr val="222222"/>
+                </a:solidFill>
+                <a:latin typeface="Calibri"/>
+              </a:rPr>
+              <a:t>pair      change its behaviour without a laptop full of toolchains</a:t>
+            </a:r>
+          </a:p>
+          <a:p>
+            <a:pPr lvl="1" algn="l">
+              <a:lnSpc>
+                <a:spcPct val="100000"/>
+              </a:lnSpc>
+              <a:spcAft>
+                <a:spcPts val="900"/>
+              </a:spcAft>
+              <a:defRPr sz="1800" b="0">
+                <a:solidFill>
+                  <a:srgbClr val="222222"/>
+                </a:solidFill>
+                <a:latin typeface="Calibri"/>
+              </a:defRPr>
+            </a:pPr>
+            <a:r>
+              <a:rPr sz="1800" b="0">
+                <a:solidFill>
+                  <a:srgbClr val="222222"/>
+                </a:solidFill>
+                <a:latin typeface="Calibri"/>
+              </a:rPr>
+              <a:t>dynamics  retune the deadzones between races</a:t>
+            </a:r>
+          </a:p>
+          <a:p>
+            <a:pPr algn="l">
+              <a:lnSpc>
+                <a:spcPct val="100000"/>
+              </a:lnSpc>
+              <a:spcAft>
+                <a:spcPts val="900"/>
+              </a:spcAft>
+              <a:defRPr sz="1800" b="0">
+                <a:solidFill>
+                  <a:srgbClr val="222222"/>
+                </a:solidFill>
+                <a:latin typeface="Calibri"/>
+              </a:defRPr>
+            </a:pPr>
+          </a:p>
+          <a:p>
+            <a:pPr algn="l">
+              <a:lnSpc>
+                <a:spcPct val="100000"/>
+              </a:lnSpc>
+              <a:spcAft>
+                <a:spcPts val="900"/>
+              </a:spcAft>
+              <a:defRPr sz="1800" b="0">
+                <a:solidFill>
+                  <a:srgbClr val="222222"/>
+                </a:solidFill>
+                <a:latin typeface="Calibri"/>
+              </a:defRPr>
+            </a:pPr>
+            <a:r>
+              <a:rPr sz="1800" b="0">
+                <a:solidFill>
+                  <a:srgbClr val="222222"/>
+                </a:solidFill>
+                <a:latin typeface="Calibri"/>
+              </a:rPr>
+              <a:t>The practical difference: at a track event, tuning a vehicle stops being an edit-compile-upload cycle and becomes a conversation. On Op 12 those settings then go to EEPROM, so the tuning survives.</a:t>
             </a:r>
           </a:p>
         </p:txBody>
@@ -7123,7 +7122,7 @@
                 </a:solidFill>
                 <a:latin typeface="Calibri"/>
               </a:rPr>
-              <a:t>Do it now  -  a console</a:t>
+              <a:t>Why a console changes what a vehicle is  (continued)</a:t>
             </a:r>
           </a:p>
         </p:txBody>
@@ -7270,87 +7269,14 @@
       </p:sp>
       <p:sp>
         <p:nvSpPr>
-          <p:cNvPr id="6" name="Rounded Rectangle 5"/>
-          <p:cNvSpPr/>
-          <p:nvPr/>
-        </p:nvSpPr>
-        <p:spPr>
-          <a:xfrm>
-            <a:off x="502920" y="1188720"/>
-            <a:ext cx="11185855" cy="530352"/>
-          </a:xfrm>
-          <a:prstGeom prst="roundRect">
-            <a:avLst>
-              <a:gd name="adj" fmla="val 4000"/>
-            </a:avLst>
-          </a:prstGeom>
-          <a:solidFill>
-            <a:srgbClr val="0E7C86"/>
-          </a:solidFill>
-          <a:ln>
-            <a:noFill/>
-          </a:ln>
-          <a:effectLst/>
-        </p:spPr>
-        <p:style>
-          <a:lnRef idx="1">
-            <a:schemeClr val="accent1"/>
-          </a:lnRef>
-          <a:fillRef idx="3">
-            <a:schemeClr val="accent1"/>
-          </a:fillRef>
-          <a:effectRef idx="2">
-            <a:schemeClr val="accent1"/>
-          </a:effectRef>
-          <a:fontRef idx="minor">
-            <a:schemeClr val="lt1"/>
-          </a:fontRef>
-        </p:style>
-        <p:txBody>
-          <a:bodyPr rtlCol="0" anchor="ctr" wrap="square" lIns="182880"/>
-          <a:lstStyle/>
-          <a:p>
-            <a:pPr algn="l"/>
-            <a:r>
-              <a:rPr sz="1300" b="1">
-                <a:solidFill>
-                  <a:srgbClr val="FFFFFF"/>
-                </a:solidFill>
-                <a:latin typeface="Calibri"/>
-              </a:rPr>
-              <a:t>UPLOAD AND RUN:   </a:t>
-            </a:r>
-            <a:r>
-              <a:rPr sz="1500" b="1">
-                <a:solidFill>
-                  <a:srgbClr val="FFFFFF"/>
-                </a:solidFill>
-                <a:latin typeface="Consolas"/>
-              </a:rPr>
-              <a:t>a1b_serial_console</a:t>
-            </a:r>
-            <a:r>
-              <a:rPr sz="1200">
-                <a:solidFill>
-                  <a:srgbClr val="FFFFFF"/>
-                </a:solidFill>
-                <a:latin typeface="Calibri"/>
-              </a:rPr>
-              <a:t>     (25 minutes)</a:t>
-            </a:r>
-          </a:p>
-        </p:txBody>
-      </p:sp>
-      <p:sp>
-        <p:nvSpPr>
-          <p:cNvPr id="7" name="TextBox 6"/>
+          <p:cNvPr id="6" name="TextBox 5"/>
           <p:cNvSpPr txBox="1"/>
           <p:nvPr/>
         </p:nvSpPr>
         <p:spPr>
           <a:xfrm>
-            <a:off x="502920" y="1901952"/>
-            <a:ext cx="5387187" cy="4361688"/>
+            <a:off x="502920" y="1188720"/>
+            <a:ext cx="11185855" cy="5074920"/>
           </a:xfrm>
           <a:prstGeom prst="rect">
             <a:avLst/>
@@ -7368,7 +7294,7 @@
                 <a:spcPct val="100000"/>
               </a:lnSpc>
               <a:spcAft>
-                <a:spcPts val="400"/>
+                <a:spcPts val="900"/>
               </a:spcAft>
               <a:defRPr sz="1800" b="0">
                 <a:solidFill>
@@ -7377,6 +7303,22 @@
                 <a:latin typeface="Calibri"/>
               </a:defRPr>
             </a:pPr>
+          </a:p>
+          <a:p>
+            <a:pPr algn="l">
+              <a:lnSpc>
+                <a:spcPct val="100000"/>
+              </a:lnSpc>
+              <a:spcAft>
+                <a:spcPts val="900"/>
+              </a:spcAft>
+              <a:defRPr sz="1800" b="0">
+                <a:solidFill>
+                  <a:srgbClr val="222222"/>
+                </a:solidFill>
+                <a:latin typeface="Calibri"/>
+              </a:defRPr>
+            </a:pPr>
             <a:r>
               <a:rPr sz="1800" b="0">
                 <a:solidFill>
@@ -7384,324 +7326,7 @@
                 </a:solidFill>
                 <a:latin typeface="Calibri"/>
               </a:rPr>
-              <a:t>1.  Upload it, open the Serial Monitor, type help.</a:t>
-            </a:r>
-          </a:p>
-          <a:p>
-            <a:pPr algn="l">
-              <a:lnSpc>
-                <a:spcPct val="100000"/>
-              </a:lnSpc>
-              <a:spcAft>
-                <a:spcPts val="400"/>
-              </a:spcAft>
-              <a:defRPr sz="1800" b="0">
-                <a:solidFill>
-                  <a:srgbClr val="222222"/>
-                </a:solidFill>
-                <a:latin typeface="Calibri"/>
-              </a:defRPr>
-            </a:pPr>
-            <a:r>
-              <a:rPr sz="1800" b="0">
-                <a:solidFill>
-                  <a:srgbClr val="222222"/>
-                </a:solidFill>
-                <a:latin typeface="Calibri"/>
-              </a:rPr>
-              <a:t>2.  Try every command. Then type something that is not a command.</a:t>
-            </a:r>
-          </a:p>
-          <a:p>
-            <a:pPr algn="l">
-              <a:lnSpc>
-                <a:spcPct val="100000"/>
-              </a:lnSpc>
-              <a:spcAft>
-                <a:spcPts val="400"/>
-              </a:spcAft>
-              <a:defRPr sz="1800" b="0">
-                <a:solidFill>
-                  <a:srgbClr val="222222"/>
-                </a:solidFill>
-                <a:latin typeface="Calibri"/>
-              </a:defRPr>
-            </a:pPr>
-            <a:r>
-              <a:rPr sz="1800" b="0">
-                <a:solidFill>
-                  <a:srgbClr val="222222"/>
-                </a:solidFill>
-                <a:latin typeface="Calibri"/>
-              </a:rPr>
-              <a:t>3.  Type  set rate abc. What happens? Why does the range check catch it?</a:t>
-            </a:r>
-          </a:p>
-          <a:p>
-            <a:pPr algn="l">
-              <a:lnSpc>
-                <a:spcPct val="100000"/>
-              </a:lnSpc>
-              <a:spcAft>
-                <a:spcPts val="400"/>
-              </a:spcAft>
-              <a:defRPr sz="1800" b="0">
-                <a:solidFill>
-                  <a:srgbClr val="222222"/>
-                </a:solidFill>
-                <a:latin typeface="Calibri"/>
-              </a:defRPr>
-            </a:pPr>
-            <a:r>
-              <a:rPr sz="1800" b="0">
-                <a:solidFill>
-                  <a:srgbClr val="222222"/>
-                </a:solidFill>
-                <a:latin typeface="Calibri"/>
-              </a:rPr>
-              <a:t>4.  Change your Serial Monitor line-ending setting to each of its four options. Does the console still work in all four?</a:t>
-            </a:r>
-          </a:p>
-          <a:p>
-            <a:pPr algn="l">
-              <a:lnSpc>
-                <a:spcPct val="100000"/>
-              </a:lnSpc>
-              <a:spcAft>
-                <a:spcPts val="400"/>
-              </a:spcAft>
-              <a:defRPr sz="1800" b="0">
-                <a:solidFill>
-                  <a:srgbClr val="222222"/>
-                </a:solidFill>
-                <a:latin typeface="Calibri"/>
-              </a:defRPr>
-            </a:pPr>
-            <a:r>
-              <a:rPr sz="1800" b="0">
-                <a:solidFill>
-                  <a:srgbClr val="222222"/>
-                </a:solidFill>
-                <a:latin typeface="Calibri"/>
-              </a:rPr>
-              <a:t>5.  Add a command of your own: toggle, that flips a bool.</a:t>
-            </a:r>
-          </a:p>
-          <a:p>
-            <a:pPr algn="l">
-              <a:lnSpc>
-                <a:spcPct val="100000"/>
-              </a:lnSpc>
-              <a:spcAft>
-                <a:spcPts val="400"/>
-              </a:spcAft>
-              <a:defRPr sz="1800" b="0">
-                <a:solidFill>
-                  <a:srgbClr val="222222"/>
-                </a:solidFill>
-                <a:latin typeface="Calibri"/>
-              </a:defRPr>
-            </a:pPr>
-            <a:r>
-              <a:rPr sz="1800" b="0">
-                <a:solidFill>
-                  <a:srgbClr val="222222"/>
-                </a:solidFill>
-                <a:latin typeface="Calibri"/>
-              </a:rPr>
-              <a:t>6.  Open Console.ino in Op Program 12 and find the same three problems being solved there.</a:t>
-            </a:r>
-          </a:p>
-        </p:txBody>
-      </p:sp>
-      <p:sp>
-        <p:nvSpPr>
-          <p:cNvPr id="8" name="TextBox 7"/>
-          <p:cNvSpPr txBox="1"/>
-          <p:nvPr/>
-        </p:nvSpPr>
-        <p:spPr>
-          <a:xfrm>
-            <a:off x="6301587" y="1901952"/>
-            <a:ext cx="5387187" cy="365760"/>
-          </a:xfrm>
-          <a:prstGeom prst="rect">
-            <a:avLst/>
-          </a:prstGeom>
-          <a:noFill/>
-        </p:spPr>
-        <p:txBody>
-          <a:bodyPr wrap="square" lIns="0" tIns="0" rIns="0" bIns="0">
-            <a:spAutoFit/>
-          </a:bodyPr>
-          <a:lstStyle/>
-          <a:p>
-            <a:pPr algn="l">
-              <a:lnSpc>
-                <a:spcPct val="100000"/>
-              </a:lnSpc>
-              <a:spcAft>
-                <a:spcPts val="200"/>
-              </a:spcAft>
-              <a:defRPr sz="1800" b="1">
-                <a:solidFill>
-                  <a:srgbClr val="0E7C86"/>
-                </a:solidFill>
-                <a:latin typeface="Calibri"/>
-              </a:defRPr>
-            </a:pPr>
-            <a:r>
-              <a:rPr sz="1800" b="1">
-                <a:solidFill>
-                  <a:srgbClr val="0E7C86"/>
-                </a:solidFill>
-                <a:latin typeface="Calibri"/>
-              </a:rPr>
-              <a:t>What you should see</a:t>
-            </a:r>
-          </a:p>
-        </p:txBody>
-      </p:sp>
-      <p:sp>
-        <p:nvSpPr>
-          <p:cNvPr id="9" name="TextBox 8"/>
-          <p:cNvSpPr txBox="1"/>
-          <p:nvPr/>
-        </p:nvSpPr>
-        <p:spPr>
-          <a:xfrm>
-            <a:off x="6301587" y="2304288"/>
-            <a:ext cx="5387187" cy="1778508"/>
-          </a:xfrm>
-          <a:prstGeom prst="rect">
-            <a:avLst/>
-          </a:prstGeom>
-          <a:noFill/>
-        </p:spPr>
-        <p:txBody>
-          <a:bodyPr wrap="square" lIns="0" tIns="0" rIns="0" bIns="0">
-            <a:spAutoFit/>
-          </a:bodyPr>
-          <a:lstStyle/>
-          <a:p>
-            <a:pPr algn="l">
-              <a:lnSpc>
-                <a:spcPct val="100000"/>
-              </a:lnSpc>
-              <a:spcAft>
-                <a:spcPts val="200"/>
-              </a:spcAft>
-              <a:defRPr sz="1800" b="0">
-                <a:solidFill>
-                  <a:srgbClr val="222222"/>
-                </a:solidFill>
-                <a:latin typeface="Calibri"/>
-              </a:defRPr>
-            </a:pPr>
-            <a:r>
-              <a:rPr sz="1800" b="0">
-                <a:solidFill>
-                  <a:srgbClr val="222222"/>
-                </a:solidFill>
-                <a:latin typeface="Calibri"/>
-              </a:rPr>
-              <a:t>A prompt, echoed typing, working backspace, and commands that run while the LED keeps blinking on its own schedule.</a:t>
-            </a:r>
-          </a:p>
-        </p:txBody>
-      </p:sp>
-      <p:sp>
-        <p:nvSpPr>
-          <p:cNvPr id="10" name="TextBox 9"/>
-          <p:cNvSpPr txBox="1"/>
-          <p:nvPr/>
-        </p:nvSpPr>
-        <p:spPr>
-          <a:xfrm>
-            <a:off x="6301587" y="4119372"/>
-            <a:ext cx="5387187" cy="365760"/>
-          </a:xfrm>
-          <a:prstGeom prst="rect">
-            <a:avLst/>
-          </a:prstGeom>
-          <a:noFill/>
-        </p:spPr>
-        <p:txBody>
-          <a:bodyPr wrap="square" lIns="0" tIns="0" rIns="0" bIns="0">
-            <a:spAutoFit/>
-          </a:bodyPr>
-          <a:lstStyle/>
-          <a:p>
-            <a:pPr algn="l">
-              <a:lnSpc>
-                <a:spcPct val="100000"/>
-              </a:lnSpc>
-              <a:spcAft>
-                <a:spcPts val="200"/>
-              </a:spcAft>
-              <a:defRPr sz="1800" b="1">
-                <a:solidFill>
-                  <a:srgbClr val="0E7C86"/>
-                </a:solidFill>
-                <a:latin typeface="Calibri"/>
-              </a:defRPr>
-            </a:pPr>
-            <a:r>
-              <a:rPr sz="1800" b="1">
-                <a:solidFill>
-                  <a:srgbClr val="0E7C86"/>
-                </a:solidFill>
-                <a:latin typeface="Calibri"/>
-              </a:rPr>
-              <a:t>Answer these</a:t>
-            </a:r>
-          </a:p>
-        </p:txBody>
-      </p:sp>
-      <p:sp>
-        <p:nvSpPr>
-          <p:cNvPr id="11" name="TextBox 10"/>
-          <p:cNvSpPr txBox="1"/>
-          <p:nvPr/>
-        </p:nvSpPr>
-        <p:spPr>
-          <a:xfrm>
-            <a:off x="6301587" y="4521708"/>
-            <a:ext cx="5387187" cy="1778508"/>
-          </a:xfrm>
-          <a:prstGeom prst="rect">
-            <a:avLst/>
-          </a:prstGeom>
-          <a:noFill/>
-        </p:spPr>
-        <p:txBody>
-          <a:bodyPr wrap="square" lIns="0" tIns="0" rIns="0" bIns="0">
-            <a:spAutoFit/>
-          </a:bodyPr>
-          <a:lstStyle/>
-          <a:p>
-            <a:pPr algn="l">
-              <a:lnSpc>
-                <a:spcPct val="100000"/>
-              </a:lnSpc>
-              <a:spcAft>
-                <a:spcPts val="200"/>
-              </a:spcAft>
-              <a:defRPr sz="1800" b="0">
-                <a:solidFill>
-                  <a:srgbClr val="222222"/>
-                </a:solidFill>
-                <a:latin typeface="Calibri"/>
-              </a:defRPr>
-            </a:pPr>
-            <a:r>
-              <a:rPr sz="1800" b="0">
-                <a:solidFill>
-                  <a:srgbClr val="222222"/>
-                </a:solidFill>
-                <a:latin typeface="Calibri"/>
-              </a:rPr>
-              <a:t>toInt() returns 0 for anything it cannot parse. Why does that make range checking essential rather than optional?</a:t>
+              <a:t>This is not a toy idea. Industrial controllers, network switches and flight computers all have one, for exactly this reason.</a:t>
             </a:r>
           </a:p>
         </p:txBody>
@@ -7765,7 +7390,7 @@
                 </a:solidFill>
                 <a:latin typeface="Calibri"/>
               </a:rPr>
-              <a:t>The boot sequence of Op Program 12</a:t>
+              <a:t>Reading a line without stopping the vehicle</a:t>
             </a:r>
           </a:p>
         </p:txBody>
@@ -7953,7 +7578,7 @@
                 </a:solidFill>
                 <a:latin typeface="Consolas"/>
               </a:rPr>
-              <a:t>Pathfinder_Op_Program12.ino</a:t>
+              <a:t>a1b_serial_console.ino</a:t>
             </a:r>
           </a:p>
         </p:txBody>
@@ -8009,18 +7634,18 @@
               <a:spcAft>
                 <a:spcPts val="0"/>
               </a:spcAft>
-              <a:defRPr sz="1200">
+              <a:defRPr sz="1300">
                 <a:latin typeface="Consolas"/>
               </a:defRPr>
             </a:pPr>
             <a:r>
-              <a:rPr sz="1200">
+              <a:rPr sz="1300">
                 <a:solidFill>
                   <a:srgbClr val="222222"/>
                 </a:solidFill>
                 <a:latin typeface="Consolas"/>
               </a:rPr>
-              <a:t>void setup() {</a:t>
+              <a:t>void handleSerial() {</a:t>
             </a:r>
           </a:p>
           <a:p>
@@ -8031,18 +7656,18 @@
               <a:spcAft>
                 <a:spcPts val="0"/>
               </a:spcAft>
-              <a:defRPr sz="1200">
+              <a:defRPr sz="1300">
                 <a:latin typeface="Consolas"/>
               </a:defRPr>
             </a:pPr>
             <a:r>
-              <a:rPr sz="1200">
-                <a:solidFill>
-                  <a:srgbClr val="222222"/>
+              <a:rPr sz="1300" b="1">
+                <a:solidFill>
+                  <a:srgbClr val="0E7C86"/>
                 </a:solidFill>
                 <a:latin typeface="Consolas"/>
               </a:rPr>
-              <a:t>  Serial.begin(115200);</a:t>
+              <a:t>  while (Serial.available() &gt; 0) {</a:t>
             </a:r>
           </a:p>
           <a:p>
@@ -8053,17 +7678,39 @@
               <a:spcAft>
                 <a:spcPts val="0"/>
               </a:spcAft>
-              <a:defRPr sz="1200">
+              <a:defRPr sz="1300">
                 <a:latin typeface="Consolas"/>
               </a:defRPr>
             </a:pPr>
             <a:r>
-              <a:rPr sz="1200">
+              <a:rPr sz="1300">
                 <a:solidFill>
                   <a:srgbClr val="222222"/>
                 </a:solidFill>
                 <a:latin typeface="Consolas"/>
               </a:rPr>
+              <a:t>    char c = (char)Serial.read();</a:t>
+            </a:r>
+          </a:p>
+          <a:p>
+            <a:pPr algn="l">
+              <a:lnSpc>
+                <a:spcPct val="100000"/>
+              </a:lnSpc>
+              <a:spcAft>
+                <a:spcPts val="0"/>
+              </a:spcAft>
+              <a:defRPr sz="1300">
+                <a:latin typeface="Consolas"/>
+              </a:defRPr>
+            </a:pPr>
+            <a:r>
+              <a:rPr sz="1300">
+                <a:solidFill>
+                  <a:srgbClr val="222222"/>
+                </a:solidFill>
+                <a:latin typeface="Consolas"/>
+              </a:rPr>
               <a:t> </a:t>
             </a:r>
           </a:p>
@@ -8075,18 +7722,18 @@
               <a:spcAft>
                 <a:spcPts val="0"/>
               </a:spcAft>
-              <a:defRPr sz="1200">
+              <a:defRPr sz="1300">
                 <a:latin typeface="Consolas"/>
               </a:defRPr>
             </a:pPr>
             <a:r>
-              <a:rPr sz="1200">
-                <a:solidFill>
-                  <a:srgbClr val="222222"/>
+              <a:rPr sz="1300" b="1">
+                <a:solidFill>
+                  <a:srgbClr val="0E7C86"/>
                 </a:solidFill>
                 <a:latin typeface="Consolas"/>
               </a:rPr>
-              <a:t>  EEPROM.begin(EEPROM_SIZE);</a:t>
+              <a:t>    if (c == '\n' || c == '\r') {      // accept both</a:t>
             </a:r>
           </a:p>
           <a:p>
@@ -8097,18 +7744,18 @@
               <a:spcAft>
                 <a:spcPts val="0"/>
               </a:spcAft>
-              <a:defRPr sz="1200">
+              <a:defRPr sz="1300">
                 <a:latin typeface="Consolas"/>
               </a:defRPr>
             </a:pPr>
             <a:r>
-              <a:rPr sz="1200">
+              <a:rPr sz="1300">
                 <a:solidFill>
                   <a:srgbClr val="222222"/>
                 </a:solidFill>
                 <a:latin typeface="Consolas"/>
               </a:rPr>
-              <a:t>  loadSettings();              // tuning, range checked</a:t>
+              <a:t>      if (input_line.length() &gt; 0) {</a:t>
             </a:r>
           </a:p>
           <a:p>
@@ -8119,17 +7766,127 @@
               <a:spcAft>
                 <a:spcPts val="0"/>
               </a:spcAft>
-              <a:defRPr sz="1200">
+              <a:defRPr sz="1300">
                 <a:latin typeface="Consolas"/>
               </a:defRPr>
             </a:pPr>
             <a:r>
-              <a:rPr sz="1200">
+              <a:rPr sz="1300">
                 <a:solidFill>
                   <a:srgbClr val="222222"/>
                 </a:solidFill>
                 <a:latin typeface="Consolas"/>
               </a:rPr>
+              <a:t>        runCommand(input_line);</a:t>
+            </a:r>
+          </a:p>
+          <a:p>
+            <a:pPr algn="l">
+              <a:lnSpc>
+                <a:spcPct val="100000"/>
+              </a:lnSpc>
+              <a:spcAft>
+                <a:spcPts val="0"/>
+              </a:spcAft>
+              <a:defRPr sz="1300">
+                <a:latin typeface="Consolas"/>
+              </a:defRPr>
+            </a:pPr>
+            <a:r>
+              <a:rPr sz="1300">
+                <a:solidFill>
+                  <a:srgbClr val="222222"/>
+                </a:solidFill>
+                <a:latin typeface="Consolas"/>
+              </a:rPr>
+              <a:t>        input_line = "";</a:t>
+            </a:r>
+          </a:p>
+          <a:p>
+            <a:pPr algn="l">
+              <a:lnSpc>
+                <a:spcPct val="100000"/>
+              </a:lnSpc>
+              <a:spcAft>
+                <a:spcPts val="0"/>
+              </a:spcAft>
+              <a:defRPr sz="1300">
+                <a:latin typeface="Consolas"/>
+              </a:defRPr>
+            </a:pPr>
+            <a:r>
+              <a:rPr sz="1300">
+                <a:solidFill>
+                  <a:srgbClr val="222222"/>
+                </a:solidFill>
+                <a:latin typeface="Consolas"/>
+              </a:rPr>
+              <a:t>      }</a:t>
+            </a:r>
+          </a:p>
+          <a:p>
+            <a:pPr algn="l">
+              <a:lnSpc>
+                <a:spcPct val="100000"/>
+              </a:lnSpc>
+              <a:spcAft>
+                <a:spcPts val="0"/>
+              </a:spcAft>
+              <a:defRPr sz="1300">
+                <a:latin typeface="Consolas"/>
+              </a:defRPr>
+            </a:pPr>
+            <a:r>
+              <a:rPr sz="1300">
+                <a:solidFill>
+                  <a:srgbClr val="222222"/>
+                </a:solidFill>
+                <a:latin typeface="Consolas"/>
+              </a:rPr>
+              <a:t>      continue;</a:t>
+            </a:r>
+          </a:p>
+          <a:p>
+            <a:pPr algn="l">
+              <a:lnSpc>
+                <a:spcPct val="100000"/>
+              </a:lnSpc>
+              <a:spcAft>
+                <a:spcPts val="0"/>
+              </a:spcAft>
+              <a:defRPr sz="1300">
+                <a:latin typeface="Consolas"/>
+              </a:defRPr>
+            </a:pPr>
+            <a:r>
+              <a:rPr sz="1300">
+                <a:solidFill>
+                  <a:srgbClr val="222222"/>
+                </a:solidFill>
+                <a:latin typeface="Consolas"/>
+              </a:rPr>
+              <a:t>    }</a:t>
+            </a:r>
+          </a:p>
+          <a:p>
+            <a:pPr algn="l">
+              <a:lnSpc>
+                <a:spcPct val="100000"/>
+              </a:lnSpc>
+              <a:spcAft>
+                <a:spcPts val="0"/>
+              </a:spcAft>
+              <a:defRPr sz="1300">
+                <a:latin typeface="Consolas"/>
+              </a:defRPr>
+            </a:pPr>
+            <a:r>
+              <a:rPr sz="1300">
+                <a:solidFill>
+                  <a:srgbClr val="222222"/>
+                </a:solidFill>
+                <a:latin typeface="Consolas"/>
+              </a:rPr>
               <a:t> </a:t>
             </a:r>
           </a:p>
@@ -8141,18 +7898,18 @@
               <a:spcAft>
                 <a:spcPts val="0"/>
               </a:spcAft>
-              <a:defRPr sz="1200">
+              <a:defRPr sz="1300">
                 <a:latin typeface="Consolas"/>
               </a:defRPr>
             </a:pPr>
             <a:r>
-              <a:rPr sz="1200">
-                <a:solidFill>
-                  <a:srgbClr val="222222"/>
+              <a:rPr sz="1300" b="1">
+                <a:solidFill>
+                  <a:srgbClr val="0E7C86"/>
                 </a:solidFill>
                 <a:latin typeface="Consolas"/>
               </a:rPr>
-              <a:t>  Wire.begin(I2C_SDA_PIN, I2C_SCL_PIN);</a:t>
+              <a:t>    if (c &gt;= 32 &amp;&amp; c &lt; 127 &amp;&amp; input_line.length() &lt; 80) {</a:t>
             </a:r>
           </a:p>
           <a:p>
@@ -8163,18 +7920,18 @@
               <a:spcAft>
                 <a:spcPts val="0"/>
               </a:spcAft>
-              <a:defRPr sz="1200">
+              <a:defRPr sz="1300">
                 <a:latin typeface="Consolas"/>
               </a:defRPr>
             </a:pPr>
             <a:r>
-              <a:rPr sz="1200">
+              <a:rPr sz="1300">
                 <a:solidFill>
                   <a:srgbClr val="222222"/>
                 </a:solidFill>
                 <a:latin typeface="Consolas"/>
               </a:rPr>
-              <a:t>  if (is_ina219_present()) {   // which vehicle am I?</a:t>
+              <a:t>      input_line += c;</a:t>
             </a:r>
           </a:p>
           <a:p>
@@ -8185,18 +7942,18 @@
               <a:spcAft>
                 <a:spcPts val="0"/>
               </a:spcAft>
-              <a:defRPr sz="1200">
+              <a:defRPr sz="1300">
                 <a:latin typeface="Consolas"/>
               </a:defRPr>
             </a:pPr>
             <a:r>
-              <a:rPr sz="1200">
+              <a:rPr sz="1300">
                 <a:solidFill>
                   <a:srgbClr val="222222"/>
                 </a:solidFill>
                 <a:latin typeface="Consolas"/>
               </a:rPr>
-              <a:t>    vehicle_config.capabilities = CAP_SELF_TEST | CAP_CURRENT_MON;</a:t>
+              <a:t>    }</a:t>
             </a:r>
           </a:p>
           <a:p>
@@ -8207,18 +7964,18 @@
               <a:spcAft>
                 <a:spcPts val="0"/>
               </a:spcAft>
-              <a:defRPr sz="1200">
+              <a:defRPr sz="1300">
                 <a:latin typeface="Consolas"/>
               </a:defRPr>
             </a:pPr>
             <a:r>
-              <a:rPr sz="1200">
+              <a:rPr sz="1300">
                 <a:solidFill>
                   <a:srgbClr val="222222"/>
                 </a:solidFill>
                 <a:latin typeface="Consolas"/>
               </a:rPr>
-              <a:t>    ina219_init();</a:t>
+              <a:t>  }</a:t>
             </a:r>
           </a:p>
           <a:p>
@@ -8229,304 +7986,18 @@
               <a:spcAft>
                 <a:spcPts val="0"/>
               </a:spcAft>
-              <a:defRPr sz="1200">
+              <a:defRPr sz="1300">
                 <a:latin typeface="Consolas"/>
               </a:defRPr>
             </a:pPr>
             <a:r>
-              <a:rPr sz="1200">
+              <a:rPr sz="1300">
                 <a:solidFill>
                   <a:srgbClr val="222222"/>
                 </a:solidFill>
                 <a:latin typeface="Consolas"/>
               </a:rPr>
-              <a:t>  } else {</a:t>
-            </a:r>
-          </a:p>
-          <a:p>
-            <a:pPr algn="l">
-              <a:lnSpc>
-                <a:spcPct val="100000"/>
-              </a:lnSpc>
-              <a:spcAft>
-                <a:spcPts val="0"/>
-              </a:spcAft>
-              <a:defRPr sz="1200">
-                <a:latin typeface="Consolas"/>
-              </a:defRPr>
-            </a:pPr>
-            <a:r>
-              <a:rPr sz="1200">
-                <a:solidFill>
-                  <a:srgbClr val="222222"/>
-                </a:solidFill>
-                <a:latin typeface="Consolas"/>
-              </a:rPr>
-              <a:t>    vehicle_config.capabilities = 0;</a:t>
-            </a:r>
-          </a:p>
-          <a:p>
-            <a:pPr algn="l">
-              <a:lnSpc>
-                <a:spcPct val="100000"/>
-              </a:lnSpc>
-              <a:spcAft>
-                <a:spcPts val="0"/>
-              </a:spcAft>
-              <a:defRPr sz="1200">
-                <a:latin typeface="Consolas"/>
-              </a:defRPr>
-            </a:pPr>
-            <a:r>
-              <a:rPr sz="1200">
-                <a:solidFill>
-                  <a:srgbClr val="222222"/>
-                </a:solidFill>
-                <a:latin typeface="Consolas"/>
-              </a:rPr>
-              <a:t>    test_state = TEST_DISABLED;</a:t>
-            </a:r>
-          </a:p>
-          <a:p>
-            <a:pPr algn="l">
-              <a:lnSpc>
-                <a:spcPct val="100000"/>
-              </a:lnSpc>
-              <a:spcAft>
-                <a:spcPts val="0"/>
-              </a:spcAft>
-              <a:defRPr sz="1200">
-                <a:latin typeface="Consolas"/>
-              </a:defRPr>
-            </a:pPr>
-            <a:r>
-              <a:rPr sz="1200">
-                <a:solidFill>
-                  <a:srgbClr val="222222"/>
-                </a:solidFill>
-                <a:latin typeface="Consolas"/>
-              </a:rPr>
-              <a:t>  }</a:t>
-            </a:r>
-          </a:p>
-          <a:p>
-            <a:pPr algn="l">
-              <a:lnSpc>
-                <a:spcPct val="100000"/>
-              </a:lnSpc>
-              <a:spcAft>
-                <a:spcPts val="0"/>
-              </a:spcAft>
-              <a:defRPr sz="1200">
-                <a:latin typeface="Consolas"/>
-              </a:defRPr>
-            </a:pPr>
-            <a:r>
-              <a:rPr sz="1200">
-                <a:solidFill>
-                  <a:srgbClr val="222222"/>
-                </a:solidFill>
-                <a:latin typeface="Consolas"/>
-              </a:rPr>
-              <a:t> </a:t>
-            </a:r>
-          </a:p>
-          <a:p>
-            <a:pPr algn="l">
-              <a:lnSpc>
-                <a:spcPct val="100000"/>
-              </a:lnSpc>
-              <a:spcAft>
-                <a:spcPts val="0"/>
-              </a:spcAft>
-              <a:defRPr sz="1200">
-                <a:latin typeface="Consolas"/>
-              </a:defRPr>
-            </a:pPr>
-            <a:r>
-              <a:rPr sz="1200" b="1">
-                <a:solidFill>
-                  <a:srgbClr val="0E7C86"/>
-                </a:solidFill>
-                <a:latin typeface="Consolas"/>
-              </a:rPr>
-              <a:t>  setup_motors();              // outputs safe FIRST</a:t>
-            </a:r>
-          </a:p>
-          <a:p>
-            <a:pPr algn="l">
-              <a:lnSpc>
-                <a:spcPct val="100000"/>
-              </a:lnSpc>
-              <a:spcAft>
-                <a:spcPts val="0"/>
-              </a:spcAft>
-              <a:defRPr sz="1200">
-                <a:latin typeface="Consolas"/>
-              </a:defRPr>
-            </a:pPr>
-            <a:r>
-              <a:rPr sz="1200" b="1">
-                <a:solidFill>
-                  <a:srgbClr val="0E7C86"/>
-                </a:solidFill>
-                <a:latin typeface="Consolas"/>
-              </a:rPr>
-              <a:t>  setup_servos();</a:t>
-            </a:r>
-          </a:p>
-          <a:p>
-            <a:pPr algn="l">
-              <a:lnSpc>
-                <a:spcPct val="100000"/>
-              </a:lnSpc>
-              <a:spcAft>
-                <a:spcPts val="0"/>
-              </a:spcAft>
-              <a:defRPr sz="1200">
-                <a:latin typeface="Consolas"/>
-              </a:defRPr>
-            </a:pPr>
-            <a:r>
-              <a:rPr sz="1200">
-                <a:solidFill>
-                  <a:srgbClr val="222222"/>
-                </a:solidFill>
-                <a:latin typeface="Consolas"/>
-              </a:rPr>
-              <a:t> </a:t>
-            </a:r>
-          </a:p>
-          <a:p>
-            <a:pPr algn="l">
-              <a:lnSpc>
-                <a:spcPct val="100000"/>
-              </a:lnSpc>
-              <a:spcAft>
-                <a:spcPts val="0"/>
-              </a:spcAft>
-              <a:defRPr sz="1200">
-                <a:latin typeface="Consolas"/>
-              </a:defRPr>
-            </a:pPr>
-            <a:r>
-              <a:rPr sz="1200">
-                <a:solidFill>
-                  <a:srgbClr val="222222"/>
-                </a:solidFill>
-                <a:latin typeface="Consolas"/>
-              </a:rPr>
-              <a:t>  strip.begin();               // then the lights</a:t>
-            </a:r>
-          </a:p>
-          <a:p>
-            <a:pPr algn="l">
-              <a:lnSpc>
-                <a:spcPct val="100000"/>
-              </a:lnSpc>
-              <a:spcAft>
-                <a:spcPts val="0"/>
-              </a:spcAft>
-              <a:defRPr sz="1200">
-                <a:latin typeface="Consolas"/>
-              </a:defRPr>
-            </a:pPr>
-            <a:r>
-              <a:rPr sz="1200">
-                <a:solidFill>
-                  <a:srgbClr val="222222"/>
-                </a:solidFill>
-                <a:latin typeface="Consolas"/>
-              </a:rPr>
-              <a:t>  set_disconnected_lighting();</a:t>
-            </a:r>
-          </a:p>
-          <a:p>
-            <a:pPr algn="l">
-              <a:lnSpc>
-                <a:spcPct val="100000"/>
-              </a:lnSpc>
-              <a:spcAft>
-                <a:spcPts val="0"/>
-              </a:spcAft>
-              <a:defRPr sz="1200">
-                <a:latin typeface="Consolas"/>
-              </a:defRPr>
-            </a:pPr>
-            <a:r>
-              <a:rPr sz="1200">
-                <a:solidFill>
-                  <a:srgbClr val="222222"/>
-                </a:solidFill>
-                <a:latin typeface="Consolas"/>
-              </a:rPr>
-              <a:t> </a:t>
-            </a:r>
-          </a:p>
-          <a:p>
-            <a:pPr algn="l">
-              <a:lnSpc>
-                <a:spcPct val="100000"/>
-              </a:lnSpc>
-              <a:spcAft>
-                <a:spcPts val="0"/>
-              </a:spcAft>
-              <a:defRPr sz="1200">
-                <a:latin typeface="Consolas"/>
-              </a:defRPr>
-            </a:pPr>
-            <a:r>
-              <a:rPr sz="1200">
-                <a:solidFill>
-                  <a:srgbClr val="222222"/>
-                </a:solidFill>
-                <a:latin typeface="Consolas"/>
-              </a:rPr>
-              <a:t>  setup_bluetooth();           // then the radio</a:t>
-            </a:r>
-          </a:p>
-          <a:p>
-            <a:pPr algn="l">
-              <a:lnSpc>
-                <a:spcPct val="100000"/>
-              </a:lnSpc>
-              <a:spcAft>
-                <a:spcPts val="0"/>
-              </a:spcAft>
-              <a:defRPr sz="1200">
-                <a:latin typeface="Consolas"/>
-              </a:defRPr>
-            </a:pPr>
-            <a:r>
-              <a:rPr sz="1200">
-                <a:solidFill>
-                  <a:srgbClr val="222222"/>
-                </a:solidFill>
-                <a:latin typeface="Consolas"/>
-              </a:rPr>
-              <a:t> </a:t>
-            </a:r>
-          </a:p>
-          <a:p>
-            <a:pPr algn="l">
-              <a:lnSpc>
-                <a:spcPct val="100000"/>
-              </a:lnSpc>
-              <a:spcAft>
-                <a:spcPts val="0"/>
-              </a:spcAft>
-              <a:defRPr sz="1200">
-                <a:latin typeface="Consolas"/>
-              </a:defRPr>
-            </a:pPr>
-            <a:r>
-              <a:rPr sz="1200">
-                <a:solidFill>
-                  <a:srgbClr val="222222"/>
-                </a:solidFill>
-                <a:latin typeface="Consolas"/>
-              </a:rPr>
-              <a:t>  pinMode(PAIR_TRIGGER_PIN, INPUT_PULLUP);</a:t>
+              <a:t>}</a:t>
             </a:r>
           </a:p>
         </p:txBody>
@@ -8574,7 +8045,7 @@
                 </a:solidFill>
                 <a:latin typeface="Calibri"/>
               </a:rPr>
-              <a:t>The ORDER is deliberate.</a:t>
+              <a:t>Serial.readStringUntil() would WAIT for a newline. While it waits the vehicle is not driving. Never use it on a moving machine.</a:t>
             </a:r>
           </a:p>
           <a:p>
@@ -8599,7 +8070,7 @@
                 </a:solidFill>
                 <a:latin typeface="Calibri"/>
               </a:rPr>
-              <a:t>Settings first, because everything else may depend on them.</a:t>
+              <a:t>This takes whatever bytes have arrived and returns immediately, every time.</a:t>
             </a:r>
           </a:p>
           <a:p>
@@ -8624,7 +8095,7 @@
                 </a:solidFill>
                 <a:latin typeface="Calibri"/>
               </a:rPr>
-              <a:t>Hardware detection next, because it decides what the rest of setup is even allowed to do.</a:t>
+              <a:t>The Serial Monitor sends whatever its line-ending dropdown says: nothing, LF, CR, or both. Handle all four or the console looks broken to whoever set theirs differently.</a:t>
             </a:r>
           </a:p>
           <a:p>
@@ -8649,32 +8120,7 @@
                 </a:solidFill>
                 <a:latin typeface="Calibri"/>
               </a:rPr>
-              <a:t>Motors before anything slow. An uninitialised H-bridge pin floats, and a floating pin can twitch a motor. Get the outputs into a known safe state as early as you can.</a:t>
-            </a:r>
-          </a:p>
-          <a:p>
-            <a:pPr algn="l">
-              <a:lnSpc>
-                <a:spcPct val="100000"/>
-              </a:lnSpc>
-              <a:spcAft>
-                <a:spcPts val="600"/>
-              </a:spcAft>
-              <a:defRPr sz="1800" b="0">
-                <a:solidFill>
-                  <a:srgbClr val="222222"/>
-                </a:solidFill>
-                <a:latin typeface="Calibri"/>
-              </a:defRPr>
-            </a:pPr>
-            <a:r>
-              <a:rPr sz="1800" b="0">
-                <a:solidFill>
-                  <a:srgbClr val="222222"/>
-                </a:solidFill>
-                <a:latin typeface="Calibri"/>
-              </a:rPr>
-              <a:t>Radio last. It is the slowest thing to come up and nothing else waits on it.</a:t>
+              <a:t>The length cap matters. Without it a stuck sender grows the String until the ESP32 runs out of heap.</a:t>
             </a:r>
           </a:p>
         </p:txBody>
@@ -8738,7 +8184,7 @@
                 </a:solidFill>
                 <a:latin typeface="Calibri"/>
               </a:rPr>
-              <a:t>The boot sequence of Op Program 12  (continued)</a:t>
+              <a:t>Where we are</a:t>
             </a:r>
           </a:p>
         </p:txBody>
@@ -8885,74 +8331,26 @@
       </p:sp>
       <p:sp>
         <p:nvSpPr>
-          <p:cNvPr id="6" name="TextBox 5"/>
-          <p:cNvSpPr txBox="1"/>
-          <p:nvPr/>
-        </p:nvSpPr>
-        <p:spPr>
-          <a:xfrm>
-            <a:off x="502920" y="1188720"/>
-            <a:ext cx="7047088" cy="274320"/>
-          </a:xfrm>
-          <a:prstGeom prst="rect">
-            <a:avLst/>
-          </a:prstGeom>
-          <a:noFill/>
-        </p:spPr>
-        <p:txBody>
-          <a:bodyPr wrap="square" lIns="0" tIns="0" rIns="0" bIns="0">
-            <a:spAutoFit/>
-          </a:bodyPr>
-          <a:lstStyle/>
-          <a:p>
-            <a:pPr algn="l">
-              <a:lnSpc>
-                <a:spcPct val="100000"/>
-              </a:lnSpc>
-              <a:spcAft>
-                <a:spcPts val="200"/>
-              </a:spcAft>
-              <a:defRPr sz="1200" b="1">
-                <a:solidFill>
-                  <a:srgbClr val="0E7C86"/>
-                </a:solidFill>
-                <a:latin typeface="Consolas"/>
-              </a:defRPr>
-            </a:pPr>
-            <a:r>
-              <a:rPr sz="1200" b="1">
-                <a:solidFill>
-                  <a:srgbClr val="0E7C86"/>
-                </a:solidFill>
-                <a:latin typeface="Consolas"/>
-              </a:rPr>
-              <a:t>Pathfinder_Op_Program12.ino</a:t>
-            </a:r>
-          </a:p>
-        </p:txBody>
-      </p:sp>
-      <p:sp>
-        <p:nvSpPr>
-          <p:cNvPr id="7" name="CODE_PANEL"/>
+          <p:cNvPr id="6" name="Rounded Rectangle 5"/>
           <p:cNvSpPr/>
           <p:nvPr/>
         </p:nvSpPr>
         <p:spPr>
           <a:xfrm>
-            <a:off x="502920" y="1517904"/>
-            <a:ext cx="7047088" cy="4745736"/>
+            <a:off x="502920" y="2240280"/>
+            <a:ext cx="3631082" cy="1737360"/>
           </a:xfrm>
           <a:prstGeom prst="roundRect">
             <a:avLst>
-              <a:gd name="adj" fmla="val 4000"/>
+              <a:gd name="adj" fmla="val 8000"/>
             </a:avLst>
           </a:prstGeom>
           <a:solidFill>
-            <a:srgbClr val="F4F6F8"/>
+            <a:srgbClr val="EEF3F8"/>
           </a:solidFill>
           <a:ln w="12700">
             <a:solidFill>
-              <a:srgbClr val="C8D2DE"/>
+              <a:srgbClr val="0E7C86"/>
             </a:solidFill>
           </a:ln>
           <a:effectLst/>
@@ -8972,50 +8370,315 @@
           </a:fontRef>
         </p:style>
         <p:txBody>
-          <a:bodyPr rtlCol="0" anchor="t" wrap="square" lIns="146304" tIns="91440" bIns="73152"/>
-          <a:lstStyle/>
-          <a:p>
-            <a:pPr algn="l">
+          <a:bodyPr rtlCol="0" anchor="ctr" wrap="square" lIns="73152" rIns="73152"/>
+          <a:lstStyle/>
+          <a:p>
+            <a:pPr algn="ctr">
               <a:lnSpc>
                 <a:spcPct val="100000"/>
               </a:lnSpc>
               <a:spcAft>
                 <a:spcPts val="0"/>
               </a:spcAft>
-              <a:defRPr sz="1200">
-                <a:latin typeface="Consolas"/>
-              </a:defRPr>
-            </a:pPr>
-            <a:r>
-              <a:rPr sz="1200">
-                <a:solidFill>
-                  <a:srgbClr val="222222"/>
-                </a:solidFill>
-                <a:latin typeface="Consolas"/>
-              </a:rPr>
-              <a:t>  pinMode(TEST_PIN, INPUT);</a:t>
-            </a:r>
-          </a:p>
-          <a:p>
-            <a:pPr algn="l">
+              <a:defRPr sz="1700" b="0">
+                <a:solidFill>
+                  <a:srgbClr val="1F3A5F"/>
+                </a:solidFill>
+                <a:latin typeface="Calibri"/>
+              </a:defRPr>
+            </a:pPr>
+            <a:r>
+              <a:rPr sz="1700" b="0">
+                <a:solidFill>
+                  <a:srgbClr val="1F3A5F"/>
+                </a:solidFill>
+                <a:latin typeface="Calibri"/>
+              </a:rPr>
+              <a:t>Architecture</a:t>
+            </a:r>
+          </a:p>
+        </p:txBody>
+      </p:sp>
+      <p:sp>
+        <p:nvSpPr>
+          <p:cNvPr id="7" name="TextBox 6"/>
+          <p:cNvSpPr txBox="1"/>
+          <p:nvPr/>
+        </p:nvSpPr>
+        <p:spPr>
+          <a:xfrm>
+            <a:off x="502920" y="1856232"/>
+            <a:ext cx="3631082" cy="347472"/>
+          </a:xfrm>
+          <a:prstGeom prst="rect">
+            <a:avLst/>
+          </a:prstGeom>
+          <a:noFill/>
+        </p:spPr>
+        <p:txBody>
+          <a:bodyPr wrap="square" lIns="0" tIns="0" rIns="0" bIns="0">
+            <a:spAutoFit/>
+          </a:bodyPr>
+          <a:lstStyle/>
+          <a:p>
+            <a:pPr algn="ctr">
+              <a:lnSpc>
+                <a:spcPct val="100000"/>
+              </a:lnSpc>
+              <a:spcAft>
+                <a:spcPts val="600"/>
+              </a:spcAft>
+              <a:defRPr sz="1200" b="1">
+                <a:solidFill>
+                  <a:srgbClr val="0E7C86"/>
+                </a:solidFill>
+                <a:latin typeface="Calibri"/>
+              </a:defRPr>
+            </a:pPr>
+            <a:r>
+              <a:rPr sz="1200" b="1">
+                <a:solidFill>
+                  <a:srgbClr val="0E7C86"/>
+                </a:solidFill>
+                <a:latin typeface="Calibri"/>
+              </a:rPr>
+              <a:t>done</a:t>
+            </a:r>
+          </a:p>
+        </p:txBody>
+      </p:sp>
+      <p:sp>
+        <p:nvSpPr>
+          <p:cNvPr id="8" name="Rounded Rectangle 7"/>
+          <p:cNvSpPr/>
+          <p:nvPr/>
+        </p:nvSpPr>
+        <p:spPr>
+          <a:xfrm>
+            <a:off x="4280306" y="2240280"/>
+            <a:ext cx="3631082" cy="1737360"/>
+          </a:xfrm>
+          <a:prstGeom prst="roundRect">
+            <a:avLst>
+              <a:gd name="adj" fmla="val 8000"/>
+            </a:avLst>
+          </a:prstGeom>
+          <a:solidFill>
+            <a:srgbClr val="EEF3F8"/>
+          </a:solidFill>
+          <a:ln w="12700">
+            <a:solidFill>
+              <a:srgbClr val="0E7C86"/>
+            </a:solidFill>
+          </a:ln>
+          <a:effectLst/>
+        </p:spPr>
+        <p:style>
+          <a:lnRef idx="1">
+            <a:schemeClr val="accent1"/>
+          </a:lnRef>
+          <a:fillRef idx="3">
+            <a:schemeClr val="accent1"/>
+          </a:fillRef>
+          <a:effectRef idx="2">
+            <a:schemeClr val="accent1"/>
+          </a:effectRef>
+          <a:fontRef idx="minor">
+            <a:schemeClr val="lt1"/>
+          </a:fontRef>
+        </p:style>
+        <p:txBody>
+          <a:bodyPr rtlCol="0" anchor="ctr" wrap="square" lIns="73152" rIns="73152"/>
+          <a:lstStyle/>
+          <a:p>
+            <a:pPr algn="ctr">
               <a:lnSpc>
                 <a:spcPct val="100000"/>
               </a:lnSpc>
               <a:spcAft>
                 <a:spcPts val="0"/>
               </a:spcAft>
-              <a:defRPr sz="1200">
-                <a:latin typeface="Consolas"/>
-              </a:defRPr>
-            </a:pPr>
-            <a:r>
-              <a:rPr sz="1200">
-                <a:solidFill>
-                  <a:srgbClr val="222222"/>
-                </a:solidFill>
-                <a:latin typeface="Consolas"/>
-              </a:rPr>
-              <a:t>}</a:t>
+              <a:defRPr sz="1700" b="0">
+                <a:solidFill>
+                  <a:srgbClr val="1F3A5F"/>
+                </a:solidFill>
+                <a:latin typeface="Calibri"/>
+              </a:defRPr>
+            </a:pPr>
+            <a:r>
+              <a:rPr sz="1700" b="0">
+                <a:solidFill>
+                  <a:srgbClr val="1F3A5F"/>
+                </a:solidFill>
+                <a:latin typeface="Calibri"/>
+              </a:rPr>
+              <a:t>Tabs and Config.h</a:t>
+            </a:r>
+          </a:p>
+        </p:txBody>
+      </p:sp>
+      <p:sp>
+        <p:nvSpPr>
+          <p:cNvPr id="9" name="TextBox 8"/>
+          <p:cNvSpPr txBox="1"/>
+          <p:nvPr/>
+        </p:nvSpPr>
+        <p:spPr>
+          <a:xfrm>
+            <a:off x="4280306" y="1856232"/>
+            <a:ext cx="3631082" cy="347472"/>
+          </a:xfrm>
+          <a:prstGeom prst="rect">
+            <a:avLst/>
+          </a:prstGeom>
+          <a:noFill/>
+        </p:spPr>
+        <p:txBody>
+          <a:bodyPr wrap="square" lIns="0" tIns="0" rIns="0" bIns="0">
+            <a:spAutoFit/>
+          </a:bodyPr>
+          <a:lstStyle/>
+          <a:p>
+            <a:pPr algn="ctr">
+              <a:lnSpc>
+                <a:spcPct val="100000"/>
+              </a:lnSpc>
+              <a:spcAft>
+                <a:spcPts val="600"/>
+              </a:spcAft>
+              <a:defRPr sz="1200" b="1">
+                <a:solidFill>
+                  <a:srgbClr val="0E7C86"/>
+                </a:solidFill>
+                <a:latin typeface="Calibri"/>
+              </a:defRPr>
+            </a:pPr>
+            <a:r>
+              <a:rPr sz="1200" b="1">
+                <a:solidFill>
+                  <a:srgbClr val="0E7C86"/>
+                </a:solidFill>
+                <a:latin typeface="Calibri"/>
+              </a:rPr>
+              <a:t>done</a:t>
+            </a:r>
+          </a:p>
+        </p:txBody>
+      </p:sp>
+      <p:sp>
+        <p:nvSpPr>
+          <p:cNvPr id="10" name="Rounded Rectangle 9"/>
+          <p:cNvSpPr/>
+          <p:nvPr/>
+        </p:nvSpPr>
+        <p:spPr>
+          <a:xfrm>
+            <a:off x="8057692" y="2240280"/>
+            <a:ext cx="3631082" cy="1737360"/>
+          </a:xfrm>
+          <a:prstGeom prst="roundRect">
+            <a:avLst>
+              <a:gd name="adj" fmla="val 8000"/>
+            </a:avLst>
+          </a:prstGeom>
+          <a:solidFill>
+            <a:srgbClr val="D6ECEE"/>
+          </a:solidFill>
+          <a:ln w="25400">
+            <a:solidFill>
+              <a:srgbClr val="0E7C86"/>
+            </a:solidFill>
+          </a:ln>
+          <a:effectLst/>
+        </p:spPr>
+        <p:style>
+          <a:lnRef idx="1">
+            <a:schemeClr val="accent1"/>
+          </a:lnRef>
+          <a:fillRef idx="3">
+            <a:schemeClr val="accent1"/>
+          </a:fillRef>
+          <a:effectRef idx="2">
+            <a:schemeClr val="accent1"/>
+          </a:effectRef>
+          <a:fontRef idx="minor">
+            <a:schemeClr val="lt1"/>
+          </a:fontRef>
+        </p:style>
+        <p:txBody>
+          <a:bodyPr rtlCol="0" anchor="ctr" wrap="square" lIns="73152" rIns="73152"/>
+          <a:lstStyle/>
+          <a:p>
+            <a:pPr algn="ctr">
+              <a:lnSpc>
+                <a:spcPct val="100000"/>
+              </a:lnSpc>
+              <a:spcAft>
+                <a:spcPts val="0"/>
+              </a:spcAft>
+              <a:defRPr sz="1700" b="1">
+                <a:solidFill>
+                  <a:srgbClr val="1F3A5F"/>
+                </a:solidFill>
+                <a:latin typeface="Calibri"/>
+              </a:defRPr>
+            </a:pPr>
+            <a:r>
+              <a:rPr sz="1700" b="1">
+                <a:solidFill>
+                  <a:srgbClr val="1F3A5F"/>
+                </a:solidFill>
+                <a:latin typeface="Calibri"/>
+              </a:rPr>
+              <a:t>The console</a:t>
+            </a:r>
+          </a:p>
+        </p:txBody>
+      </p:sp>
+      <p:sp>
+        <p:nvSpPr>
+          <p:cNvPr id="11" name="TextBox 10"/>
+          <p:cNvSpPr txBox="1"/>
+          <p:nvPr/>
+        </p:nvSpPr>
+        <p:spPr>
+          <a:xfrm>
+            <a:off x="8057692" y="1856232"/>
+            <a:ext cx="3631082" cy="347472"/>
+          </a:xfrm>
+          <a:prstGeom prst="rect">
+            <a:avLst/>
+          </a:prstGeom>
+          <a:noFill/>
+        </p:spPr>
+        <p:txBody>
+          <a:bodyPr wrap="square" lIns="0" tIns="0" rIns="0" bIns="0">
+            <a:spAutoFit/>
+          </a:bodyPr>
+          <a:lstStyle/>
+          <a:p>
+            <a:pPr algn="ctr">
+              <a:lnSpc>
+                <a:spcPct val="100000"/>
+              </a:lnSpc>
+              <a:spcAft>
+                <a:spcPts val="600"/>
+              </a:spcAft>
+              <a:defRPr sz="1200" b="1">
+                <a:solidFill>
+                  <a:srgbClr val="0E7C86"/>
+                </a:solidFill>
+                <a:latin typeface="Calibri"/>
+              </a:defRPr>
+            </a:pPr>
+            <a:r>
+              <a:rPr sz="1200" b="1">
+                <a:solidFill>
+                  <a:srgbClr val="0E7C86"/>
+                </a:solidFill>
+                <a:latin typeface="Calibri"/>
+              </a:rPr>
+              <a:t>NOW</a:t>
             </a:r>
           </a:p>
         </p:txBody>
@@ -9079,7 +8742,7 @@
                 </a:solidFill>
                 <a:latin typeface="Calibri"/>
               </a:rPr>
-              <a:t>Who this course is for, and what it is not</a:t>
+              <a:t>What you will be able to do by the end</a:t>
             </a:r>
           </a:p>
         </p:txBody>
@@ -9233,7 +8896,7 @@
         <p:spPr>
           <a:xfrm>
             <a:off x="502920" y="1188720"/>
-            <a:ext cx="11185855" cy="5074920"/>
+            <a:ext cx="11185855" cy="502920"/>
           </a:xfrm>
           <a:prstGeom prst="rect">
             <a:avLst/>
@@ -9251,105 +8914,171 @@
                 <a:spcPct val="100000"/>
               </a:lnSpc>
               <a:spcAft>
-                <a:spcPts val="900"/>
-              </a:spcAft>
-              <a:defRPr sz="1800" b="0">
-                <a:solidFill>
-                  <a:srgbClr val="222222"/>
-                </a:solidFill>
-                <a:latin typeface="Calibri"/>
-              </a:defRPr>
-            </a:pPr>
-            <a:r>
-              <a:rPr sz="1800" b="0">
-                <a:solidFill>
-                  <a:srgbClr val="222222"/>
-                </a:solidFill>
-                <a:latin typeface="Calibri"/>
-              </a:rPr>
-              <a:t>You have driven a Pathfinder. You can read C++: functions, loops, structs, pointers, and you are not frightened of a header file.</a:t>
-            </a:r>
-          </a:p>
-          <a:p>
-            <a:pPr algn="l">
-              <a:lnSpc>
-                <a:spcPct val="100000"/>
-              </a:lnSpc>
-              <a:spcAft>
-                <a:spcPts val="900"/>
-              </a:spcAft>
-              <a:defRPr sz="1800" b="0">
-                <a:solidFill>
-                  <a:srgbClr val="222222"/>
-                </a:solidFill>
-                <a:latin typeface="Calibri"/>
-              </a:defRPr>
-            </a:pPr>
-          </a:p>
-          <a:p>
-            <a:pPr algn="l">
-              <a:lnSpc>
-                <a:spcPct val="100000"/>
-              </a:lnSpc>
-              <a:spcAft>
-                <a:spcPts val="900"/>
-              </a:spcAft>
-              <a:defRPr sz="1800" b="0">
-                <a:solidFill>
-                  <a:srgbClr val="222222"/>
-                </a:solidFill>
-                <a:latin typeface="Calibri"/>
-              </a:defRPr>
-            </a:pPr>
-            <a:r>
-              <a:rPr sz="1800" b="0">
-                <a:solidFill>
-                  <a:srgbClr val="222222"/>
-                </a:solidFill>
-                <a:latin typeface="Calibri"/>
-              </a:rPr>
-              <a:t>This course is NOT more features. The vehicle does the same things it did on the beginner programs.</a:t>
-            </a:r>
-          </a:p>
-          <a:p>
-            <a:pPr algn="l">
-              <a:lnSpc>
-                <a:spcPct val="100000"/>
-              </a:lnSpc>
-              <a:spcAft>
-                <a:spcPts val="900"/>
-              </a:spcAft>
-              <a:defRPr sz="1800" b="0">
-                <a:solidFill>
-                  <a:srgbClr val="222222"/>
-                </a:solidFill>
-                <a:latin typeface="Calibri"/>
-              </a:defRPr>
-            </a:pPr>
-          </a:p>
-          <a:p>
-            <a:pPr algn="l">
-              <a:lnSpc>
-                <a:spcPct val="100000"/>
-              </a:lnSpc>
-              <a:spcAft>
-                <a:spcPts val="900"/>
-              </a:spcAft>
-              <a:defRPr sz="1800" b="0">
-                <a:solidFill>
-                  <a:srgbClr val="222222"/>
-                </a:solidFill>
-                <a:latin typeface="Calibri"/>
-              </a:defRPr>
-            </a:pPr>
-            <a:r>
-              <a:rPr sz="1800" b="0">
-                <a:solidFill>
-                  <a:srgbClr val="222222"/>
-                </a:solidFill>
-                <a:latin typeface="Calibri"/>
-              </a:rPr>
-              <a:t>It is about how the program is BUILT: how you split 1300 lines so that somebody else can find things in it, how you make animations that never block the motors, how you store settings that survive a power cycle, and how you make a machine test its own hardware.</a:t>
+                <a:spcPts val="600"/>
+              </a:spcAft>
+              <a:defRPr sz="1900" b="1">
+                <a:solidFill>
+                  <a:srgbClr val="0E7C86"/>
+                </a:solidFill>
+                <a:latin typeface="Calibri"/>
+              </a:defRPr>
+            </a:pPr>
+            <a:r>
+              <a:rPr sz="1900" b="1">
+                <a:solidFill>
+                  <a:srgbClr val="0E7C86"/>
+                </a:solidFill>
+                <a:latin typeface="Calibri"/>
+              </a:rPr>
+              <a:t>By the end of this lesson you will be able to:</a:t>
+            </a:r>
+          </a:p>
+        </p:txBody>
+      </p:sp>
+      <p:sp>
+        <p:nvSpPr>
+          <p:cNvPr id="7" name="TextBox 6"/>
+          <p:cNvSpPr txBox="1"/>
+          <p:nvPr/>
+        </p:nvSpPr>
+        <p:spPr>
+          <a:xfrm>
+            <a:off x="502920" y="1737360"/>
+            <a:ext cx="11185855" cy="4526280"/>
+          </a:xfrm>
+          <a:prstGeom prst="rect">
+            <a:avLst/>
+          </a:prstGeom>
+          <a:noFill/>
+        </p:spPr>
+        <p:txBody>
+          <a:bodyPr wrap="square" lIns="0" tIns="0" rIns="0" bIns="0">
+            <a:spAutoFit/>
+          </a:bodyPr>
+          <a:lstStyle/>
+          <a:p>
+            <a:pPr algn="l">
+              <a:lnSpc>
+                <a:spcPct val="100000"/>
+              </a:lnSpc>
+              <a:spcAft>
+                <a:spcPts val="1300"/>
+              </a:spcAft>
+              <a:defRPr sz="1900" b="0">
+                <a:solidFill>
+                  <a:srgbClr val="222222"/>
+                </a:solidFill>
+                <a:latin typeface="Calibri"/>
+              </a:defRPr>
+            </a:pPr>
+            <a:r>
+              <a:rPr sz="1900" b="0">
+                <a:solidFill>
+                  <a:srgbClr val="222222"/>
+                </a:solidFill>
+                <a:latin typeface="Calibri"/>
+              </a:rPr>
+              <a:t>1.   Explain how the Arduino IDE assembles a multi-tab sketch, and why a type has to live in a header</a:t>
+            </a:r>
+          </a:p>
+          <a:p>
+            <a:pPr algn="l">
+              <a:lnSpc>
+                <a:spcPct val="100000"/>
+              </a:lnSpc>
+              <a:spcAft>
+                <a:spcPts val="1300"/>
+              </a:spcAft>
+              <a:defRPr sz="1900" b="0">
+                <a:solidFill>
+                  <a:srgbClr val="222222"/>
+                </a:solidFill>
+                <a:latin typeface="Calibri"/>
+              </a:defRPr>
+            </a:pPr>
+            <a:r>
+              <a:rPr sz="1900" b="0">
+                <a:solidFill>
+                  <a:srgbClr val="222222"/>
+                </a:solidFill>
+                <a:latin typeface="Calibri"/>
+              </a:rPr>
+              <a:t>2.   Split a program by subsystem without breaking it</a:t>
+            </a:r>
+          </a:p>
+          <a:p>
+            <a:pPr algn="l">
+              <a:lnSpc>
+                <a:spcPct val="100000"/>
+              </a:lnSpc>
+              <a:spcAft>
+                <a:spcPts val="1300"/>
+              </a:spcAft>
+              <a:defRPr sz="1900" b="0">
+                <a:solidFill>
+                  <a:srgbClr val="222222"/>
+                </a:solidFill>
+                <a:latin typeface="Calibri"/>
+              </a:defRPr>
+            </a:pPr>
+            <a:r>
+              <a:rPr sz="1900" b="0">
+                <a:solidFill>
+                  <a:srgbClr val="222222"/>
+                </a:solidFill>
+                <a:latin typeface="Calibri"/>
+              </a:rPr>
+              <a:t>3.   Say why the program detects its hardware rather than being told about it</a:t>
+            </a:r>
+          </a:p>
+          <a:p>
+            <a:pPr algn="l">
+              <a:lnSpc>
+                <a:spcPct val="100000"/>
+              </a:lnSpc>
+              <a:spcAft>
+                <a:spcPts val="1300"/>
+              </a:spcAft>
+              <a:defRPr sz="1900" b="0">
+                <a:solidFill>
+                  <a:srgbClr val="222222"/>
+                </a:solidFill>
+                <a:latin typeface="Calibri"/>
+              </a:defRPr>
+            </a:pPr>
+            <a:r>
+              <a:rPr sz="1900" b="0">
+                <a:solidFill>
+                  <a:srgbClr val="222222"/>
+                </a:solidFill>
+                <a:latin typeface="Calibri"/>
+              </a:rPr>
+              <a:t>4.   Write a serial console that does not block the vehicle</a:t>
+            </a:r>
+          </a:p>
+          <a:p>
+            <a:pPr algn="l">
+              <a:lnSpc>
+                <a:spcPct val="100000"/>
+              </a:lnSpc>
+              <a:spcAft>
+                <a:spcPts val="1300"/>
+              </a:spcAft>
+              <a:defRPr sz="1900" b="0">
+                <a:solidFill>
+                  <a:srgbClr val="222222"/>
+                </a:solidFill>
+                <a:latin typeface="Calibri"/>
+              </a:defRPr>
+            </a:pPr>
+            <a:r>
+              <a:rPr sz="1900" b="0">
+                <a:solidFill>
+                  <a:srgbClr val="222222"/>
+                </a:solidFill>
+                <a:latin typeface="Calibri"/>
+              </a:rPr>
+              <a:t>5.   Read the boot sequence of Op Program 12 and justify its order</a:t>
             </a:r>
           </a:p>
         </p:txBody>
@@ -9413,7 +9142,7 @@
                 </a:solidFill>
                 <a:latin typeface="Calibri"/>
               </a:rPr>
-              <a:t>How a command gets from your thumb to a wheel</a:t>
+              <a:t>Do it now  -  a console</a:t>
             </a:r>
           </a:p>
         </p:txBody>
@@ -9554,6 +9283,1962 @@
                 <a:latin typeface="Calibri"/>
               </a:rPr>
               <a:t>19</a:t>
+            </a:r>
+          </a:p>
+        </p:txBody>
+      </p:sp>
+      <p:sp>
+        <p:nvSpPr>
+          <p:cNvPr id="6" name="Rounded Rectangle 5"/>
+          <p:cNvSpPr/>
+          <p:nvPr/>
+        </p:nvSpPr>
+        <p:spPr>
+          <a:xfrm>
+            <a:off x="502920" y="1188720"/>
+            <a:ext cx="11185855" cy="530352"/>
+          </a:xfrm>
+          <a:prstGeom prst="roundRect">
+            <a:avLst>
+              <a:gd name="adj" fmla="val 4000"/>
+            </a:avLst>
+          </a:prstGeom>
+          <a:solidFill>
+            <a:srgbClr val="0E7C86"/>
+          </a:solidFill>
+          <a:ln>
+            <a:noFill/>
+          </a:ln>
+          <a:effectLst/>
+        </p:spPr>
+        <p:style>
+          <a:lnRef idx="1">
+            <a:schemeClr val="accent1"/>
+          </a:lnRef>
+          <a:fillRef idx="3">
+            <a:schemeClr val="accent1"/>
+          </a:fillRef>
+          <a:effectRef idx="2">
+            <a:schemeClr val="accent1"/>
+          </a:effectRef>
+          <a:fontRef idx="minor">
+            <a:schemeClr val="lt1"/>
+          </a:fontRef>
+        </p:style>
+        <p:txBody>
+          <a:bodyPr rtlCol="0" anchor="ctr" wrap="square" lIns="182880"/>
+          <a:lstStyle/>
+          <a:p>
+            <a:pPr algn="l"/>
+            <a:r>
+              <a:rPr sz="1300" b="1">
+                <a:solidFill>
+                  <a:srgbClr val="FFFFFF"/>
+                </a:solidFill>
+                <a:latin typeface="Calibri"/>
+              </a:rPr>
+              <a:t>UPLOAD AND RUN:   </a:t>
+            </a:r>
+            <a:r>
+              <a:rPr sz="1500" b="1">
+                <a:solidFill>
+                  <a:srgbClr val="FFFFFF"/>
+                </a:solidFill>
+                <a:latin typeface="Consolas"/>
+              </a:rPr>
+              <a:t>a1b_serial_console</a:t>
+            </a:r>
+            <a:r>
+              <a:rPr sz="1200">
+                <a:solidFill>
+                  <a:srgbClr val="FFFFFF"/>
+                </a:solidFill>
+                <a:latin typeface="Calibri"/>
+              </a:rPr>
+              <a:t>     (25 minutes)</a:t>
+            </a:r>
+          </a:p>
+        </p:txBody>
+      </p:sp>
+      <p:sp>
+        <p:nvSpPr>
+          <p:cNvPr id="7" name="TextBox 6"/>
+          <p:cNvSpPr txBox="1"/>
+          <p:nvPr/>
+        </p:nvSpPr>
+        <p:spPr>
+          <a:xfrm>
+            <a:off x="502920" y="1901952"/>
+            <a:ext cx="5387187" cy="4361688"/>
+          </a:xfrm>
+          <a:prstGeom prst="rect">
+            <a:avLst/>
+          </a:prstGeom>
+          <a:noFill/>
+        </p:spPr>
+        <p:txBody>
+          <a:bodyPr wrap="square" lIns="0" tIns="0" rIns="0" bIns="0">
+            <a:spAutoFit/>
+          </a:bodyPr>
+          <a:lstStyle/>
+          <a:p>
+            <a:pPr algn="l">
+              <a:lnSpc>
+                <a:spcPct val="100000"/>
+              </a:lnSpc>
+              <a:spcAft>
+                <a:spcPts val="400"/>
+              </a:spcAft>
+              <a:defRPr sz="1800" b="0">
+                <a:solidFill>
+                  <a:srgbClr val="222222"/>
+                </a:solidFill>
+                <a:latin typeface="Calibri"/>
+              </a:defRPr>
+            </a:pPr>
+            <a:r>
+              <a:rPr sz="1800" b="0">
+                <a:solidFill>
+                  <a:srgbClr val="222222"/>
+                </a:solidFill>
+                <a:latin typeface="Calibri"/>
+              </a:rPr>
+              <a:t>1.  Upload it, open the Serial Monitor, type help.</a:t>
+            </a:r>
+          </a:p>
+          <a:p>
+            <a:pPr algn="l">
+              <a:lnSpc>
+                <a:spcPct val="100000"/>
+              </a:lnSpc>
+              <a:spcAft>
+                <a:spcPts val="400"/>
+              </a:spcAft>
+              <a:defRPr sz="1800" b="0">
+                <a:solidFill>
+                  <a:srgbClr val="222222"/>
+                </a:solidFill>
+                <a:latin typeface="Calibri"/>
+              </a:defRPr>
+            </a:pPr>
+            <a:r>
+              <a:rPr sz="1800" b="0">
+                <a:solidFill>
+                  <a:srgbClr val="222222"/>
+                </a:solidFill>
+                <a:latin typeface="Calibri"/>
+              </a:rPr>
+              <a:t>2.  Try every command. Then type something that is not a command.</a:t>
+            </a:r>
+          </a:p>
+          <a:p>
+            <a:pPr algn="l">
+              <a:lnSpc>
+                <a:spcPct val="100000"/>
+              </a:lnSpc>
+              <a:spcAft>
+                <a:spcPts val="400"/>
+              </a:spcAft>
+              <a:defRPr sz="1800" b="0">
+                <a:solidFill>
+                  <a:srgbClr val="222222"/>
+                </a:solidFill>
+                <a:latin typeface="Calibri"/>
+              </a:defRPr>
+            </a:pPr>
+            <a:r>
+              <a:rPr sz="1800" b="0">
+                <a:solidFill>
+                  <a:srgbClr val="222222"/>
+                </a:solidFill>
+                <a:latin typeface="Calibri"/>
+              </a:rPr>
+              <a:t>3.  Type  set rate abc. What happens? Why does the range check catch it?</a:t>
+            </a:r>
+          </a:p>
+          <a:p>
+            <a:pPr algn="l">
+              <a:lnSpc>
+                <a:spcPct val="100000"/>
+              </a:lnSpc>
+              <a:spcAft>
+                <a:spcPts val="400"/>
+              </a:spcAft>
+              <a:defRPr sz="1800" b="0">
+                <a:solidFill>
+                  <a:srgbClr val="222222"/>
+                </a:solidFill>
+                <a:latin typeface="Calibri"/>
+              </a:defRPr>
+            </a:pPr>
+            <a:r>
+              <a:rPr sz="1800" b="0">
+                <a:solidFill>
+                  <a:srgbClr val="222222"/>
+                </a:solidFill>
+                <a:latin typeface="Calibri"/>
+              </a:rPr>
+              <a:t>4.  Change your Serial Monitor line-ending setting to each of its four options. Does the console still work in all four?</a:t>
+            </a:r>
+          </a:p>
+          <a:p>
+            <a:pPr algn="l">
+              <a:lnSpc>
+                <a:spcPct val="100000"/>
+              </a:lnSpc>
+              <a:spcAft>
+                <a:spcPts val="400"/>
+              </a:spcAft>
+              <a:defRPr sz="1800" b="0">
+                <a:solidFill>
+                  <a:srgbClr val="222222"/>
+                </a:solidFill>
+                <a:latin typeface="Calibri"/>
+              </a:defRPr>
+            </a:pPr>
+            <a:r>
+              <a:rPr sz="1800" b="0">
+                <a:solidFill>
+                  <a:srgbClr val="222222"/>
+                </a:solidFill>
+                <a:latin typeface="Calibri"/>
+              </a:rPr>
+              <a:t>5.  Add a command of your own: toggle, that flips a bool.</a:t>
+            </a:r>
+          </a:p>
+          <a:p>
+            <a:pPr algn="l">
+              <a:lnSpc>
+                <a:spcPct val="100000"/>
+              </a:lnSpc>
+              <a:spcAft>
+                <a:spcPts val="400"/>
+              </a:spcAft>
+              <a:defRPr sz="1800" b="0">
+                <a:solidFill>
+                  <a:srgbClr val="222222"/>
+                </a:solidFill>
+                <a:latin typeface="Calibri"/>
+              </a:defRPr>
+            </a:pPr>
+            <a:r>
+              <a:rPr sz="1800" b="0">
+                <a:solidFill>
+                  <a:srgbClr val="222222"/>
+                </a:solidFill>
+                <a:latin typeface="Calibri"/>
+              </a:rPr>
+              <a:t>6.  Open Console.ino in Op Program 12 and find the same three problems being solved there.</a:t>
+            </a:r>
+          </a:p>
+        </p:txBody>
+      </p:sp>
+      <p:sp>
+        <p:nvSpPr>
+          <p:cNvPr id="8" name="TextBox 7"/>
+          <p:cNvSpPr txBox="1"/>
+          <p:nvPr/>
+        </p:nvSpPr>
+        <p:spPr>
+          <a:xfrm>
+            <a:off x="6301587" y="1901952"/>
+            <a:ext cx="5387187" cy="365760"/>
+          </a:xfrm>
+          <a:prstGeom prst="rect">
+            <a:avLst/>
+          </a:prstGeom>
+          <a:noFill/>
+        </p:spPr>
+        <p:txBody>
+          <a:bodyPr wrap="square" lIns="0" tIns="0" rIns="0" bIns="0">
+            <a:spAutoFit/>
+          </a:bodyPr>
+          <a:lstStyle/>
+          <a:p>
+            <a:pPr algn="l">
+              <a:lnSpc>
+                <a:spcPct val="100000"/>
+              </a:lnSpc>
+              <a:spcAft>
+                <a:spcPts val="200"/>
+              </a:spcAft>
+              <a:defRPr sz="1800" b="1">
+                <a:solidFill>
+                  <a:srgbClr val="0E7C86"/>
+                </a:solidFill>
+                <a:latin typeface="Calibri"/>
+              </a:defRPr>
+            </a:pPr>
+            <a:r>
+              <a:rPr sz="1800" b="1">
+                <a:solidFill>
+                  <a:srgbClr val="0E7C86"/>
+                </a:solidFill>
+                <a:latin typeface="Calibri"/>
+              </a:rPr>
+              <a:t>What you should see</a:t>
+            </a:r>
+          </a:p>
+        </p:txBody>
+      </p:sp>
+      <p:sp>
+        <p:nvSpPr>
+          <p:cNvPr id="9" name="TextBox 8"/>
+          <p:cNvSpPr txBox="1"/>
+          <p:nvPr/>
+        </p:nvSpPr>
+        <p:spPr>
+          <a:xfrm>
+            <a:off x="6301587" y="2304288"/>
+            <a:ext cx="5387187" cy="1778508"/>
+          </a:xfrm>
+          <a:prstGeom prst="rect">
+            <a:avLst/>
+          </a:prstGeom>
+          <a:noFill/>
+        </p:spPr>
+        <p:txBody>
+          <a:bodyPr wrap="square" lIns="0" tIns="0" rIns="0" bIns="0">
+            <a:spAutoFit/>
+          </a:bodyPr>
+          <a:lstStyle/>
+          <a:p>
+            <a:pPr algn="l">
+              <a:lnSpc>
+                <a:spcPct val="100000"/>
+              </a:lnSpc>
+              <a:spcAft>
+                <a:spcPts val="200"/>
+              </a:spcAft>
+              <a:defRPr sz="1800" b="0">
+                <a:solidFill>
+                  <a:srgbClr val="222222"/>
+                </a:solidFill>
+                <a:latin typeface="Calibri"/>
+              </a:defRPr>
+            </a:pPr>
+            <a:r>
+              <a:rPr sz="1800" b="0">
+                <a:solidFill>
+                  <a:srgbClr val="222222"/>
+                </a:solidFill>
+                <a:latin typeface="Calibri"/>
+              </a:rPr>
+              <a:t>A prompt, echoed typing, working backspace, and commands that run while the LED keeps blinking on its own schedule.</a:t>
+            </a:r>
+          </a:p>
+        </p:txBody>
+      </p:sp>
+      <p:sp>
+        <p:nvSpPr>
+          <p:cNvPr id="10" name="TextBox 9"/>
+          <p:cNvSpPr txBox="1"/>
+          <p:nvPr/>
+        </p:nvSpPr>
+        <p:spPr>
+          <a:xfrm>
+            <a:off x="6301587" y="4119372"/>
+            <a:ext cx="5387187" cy="365760"/>
+          </a:xfrm>
+          <a:prstGeom prst="rect">
+            <a:avLst/>
+          </a:prstGeom>
+          <a:noFill/>
+        </p:spPr>
+        <p:txBody>
+          <a:bodyPr wrap="square" lIns="0" tIns="0" rIns="0" bIns="0">
+            <a:spAutoFit/>
+          </a:bodyPr>
+          <a:lstStyle/>
+          <a:p>
+            <a:pPr algn="l">
+              <a:lnSpc>
+                <a:spcPct val="100000"/>
+              </a:lnSpc>
+              <a:spcAft>
+                <a:spcPts val="200"/>
+              </a:spcAft>
+              <a:defRPr sz="1800" b="1">
+                <a:solidFill>
+                  <a:srgbClr val="0E7C86"/>
+                </a:solidFill>
+                <a:latin typeface="Calibri"/>
+              </a:defRPr>
+            </a:pPr>
+            <a:r>
+              <a:rPr sz="1800" b="1">
+                <a:solidFill>
+                  <a:srgbClr val="0E7C86"/>
+                </a:solidFill>
+                <a:latin typeface="Calibri"/>
+              </a:rPr>
+              <a:t>Answer these</a:t>
+            </a:r>
+          </a:p>
+        </p:txBody>
+      </p:sp>
+      <p:sp>
+        <p:nvSpPr>
+          <p:cNvPr id="11" name="TextBox 10"/>
+          <p:cNvSpPr txBox="1"/>
+          <p:nvPr/>
+        </p:nvSpPr>
+        <p:spPr>
+          <a:xfrm>
+            <a:off x="6301587" y="4521708"/>
+            <a:ext cx="5387187" cy="1778508"/>
+          </a:xfrm>
+          <a:prstGeom prst="rect">
+            <a:avLst/>
+          </a:prstGeom>
+          <a:noFill/>
+        </p:spPr>
+        <p:txBody>
+          <a:bodyPr wrap="square" lIns="0" tIns="0" rIns="0" bIns="0">
+            <a:spAutoFit/>
+          </a:bodyPr>
+          <a:lstStyle/>
+          <a:p>
+            <a:pPr algn="l">
+              <a:lnSpc>
+                <a:spcPct val="100000"/>
+              </a:lnSpc>
+              <a:spcAft>
+                <a:spcPts val="200"/>
+              </a:spcAft>
+              <a:defRPr sz="1800" b="0">
+                <a:solidFill>
+                  <a:srgbClr val="222222"/>
+                </a:solidFill>
+                <a:latin typeface="Calibri"/>
+              </a:defRPr>
+            </a:pPr>
+            <a:r>
+              <a:rPr sz="1800" b="0">
+                <a:solidFill>
+                  <a:srgbClr val="222222"/>
+                </a:solidFill>
+                <a:latin typeface="Calibri"/>
+              </a:rPr>
+              <a:t>toInt() returns 0 for anything it cannot parse. Why does that make range checking essential rather than optional?</a:t>
+            </a:r>
+          </a:p>
+        </p:txBody>
+      </p:sp>
+    </p:spTree>
+  </p:cSld>
+  <p:clrMapOvr>
+    <a:masterClrMapping/>
+  </p:clrMapOvr>
+</p:sld>
+</file>
+
+<file path=ppt/slides/slide21.xml><?xml version="1.0" encoding="utf-8"?>
+<p:sld xmlns:a="http://schemas.openxmlformats.org/drawingml/2006/main" xmlns:p="http://schemas.openxmlformats.org/presentationml/2006/main" xmlns:r="http://schemas.openxmlformats.org/officeDocument/2006/relationships">
+  <p:cSld>
+    <p:spTree>
+      <p:nvGrpSpPr>
+        <p:cNvPr id="1" name=""/>
+        <p:cNvGrpSpPr/>
+        <p:nvPr/>
+      </p:nvGrpSpPr>
+      <p:grpSpPr/>
+      <p:sp>
+        <p:nvSpPr>
+          <p:cNvPr id="2" name="Title 1"/>
+          <p:cNvSpPr>
+            <a:spLocks noGrp="1"/>
+          </p:cNvSpPr>
+          <p:nvPr>
+            <p:ph type="title"/>
+          </p:nvPr>
+        </p:nvSpPr>
+        <p:spPr>
+          <a:xfrm>
+            <a:off x="502920" y="274320"/>
+            <a:ext cx="11185855" cy="777240"/>
+          </a:xfrm>
+        </p:spPr>
+        <p:txBody>
+          <a:bodyPr wrap="square" anchor="b"/>
+          <a:lstStyle/>
+          <a:p>
+            <a:pPr algn="l">
+              <a:lnSpc>
+                <a:spcPct val="100000"/>
+              </a:lnSpc>
+              <a:spcAft>
+                <a:spcPts val="0"/>
+              </a:spcAft>
+              <a:defRPr sz="2800" b="1">
+                <a:solidFill>
+                  <a:srgbClr val="1F3A5F"/>
+                </a:solidFill>
+                <a:latin typeface="Calibri"/>
+              </a:defRPr>
+            </a:pPr>
+            <a:r>
+              <a:rPr sz="2800" b="1">
+                <a:solidFill>
+                  <a:srgbClr val="1F3A5F"/>
+                </a:solidFill>
+                <a:latin typeface="Calibri"/>
+              </a:rPr>
+              <a:t>The boot sequence of Op Program 12</a:t>
+            </a:r>
+          </a:p>
+        </p:txBody>
+      </p:sp>
+      <p:sp>
+        <p:nvSpPr>
+          <p:cNvPr id="3" name="Rectangle 2"/>
+          <p:cNvSpPr/>
+          <p:nvPr/>
+        </p:nvSpPr>
+        <p:spPr>
+          <a:xfrm>
+            <a:off x="502920" y="1097280"/>
+            <a:ext cx="11185855" cy="19050"/>
+          </a:xfrm>
+          <a:prstGeom prst="rect">
+            <a:avLst/>
+          </a:prstGeom>
+          <a:solidFill>
+            <a:srgbClr val="C8D2DE"/>
+          </a:solidFill>
+          <a:ln>
+            <a:noFill/>
+          </a:ln>
+          <a:effectLst/>
+        </p:spPr>
+        <p:style>
+          <a:lnRef idx="1">
+            <a:schemeClr val="accent1"/>
+          </a:lnRef>
+          <a:fillRef idx="3">
+            <a:schemeClr val="accent1"/>
+          </a:fillRef>
+          <a:effectRef idx="2">
+            <a:schemeClr val="accent1"/>
+          </a:effectRef>
+          <a:fontRef idx="minor">
+            <a:schemeClr val="lt1"/>
+          </a:fontRef>
+        </p:style>
+        <p:txBody>
+          <a:bodyPr rtlCol="0" anchor="ctr"/>
+          <a:lstStyle/>
+          <a:p>
+            <a:pPr algn="ctr"/>
+          </a:p>
+        </p:txBody>
+      </p:sp>
+      <p:sp>
+        <p:nvSpPr>
+          <p:cNvPr id="4" name="TextBox 3"/>
+          <p:cNvSpPr txBox="1"/>
+          <p:nvPr/>
+        </p:nvSpPr>
+        <p:spPr>
+          <a:xfrm>
+            <a:off x="502920" y="6382512"/>
+            <a:ext cx="10545775" cy="274320"/>
+          </a:xfrm>
+          <a:prstGeom prst="rect">
+            <a:avLst/>
+          </a:prstGeom>
+          <a:noFill/>
+        </p:spPr>
+        <p:txBody>
+          <a:bodyPr wrap="square" lIns="0" tIns="0">
+            <a:spAutoFit/>
+          </a:bodyPr>
+          <a:lstStyle/>
+          <a:p>
+            <a:pPr algn="l">
+              <a:lnSpc>
+                <a:spcPct val="100000"/>
+              </a:lnSpc>
+              <a:spcAft>
+                <a:spcPts val="0"/>
+              </a:spcAft>
+              <a:defRPr sz="1000" b="0">
+                <a:solidFill>
+                  <a:srgbClr val="666666"/>
+                </a:solidFill>
+                <a:latin typeface="Calibri"/>
+              </a:defRPr>
+            </a:pPr>
+            <a:r>
+              <a:rPr sz="1000" b="0">
+                <a:solidFill>
+                  <a:srgbClr val="666666"/>
+                </a:solidFill>
+                <a:latin typeface="Calibri"/>
+              </a:rPr>
+              <a:t>Pathfinder Advanced - Op Program 12  |  Lesson 1</a:t>
+            </a:r>
+          </a:p>
+        </p:txBody>
+      </p:sp>
+      <p:sp>
+        <p:nvSpPr>
+          <p:cNvPr id="5" name="TextBox 4"/>
+          <p:cNvSpPr txBox="1"/>
+          <p:nvPr/>
+        </p:nvSpPr>
+        <p:spPr>
+          <a:xfrm>
+            <a:off x="11231575" y="6382512"/>
+            <a:ext cx="457200" cy="274320"/>
+          </a:xfrm>
+          <a:prstGeom prst="rect">
+            <a:avLst/>
+          </a:prstGeom>
+          <a:noFill/>
+        </p:spPr>
+        <p:txBody>
+          <a:bodyPr wrap="square" lIns="0" tIns="0">
+            <a:spAutoFit/>
+          </a:bodyPr>
+          <a:lstStyle/>
+          <a:p>
+            <a:pPr algn="r">
+              <a:lnSpc>
+                <a:spcPct val="100000"/>
+              </a:lnSpc>
+              <a:spcAft>
+                <a:spcPts val="0"/>
+              </a:spcAft>
+              <a:defRPr sz="1000" b="0">
+                <a:solidFill>
+                  <a:srgbClr val="666666"/>
+                </a:solidFill>
+                <a:latin typeface="Calibri"/>
+              </a:defRPr>
+            </a:pPr>
+            <a:r>
+              <a:rPr sz="1000" b="0">
+                <a:solidFill>
+                  <a:srgbClr val="666666"/>
+                </a:solidFill>
+                <a:latin typeface="Calibri"/>
+              </a:rPr>
+              <a:t>20</a:t>
+            </a:r>
+          </a:p>
+        </p:txBody>
+      </p:sp>
+      <p:sp>
+        <p:nvSpPr>
+          <p:cNvPr id="6" name="TextBox 5"/>
+          <p:cNvSpPr txBox="1"/>
+          <p:nvPr/>
+        </p:nvSpPr>
+        <p:spPr>
+          <a:xfrm>
+            <a:off x="502920" y="1188720"/>
+            <a:ext cx="7047088" cy="274320"/>
+          </a:xfrm>
+          <a:prstGeom prst="rect">
+            <a:avLst/>
+          </a:prstGeom>
+          <a:noFill/>
+        </p:spPr>
+        <p:txBody>
+          <a:bodyPr wrap="square" lIns="0" tIns="0" rIns="0" bIns="0">
+            <a:spAutoFit/>
+          </a:bodyPr>
+          <a:lstStyle/>
+          <a:p>
+            <a:pPr algn="l">
+              <a:lnSpc>
+                <a:spcPct val="100000"/>
+              </a:lnSpc>
+              <a:spcAft>
+                <a:spcPts val="200"/>
+              </a:spcAft>
+              <a:defRPr sz="1200" b="1">
+                <a:solidFill>
+                  <a:srgbClr val="0E7C86"/>
+                </a:solidFill>
+                <a:latin typeface="Consolas"/>
+              </a:defRPr>
+            </a:pPr>
+            <a:r>
+              <a:rPr sz="1200" b="1">
+                <a:solidFill>
+                  <a:srgbClr val="0E7C86"/>
+                </a:solidFill>
+                <a:latin typeface="Consolas"/>
+              </a:rPr>
+              <a:t>Pathfinder_Op_Program12.ino</a:t>
+            </a:r>
+          </a:p>
+        </p:txBody>
+      </p:sp>
+      <p:sp>
+        <p:nvSpPr>
+          <p:cNvPr id="7" name="CODE_PANEL"/>
+          <p:cNvSpPr/>
+          <p:nvPr/>
+        </p:nvSpPr>
+        <p:spPr>
+          <a:xfrm>
+            <a:off x="502920" y="1517904"/>
+            <a:ext cx="7047088" cy="4745736"/>
+          </a:xfrm>
+          <a:prstGeom prst="roundRect">
+            <a:avLst>
+              <a:gd name="adj" fmla="val 4000"/>
+            </a:avLst>
+          </a:prstGeom>
+          <a:solidFill>
+            <a:srgbClr val="F4F6F8"/>
+          </a:solidFill>
+          <a:ln w="12700">
+            <a:solidFill>
+              <a:srgbClr val="C8D2DE"/>
+            </a:solidFill>
+          </a:ln>
+          <a:effectLst/>
+        </p:spPr>
+        <p:style>
+          <a:lnRef idx="1">
+            <a:schemeClr val="accent1"/>
+          </a:lnRef>
+          <a:fillRef idx="3">
+            <a:schemeClr val="accent1"/>
+          </a:fillRef>
+          <a:effectRef idx="2">
+            <a:schemeClr val="accent1"/>
+          </a:effectRef>
+          <a:fontRef idx="minor">
+            <a:schemeClr val="lt1"/>
+          </a:fontRef>
+        </p:style>
+        <p:txBody>
+          <a:bodyPr rtlCol="0" anchor="t" wrap="square" lIns="146304" tIns="91440" bIns="73152"/>
+          <a:lstStyle/>
+          <a:p>
+            <a:pPr algn="l">
+              <a:lnSpc>
+                <a:spcPct val="100000"/>
+              </a:lnSpc>
+              <a:spcAft>
+                <a:spcPts val="0"/>
+              </a:spcAft>
+              <a:defRPr sz="1200">
+                <a:latin typeface="Consolas"/>
+              </a:defRPr>
+            </a:pPr>
+            <a:r>
+              <a:rPr sz="1200">
+                <a:solidFill>
+                  <a:srgbClr val="222222"/>
+                </a:solidFill>
+                <a:latin typeface="Consolas"/>
+              </a:rPr>
+              <a:t>void setup() {</a:t>
+            </a:r>
+          </a:p>
+          <a:p>
+            <a:pPr algn="l">
+              <a:lnSpc>
+                <a:spcPct val="100000"/>
+              </a:lnSpc>
+              <a:spcAft>
+                <a:spcPts val="0"/>
+              </a:spcAft>
+              <a:defRPr sz="1200">
+                <a:latin typeface="Consolas"/>
+              </a:defRPr>
+            </a:pPr>
+            <a:r>
+              <a:rPr sz="1200">
+                <a:solidFill>
+                  <a:srgbClr val="222222"/>
+                </a:solidFill>
+                <a:latin typeface="Consolas"/>
+              </a:rPr>
+              <a:t>  Serial.begin(115200);</a:t>
+            </a:r>
+          </a:p>
+          <a:p>
+            <a:pPr algn="l">
+              <a:lnSpc>
+                <a:spcPct val="100000"/>
+              </a:lnSpc>
+              <a:spcAft>
+                <a:spcPts val="0"/>
+              </a:spcAft>
+              <a:defRPr sz="1200">
+                <a:latin typeface="Consolas"/>
+              </a:defRPr>
+            </a:pPr>
+            <a:r>
+              <a:rPr sz="1200">
+                <a:solidFill>
+                  <a:srgbClr val="222222"/>
+                </a:solidFill>
+                <a:latin typeface="Consolas"/>
+              </a:rPr>
+              <a:t> </a:t>
+            </a:r>
+          </a:p>
+          <a:p>
+            <a:pPr algn="l">
+              <a:lnSpc>
+                <a:spcPct val="100000"/>
+              </a:lnSpc>
+              <a:spcAft>
+                <a:spcPts val="0"/>
+              </a:spcAft>
+              <a:defRPr sz="1200">
+                <a:latin typeface="Consolas"/>
+              </a:defRPr>
+            </a:pPr>
+            <a:r>
+              <a:rPr sz="1200">
+                <a:solidFill>
+                  <a:srgbClr val="222222"/>
+                </a:solidFill>
+                <a:latin typeface="Consolas"/>
+              </a:rPr>
+              <a:t>  EEPROM.begin(EEPROM_SIZE);</a:t>
+            </a:r>
+          </a:p>
+          <a:p>
+            <a:pPr algn="l">
+              <a:lnSpc>
+                <a:spcPct val="100000"/>
+              </a:lnSpc>
+              <a:spcAft>
+                <a:spcPts val="0"/>
+              </a:spcAft>
+              <a:defRPr sz="1200">
+                <a:latin typeface="Consolas"/>
+              </a:defRPr>
+            </a:pPr>
+            <a:r>
+              <a:rPr sz="1200">
+                <a:solidFill>
+                  <a:srgbClr val="222222"/>
+                </a:solidFill>
+                <a:latin typeface="Consolas"/>
+              </a:rPr>
+              <a:t>  loadSettings();              // tuning, range checked</a:t>
+            </a:r>
+          </a:p>
+          <a:p>
+            <a:pPr algn="l">
+              <a:lnSpc>
+                <a:spcPct val="100000"/>
+              </a:lnSpc>
+              <a:spcAft>
+                <a:spcPts val="0"/>
+              </a:spcAft>
+              <a:defRPr sz="1200">
+                <a:latin typeface="Consolas"/>
+              </a:defRPr>
+            </a:pPr>
+            <a:r>
+              <a:rPr sz="1200">
+                <a:solidFill>
+                  <a:srgbClr val="222222"/>
+                </a:solidFill>
+                <a:latin typeface="Consolas"/>
+              </a:rPr>
+              <a:t> </a:t>
+            </a:r>
+          </a:p>
+          <a:p>
+            <a:pPr algn="l">
+              <a:lnSpc>
+                <a:spcPct val="100000"/>
+              </a:lnSpc>
+              <a:spcAft>
+                <a:spcPts val="0"/>
+              </a:spcAft>
+              <a:defRPr sz="1200">
+                <a:latin typeface="Consolas"/>
+              </a:defRPr>
+            </a:pPr>
+            <a:r>
+              <a:rPr sz="1200">
+                <a:solidFill>
+                  <a:srgbClr val="222222"/>
+                </a:solidFill>
+                <a:latin typeface="Consolas"/>
+              </a:rPr>
+              <a:t>  Wire.begin(I2C_SDA_PIN, I2C_SCL_PIN);</a:t>
+            </a:r>
+          </a:p>
+          <a:p>
+            <a:pPr algn="l">
+              <a:lnSpc>
+                <a:spcPct val="100000"/>
+              </a:lnSpc>
+              <a:spcAft>
+                <a:spcPts val="0"/>
+              </a:spcAft>
+              <a:defRPr sz="1200">
+                <a:latin typeface="Consolas"/>
+              </a:defRPr>
+            </a:pPr>
+            <a:r>
+              <a:rPr sz="1200">
+                <a:solidFill>
+                  <a:srgbClr val="222222"/>
+                </a:solidFill>
+                <a:latin typeface="Consolas"/>
+              </a:rPr>
+              <a:t>  if (is_ina219_present()) {   // which vehicle am I?</a:t>
+            </a:r>
+          </a:p>
+          <a:p>
+            <a:pPr algn="l">
+              <a:lnSpc>
+                <a:spcPct val="100000"/>
+              </a:lnSpc>
+              <a:spcAft>
+                <a:spcPts val="0"/>
+              </a:spcAft>
+              <a:defRPr sz="1200">
+                <a:latin typeface="Consolas"/>
+              </a:defRPr>
+            </a:pPr>
+            <a:r>
+              <a:rPr sz="1200">
+                <a:solidFill>
+                  <a:srgbClr val="222222"/>
+                </a:solidFill>
+                <a:latin typeface="Consolas"/>
+              </a:rPr>
+              <a:t>    vehicle_config.capabilities = CAP_SELF_TEST | CAP_CURRENT_MON;</a:t>
+            </a:r>
+          </a:p>
+          <a:p>
+            <a:pPr algn="l">
+              <a:lnSpc>
+                <a:spcPct val="100000"/>
+              </a:lnSpc>
+              <a:spcAft>
+                <a:spcPts val="0"/>
+              </a:spcAft>
+              <a:defRPr sz="1200">
+                <a:latin typeface="Consolas"/>
+              </a:defRPr>
+            </a:pPr>
+            <a:r>
+              <a:rPr sz="1200">
+                <a:solidFill>
+                  <a:srgbClr val="222222"/>
+                </a:solidFill>
+                <a:latin typeface="Consolas"/>
+              </a:rPr>
+              <a:t>    ina219_init();</a:t>
+            </a:r>
+          </a:p>
+          <a:p>
+            <a:pPr algn="l">
+              <a:lnSpc>
+                <a:spcPct val="100000"/>
+              </a:lnSpc>
+              <a:spcAft>
+                <a:spcPts val="0"/>
+              </a:spcAft>
+              <a:defRPr sz="1200">
+                <a:latin typeface="Consolas"/>
+              </a:defRPr>
+            </a:pPr>
+            <a:r>
+              <a:rPr sz="1200">
+                <a:solidFill>
+                  <a:srgbClr val="222222"/>
+                </a:solidFill>
+                <a:latin typeface="Consolas"/>
+              </a:rPr>
+              <a:t>  } else {</a:t>
+            </a:r>
+          </a:p>
+          <a:p>
+            <a:pPr algn="l">
+              <a:lnSpc>
+                <a:spcPct val="100000"/>
+              </a:lnSpc>
+              <a:spcAft>
+                <a:spcPts val="0"/>
+              </a:spcAft>
+              <a:defRPr sz="1200">
+                <a:latin typeface="Consolas"/>
+              </a:defRPr>
+            </a:pPr>
+            <a:r>
+              <a:rPr sz="1200">
+                <a:solidFill>
+                  <a:srgbClr val="222222"/>
+                </a:solidFill>
+                <a:latin typeface="Consolas"/>
+              </a:rPr>
+              <a:t>    vehicle_config.capabilities = 0;</a:t>
+            </a:r>
+          </a:p>
+          <a:p>
+            <a:pPr algn="l">
+              <a:lnSpc>
+                <a:spcPct val="100000"/>
+              </a:lnSpc>
+              <a:spcAft>
+                <a:spcPts val="0"/>
+              </a:spcAft>
+              <a:defRPr sz="1200">
+                <a:latin typeface="Consolas"/>
+              </a:defRPr>
+            </a:pPr>
+            <a:r>
+              <a:rPr sz="1200">
+                <a:solidFill>
+                  <a:srgbClr val="222222"/>
+                </a:solidFill>
+                <a:latin typeface="Consolas"/>
+              </a:rPr>
+              <a:t>    test_state = TEST_DISABLED;</a:t>
+            </a:r>
+          </a:p>
+          <a:p>
+            <a:pPr algn="l">
+              <a:lnSpc>
+                <a:spcPct val="100000"/>
+              </a:lnSpc>
+              <a:spcAft>
+                <a:spcPts val="0"/>
+              </a:spcAft>
+              <a:defRPr sz="1200">
+                <a:latin typeface="Consolas"/>
+              </a:defRPr>
+            </a:pPr>
+            <a:r>
+              <a:rPr sz="1200">
+                <a:solidFill>
+                  <a:srgbClr val="222222"/>
+                </a:solidFill>
+                <a:latin typeface="Consolas"/>
+              </a:rPr>
+              <a:t>  }</a:t>
+            </a:r>
+          </a:p>
+          <a:p>
+            <a:pPr algn="l">
+              <a:lnSpc>
+                <a:spcPct val="100000"/>
+              </a:lnSpc>
+              <a:spcAft>
+                <a:spcPts val="0"/>
+              </a:spcAft>
+              <a:defRPr sz="1200">
+                <a:latin typeface="Consolas"/>
+              </a:defRPr>
+            </a:pPr>
+            <a:r>
+              <a:rPr sz="1200">
+                <a:solidFill>
+                  <a:srgbClr val="222222"/>
+                </a:solidFill>
+                <a:latin typeface="Consolas"/>
+              </a:rPr>
+              <a:t> </a:t>
+            </a:r>
+          </a:p>
+          <a:p>
+            <a:pPr algn="l">
+              <a:lnSpc>
+                <a:spcPct val="100000"/>
+              </a:lnSpc>
+              <a:spcAft>
+                <a:spcPts val="0"/>
+              </a:spcAft>
+              <a:defRPr sz="1200">
+                <a:latin typeface="Consolas"/>
+              </a:defRPr>
+            </a:pPr>
+            <a:r>
+              <a:rPr sz="1200" b="1">
+                <a:solidFill>
+                  <a:srgbClr val="0E7C86"/>
+                </a:solidFill>
+                <a:latin typeface="Consolas"/>
+              </a:rPr>
+              <a:t>  setup_motors();              // outputs safe FIRST</a:t>
+            </a:r>
+          </a:p>
+          <a:p>
+            <a:pPr algn="l">
+              <a:lnSpc>
+                <a:spcPct val="100000"/>
+              </a:lnSpc>
+              <a:spcAft>
+                <a:spcPts val="0"/>
+              </a:spcAft>
+              <a:defRPr sz="1200">
+                <a:latin typeface="Consolas"/>
+              </a:defRPr>
+            </a:pPr>
+            <a:r>
+              <a:rPr sz="1200" b="1">
+                <a:solidFill>
+                  <a:srgbClr val="0E7C86"/>
+                </a:solidFill>
+                <a:latin typeface="Consolas"/>
+              </a:rPr>
+              <a:t>  setup_servos();</a:t>
+            </a:r>
+          </a:p>
+          <a:p>
+            <a:pPr algn="l">
+              <a:lnSpc>
+                <a:spcPct val="100000"/>
+              </a:lnSpc>
+              <a:spcAft>
+                <a:spcPts val="0"/>
+              </a:spcAft>
+              <a:defRPr sz="1200">
+                <a:latin typeface="Consolas"/>
+              </a:defRPr>
+            </a:pPr>
+            <a:r>
+              <a:rPr sz="1200">
+                <a:solidFill>
+                  <a:srgbClr val="222222"/>
+                </a:solidFill>
+                <a:latin typeface="Consolas"/>
+              </a:rPr>
+              <a:t> </a:t>
+            </a:r>
+          </a:p>
+          <a:p>
+            <a:pPr algn="l">
+              <a:lnSpc>
+                <a:spcPct val="100000"/>
+              </a:lnSpc>
+              <a:spcAft>
+                <a:spcPts val="0"/>
+              </a:spcAft>
+              <a:defRPr sz="1200">
+                <a:latin typeface="Consolas"/>
+              </a:defRPr>
+            </a:pPr>
+            <a:r>
+              <a:rPr sz="1200">
+                <a:solidFill>
+                  <a:srgbClr val="222222"/>
+                </a:solidFill>
+                <a:latin typeface="Consolas"/>
+              </a:rPr>
+              <a:t>  strip.begin();               // then the lights</a:t>
+            </a:r>
+          </a:p>
+          <a:p>
+            <a:pPr algn="l">
+              <a:lnSpc>
+                <a:spcPct val="100000"/>
+              </a:lnSpc>
+              <a:spcAft>
+                <a:spcPts val="0"/>
+              </a:spcAft>
+              <a:defRPr sz="1200">
+                <a:latin typeface="Consolas"/>
+              </a:defRPr>
+            </a:pPr>
+            <a:r>
+              <a:rPr sz="1200">
+                <a:solidFill>
+                  <a:srgbClr val="222222"/>
+                </a:solidFill>
+                <a:latin typeface="Consolas"/>
+              </a:rPr>
+              <a:t>  set_disconnected_lighting();</a:t>
+            </a:r>
+          </a:p>
+          <a:p>
+            <a:pPr algn="l">
+              <a:lnSpc>
+                <a:spcPct val="100000"/>
+              </a:lnSpc>
+              <a:spcAft>
+                <a:spcPts val="0"/>
+              </a:spcAft>
+              <a:defRPr sz="1200">
+                <a:latin typeface="Consolas"/>
+              </a:defRPr>
+            </a:pPr>
+            <a:r>
+              <a:rPr sz="1200">
+                <a:solidFill>
+                  <a:srgbClr val="222222"/>
+                </a:solidFill>
+                <a:latin typeface="Consolas"/>
+              </a:rPr>
+              <a:t> </a:t>
+            </a:r>
+          </a:p>
+          <a:p>
+            <a:pPr algn="l">
+              <a:lnSpc>
+                <a:spcPct val="100000"/>
+              </a:lnSpc>
+              <a:spcAft>
+                <a:spcPts val="0"/>
+              </a:spcAft>
+              <a:defRPr sz="1200">
+                <a:latin typeface="Consolas"/>
+              </a:defRPr>
+            </a:pPr>
+            <a:r>
+              <a:rPr sz="1200">
+                <a:solidFill>
+                  <a:srgbClr val="222222"/>
+                </a:solidFill>
+                <a:latin typeface="Consolas"/>
+              </a:rPr>
+              <a:t>  setup_bluetooth();           // then the radio</a:t>
+            </a:r>
+          </a:p>
+          <a:p>
+            <a:pPr algn="l">
+              <a:lnSpc>
+                <a:spcPct val="100000"/>
+              </a:lnSpc>
+              <a:spcAft>
+                <a:spcPts val="0"/>
+              </a:spcAft>
+              <a:defRPr sz="1200">
+                <a:latin typeface="Consolas"/>
+              </a:defRPr>
+            </a:pPr>
+            <a:r>
+              <a:rPr sz="1200">
+                <a:solidFill>
+                  <a:srgbClr val="222222"/>
+                </a:solidFill>
+                <a:latin typeface="Consolas"/>
+              </a:rPr>
+              <a:t> </a:t>
+            </a:r>
+          </a:p>
+          <a:p>
+            <a:pPr algn="l">
+              <a:lnSpc>
+                <a:spcPct val="100000"/>
+              </a:lnSpc>
+              <a:spcAft>
+                <a:spcPts val="0"/>
+              </a:spcAft>
+              <a:defRPr sz="1200">
+                <a:latin typeface="Consolas"/>
+              </a:defRPr>
+            </a:pPr>
+            <a:r>
+              <a:rPr sz="1200">
+                <a:solidFill>
+                  <a:srgbClr val="222222"/>
+                </a:solidFill>
+                <a:latin typeface="Consolas"/>
+              </a:rPr>
+              <a:t>  pinMode(PAIR_TRIGGER_PIN, INPUT_PULLUP);</a:t>
+            </a:r>
+          </a:p>
+        </p:txBody>
+      </p:sp>
+      <p:sp>
+        <p:nvSpPr>
+          <p:cNvPr id="8" name="TextBox 7"/>
+          <p:cNvSpPr txBox="1"/>
+          <p:nvPr/>
+        </p:nvSpPr>
+        <p:spPr>
+          <a:xfrm>
+            <a:off x="7870048" y="1517904"/>
+            <a:ext cx="3818727" cy="4745736"/>
+          </a:xfrm>
+          <a:prstGeom prst="rect">
+            <a:avLst/>
+          </a:prstGeom>
+          <a:noFill/>
+        </p:spPr>
+        <p:txBody>
+          <a:bodyPr wrap="square" lIns="0" tIns="0" rIns="0" bIns="0">
+            <a:spAutoFit/>
+          </a:bodyPr>
+          <a:lstStyle/>
+          <a:p>
+            <a:pPr algn="l">
+              <a:lnSpc>
+                <a:spcPct val="100000"/>
+              </a:lnSpc>
+              <a:spcAft>
+                <a:spcPts val="600"/>
+              </a:spcAft>
+              <a:defRPr sz="1800" b="0">
+                <a:solidFill>
+                  <a:srgbClr val="222222"/>
+                </a:solidFill>
+                <a:latin typeface="Calibri"/>
+              </a:defRPr>
+            </a:pPr>
+            <a:r>
+              <a:rPr sz="1800" b="0">
+                <a:solidFill>
+                  <a:srgbClr val="222222"/>
+                </a:solidFill>
+                <a:latin typeface="Calibri"/>
+              </a:rPr>
+              <a:t>The ORDER is deliberate.</a:t>
+            </a:r>
+          </a:p>
+          <a:p>
+            <a:pPr algn="l">
+              <a:lnSpc>
+                <a:spcPct val="100000"/>
+              </a:lnSpc>
+              <a:spcAft>
+                <a:spcPts val="600"/>
+              </a:spcAft>
+              <a:defRPr sz="1800" b="0">
+                <a:solidFill>
+                  <a:srgbClr val="222222"/>
+                </a:solidFill>
+                <a:latin typeface="Calibri"/>
+              </a:defRPr>
+            </a:pPr>
+            <a:r>
+              <a:rPr sz="1800" b="0">
+                <a:solidFill>
+                  <a:srgbClr val="222222"/>
+                </a:solidFill>
+                <a:latin typeface="Calibri"/>
+              </a:rPr>
+              <a:t>Settings first, because everything else may depend on them.</a:t>
+            </a:r>
+          </a:p>
+          <a:p>
+            <a:pPr algn="l">
+              <a:lnSpc>
+                <a:spcPct val="100000"/>
+              </a:lnSpc>
+              <a:spcAft>
+                <a:spcPts val="600"/>
+              </a:spcAft>
+              <a:defRPr sz="1800" b="0">
+                <a:solidFill>
+                  <a:srgbClr val="222222"/>
+                </a:solidFill>
+                <a:latin typeface="Calibri"/>
+              </a:defRPr>
+            </a:pPr>
+            <a:r>
+              <a:rPr sz="1800" b="0">
+                <a:solidFill>
+                  <a:srgbClr val="222222"/>
+                </a:solidFill>
+                <a:latin typeface="Calibri"/>
+              </a:rPr>
+              <a:t>Hardware detection next, because it decides what the rest of setup is even allowed to do.</a:t>
+            </a:r>
+          </a:p>
+          <a:p>
+            <a:pPr algn="l">
+              <a:lnSpc>
+                <a:spcPct val="100000"/>
+              </a:lnSpc>
+              <a:spcAft>
+                <a:spcPts val="600"/>
+              </a:spcAft>
+              <a:defRPr sz="1800" b="0">
+                <a:solidFill>
+                  <a:srgbClr val="222222"/>
+                </a:solidFill>
+                <a:latin typeface="Calibri"/>
+              </a:defRPr>
+            </a:pPr>
+            <a:r>
+              <a:rPr sz="1800" b="0">
+                <a:solidFill>
+                  <a:srgbClr val="222222"/>
+                </a:solidFill>
+                <a:latin typeface="Calibri"/>
+              </a:rPr>
+              <a:t>Motors before anything slow. An uninitialised H-bridge pin floats, and a floating pin can twitch a motor. Get the outputs into a known safe state as early as you can.</a:t>
+            </a:r>
+          </a:p>
+          <a:p>
+            <a:pPr algn="l">
+              <a:lnSpc>
+                <a:spcPct val="100000"/>
+              </a:lnSpc>
+              <a:spcAft>
+                <a:spcPts val="600"/>
+              </a:spcAft>
+              <a:defRPr sz="1800" b="0">
+                <a:solidFill>
+                  <a:srgbClr val="222222"/>
+                </a:solidFill>
+                <a:latin typeface="Calibri"/>
+              </a:defRPr>
+            </a:pPr>
+            <a:r>
+              <a:rPr sz="1800" b="0">
+                <a:solidFill>
+                  <a:srgbClr val="222222"/>
+                </a:solidFill>
+                <a:latin typeface="Calibri"/>
+              </a:rPr>
+              <a:t>Radio last. It is the slowest thing to come up and nothing else waits on it.</a:t>
+            </a:r>
+          </a:p>
+        </p:txBody>
+      </p:sp>
+    </p:spTree>
+  </p:cSld>
+  <p:clrMapOvr>
+    <a:masterClrMapping/>
+  </p:clrMapOvr>
+</p:sld>
+</file>
+
+<file path=ppt/slides/slide22.xml><?xml version="1.0" encoding="utf-8"?>
+<p:sld xmlns:a="http://schemas.openxmlformats.org/drawingml/2006/main" xmlns:p="http://schemas.openxmlformats.org/presentationml/2006/main" xmlns:r="http://schemas.openxmlformats.org/officeDocument/2006/relationships">
+  <p:cSld>
+    <p:spTree>
+      <p:nvGrpSpPr>
+        <p:cNvPr id="1" name=""/>
+        <p:cNvGrpSpPr/>
+        <p:nvPr/>
+      </p:nvGrpSpPr>
+      <p:grpSpPr/>
+      <p:sp>
+        <p:nvSpPr>
+          <p:cNvPr id="2" name="Title 1"/>
+          <p:cNvSpPr>
+            <a:spLocks noGrp="1"/>
+          </p:cNvSpPr>
+          <p:nvPr>
+            <p:ph type="title"/>
+          </p:nvPr>
+        </p:nvSpPr>
+        <p:spPr>
+          <a:xfrm>
+            <a:off x="502920" y="274320"/>
+            <a:ext cx="11185855" cy="777240"/>
+          </a:xfrm>
+        </p:spPr>
+        <p:txBody>
+          <a:bodyPr wrap="square" anchor="b"/>
+          <a:lstStyle/>
+          <a:p>
+            <a:pPr algn="l">
+              <a:lnSpc>
+                <a:spcPct val="100000"/>
+              </a:lnSpc>
+              <a:spcAft>
+                <a:spcPts val="0"/>
+              </a:spcAft>
+              <a:defRPr sz="2800" b="1">
+                <a:solidFill>
+                  <a:srgbClr val="1F3A5F"/>
+                </a:solidFill>
+                <a:latin typeface="Calibri"/>
+              </a:defRPr>
+            </a:pPr>
+            <a:r>
+              <a:rPr sz="2800" b="1">
+                <a:solidFill>
+                  <a:srgbClr val="1F3A5F"/>
+                </a:solidFill>
+                <a:latin typeface="Calibri"/>
+              </a:rPr>
+              <a:t>The boot sequence of Op Program 12  (continued)</a:t>
+            </a:r>
+          </a:p>
+        </p:txBody>
+      </p:sp>
+      <p:sp>
+        <p:nvSpPr>
+          <p:cNvPr id="3" name="Rectangle 2"/>
+          <p:cNvSpPr/>
+          <p:nvPr/>
+        </p:nvSpPr>
+        <p:spPr>
+          <a:xfrm>
+            <a:off x="502920" y="1097280"/>
+            <a:ext cx="11185855" cy="19050"/>
+          </a:xfrm>
+          <a:prstGeom prst="rect">
+            <a:avLst/>
+          </a:prstGeom>
+          <a:solidFill>
+            <a:srgbClr val="C8D2DE"/>
+          </a:solidFill>
+          <a:ln>
+            <a:noFill/>
+          </a:ln>
+          <a:effectLst/>
+        </p:spPr>
+        <p:style>
+          <a:lnRef idx="1">
+            <a:schemeClr val="accent1"/>
+          </a:lnRef>
+          <a:fillRef idx="3">
+            <a:schemeClr val="accent1"/>
+          </a:fillRef>
+          <a:effectRef idx="2">
+            <a:schemeClr val="accent1"/>
+          </a:effectRef>
+          <a:fontRef idx="minor">
+            <a:schemeClr val="lt1"/>
+          </a:fontRef>
+        </p:style>
+        <p:txBody>
+          <a:bodyPr rtlCol="0" anchor="ctr"/>
+          <a:lstStyle/>
+          <a:p>
+            <a:pPr algn="ctr"/>
+          </a:p>
+        </p:txBody>
+      </p:sp>
+      <p:sp>
+        <p:nvSpPr>
+          <p:cNvPr id="4" name="TextBox 3"/>
+          <p:cNvSpPr txBox="1"/>
+          <p:nvPr/>
+        </p:nvSpPr>
+        <p:spPr>
+          <a:xfrm>
+            <a:off x="502920" y="6382512"/>
+            <a:ext cx="10545775" cy="274320"/>
+          </a:xfrm>
+          <a:prstGeom prst="rect">
+            <a:avLst/>
+          </a:prstGeom>
+          <a:noFill/>
+        </p:spPr>
+        <p:txBody>
+          <a:bodyPr wrap="square" lIns="0" tIns="0">
+            <a:spAutoFit/>
+          </a:bodyPr>
+          <a:lstStyle/>
+          <a:p>
+            <a:pPr algn="l">
+              <a:lnSpc>
+                <a:spcPct val="100000"/>
+              </a:lnSpc>
+              <a:spcAft>
+                <a:spcPts val="0"/>
+              </a:spcAft>
+              <a:defRPr sz="1000" b="0">
+                <a:solidFill>
+                  <a:srgbClr val="666666"/>
+                </a:solidFill>
+                <a:latin typeface="Calibri"/>
+              </a:defRPr>
+            </a:pPr>
+            <a:r>
+              <a:rPr sz="1000" b="0">
+                <a:solidFill>
+                  <a:srgbClr val="666666"/>
+                </a:solidFill>
+                <a:latin typeface="Calibri"/>
+              </a:rPr>
+              <a:t>Pathfinder Advanced - Op Program 12  |  Lesson 1</a:t>
+            </a:r>
+          </a:p>
+        </p:txBody>
+      </p:sp>
+      <p:sp>
+        <p:nvSpPr>
+          <p:cNvPr id="5" name="TextBox 4"/>
+          <p:cNvSpPr txBox="1"/>
+          <p:nvPr/>
+        </p:nvSpPr>
+        <p:spPr>
+          <a:xfrm>
+            <a:off x="11231575" y="6382512"/>
+            <a:ext cx="457200" cy="274320"/>
+          </a:xfrm>
+          <a:prstGeom prst="rect">
+            <a:avLst/>
+          </a:prstGeom>
+          <a:noFill/>
+        </p:spPr>
+        <p:txBody>
+          <a:bodyPr wrap="square" lIns="0" tIns="0">
+            <a:spAutoFit/>
+          </a:bodyPr>
+          <a:lstStyle/>
+          <a:p>
+            <a:pPr algn="r">
+              <a:lnSpc>
+                <a:spcPct val="100000"/>
+              </a:lnSpc>
+              <a:spcAft>
+                <a:spcPts val="0"/>
+              </a:spcAft>
+              <a:defRPr sz="1000" b="0">
+                <a:solidFill>
+                  <a:srgbClr val="666666"/>
+                </a:solidFill>
+                <a:latin typeface="Calibri"/>
+              </a:defRPr>
+            </a:pPr>
+            <a:r>
+              <a:rPr sz="1000" b="0">
+                <a:solidFill>
+                  <a:srgbClr val="666666"/>
+                </a:solidFill>
+                <a:latin typeface="Calibri"/>
+              </a:rPr>
+              <a:t>21</a:t>
+            </a:r>
+          </a:p>
+        </p:txBody>
+      </p:sp>
+      <p:sp>
+        <p:nvSpPr>
+          <p:cNvPr id="6" name="TextBox 5"/>
+          <p:cNvSpPr txBox="1"/>
+          <p:nvPr/>
+        </p:nvSpPr>
+        <p:spPr>
+          <a:xfrm>
+            <a:off x="502920" y="1188720"/>
+            <a:ext cx="7047088" cy="274320"/>
+          </a:xfrm>
+          <a:prstGeom prst="rect">
+            <a:avLst/>
+          </a:prstGeom>
+          <a:noFill/>
+        </p:spPr>
+        <p:txBody>
+          <a:bodyPr wrap="square" lIns="0" tIns="0" rIns="0" bIns="0">
+            <a:spAutoFit/>
+          </a:bodyPr>
+          <a:lstStyle/>
+          <a:p>
+            <a:pPr algn="l">
+              <a:lnSpc>
+                <a:spcPct val="100000"/>
+              </a:lnSpc>
+              <a:spcAft>
+                <a:spcPts val="200"/>
+              </a:spcAft>
+              <a:defRPr sz="1200" b="1">
+                <a:solidFill>
+                  <a:srgbClr val="0E7C86"/>
+                </a:solidFill>
+                <a:latin typeface="Consolas"/>
+              </a:defRPr>
+            </a:pPr>
+            <a:r>
+              <a:rPr sz="1200" b="1">
+                <a:solidFill>
+                  <a:srgbClr val="0E7C86"/>
+                </a:solidFill>
+                <a:latin typeface="Consolas"/>
+              </a:rPr>
+              <a:t>Pathfinder_Op_Program12.ino</a:t>
+            </a:r>
+          </a:p>
+        </p:txBody>
+      </p:sp>
+      <p:sp>
+        <p:nvSpPr>
+          <p:cNvPr id="7" name="CODE_PANEL"/>
+          <p:cNvSpPr/>
+          <p:nvPr/>
+        </p:nvSpPr>
+        <p:spPr>
+          <a:xfrm>
+            <a:off x="502920" y="1517904"/>
+            <a:ext cx="7047088" cy="4745736"/>
+          </a:xfrm>
+          <a:prstGeom prst="roundRect">
+            <a:avLst>
+              <a:gd name="adj" fmla="val 4000"/>
+            </a:avLst>
+          </a:prstGeom>
+          <a:solidFill>
+            <a:srgbClr val="F4F6F8"/>
+          </a:solidFill>
+          <a:ln w="12700">
+            <a:solidFill>
+              <a:srgbClr val="C8D2DE"/>
+            </a:solidFill>
+          </a:ln>
+          <a:effectLst/>
+        </p:spPr>
+        <p:style>
+          <a:lnRef idx="1">
+            <a:schemeClr val="accent1"/>
+          </a:lnRef>
+          <a:fillRef idx="3">
+            <a:schemeClr val="accent1"/>
+          </a:fillRef>
+          <a:effectRef idx="2">
+            <a:schemeClr val="accent1"/>
+          </a:effectRef>
+          <a:fontRef idx="minor">
+            <a:schemeClr val="lt1"/>
+          </a:fontRef>
+        </p:style>
+        <p:txBody>
+          <a:bodyPr rtlCol="0" anchor="t" wrap="square" lIns="146304" tIns="91440" bIns="73152"/>
+          <a:lstStyle/>
+          <a:p>
+            <a:pPr algn="l">
+              <a:lnSpc>
+                <a:spcPct val="100000"/>
+              </a:lnSpc>
+              <a:spcAft>
+                <a:spcPts val="0"/>
+              </a:spcAft>
+              <a:defRPr sz="1200">
+                <a:latin typeface="Consolas"/>
+              </a:defRPr>
+            </a:pPr>
+            <a:r>
+              <a:rPr sz="1200">
+                <a:solidFill>
+                  <a:srgbClr val="222222"/>
+                </a:solidFill>
+                <a:latin typeface="Consolas"/>
+              </a:rPr>
+              <a:t>  pinMode(TEST_PIN, INPUT);</a:t>
+            </a:r>
+          </a:p>
+          <a:p>
+            <a:pPr algn="l">
+              <a:lnSpc>
+                <a:spcPct val="100000"/>
+              </a:lnSpc>
+              <a:spcAft>
+                <a:spcPts val="0"/>
+              </a:spcAft>
+              <a:defRPr sz="1200">
+                <a:latin typeface="Consolas"/>
+              </a:defRPr>
+            </a:pPr>
+            <a:r>
+              <a:rPr sz="1200">
+                <a:solidFill>
+                  <a:srgbClr val="222222"/>
+                </a:solidFill>
+                <a:latin typeface="Consolas"/>
+              </a:rPr>
+              <a:t>}</a:t>
+            </a:r>
+          </a:p>
+        </p:txBody>
+      </p:sp>
+    </p:spTree>
+  </p:cSld>
+  <p:clrMapOvr>
+    <a:masterClrMapping/>
+  </p:clrMapOvr>
+</p:sld>
+</file>
+
+<file path=ppt/slides/slide23.xml><?xml version="1.0" encoding="utf-8"?>
+<p:sld xmlns:a="http://schemas.openxmlformats.org/drawingml/2006/main" xmlns:p="http://schemas.openxmlformats.org/presentationml/2006/main" xmlns:r="http://schemas.openxmlformats.org/officeDocument/2006/relationships">
+  <p:cSld>
+    <p:spTree>
+      <p:nvGrpSpPr>
+        <p:cNvPr id="1" name=""/>
+        <p:cNvGrpSpPr/>
+        <p:nvPr/>
+      </p:nvGrpSpPr>
+      <p:grpSpPr/>
+      <p:sp>
+        <p:nvSpPr>
+          <p:cNvPr id="2" name="Title 1"/>
+          <p:cNvSpPr>
+            <a:spLocks noGrp="1"/>
+          </p:cNvSpPr>
+          <p:nvPr>
+            <p:ph type="title"/>
+          </p:nvPr>
+        </p:nvSpPr>
+        <p:spPr>
+          <a:xfrm>
+            <a:off x="502920" y="274320"/>
+            <a:ext cx="11185855" cy="777240"/>
+          </a:xfrm>
+        </p:spPr>
+        <p:txBody>
+          <a:bodyPr wrap="square" anchor="b"/>
+          <a:lstStyle/>
+          <a:p>
+            <a:pPr algn="l">
+              <a:lnSpc>
+                <a:spcPct val="100000"/>
+              </a:lnSpc>
+              <a:spcAft>
+                <a:spcPts val="0"/>
+              </a:spcAft>
+              <a:defRPr sz="2800" b="1">
+                <a:solidFill>
+                  <a:srgbClr val="1F3A5F"/>
+                </a:solidFill>
+                <a:latin typeface="Calibri"/>
+              </a:defRPr>
+            </a:pPr>
+            <a:r>
+              <a:rPr sz="2800" b="1">
+                <a:solidFill>
+                  <a:srgbClr val="1F3A5F"/>
+                </a:solidFill>
+                <a:latin typeface="Calibri"/>
+              </a:rPr>
+              <a:t>How a command gets from your thumb to a wheel</a:t>
+            </a:r>
+          </a:p>
+        </p:txBody>
+      </p:sp>
+      <p:sp>
+        <p:nvSpPr>
+          <p:cNvPr id="3" name="Rectangle 2"/>
+          <p:cNvSpPr/>
+          <p:nvPr/>
+        </p:nvSpPr>
+        <p:spPr>
+          <a:xfrm>
+            <a:off x="502920" y="1097280"/>
+            <a:ext cx="11185855" cy="19050"/>
+          </a:xfrm>
+          <a:prstGeom prst="rect">
+            <a:avLst/>
+          </a:prstGeom>
+          <a:solidFill>
+            <a:srgbClr val="C8D2DE"/>
+          </a:solidFill>
+          <a:ln>
+            <a:noFill/>
+          </a:ln>
+          <a:effectLst/>
+        </p:spPr>
+        <p:style>
+          <a:lnRef idx="1">
+            <a:schemeClr val="accent1"/>
+          </a:lnRef>
+          <a:fillRef idx="3">
+            <a:schemeClr val="accent1"/>
+          </a:fillRef>
+          <a:effectRef idx="2">
+            <a:schemeClr val="accent1"/>
+          </a:effectRef>
+          <a:fontRef idx="minor">
+            <a:schemeClr val="lt1"/>
+          </a:fontRef>
+        </p:style>
+        <p:txBody>
+          <a:bodyPr rtlCol="0" anchor="ctr"/>
+          <a:lstStyle/>
+          <a:p>
+            <a:pPr algn="ctr"/>
+          </a:p>
+        </p:txBody>
+      </p:sp>
+      <p:sp>
+        <p:nvSpPr>
+          <p:cNvPr id="4" name="TextBox 3"/>
+          <p:cNvSpPr txBox="1"/>
+          <p:nvPr/>
+        </p:nvSpPr>
+        <p:spPr>
+          <a:xfrm>
+            <a:off x="502920" y="6382512"/>
+            <a:ext cx="10545775" cy="274320"/>
+          </a:xfrm>
+          <a:prstGeom prst="rect">
+            <a:avLst/>
+          </a:prstGeom>
+          <a:noFill/>
+        </p:spPr>
+        <p:txBody>
+          <a:bodyPr wrap="square" lIns="0" tIns="0">
+            <a:spAutoFit/>
+          </a:bodyPr>
+          <a:lstStyle/>
+          <a:p>
+            <a:pPr algn="l">
+              <a:lnSpc>
+                <a:spcPct val="100000"/>
+              </a:lnSpc>
+              <a:spcAft>
+                <a:spcPts val="0"/>
+              </a:spcAft>
+              <a:defRPr sz="1000" b="0">
+                <a:solidFill>
+                  <a:srgbClr val="666666"/>
+                </a:solidFill>
+                <a:latin typeface="Calibri"/>
+              </a:defRPr>
+            </a:pPr>
+            <a:r>
+              <a:rPr sz="1000" b="0">
+                <a:solidFill>
+                  <a:srgbClr val="666666"/>
+                </a:solidFill>
+                <a:latin typeface="Calibri"/>
+              </a:rPr>
+              <a:t>Pathfinder Advanced - Op Program 12  |  Lesson 1</a:t>
+            </a:r>
+          </a:p>
+        </p:txBody>
+      </p:sp>
+      <p:sp>
+        <p:nvSpPr>
+          <p:cNvPr id="5" name="TextBox 4"/>
+          <p:cNvSpPr txBox="1"/>
+          <p:nvPr/>
+        </p:nvSpPr>
+        <p:spPr>
+          <a:xfrm>
+            <a:off x="11231575" y="6382512"/>
+            <a:ext cx="457200" cy="274320"/>
+          </a:xfrm>
+          <a:prstGeom prst="rect">
+            <a:avLst/>
+          </a:prstGeom>
+          <a:noFill/>
+        </p:spPr>
+        <p:txBody>
+          <a:bodyPr wrap="square" lIns="0" tIns="0">
+            <a:spAutoFit/>
+          </a:bodyPr>
+          <a:lstStyle/>
+          <a:p>
+            <a:pPr algn="r">
+              <a:lnSpc>
+                <a:spcPct val="100000"/>
+              </a:lnSpc>
+              <a:spcAft>
+                <a:spcPts val="0"/>
+              </a:spcAft>
+              <a:defRPr sz="1000" b="0">
+                <a:solidFill>
+                  <a:srgbClr val="666666"/>
+                </a:solidFill>
+                <a:latin typeface="Calibri"/>
+              </a:defRPr>
+            </a:pPr>
+            <a:r>
+              <a:rPr sz="1000" b="0">
+                <a:solidFill>
+                  <a:srgbClr val="666666"/>
+                </a:solidFill>
+                <a:latin typeface="Calibri"/>
+              </a:rPr>
+              <a:t>22</a:t>
             </a:r>
           </a:p>
         </p:txBody>
@@ -10600,7 +12285,7 @@
 </p:sld>
 </file>
 
-<file path=ppt/slides/slide21.xml><?xml version="1.0" encoding="utf-8"?>
+<file path=ppt/slides/slide24.xml><?xml version="1.0" encoding="utf-8"?>
 <p:sld xmlns:a="http://schemas.openxmlformats.org/drawingml/2006/main" xmlns:p="http://schemas.openxmlformats.org/presentationml/2006/main" xmlns:r="http://schemas.openxmlformats.org/officeDocument/2006/relationships">
   <p:cSld>
     <p:spTree>
@@ -10791,7 +12476,7 @@
                 </a:solidFill>
                 <a:latin typeface="Calibri"/>
               </a:rPr>
-              <a:t>20</a:t>
+              <a:t>23</a:t>
             </a:r>
           </a:p>
         </p:txBody>
@@ -11557,7 +13242,7 @@
 </p:sld>
 </file>
 
-<file path=ppt/slides/slide22.xml><?xml version="1.0" encoding="utf-8"?>
+<file path=ppt/slides/slide25.xml><?xml version="1.0" encoding="utf-8"?>
 <p:sld xmlns:a="http://schemas.openxmlformats.org/drawingml/2006/main" xmlns:p="http://schemas.openxmlformats.org/presentationml/2006/main" xmlns:r="http://schemas.openxmlformats.org/officeDocument/2006/relationships">
   <p:cSld>
     <p:spTree>
@@ -11748,7 +13433,7 @@
                 </a:solidFill>
                 <a:latin typeface="Calibri"/>
               </a:rPr>
-              <a:t>21</a:t>
+              <a:t>24</a:t>
             </a:r>
           </a:p>
         </p:txBody>
@@ -12023,7 +13708,7 @@
 </p:sld>
 </file>
 
-<file path=ppt/slides/slide23.xml><?xml version="1.0" encoding="utf-8"?>
+<file path=ppt/slides/slide26.xml><?xml version="1.0" encoding="utf-8"?>
 <p:sld xmlns:a="http://schemas.openxmlformats.org/drawingml/2006/main" xmlns:p="http://schemas.openxmlformats.org/presentationml/2006/main" xmlns:r="http://schemas.openxmlformats.org/officeDocument/2006/relationships">
   <p:cSld>
     <p:spTree>
@@ -12214,7 +13899,7 @@
                 </a:solidFill>
                 <a:latin typeface="Calibri"/>
               </a:rPr>
-              <a:t>22</a:t>
+              <a:t>25</a:t>
             </a:r>
           </a:p>
         </p:txBody>
@@ -12316,7 +14001,7 @@
 </p:sld>
 </file>
 
-<file path=ppt/slides/slide24.xml><?xml version="1.0" encoding="utf-8"?>
+<file path=ppt/slides/slide27.xml><?xml version="1.0" encoding="utf-8"?>
 <p:sld xmlns:a="http://schemas.openxmlformats.org/drawingml/2006/main" xmlns:p="http://schemas.openxmlformats.org/presentationml/2006/main" xmlns:r="http://schemas.openxmlformats.org/officeDocument/2006/relationships">
   <p:cSld>
     <p:spTree>
@@ -12507,7 +14192,7 @@
                 </a:solidFill>
                 <a:latin typeface="Calibri"/>
               </a:rPr>
-              <a:t>23</a:t>
+              <a:t>26</a:t>
             </a:r>
           </a:p>
         </p:txBody>
@@ -12555,7 +14240,7 @@
                 </a:solidFill>
                 <a:latin typeface="Calibri"/>
               </a:rPr>
-              <a:t>Next week: motors, and integer maths that quietly lies to you.</a:t>
+              <a:t>Next lesson: motors, and integer maths that quietly lies to you.</a:t>
             </a:r>
           </a:p>
         </p:txBody>
@@ -12817,7 +14502,7 @@
                 </a:solidFill>
                 <a:latin typeface="Calibri"/>
               </a:rPr>
-              <a:t>Who this course is for, and what it is not  (continued)</a:t>
+              <a:t>Who this course is for, and what it is not</a:t>
             </a:r>
           </a:p>
         </p:txBody>
@@ -12971,7 +14656,7 @@
         <p:spPr>
           <a:xfrm>
             <a:off x="502920" y="1188720"/>
-            <a:ext cx="11185855" cy="4023360"/>
+            <a:ext cx="11185855" cy="5074920"/>
           </a:xfrm>
           <a:prstGeom prst="rect">
             <a:avLst/>
@@ -13005,73 +14690,89 @@
                 </a:solidFill>
                 <a:latin typeface="Calibri"/>
               </a:rPr>
-              <a:t>Along the way you will meet six real bugs from the previous version and see exactly why each one was wrong.</a:t>
-            </a:r>
-          </a:p>
-        </p:txBody>
-      </p:sp>
-      <p:sp>
-        <p:nvSpPr>
-          <p:cNvPr id="7" name="Rounded Rectangle 6"/>
-          <p:cNvSpPr/>
-          <p:nvPr/>
-        </p:nvSpPr>
-        <p:spPr>
-          <a:xfrm>
-            <a:off x="502920" y="5303520"/>
-            <a:ext cx="11185855" cy="960120"/>
-          </a:xfrm>
-          <a:prstGeom prst="roundRect">
-            <a:avLst>
-              <a:gd name="adj" fmla="val 4000"/>
-            </a:avLst>
-          </a:prstGeom>
-          <a:solidFill>
-            <a:srgbClr val="EEF3F8"/>
-          </a:solidFill>
-          <a:ln w="12700">
-            <a:solidFill>
-              <a:srgbClr val="0E7C86"/>
-            </a:solidFill>
-          </a:ln>
-          <a:effectLst/>
-        </p:spPr>
-        <p:style>
-          <a:lnRef idx="1">
-            <a:schemeClr val="accent1"/>
-          </a:lnRef>
-          <a:fillRef idx="3">
-            <a:schemeClr val="accent1"/>
-          </a:fillRef>
-          <a:effectRef idx="2">
-            <a:schemeClr val="accent1"/>
-          </a:effectRef>
-          <a:fontRef idx="minor">
-            <a:schemeClr val="lt1"/>
-          </a:fontRef>
-        </p:style>
-        <p:txBody>
-          <a:bodyPr rtlCol="0" anchor="ctr" wrap="square" lIns="164592" rIns="164592" tIns="73152" bIns="73152"/>
-          <a:lstStyle/>
-          <a:p>
-            <a:pPr algn="l"/>
-            <a:r>
-              <a:rPr sz="1300" b="1">
-                <a:solidFill>
-                  <a:srgbClr val="0E7C86"/>
-                </a:solidFill>
-                <a:latin typeface="Calibri"/>
-              </a:rPr>
-              <a:t>KEY POINT   </a:t>
-            </a:r>
-            <a:r>
-              <a:rPr sz="1500">
-                <a:solidFill>
-                  <a:srgbClr val="222222"/>
-                </a:solidFill>
-                <a:latin typeface="Calibri"/>
-              </a:rPr>
-              <a:t>Every idea here transfers. None of it is specific to robots - it is how embedded software is written everywhere.</a:t>
+              <a:t>You have driven a Pathfinder. You can read C++: functions, loops, structs, pointers, and you are not frightened of a header file.</a:t>
+            </a:r>
+          </a:p>
+          <a:p>
+            <a:pPr algn="l">
+              <a:lnSpc>
+                <a:spcPct val="100000"/>
+              </a:lnSpc>
+              <a:spcAft>
+                <a:spcPts val="900"/>
+              </a:spcAft>
+              <a:defRPr sz="1800" b="0">
+                <a:solidFill>
+                  <a:srgbClr val="222222"/>
+                </a:solidFill>
+                <a:latin typeface="Calibri"/>
+              </a:defRPr>
+            </a:pPr>
+          </a:p>
+          <a:p>
+            <a:pPr algn="l">
+              <a:lnSpc>
+                <a:spcPct val="100000"/>
+              </a:lnSpc>
+              <a:spcAft>
+                <a:spcPts val="900"/>
+              </a:spcAft>
+              <a:defRPr sz="1800" b="0">
+                <a:solidFill>
+                  <a:srgbClr val="222222"/>
+                </a:solidFill>
+                <a:latin typeface="Calibri"/>
+              </a:defRPr>
+            </a:pPr>
+            <a:r>
+              <a:rPr sz="1800" b="0">
+                <a:solidFill>
+                  <a:srgbClr val="222222"/>
+                </a:solidFill>
+                <a:latin typeface="Calibri"/>
+              </a:rPr>
+              <a:t>This course is NOT more features. The vehicle does the same things it did on the beginner programs.</a:t>
+            </a:r>
+          </a:p>
+          <a:p>
+            <a:pPr algn="l">
+              <a:lnSpc>
+                <a:spcPct val="100000"/>
+              </a:lnSpc>
+              <a:spcAft>
+                <a:spcPts val="900"/>
+              </a:spcAft>
+              <a:defRPr sz="1800" b="0">
+                <a:solidFill>
+                  <a:srgbClr val="222222"/>
+                </a:solidFill>
+                <a:latin typeface="Calibri"/>
+              </a:defRPr>
+            </a:pPr>
+          </a:p>
+          <a:p>
+            <a:pPr algn="l">
+              <a:lnSpc>
+                <a:spcPct val="100000"/>
+              </a:lnSpc>
+              <a:spcAft>
+                <a:spcPts val="900"/>
+              </a:spcAft>
+              <a:defRPr sz="1800" b="0">
+                <a:solidFill>
+                  <a:srgbClr val="222222"/>
+                </a:solidFill>
+                <a:latin typeface="Calibri"/>
+              </a:defRPr>
+            </a:pPr>
+            <a:r>
+              <a:rPr sz="1800" b="0">
+                <a:solidFill>
+                  <a:srgbClr val="222222"/>
+                </a:solidFill>
+                <a:latin typeface="Calibri"/>
+              </a:rPr>
+              <a:t>It is about how the program is BUILT: how you split 1300 lines so that somebody else can find things in it, how you make animations that never block the motors, how you store settings that survive a power cycle, and how you make a machine test its own hardware.</a:t>
             </a:r>
           </a:p>
         </p:txBody>
@@ -13135,7 +14836,7 @@
                 </a:solidFill>
                 <a:latin typeface="Calibri"/>
               </a:rPr>
-              <a:t>Where this course goes</a:t>
+              <a:t>Who this course is for, and what it is not  (continued)</a:t>
             </a:r>
           </a:p>
         </p:txBody>
@@ -13276,6 +14977,324 @@
                 <a:latin typeface="Calibri"/>
               </a:rPr>
               <a:t>3</a:t>
+            </a:r>
+          </a:p>
+        </p:txBody>
+      </p:sp>
+      <p:sp>
+        <p:nvSpPr>
+          <p:cNvPr id="6" name="TextBox 5"/>
+          <p:cNvSpPr txBox="1"/>
+          <p:nvPr/>
+        </p:nvSpPr>
+        <p:spPr>
+          <a:xfrm>
+            <a:off x="502920" y="1188720"/>
+            <a:ext cx="11185855" cy="4023360"/>
+          </a:xfrm>
+          <a:prstGeom prst="rect">
+            <a:avLst/>
+          </a:prstGeom>
+          <a:noFill/>
+        </p:spPr>
+        <p:txBody>
+          <a:bodyPr wrap="square" lIns="0" tIns="0" rIns="0" bIns="0">
+            <a:spAutoFit/>
+          </a:bodyPr>
+          <a:lstStyle/>
+          <a:p>
+            <a:pPr algn="l">
+              <a:lnSpc>
+                <a:spcPct val="100000"/>
+              </a:lnSpc>
+              <a:spcAft>
+                <a:spcPts val="900"/>
+              </a:spcAft>
+              <a:defRPr sz="1800" b="0">
+                <a:solidFill>
+                  <a:srgbClr val="222222"/>
+                </a:solidFill>
+                <a:latin typeface="Calibri"/>
+              </a:defRPr>
+            </a:pPr>
+            <a:r>
+              <a:rPr sz="1800" b="0">
+                <a:solidFill>
+                  <a:srgbClr val="222222"/>
+                </a:solidFill>
+                <a:latin typeface="Calibri"/>
+              </a:rPr>
+              <a:t>Along the way you will meet six real bugs from the previous version and see exactly why each one was wrong.</a:t>
+            </a:r>
+          </a:p>
+        </p:txBody>
+      </p:sp>
+      <p:sp>
+        <p:nvSpPr>
+          <p:cNvPr id="7" name="Rounded Rectangle 6"/>
+          <p:cNvSpPr/>
+          <p:nvPr/>
+        </p:nvSpPr>
+        <p:spPr>
+          <a:xfrm>
+            <a:off x="502920" y="5303520"/>
+            <a:ext cx="11185855" cy="960120"/>
+          </a:xfrm>
+          <a:prstGeom prst="roundRect">
+            <a:avLst>
+              <a:gd name="adj" fmla="val 4000"/>
+            </a:avLst>
+          </a:prstGeom>
+          <a:solidFill>
+            <a:srgbClr val="EEF3F8"/>
+          </a:solidFill>
+          <a:ln w="12700">
+            <a:solidFill>
+              <a:srgbClr val="0E7C86"/>
+            </a:solidFill>
+          </a:ln>
+          <a:effectLst/>
+        </p:spPr>
+        <p:style>
+          <a:lnRef idx="1">
+            <a:schemeClr val="accent1"/>
+          </a:lnRef>
+          <a:fillRef idx="3">
+            <a:schemeClr val="accent1"/>
+          </a:fillRef>
+          <a:effectRef idx="2">
+            <a:schemeClr val="accent1"/>
+          </a:effectRef>
+          <a:fontRef idx="minor">
+            <a:schemeClr val="lt1"/>
+          </a:fontRef>
+        </p:style>
+        <p:txBody>
+          <a:bodyPr rtlCol="0" anchor="ctr" wrap="square" lIns="164592" rIns="164592" tIns="73152" bIns="73152"/>
+          <a:lstStyle/>
+          <a:p>
+            <a:pPr algn="l"/>
+            <a:r>
+              <a:rPr sz="1300" b="1">
+                <a:solidFill>
+                  <a:srgbClr val="0E7C86"/>
+                </a:solidFill>
+                <a:latin typeface="Calibri"/>
+              </a:rPr>
+              <a:t>KEY POINT   </a:t>
+            </a:r>
+            <a:r>
+              <a:rPr sz="1500">
+                <a:solidFill>
+                  <a:srgbClr val="222222"/>
+                </a:solidFill>
+                <a:latin typeface="Calibri"/>
+              </a:rPr>
+              <a:t>Every idea here transfers. None of it is specific to robots - it is how embedded software is written everywhere.</a:t>
+            </a:r>
+          </a:p>
+        </p:txBody>
+      </p:sp>
+    </p:spTree>
+  </p:cSld>
+  <p:clrMapOvr>
+    <a:masterClrMapping/>
+  </p:clrMapOvr>
+</p:sld>
+</file>
+
+<file path=ppt/slides/slide5.xml><?xml version="1.0" encoding="utf-8"?>
+<p:sld xmlns:a="http://schemas.openxmlformats.org/drawingml/2006/main" xmlns:p="http://schemas.openxmlformats.org/presentationml/2006/main" xmlns:r="http://schemas.openxmlformats.org/officeDocument/2006/relationships">
+  <p:cSld>
+    <p:spTree>
+      <p:nvGrpSpPr>
+        <p:cNvPr id="1" name=""/>
+        <p:cNvGrpSpPr/>
+        <p:nvPr/>
+      </p:nvGrpSpPr>
+      <p:grpSpPr/>
+      <p:sp>
+        <p:nvSpPr>
+          <p:cNvPr id="2" name="Title 1"/>
+          <p:cNvSpPr>
+            <a:spLocks noGrp="1"/>
+          </p:cNvSpPr>
+          <p:nvPr>
+            <p:ph type="title"/>
+          </p:nvPr>
+        </p:nvSpPr>
+        <p:spPr>
+          <a:xfrm>
+            <a:off x="502920" y="274320"/>
+            <a:ext cx="11185855" cy="777240"/>
+          </a:xfrm>
+        </p:spPr>
+        <p:txBody>
+          <a:bodyPr wrap="square" anchor="b"/>
+          <a:lstStyle/>
+          <a:p>
+            <a:pPr algn="l">
+              <a:lnSpc>
+                <a:spcPct val="100000"/>
+              </a:lnSpc>
+              <a:spcAft>
+                <a:spcPts val="0"/>
+              </a:spcAft>
+              <a:defRPr sz="2800" b="1">
+                <a:solidFill>
+                  <a:srgbClr val="1F3A5F"/>
+                </a:solidFill>
+                <a:latin typeface="Calibri"/>
+              </a:defRPr>
+            </a:pPr>
+            <a:r>
+              <a:rPr sz="2800" b="1">
+                <a:solidFill>
+                  <a:srgbClr val="1F3A5F"/>
+                </a:solidFill>
+                <a:latin typeface="Calibri"/>
+              </a:rPr>
+              <a:t>Where this course goes</a:t>
+            </a:r>
+          </a:p>
+        </p:txBody>
+      </p:sp>
+      <p:sp>
+        <p:nvSpPr>
+          <p:cNvPr id="3" name="Rectangle 2"/>
+          <p:cNvSpPr/>
+          <p:nvPr/>
+        </p:nvSpPr>
+        <p:spPr>
+          <a:xfrm>
+            <a:off x="502920" y="1097280"/>
+            <a:ext cx="11185855" cy="19050"/>
+          </a:xfrm>
+          <a:prstGeom prst="rect">
+            <a:avLst/>
+          </a:prstGeom>
+          <a:solidFill>
+            <a:srgbClr val="C8D2DE"/>
+          </a:solidFill>
+          <a:ln>
+            <a:noFill/>
+          </a:ln>
+          <a:effectLst/>
+        </p:spPr>
+        <p:style>
+          <a:lnRef idx="1">
+            <a:schemeClr val="accent1"/>
+          </a:lnRef>
+          <a:fillRef idx="3">
+            <a:schemeClr val="accent1"/>
+          </a:fillRef>
+          <a:effectRef idx="2">
+            <a:schemeClr val="accent1"/>
+          </a:effectRef>
+          <a:fontRef idx="minor">
+            <a:schemeClr val="lt1"/>
+          </a:fontRef>
+        </p:style>
+        <p:txBody>
+          <a:bodyPr rtlCol="0" anchor="ctr"/>
+          <a:lstStyle/>
+          <a:p>
+            <a:pPr algn="ctr"/>
+          </a:p>
+        </p:txBody>
+      </p:sp>
+      <p:sp>
+        <p:nvSpPr>
+          <p:cNvPr id="4" name="TextBox 3"/>
+          <p:cNvSpPr txBox="1"/>
+          <p:nvPr/>
+        </p:nvSpPr>
+        <p:spPr>
+          <a:xfrm>
+            <a:off x="502920" y="6382512"/>
+            <a:ext cx="10545775" cy="274320"/>
+          </a:xfrm>
+          <a:prstGeom prst="rect">
+            <a:avLst/>
+          </a:prstGeom>
+          <a:noFill/>
+        </p:spPr>
+        <p:txBody>
+          <a:bodyPr wrap="square" lIns="0" tIns="0">
+            <a:spAutoFit/>
+          </a:bodyPr>
+          <a:lstStyle/>
+          <a:p>
+            <a:pPr algn="l">
+              <a:lnSpc>
+                <a:spcPct val="100000"/>
+              </a:lnSpc>
+              <a:spcAft>
+                <a:spcPts val="0"/>
+              </a:spcAft>
+              <a:defRPr sz="1000" b="0">
+                <a:solidFill>
+                  <a:srgbClr val="666666"/>
+                </a:solidFill>
+                <a:latin typeface="Calibri"/>
+              </a:defRPr>
+            </a:pPr>
+            <a:r>
+              <a:rPr sz="1000" b="0">
+                <a:solidFill>
+                  <a:srgbClr val="666666"/>
+                </a:solidFill>
+                <a:latin typeface="Calibri"/>
+              </a:rPr>
+              <a:t>Pathfinder Advanced - Op Program 12  |  Lesson 1</a:t>
+            </a:r>
+          </a:p>
+        </p:txBody>
+      </p:sp>
+      <p:sp>
+        <p:nvSpPr>
+          <p:cNvPr id="5" name="TextBox 4"/>
+          <p:cNvSpPr txBox="1"/>
+          <p:nvPr/>
+        </p:nvSpPr>
+        <p:spPr>
+          <a:xfrm>
+            <a:off x="11231575" y="6382512"/>
+            <a:ext cx="457200" cy="274320"/>
+          </a:xfrm>
+          <a:prstGeom prst="rect">
+            <a:avLst/>
+          </a:prstGeom>
+          <a:noFill/>
+        </p:spPr>
+        <p:txBody>
+          <a:bodyPr wrap="square" lIns="0" tIns="0">
+            <a:spAutoFit/>
+          </a:bodyPr>
+          <a:lstStyle/>
+          <a:p>
+            <a:pPr algn="r">
+              <a:lnSpc>
+                <a:spcPct val="100000"/>
+              </a:lnSpc>
+              <a:spcAft>
+                <a:spcPts val="0"/>
+              </a:spcAft>
+              <a:defRPr sz="1000" b="0">
+                <a:solidFill>
+                  <a:srgbClr val="666666"/>
+                </a:solidFill>
+                <a:latin typeface="Calibri"/>
+              </a:defRPr>
+            </a:pPr>
+            <a:r>
+              <a:rPr sz="1000" b="0">
+                <a:solidFill>
+                  <a:srgbClr val="666666"/>
+                </a:solidFill>
+                <a:latin typeface="Calibri"/>
+              </a:rPr>
+              <a:t>4</a:t>
             </a:r>
           </a:p>
         </p:txBody>
@@ -13723,7 +15742,7 @@
 </p:sld>
 </file>
 
-<file path=ppt/slides/slide5.xml><?xml version="1.0" encoding="utf-8"?>
+<file path=ppt/slides/slide6.xml><?xml version="1.0" encoding="utf-8"?>
 <p:sld xmlns:a="http://schemas.openxmlformats.org/drawingml/2006/main" xmlns:p="http://schemas.openxmlformats.org/presentationml/2006/main" xmlns:r="http://schemas.openxmlformats.org/officeDocument/2006/relationships">
   <p:cSld>
     <p:spTree>
@@ -13914,7 +15933,7 @@
                 </a:solidFill>
                 <a:latin typeface="Calibri"/>
               </a:rPr>
-              <a:t>4</a:t>
+              <a:t>5</a:t>
             </a:r>
           </a:p>
         </p:txBody>
@@ -13929,7 +15948,7 @@
         </p:nvGraphicFramePr>
         <p:xfrm>
           <a:off x="502920" y="1188720"/>
-          <a:ext cx="11185854" cy="2686050"/>
+          <a:ext cx="11185854" cy="2984500"/>
         </p:xfrm>
         <a:graphic>
           <a:graphicData uri="http://schemas.openxmlformats.org/drawingml/2006/table">
@@ -14138,7 +16157,7 @@
                           </a:solidFill>
                           <a:latin typeface="Calibri"/>
                         </a:rPr>
-                        <a:t>1:20</a:t>
+                        <a:t>1:15</a:t>
                       </a:r>
                     </a:p>
                   </a:txBody>
@@ -14160,7 +16179,7 @@
                           </a:solidFill>
                           <a:latin typeface="Calibri"/>
                         </a:rPr>
-                        <a:t>Break</a:t>
+                        <a:t>BREAK  (10 minutes)</a:t>
                       </a:r>
                     </a:p>
                   </a:txBody>
@@ -14184,7 +16203,7 @@
                           </a:solidFill>
                           <a:latin typeface="Calibri"/>
                         </a:rPr>
-                        <a:t>1:30</a:t>
+                        <a:t>1:25</a:t>
                       </a:r>
                     </a:p>
                   </a:txBody>
@@ -14230,7 +16249,7 @@
                           </a:solidFill>
                           <a:latin typeface="Calibri"/>
                         </a:rPr>
-                        <a:t>2:00</a:t>
+                        <a:t>1:55</a:t>
                       </a:r>
                     </a:p>
                   </a:txBody>
@@ -14276,7 +16295,7 @@
                           </a:solidFill>
                           <a:latin typeface="Calibri"/>
                         </a:rPr>
-                        <a:t>2:20</a:t>
+                        <a:t>2:15</a:t>
                       </a:r>
                     </a:p>
                   </a:txBody>
@@ -14298,7 +16317,7 @@
                           </a:solidFill>
                           <a:latin typeface="Calibri"/>
                         </a:rPr>
-                        <a:t>Upload a1b_serial_console</a:t>
+                        <a:t>BREAK  (10 minutes)</a:t>
                       </a:r>
                     </a:p>
                   </a:txBody>
@@ -14322,7 +16341,7 @@
                           </a:solidFill>
                           <a:latin typeface="Calibri"/>
                         </a:rPr>
-                        <a:t>2:45</a:t>
+                        <a:t>2:25</a:t>
                       </a:r>
                     </a:p>
                   </a:txBody>
@@ -14344,13 +16363,59 @@
                           </a:solidFill>
                           <a:latin typeface="Calibri"/>
                         </a:rPr>
+                        <a:t>Upload a1b_serial_console</a:t>
+                      </a:r>
+                    </a:p>
+                  </a:txBody>
+                  <a:tcPr marL="73152" marT="18288" marB="18288">
+                    <a:solidFill>
+                      <a:srgbClr val="EEF3F8"/>
+                    </a:solidFill>
+                  </a:tcPr>
+                </a:tc>
+              </a:tr>
+              <a:tr h="298450">
+                <a:tc>
+                  <a:txBody>
+                    <a:bodyPr/>
+                    <a:lstStyle/>
+                    <a:p>
+                      <a:r>
+                        <a:rPr sz="1400">
+                          <a:solidFill>
+                            <a:srgbClr val="222222"/>
+                          </a:solidFill>
+                          <a:latin typeface="Calibri"/>
+                        </a:rPr>
+                        <a:t>2:45</a:t>
+                      </a:r>
+                    </a:p>
+                  </a:txBody>
+                  <a:tcPr marL="73152" marT="18288" marB="18288">
+                    <a:solidFill>
+                      <a:srgbClr val="FFFFFF"/>
+                    </a:solidFill>
+                  </a:tcPr>
+                </a:tc>
+                <a:tc>
+                  <a:txBody>
+                    <a:bodyPr/>
+                    <a:lstStyle/>
+                    <a:p>
+                      <a:r>
+                        <a:rPr sz="1400">
+                          <a:solidFill>
+                            <a:srgbClr val="222222"/>
+                          </a:solidFill>
+                          <a:latin typeface="Calibri"/>
+                        </a:rPr>
                         <a:t>The boot sequence of Op Program 12, line by line</a:t>
                       </a:r>
                     </a:p>
                   </a:txBody>
                   <a:tcPr marL="73152" marT="18288" marB="18288">
                     <a:solidFill>
-                      <a:srgbClr val="EEF3F8"/>
+                      <a:srgbClr val="FFFFFF"/>
                     </a:solidFill>
                   </a:tcPr>
                 </a:tc>
@@ -14367,7 +16432,7 @@
 </p:sld>
 </file>
 
-<file path=ppt/slides/slide6.xml><?xml version="1.0" encoding="utf-8"?>
+<file path=ppt/slides/slide7.xml><?xml version="1.0" encoding="utf-8"?>
 <p:sld xmlns:a="http://schemas.openxmlformats.org/drawingml/2006/main" xmlns:p="http://schemas.openxmlformats.org/presentationml/2006/main" xmlns:r="http://schemas.openxmlformats.org/officeDocument/2006/relationships">
   <p:cSld>
     <p:spTree>
@@ -14558,7 +16623,7 @@
                 </a:solidFill>
                 <a:latin typeface="Calibri"/>
               </a:rPr>
-              <a:t>5</a:t>
+              <a:t>6</a:t>
             </a:r>
           </a:p>
         </p:txBody>
@@ -15077,7 +17142,7 @@
 </p:sld>
 </file>
 
-<file path=ppt/slides/slide7.xml><?xml version="1.0" encoding="utf-8"?>
+<file path=ppt/slides/slide8.xml><?xml version="1.0" encoding="utf-8"?>
 <p:sld xmlns:a="http://schemas.openxmlformats.org/drawingml/2006/main" xmlns:p="http://schemas.openxmlformats.org/presentationml/2006/main" xmlns:r="http://schemas.openxmlformats.org/officeDocument/2006/relationships">
   <p:cSld>
     <p:spTree>
@@ -15268,7 +17333,7 @@
                 </a:solidFill>
                 <a:latin typeface="Calibri"/>
               </a:rPr>
-              <a:t>6</a:t>
+              <a:t>7</a:t>
             </a:r>
           </a:p>
         </p:txBody>
@@ -15652,397 +17717,6 @@
                 <a:latin typeface="Calibri"/>
               </a:rPr>
               <a:t>}</a:t>
-            </a:r>
-          </a:p>
-        </p:txBody>
-      </p:sp>
-    </p:spTree>
-  </p:cSld>
-  <p:clrMapOvr>
-    <a:masterClrMapping/>
-  </p:clrMapOvr>
-</p:sld>
-</file>
-
-<file path=ppt/slides/slide8.xml><?xml version="1.0" encoding="utf-8"?>
-<p:sld xmlns:a="http://schemas.openxmlformats.org/drawingml/2006/main" xmlns:p="http://schemas.openxmlformats.org/presentationml/2006/main" xmlns:r="http://schemas.openxmlformats.org/officeDocument/2006/relationships">
-  <p:cSld>
-    <p:spTree>
-      <p:nvGrpSpPr>
-        <p:cNvPr id="1" name=""/>
-        <p:cNvGrpSpPr/>
-        <p:nvPr/>
-      </p:nvGrpSpPr>
-      <p:grpSpPr/>
-      <p:sp>
-        <p:nvSpPr>
-          <p:cNvPr id="2" name="Title 1"/>
-          <p:cNvSpPr>
-            <a:spLocks noGrp="1"/>
-          </p:cNvSpPr>
-          <p:nvPr>
-            <p:ph type="title"/>
-          </p:nvPr>
-        </p:nvSpPr>
-        <p:spPr>
-          <a:xfrm>
-            <a:off x="502920" y="274320"/>
-            <a:ext cx="11185855" cy="777240"/>
-          </a:xfrm>
-        </p:spPr>
-        <p:txBody>
-          <a:bodyPr wrap="square" anchor="b"/>
-          <a:lstStyle/>
-          <a:p>
-            <a:pPr algn="l">
-              <a:lnSpc>
-                <a:spcPct val="100000"/>
-              </a:lnSpc>
-              <a:spcAft>
-                <a:spcPts val="0"/>
-              </a:spcAft>
-              <a:defRPr sz="2800" b="1">
-                <a:solidFill>
-                  <a:srgbClr val="1F3A5F"/>
-                </a:solidFill>
-                <a:latin typeface="Calibri"/>
-              </a:defRPr>
-            </a:pPr>
-            <a:r>
-              <a:rPr sz="2800" b="1">
-                <a:solidFill>
-                  <a:srgbClr val="1F3A5F"/>
-                </a:solidFill>
-                <a:latin typeface="Calibri"/>
-              </a:rPr>
-              <a:t>One binary, two vehicles  (continued)</a:t>
-            </a:r>
-          </a:p>
-        </p:txBody>
-      </p:sp>
-      <p:sp>
-        <p:nvSpPr>
-          <p:cNvPr id="3" name="Rectangle 2"/>
-          <p:cNvSpPr/>
-          <p:nvPr/>
-        </p:nvSpPr>
-        <p:spPr>
-          <a:xfrm>
-            <a:off x="502920" y="1097280"/>
-            <a:ext cx="11185855" cy="19050"/>
-          </a:xfrm>
-          <a:prstGeom prst="rect">
-            <a:avLst/>
-          </a:prstGeom>
-          <a:solidFill>
-            <a:srgbClr val="C8D2DE"/>
-          </a:solidFill>
-          <a:ln>
-            <a:noFill/>
-          </a:ln>
-          <a:effectLst/>
-        </p:spPr>
-        <p:style>
-          <a:lnRef idx="1">
-            <a:schemeClr val="accent1"/>
-          </a:lnRef>
-          <a:fillRef idx="3">
-            <a:schemeClr val="accent1"/>
-          </a:fillRef>
-          <a:effectRef idx="2">
-            <a:schemeClr val="accent1"/>
-          </a:effectRef>
-          <a:fontRef idx="minor">
-            <a:schemeClr val="lt1"/>
-          </a:fontRef>
-        </p:style>
-        <p:txBody>
-          <a:bodyPr rtlCol="0" anchor="ctr"/>
-          <a:lstStyle/>
-          <a:p>
-            <a:pPr algn="ctr"/>
-          </a:p>
-        </p:txBody>
-      </p:sp>
-      <p:sp>
-        <p:nvSpPr>
-          <p:cNvPr id="4" name="TextBox 3"/>
-          <p:cNvSpPr txBox="1"/>
-          <p:nvPr/>
-        </p:nvSpPr>
-        <p:spPr>
-          <a:xfrm>
-            <a:off x="502920" y="6382512"/>
-            <a:ext cx="10545775" cy="274320"/>
-          </a:xfrm>
-          <a:prstGeom prst="rect">
-            <a:avLst/>
-          </a:prstGeom>
-          <a:noFill/>
-        </p:spPr>
-        <p:txBody>
-          <a:bodyPr wrap="square" lIns="0" tIns="0">
-            <a:spAutoFit/>
-          </a:bodyPr>
-          <a:lstStyle/>
-          <a:p>
-            <a:pPr algn="l">
-              <a:lnSpc>
-                <a:spcPct val="100000"/>
-              </a:lnSpc>
-              <a:spcAft>
-                <a:spcPts val="0"/>
-              </a:spcAft>
-              <a:defRPr sz="1000" b="0">
-                <a:solidFill>
-                  <a:srgbClr val="666666"/>
-                </a:solidFill>
-                <a:latin typeface="Calibri"/>
-              </a:defRPr>
-            </a:pPr>
-            <a:r>
-              <a:rPr sz="1000" b="0">
-                <a:solidFill>
-                  <a:srgbClr val="666666"/>
-                </a:solidFill>
-                <a:latin typeface="Calibri"/>
-              </a:rPr>
-              <a:t>Pathfinder Advanced - Op Program 12  |  Lesson 1</a:t>
-            </a:r>
-          </a:p>
-        </p:txBody>
-      </p:sp>
-      <p:sp>
-        <p:nvSpPr>
-          <p:cNvPr id="5" name="TextBox 4"/>
-          <p:cNvSpPr txBox="1"/>
-          <p:nvPr/>
-        </p:nvSpPr>
-        <p:spPr>
-          <a:xfrm>
-            <a:off x="11231575" y="6382512"/>
-            <a:ext cx="457200" cy="274320"/>
-          </a:xfrm>
-          <a:prstGeom prst="rect">
-            <a:avLst/>
-          </a:prstGeom>
-          <a:noFill/>
-        </p:spPr>
-        <p:txBody>
-          <a:bodyPr wrap="square" lIns="0" tIns="0">
-            <a:spAutoFit/>
-          </a:bodyPr>
-          <a:lstStyle/>
-          <a:p>
-            <a:pPr algn="r">
-              <a:lnSpc>
-                <a:spcPct val="100000"/>
-              </a:lnSpc>
-              <a:spcAft>
-                <a:spcPts val="0"/>
-              </a:spcAft>
-              <a:defRPr sz="1000" b="0">
-                <a:solidFill>
-                  <a:srgbClr val="666666"/>
-                </a:solidFill>
-                <a:latin typeface="Calibri"/>
-              </a:defRPr>
-            </a:pPr>
-            <a:r>
-              <a:rPr sz="1000" b="0">
-                <a:solidFill>
-                  <a:srgbClr val="666666"/>
-                </a:solidFill>
-                <a:latin typeface="Calibri"/>
-              </a:rPr>
-              <a:t>7</a:t>
-            </a:r>
-          </a:p>
-        </p:txBody>
-      </p:sp>
-      <p:sp>
-        <p:nvSpPr>
-          <p:cNvPr id="6" name="TextBox 5"/>
-          <p:cNvSpPr txBox="1"/>
-          <p:nvPr/>
-        </p:nvSpPr>
-        <p:spPr>
-          <a:xfrm>
-            <a:off x="6324447" y="1188720"/>
-            <a:ext cx="5364327" cy="457200"/>
-          </a:xfrm>
-          <a:prstGeom prst="rect">
-            <a:avLst/>
-          </a:prstGeom>
-          <a:noFill/>
-        </p:spPr>
-        <p:txBody>
-          <a:bodyPr wrap="square" lIns="0" tIns="0" rIns="0" bIns="0">
-            <a:spAutoFit/>
-          </a:bodyPr>
-          <a:lstStyle/>
-          <a:p>
-            <a:pPr algn="l">
-              <a:lnSpc>
-                <a:spcPct val="100000"/>
-              </a:lnSpc>
-              <a:spcAft>
-                <a:spcPts val="600"/>
-              </a:spcAft>
-              <a:defRPr sz="1800" b="1">
-                <a:solidFill>
-                  <a:srgbClr val="0E7C86"/>
-                </a:solidFill>
-                <a:latin typeface="Calibri"/>
-              </a:defRPr>
-            </a:pPr>
-            <a:r>
-              <a:rPr sz="1800" b="1">
-                <a:solidFill>
-                  <a:srgbClr val="0E7C86"/>
-                </a:solidFill>
-                <a:latin typeface="Calibri"/>
-              </a:rPr>
-              <a:t>How Op 12 does it (cont.)</a:t>
-            </a:r>
-          </a:p>
-        </p:txBody>
-      </p:sp>
-      <p:sp>
-        <p:nvSpPr>
-          <p:cNvPr id="7" name="TextBox 6"/>
-          <p:cNvSpPr txBox="1"/>
-          <p:nvPr/>
-        </p:nvSpPr>
-        <p:spPr>
-          <a:xfrm>
-            <a:off x="6324447" y="1700784"/>
-            <a:ext cx="5364327" cy="3419856"/>
-          </a:xfrm>
-          <a:prstGeom prst="rect">
-            <a:avLst/>
-          </a:prstGeom>
-          <a:noFill/>
-        </p:spPr>
-        <p:txBody>
-          <a:bodyPr wrap="square" lIns="0" tIns="0" rIns="0" bIns="0">
-            <a:spAutoFit/>
-          </a:bodyPr>
-          <a:lstStyle/>
-          <a:p>
-            <a:pPr algn="l">
-              <a:lnSpc>
-                <a:spcPct val="100000"/>
-              </a:lnSpc>
-              <a:spcAft>
-                <a:spcPts val="400"/>
-              </a:spcAft>
-              <a:defRPr sz="1800" b="0">
-                <a:solidFill>
-                  <a:srgbClr val="222222"/>
-                </a:solidFill>
-                <a:latin typeface="Calibri"/>
-              </a:defRPr>
-            </a:pPr>
-            <a:r>
-              <a:rPr sz="1800" b="0">
-                <a:solidFill>
-                  <a:srgbClr val="222222"/>
-                </a:solidFill>
-                <a:latin typeface="Calibri"/>
-              </a:rPr>
-              <a:t>Bit FLAGS, not booleans, so one byte can carry several independent capabilities and a test is a single &amp; operation.</a:t>
-            </a:r>
-          </a:p>
-          <a:p>
-            <a:pPr algn="l">
-              <a:lnSpc>
-                <a:spcPct val="100000"/>
-              </a:lnSpc>
-              <a:spcAft>
-                <a:spcPts val="400"/>
-              </a:spcAft>
-              <a:defRPr sz="1800" b="0">
-                <a:solidFill>
-                  <a:srgbClr val="222222"/>
-                </a:solidFill>
-                <a:latin typeface="Calibri"/>
-              </a:defRPr>
-            </a:pPr>
-            <a:r>
-              <a:rPr sz="1800" b="0">
-                <a:solidFill>
-                  <a:srgbClr val="222222"/>
-                </a:solidFill>
-                <a:latin typeface="Calibri"/>
-              </a:rPr>
-              <a:t>Every feature that needs the sensor checks its flag first and is a no-op without it.</a:t>
-            </a:r>
-          </a:p>
-        </p:txBody>
-      </p:sp>
-      <p:sp>
-        <p:nvSpPr>
-          <p:cNvPr id="8" name="Rounded Rectangle 7"/>
-          <p:cNvSpPr/>
-          <p:nvPr/>
-        </p:nvSpPr>
-        <p:spPr>
-          <a:xfrm>
-            <a:off x="502920" y="5303520"/>
-            <a:ext cx="11185855" cy="960120"/>
-          </a:xfrm>
-          <a:prstGeom prst="roundRect">
-            <a:avLst>
-              <a:gd name="adj" fmla="val 4000"/>
-            </a:avLst>
-          </a:prstGeom>
-          <a:solidFill>
-            <a:srgbClr val="EEF3F8"/>
-          </a:solidFill>
-          <a:ln w="12700">
-            <a:solidFill>
-              <a:srgbClr val="0E7C86"/>
-            </a:solidFill>
-          </a:ln>
-          <a:effectLst/>
-        </p:spPr>
-        <p:style>
-          <a:lnRef idx="1">
-            <a:schemeClr val="accent1"/>
-          </a:lnRef>
-          <a:fillRef idx="3">
-            <a:schemeClr val="accent1"/>
-          </a:fillRef>
-          <a:effectRef idx="2">
-            <a:schemeClr val="accent1"/>
-          </a:effectRef>
-          <a:fontRef idx="minor">
-            <a:schemeClr val="lt1"/>
-          </a:fontRef>
-        </p:style>
-        <p:txBody>
-          <a:bodyPr rtlCol="0" anchor="ctr" wrap="square" lIns="164592" rIns="164592" tIns="73152" bIns="73152"/>
-          <a:lstStyle/>
-          <a:p>
-            <a:pPr algn="l"/>
-            <a:r>
-              <a:rPr sz="1300" b="1">
-                <a:solidFill>
-                  <a:srgbClr val="0E7C86"/>
-                </a:solidFill>
-                <a:latin typeface="Calibri"/>
-              </a:rPr>
-              <a:t>KEY POINT   </a:t>
-            </a:r>
-            <a:r>
-              <a:rPr sz="1500">
-                <a:solidFill>
-                  <a:srgbClr val="222222"/>
-                </a:solidFill>
-                <a:latin typeface="Calibri"/>
-              </a:rPr>
-              <a:t>Detect what is there rather than being told what is there. A configuration that can disagree with the hardware eventually will.</a:t>
             </a:r>
           </a:p>
         </p:txBody>
@@ -16106,7 +17780,7 @@
                 </a:solidFill>
                 <a:latin typeface="Calibri"/>
               </a:rPr>
-              <a:t>How Arduino tabs actually work</a:t>
+              <a:t>One binary, two vehicles  (continued)</a:t>
             </a:r>
           </a:p>
         </p:txBody>
@@ -16259,8 +17933,8 @@
         </p:nvSpPr>
         <p:spPr>
           <a:xfrm>
-            <a:off x="502920" y="1188720"/>
-            <a:ext cx="11185855" cy="530352"/>
+            <a:off x="6324447" y="1188720"/>
+            <a:ext cx="5364327" cy="457200"/>
           </a:xfrm>
           <a:prstGeom prst="rect">
             <a:avLst/>
@@ -16280,7 +17954,7 @@
               <a:spcAft>
                 <a:spcPts val="600"/>
               </a:spcAft>
-              <a:defRPr sz="1900" b="1">
+              <a:defRPr sz="1800" b="1">
                 <a:solidFill>
                   <a:srgbClr val="0E7C86"/>
                 </a:solidFill>
@@ -16288,13 +17962,13 @@
               </a:defRPr>
             </a:pPr>
             <a:r>
-              <a:rPr sz="1900" b="1">
+              <a:rPr sz="1800" b="1">
                 <a:solidFill>
                   <a:srgbClr val="0E7C86"/>
                 </a:solidFill>
                 <a:latin typeface="Calibri"/>
               </a:rPr>
-              <a:t>Convenient, and exactly one trap</a:t>
+              <a:t>How Op 12 does it (cont.)</a:t>
             </a:r>
           </a:p>
         </p:txBody>
@@ -16307,8 +17981,8 @@
         </p:nvSpPr>
         <p:spPr>
           <a:xfrm>
-            <a:off x="502920" y="1755648"/>
-            <a:ext cx="11185855" cy="4507992"/>
+            <a:off x="6324447" y="1700784"/>
+            <a:ext cx="5364327" cy="3419856"/>
           </a:xfrm>
           <a:prstGeom prst="rect">
             <a:avLst/>
@@ -16326,7 +18000,7 @@
                 <a:spcPct val="100000"/>
               </a:lnSpc>
               <a:spcAft>
-                <a:spcPts val="900"/>
+                <a:spcPts val="400"/>
               </a:spcAft>
               <a:defRPr sz="1800" b="0">
                 <a:solidFill>
@@ -16342,16 +18016,16 @@
                 </a:solidFill>
                 <a:latin typeface="Calibri"/>
               </a:rPr>
-              <a:t>Every .ino file in the sketch folder is a tab in the IDE.</a:t>
-            </a:r>
-          </a:p>
-          <a:p>
-            <a:pPr algn="l">
-              <a:lnSpc>
-                <a:spcPct val="100000"/>
-              </a:lnSpc>
-              <a:spcAft>
-                <a:spcPts val="900"/>
+              <a:t>Bit FLAGS, not booleans, so one byte can carry several independent capabilities and a test is a single &amp; operation.</a:t>
+            </a:r>
+          </a:p>
+          <a:p>
+            <a:pPr algn="l">
+              <a:lnSpc>
+                <a:spcPct val="100000"/>
+              </a:lnSpc>
+              <a:spcAft>
+                <a:spcPts val="400"/>
               </a:spcAft>
               <a:defRPr sz="1800" b="0">
                 <a:solidFill>
@@ -16367,89 +18041,73 @@
                 </a:solidFill>
                 <a:latin typeface="Calibri"/>
               </a:rPr>
-              <a:t>Before compiling, the IDE CONCATENATES them into one file - the one named after the folder first, then the rest alphabetically - and generates function prototypes at the top.</a:t>
-            </a:r>
-          </a:p>
-          <a:p>
-            <a:pPr algn="l">
-              <a:lnSpc>
-                <a:spcPct val="100000"/>
-              </a:lnSpc>
-              <a:spcAft>
-                <a:spcPts val="900"/>
-              </a:spcAft>
-              <a:defRPr sz="1800" b="0">
-                <a:solidFill>
-                  <a:srgbClr val="222222"/>
-                </a:solidFill>
-                <a:latin typeface="Calibri"/>
-              </a:defRPr>
-            </a:pPr>
-          </a:p>
-          <a:p>
-            <a:pPr algn="l">
-              <a:lnSpc>
-                <a:spcPct val="100000"/>
-              </a:lnSpc>
-              <a:spcAft>
-                <a:spcPts val="900"/>
-              </a:spcAft>
-              <a:defRPr sz="1800" b="0">
-                <a:solidFill>
-                  <a:srgbClr val="222222"/>
-                </a:solidFill>
-                <a:latin typeface="Calibri"/>
-              </a:defRPr>
-            </a:pPr>
-            <a:r>
-              <a:rPr sz="1800" b="0">
-                <a:solidFill>
-                  <a:srgbClr val="222222"/>
-                </a:solidFill>
-                <a:latin typeface="Calibri"/>
-              </a:rPr>
-              <a:t>Two consequences you have to know:</a:t>
-            </a:r>
-          </a:p>
-          <a:p>
-            <a:pPr algn="l">
-              <a:lnSpc>
-                <a:spcPct val="100000"/>
-              </a:lnSpc>
-              <a:spcAft>
-                <a:spcPts val="900"/>
-              </a:spcAft>
-              <a:defRPr sz="1800" b="0">
-                <a:solidFill>
-                  <a:srgbClr val="222222"/>
-                </a:solidFill>
-                <a:latin typeface="Calibri"/>
-              </a:defRPr>
-            </a:pPr>
-          </a:p>
-          <a:p>
-            <a:pPr lvl="1" algn="l">
-              <a:lnSpc>
-                <a:spcPct val="100000"/>
-              </a:lnSpc>
-              <a:spcAft>
-                <a:spcPts val="900"/>
-              </a:spcAft>
-              <a:defRPr sz="1800" b="0">
-                <a:solidFill>
-                  <a:srgbClr val="222222"/>
-                </a:solidFill>
-                <a:latin typeface="Calibri"/>
-              </a:defRPr>
-            </a:pPr>
-            <a:r>
-              <a:rPr sz="1800" b="0">
-                <a:solidFill>
-                  <a:srgbClr val="222222"/>
-                </a:solidFill>
-                <a:latin typeface="Calibri"/>
-              </a:rPr>
-              <a:t>Functions and globals are shared across tabs with NO header needed. Lighting.ino can call strip and read NUM_LEDS with no include.</a:t>
+              <a:t>Every feature that needs the sensor checks its flag first and is a no-op without it.</a:t>
+            </a:r>
+          </a:p>
+        </p:txBody>
+      </p:sp>
+      <p:sp>
+        <p:nvSpPr>
+          <p:cNvPr id="8" name="Rounded Rectangle 7"/>
+          <p:cNvSpPr/>
+          <p:nvPr/>
+        </p:nvSpPr>
+        <p:spPr>
+          <a:xfrm>
+            <a:off x="502920" y="5303520"/>
+            <a:ext cx="11185855" cy="960120"/>
+          </a:xfrm>
+          <a:prstGeom prst="roundRect">
+            <a:avLst>
+              <a:gd name="adj" fmla="val 4000"/>
+            </a:avLst>
+          </a:prstGeom>
+          <a:solidFill>
+            <a:srgbClr val="EEF3F8"/>
+          </a:solidFill>
+          <a:ln w="12700">
+            <a:solidFill>
+              <a:srgbClr val="0E7C86"/>
+            </a:solidFill>
+          </a:ln>
+          <a:effectLst/>
+        </p:spPr>
+        <p:style>
+          <a:lnRef idx="1">
+            <a:schemeClr val="accent1"/>
+          </a:lnRef>
+          <a:fillRef idx="3">
+            <a:schemeClr val="accent1"/>
+          </a:fillRef>
+          <a:effectRef idx="2">
+            <a:schemeClr val="accent1"/>
+          </a:effectRef>
+          <a:fontRef idx="minor">
+            <a:schemeClr val="lt1"/>
+          </a:fontRef>
+        </p:style>
+        <p:txBody>
+          <a:bodyPr rtlCol="0" anchor="ctr" wrap="square" lIns="164592" rIns="164592" tIns="73152" bIns="73152"/>
+          <a:lstStyle/>
+          <a:p>
+            <a:pPr algn="l"/>
+            <a:r>
+              <a:rPr sz="1300" b="1">
+                <a:solidFill>
+                  <a:srgbClr val="0E7C86"/>
+                </a:solidFill>
+                <a:latin typeface="Calibri"/>
+              </a:rPr>
+              <a:t>KEY POINT   </a:t>
+            </a:r>
+            <a:r>
+              <a:rPr sz="1500">
+                <a:solidFill>
+                  <a:srgbClr val="222222"/>
+                </a:solidFill>
+                <a:latin typeface="Calibri"/>
+              </a:rPr>
+              <a:t>Detect what is there rather than being told what is there. A configuration that can disagree with the hardware eventually will.</a:t>
             </a:r>
           </a:p>
         </p:txBody>

--- a/ground-vehicle/docs/courses/advanced/l1_architecture_and_toolchain.pptx
+++ b/ground-vehicle/docs/courses/advanced/l1_architecture_and_toolchain.pptx
@@ -29,8 +29,6 @@
     <p:sldId id="277" r:id="rId29"/>
     <p:sldId id="278" r:id="rId30"/>
     <p:sldId id="279" r:id="rId31"/>
-    <p:sldId id="280" r:id="rId32"/>
-    <p:sldId id="281" r:id="rId33"/>
   </p:sldIdLst>
   <p:sldSz cx="12191695" cy="6858000" type="screen4x3"/>
   <p:notesSz cx="6858000" cy="9144000"/>
@@ -619,6 +617,15 @@
               <a:rPr sz="1200">
                 <a:latin typeface="Calibri"/>
               </a:rPr>
+              <a:t>(Continued from the previous slide - the same notes apply.)</a:t>
+            </a:r>
+          </a:p>
+          <a:p/>
+          <a:p>
+            <a:r>
+              <a:rPr sz="1200">
+                <a:latin typeface="Calibri"/>
+              </a:rPr>
               <a:t>This is the slide the activity is built on. Go slowly.</a:t>
             </a:r>
           </a:p>
@@ -716,16 +723,15 @@
               <a:rPr sz="1200">
                 <a:latin typeface="Calibri"/>
               </a:rPr>
-              <a:t>(Continued from the previous slide - the same notes apply.)</a:t>
-            </a:r>
-          </a:p>
-          <a:p/>
+              <a:t>Eight files, one subsystem each. Read the table, then say the rule underneath it: each tab owns its own state and others go through its functions.</a:t>
+            </a:r>
+          </a:p>
           <a:p>
             <a:r>
               <a:rPr sz="1200">
                 <a:latin typeface="Calibri"/>
               </a:rPr>
-              <a:t>This is the slide the activity is built on. Go slowly.</a:t>
+              <a:t>The note is the honest part: nothing in the compiler enforces this. Every tab can see every global. It is a convention held by discipline.</a:t>
             </a:r>
           </a:p>
           <a:p>
@@ -733,23 +739,7 @@
               <a:rPr sz="1200">
                 <a:latin typeface="Calibri"/>
               </a:rPr>
-              <a:t>The IDE concatenates the tabs and generates prototypes ABOVE your code. Draw that on the board - the ordering is the whole explanation.</a:t>
-            </a:r>
-          </a:p>
-          <a:p>
-            <a:r>
-              <a:rPr sz="1200">
-                <a:latin typeface="Calibri"/>
-              </a:rPr>
-              <a:t>Functions and globals cross tabs freely. Types do not, because the generated prototype mentions a type that is not defined yet at that point.</a:t>
-            </a:r>
-          </a:p>
-          <a:p>
-            <a:r>
-              <a:rPr sz="1200">
-                <a:latin typeface="Calibri"/>
-              </a:rPr>
-              <a:t>That is precisely why Config.h is a real header. Not style - necessity.</a:t>
+              <a:t>Ask what happens when somebody breaks the convention. The answer is that the program still compiles, which is exactly why it is dangerous.</a:t>
             </a:r>
           </a:p>
         </p:txBody>
@@ -822,23 +812,7 @@
               <a:rPr sz="1200">
                 <a:latin typeface="Calibri"/>
               </a:rPr>
-              <a:t>Eight files, one subsystem each. Read the table, then say the rule underneath it: each tab owns its own state and others go through its functions.</a:t>
-            </a:r>
-          </a:p>
-          <a:p>
-            <a:r>
-              <a:rPr sz="1200">
-                <a:latin typeface="Calibri"/>
-              </a:rPr>
-              <a:t>The note is the honest part: nothing in the compiler enforces this. Every tab can see every global. It is a convention held by discipline.</a:t>
-            </a:r>
-          </a:p>
-          <a:p>
-            <a:r>
-              <a:rPr sz="1200">
-                <a:latin typeface="Calibri"/>
-              </a:rPr>
-              <a:t>Ask what happens when somebody breaks the convention. The answer is that the program still compiles, which is exactly why it is dangerous.</a:t>
+              <a:t>Twenty seconds. First activity.</a:t>
             </a:r>
           </a:p>
         </p:txBody>
@@ -911,7 +885,39 @@
               <a:rPr sz="1200">
                 <a:latin typeface="Calibri"/>
               </a:rPr>
-              <a:t>Twenty seconds. First activity.</a:t>
+              <a:t>Step 5 is the whole point of this activity. Do not warn them what the error will look like.</a:t>
+            </a:r>
+          </a:p>
+          <a:p>
+            <a:r>
+              <a:rPr sz="1200">
+                <a:latin typeface="Calibri"/>
+              </a:rPr>
+              <a:t>The error points at a line they did not write, in generated code. That experience is worth more than the explanation on the previous slide.</a:t>
+            </a:r>
+          </a:p>
+          <a:p>
+            <a:r>
+              <a:rPr sz="1200">
+                <a:latin typeface="Calibri"/>
+              </a:rPr>
+              <a:t>Answer to the first question: the error is on a generated prototype line, not on any line in their file.</a:t>
+            </a:r>
+          </a:p>
+          <a:p>
+            <a:r>
+              <a:rPr sz="1200">
+                <a:latin typeface="Calibri"/>
+              </a:rPr>
+              <a:t>Answer to the second: functions are only NAMED in the prototype, but a type has to be DEFINED before the prototype that mentions it.</a:t>
+            </a:r>
+          </a:p>
+          <a:p>
+            <a:r>
+              <a:rPr sz="1200">
+                <a:latin typeface="Calibri"/>
+              </a:rPr>
+              <a:t>Thirty minutes, and it is worth every one of them.</a:t>
             </a:r>
           </a:p>
         </p:txBody>
@@ -984,7 +990,7 @@
               <a:rPr sz="1200">
                 <a:latin typeface="Calibri"/>
               </a:rPr>
-              <a:t>Step 5 is the whole point of this activity. Do not warn them what the error will look like.</a:t>
+              <a:t>A compiled binary is opaque. You can see what it does, not what it thinks. That is the framing.</a:t>
             </a:r>
           </a:p>
           <a:p>
@@ -992,7 +998,7 @@
               <a:rPr sz="1200">
                 <a:latin typeface="Calibri"/>
               </a:rPr>
-              <a:t>The error points at a line they did not write, in generated code. That experience is worth more than the explanation on the previous slide.</a:t>
+              <a:t>The four commands on the slide are the four things people actually want at a track event.</a:t>
             </a:r>
           </a:p>
           <a:p>
@@ -1000,7 +1006,7 @@
               <a:rPr sz="1200">
                 <a:latin typeface="Calibri"/>
               </a:rPr>
-              <a:t>Answer to the first question: the error is on a generated prototype line, not on any line in their file.</a:t>
+              <a:t>Tuning stops being an edit-compile-upload cycle and becomes a conversation. That is a real productivity difference, not a nicety.</a:t>
             </a:r>
           </a:p>
           <a:p>
@@ -1008,15 +1014,7 @@
               <a:rPr sz="1200">
                 <a:latin typeface="Calibri"/>
               </a:rPr>
-              <a:t>Answer to the second: functions are only NAMED in the prototype, but a type has to be DEFINED before the prototype that mentions it.</a:t>
-            </a:r>
-          </a:p>
-          <a:p>
-            <a:r>
-              <a:rPr sz="1200">
-                <a:latin typeface="Calibri"/>
-              </a:rPr>
-              <a:t>Thirty minutes, and it is worth every one of them.</a:t>
+              <a:t>Industrial controllers, network switches and flight computers all have one. This is standard practice, not a toy.</a:t>
             </a:r>
           </a:p>
         </p:txBody>
@@ -1089,7 +1087,7 @@
               <a:rPr sz="1200">
                 <a:latin typeface="Calibri"/>
               </a:rPr>
-              <a:t>A compiled binary is opaque. You can see what it does, not what it thinks. That is the framing.</a:t>
+              <a:t>Serial.readStringUntil() WAITS. On a moving vehicle that is unacceptable. Say it plainly.</a:t>
             </a:r>
           </a:p>
           <a:p>
@@ -1097,7 +1095,7 @@
               <a:rPr sz="1200">
                 <a:latin typeface="Calibri"/>
               </a:rPr>
-              <a:t>The four commands on the slide are the four things people actually want at a track event.</a:t>
+              <a:t>This version takes whatever bytes have arrived and returns immediately, every time. That is the non-blocking pattern from beginner Lesson 5, applied to input.</a:t>
             </a:r>
           </a:p>
           <a:p>
@@ -1105,7 +1103,7 @@
               <a:rPr sz="1200">
                 <a:latin typeface="Calibri"/>
               </a:rPr>
-              <a:t>Tuning stops being an edit-compile-upload cycle and becomes a conversation. That is a real productivity difference, not a nicety.</a:t>
+              <a:t>The line-ending handling looks like paranoia until you watch a console appear broken because the Serial Monitor dropdown was set differently.</a:t>
             </a:r>
           </a:p>
           <a:p>
@@ -1113,7 +1111,7 @@
               <a:rPr sz="1200">
                 <a:latin typeface="Calibri"/>
               </a:rPr>
-              <a:t>Industrial controllers, network switches and flight computers all have one. This is standard practice, not a toy.</a:t>
+              <a:t>The printable-character and length checks are the input validation. Worth pointing out that they are not optional.</a:t>
             </a:r>
           </a:p>
         </p:txBody>
@@ -1186,40 +1184,7 @@
               <a:rPr sz="1200">
                 <a:latin typeface="Calibri"/>
               </a:rPr>
-              <a:t>(Continued from the previous slide - the same notes apply.)</a:t>
-            </a:r>
-          </a:p>
-          <a:p/>
-          <a:p>
-            <a:r>
-              <a:rPr sz="1200">
-                <a:latin typeface="Calibri"/>
-              </a:rPr>
-              <a:t>A compiled binary is opaque. You can see what it does, not what it thinks. That is the framing.</a:t>
-            </a:r>
-          </a:p>
-          <a:p>
-            <a:r>
-              <a:rPr sz="1200">
-                <a:latin typeface="Calibri"/>
-              </a:rPr>
-              <a:t>The four commands on the slide are the four things people actually want at a track event.</a:t>
-            </a:r>
-          </a:p>
-          <a:p>
-            <a:r>
-              <a:rPr sz="1200">
-                <a:latin typeface="Calibri"/>
-              </a:rPr>
-              <a:t>Tuning stops being an edit-compile-upload cycle and becomes a conversation. That is a real productivity difference, not a nicety.</a:t>
-            </a:r>
-          </a:p>
-          <a:p>
-            <a:r>
-              <a:rPr sz="1200">
-                <a:latin typeface="Calibri"/>
-              </a:rPr>
-              <a:t>Industrial controllers, network switches and flight computers all have one. This is standard practice, not a toy.</a:t>
+              <a:t>Twenty seconds. Second activity.</a:t>
             </a:r>
           </a:p>
         </p:txBody>
@@ -1292,7 +1257,7 @@
               <a:rPr sz="1200">
                 <a:latin typeface="Calibri"/>
               </a:rPr>
-              <a:t>Serial.readStringUntil() WAITS. On a moving vehicle that is unacceptable. Say it plainly.</a:t>
+              <a:t>Step 4 is the one people skip. Make them try all four line-ending settings - it is the fastest way to appreciate the previous slide.</a:t>
             </a:r>
           </a:p>
           <a:p>
@@ -1300,7 +1265,7 @@
               <a:rPr sz="1200">
                 <a:latin typeface="Calibri"/>
               </a:rPr>
-              <a:t>This version takes whatever bytes have arrived and returns immediately, every time. That is the non-blocking pattern from beginner Lesson 5, applied to input.</a:t>
+              <a:t>Step 5 is the first thing they write themselves today.</a:t>
             </a:r>
           </a:p>
           <a:p>
@@ -1308,7 +1273,7 @@
               <a:rPr sz="1200">
                 <a:latin typeface="Calibri"/>
               </a:rPr>
-              <a:t>The line-ending handling looks like paranoia until you watch a console appear broken because the Serial Monitor dropdown was set differently.</a:t>
+              <a:t>Step 6 sends them into the real program to find the same three problems solved there. That is the bridge to the rest of the course.</a:t>
             </a:r>
           </a:p>
           <a:p>
@@ -1316,7 +1281,7 @@
               <a:rPr sz="1200">
                 <a:latin typeface="Calibri"/>
               </a:rPr>
-              <a:t>The printable-character and length checks are the input validation. Worth pointing out that they are not optional.</a:t>
+              <a:t>The answer to the question: toInt() returns 0 for anything unparseable, so a typo silently becomes a valid-looking zero. Range checking is what catches it.</a:t>
             </a:r>
           </a:p>
         </p:txBody>
@@ -1389,7 +1354,39 @@
               <a:rPr sz="1200">
                 <a:latin typeface="Calibri"/>
               </a:rPr>
-              <a:t>Twenty seconds. Second activity.</a:t>
+              <a:t>The order is the lesson, not the code. Walk down it and ask why each step is where it is.</a:t>
+            </a:r>
+          </a:p>
+          <a:p>
+            <a:r>
+              <a:rPr sz="1200">
+                <a:latin typeface="Calibri"/>
+              </a:rPr>
+              <a:t>Settings first, because everything after may depend on them. Then detect the hardware, because behaviour branches on it.</a:t>
+            </a:r>
+          </a:p>
+          <a:p>
+            <a:r>
+              <a:rPr sz="1200">
+                <a:latin typeface="Calibri"/>
+              </a:rPr>
+              <a:t>Motors before lights, because getting the outputs into a safe state matters more than anything pretty.</a:t>
+            </a:r>
+          </a:p>
+          <a:p>
+            <a:r>
+              <a:rPr sz="1200">
+                <a:latin typeface="Calibri"/>
+              </a:rPr>
+              <a:t>Radio last, because a controller connecting to a half-initialised vehicle is the worst possible moment.</a:t>
+            </a:r>
+          </a:p>
+          <a:p>
+            <a:r>
+              <a:rPr sz="1200">
+                <a:latin typeface="Calibri"/>
+              </a:rPr>
+              <a:t>Ask them to justify a different order. Making them defend it is better than telling them.</a:t>
             </a:r>
           </a:p>
         </p:txBody>
@@ -1462,15 +1459,16 @@
               <a:rPr sz="1200">
                 <a:latin typeface="Calibri"/>
               </a:rPr>
-              <a:t>Step 4 is the one people skip. Make them try all four line-ending settings - it is the fastest way to appreciate the previous slide.</a:t>
-            </a:r>
-          </a:p>
+              <a:t>(Continued from the previous slide - the same notes apply.)</a:t>
+            </a:r>
+          </a:p>
+          <a:p/>
           <a:p>
             <a:r>
               <a:rPr sz="1200">
                 <a:latin typeface="Calibri"/>
               </a:rPr>
-              <a:t>Step 5 is the first thing they write themselves today.</a:t>
+              <a:t>The order is the lesson, not the code. Walk down it and ask why each step is where it is.</a:t>
             </a:r>
           </a:p>
           <a:p>
@@ -1478,7 +1476,7 @@
               <a:rPr sz="1200">
                 <a:latin typeface="Calibri"/>
               </a:rPr>
-              <a:t>Step 6 sends them into the real program to find the same three problems solved there. That is the bridge to the rest of the course.</a:t>
+              <a:t>Settings first, because everything after may depend on them. Then detect the hardware, because behaviour branches on it.</a:t>
             </a:r>
           </a:p>
           <a:p>
@@ -1486,7 +1484,23 @@
               <a:rPr sz="1200">
                 <a:latin typeface="Calibri"/>
               </a:rPr>
-              <a:t>The answer to the question: toInt() returns 0 for anything unparseable, so a typo silently becomes a valid-looking zero. Range checking is what catches it.</a:t>
+              <a:t>Motors before lights, because getting the outputs into a safe state matters more than anything pretty.</a:t>
+            </a:r>
+          </a:p>
+          <a:p>
+            <a:r>
+              <a:rPr sz="1200">
+                <a:latin typeface="Calibri"/>
+              </a:rPr>
+              <a:t>Radio last, because a controller connecting to a half-initialised vehicle is the worst possible moment.</a:t>
+            </a:r>
+          </a:p>
+          <a:p>
+            <a:r>
+              <a:rPr sz="1200">
+                <a:latin typeface="Calibri"/>
+              </a:rPr>
+              <a:t>Ask them to justify a different order. Making them defend it is better than telling them.</a:t>
             </a:r>
           </a:p>
         </p:txBody>
@@ -1632,7 +1646,7 @@
               <a:rPr sz="1200">
                 <a:latin typeface="Calibri"/>
               </a:rPr>
-              <a:t>The order is the lesson, not the code. Walk down it and ask why each step is where it is.</a:t>
+              <a:t>Walk it left to right with a real vehicle in your hand, touching each box as you name it.</a:t>
             </a:r>
           </a:p>
           <a:p>
@@ -1640,7 +1654,7 @@
               <a:rPr sz="1200">
                 <a:latin typeface="Calibri"/>
               </a:rPr>
-              <a:t>Settings first, because everything after may depend on them. Then detect the hardware, because behaviour branches on it.</a:t>
+              <a:t>The point of the diagram is that nothing here is magic - every arrow is a wire or a radio link you can point at.</a:t>
             </a:r>
           </a:p>
           <a:p>
@@ -1648,7 +1662,7 @@
               <a:rPr sz="1200">
                 <a:latin typeface="Calibri"/>
               </a:rPr>
-              <a:t>Motors before lights, because getting the outputs into a safe state matters more than anything pretty.</a:t>
+              <a:t>Ask where THEIR program sits. The answer is the ESP32 box, and everything either side of it is fixed hardware they inherit.</a:t>
             </a:r>
           </a:p>
           <a:p>
@@ -1656,15 +1670,7 @@
               <a:rPr sz="1200">
                 <a:latin typeface="Calibri"/>
               </a:rPr>
-              <a:t>Radio last, because a controller connecting to a half-initialised vehicle is the worst possible moment.</a:t>
-            </a:r>
-          </a:p>
-          <a:p>
-            <a:r>
-              <a:rPr sz="1200">
-                <a:latin typeface="Calibri"/>
-              </a:rPr>
-              <a:t>Ask them to justify a different order. Making them defend it is better than telling them.</a:t>
+              <a:t>Come back to this slide whenever somebody is stuck: naming which box the fault is in is most of the debugging.</a:t>
             </a:r>
           </a:p>
         </p:txBody>
@@ -1737,16 +1743,15 @@
               <a:rPr sz="1200">
                 <a:latin typeface="Calibri"/>
               </a:rPr>
-              <a:t>(Continued from the previous slide - the same notes apply.)</a:t>
-            </a:r>
-          </a:p>
-          <a:p/>
+              <a:t>This is reference, not teaching. Point at it and move on.</a:t>
+            </a:r>
+          </a:p>
           <a:p>
             <a:r>
               <a:rPr sz="1200">
                 <a:latin typeface="Calibri"/>
               </a:rPr>
-              <a:t>The order is the lesson, not the code. Walk down it and ask why each step is where it is.</a:t>
+              <a:t>The note is the one thing to say out loud: GPIO 34 to 39 are input only and have no internal pull-up, which is why the self-test jumper needs an external pull-down.</a:t>
             </a:r>
           </a:p>
           <a:p>
@@ -1754,31 +1759,7 @@
               <a:rPr sz="1200">
                 <a:latin typeface="Calibri"/>
               </a:rPr>
-              <a:t>Settings first, because everything after may depend on them. Then detect the hardware, because behaviour branches on it.</a:t>
-            </a:r>
-          </a:p>
-          <a:p>
-            <a:r>
-              <a:rPr sz="1200">
-                <a:latin typeface="Calibri"/>
-              </a:rPr>
-              <a:t>Motors before lights, because getting the outputs into a safe state matters more than anything pretty.</a:t>
-            </a:r>
-          </a:p>
-          <a:p>
-            <a:r>
-              <a:rPr sz="1200">
-                <a:latin typeface="Calibri"/>
-              </a:rPr>
-              <a:t>Radio last, because a controller connecting to a half-initialised vehicle is the worst possible moment.</a:t>
-            </a:r>
-          </a:p>
-          <a:p>
-            <a:r>
-              <a:rPr sz="1200">
-                <a:latin typeface="Calibri"/>
-              </a:rPr>
-              <a:t>Ask them to justify a different order. Making them defend it is better than telling them.</a:t>
+              <a:t>Worth printing for the rest of the course.</a:t>
             </a:r>
           </a:p>
         </p:txBody>
@@ -1851,7 +1832,7 @@
               <a:rPr sz="1200">
                 <a:latin typeface="Calibri"/>
               </a:rPr>
-              <a:t>Walk it left to right with a real vehicle in your hand, touching each box as you name it.</a:t>
+              <a:t>This is the most useful slide in the lesson for anybody who will read somebody else's code again - which is all of them.</a:t>
             </a:r>
           </a:p>
           <a:p>
@@ -1859,7 +1840,7 @@
               <a:rPr sz="1200">
                 <a:latin typeface="Calibri"/>
               </a:rPr>
-              <a:t>The point of the diagram is that nothing here is magic - every arrow is a wire or a radio link you can point at.</a:t>
+              <a:t>Vocabulary first, then skeleton, then detail. Say why: reading Lighting.ino with no idea what led_mode is or who sets it is wasted time.</a:t>
             </a:r>
           </a:p>
           <a:p>
@@ -1867,7 +1848,7 @@
               <a:rPr sz="1200">
                 <a:latin typeface="Calibri"/>
               </a:rPr>
-              <a:t>Ask where THEIR program sits. The answer is the ESP32 box, and everything either side of it is fixed hardware they inherit.</a:t>
+              <a:t>Run the ten-minute exercise properly. Time it, and get answers from three different groups.</a:t>
             </a:r>
           </a:p>
           <a:p>
@@ -1875,7 +1856,7 @@
               <a:rPr sz="1200">
                 <a:latin typeface="Calibri"/>
               </a:rPr>
-              <a:t>Come back to this slide whenever somebody is stuck: naming which box the fault is in is most of the debugging.</a:t>
+              <a:t>Point out that Config.h tells you what the program can DO, because it tells you what somebody thought was worth tuning.</a:t>
             </a:r>
           </a:p>
         </p:txBody>
@@ -1948,15 +1929,16 @@
               <a:rPr sz="1200">
                 <a:latin typeface="Calibri"/>
               </a:rPr>
-              <a:t>This is reference, not teaching. Point at it and move on.</a:t>
-            </a:r>
-          </a:p>
+              <a:t>(Continued from the previous slide - the same notes apply.)</a:t>
+            </a:r>
+          </a:p>
+          <a:p/>
           <a:p>
             <a:r>
               <a:rPr sz="1200">
                 <a:latin typeface="Calibri"/>
               </a:rPr>
-              <a:t>The note is the one thing to say out loud: GPIO 34 to 39 are input only and have no internal pull-up, which is why the self-test jumper needs an external pull-down.</a:t>
+              <a:t>This is the most useful slide in the lesson for anybody who will read somebody else's code again - which is all of them.</a:t>
             </a:r>
           </a:p>
           <a:p>
@@ -1964,7 +1946,23 @@
               <a:rPr sz="1200">
                 <a:latin typeface="Calibri"/>
               </a:rPr>
-              <a:t>Worth printing for the rest of the course.</a:t>
+              <a:t>Vocabulary first, then skeleton, then detail. Say why: reading Lighting.ino with no idea what led_mode is or who sets it is wasted time.</a:t>
+            </a:r>
+          </a:p>
+          <a:p>
+            <a:r>
+              <a:rPr sz="1200">
+                <a:latin typeface="Calibri"/>
+              </a:rPr>
+              <a:t>Run the ten-minute exercise properly. Time it, and get answers from three different groups.</a:t>
+            </a:r>
+          </a:p>
+          <a:p>
+            <a:r>
+              <a:rPr sz="1200">
+                <a:latin typeface="Calibri"/>
+              </a:rPr>
+              <a:t>Point out that Config.h tells you what the program can DO, because it tells you what somebody thought was worth tuning.</a:t>
             </a:r>
           </a:p>
         </p:txBody>
@@ -2037,209 +2035,6 @@
               <a:rPr sz="1200">
                 <a:latin typeface="Calibri"/>
               </a:rPr>
-              <a:t>This is the most useful slide in the lesson for anybody who will read somebody else's code again - which is all of them.</a:t>
-            </a:r>
-          </a:p>
-          <a:p>
-            <a:r>
-              <a:rPr sz="1200">
-                <a:latin typeface="Calibri"/>
-              </a:rPr>
-              <a:t>Vocabulary first, then skeleton, then detail. Say why: reading Lighting.ino with no idea what led_mode is or who sets it is wasted time.</a:t>
-            </a:r>
-          </a:p>
-          <a:p>
-            <a:r>
-              <a:rPr sz="1200">
-                <a:latin typeface="Calibri"/>
-              </a:rPr>
-              <a:t>Run the ten-minute exercise properly. Time it, and get answers from three different groups.</a:t>
-            </a:r>
-          </a:p>
-          <a:p>
-            <a:r>
-              <a:rPr sz="1200">
-                <a:latin typeface="Calibri"/>
-              </a:rPr>
-              <a:t>Point out that Config.h tells you what the program can DO, because it tells you what somebody thought was worth tuning.</a:t>
-            </a:r>
-          </a:p>
-        </p:txBody>
-      </p:sp>
-      <p:sp>
-        <p:nvSpPr>
-          <p:cNvPr id="4" name="Slide Number Placeholder 3"/>
-          <p:cNvSpPr>
-            <a:spLocks noGrp="1"/>
-          </p:cNvSpPr>
-          <p:nvPr>
-            <p:ph type="sldNum" idx="5" sz="quarter"/>
-          </p:nvPr>
-        </p:nvSpPr>
-        <p:spPr/>
-      </p:sp>
-    </p:spTree>
-  </p:cSld>
-  <p:clrMapOvr>
-    <a:masterClrMapping/>
-  </p:clrMapOvr>
-</p:notes>
-</file>
-
-<file path=ppt/notesSlides/notesSlide25.xml><?xml version="1.0" encoding="utf-8"?>
-<p:notes xmlns:a="http://schemas.openxmlformats.org/drawingml/2006/main" xmlns:p="http://schemas.openxmlformats.org/presentationml/2006/main" xmlns:r="http://schemas.openxmlformats.org/officeDocument/2006/relationships">
-  <p:cSld>
-    <p:spTree>
-      <p:nvGrpSpPr>
-        <p:cNvPr id="1" name=""/>
-        <p:cNvGrpSpPr/>
-        <p:nvPr/>
-      </p:nvGrpSpPr>
-      <p:grpSpPr>
-        <a:xfrm>
-          <a:off x="0" y="0"/>
-          <a:ext cx="0" cy="0"/>
-          <a:chOff x="0" y="0"/>
-          <a:chExt cx="0" cy="0"/>
-        </a:xfrm>
-      </p:grpSpPr>
-      <p:sp>
-        <p:nvSpPr>
-          <p:cNvPr id="2" name="Slide Image Placeholder 1"/>
-          <p:cNvSpPr>
-            <a:spLocks noGrp="1"/>
-          </p:cNvSpPr>
-          <p:nvPr>
-            <p:ph type="sldImg" idx="2"/>
-          </p:nvPr>
-        </p:nvSpPr>
-        <p:spPr/>
-      </p:sp>
-      <p:sp>
-        <p:nvSpPr>
-          <p:cNvPr id="3" name="Notes Placeholder 2"/>
-          <p:cNvSpPr>
-            <a:spLocks noGrp="1"/>
-          </p:cNvSpPr>
-          <p:nvPr>
-            <p:ph type="body" idx="3" sz="quarter"/>
-          </p:nvPr>
-        </p:nvSpPr>
-        <p:spPr/>
-        <p:txBody>
-          <a:bodyPr/>
-          <a:lstStyle/>
-          <a:p>
-            <a:r>
-              <a:rPr sz="1200">
-                <a:latin typeface="Calibri"/>
-              </a:rPr>
-              <a:t>(Continued from the previous slide - the same notes apply.)</a:t>
-            </a:r>
-          </a:p>
-          <a:p/>
-          <a:p>
-            <a:r>
-              <a:rPr sz="1200">
-                <a:latin typeface="Calibri"/>
-              </a:rPr>
-              <a:t>This is the most useful slide in the lesson for anybody who will read somebody else's code again - which is all of them.</a:t>
-            </a:r>
-          </a:p>
-          <a:p>
-            <a:r>
-              <a:rPr sz="1200">
-                <a:latin typeface="Calibri"/>
-              </a:rPr>
-              <a:t>Vocabulary first, then skeleton, then detail. Say why: reading Lighting.ino with no idea what led_mode is or who sets it is wasted time.</a:t>
-            </a:r>
-          </a:p>
-          <a:p>
-            <a:r>
-              <a:rPr sz="1200">
-                <a:latin typeface="Calibri"/>
-              </a:rPr>
-              <a:t>Run the ten-minute exercise properly. Time it, and get answers from three different groups.</a:t>
-            </a:r>
-          </a:p>
-          <a:p>
-            <a:r>
-              <a:rPr sz="1200">
-                <a:latin typeface="Calibri"/>
-              </a:rPr>
-              <a:t>Point out that Config.h tells you what the program can DO, because it tells you what somebody thought was worth tuning.</a:t>
-            </a:r>
-          </a:p>
-        </p:txBody>
-      </p:sp>
-      <p:sp>
-        <p:nvSpPr>
-          <p:cNvPr id="4" name="Slide Number Placeholder 3"/>
-          <p:cNvSpPr>
-            <a:spLocks noGrp="1"/>
-          </p:cNvSpPr>
-          <p:nvPr>
-            <p:ph type="sldNum" idx="5" sz="quarter"/>
-          </p:nvPr>
-        </p:nvSpPr>
-        <p:spPr/>
-      </p:sp>
-    </p:spTree>
-  </p:cSld>
-  <p:clrMapOvr>
-    <a:masterClrMapping/>
-  </p:clrMapOvr>
-</p:notes>
-</file>
-
-<file path=ppt/notesSlides/notesSlide26.xml><?xml version="1.0" encoding="utf-8"?>
-<p:notes xmlns:a="http://schemas.openxmlformats.org/drawingml/2006/main" xmlns:p="http://schemas.openxmlformats.org/presentationml/2006/main" xmlns:r="http://schemas.openxmlformats.org/officeDocument/2006/relationships">
-  <p:cSld>
-    <p:spTree>
-      <p:nvGrpSpPr>
-        <p:cNvPr id="1" name=""/>
-        <p:cNvGrpSpPr/>
-        <p:nvPr/>
-      </p:nvGrpSpPr>
-      <p:grpSpPr>
-        <a:xfrm>
-          <a:off x="0" y="0"/>
-          <a:ext cx="0" cy="0"/>
-          <a:chOff x="0" y="0"/>
-          <a:chExt cx="0" cy="0"/>
-        </a:xfrm>
-      </p:grpSpPr>
-      <p:sp>
-        <p:nvSpPr>
-          <p:cNvPr id="2" name="Slide Image Placeholder 1"/>
-          <p:cNvSpPr>
-            <a:spLocks noGrp="1"/>
-          </p:cNvSpPr>
-          <p:nvPr>
-            <p:ph type="sldImg" idx="2"/>
-          </p:nvPr>
-        </p:nvSpPr>
-        <p:spPr/>
-      </p:sp>
-      <p:sp>
-        <p:nvSpPr>
-          <p:cNvPr id="3" name="Notes Placeholder 2"/>
-          <p:cNvSpPr>
-            <a:spLocks noGrp="1"/>
-          </p:cNvSpPr>
-          <p:nvPr>
-            <p:ph type="body" idx="3" sz="quarter"/>
-          </p:nvPr>
-        </p:nvSpPr>
-        <p:spPr/>
-        <p:txBody>
-          <a:bodyPr/>
-          <a:lstStyle/>
-          <a:p>
-            <a:r>
-              <a:rPr sz="1200">
-                <a:latin typeface="Calibri"/>
-              </a:rPr>
               <a:t>Conversation, not a test.</a:t>
             </a:r>
           </a:p>
@@ -2442,32 +2237,7 @@
               <a:rPr sz="1200">
                 <a:latin typeface="Calibri"/>
               </a:rPr>
-              <a:t>(Continued from the previous slide - the same notes apply.)</a:t>
-            </a:r>
-          </a:p>
-          <a:p/>
-          <a:p>
-            <a:r>
-              <a:rPr sz="1200">
-                <a:latin typeface="Calibri"/>
-              </a:rPr>
-              <a:t>Be blunt about what this course is not. Some people arrive expecting more capability and are disappointed until you reframe it.</a:t>
-            </a:r>
-          </a:p>
-          <a:p>
-            <a:r>
-              <a:rPr sz="1200">
-                <a:latin typeface="Calibri"/>
-              </a:rPr>
-              <a:t>The six real bugs are the hook. Real code, real mistakes, and the reasons each one was wrong.</a:t>
-            </a:r>
-          </a:p>
-          <a:p>
-            <a:r>
-              <a:rPr sz="1200">
-                <a:latin typeface="Calibri"/>
-              </a:rPr>
-              <a:t>The note matters: none of this is robot-specific. It is how embedded software is written everywhere, and that is why it is worth three hours.</a:t>
+              <a:t>The right-hand column is the point. Each lesson has one transferable idea underneath the vehicle-specific detail.</a:t>
             </a:r>
           </a:p>
         </p:txBody>
@@ -2540,7 +2310,7 @@
               <a:rPr sz="1200">
                 <a:latin typeface="Calibri"/>
               </a:rPr>
-              <a:t>The right-hand column is the point. Each lesson has one transferable idea underneath the vehicle-specific detail.</a:t>
+              <a:t>Two breaks. The tabs activity at 1:25 is the one that overruns - it is worth the time, so take it out of the boot-sequence walkthrough if you have to.</a:t>
             </a:r>
           </a:p>
         </p:txBody>
@@ -2613,7 +2383,39 @@
               <a:rPr sz="1200">
                 <a:latin typeface="Calibri"/>
               </a:rPr>
-              <a:t>Two breaks. The tabs activity at 1:25 is the one that overruns - it is worth the time, so take it out of the boot-sequence walkthrough if you have to.</a:t>
+              <a:t>This is a real change log from a real project. Treat it as a case study, not a list.</a:t>
+            </a:r>
+          </a:p>
+          <a:p>
+            <a:r>
+              <a:rPr sz="1200">
+                <a:latin typeface="Calibri"/>
+              </a:rPr>
+              <a:t>The FastLED row is worth dwelling on: a library minor version broke the build through a dependency nobody chose. That happens constantly in the field.</a:t>
+            </a:r>
+          </a:p>
+          <a:p>
+            <a:r>
+              <a:rPr sz="1200">
+                <a:latin typeface="Calibri"/>
+              </a:rPr>
+              <a:t>The servo travel row is a safety bug - 0.5 to 2.5 ms can drive a servo into its end stops and cook it.</a:t>
+            </a:r>
+          </a:p>
+          <a:p>
+            <a:r>
+              <a:rPr sz="1200">
+                <a:latin typeface="Calibri"/>
+              </a:rPr>
+              <a:t>The address-printing bug is the cruellest kind: the program told you the wrong answer confidently.</a:t>
+            </a:r>
+          </a:p>
+          <a:p>
+            <a:r>
+              <a:rPr sz="1200">
+                <a:latin typeface="Calibri"/>
+              </a:rPr>
+              <a:t>Ask which of these they would have caught in review. Most people say the servo one and miss the integer truncation.</a:t>
             </a:r>
           </a:p>
         </p:txBody>
@@ -2686,7 +2488,7 @@
               <a:rPr sz="1200">
                 <a:latin typeface="Calibri"/>
               </a:rPr>
-              <a:t>This is a real change log from a real project. Treat it as a case study, not a list.</a:t>
+              <a:t>Two vehicles, one binary. Set the problem up before showing the solution.</a:t>
             </a:r>
           </a:p>
           <a:p>
@@ -2694,7 +2496,7 @@
               <a:rPr sz="1200">
                 <a:latin typeface="Calibri"/>
               </a:rPr>
-              <a:t>The FastLED row is worth dwelling on: a library minor version broke the build through a dependency nobody chose. That happens constantly in the field.</a:t>
+              <a:t>Two separate builds is the obvious answer and the wrong one. Ask why - somebody eventually flashes the wrong image.</a:t>
             </a:r>
           </a:p>
           <a:p>
@@ -2702,7 +2504,7 @@
               <a:rPr sz="1200">
                 <a:latin typeface="Calibri"/>
               </a:rPr>
-              <a:t>The servo travel row is a safety bug - 0.5 to 2.5 ms can drive a servo into its end stops and cook it.</a:t>
+              <a:t>Detect what is there rather than being told what is there. That sentence is the transferable idea.</a:t>
             </a:r>
           </a:p>
           <a:p>
@@ -2710,15 +2512,7 @@
               <a:rPr sz="1200">
                 <a:latin typeface="Calibri"/>
               </a:rPr>
-              <a:t>The address-printing bug is the cruellest kind: the program told you the wrong answer confidently.</a:t>
-            </a:r>
-          </a:p>
-          <a:p>
-            <a:r>
-              <a:rPr sz="1200">
-                <a:latin typeface="Calibri"/>
-              </a:rPr>
-              <a:t>Ask which of these they would have caught in review. Most people say the servo one and miss the integer truncation.</a:t>
+              <a:t>Bit flags rather than booleans: one byte carries several independent capabilities and a test is a single &amp; operation. Show the arithmetic if anybody is shaky on bitwise operators.</a:t>
             </a:r>
           </a:p>
         </p:txBody>
@@ -2791,6 +2585,15 @@
               <a:rPr sz="1200">
                 <a:latin typeface="Calibri"/>
               </a:rPr>
+              <a:t>(Continued from the previous slide - the same notes apply.)</a:t>
+            </a:r>
+          </a:p>
+          <a:p/>
+          <a:p>
+            <a:r>
+              <a:rPr sz="1200">
+                <a:latin typeface="Calibri"/>
+              </a:rPr>
               <a:t>Two vehicles, one binary. Set the problem up before showing the solution.</a:t>
             </a:r>
           </a:p>
@@ -2888,16 +2691,15 @@
               <a:rPr sz="1200">
                 <a:latin typeface="Calibri"/>
               </a:rPr>
-              <a:t>(Continued from the previous slide - the same notes apply.)</a:t>
-            </a:r>
-          </a:p>
-          <a:p/>
+              <a:t>This is the slide the activity is built on. Go slowly.</a:t>
+            </a:r>
+          </a:p>
           <a:p>
             <a:r>
               <a:rPr sz="1200">
                 <a:latin typeface="Calibri"/>
               </a:rPr>
-              <a:t>Two vehicles, one binary. Set the problem up before showing the solution.</a:t>
+              <a:t>The IDE concatenates the tabs and generates prototypes ABOVE your code. Draw that on the board - the ordering is the whole explanation.</a:t>
             </a:r>
           </a:p>
           <a:p>
@@ -2905,7 +2707,7 @@
               <a:rPr sz="1200">
                 <a:latin typeface="Calibri"/>
               </a:rPr>
-              <a:t>Two separate builds is the obvious answer and the wrong one. Ask why - somebody eventually flashes the wrong image.</a:t>
+              <a:t>Functions and globals cross tabs freely. Types do not, because the generated prototype mentions a type that is not defined yet at that point.</a:t>
             </a:r>
           </a:p>
           <a:p>
@@ -2913,15 +2715,7 @@
               <a:rPr sz="1200">
                 <a:latin typeface="Calibri"/>
               </a:rPr>
-              <a:t>Detect what is there rather than being told what is there. That sentence is the transferable idea.</a:t>
-            </a:r>
-          </a:p>
-          <a:p>
-            <a:r>
-              <a:rPr sz="1200">
-                <a:latin typeface="Calibri"/>
-              </a:rPr>
-              <a:t>Bit flags rather than booleans: one byte carries several independent capabilities and a test is a single &amp; operation. Show the arithmetic if anybody is shaky on bitwise operators.</a:t>
+              <a:t>That is precisely why Config.h is a real header. Not style - necessity.</a:t>
             </a:r>
           </a:p>
         </p:txBody>
@@ -6525,7 +6319,7 @@
                 </a:solidFill>
                 <a:latin typeface="Calibri"/>
               </a:rPr>
-              <a:t>How Arduino tabs actually work</a:t>
+              <a:t>How Arduino tabs actually work  (continued)</a:t>
             </a:r>
           </a:p>
         </p:txBody>
@@ -6679,7 +6473,7 @@
         <p:spPr>
           <a:xfrm>
             <a:off x="502920" y="1188720"/>
-            <a:ext cx="11185855" cy="530352"/>
+            <a:ext cx="11185855" cy="3986784"/>
           </a:xfrm>
           <a:prstGeom prst="rect">
             <a:avLst/>
@@ -6699,70 +6493,54 @@
               <a:spcAft>
                 <a:spcPts val="600"/>
               </a:spcAft>
-              <a:defRPr sz="1900" b="1">
-                <a:solidFill>
-                  <a:srgbClr val="0E7C86"/>
-                </a:solidFill>
-                <a:latin typeface="Calibri"/>
-              </a:defRPr>
-            </a:pPr>
-            <a:r>
-              <a:rPr sz="1900" b="1">
-                <a:solidFill>
-                  <a:srgbClr val="0E7C86"/>
-                </a:solidFill>
-                <a:latin typeface="Calibri"/>
-              </a:rPr>
-              <a:t>Convenient, and exactly one trap</a:t>
-            </a:r>
-          </a:p>
-        </p:txBody>
-      </p:sp>
-      <p:sp>
-        <p:nvSpPr>
-          <p:cNvPr id="7" name="TextBox 6"/>
-          <p:cNvSpPr txBox="1"/>
-          <p:nvPr/>
-        </p:nvSpPr>
-        <p:spPr>
-          <a:xfrm>
-            <a:off x="502920" y="1755648"/>
-            <a:ext cx="11185855" cy="4507992"/>
-          </a:xfrm>
-          <a:prstGeom prst="rect">
-            <a:avLst/>
-          </a:prstGeom>
-          <a:noFill/>
-        </p:spPr>
-        <p:txBody>
-          <a:bodyPr wrap="square" lIns="0" tIns="0" rIns="0" bIns="0">
-            <a:spAutoFit/>
-          </a:bodyPr>
-          <a:lstStyle/>
+              <a:defRPr sz="2700" b="0">
+                <a:solidFill>
+                  <a:srgbClr val="222222"/>
+                </a:solidFill>
+                <a:latin typeface="Calibri"/>
+              </a:defRPr>
+            </a:pPr>
+          </a:p>
+          <a:p>
+            <a:pPr lvl="1" algn="l">
+              <a:lnSpc>
+                <a:spcPct val="100000"/>
+              </a:lnSpc>
+              <a:spcAft>
+                <a:spcPts val="600"/>
+              </a:spcAft>
+              <a:defRPr sz="2700" b="0">
+                <a:solidFill>
+                  <a:srgbClr val="222222"/>
+                </a:solidFill>
+                <a:latin typeface="Calibri"/>
+              </a:defRPr>
+            </a:pPr>
+            <a:r>
+              <a:rPr sz="2700" b="0">
+                <a:solidFill>
+                  <a:srgbClr val="222222"/>
+                </a:solidFill>
+                <a:latin typeface="Calibri"/>
+              </a:rPr>
+              <a:t>TYPES are not. The generated prototypes go ABOVE your code, so a prototype mentioning an enum or struct you declared in a tab will not compile - the type is not defined yet at that point.</a:t>
+            </a:r>
+          </a:p>
           <a:p>
             <a:pPr algn="l">
               <a:lnSpc>
                 <a:spcPct val="100000"/>
               </a:lnSpc>
               <a:spcAft>
-                <a:spcPts val="900"/>
-              </a:spcAft>
-              <a:defRPr sz="1800" b="0">
-                <a:solidFill>
-                  <a:srgbClr val="222222"/>
-                </a:solidFill>
-                <a:latin typeface="Calibri"/>
-              </a:defRPr>
-            </a:pPr>
-            <a:r>
-              <a:rPr sz="1800" b="0">
-                <a:solidFill>
-                  <a:srgbClr val="222222"/>
-                </a:solidFill>
-                <a:latin typeface="Calibri"/>
-              </a:rPr>
-              <a:t>Every .ino file in the sketch folder is a tab in the IDE.</a:t>
-            </a:r>
+                <a:spcPts val="600"/>
+              </a:spcAft>
+              <a:defRPr sz="2700" b="0">
+                <a:solidFill>
+                  <a:srgbClr val="222222"/>
+                </a:solidFill>
+                <a:latin typeface="Calibri"/>
+              </a:defRPr>
+            </a:pPr>
           </a:p>
           <a:p>
             <a:pPr algn="l">
@@ -6770,408 +6548,17 @@
                 <a:spcPct val="100000"/>
               </a:lnSpc>
               <a:spcAft>
-                <a:spcPts val="900"/>
-              </a:spcAft>
-              <a:defRPr sz="1800" b="0">
-                <a:solidFill>
-                  <a:srgbClr val="222222"/>
-                </a:solidFill>
-                <a:latin typeface="Calibri"/>
-              </a:defRPr>
-            </a:pPr>
-            <a:r>
-              <a:rPr sz="1800" b="0">
-                <a:solidFill>
-                  <a:srgbClr val="222222"/>
-                </a:solidFill>
-                <a:latin typeface="Calibri"/>
-              </a:rPr>
-              <a:t>Before compiling, the IDE CONCATENATES them into one file - the one named after the folder first, then the rest alphabetically - and generates function prototypes at the top.</a:t>
-            </a:r>
-          </a:p>
-          <a:p>
-            <a:pPr algn="l">
-              <a:lnSpc>
-                <a:spcPct val="100000"/>
-              </a:lnSpc>
-              <a:spcAft>
-                <a:spcPts val="900"/>
-              </a:spcAft>
-              <a:defRPr sz="1800" b="0">
-                <a:solidFill>
-                  <a:srgbClr val="222222"/>
-                </a:solidFill>
-                <a:latin typeface="Calibri"/>
-              </a:defRPr>
-            </a:pPr>
-          </a:p>
-          <a:p>
-            <a:pPr algn="l">
-              <a:lnSpc>
-                <a:spcPct val="100000"/>
-              </a:lnSpc>
-              <a:spcAft>
-                <a:spcPts val="900"/>
-              </a:spcAft>
-              <a:defRPr sz="1800" b="0">
-                <a:solidFill>
-                  <a:srgbClr val="222222"/>
-                </a:solidFill>
-                <a:latin typeface="Calibri"/>
-              </a:defRPr>
-            </a:pPr>
-            <a:r>
-              <a:rPr sz="1800" b="0">
-                <a:solidFill>
-                  <a:srgbClr val="222222"/>
-                </a:solidFill>
-                <a:latin typeface="Calibri"/>
-              </a:rPr>
-              <a:t>Two consequences you have to know:</a:t>
-            </a:r>
-          </a:p>
-          <a:p>
-            <a:pPr algn="l">
-              <a:lnSpc>
-                <a:spcPct val="100000"/>
-              </a:lnSpc>
-              <a:spcAft>
-                <a:spcPts val="900"/>
-              </a:spcAft>
-              <a:defRPr sz="1800" b="0">
-                <a:solidFill>
-                  <a:srgbClr val="222222"/>
-                </a:solidFill>
-                <a:latin typeface="Calibri"/>
-              </a:defRPr>
-            </a:pPr>
-          </a:p>
-          <a:p>
-            <a:pPr lvl="1" algn="l">
-              <a:lnSpc>
-                <a:spcPct val="100000"/>
-              </a:lnSpc>
-              <a:spcAft>
-                <a:spcPts val="900"/>
-              </a:spcAft>
-              <a:defRPr sz="1800" b="0">
-                <a:solidFill>
-                  <a:srgbClr val="222222"/>
-                </a:solidFill>
-                <a:latin typeface="Calibri"/>
-              </a:defRPr>
-            </a:pPr>
-            <a:r>
-              <a:rPr sz="1800" b="0">
-                <a:solidFill>
-                  <a:srgbClr val="222222"/>
-                </a:solidFill>
-                <a:latin typeface="Calibri"/>
-              </a:rPr>
-              <a:t>Functions and globals are shared across tabs with NO header needed. Lighting.ino can call strip and read NUM_LEDS with no include.</a:t>
-            </a:r>
-          </a:p>
-        </p:txBody>
-      </p:sp>
-    </p:spTree>
-  </p:cSld>
-  <p:clrMapOvr>
-    <a:masterClrMapping/>
-  </p:clrMapOvr>
-</p:sld>
-</file>
-
-<file path=ppt/slides/slide11.xml><?xml version="1.0" encoding="utf-8"?>
-<p:sld xmlns:a="http://schemas.openxmlformats.org/drawingml/2006/main" xmlns:p="http://schemas.openxmlformats.org/presentationml/2006/main" xmlns:r="http://schemas.openxmlformats.org/officeDocument/2006/relationships">
-  <p:cSld>
-    <p:spTree>
-      <p:nvGrpSpPr>
-        <p:cNvPr id="1" name=""/>
-        <p:cNvGrpSpPr/>
-        <p:nvPr/>
-      </p:nvGrpSpPr>
-      <p:grpSpPr/>
-      <p:sp>
-        <p:nvSpPr>
-          <p:cNvPr id="2" name="Title 1"/>
-          <p:cNvSpPr>
-            <a:spLocks noGrp="1"/>
-          </p:cNvSpPr>
-          <p:nvPr>
-            <p:ph type="title"/>
-          </p:nvPr>
-        </p:nvSpPr>
-        <p:spPr>
-          <a:xfrm>
-            <a:off x="502920" y="274320"/>
-            <a:ext cx="11185855" cy="777240"/>
-          </a:xfrm>
-        </p:spPr>
-        <p:txBody>
-          <a:bodyPr wrap="square" anchor="b"/>
-          <a:lstStyle/>
-          <a:p>
-            <a:pPr algn="l">
-              <a:lnSpc>
-                <a:spcPct val="100000"/>
-              </a:lnSpc>
-              <a:spcAft>
-                <a:spcPts val="0"/>
-              </a:spcAft>
-              <a:defRPr sz="2800" b="1">
-                <a:solidFill>
-                  <a:srgbClr val="1F3A5F"/>
-                </a:solidFill>
-                <a:latin typeface="Calibri"/>
-              </a:defRPr>
-            </a:pPr>
-            <a:r>
-              <a:rPr sz="2800" b="1">
-                <a:solidFill>
-                  <a:srgbClr val="1F3A5F"/>
-                </a:solidFill>
-                <a:latin typeface="Calibri"/>
-              </a:rPr>
-              <a:t>How Arduino tabs actually work  (continued)</a:t>
-            </a:r>
-          </a:p>
-        </p:txBody>
-      </p:sp>
-      <p:sp>
-        <p:nvSpPr>
-          <p:cNvPr id="3" name="Rectangle 2"/>
-          <p:cNvSpPr/>
-          <p:nvPr/>
-        </p:nvSpPr>
-        <p:spPr>
-          <a:xfrm>
-            <a:off x="502920" y="1097280"/>
-            <a:ext cx="11185855" cy="19050"/>
-          </a:xfrm>
-          <a:prstGeom prst="rect">
-            <a:avLst/>
-          </a:prstGeom>
-          <a:solidFill>
-            <a:srgbClr val="C8D2DE"/>
-          </a:solidFill>
-          <a:ln>
-            <a:noFill/>
-          </a:ln>
-          <a:effectLst/>
-        </p:spPr>
-        <p:style>
-          <a:lnRef idx="1">
-            <a:schemeClr val="accent1"/>
-          </a:lnRef>
-          <a:fillRef idx="3">
-            <a:schemeClr val="accent1"/>
-          </a:fillRef>
-          <a:effectRef idx="2">
-            <a:schemeClr val="accent1"/>
-          </a:effectRef>
-          <a:fontRef idx="minor">
-            <a:schemeClr val="lt1"/>
-          </a:fontRef>
-        </p:style>
-        <p:txBody>
-          <a:bodyPr rtlCol="0" anchor="ctr"/>
-          <a:lstStyle/>
-          <a:p>
-            <a:pPr algn="ctr"/>
-          </a:p>
-        </p:txBody>
-      </p:sp>
-      <p:sp>
-        <p:nvSpPr>
-          <p:cNvPr id="4" name="TextBox 3"/>
-          <p:cNvSpPr txBox="1"/>
-          <p:nvPr/>
-        </p:nvSpPr>
-        <p:spPr>
-          <a:xfrm>
-            <a:off x="502920" y="6382512"/>
-            <a:ext cx="10545775" cy="274320"/>
-          </a:xfrm>
-          <a:prstGeom prst="rect">
-            <a:avLst/>
-          </a:prstGeom>
-          <a:noFill/>
-        </p:spPr>
-        <p:txBody>
-          <a:bodyPr wrap="square" lIns="0" tIns="0">
-            <a:spAutoFit/>
-          </a:bodyPr>
-          <a:lstStyle/>
-          <a:p>
-            <a:pPr algn="l">
-              <a:lnSpc>
-                <a:spcPct val="100000"/>
-              </a:lnSpc>
-              <a:spcAft>
-                <a:spcPts val="0"/>
-              </a:spcAft>
-              <a:defRPr sz="1000" b="0">
-                <a:solidFill>
-                  <a:srgbClr val="666666"/>
-                </a:solidFill>
-                <a:latin typeface="Calibri"/>
-              </a:defRPr>
-            </a:pPr>
-            <a:r>
-              <a:rPr sz="1000" b="0">
-                <a:solidFill>
-                  <a:srgbClr val="666666"/>
-                </a:solidFill>
-                <a:latin typeface="Calibri"/>
-              </a:rPr>
-              <a:t>Pathfinder Advanced - Op Program 12  |  Lesson 1</a:t>
-            </a:r>
-          </a:p>
-        </p:txBody>
-      </p:sp>
-      <p:sp>
-        <p:nvSpPr>
-          <p:cNvPr id="5" name="TextBox 4"/>
-          <p:cNvSpPr txBox="1"/>
-          <p:nvPr/>
-        </p:nvSpPr>
-        <p:spPr>
-          <a:xfrm>
-            <a:off x="11231575" y="6382512"/>
-            <a:ext cx="457200" cy="274320"/>
-          </a:xfrm>
-          <a:prstGeom prst="rect">
-            <a:avLst/>
-          </a:prstGeom>
-          <a:noFill/>
-        </p:spPr>
-        <p:txBody>
-          <a:bodyPr wrap="square" lIns="0" tIns="0">
-            <a:spAutoFit/>
-          </a:bodyPr>
-          <a:lstStyle/>
-          <a:p>
-            <a:pPr algn="r">
-              <a:lnSpc>
-                <a:spcPct val="100000"/>
-              </a:lnSpc>
-              <a:spcAft>
-                <a:spcPts val="0"/>
-              </a:spcAft>
-              <a:defRPr sz="1000" b="0">
-                <a:solidFill>
-                  <a:srgbClr val="666666"/>
-                </a:solidFill>
-                <a:latin typeface="Calibri"/>
-              </a:defRPr>
-            </a:pPr>
-            <a:r>
-              <a:rPr sz="1000" b="0">
-                <a:solidFill>
-                  <a:srgbClr val="666666"/>
-                </a:solidFill>
-                <a:latin typeface="Calibri"/>
-              </a:rPr>
-              <a:t>10</a:t>
-            </a:r>
-          </a:p>
-        </p:txBody>
-      </p:sp>
-      <p:sp>
-        <p:nvSpPr>
-          <p:cNvPr id="6" name="TextBox 5"/>
-          <p:cNvSpPr txBox="1"/>
-          <p:nvPr/>
-        </p:nvSpPr>
-        <p:spPr>
-          <a:xfrm>
-            <a:off x="502920" y="1188720"/>
-            <a:ext cx="11185855" cy="4023360"/>
-          </a:xfrm>
-          <a:prstGeom prst="rect">
-            <a:avLst/>
-          </a:prstGeom>
-          <a:noFill/>
-        </p:spPr>
-        <p:txBody>
-          <a:bodyPr wrap="square" lIns="0" tIns="0" rIns="0" bIns="0">
-            <a:spAutoFit/>
-          </a:bodyPr>
-          <a:lstStyle/>
-          <a:p>
-            <a:pPr algn="l">
-              <a:lnSpc>
-                <a:spcPct val="100000"/>
-              </a:lnSpc>
-              <a:spcAft>
-                <a:spcPts val="900"/>
-              </a:spcAft>
-              <a:defRPr sz="1800" b="0">
-                <a:solidFill>
-                  <a:srgbClr val="222222"/>
-                </a:solidFill>
-                <a:latin typeface="Calibri"/>
-              </a:defRPr>
-            </a:pPr>
-          </a:p>
-          <a:p>
-            <a:pPr lvl="1" algn="l">
-              <a:lnSpc>
-                <a:spcPct val="100000"/>
-              </a:lnSpc>
-              <a:spcAft>
-                <a:spcPts val="900"/>
-              </a:spcAft>
-              <a:defRPr sz="1800" b="0">
-                <a:solidFill>
-                  <a:srgbClr val="222222"/>
-                </a:solidFill>
-                <a:latin typeface="Calibri"/>
-              </a:defRPr>
-            </a:pPr>
-            <a:r>
-              <a:rPr sz="1800" b="0">
-                <a:solidFill>
-                  <a:srgbClr val="222222"/>
-                </a:solidFill>
-                <a:latin typeface="Calibri"/>
-              </a:rPr>
-              <a:t>TYPES are not. The generated prototypes go ABOVE your code, so a prototype mentioning an enum or struct you declared in a tab will not compile - the type is not defined yet at that point.</a:t>
-            </a:r>
-          </a:p>
-          <a:p>
-            <a:pPr algn="l">
-              <a:lnSpc>
-                <a:spcPct val="100000"/>
-              </a:lnSpc>
-              <a:spcAft>
-                <a:spcPts val="900"/>
-              </a:spcAft>
-              <a:defRPr sz="1800" b="0">
-                <a:solidFill>
-                  <a:srgbClr val="222222"/>
-                </a:solidFill>
-                <a:latin typeface="Calibri"/>
-              </a:defRPr>
-            </a:pPr>
-          </a:p>
-          <a:p>
-            <a:pPr algn="l">
-              <a:lnSpc>
-                <a:spcPct val="100000"/>
-              </a:lnSpc>
-              <a:spcAft>
-                <a:spcPts val="900"/>
-              </a:spcAft>
-              <a:defRPr sz="1800" b="0">
-                <a:solidFill>
-                  <a:srgbClr val="222222"/>
-                </a:solidFill>
-                <a:latin typeface="Calibri"/>
-              </a:defRPr>
-            </a:pPr>
-            <a:r>
-              <a:rPr sz="1800" b="0">
+                <a:spcPts val="600"/>
+              </a:spcAft>
+              <a:defRPr sz="2700" b="0">
+                <a:solidFill>
+                  <a:srgbClr val="222222"/>
+                </a:solidFill>
+                <a:latin typeface="Calibri"/>
+              </a:defRPr>
+            </a:pPr>
+            <a:r>
+              <a:rPr sz="2700" b="0">
                 <a:solidFill>
                   <a:srgbClr val="222222"/>
                 </a:solidFill>
@@ -7256,7 +6643,7 @@
 </p:sld>
 </file>
 
-<file path=ppt/slides/slide12.xml><?xml version="1.0" encoding="utf-8"?>
+<file path=ppt/slides/slide11.xml><?xml version="1.0" encoding="utf-8"?>
 <p:sld xmlns:a="http://schemas.openxmlformats.org/drawingml/2006/main" xmlns:p="http://schemas.openxmlformats.org/presentationml/2006/main" xmlns:r="http://schemas.openxmlformats.org/officeDocument/2006/relationships">
   <p:cSld>
     <p:spTree>
@@ -7447,7 +6834,7 @@
                 </a:solidFill>
                 <a:latin typeface="Calibri"/>
               </a:rPr>
-              <a:t>11</a:t>
+              <a:t>10</a:t>
             </a:r>
           </a:p>
         </p:txBody>
@@ -7510,7 +6897,7 @@
         </p:nvGraphicFramePr>
         <p:xfrm>
           <a:off x="502920" y="1691640"/>
-          <a:ext cx="11185854" cy="2543175"/>
+          <a:ext cx="11185854" cy="3328987"/>
         </p:xfrm>
         <a:graphic>
           <a:graphicData uri="http://schemas.openxmlformats.org/drawingml/2006/table">
@@ -7522,14 +6909,14 @@
                 <a:gridCol w="3457446"/>
                 <a:gridCol w="7728408"/>
               </a:tblGrid>
-              <a:tr h="282575">
+              <a:tr h="369887">
                 <a:tc>
                   <a:txBody>
                     <a:bodyPr/>
                     <a:lstStyle/>
                     <a:p>
                       <a:r>
-                        <a:rPr sz="1300" b="1">
+                        <a:rPr sz="1850" b="1">
                           <a:solidFill>
                             <a:srgbClr val="FFFFFF"/>
                           </a:solidFill>
@@ -7551,7 +6938,7 @@
                     <a:lstStyle/>
                     <a:p>
                       <a:r>
-                        <a:rPr sz="1300" b="1">
+                        <a:rPr sz="1850" b="1">
                           <a:solidFill>
                             <a:srgbClr val="FFFFFF"/>
                           </a:solidFill>
@@ -7568,14 +6955,14 @@
                   </a:tcPr>
                 </a:tc>
               </a:tr>
-              <a:tr h="282575">
+              <a:tr h="369887">
                 <a:tc>
                   <a:txBody>
                     <a:bodyPr/>
                     <a:lstStyle/>
                     <a:p>
                       <a:r>
-                        <a:rPr sz="1300">
+                        <a:rPr sz="1850">
                           <a:solidFill>
                             <a:srgbClr val="222222"/>
                           </a:solidFill>
@@ -7597,7 +6984,7 @@
                     <a:lstStyle/>
                     <a:p>
                       <a:r>
-                        <a:rPr sz="1300">
+                        <a:rPr sz="1850">
                           <a:solidFill>
                             <a:srgbClr val="222222"/>
                           </a:solidFill>
@@ -7614,14 +7001,14 @@
                   </a:tcPr>
                 </a:tc>
               </a:tr>
-              <a:tr h="282575">
+              <a:tr h="369887">
                 <a:tc>
                   <a:txBody>
                     <a:bodyPr/>
                     <a:lstStyle/>
                     <a:p>
                       <a:r>
-                        <a:rPr sz="1300">
+                        <a:rPr sz="1850">
                           <a:solidFill>
                             <a:srgbClr val="222222"/>
                           </a:solidFill>
@@ -7643,7 +7030,7 @@
                     <a:lstStyle/>
                     <a:p>
                       <a:r>
-                        <a:rPr sz="1300">
+                        <a:rPr sz="1850">
                           <a:solidFill>
                             <a:srgbClr val="222222"/>
                           </a:solidFill>
@@ -7660,14 +7047,14 @@
                   </a:tcPr>
                 </a:tc>
               </a:tr>
-              <a:tr h="282575">
+              <a:tr h="369887">
                 <a:tc>
                   <a:txBody>
                     <a:bodyPr/>
                     <a:lstStyle/>
                     <a:p>
                       <a:r>
-                        <a:rPr sz="1300">
+                        <a:rPr sz="1850">
                           <a:solidFill>
                             <a:srgbClr val="222222"/>
                           </a:solidFill>
@@ -7689,7 +7076,7 @@
                     <a:lstStyle/>
                     <a:p>
                       <a:r>
-                        <a:rPr sz="1300">
+                        <a:rPr sz="1850">
                           <a:solidFill>
                             <a:srgbClr val="222222"/>
                           </a:solidFill>
@@ -7706,14 +7093,14 @@
                   </a:tcPr>
                 </a:tc>
               </a:tr>
-              <a:tr h="282575">
+              <a:tr h="369887">
                 <a:tc>
                   <a:txBody>
                     <a:bodyPr/>
                     <a:lstStyle/>
                     <a:p>
                       <a:r>
-                        <a:rPr sz="1300">
+                        <a:rPr sz="1850">
                           <a:solidFill>
                             <a:srgbClr val="222222"/>
                           </a:solidFill>
@@ -7735,7 +7122,7 @@
                     <a:lstStyle/>
                     <a:p>
                       <a:r>
-                        <a:rPr sz="1300">
+                        <a:rPr sz="1850">
                           <a:solidFill>
                             <a:srgbClr val="222222"/>
                           </a:solidFill>
@@ -7752,14 +7139,14 @@
                   </a:tcPr>
                 </a:tc>
               </a:tr>
-              <a:tr h="282575">
+              <a:tr h="369887">
                 <a:tc>
                   <a:txBody>
                     <a:bodyPr/>
                     <a:lstStyle/>
                     <a:p>
                       <a:r>
-                        <a:rPr sz="1300">
+                        <a:rPr sz="1850">
                           <a:solidFill>
                             <a:srgbClr val="222222"/>
                           </a:solidFill>
@@ -7781,7 +7168,7 @@
                     <a:lstStyle/>
                     <a:p>
                       <a:r>
-                        <a:rPr sz="1300">
+                        <a:rPr sz="1850">
                           <a:solidFill>
                             <a:srgbClr val="222222"/>
                           </a:solidFill>
@@ -7798,14 +7185,14 @@
                   </a:tcPr>
                 </a:tc>
               </a:tr>
-              <a:tr h="282575">
+              <a:tr h="369887">
                 <a:tc>
                   <a:txBody>
                     <a:bodyPr/>
                     <a:lstStyle/>
                     <a:p>
                       <a:r>
-                        <a:rPr sz="1300">
+                        <a:rPr sz="1850">
                           <a:solidFill>
                             <a:srgbClr val="222222"/>
                           </a:solidFill>
@@ -7827,7 +7214,7 @@
                     <a:lstStyle/>
                     <a:p>
                       <a:r>
-                        <a:rPr sz="1300">
+                        <a:rPr sz="1850">
                           <a:solidFill>
                             <a:srgbClr val="222222"/>
                           </a:solidFill>
@@ -7844,14 +7231,14 @@
                   </a:tcPr>
                 </a:tc>
               </a:tr>
-              <a:tr h="282575">
+              <a:tr h="369887">
                 <a:tc>
                   <a:txBody>
                     <a:bodyPr/>
                     <a:lstStyle/>
                     <a:p>
                       <a:r>
-                        <a:rPr sz="1300">
+                        <a:rPr sz="1850">
                           <a:solidFill>
                             <a:srgbClr val="222222"/>
                           </a:solidFill>
@@ -7873,7 +7260,7 @@
                     <a:lstStyle/>
                     <a:p>
                       <a:r>
-                        <a:rPr sz="1300">
+                        <a:rPr sz="1850">
                           <a:solidFill>
                             <a:srgbClr val="222222"/>
                           </a:solidFill>
@@ -7890,14 +7277,14 @@
                   </a:tcPr>
                 </a:tc>
               </a:tr>
-              <a:tr h="282575">
+              <a:tr h="369891">
                 <a:tc>
                   <a:txBody>
                     <a:bodyPr/>
                     <a:lstStyle/>
                     <a:p>
                       <a:r>
-                        <a:rPr sz="1300">
+                        <a:rPr sz="1850">
                           <a:solidFill>
                             <a:srgbClr val="222222"/>
                           </a:solidFill>
@@ -7919,7 +7306,7 @@
                     <a:lstStyle/>
                     <a:p>
                       <a:r>
-                        <a:rPr sz="1300">
+                        <a:rPr sz="1850">
                           <a:solidFill>
                             <a:srgbClr val="222222"/>
                           </a:solidFill>
@@ -8014,7 +7401,7 @@
 </p:sld>
 </file>
 
-<file path=ppt/slides/slide13.xml><?xml version="1.0" encoding="utf-8"?>
+<file path=ppt/slides/slide12.xml><?xml version="1.0" encoding="utf-8"?>
 <p:sld xmlns:a="http://schemas.openxmlformats.org/drawingml/2006/main" xmlns:p="http://schemas.openxmlformats.org/presentationml/2006/main" xmlns:r="http://schemas.openxmlformats.org/officeDocument/2006/relationships">
   <p:cSld>
     <p:spTree>
@@ -8205,7 +7592,7 @@
                 </a:solidFill>
                 <a:latin typeface="Calibri"/>
               </a:rPr>
-              <a:t>12</a:t>
+              <a:t>11</a:t>
             </a:r>
           </a:p>
         </p:txBody>
@@ -8524,7 +7911,7 @@
 </p:sld>
 </file>
 
-<file path=ppt/slides/slide14.xml><?xml version="1.0" encoding="utf-8"?>
+<file path=ppt/slides/slide13.xml><?xml version="1.0" encoding="utf-8"?>
 <p:sld xmlns:a="http://schemas.openxmlformats.org/drawingml/2006/main" xmlns:p="http://schemas.openxmlformats.org/presentationml/2006/main" xmlns:r="http://schemas.openxmlformats.org/officeDocument/2006/relationships">
   <p:cSld>
     <p:spTree>
@@ -8715,7 +8102,7 @@
                 </a:solidFill>
                 <a:latin typeface="Calibri"/>
               </a:rPr>
-              <a:t>13</a:t>
+              <a:t>12</a:t>
             </a:r>
           </a:p>
         </p:txBody>
@@ -8820,7 +8207,7 @@
                 <a:spcPct val="100000"/>
               </a:lnSpc>
               <a:spcAft>
-                <a:spcPts val="400"/>
+                <a:spcPts val="800"/>
               </a:spcAft>
               <a:defRPr sz="1800" b="0">
                 <a:solidFill>
@@ -8845,7 +8232,7 @@
                 <a:spcPct val="100000"/>
               </a:lnSpc>
               <a:spcAft>
-                <a:spcPts val="400"/>
+                <a:spcPts val="800"/>
               </a:spcAft>
               <a:defRPr sz="1800" b="0">
                 <a:solidFill>
@@ -8870,7 +8257,7 @@
                 <a:spcPct val="100000"/>
               </a:lnSpc>
               <a:spcAft>
-                <a:spcPts val="400"/>
+                <a:spcPts val="800"/>
               </a:spcAft>
               <a:defRPr sz="1800" b="0">
                 <a:solidFill>
@@ -8895,7 +8282,7 @@
                 <a:spcPct val="100000"/>
               </a:lnSpc>
               <a:spcAft>
-                <a:spcPts val="400"/>
+                <a:spcPts val="800"/>
               </a:spcAft>
               <a:defRPr sz="1800" b="0">
                 <a:solidFill>
@@ -8920,7 +8307,7 @@
                 <a:spcPct val="100000"/>
               </a:lnSpc>
               <a:spcAft>
-                <a:spcPts val="400"/>
+                <a:spcPts val="800"/>
               </a:spcAft>
               <a:defRPr sz="1800" b="0">
                 <a:solidFill>
@@ -8945,7 +8332,7 @@
                 <a:spcPct val="100000"/>
               </a:lnSpc>
               <a:spcAft>
-                <a:spcPts val="400"/>
+                <a:spcPts val="800"/>
               </a:spcAft>
               <a:defRPr sz="1800" b="0">
                 <a:solidFill>
@@ -9041,17 +8428,17 @@
                 <a:spcPct val="100000"/>
               </a:lnSpc>
               <a:spcAft>
-                <a:spcPts val="200"/>
-              </a:spcAft>
-              <a:defRPr sz="1800" b="0">
-                <a:solidFill>
-                  <a:srgbClr val="222222"/>
-                </a:solidFill>
-                <a:latin typeface="Calibri"/>
-              </a:defRPr>
-            </a:pPr>
-            <a:r>
-              <a:rPr sz="1800" b="0">
+                <a:spcPts val="300"/>
+              </a:spcAft>
+              <a:defRPr sz="2600" b="0">
+                <a:solidFill>
+                  <a:srgbClr val="222222"/>
+                </a:solidFill>
+                <a:latin typeface="Calibri"/>
+              </a:defRPr>
+            </a:pPr>
+            <a:r>
+              <a:rPr sz="2600" b="0">
                 <a:solidFill>
                   <a:srgbClr val="222222"/>
                 </a:solidFill>
@@ -9137,17 +8524,17 @@
                 <a:spcPct val="100000"/>
               </a:lnSpc>
               <a:spcAft>
-                <a:spcPts val="200"/>
-              </a:spcAft>
-              <a:defRPr sz="1800" b="0">
-                <a:solidFill>
-                  <a:srgbClr val="222222"/>
-                </a:solidFill>
-                <a:latin typeface="Calibri"/>
-              </a:defRPr>
-            </a:pPr>
-            <a:r>
-              <a:rPr sz="1800" b="0">
+                <a:spcPts val="300"/>
+              </a:spcAft>
+              <a:defRPr sz="2300" b="0">
+                <a:solidFill>
+                  <a:srgbClr val="222222"/>
+                </a:solidFill>
+                <a:latin typeface="Calibri"/>
+              </a:defRPr>
+            </a:pPr>
+            <a:r>
+              <a:rPr sz="2300" b="0">
                 <a:solidFill>
                   <a:srgbClr val="222222"/>
                 </a:solidFill>
@@ -9162,17 +8549,17 @@
                 <a:spcPct val="100000"/>
               </a:lnSpc>
               <a:spcAft>
-                <a:spcPts val="200"/>
-              </a:spcAft>
-              <a:defRPr sz="1800" b="0">
-                <a:solidFill>
-                  <a:srgbClr val="222222"/>
-                </a:solidFill>
-                <a:latin typeface="Calibri"/>
-              </a:defRPr>
-            </a:pPr>
-            <a:r>
-              <a:rPr sz="1800" b="0">
+                <a:spcPts val="300"/>
+              </a:spcAft>
+              <a:defRPr sz="2300" b="0">
+                <a:solidFill>
+                  <a:srgbClr val="222222"/>
+                </a:solidFill>
+                <a:latin typeface="Calibri"/>
+              </a:defRPr>
+            </a:pPr>
+            <a:r>
+              <a:rPr sz="2300" b="0">
                 <a:solidFill>
                   <a:srgbClr val="222222"/>
                 </a:solidFill>
@@ -9191,7 +8578,7 @@
 </p:sld>
 </file>
 
-<file path=ppt/slides/slide15.xml><?xml version="1.0" encoding="utf-8"?>
+<file path=ppt/slides/slide14.xml><?xml version="1.0" encoding="utf-8"?>
 <p:sld xmlns:a="http://schemas.openxmlformats.org/drawingml/2006/main" xmlns:p="http://schemas.openxmlformats.org/presentationml/2006/main" xmlns:r="http://schemas.openxmlformats.org/officeDocument/2006/relationships">
   <p:cSld>
     <p:spTree>
@@ -9382,7 +8769,7 @@
                 </a:solidFill>
                 <a:latin typeface="Calibri"/>
               </a:rPr>
-              <a:t>14</a:t>
+              <a:t>13</a:t>
             </a:r>
           </a:p>
         </p:txBody>
@@ -9444,7 +8831,7 @@
         <p:spPr>
           <a:xfrm>
             <a:off x="502920" y="1755648"/>
-            <a:ext cx="11185855" cy="4507992"/>
+            <a:ext cx="5364327" cy="4507992"/>
           </a:xfrm>
           <a:prstGeom prst="rect">
             <a:avLst/>
@@ -9464,15 +8851,15 @@
               <a:spcAft>
                 <a:spcPts val="900"/>
               </a:spcAft>
-              <a:defRPr sz="1800" b="0">
-                <a:solidFill>
-                  <a:srgbClr val="222222"/>
-                </a:solidFill>
-                <a:latin typeface="Calibri"/>
-              </a:defRPr>
-            </a:pPr>
-            <a:r>
-              <a:rPr sz="1800" b="0">
+              <a:defRPr sz="1900" b="0">
+                <a:solidFill>
+                  <a:srgbClr val="222222"/>
+                </a:solidFill>
+                <a:latin typeface="Calibri"/>
+              </a:defRPr>
+            </a:pPr>
+            <a:r>
+              <a:rPr sz="1900" b="0">
                 <a:solidFill>
                   <a:srgbClr val="222222"/>
                 </a:solidFill>
@@ -9489,7 +8876,7 @@
               <a:spcAft>
                 <a:spcPts val="900"/>
               </a:spcAft>
-              <a:defRPr sz="1800" b="0">
+              <a:defRPr sz="1900" b="0">
                 <a:solidFill>
                   <a:srgbClr val="222222"/>
                 </a:solidFill>
@@ -9505,15 +8892,15 @@
               <a:spcAft>
                 <a:spcPts val="900"/>
               </a:spcAft>
-              <a:defRPr sz="1800" b="0">
-                <a:solidFill>
-                  <a:srgbClr val="222222"/>
-                </a:solidFill>
-                <a:latin typeface="Calibri"/>
-              </a:defRPr>
-            </a:pPr>
-            <a:r>
-              <a:rPr sz="1800" b="0">
+              <a:defRPr sz="1900" b="0">
+                <a:solidFill>
+                  <a:srgbClr val="222222"/>
+                </a:solidFill>
+                <a:latin typeface="Calibri"/>
+              </a:defRPr>
+            </a:pPr>
+            <a:r>
+              <a:rPr sz="1900" b="0">
                 <a:solidFill>
                   <a:srgbClr val="222222"/>
                 </a:solidFill>
@@ -9530,15 +8917,15 @@
               <a:spcAft>
                 <a:spcPts val="900"/>
               </a:spcAft>
-              <a:defRPr sz="1800" b="0">
-                <a:solidFill>
-                  <a:srgbClr val="222222"/>
-                </a:solidFill>
-                <a:latin typeface="Calibri"/>
-              </a:defRPr>
-            </a:pPr>
-            <a:r>
-              <a:rPr sz="1800" b="0">
+              <a:defRPr sz="1900" b="0">
+                <a:solidFill>
+                  <a:srgbClr val="222222"/>
+                </a:solidFill>
+                <a:latin typeface="Calibri"/>
+              </a:defRPr>
+            </a:pPr>
+            <a:r>
+              <a:rPr sz="1900" b="0">
                 <a:solidFill>
                   <a:srgbClr val="222222"/>
                 </a:solidFill>
@@ -9555,15 +8942,15 @@
               <a:spcAft>
                 <a:spcPts val="900"/>
               </a:spcAft>
-              <a:defRPr sz="1800" b="0">
-                <a:solidFill>
-                  <a:srgbClr val="222222"/>
-                </a:solidFill>
-                <a:latin typeface="Calibri"/>
-              </a:defRPr>
-            </a:pPr>
-            <a:r>
-              <a:rPr sz="1800" b="0">
+              <a:defRPr sz="1900" b="0">
+                <a:solidFill>
+                  <a:srgbClr val="222222"/>
+                </a:solidFill>
+                <a:latin typeface="Calibri"/>
+              </a:defRPr>
+            </a:pPr>
+            <a:r>
+              <a:rPr sz="1900" b="0">
                 <a:solidFill>
                   <a:srgbClr val="222222"/>
                 </a:solidFill>
@@ -9580,15 +8967,15 @@
               <a:spcAft>
                 <a:spcPts val="900"/>
               </a:spcAft>
-              <a:defRPr sz="1800" b="0">
-                <a:solidFill>
-                  <a:srgbClr val="222222"/>
-                </a:solidFill>
-                <a:latin typeface="Calibri"/>
-              </a:defRPr>
-            </a:pPr>
-            <a:r>
-              <a:rPr sz="1800" b="0">
+              <a:defRPr sz="1900" b="0">
+                <a:solidFill>
+                  <a:srgbClr val="222222"/>
+                </a:solidFill>
+                <a:latin typeface="Calibri"/>
+              </a:defRPr>
+            </a:pPr>
+            <a:r>
+              <a:rPr sz="1900" b="0">
                 <a:solidFill>
                   <a:srgbClr val="222222"/>
                 </a:solidFill>
@@ -9605,21 +8992,110 @@
               <a:spcAft>
                 <a:spcPts val="900"/>
               </a:spcAft>
-              <a:defRPr sz="1800" b="0">
-                <a:solidFill>
-                  <a:srgbClr val="222222"/>
-                </a:solidFill>
-                <a:latin typeface="Calibri"/>
-              </a:defRPr>
-            </a:pPr>
-            <a:r>
-              <a:rPr sz="1800" b="0">
+              <a:defRPr sz="1900" b="0">
+                <a:solidFill>
+                  <a:srgbClr val="222222"/>
+                </a:solidFill>
+                <a:latin typeface="Calibri"/>
+              </a:defRPr>
+            </a:pPr>
+            <a:r>
+              <a:rPr sz="1900" b="0">
                 <a:solidFill>
                   <a:srgbClr val="222222"/>
                 </a:solidFill>
                 <a:latin typeface="Calibri"/>
               </a:rPr>
               <a:t>dynamics  retune the deadzones between races</a:t>
+            </a:r>
+          </a:p>
+        </p:txBody>
+      </p:sp>
+      <p:sp>
+        <p:nvSpPr>
+          <p:cNvPr id="8" name="TextBox 7"/>
+          <p:cNvSpPr txBox="1"/>
+          <p:nvPr/>
+        </p:nvSpPr>
+        <p:spPr>
+          <a:xfrm>
+            <a:off x="6324447" y="1755648"/>
+            <a:ext cx="5364327" cy="4507992"/>
+          </a:xfrm>
+          <a:prstGeom prst="rect">
+            <a:avLst/>
+          </a:prstGeom>
+          <a:noFill/>
+        </p:spPr>
+        <p:txBody>
+          <a:bodyPr wrap="square" lIns="0" tIns="0" rIns="0" bIns="0">
+            <a:spAutoFit/>
+          </a:bodyPr>
+          <a:lstStyle/>
+          <a:p>
+            <a:pPr algn="l">
+              <a:lnSpc>
+                <a:spcPct val="100000"/>
+              </a:lnSpc>
+              <a:spcAft>
+                <a:spcPts val="900"/>
+              </a:spcAft>
+              <a:defRPr sz="2000" b="0">
+                <a:solidFill>
+                  <a:srgbClr val="222222"/>
+                </a:solidFill>
+                <a:latin typeface="Calibri"/>
+              </a:defRPr>
+            </a:pPr>
+            <a:r>
+              <a:rPr sz="2000" b="0">
+                <a:solidFill>
+                  <a:srgbClr val="222222"/>
+                </a:solidFill>
+                <a:latin typeface="Calibri"/>
+              </a:rPr>
+              <a:t>The practical difference: at a track event, tuning a vehicle stops being an edit-compile-upload cycle and becomes a conversation. On Op 12 those settings then go to EEPROM, so the tuning survives.</a:t>
+            </a:r>
+          </a:p>
+          <a:p>
+            <a:pPr algn="l">
+              <a:lnSpc>
+                <a:spcPct val="100000"/>
+              </a:lnSpc>
+              <a:spcAft>
+                <a:spcPts val="900"/>
+              </a:spcAft>
+              <a:defRPr sz="2000" b="0">
+                <a:solidFill>
+                  <a:srgbClr val="222222"/>
+                </a:solidFill>
+                <a:latin typeface="Calibri"/>
+              </a:defRPr>
+            </a:pPr>
+          </a:p>
+          <a:p>
+            <a:pPr algn="l">
+              <a:lnSpc>
+                <a:spcPct val="100000"/>
+              </a:lnSpc>
+              <a:spcAft>
+                <a:spcPts val="900"/>
+              </a:spcAft>
+              <a:defRPr sz="2000" b="0">
+                <a:solidFill>
+                  <a:srgbClr val="222222"/>
+                </a:solidFill>
+                <a:latin typeface="Calibri"/>
+              </a:defRPr>
+            </a:pPr>
+            <a:r>
+              <a:rPr sz="2000" b="0">
+                <a:solidFill>
+                  <a:srgbClr val="222222"/>
+                </a:solidFill>
+                <a:latin typeface="Calibri"/>
+              </a:rPr>
+              <a:t>This is not a toy idea. Industrial controllers, network switches and flight computers all have one, for exactly this reason.</a:t>
             </a:r>
           </a:p>
         </p:txBody>
@@ -9632,7 +9108,7 @@
 </p:sld>
 </file>
 
-<file path=ppt/slides/slide16.xml><?xml version="1.0" encoding="utf-8"?>
+<file path=ppt/slides/slide15.xml><?xml version="1.0" encoding="utf-8"?>
 <p:sld xmlns:a="http://schemas.openxmlformats.org/drawingml/2006/main" xmlns:p="http://schemas.openxmlformats.org/presentationml/2006/main" xmlns:r="http://schemas.openxmlformats.org/officeDocument/2006/relationships">
   <p:cSld>
     <p:spTree>
@@ -9683,7 +9159,7 @@
                 </a:solidFill>
                 <a:latin typeface="Calibri"/>
               </a:rPr>
-              <a:t>Why a console changes what a vehicle is  (continued)</a:t>
+              <a:t>Reading a line without stopping the vehicle</a:t>
             </a:r>
           </a:p>
         </p:txBody>
@@ -9823,316 +9299,7 @@
                 </a:solidFill>
                 <a:latin typeface="Calibri"/>
               </a:rPr>
-              <a:t>15</a:t>
-            </a:r>
-          </a:p>
-        </p:txBody>
-      </p:sp>
-      <p:sp>
-        <p:nvSpPr>
-          <p:cNvPr id="6" name="TextBox 5"/>
-          <p:cNvSpPr txBox="1"/>
-          <p:nvPr/>
-        </p:nvSpPr>
-        <p:spPr>
-          <a:xfrm>
-            <a:off x="502920" y="1188720"/>
-            <a:ext cx="11185855" cy="5074920"/>
-          </a:xfrm>
-          <a:prstGeom prst="rect">
-            <a:avLst/>
-          </a:prstGeom>
-          <a:noFill/>
-        </p:spPr>
-        <p:txBody>
-          <a:bodyPr wrap="square" lIns="0" tIns="0" rIns="0" bIns="0">
-            <a:spAutoFit/>
-          </a:bodyPr>
-          <a:lstStyle/>
-          <a:p>
-            <a:pPr algn="l">
-              <a:lnSpc>
-                <a:spcPct val="100000"/>
-              </a:lnSpc>
-              <a:spcAft>
-                <a:spcPts val="900"/>
-              </a:spcAft>
-              <a:defRPr sz="1800" b="0">
-                <a:solidFill>
-                  <a:srgbClr val="222222"/>
-                </a:solidFill>
-                <a:latin typeface="Calibri"/>
-              </a:defRPr>
-            </a:pPr>
-          </a:p>
-          <a:p>
-            <a:pPr algn="l">
-              <a:lnSpc>
-                <a:spcPct val="100000"/>
-              </a:lnSpc>
-              <a:spcAft>
-                <a:spcPts val="900"/>
-              </a:spcAft>
-              <a:defRPr sz="1800" b="0">
-                <a:solidFill>
-                  <a:srgbClr val="222222"/>
-                </a:solidFill>
-                <a:latin typeface="Calibri"/>
-              </a:defRPr>
-            </a:pPr>
-            <a:r>
-              <a:rPr sz="1800" b="0">
-                <a:solidFill>
-                  <a:srgbClr val="222222"/>
-                </a:solidFill>
-                <a:latin typeface="Calibri"/>
-              </a:rPr>
-              <a:t>The practical difference: at a track event, tuning a vehicle stops being an edit-compile-upload cycle and becomes a conversation. On Op 12 those settings then go to EEPROM, so the tuning survives.</a:t>
-            </a:r>
-          </a:p>
-          <a:p>
-            <a:pPr algn="l">
-              <a:lnSpc>
-                <a:spcPct val="100000"/>
-              </a:lnSpc>
-              <a:spcAft>
-                <a:spcPts val="900"/>
-              </a:spcAft>
-              <a:defRPr sz="1800" b="0">
-                <a:solidFill>
-                  <a:srgbClr val="222222"/>
-                </a:solidFill>
-                <a:latin typeface="Calibri"/>
-              </a:defRPr>
-            </a:pPr>
-          </a:p>
-          <a:p>
-            <a:pPr algn="l">
-              <a:lnSpc>
-                <a:spcPct val="100000"/>
-              </a:lnSpc>
-              <a:spcAft>
-                <a:spcPts val="900"/>
-              </a:spcAft>
-              <a:defRPr sz="1800" b="0">
-                <a:solidFill>
-                  <a:srgbClr val="222222"/>
-                </a:solidFill>
-                <a:latin typeface="Calibri"/>
-              </a:defRPr>
-            </a:pPr>
-            <a:r>
-              <a:rPr sz="1800" b="0">
-                <a:solidFill>
-                  <a:srgbClr val="222222"/>
-                </a:solidFill>
-                <a:latin typeface="Calibri"/>
-              </a:rPr>
-              <a:t>This is not a toy idea. Industrial controllers, network switches and flight computers all have one, for exactly this reason.</a:t>
-            </a:r>
-          </a:p>
-        </p:txBody>
-      </p:sp>
-    </p:spTree>
-  </p:cSld>
-  <p:clrMapOvr>
-    <a:masterClrMapping/>
-  </p:clrMapOvr>
-</p:sld>
-</file>
-
-<file path=ppt/slides/slide17.xml><?xml version="1.0" encoding="utf-8"?>
-<p:sld xmlns:a="http://schemas.openxmlformats.org/drawingml/2006/main" xmlns:p="http://schemas.openxmlformats.org/presentationml/2006/main" xmlns:r="http://schemas.openxmlformats.org/officeDocument/2006/relationships">
-  <p:cSld>
-    <p:spTree>
-      <p:nvGrpSpPr>
-        <p:cNvPr id="1" name=""/>
-        <p:cNvGrpSpPr/>
-        <p:nvPr/>
-      </p:nvGrpSpPr>
-      <p:grpSpPr/>
-      <p:sp>
-        <p:nvSpPr>
-          <p:cNvPr id="2" name="Title 1"/>
-          <p:cNvSpPr>
-            <a:spLocks noGrp="1"/>
-          </p:cNvSpPr>
-          <p:nvPr>
-            <p:ph type="title"/>
-          </p:nvPr>
-        </p:nvSpPr>
-        <p:spPr>
-          <a:xfrm>
-            <a:off x="502920" y="274320"/>
-            <a:ext cx="11185855" cy="777240"/>
-          </a:xfrm>
-        </p:spPr>
-        <p:txBody>
-          <a:bodyPr wrap="square" anchor="b"/>
-          <a:lstStyle/>
-          <a:p>
-            <a:pPr algn="l">
-              <a:lnSpc>
-                <a:spcPct val="100000"/>
-              </a:lnSpc>
-              <a:spcAft>
-                <a:spcPts val="0"/>
-              </a:spcAft>
-              <a:defRPr sz="2800" b="1">
-                <a:solidFill>
-                  <a:srgbClr val="1F3A5F"/>
-                </a:solidFill>
-                <a:latin typeface="Calibri"/>
-              </a:defRPr>
-            </a:pPr>
-            <a:r>
-              <a:rPr sz="2800" b="1">
-                <a:solidFill>
-                  <a:srgbClr val="1F3A5F"/>
-                </a:solidFill>
-                <a:latin typeface="Calibri"/>
-              </a:rPr>
-              <a:t>Reading a line without stopping the vehicle</a:t>
-            </a:r>
-          </a:p>
-        </p:txBody>
-      </p:sp>
-      <p:sp>
-        <p:nvSpPr>
-          <p:cNvPr id="3" name="Rectangle 2"/>
-          <p:cNvSpPr/>
-          <p:nvPr/>
-        </p:nvSpPr>
-        <p:spPr>
-          <a:xfrm>
-            <a:off x="502920" y="1097280"/>
-            <a:ext cx="11185855" cy="19050"/>
-          </a:xfrm>
-          <a:prstGeom prst="rect">
-            <a:avLst/>
-          </a:prstGeom>
-          <a:solidFill>
-            <a:srgbClr val="C8D2DE"/>
-          </a:solidFill>
-          <a:ln>
-            <a:noFill/>
-          </a:ln>
-          <a:effectLst/>
-        </p:spPr>
-        <p:style>
-          <a:lnRef idx="1">
-            <a:schemeClr val="accent1"/>
-          </a:lnRef>
-          <a:fillRef idx="3">
-            <a:schemeClr val="accent1"/>
-          </a:fillRef>
-          <a:effectRef idx="2">
-            <a:schemeClr val="accent1"/>
-          </a:effectRef>
-          <a:fontRef idx="minor">
-            <a:schemeClr val="lt1"/>
-          </a:fontRef>
-        </p:style>
-        <p:txBody>
-          <a:bodyPr rtlCol="0" anchor="ctr"/>
-          <a:lstStyle/>
-          <a:p>
-            <a:pPr algn="ctr"/>
-          </a:p>
-        </p:txBody>
-      </p:sp>
-      <p:sp>
-        <p:nvSpPr>
-          <p:cNvPr id="4" name="TextBox 3"/>
-          <p:cNvSpPr txBox="1"/>
-          <p:nvPr/>
-        </p:nvSpPr>
-        <p:spPr>
-          <a:xfrm>
-            <a:off x="502920" y="6382512"/>
-            <a:ext cx="10545775" cy="274320"/>
-          </a:xfrm>
-          <a:prstGeom prst="rect">
-            <a:avLst/>
-          </a:prstGeom>
-          <a:noFill/>
-        </p:spPr>
-        <p:txBody>
-          <a:bodyPr wrap="square" lIns="0" tIns="0">
-            <a:spAutoFit/>
-          </a:bodyPr>
-          <a:lstStyle/>
-          <a:p>
-            <a:pPr algn="l">
-              <a:lnSpc>
-                <a:spcPct val="100000"/>
-              </a:lnSpc>
-              <a:spcAft>
-                <a:spcPts val="0"/>
-              </a:spcAft>
-              <a:defRPr sz="1000" b="0">
-                <a:solidFill>
-                  <a:srgbClr val="666666"/>
-                </a:solidFill>
-                <a:latin typeface="Calibri"/>
-              </a:defRPr>
-            </a:pPr>
-            <a:r>
-              <a:rPr sz="1000" b="0">
-                <a:solidFill>
-                  <a:srgbClr val="666666"/>
-                </a:solidFill>
-                <a:latin typeface="Calibri"/>
-              </a:rPr>
-              <a:t>Pathfinder Advanced - Op Program 12  |  Lesson 1</a:t>
-            </a:r>
-          </a:p>
-        </p:txBody>
-      </p:sp>
-      <p:sp>
-        <p:nvSpPr>
-          <p:cNvPr id="5" name="TextBox 4"/>
-          <p:cNvSpPr txBox="1"/>
-          <p:nvPr/>
-        </p:nvSpPr>
-        <p:spPr>
-          <a:xfrm>
-            <a:off x="11231575" y="6382512"/>
-            <a:ext cx="457200" cy="274320"/>
-          </a:xfrm>
-          <a:prstGeom prst="rect">
-            <a:avLst/>
-          </a:prstGeom>
-          <a:noFill/>
-        </p:spPr>
-        <p:txBody>
-          <a:bodyPr wrap="square" lIns="0" tIns="0">
-            <a:spAutoFit/>
-          </a:bodyPr>
-          <a:lstStyle/>
-          <a:p>
-            <a:pPr algn="r">
-              <a:lnSpc>
-                <a:spcPct val="100000"/>
-              </a:lnSpc>
-              <a:spcAft>
-                <a:spcPts val="0"/>
-              </a:spcAft>
-              <a:defRPr sz="1000" b="0">
-                <a:solidFill>
-                  <a:srgbClr val="666666"/>
-                </a:solidFill>
-                <a:latin typeface="Calibri"/>
-              </a:defRPr>
-            </a:pPr>
-            <a:r>
-              <a:rPr sz="1000" b="0">
-                <a:solidFill>
-                  <a:srgbClr val="666666"/>
-                </a:solidFill>
-                <a:latin typeface="Calibri"/>
-              </a:rPr>
-              <a:t>16</a:t>
+              <a:t>14</a:t>
             </a:r>
           </a:p>
         </p:txBody>
@@ -10236,12 +9403,12 @@
               <a:spcAft>
                 <a:spcPts val="0"/>
               </a:spcAft>
-              <a:defRPr sz="1300">
+              <a:defRPr sz="1650">
                 <a:latin typeface="Consolas"/>
               </a:defRPr>
             </a:pPr>
             <a:r>
-              <a:rPr sz="1300">
+              <a:rPr sz="1650">
                 <a:solidFill>
                   <a:srgbClr val="222222"/>
                 </a:solidFill>
@@ -10258,12 +9425,12 @@
               <a:spcAft>
                 <a:spcPts val="0"/>
               </a:spcAft>
-              <a:defRPr sz="1300">
+              <a:defRPr sz="1650">
                 <a:latin typeface="Consolas"/>
               </a:defRPr>
             </a:pPr>
             <a:r>
-              <a:rPr sz="1300" b="1">
+              <a:rPr sz="1650" b="1">
                 <a:solidFill>
                   <a:srgbClr val="0E7C86"/>
                 </a:solidFill>
@@ -10280,12 +9447,12 @@
               <a:spcAft>
                 <a:spcPts val="0"/>
               </a:spcAft>
-              <a:defRPr sz="1300">
+              <a:defRPr sz="1650">
                 <a:latin typeface="Consolas"/>
               </a:defRPr>
             </a:pPr>
             <a:r>
-              <a:rPr sz="1300">
+              <a:rPr sz="1650">
                 <a:solidFill>
                   <a:srgbClr val="222222"/>
                 </a:solidFill>
@@ -10302,12 +9469,12 @@
               <a:spcAft>
                 <a:spcPts val="0"/>
               </a:spcAft>
-              <a:defRPr sz="1300">
+              <a:defRPr sz="1650">
                 <a:latin typeface="Consolas"/>
               </a:defRPr>
             </a:pPr>
             <a:r>
-              <a:rPr sz="1300">
+              <a:rPr sz="1650">
                 <a:solidFill>
                   <a:srgbClr val="222222"/>
                 </a:solidFill>
@@ -10324,12 +9491,12 @@
               <a:spcAft>
                 <a:spcPts val="0"/>
               </a:spcAft>
-              <a:defRPr sz="1300">
+              <a:defRPr sz="1650">
                 <a:latin typeface="Consolas"/>
               </a:defRPr>
             </a:pPr>
             <a:r>
-              <a:rPr sz="1300" b="1">
+              <a:rPr sz="1650" b="1">
                 <a:solidFill>
                   <a:srgbClr val="0E7C86"/>
                 </a:solidFill>
@@ -10346,12 +9513,12 @@
               <a:spcAft>
                 <a:spcPts val="0"/>
               </a:spcAft>
-              <a:defRPr sz="1300">
+              <a:defRPr sz="1650">
                 <a:latin typeface="Consolas"/>
               </a:defRPr>
             </a:pPr>
             <a:r>
-              <a:rPr sz="1300">
+              <a:rPr sz="1650">
                 <a:solidFill>
                   <a:srgbClr val="222222"/>
                 </a:solidFill>
@@ -10368,12 +9535,12 @@
               <a:spcAft>
                 <a:spcPts val="0"/>
               </a:spcAft>
-              <a:defRPr sz="1300">
+              <a:defRPr sz="1650">
                 <a:latin typeface="Consolas"/>
               </a:defRPr>
             </a:pPr>
             <a:r>
-              <a:rPr sz="1300">
+              <a:rPr sz="1650">
                 <a:solidFill>
                   <a:srgbClr val="222222"/>
                 </a:solidFill>
@@ -10390,12 +9557,12 @@
               <a:spcAft>
                 <a:spcPts val="0"/>
               </a:spcAft>
-              <a:defRPr sz="1300">
+              <a:defRPr sz="1650">
                 <a:latin typeface="Consolas"/>
               </a:defRPr>
             </a:pPr>
             <a:r>
-              <a:rPr sz="1300">
+              <a:rPr sz="1650">
                 <a:solidFill>
                   <a:srgbClr val="222222"/>
                 </a:solidFill>
@@ -10412,12 +9579,12 @@
               <a:spcAft>
                 <a:spcPts val="0"/>
               </a:spcAft>
-              <a:defRPr sz="1300">
+              <a:defRPr sz="1650">
                 <a:latin typeface="Consolas"/>
               </a:defRPr>
             </a:pPr>
             <a:r>
-              <a:rPr sz="1300">
+              <a:rPr sz="1650">
                 <a:solidFill>
                   <a:srgbClr val="222222"/>
                 </a:solidFill>
@@ -10434,12 +9601,12 @@
               <a:spcAft>
                 <a:spcPts val="0"/>
               </a:spcAft>
-              <a:defRPr sz="1300">
+              <a:defRPr sz="1650">
                 <a:latin typeface="Consolas"/>
               </a:defRPr>
             </a:pPr>
             <a:r>
-              <a:rPr sz="1300">
+              <a:rPr sz="1650">
                 <a:solidFill>
                   <a:srgbClr val="222222"/>
                 </a:solidFill>
@@ -10456,12 +9623,12 @@
               <a:spcAft>
                 <a:spcPts val="0"/>
               </a:spcAft>
-              <a:defRPr sz="1300">
+              <a:defRPr sz="1650">
                 <a:latin typeface="Consolas"/>
               </a:defRPr>
             </a:pPr>
             <a:r>
-              <a:rPr sz="1300">
+              <a:rPr sz="1650">
                 <a:solidFill>
                   <a:srgbClr val="222222"/>
                 </a:solidFill>
@@ -10478,12 +9645,12 @@
               <a:spcAft>
                 <a:spcPts val="0"/>
               </a:spcAft>
-              <a:defRPr sz="1300">
+              <a:defRPr sz="1650">
                 <a:latin typeface="Consolas"/>
               </a:defRPr>
             </a:pPr>
             <a:r>
-              <a:rPr sz="1300">
+              <a:rPr sz="1650">
                 <a:solidFill>
                   <a:srgbClr val="222222"/>
                 </a:solidFill>
@@ -10500,12 +9667,12 @@
               <a:spcAft>
                 <a:spcPts val="0"/>
               </a:spcAft>
-              <a:defRPr sz="1300">
+              <a:defRPr sz="1650">
                 <a:latin typeface="Consolas"/>
               </a:defRPr>
             </a:pPr>
             <a:r>
-              <a:rPr sz="1300" b="1">
+              <a:rPr sz="1650" b="1">
                 <a:solidFill>
                   <a:srgbClr val="0E7C86"/>
                 </a:solidFill>
@@ -10522,12 +9689,12 @@
               <a:spcAft>
                 <a:spcPts val="0"/>
               </a:spcAft>
-              <a:defRPr sz="1300">
+              <a:defRPr sz="1650">
                 <a:latin typeface="Consolas"/>
               </a:defRPr>
             </a:pPr>
             <a:r>
-              <a:rPr sz="1300">
+              <a:rPr sz="1650">
                 <a:solidFill>
                   <a:srgbClr val="222222"/>
                 </a:solidFill>
@@ -10544,12 +9711,12 @@
               <a:spcAft>
                 <a:spcPts val="0"/>
               </a:spcAft>
-              <a:defRPr sz="1300">
+              <a:defRPr sz="1650">
                 <a:latin typeface="Consolas"/>
               </a:defRPr>
             </a:pPr>
             <a:r>
-              <a:rPr sz="1300">
+              <a:rPr sz="1650">
                 <a:solidFill>
                   <a:srgbClr val="222222"/>
                 </a:solidFill>
@@ -10566,12 +9733,12 @@
               <a:spcAft>
                 <a:spcPts val="0"/>
               </a:spcAft>
-              <a:defRPr sz="1300">
+              <a:defRPr sz="1650">
                 <a:latin typeface="Consolas"/>
               </a:defRPr>
             </a:pPr>
             <a:r>
-              <a:rPr sz="1300">
+              <a:rPr sz="1650">
                 <a:solidFill>
                   <a:srgbClr val="222222"/>
                 </a:solidFill>
@@ -10588,12 +9755,12 @@
               <a:spcAft>
                 <a:spcPts val="0"/>
               </a:spcAft>
-              <a:defRPr sz="1300">
+              <a:defRPr sz="1650">
                 <a:latin typeface="Consolas"/>
               </a:defRPr>
             </a:pPr>
             <a:r>
-              <a:rPr sz="1300">
+              <a:rPr sz="1650">
                 <a:solidFill>
                   <a:srgbClr val="222222"/>
                 </a:solidFill>
@@ -10735,7 +9902,7 @@
 </p:sld>
 </file>
 
-<file path=ppt/slides/slide18.xml><?xml version="1.0" encoding="utf-8"?>
+<file path=ppt/slides/slide16.xml><?xml version="1.0" encoding="utf-8"?>
 <p:sld xmlns:a="http://schemas.openxmlformats.org/drawingml/2006/main" xmlns:p="http://schemas.openxmlformats.org/presentationml/2006/main" xmlns:r="http://schemas.openxmlformats.org/officeDocument/2006/relationships">
   <p:cSld>
     <p:spTree>
@@ -10926,7 +10093,7 @@
                 </a:solidFill>
                 <a:latin typeface="Calibri"/>
               </a:rPr>
-              <a:t>17</a:t>
+              <a:t>15</a:t>
             </a:r>
           </a:p>
         </p:txBody>
@@ -11293,7 +10460,7 @@
 </p:sld>
 </file>
 
-<file path=ppt/slides/slide19.xml><?xml version="1.0" encoding="utf-8"?>
+<file path=ppt/slides/slide17.xml><?xml version="1.0" encoding="utf-8"?>
 <p:sld xmlns:a="http://schemas.openxmlformats.org/drawingml/2006/main" xmlns:p="http://schemas.openxmlformats.org/presentationml/2006/main" xmlns:r="http://schemas.openxmlformats.org/officeDocument/2006/relationships">
   <p:cSld>
     <p:spTree>
@@ -11484,7 +10651,7 @@
                 </a:solidFill>
                 <a:latin typeface="Calibri"/>
               </a:rPr>
-              <a:t>18</a:t>
+              <a:t>16</a:t>
             </a:r>
           </a:p>
         </p:txBody>
@@ -11589,7 +10756,7 @@
                 <a:spcPct val="100000"/>
               </a:lnSpc>
               <a:spcAft>
-                <a:spcPts val="400"/>
+                <a:spcPts val="800"/>
               </a:spcAft>
               <a:defRPr sz="1800" b="0">
                 <a:solidFill>
@@ -11614,7 +10781,7 @@
                 <a:spcPct val="100000"/>
               </a:lnSpc>
               <a:spcAft>
-                <a:spcPts val="400"/>
+                <a:spcPts val="800"/>
               </a:spcAft>
               <a:defRPr sz="1800" b="0">
                 <a:solidFill>
@@ -11639,7 +10806,7 @@
                 <a:spcPct val="100000"/>
               </a:lnSpc>
               <a:spcAft>
-                <a:spcPts val="400"/>
+                <a:spcPts val="800"/>
               </a:spcAft>
               <a:defRPr sz="1800" b="0">
                 <a:solidFill>
@@ -11664,7 +10831,7 @@
                 <a:spcPct val="100000"/>
               </a:lnSpc>
               <a:spcAft>
-                <a:spcPts val="400"/>
+                <a:spcPts val="800"/>
               </a:spcAft>
               <a:defRPr sz="1800" b="0">
                 <a:solidFill>
@@ -11689,7 +10856,7 @@
                 <a:spcPct val="100000"/>
               </a:lnSpc>
               <a:spcAft>
-                <a:spcPts val="400"/>
+                <a:spcPts val="800"/>
               </a:spcAft>
               <a:defRPr sz="1800" b="0">
                 <a:solidFill>
@@ -11714,7 +10881,7 @@
                 <a:spcPct val="100000"/>
               </a:lnSpc>
               <a:spcAft>
-                <a:spcPts val="400"/>
+                <a:spcPts val="800"/>
               </a:spcAft>
               <a:defRPr sz="1800" b="0">
                 <a:solidFill>
@@ -11810,17 +10977,17 @@
                 <a:spcPct val="100000"/>
               </a:lnSpc>
               <a:spcAft>
-                <a:spcPts val="200"/>
-              </a:spcAft>
-              <a:defRPr sz="1800" b="0">
-                <a:solidFill>
-                  <a:srgbClr val="222222"/>
-                </a:solidFill>
-                <a:latin typeface="Calibri"/>
-              </a:defRPr>
-            </a:pPr>
-            <a:r>
-              <a:rPr sz="1800" b="0">
+                <a:spcPts val="300"/>
+              </a:spcAft>
+              <a:defRPr sz="2600" b="0">
+                <a:solidFill>
+                  <a:srgbClr val="222222"/>
+                </a:solidFill>
+                <a:latin typeface="Calibri"/>
+              </a:defRPr>
+            </a:pPr>
+            <a:r>
+              <a:rPr sz="2600" b="0">
                 <a:solidFill>
                   <a:srgbClr val="222222"/>
                 </a:solidFill>
@@ -11906,17 +11073,17 @@
                 <a:spcPct val="100000"/>
               </a:lnSpc>
               <a:spcAft>
-                <a:spcPts val="200"/>
-              </a:spcAft>
-              <a:defRPr sz="1800" b="0">
-                <a:solidFill>
-                  <a:srgbClr val="222222"/>
-                </a:solidFill>
-                <a:latin typeface="Calibri"/>
-              </a:defRPr>
-            </a:pPr>
-            <a:r>
-              <a:rPr sz="1800" b="0">
+                <a:spcPts val="300"/>
+              </a:spcAft>
+              <a:defRPr sz="2600" b="0">
+                <a:solidFill>
+                  <a:srgbClr val="222222"/>
+                </a:solidFill>
+                <a:latin typeface="Calibri"/>
+              </a:defRPr>
+            </a:pPr>
+            <a:r>
+              <a:rPr sz="2600" b="0">
                 <a:solidFill>
                   <a:srgbClr val="222222"/>
                 </a:solidFill>
@@ -11935,7 +11102,7 @@
 </p:sld>
 </file>
 
-<file path=ppt/slides/slide2.xml><?xml version="1.0" encoding="utf-8"?>
+<file path=ppt/slides/slide18.xml><?xml version="1.0" encoding="utf-8"?>
 <p:sld xmlns:a="http://schemas.openxmlformats.org/drawingml/2006/main" xmlns:p="http://schemas.openxmlformats.org/presentationml/2006/main" xmlns:r="http://schemas.openxmlformats.org/officeDocument/2006/relationships">
   <p:cSld>
     <p:spTree>
@@ -11986,7 +11153,7 @@
                 </a:solidFill>
                 <a:latin typeface="Calibri"/>
               </a:rPr>
-              <a:t>What you will be able to do by the end</a:t>
+              <a:t>The boot sequence of Op Program 12</a:t>
             </a:r>
           </a:p>
         </p:txBody>
@@ -12126,407 +11293,7 @@
                 </a:solidFill>
                 <a:latin typeface="Calibri"/>
               </a:rPr>
-              <a:t>1</a:t>
-            </a:r>
-          </a:p>
-        </p:txBody>
-      </p:sp>
-      <p:sp>
-        <p:nvSpPr>
-          <p:cNvPr id="6" name="TextBox 5"/>
-          <p:cNvSpPr txBox="1"/>
-          <p:nvPr/>
-        </p:nvSpPr>
-        <p:spPr>
-          <a:xfrm>
-            <a:off x="502920" y="1188720"/>
-            <a:ext cx="11185855" cy="502920"/>
-          </a:xfrm>
-          <a:prstGeom prst="rect">
-            <a:avLst/>
-          </a:prstGeom>
-          <a:noFill/>
-        </p:spPr>
-        <p:txBody>
-          <a:bodyPr wrap="square" lIns="0" tIns="0" rIns="0" bIns="0">
-            <a:spAutoFit/>
-          </a:bodyPr>
-          <a:lstStyle/>
-          <a:p>
-            <a:pPr algn="l">
-              <a:lnSpc>
-                <a:spcPct val="100000"/>
-              </a:lnSpc>
-              <a:spcAft>
-                <a:spcPts val="600"/>
-              </a:spcAft>
-              <a:defRPr sz="1900" b="1">
-                <a:solidFill>
-                  <a:srgbClr val="0E7C86"/>
-                </a:solidFill>
-                <a:latin typeface="Calibri"/>
-              </a:defRPr>
-            </a:pPr>
-            <a:r>
-              <a:rPr sz="1900" b="1">
-                <a:solidFill>
-                  <a:srgbClr val="0E7C86"/>
-                </a:solidFill>
-                <a:latin typeface="Calibri"/>
-              </a:rPr>
-              <a:t>By the end of this lesson you will be able to:</a:t>
-            </a:r>
-          </a:p>
-        </p:txBody>
-      </p:sp>
-      <p:sp>
-        <p:nvSpPr>
-          <p:cNvPr id="7" name="TextBox 6"/>
-          <p:cNvSpPr txBox="1"/>
-          <p:nvPr/>
-        </p:nvSpPr>
-        <p:spPr>
-          <a:xfrm>
-            <a:off x="502920" y="1737360"/>
-            <a:ext cx="11185855" cy="4526280"/>
-          </a:xfrm>
-          <a:prstGeom prst="rect">
-            <a:avLst/>
-          </a:prstGeom>
-          <a:noFill/>
-        </p:spPr>
-        <p:txBody>
-          <a:bodyPr wrap="square" lIns="0" tIns="0" rIns="0" bIns="0">
-            <a:spAutoFit/>
-          </a:bodyPr>
-          <a:lstStyle/>
-          <a:p>
-            <a:pPr algn="l">
-              <a:lnSpc>
-                <a:spcPct val="100000"/>
-              </a:lnSpc>
-              <a:spcAft>
-                <a:spcPts val="1300"/>
-              </a:spcAft>
-              <a:defRPr sz="1900" b="0">
-                <a:solidFill>
-                  <a:srgbClr val="222222"/>
-                </a:solidFill>
-                <a:latin typeface="Calibri"/>
-              </a:defRPr>
-            </a:pPr>
-            <a:r>
-              <a:rPr sz="1900" b="0">
-                <a:solidFill>
-                  <a:srgbClr val="222222"/>
-                </a:solidFill>
-                <a:latin typeface="Calibri"/>
-              </a:rPr>
-              <a:t>1.   Explain how the Arduino IDE assembles a multi-tab sketch, and why a type has to live in a header</a:t>
-            </a:r>
-          </a:p>
-          <a:p>
-            <a:pPr algn="l">
-              <a:lnSpc>
-                <a:spcPct val="100000"/>
-              </a:lnSpc>
-              <a:spcAft>
-                <a:spcPts val="1300"/>
-              </a:spcAft>
-              <a:defRPr sz="1900" b="0">
-                <a:solidFill>
-                  <a:srgbClr val="222222"/>
-                </a:solidFill>
-                <a:latin typeface="Calibri"/>
-              </a:defRPr>
-            </a:pPr>
-            <a:r>
-              <a:rPr sz="1900" b="0">
-                <a:solidFill>
-                  <a:srgbClr val="222222"/>
-                </a:solidFill>
-                <a:latin typeface="Calibri"/>
-              </a:rPr>
-              <a:t>2.   Split a program by subsystem without breaking it</a:t>
-            </a:r>
-          </a:p>
-          <a:p>
-            <a:pPr algn="l">
-              <a:lnSpc>
-                <a:spcPct val="100000"/>
-              </a:lnSpc>
-              <a:spcAft>
-                <a:spcPts val="1300"/>
-              </a:spcAft>
-              <a:defRPr sz="1900" b="0">
-                <a:solidFill>
-                  <a:srgbClr val="222222"/>
-                </a:solidFill>
-                <a:latin typeface="Calibri"/>
-              </a:defRPr>
-            </a:pPr>
-            <a:r>
-              <a:rPr sz="1900" b="0">
-                <a:solidFill>
-                  <a:srgbClr val="222222"/>
-                </a:solidFill>
-                <a:latin typeface="Calibri"/>
-              </a:rPr>
-              <a:t>3.   Say why the program detects its hardware rather than being told about it</a:t>
-            </a:r>
-          </a:p>
-          <a:p>
-            <a:pPr algn="l">
-              <a:lnSpc>
-                <a:spcPct val="100000"/>
-              </a:lnSpc>
-              <a:spcAft>
-                <a:spcPts val="1300"/>
-              </a:spcAft>
-              <a:defRPr sz="1900" b="0">
-                <a:solidFill>
-                  <a:srgbClr val="222222"/>
-                </a:solidFill>
-                <a:latin typeface="Calibri"/>
-              </a:defRPr>
-            </a:pPr>
-            <a:r>
-              <a:rPr sz="1900" b="0">
-                <a:solidFill>
-                  <a:srgbClr val="222222"/>
-                </a:solidFill>
-                <a:latin typeface="Calibri"/>
-              </a:rPr>
-              <a:t>4.   Write a serial console that does not block the vehicle</a:t>
-            </a:r>
-          </a:p>
-          <a:p>
-            <a:pPr algn="l">
-              <a:lnSpc>
-                <a:spcPct val="100000"/>
-              </a:lnSpc>
-              <a:spcAft>
-                <a:spcPts val="1300"/>
-              </a:spcAft>
-              <a:defRPr sz="1900" b="0">
-                <a:solidFill>
-                  <a:srgbClr val="222222"/>
-                </a:solidFill>
-                <a:latin typeface="Calibri"/>
-              </a:defRPr>
-            </a:pPr>
-            <a:r>
-              <a:rPr sz="1900" b="0">
-                <a:solidFill>
-                  <a:srgbClr val="222222"/>
-                </a:solidFill>
-                <a:latin typeface="Calibri"/>
-              </a:rPr>
-              <a:t>5.   Read the boot sequence of Op Program 12 and justify its order</a:t>
-            </a:r>
-          </a:p>
-        </p:txBody>
-      </p:sp>
-    </p:spTree>
-  </p:cSld>
-  <p:clrMapOvr>
-    <a:masterClrMapping/>
-  </p:clrMapOvr>
-</p:sld>
-</file>
-
-<file path=ppt/slides/slide20.xml><?xml version="1.0" encoding="utf-8"?>
-<p:sld xmlns:a="http://schemas.openxmlformats.org/drawingml/2006/main" xmlns:p="http://schemas.openxmlformats.org/presentationml/2006/main" xmlns:r="http://schemas.openxmlformats.org/officeDocument/2006/relationships">
-  <p:cSld>
-    <p:spTree>
-      <p:nvGrpSpPr>
-        <p:cNvPr id="1" name=""/>
-        <p:cNvGrpSpPr/>
-        <p:nvPr/>
-      </p:nvGrpSpPr>
-      <p:grpSpPr/>
-      <p:sp>
-        <p:nvSpPr>
-          <p:cNvPr id="2" name="Title 1"/>
-          <p:cNvSpPr>
-            <a:spLocks noGrp="1"/>
-          </p:cNvSpPr>
-          <p:nvPr>
-            <p:ph type="title"/>
-          </p:nvPr>
-        </p:nvSpPr>
-        <p:spPr>
-          <a:xfrm>
-            <a:off x="502920" y="274320"/>
-            <a:ext cx="11185855" cy="777240"/>
-          </a:xfrm>
-        </p:spPr>
-        <p:txBody>
-          <a:bodyPr wrap="square" anchor="b"/>
-          <a:lstStyle/>
-          <a:p>
-            <a:pPr algn="l">
-              <a:lnSpc>
-                <a:spcPct val="100000"/>
-              </a:lnSpc>
-              <a:spcAft>
-                <a:spcPts val="0"/>
-              </a:spcAft>
-              <a:defRPr sz="2800" b="1">
-                <a:solidFill>
-                  <a:srgbClr val="1F3A5F"/>
-                </a:solidFill>
-                <a:latin typeface="Calibri"/>
-              </a:defRPr>
-            </a:pPr>
-            <a:r>
-              <a:rPr sz="2800" b="1">
-                <a:solidFill>
-                  <a:srgbClr val="1F3A5F"/>
-                </a:solidFill>
-                <a:latin typeface="Calibri"/>
-              </a:rPr>
-              <a:t>The boot sequence of Op Program 12</a:t>
-            </a:r>
-          </a:p>
-        </p:txBody>
-      </p:sp>
-      <p:sp>
-        <p:nvSpPr>
-          <p:cNvPr id="3" name="Rectangle 2"/>
-          <p:cNvSpPr/>
-          <p:nvPr/>
-        </p:nvSpPr>
-        <p:spPr>
-          <a:xfrm>
-            <a:off x="502920" y="1097280"/>
-            <a:ext cx="11185855" cy="19050"/>
-          </a:xfrm>
-          <a:prstGeom prst="rect">
-            <a:avLst/>
-          </a:prstGeom>
-          <a:solidFill>
-            <a:srgbClr val="C8D2DE"/>
-          </a:solidFill>
-          <a:ln>
-            <a:noFill/>
-          </a:ln>
-          <a:effectLst/>
-        </p:spPr>
-        <p:style>
-          <a:lnRef idx="1">
-            <a:schemeClr val="accent1"/>
-          </a:lnRef>
-          <a:fillRef idx="3">
-            <a:schemeClr val="accent1"/>
-          </a:fillRef>
-          <a:effectRef idx="2">
-            <a:schemeClr val="accent1"/>
-          </a:effectRef>
-          <a:fontRef idx="minor">
-            <a:schemeClr val="lt1"/>
-          </a:fontRef>
-        </p:style>
-        <p:txBody>
-          <a:bodyPr rtlCol="0" anchor="ctr"/>
-          <a:lstStyle/>
-          <a:p>
-            <a:pPr algn="ctr"/>
-          </a:p>
-        </p:txBody>
-      </p:sp>
-      <p:sp>
-        <p:nvSpPr>
-          <p:cNvPr id="4" name="TextBox 3"/>
-          <p:cNvSpPr txBox="1"/>
-          <p:nvPr/>
-        </p:nvSpPr>
-        <p:spPr>
-          <a:xfrm>
-            <a:off x="502920" y="6382512"/>
-            <a:ext cx="10545775" cy="274320"/>
-          </a:xfrm>
-          <a:prstGeom prst="rect">
-            <a:avLst/>
-          </a:prstGeom>
-          <a:noFill/>
-        </p:spPr>
-        <p:txBody>
-          <a:bodyPr wrap="square" lIns="0" tIns="0">
-            <a:spAutoFit/>
-          </a:bodyPr>
-          <a:lstStyle/>
-          <a:p>
-            <a:pPr algn="l">
-              <a:lnSpc>
-                <a:spcPct val="100000"/>
-              </a:lnSpc>
-              <a:spcAft>
-                <a:spcPts val="0"/>
-              </a:spcAft>
-              <a:defRPr sz="1000" b="0">
-                <a:solidFill>
-                  <a:srgbClr val="666666"/>
-                </a:solidFill>
-                <a:latin typeface="Calibri"/>
-              </a:defRPr>
-            </a:pPr>
-            <a:r>
-              <a:rPr sz="1000" b="0">
-                <a:solidFill>
-                  <a:srgbClr val="666666"/>
-                </a:solidFill>
-                <a:latin typeface="Calibri"/>
-              </a:rPr>
-              <a:t>Pathfinder Advanced - Op Program 12  |  Lesson 1</a:t>
-            </a:r>
-          </a:p>
-        </p:txBody>
-      </p:sp>
-      <p:sp>
-        <p:nvSpPr>
-          <p:cNvPr id="5" name="TextBox 4"/>
-          <p:cNvSpPr txBox="1"/>
-          <p:nvPr/>
-        </p:nvSpPr>
-        <p:spPr>
-          <a:xfrm>
-            <a:off x="11231575" y="6382512"/>
-            <a:ext cx="457200" cy="274320"/>
-          </a:xfrm>
-          <a:prstGeom prst="rect">
-            <a:avLst/>
-          </a:prstGeom>
-          <a:noFill/>
-        </p:spPr>
-        <p:txBody>
-          <a:bodyPr wrap="square" lIns="0" tIns="0">
-            <a:spAutoFit/>
-          </a:bodyPr>
-          <a:lstStyle/>
-          <a:p>
-            <a:pPr algn="r">
-              <a:lnSpc>
-                <a:spcPct val="100000"/>
-              </a:lnSpc>
-              <a:spcAft>
-                <a:spcPts val="0"/>
-              </a:spcAft>
-              <a:defRPr sz="1000" b="0">
-                <a:solidFill>
-                  <a:srgbClr val="666666"/>
-                </a:solidFill>
-                <a:latin typeface="Calibri"/>
-              </a:defRPr>
-            </a:pPr>
-            <a:r>
-              <a:rPr sz="1000" b="0">
-                <a:solidFill>
-                  <a:srgbClr val="666666"/>
-                </a:solidFill>
-                <a:latin typeface="Calibri"/>
-              </a:rPr>
-              <a:t>19</a:t>
+              <a:t>17</a:t>
             </a:r>
           </a:p>
         </p:txBody>
@@ -12630,12 +11397,12 @@
               <a:spcAft>
                 <a:spcPts val="0"/>
               </a:spcAft>
-              <a:defRPr sz="1200">
+              <a:defRPr sz="1400">
                 <a:latin typeface="Consolas"/>
               </a:defRPr>
             </a:pPr>
             <a:r>
-              <a:rPr sz="1200">
+              <a:rPr sz="1400">
                 <a:solidFill>
                   <a:srgbClr val="222222"/>
                 </a:solidFill>
@@ -12652,12 +11419,12 @@
               <a:spcAft>
                 <a:spcPts val="0"/>
               </a:spcAft>
-              <a:defRPr sz="1200">
+              <a:defRPr sz="1400">
                 <a:latin typeface="Consolas"/>
               </a:defRPr>
             </a:pPr>
             <a:r>
-              <a:rPr sz="1200">
+              <a:rPr sz="1400">
                 <a:solidFill>
                   <a:srgbClr val="222222"/>
                 </a:solidFill>
@@ -12674,12 +11441,12 @@
               <a:spcAft>
                 <a:spcPts val="0"/>
               </a:spcAft>
-              <a:defRPr sz="1200">
+              <a:defRPr sz="1400">
                 <a:latin typeface="Consolas"/>
               </a:defRPr>
             </a:pPr>
             <a:r>
-              <a:rPr sz="1200">
+              <a:rPr sz="1400">
                 <a:solidFill>
                   <a:srgbClr val="222222"/>
                 </a:solidFill>
@@ -12696,12 +11463,12 @@
               <a:spcAft>
                 <a:spcPts val="0"/>
               </a:spcAft>
-              <a:defRPr sz="1200">
+              <a:defRPr sz="1400">
                 <a:latin typeface="Consolas"/>
               </a:defRPr>
             </a:pPr>
             <a:r>
-              <a:rPr sz="1200">
+              <a:rPr sz="1400">
                 <a:solidFill>
                   <a:srgbClr val="222222"/>
                 </a:solidFill>
@@ -12718,12 +11485,12 @@
               <a:spcAft>
                 <a:spcPts val="0"/>
               </a:spcAft>
-              <a:defRPr sz="1200">
+              <a:defRPr sz="1400">
                 <a:latin typeface="Consolas"/>
               </a:defRPr>
             </a:pPr>
             <a:r>
-              <a:rPr sz="1200">
+              <a:rPr sz="1400">
                 <a:solidFill>
                   <a:srgbClr val="222222"/>
                 </a:solidFill>
@@ -12740,12 +11507,12 @@
               <a:spcAft>
                 <a:spcPts val="0"/>
               </a:spcAft>
-              <a:defRPr sz="1200">
+              <a:defRPr sz="1400">
                 <a:latin typeface="Consolas"/>
               </a:defRPr>
             </a:pPr>
             <a:r>
-              <a:rPr sz="1200">
+              <a:rPr sz="1400">
                 <a:solidFill>
                   <a:srgbClr val="222222"/>
                 </a:solidFill>
@@ -12762,12 +11529,12 @@
               <a:spcAft>
                 <a:spcPts val="0"/>
               </a:spcAft>
-              <a:defRPr sz="1200">
+              <a:defRPr sz="1400">
                 <a:latin typeface="Consolas"/>
               </a:defRPr>
             </a:pPr>
             <a:r>
-              <a:rPr sz="1200">
+              <a:rPr sz="1400">
                 <a:solidFill>
                   <a:srgbClr val="222222"/>
                 </a:solidFill>
@@ -12784,12 +11551,12 @@
               <a:spcAft>
                 <a:spcPts val="0"/>
               </a:spcAft>
-              <a:defRPr sz="1200">
+              <a:defRPr sz="1400">
                 <a:latin typeface="Consolas"/>
               </a:defRPr>
             </a:pPr>
             <a:r>
-              <a:rPr sz="1200">
+              <a:rPr sz="1400">
                 <a:solidFill>
                   <a:srgbClr val="222222"/>
                 </a:solidFill>
@@ -12806,12 +11573,12 @@
               <a:spcAft>
                 <a:spcPts val="0"/>
               </a:spcAft>
-              <a:defRPr sz="1200">
+              <a:defRPr sz="1400">
                 <a:latin typeface="Consolas"/>
               </a:defRPr>
             </a:pPr>
             <a:r>
-              <a:rPr sz="1200">
+              <a:rPr sz="1400">
                 <a:solidFill>
                   <a:srgbClr val="222222"/>
                 </a:solidFill>
@@ -12828,12 +11595,12 @@
               <a:spcAft>
                 <a:spcPts val="0"/>
               </a:spcAft>
-              <a:defRPr sz="1200">
+              <a:defRPr sz="1400">
                 <a:latin typeface="Consolas"/>
               </a:defRPr>
             </a:pPr>
             <a:r>
-              <a:rPr sz="1200">
+              <a:rPr sz="1400">
                 <a:solidFill>
                   <a:srgbClr val="222222"/>
                 </a:solidFill>
@@ -12850,12 +11617,12 @@
               <a:spcAft>
                 <a:spcPts val="0"/>
               </a:spcAft>
-              <a:defRPr sz="1200">
+              <a:defRPr sz="1400">
                 <a:latin typeface="Consolas"/>
               </a:defRPr>
             </a:pPr>
             <a:r>
-              <a:rPr sz="1200">
+              <a:rPr sz="1400">
                 <a:solidFill>
                   <a:srgbClr val="222222"/>
                 </a:solidFill>
@@ -12872,12 +11639,12 @@
               <a:spcAft>
                 <a:spcPts val="0"/>
               </a:spcAft>
-              <a:defRPr sz="1200">
+              <a:defRPr sz="1400">
                 <a:latin typeface="Consolas"/>
               </a:defRPr>
             </a:pPr>
             <a:r>
-              <a:rPr sz="1200">
+              <a:rPr sz="1400">
                 <a:solidFill>
                   <a:srgbClr val="222222"/>
                 </a:solidFill>
@@ -12894,12 +11661,12 @@
               <a:spcAft>
                 <a:spcPts val="0"/>
               </a:spcAft>
-              <a:defRPr sz="1200">
+              <a:defRPr sz="1400">
                 <a:latin typeface="Consolas"/>
               </a:defRPr>
             </a:pPr>
             <a:r>
-              <a:rPr sz="1200">
+              <a:rPr sz="1400">
                 <a:solidFill>
                   <a:srgbClr val="222222"/>
                 </a:solidFill>
@@ -12916,12 +11683,12 @@
               <a:spcAft>
                 <a:spcPts val="0"/>
               </a:spcAft>
-              <a:defRPr sz="1200">
+              <a:defRPr sz="1400">
                 <a:latin typeface="Consolas"/>
               </a:defRPr>
             </a:pPr>
             <a:r>
-              <a:rPr sz="1200">
+              <a:rPr sz="1400">
                 <a:solidFill>
                   <a:srgbClr val="222222"/>
                 </a:solidFill>
@@ -12938,12 +11705,12 @@
               <a:spcAft>
                 <a:spcPts val="0"/>
               </a:spcAft>
-              <a:defRPr sz="1200">
+              <a:defRPr sz="1400">
                 <a:latin typeface="Consolas"/>
               </a:defRPr>
             </a:pPr>
             <a:r>
-              <a:rPr sz="1200">
+              <a:rPr sz="1400">
                 <a:solidFill>
                   <a:srgbClr val="222222"/>
                 </a:solidFill>
@@ -12960,12 +11727,12 @@
               <a:spcAft>
                 <a:spcPts val="0"/>
               </a:spcAft>
-              <a:defRPr sz="1200">
+              <a:defRPr sz="1400">
                 <a:latin typeface="Consolas"/>
               </a:defRPr>
             </a:pPr>
             <a:r>
-              <a:rPr sz="1200" b="1">
+              <a:rPr sz="1400" b="1">
                 <a:solidFill>
                   <a:srgbClr val="0E7C86"/>
                 </a:solidFill>
@@ -12982,12 +11749,12 @@
               <a:spcAft>
                 <a:spcPts val="0"/>
               </a:spcAft>
-              <a:defRPr sz="1200">
+              <a:defRPr sz="1400">
                 <a:latin typeface="Consolas"/>
               </a:defRPr>
             </a:pPr>
             <a:r>
-              <a:rPr sz="1200" b="1">
+              <a:rPr sz="1400" b="1">
                 <a:solidFill>
                   <a:srgbClr val="0E7C86"/>
                 </a:solidFill>
@@ -13004,12 +11771,12 @@
               <a:spcAft>
                 <a:spcPts val="0"/>
               </a:spcAft>
-              <a:defRPr sz="1200">
+              <a:defRPr sz="1400">
                 <a:latin typeface="Consolas"/>
               </a:defRPr>
             </a:pPr>
             <a:r>
-              <a:rPr sz="1200">
+              <a:rPr sz="1400">
                 <a:solidFill>
                   <a:srgbClr val="222222"/>
                 </a:solidFill>
@@ -13026,12 +11793,12 @@
               <a:spcAft>
                 <a:spcPts val="0"/>
               </a:spcAft>
-              <a:defRPr sz="1200">
+              <a:defRPr sz="1400">
                 <a:latin typeface="Consolas"/>
               </a:defRPr>
             </a:pPr>
             <a:r>
-              <a:rPr sz="1200">
+              <a:rPr sz="1400">
                 <a:solidFill>
                   <a:srgbClr val="222222"/>
                 </a:solidFill>
@@ -13048,12 +11815,12 @@
               <a:spcAft>
                 <a:spcPts val="0"/>
               </a:spcAft>
-              <a:defRPr sz="1200">
+              <a:defRPr sz="1400">
                 <a:latin typeface="Consolas"/>
               </a:defRPr>
             </a:pPr>
             <a:r>
-              <a:rPr sz="1200">
+              <a:rPr sz="1400">
                 <a:solidFill>
                   <a:srgbClr val="222222"/>
                 </a:solidFill>
@@ -13070,84 +11837,18 @@
               <a:spcAft>
                 <a:spcPts val="0"/>
               </a:spcAft>
-              <a:defRPr sz="1200">
+              <a:defRPr sz="1400">
                 <a:latin typeface="Consolas"/>
               </a:defRPr>
             </a:pPr>
             <a:r>
-              <a:rPr sz="1200">
+              <a:rPr sz="1400">
                 <a:solidFill>
                   <a:srgbClr val="222222"/>
                 </a:solidFill>
                 <a:latin typeface="Consolas"/>
               </a:rPr>
               <a:t> </a:t>
-            </a:r>
-          </a:p>
-          <a:p>
-            <a:pPr algn="l">
-              <a:lnSpc>
-                <a:spcPct val="100000"/>
-              </a:lnSpc>
-              <a:spcAft>
-                <a:spcPts val="0"/>
-              </a:spcAft>
-              <a:defRPr sz="1200">
-                <a:latin typeface="Consolas"/>
-              </a:defRPr>
-            </a:pPr>
-            <a:r>
-              <a:rPr sz="1200">
-                <a:solidFill>
-                  <a:srgbClr val="222222"/>
-                </a:solidFill>
-                <a:latin typeface="Consolas"/>
-              </a:rPr>
-              <a:t>  setup_bluetooth();           // then the radio</a:t>
-            </a:r>
-          </a:p>
-          <a:p>
-            <a:pPr algn="l">
-              <a:lnSpc>
-                <a:spcPct val="100000"/>
-              </a:lnSpc>
-              <a:spcAft>
-                <a:spcPts val="0"/>
-              </a:spcAft>
-              <a:defRPr sz="1200">
-                <a:latin typeface="Consolas"/>
-              </a:defRPr>
-            </a:pPr>
-            <a:r>
-              <a:rPr sz="1200">
-                <a:solidFill>
-                  <a:srgbClr val="222222"/>
-                </a:solidFill>
-                <a:latin typeface="Consolas"/>
-              </a:rPr>
-              <a:t> </a:t>
-            </a:r>
-          </a:p>
-          <a:p>
-            <a:pPr algn="l">
-              <a:lnSpc>
-                <a:spcPct val="100000"/>
-              </a:lnSpc>
-              <a:spcAft>
-                <a:spcPts val="0"/>
-              </a:spcAft>
-              <a:defRPr sz="1200">
-                <a:latin typeface="Consolas"/>
-              </a:defRPr>
-            </a:pPr>
-            <a:r>
-              <a:rPr sz="1200">
-                <a:solidFill>
-                  <a:srgbClr val="222222"/>
-                </a:solidFill>
-                <a:latin typeface="Consolas"/>
-              </a:rPr>
-              <a:t>  pinMode(PAIR_TRIGGER_PIN, INPUT_PULLUP);</a:t>
             </a:r>
           </a:p>
         </p:txBody>
@@ -13179,7 +11880,7 @@
                 <a:spcPct val="100000"/>
               </a:lnSpc>
               <a:spcAft>
-                <a:spcPts val="600"/>
+                <a:spcPts val="700"/>
               </a:spcAft>
               <a:defRPr sz="1800" b="0">
                 <a:solidFill>
@@ -13204,7 +11905,7 @@
                 <a:spcPct val="100000"/>
               </a:lnSpc>
               <a:spcAft>
-                <a:spcPts val="600"/>
+                <a:spcPts val="700"/>
               </a:spcAft>
               <a:defRPr sz="1800" b="0">
                 <a:solidFill>
@@ -13229,7 +11930,7 @@
                 <a:spcPct val="100000"/>
               </a:lnSpc>
               <a:spcAft>
-                <a:spcPts val="600"/>
+                <a:spcPts val="700"/>
               </a:spcAft>
               <a:defRPr sz="1800" b="0">
                 <a:solidFill>
@@ -13254,7 +11955,7 @@
                 <a:spcPct val="100000"/>
               </a:lnSpc>
               <a:spcAft>
-                <a:spcPts val="600"/>
+                <a:spcPts val="700"/>
               </a:spcAft>
               <a:defRPr sz="1800" b="0">
                 <a:solidFill>
@@ -13279,7 +11980,7 @@
                 <a:spcPct val="100000"/>
               </a:lnSpc>
               <a:spcAft>
-                <a:spcPts val="600"/>
+                <a:spcPts val="700"/>
               </a:spcAft>
               <a:defRPr sz="1800" b="0">
                 <a:solidFill>
@@ -13308,7 +12009,7 @@
 </p:sld>
 </file>
 
-<file path=ppt/slides/slide21.xml><?xml version="1.0" encoding="utf-8"?>
+<file path=ppt/slides/slide19.xml><?xml version="1.0" encoding="utf-8"?>
 <p:sld xmlns:a="http://schemas.openxmlformats.org/drawingml/2006/main" xmlns:p="http://schemas.openxmlformats.org/presentationml/2006/main" xmlns:r="http://schemas.openxmlformats.org/officeDocument/2006/relationships">
   <p:cSld>
     <p:spTree>
@@ -13499,7 +12200,7 @@
                 </a:solidFill>
                 <a:latin typeface="Calibri"/>
               </a:rPr>
-              <a:t>20</a:t>
+              <a:t>18</a:t>
             </a:r>
           </a:p>
         </p:txBody>
@@ -13603,17 +12304,83 @@
               <a:spcAft>
                 <a:spcPts val="0"/>
               </a:spcAft>
-              <a:defRPr sz="1200">
+              <a:defRPr sz="1400">
                 <a:latin typeface="Consolas"/>
               </a:defRPr>
             </a:pPr>
             <a:r>
-              <a:rPr sz="1200">
+              <a:rPr sz="1400">
                 <a:solidFill>
                   <a:srgbClr val="222222"/>
                 </a:solidFill>
                 <a:latin typeface="Consolas"/>
               </a:rPr>
+              <a:t>  setup_bluetooth();           // then the radio</a:t>
+            </a:r>
+          </a:p>
+          <a:p>
+            <a:pPr algn="l">
+              <a:lnSpc>
+                <a:spcPct val="100000"/>
+              </a:lnSpc>
+              <a:spcAft>
+                <a:spcPts val="0"/>
+              </a:spcAft>
+              <a:defRPr sz="1400">
+                <a:latin typeface="Consolas"/>
+              </a:defRPr>
+            </a:pPr>
+            <a:r>
+              <a:rPr sz="1400">
+                <a:solidFill>
+                  <a:srgbClr val="222222"/>
+                </a:solidFill>
+                <a:latin typeface="Consolas"/>
+              </a:rPr>
+              <a:t> </a:t>
+            </a:r>
+          </a:p>
+          <a:p>
+            <a:pPr algn="l">
+              <a:lnSpc>
+                <a:spcPct val="100000"/>
+              </a:lnSpc>
+              <a:spcAft>
+                <a:spcPts val="0"/>
+              </a:spcAft>
+              <a:defRPr sz="1400">
+                <a:latin typeface="Consolas"/>
+              </a:defRPr>
+            </a:pPr>
+            <a:r>
+              <a:rPr sz="1400">
+                <a:solidFill>
+                  <a:srgbClr val="222222"/>
+                </a:solidFill>
+                <a:latin typeface="Consolas"/>
+              </a:rPr>
+              <a:t>  pinMode(PAIR_TRIGGER_PIN, INPUT_PULLUP);</a:t>
+            </a:r>
+          </a:p>
+          <a:p>
+            <a:pPr algn="l">
+              <a:lnSpc>
+                <a:spcPct val="100000"/>
+              </a:lnSpc>
+              <a:spcAft>
+                <a:spcPts val="0"/>
+              </a:spcAft>
+              <a:defRPr sz="1400">
+                <a:latin typeface="Consolas"/>
+              </a:defRPr>
+            </a:pPr>
+            <a:r>
+              <a:rPr sz="1400">
+                <a:solidFill>
+                  <a:srgbClr val="222222"/>
+                </a:solidFill>
+                <a:latin typeface="Consolas"/>
+              </a:rPr>
               <a:t>  pinMode(TEST_PIN, INPUT);</a:t>
             </a:r>
           </a:p>
@@ -13625,12 +12392,12 @@
               <a:spcAft>
                 <a:spcPts val="0"/>
               </a:spcAft>
-              <a:defRPr sz="1200">
+              <a:defRPr sz="1400">
                 <a:latin typeface="Consolas"/>
               </a:defRPr>
             </a:pPr>
             <a:r>
-              <a:rPr sz="1200">
+              <a:rPr sz="1400">
                 <a:solidFill>
                   <a:srgbClr val="222222"/>
                 </a:solidFill>
@@ -13649,7 +12416,7 @@
 </p:sld>
 </file>
 
-<file path=ppt/slides/slide22.xml><?xml version="1.0" encoding="utf-8"?>
+<file path=ppt/slides/slide2.xml><?xml version="1.0" encoding="utf-8"?>
 <p:sld xmlns:a="http://schemas.openxmlformats.org/drawingml/2006/main" xmlns:p="http://schemas.openxmlformats.org/presentationml/2006/main" xmlns:r="http://schemas.openxmlformats.org/officeDocument/2006/relationships">
   <p:cSld>
     <p:spTree>
@@ -13700,7 +12467,7 @@
                 </a:solidFill>
                 <a:latin typeface="Calibri"/>
               </a:rPr>
-              <a:t>How a command gets from your thumb to a wheel</a:t>
+              <a:t>What you will be able to do by the end</a:t>
             </a:r>
           </a:p>
         </p:txBody>
@@ -13840,7 +12607,407 @@
                 </a:solidFill>
                 <a:latin typeface="Calibri"/>
               </a:rPr>
-              <a:t>21</a:t>
+              <a:t>1</a:t>
+            </a:r>
+          </a:p>
+        </p:txBody>
+      </p:sp>
+      <p:sp>
+        <p:nvSpPr>
+          <p:cNvPr id="6" name="TextBox 5"/>
+          <p:cNvSpPr txBox="1"/>
+          <p:nvPr/>
+        </p:nvSpPr>
+        <p:spPr>
+          <a:xfrm>
+            <a:off x="502920" y="1188720"/>
+            <a:ext cx="11185855" cy="502920"/>
+          </a:xfrm>
+          <a:prstGeom prst="rect">
+            <a:avLst/>
+          </a:prstGeom>
+          <a:noFill/>
+        </p:spPr>
+        <p:txBody>
+          <a:bodyPr wrap="square" lIns="0" tIns="0" rIns="0" bIns="0">
+            <a:spAutoFit/>
+          </a:bodyPr>
+          <a:lstStyle/>
+          <a:p>
+            <a:pPr algn="l">
+              <a:lnSpc>
+                <a:spcPct val="100000"/>
+              </a:lnSpc>
+              <a:spcAft>
+                <a:spcPts val="600"/>
+              </a:spcAft>
+              <a:defRPr sz="1900" b="1">
+                <a:solidFill>
+                  <a:srgbClr val="0E7C86"/>
+                </a:solidFill>
+                <a:latin typeface="Calibri"/>
+              </a:defRPr>
+            </a:pPr>
+            <a:r>
+              <a:rPr sz="1900" b="1">
+                <a:solidFill>
+                  <a:srgbClr val="0E7C86"/>
+                </a:solidFill>
+                <a:latin typeface="Calibri"/>
+              </a:rPr>
+              <a:t>By the end of this lesson you will be able to:</a:t>
+            </a:r>
+          </a:p>
+        </p:txBody>
+      </p:sp>
+      <p:sp>
+        <p:nvSpPr>
+          <p:cNvPr id="7" name="TextBox 6"/>
+          <p:cNvSpPr txBox="1"/>
+          <p:nvPr/>
+        </p:nvSpPr>
+        <p:spPr>
+          <a:xfrm>
+            <a:off x="502920" y="1737360"/>
+            <a:ext cx="11185855" cy="4526280"/>
+          </a:xfrm>
+          <a:prstGeom prst="rect">
+            <a:avLst/>
+          </a:prstGeom>
+          <a:noFill/>
+        </p:spPr>
+        <p:txBody>
+          <a:bodyPr wrap="square" lIns="0" tIns="0" rIns="0" bIns="0">
+            <a:spAutoFit/>
+          </a:bodyPr>
+          <a:lstStyle/>
+          <a:p>
+            <a:pPr algn="l">
+              <a:lnSpc>
+                <a:spcPct val="100000"/>
+              </a:lnSpc>
+              <a:spcAft>
+                <a:spcPts val="1300"/>
+              </a:spcAft>
+              <a:defRPr sz="1900" b="0">
+                <a:solidFill>
+                  <a:srgbClr val="222222"/>
+                </a:solidFill>
+                <a:latin typeface="Calibri"/>
+              </a:defRPr>
+            </a:pPr>
+            <a:r>
+              <a:rPr sz="1900" b="0">
+                <a:solidFill>
+                  <a:srgbClr val="222222"/>
+                </a:solidFill>
+                <a:latin typeface="Calibri"/>
+              </a:rPr>
+              <a:t>1.   Explain how the Arduino IDE assembles a multi-tab sketch, and why a type has to live in a header</a:t>
+            </a:r>
+          </a:p>
+          <a:p>
+            <a:pPr algn="l">
+              <a:lnSpc>
+                <a:spcPct val="100000"/>
+              </a:lnSpc>
+              <a:spcAft>
+                <a:spcPts val="1300"/>
+              </a:spcAft>
+              <a:defRPr sz="1900" b="0">
+                <a:solidFill>
+                  <a:srgbClr val="222222"/>
+                </a:solidFill>
+                <a:latin typeface="Calibri"/>
+              </a:defRPr>
+            </a:pPr>
+            <a:r>
+              <a:rPr sz="1900" b="0">
+                <a:solidFill>
+                  <a:srgbClr val="222222"/>
+                </a:solidFill>
+                <a:latin typeface="Calibri"/>
+              </a:rPr>
+              <a:t>2.   Split a program by subsystem without breaking it</a:t>
+            </a:r>
+          </a:p>
+          <a:p>
+            <a:pPr algn="l">
+              <a:lnSpc>
+                <a:spcPct val="100000"/>
+              </a:lnSpc>
+              <a:spcAft>
+                <a:spcPts val="1300"/>
+              </a:spcAft>
+              <a:defRPr sz="1900" b="0">
+                <a:solidFill>
+                  <a:srgbClr val="222222"/>
+                </a:solidFill>
+                <a:latin typeface="Calibri"/>
+              </a:defRPr>
+            </a:pPr>
+            <a:r>
+              <a:rPr sz="1900" b="0">
+                <a:solidFill>
+                  <a:srgbClr val="222222"/>
+                </a:solidFill>
+                <a:latin typeface="Calibri"/>
+              </a:rPr>
+              <a:t>3.   Say why the program detects its hardware rather than being told about it</a:t>
+            </a:r>
+          </a:p>
+          <a:p>
+            <a:pPr algn="l">
+              <a:lnSpc>
+                <a:spcPct val="100000"/>
+              </a:lnSpc>
+              <a:spcAft>
+                <a:spcPts val="1300"/>
+              </a:spcAft>
+              <a:defRPr sz="1900" b="0">
+                <a:solidFill>
+                  <a:srgbClr val="222222"/>
+                </a:solidFill>
+                <a:latin typeface="Calibri"/>
+              </a:defRPr>
+            </a:pPr>
+            <a:r>
+              <a:rPr sz="1900" b="0">
+                <a:solidFill>
+                  <a:srgbClr val="222222"/>
+                </a:solidFill>
+                <a:latin typeface="Calibri"/>
+              </a:rPr>
+              <a:t>4.   Write a serial console that does not block the vehicle</a:t>
+            </a:r>
+          </a:p>
+          <a:p>
+            <a:pPr algn="l">
+              <a:lnSpc>
+                <a:spcPct val="100000"/>
+              </a:lnSpc>
+              <a:spcAft>
+                <a:spcPts val="1300"/>
+              </a:spcAft>
+              <a:defRPr sz="1900" b="0">
+                <a:solidFill>
+                  <a:srgbClr val="222222"/>
+                </a:solidFill>
+                <a:latin typeface="Calibri"/>
+              </a:defRPr>
+            </a:pPr>
+            <a:r>
+              <a:rPr sz="1900" b="0">
+                <a:solidFill>
+                  <a:srgbClr val="222222"/>
+                </a:solidFill>
+                <a:latin typeface="Calibri"/>
+              </a:rPr>
+              <a:t>5.   Read the boot sequence of Op Program 12 and justify its order</a:t>
+            </a:r>
+          </a:p>
+        </p:txBody>
+      </p:sp>
+    </p:spTree>
+  </p:cSld>
+  <p:clrMapOvr>
+    <a:masterClrMapping/>
+  </p:clrMapOvr>
+</p:sld>
+</file>
+
+<file path=ppt/slides/slide20.xml><?xml version="1.0" encoding="utf-8"?>
+<p:sld xmlns:a="http://schemas.openxmlformats.org/drawingml/2006/main" xmlns:p="http://schemas.openxmlformats.org/presentationml/2006/main" xmlns:r="http://schemas.openxmlformats.org/officeDocument/2006/relationships">
+  <p:cSld>
+    <p:spTree>
+      <p:nvGrpSpPr>
+        <p:cNvPr id="1" name=""/>
+        <p:cNvGrpSpPr/>
+        <p:nvPr/>
+      </p:nvGrpSpPr>
+      <p:grpSpPr/>
+      <p:sp>
+        <p:nvSpPr>
+          <p:cNvPr id="2" name="Title 1"/>
+          <p:cNvSpPr>
+            <a:spLocks noGrp="1"/>
+          </p:cNvSpPr>
+          <p:nvPr>
+            <p:ph type="title"/>
+          </p:nvPr>
+        </p:nvSpPr>
+        <p:spPr>
+          <a:xfrm>
+            <a:off x="502920" y="274320"/>
+            <a:ext cx="11185855" cy="777240"/>
+          </a:xfrm>
+        </p:spPr>
+        <p:txBody>
+          <a:bodyPr wrap="square" anchor="b"/>
+          <a:lstStyle/>
+          <a:p>
+            <a:pPr algn="l">
+              <a:lnSpc>
+                <a:spcPct val="100000"/>
+              </a:lnSpc>
+              <a:spcAft>
+                <a:spcPts val="0"/>
+              </a:spcAft>
+              <a:defRPr sz="2800" b="1">
+                <a:solidFill>
+                  <a:srgbClr val="1F3A5F"/>
+                </a:solidFill>
+                <a:latin typeface="Calibri"/>
+              </a:defRPr>
+            </a:pPr>
+            <a:r>
+              <a:rPr sz="2800" b="1">
+                <a:solidFill>
+                  <a:srgbClr val="1F3A5F"/>
+                </a:solidFill>
+                <a:latin typeface="Calibri"/>
+              </a:rPr>
+              <a:t>How a command gets from your thumb to a wheel</a:t>
+            </a:r>
+          </a:p>
+        </p:txBody>
+      </p:sp>
+      <p:sp>
+        <p:nvSpPr>
+          <p:cNvPr id="3" name="Rectangle 2"/>
+          <p:cNvSpPr/>
+          <p:nvPr/>
+        </p:nvSpPr>
+        <p:spPr>
+          <a:xfrm>
+            <a:off x="502920" y="1097280"/>
+            <a:ext cx="11185855" cy="19050"/>
+          </a:xfrm>
+          <a:prstGeom prst="rect">
+            <a:avLst/>
+          </a:prstGeom>
+          <a:solidFill>
+            <a:srgbClr val="C8D2DE"/>
+          </a:solidFill>
+          <a:ln>
+            <a:noFill/>
+          </a:ln>
+          <a:effectLst/>
+        </p:spPr>
+        <p:style>
+          <a:lnRef idx="1">
+            <a:schemeClr val="accent1"/>
+          </a:lnRef>
+          <a:fillRef idx="3">
+            <a:schemeClr val="accent1"/>
+          </a:fillRef>
+          <a:effectRef idx="2">
+            <a:schemeClr val="accent1"/>
+          </a:effectRef>
+          <a:fontRef idx="minor">
+            <a:schemeClr val="lt1"/>
+          </a:fontRef>
+        </p:style>
+        <p:txBody>
+          <a:bodyPr rtlCol="0" anchor="ctr"/>
+          <a:lstStyle/>
+          <a:p>
+            <a:pPr algn="ctr"/>
+          </a:p>
+        </p:txBody>
+      </p:sp>
+      <p:sp>
+        <p:nvSpPr>
+          <p:cNvPr id="4" name="TextBox 3"/>
+          <p:cNvSpPr txBox="1"/>
+          <p:nvPr/>
+        </p:nvSpPr>
+        <p:spPr>
+          <a:xfrm>
+            <a:off x="502920" y="6382512"/>
+            <a:ext cx="10545775" cy="274320"/>
+          </a:xfrm>
+          <a:prstGeom prst="rect">
+            <a:avLst/>
+          </a:prstGeom>
+          <a:noFill/>
+        </p:spPr>
+        <p:txBody>
+          <a:bodyPr wrap="square" lIns="0" tIns="0">
+            <a:spAutoFit/>
+          </a:bodyPr>
+          <a:lstStyle/>
+          <a:p>
+            <a:pPr algn="l">
+              <a:lnSpc>
+                <a:spcPct val="100000"/>
+              </a:lnSpc>
+              <a:spcAft>
+                <a:spcPts val="0"/>
+              </a:spcAft>
+              <a:defRPr sz="1000" b="0">
+                <a:solidFill>
+                  <a:srgbClr val="666666"/>
+                </a:solidFill>
+                <a:latin typeface="Calibri"/>
+              </a:defRPr>
+            </a:pPr>
+            <a:r>
+              <a:rPr sz="1000" b="0">
+                <a:solidFill>
+                  <a:srgbClr val="666666"/>
+                </a:solidFill>
+                <a:latin typeface="Calibri"/>
+              </a:rPr>
+              <a:t>Pathfinder Advanced - Op Program 12  |  Lesson 1</a:t>
+            </a:r>
+          </a:p>
+        </p:txBody>
+      </p:sp>
+      <p:sp>
+        <p:nvSpPr>
+          <p:cNvPr id="5" name="TextBox 4"/>
+          <p:cNvSpPr txBox="1"/>
+          <p:nvPr/>
+        </p:nvSpPr>
+        <p:spPr>
+          <a:xfrm>
+            <a:off x="11231575" y="6382512"/>
+            <a:ext cx="457200" cy="274320"/>
+          </a:xfrm>
+          <a:prstGeom prst="rect">
+            <a:avLst/>
+          </a:prstGeom>
+          <a:noFill/>
+        </p:spPr>
+        <p:txBody>
+          <a:bodyPr wrap="square" lIns="0" tIns="0">
+            <a:spAutoFit/>
+          </a:bodyPr>
+          <a:lstStyle/>
+          <a:p>
+            <a:pPr algn="r">
+              <a:lnSpc>
+                <a:spcPct val="100000"/>
+              </a:lnSpc>
+              <a:spcAft>
+                <a:spcPts val="0"/>
+              </a:spcAft>
+              <a:defRPr sz="1000" b="0">
+                <a:solidFill>
+                  <a:srgbClr val="666666"/>
+                </a:solidFill>
+                <a:latin typeface="Calibri"/>
+              </a:defRPr>
+            </a:pPr>
+            <a:r>
+              <a:rPr sz="1000" b="0">
+                <a:solidFill>
+                  <a:srgbClr val="666666"/>
+                </a:solidFill>
+                <a:latin typeface="Calibri"/>
+              </a:rPr>
+              <a:t>19</a:t>
             </a:r>
           </a:p>
         </p:txBody>
@@ -14887,7 +14054,7 @@
 </p:sld>
 </file>
 
-<file path=ppt/slides/slide23.xml><?xml version="1.0" encoding="utf-8"?>
+<file path=ppt/slides/slide21.xml><?xml version="1.0" encoding="utf-8"?>
 <p:sld xmlns:a="http://schemas.openxmlformats.org/drawingml/2006/main" xmlns:p="http://schemas.openxmlformats.org/presentationml/2006/main" xmlns:r="http://schemas.openxmlformats.org/officeDocument/2006/relationships">
   <p:cSld>
     <p:spTree>
@@ -15078,7 +14245,7 @@
                 </a:solidFill>
                 <a:latin typeface="Calibri"/>
               </a:rPr>
-              <a:t>22</a:t>
+              <a:t>20</a:t>
             </a:r>
           </a:p>
         </p:txBody>
@@ -15141,7 +14308,7 @@
         </p:nvGraphicFramePr>
         <p:xfrm>
           <a:off x="502920" y="1691640"/>
-          <a:ext cx="11185853" cy="2400300"/>
+          <a:ext cx="11185853" cy="3114675"/>
         </p:xfrm>
         <a:graphic>
           <a:graphicData uri="http://schemas.openxmlformats.org/drawingml/2006/table">
@@ -15154,14 +14321,14 @@
                 <a:gridCol w="3050687"/>
                 <a:gridCol w="5084479"/>
               </a:tblGrid>
-              <a:tr h="266700">
+              <a:tr h="346075">
                 <a:tc>
                   <a:txBody>
                     <a:bodyPr/>
                     <a:lstStyle/>
                     <a:p>
                       <a:r>
-                        <a:rPr sz="1200" b="1">
+                        <a:rPr sz="1700" b="1">
                           <a:solidFill>
                             <a:srgbClr val="FFFFFF"/>
                           </a:solidFill>
@@ -15183,7 +14350,7 @@
                     <a:lstStyle/>
                     <a:p>
                       <a:r>
-                        <a:rPr sz="1200" b="1">
+                        <a:rPr sz="1700" b="1">
                           <a:solidFill>
                             <a:srgbClr val="FFFFFF"/>
                           </a:solidFill>
@@ -15205,7 +14372,7 @@
                     <a:lstStyle/>
                     <a:p>
                       <a:r>
-                        <a:rPr sz="1200" b="1">
+                        <a:rPr sz="1700" b="1">
                           <a:solidFill>
                             <a:srgbClr val="FFFFFF"/>
                           </a:solidFill>
@@ -15222,14 +14389,14 @@
                   </a:tcPr>
                 </a:tc>
               </a:tr>
-              <a:tr h="266700">
+              <a:tr h="346075">
                 <a:tc>
                   <a:txBody>
                     <a:bodyPr/>
                     <a:lstStyle/>
                     <a:p>
                       <a:r>
-                        <a:rPr sz="1200">
+                        <a:rPr sz="1700">
                           <a:solidFill>
                             <a:srgbClr val="222222"/>
                           </a:solidFill>
@@ -15251,7 +14418,7 @@
                     <a:lstStyle/>
                     <a:p>
                       <a:r>
-                        <a:rPr sz="1200">
+                        <a:rPr sz="1700">
                           <a:solidFill>
                             <a:srgbClr val="222222"/>
                           </a:solidFill>
@@ -15273,7 +14440,7 @@
                     <a:lstStyle/>
                     <a:p>
                       <a:r>
-                        <a:rPr sz="1200">
+                        <a:rPr sz="1700">
                           <a:solidFill>
                             <a:srgbClr val="222222"/>
                           </a:solidFill>
@@ -15290,14 +14457,14 @@
                   </a:tcPr>
                 </a:tc>
               </a:tr>
-              <a:tr h="266700">
+              <a:tr h="346075">
                 <a:tc>
                   <a:txBody>
                     <a:bodyPr/>
                     <a:lstStyle/>
                     <a:p>
                       <a:r>
-                        <a:rPr sz="1200">
+                        <a:rPr sz="1700">
                           <a:solidFill>
                             <a:srgbClr val="222222"/>
                           </a:solidFill>
@@ -15319,7 +14486,7 @@
                     <a:lstStyle/>
                     <a:p>
                       <a:r>
-                        <a:rPr sz="1200">
+                        <a:rPr sz="1700">
                           <a:solidFill>
                             <a:srgbClr val="222222"/>
                           </a:solidFill>
@@ -15341,7 +14508,7 @@
                     <a:lstStyle/>
                     <a:p>
                       <a:r>
-                        <a:rPr sz="1200">
+                        <a:rPr sz="1700">
                           <a:solidFill>
                             <a:srgbClr val="222222"/>
                           </a:solidFill>
@@ -15358,14 +14525,14 @@
                   </a:tcPr>
                 </a:tc>
               </a:tr>
-              <a:tr h="266700">
+              <a:tr h="346075">
                 <a:tc>
                   <a:txBody>
                     <a:bodyPr/>
                     <a:lstStyle/>
                     <a:p>
                       <a:r>
-                        <a:rPr sz="1200">
+                        <a:rPr sz="1700">
                           <a:solidFill>
                             <a:srgbClr val="222222"/>
                           </a:solidFill>
@@ -15387,7 +14554,7 @@
                     <a:lstStyle/>
                     <a:p>
                       <a:r>
-                        <a:rPr sz="1200">
+                        <a:rPr sz="1700">
                           <a:solidFill>
                             <a:srgbClr val="222222"/>
                           </a:solidFill>
@@ -15409,7 +14576,7 @@
                     <a:lstStyle/>
                     <a:p>
                       <a:r>
-                        <a:rPr sz="1200">
+                        <a:rPr sz="1700">
                           <a:solidFill>
                             <a:srgbClr val="222222"/>
                           </a:solidFill>
@@ -15426,14 +14593,14 @@
                   </a:tcPr>
                 </a:tc>
               </a:tr>
-              <a:tr h="266700">
+              <a:tr h="346075">
                 <a:tc>
                   <a:txBody>
                     <a:bodyPr/>
                     <a:lstStyle/>
                     <a:p>
                       <a:r>
-                        <a:rPr sz="1200">
+                        <a:rPr sz="1700">
                           <a:solidFill>
                             <a:srgbClr val="222222"/>
                           </a:solidFill>
@@ -15455,7 +14622,7 @@
                     <a:lstStyle/>
                     <a:p>
                       <a:r>
-                        <a:rPr sz="1200">
+                        <a:rPr sz="1700">
                           <a:solidFill>
                             <a:srgbClr val="222222"/>
                           </a:solidFill>
@@ -15477,7 +14644,7 @@
                     <a:lstStyle/>
                     <a:p>
                       <a:r>
-                        <a:rPr sz="1200">
+                        <a:rPr sz="1700">
                           <a:solidFill>
                             <a:srgbClr val="222222"/>
                           </a:solidFill>
@@ -15494,14 +14661,14 @@
                   </a:tcPr>
                 </a:tc>
               </a:tr>
-              <a:tr h="266700">
+              <a:tr h="346075">
                 <a:tc>
                   <a:txBody>
                     <a:bodyPr/>
                     <a:lstStyle/>
                     <a:p>
                       <a:r>
-                        <a:rPr sz="1200">
+                        <a:rPr sz="1700">
                           <a:solidFill>
                             <a:srgbClr val="222222"/>
                           </a:solidFill>
@@ -15523,7 +14690,7 @@
                     <a:lstStyle/>
                     <a:p>
                       <a:r>
-                        <a:rPr sz="1200">
+                        <a:rPr sz="1700">
                           <a:solidFill>
                             <a:srgbClr val="222222"/>
                           </a:solidFill>
@@ -15545,7 +14712,7 @@
                     <a:lstStyle/>
                     <a:p>
                       <a:r>
-                        <a:rPr sz="1200">
+                        <a:rPr sz="1700">
                           <a:solidFill>
                             <a:srgbClr val="222222"/>
                           </a:solidFill>
@@ -15562,14 +14729,14 @@
                   </a:tcPr>
                 </a:tc>
               </a:tr>
-              <a:tr h="266700">
+              <a:tr h="346075">
                 <a:tc>
                   <a:txBody>
                     <a:bodyPr/>
                     <a:lstStyle/>
                     <a:p>
                       <a:r>
-                        <a:rPr sz="1200">
+                        <a:rPr sz="1700">
                           <a:solidFill>
                             <a:srgbClr val="222222"/>
                           </a:solidFill>
@@ -15591,7 +14758,7 @@
                     <a:lstStyle/>
                     <a:p>
                       <a:r>
-                        <a:rPr sz="1200">
+                        <a:rPr sz="1700">
                           <a:solidFill>
                             <a:srgbClr val="222222"/>
                           </a:solidFill>
@@ -15613,7 +14780,7 @@
                     <a:lstStyle/>
                     <a:p>
                       <a:r>
-                        <a:rPr sz="1200">
+                        <a:rPr sz="1700">
                           <a:solidFill>
                             <a:srgbClr val="222222"/>
                           </a:solidFill>
@@ -15630,14 +14797,14 @@
                   </a:tcPr>
                 </a:tc>
               </a:tr>
-              <a:tr h="266700">
+              <a:tr h="346075">
                 <a:tc>
                   <a:txBody>
                     <a:bodyPr/>
                     <a:lstStyle/>
                     <a:p>
                       <a:r>
-                        <a:rPr sz="1200">
+                        <a:rPr sz="1700">
                           <a:solidFill>
                             <a:srgbClr val="222222"/>
                           </a:solidFill>
@@ -15659,7 +14826,7 @@
                     <a:lstStyle/>
                     <a:p>
                       <a:r>
-                        <a:rPr sz="1200">
+                        <a:rPr sz="1700">
                           <a:solidFill>
                             <a:srgbClr val="222222"/>
                           </a:solidFill>
@@ -15681,7 +14848,7 @@
                     <a:lstStyle/>
                     <a:p>
                       <a:r>
-                        <a:rPr sz="1200">
+                        <a:rPr sz="1700">
                           <a:solidFill>
                             <a:srgbClr val="222222"/>
                           </a:solidFill>
@@ -15698,14 +14865,14 @@
                   </a:tcPr>
                 </a:tc>
               </a:tr>
-              <a:tr h="266700">
+              <a:tr h="346075">
                 <a:tc>
                   <a:txBody>
                     <a:bodyPr/>
                     <a:lstStyle/>
                     <a:p>
                       <a:r>
-                        <a:rPr sz="1200">
+                        <a:rPr sz="1700">
                           <a:solidFill>
                             <a:srgbClr val="222222"/>
                           </a:solidFill>
@@ -15727,7 +14894,7 @@
                     <a:lstStyle/>
                     <a:p>
                       <a:r>
-                        <a:rPr sz="1200">
+                        <a:rPr sz="1700">
                           <a:solidFill>
                             <a:srgbClr val="222222"/>
                           </a:solidFill>
@@ -15749,7 +14916,7 @@
                     <a:lstStyle/>
                     <a:p>
                       <a:r>
-                        <a:rPr sz="1200">
+                        <a:rPr sz="1700">
                           <a:solidFill>
                             <a:srgbClr val="222222"/>
                           </a:solidFill>
@@ -15844,7 +15011,7 @@
 </p:sld>
 </file>
 
-<file path=ppt/slides/slide24.xml><?xml version="1.0" encoding="utf-8"?>
+<file path=ppt/slides/slide22.xml><?xml version="1.0" encoding="utf-8"?>
 <p:sld xmlns:a="http://schemas.openxmlformats.org/drawingml/2006/main" xmlns:p="http://schemas.openxmlformats.org/presentationml/2006/main" xmlns:r="http://schemas.openxmlformats.org/officeDocument/2006/relationships">
   <p:cSld>
     <p:spTree>
@@ -16035,7 +15202,7 @@
                 </a:solidFill>
                 <a:latin typeface="Calibri"/>
               </a:rPr>
-              <a:t>23</a:t>
+              <a:t>21</a:t>
             </a:r>
           </a:p>
         </p:txBody>
@@ -16115,17 +15282,17 @@
                 <a:spcPct val="100000"/>
               </a:lnSpc>
               <a:spcAft>
-                <a:spcPts val="900"/>
-              </a:spcAft>
-              <a:defRPr sz="1800" b="0">
-                <a:solidFill>
-                  <a:srgbClr val="222222"/>
-                </a:solidFill>
-                <a:latin typeface="Calibri"/>
-              </a:defRPr>
-            </a:pPr>
-            <a:r>
-              <a:rPr sz="1800" b="0">
+                <a:spcPts val="600"/>
+              </a:spcAft>
+              <a:defRPr sz="2200" b="0">
+                <a:solidFill>
+                  <a:srgbClr val="222222"/>
+                </a:solidFill>
+                <a:latin typeface="Calibri"/>
+              </a:defRPr>
+            </a:pPr>
+            <a:r>
+              <a:rPr sz="2200" b="0">
                 <a:solidFill>
                   <a:srgbClr val="222222"/>
                 </a:solidFill>
@@ -16140,9 +15307,9 @@
                 <a:spcPct val="100000"/>
               </a:lnSpc>
               <a:spcAft>
-                <a:spcPts val="900"/>
-              </a:spcAft>
-              <a:defRPr sz="1800" b="0">
+                <a:spcPts val="600"/>
+              </a:spcAft>
+              <a:defRPr sz="2200" b="0">
                 <a:solidFill>
                   <a:srgbClr val="222222"/>
                 </a:solidFill>
@@ -16156,17 +15323,17 @@
                 <a:spcPct val="100000"/>
               </a:lnSpc>
               <a:spcAft>
-                <a:spcPts val="900"/>
-              </a:spcAft>
-              <a:defRPr sz="1800" b="0">
-                <a:solidFill>
-                  <a:srgbClr val="222222"/>
-                </a:solidFill>
-                <a:latin typeface="Calibri"/>
-              </a:defRPr>
-            </a:pPr>
-            <a:r>
-              <a:rPr sz="1800" b="0">
+                <a:spcPts val="600"/>
+              </a:spcAft>
+              <a:defRPr sz="2200" b="0">
+                <a:solidFill>
+                  <a:srgbClr val="222222"/>
+                </a:solidFill>
+                <a:latin typeface="Calibri"/>
+              </a:defRPr>
+            </a:pPr>
+            <a:r>
+              <a:rPr sz="2200" b="0">
                 <a:solidFill>
                   <a:srgbClr val="222222"/>
                 </a:solidFill>
@@ -16181,17 +15348,17 @@
                 <a:spcPct val="100000"/>
               </a:lnSpc>
               <a:spcAft>
-                <a:spcPts val="900"/>
-              </a:spcAft>
-              <a:defRPr sz="1800" b="0">
-                <a:solidFill>
-                  <a:srgbClr val="222222"/>
-                </a:solidFill>
-                <a:latin typeface="Calibri"/>
-              </a:defRPr>
-            </a:pPr>
-            <a:r>
-              <a:rPr sz="1800" b="0">
+                <a:spcPts val="600"/>
+              </a:spcAft>
+              <a:defRPr sz="2200" b="0">
+                <a:solidFill>
+                  <a:srgbClr val="222222"/>
+                </a:solidFill>
+                <a:latin typeface="Calibri"/>
+              </a:defRPr>
+            </a:pPr>
+            <a:r>
+              <a:rPr sz="2200" b="0">
                 <a:solidFill>
                   <a:srgbClr val="222222"/>
                 </a:solidFill>
@@ -16206,17 +15373,17 @@
                 <a:spcPct val="100000"/>
               </a:lnSpc>
               <a:spcAft>
-                <a:spcPts val="900"/>
-              </a:spcAft>
-              <a:defRPr sz="1800" b="0">
-                <a:solidFill>
-                  <a:srgbClr val="222222"/>
-                </a:solidFill>
-                <a:latin typeface="Calibri"/>
-              </a:defRPr>
-            </a:pPr>
-            <a:r>
-              <a:rPr sz="1800" b="0">
+                <a:spcPts val="600"/>
+              </a:spcAft>
+              <a:defRPr sz="2200" b="0">
+                <a:solidFill>
+                  <a:srgbClr val="222222"/>
+                </a:solidFill>
+                <a:latin typeface="Calibri"/>
+              </a:defRPr>
+            </a:pPr>
+            <a:r>
+              <a:rPr sz="2200" b="0">
                 <a:solidFill>
                   <a:srgbClr val="222222"/>
                 </a:solidFill>
@@ -16231,17 +15398,17 @@
                 <a:spcPct val="100000"/>
               </a:lnSpc>
               <a:spcAft>
-                <a:spcPts val="900"/>
-              </a:spcAft>
-              <a:defRPr sz="1800" b="0">
-                <a:solidFill>
-                  <a:srgbClr val="222222"/>
-                </a:solidFill>
-                <a:latin typeface="Calibri"/>
-              </a:defRPr>
-            </a:pPr>
-            <a:r>
-              <a:rPr sz="1800" b="0">
+                <a:spcPts val="600"/>
+              </a:spcAft>
+              <a:defRPr sz="2200" b="0">
+                <a:solidFill>
+                  <a:srgbClr val="222222"/>
+                </a:solidFill>
+                <a:latin typeface="Calibri"/>
+              </a:defRPr>
+            </a:pPr>
+            <a:r>
+              <a:rPr sz="2200" b="0">
                 <a:solidFill>
                   <a:srgbClr val="222222"/>
                 </a:solidFill>
@@ -16256,17 +15423,17 @@
                 <a:spcPct val="100000"/>
               </a:lnSpc>
               <a:spcAft>
-                <a:spcPts val="900"/>
-              </a:spcAft>
-              <a:defRPr sz="1800" b="0">
-                <a:solidFill>
-                  <a:srgbClr val="222222"/>
-                </a:solidFill>
-                <a:latin typeface="Calibri"/>
-              </a:defRPr>
-            </a:pPr>
-            <a:r>
-              <a:rPr sz="1800" b="0">
+                <a:spcPts val="600"/>
+              </a:spcAft>
+              <a:defRPr sz="2200" b="0">
+                <a:solidFill>
+                  <a:srgbClr val="222222"/>
+                </a:solidFill>
+                <a:latin typeface="Calibri"/>
+              </a:defRPr>
+            </a:pPr>
+            <a:r>
+              <a:rPr sz="2200" b="0">
                 <a:solidFill>
                   <a:srgbClr val="222222"/>
                 </a:solidFill>
@@ -16281,17 +15448,17 @@
                 <a:spcPct val="100000"/>
               </a:lnSpc>
               <a:spcAft>
-                <a:spcPts val="900"/>
-              </a:spcAft>
-              <a:defRPr sz="1800" b="0">
-                <a:solidFill>
-                  <a:srgbClr val="222222"/>
-                </a:solidFill>
-                <a:latin typeface="Calibri"/>
-              </a:defRPr>
-            </a:pPr>
-            <a:r>
-              <a:rPr sz="1800" b="0">
+                <a:spcPts val="600"/>
+              </a:spcAft>
+              <a:defRPr sz="2200" b="0">
+                <a:solidFill>
+                  <a:srgbClr val="222222"/>
+                </a:solidFill>
+                <a:latin typeface="Calibri"/>
+              </a:defRPr>
+            </a:pPr>
+            <a:r>
+              <a:rPr sz="2200" b="0">
                 <a:solidFill>
                   <a:srgbClr val="222222"/>
                 </a:solidFill>
@@ -16310,7 +15477,7 @@
 </p:sld>
 </file>
 
-<file path=ppt/slides/slide25.xml><?xml version="1.0" encoding="utf-8"?>
+<file path=ppt/slides/slide23.xml><?xml version="1.0" encoding="utf-8"?>
 <p:sld xmlns:a="http://schemas.openxmlformats.org/drawingml/2006/main" xmlns:p="http://schemas.openxmlformats.org/presentationml/2006/main" xmlns:r="http://schemas.openxmlformats.org/officeDocument/2006/relationships">
   <p:cSld>
     <p:spTree>
@@ -16501,7 +15668,7 @@
                 </a:solidFill>
                 <a:latin typeface="Calibri"/>
               </a:rPr>
-              <a:t>24</a:t>
+              <a:t>22</a:t>
             </a:r>
           </a:p>
         </p:txBody>
@@ -16535,7 +15702,7 @@
               <a:spcAft>
                 <a:spcPts val="900"/>
               </a:spcAft>
-              <a:defRPr sz="1800" b="0">
+              <a:defRPr sz="3000" b="0">
                 <a:solidFill>
                   <a:srgbClr val="222222"/>
                 </a:solidFill>
@@ -16551,15 +15718,15 @@
               <a:spcAft>
                 <a:spcPts val="900"/>
               </a:spcAft>
-              <a:defRPr sz="1800" b="0">
-                <a:solidFill>
-                  <a:srgbClr val="222222"/>
-                </a:solidFill>
-                <a:latin typeface="Calibri"/>
-              </a:defRPr>
-            </a:pPr>
-            <a:r>
-              <a:rPr sz="1800" b="0">
+              <a:defRPr sz="3000" b="0">
+                <a:solidFill>
+                  <a:srgbClr val="222222"/>
+                </a:solidFill>
+                <a:latin typeface="Calibri"/>
+              </a:defRPr>
+            </a:pPr>
+            <a:r>
+              <a:rPr sz="3000" b="0">
                 <a:solidFill>
                   <a:srgbClr val="222222"/>
                 </a:solidFill>
@@ -16576,7 +15743,7 @@
               <a:spcAft>
                 <a:spcPts val="900"/>
               </a:spcAft>
-              <a:defRPr sz="1800" b="0">
+              <a:defRPr sz="3000" b="0">
                 <a:solidFill>
                   <a:srgbClr val="222222"/>
                 </a:solidFill>
@@ -16592,15 +15759,15 @@
               <a:spcAft>
                 <a:spcPts val="900"/>
               </a:spcAft>
-              <a:defRPr sz="1800" b="0">
-                <a:solidFill>
-                  <a:srgbClr val="222222"/>
-                </a:solidFill>
-                <a:latin typeface="Calibri"/>
-              </a:defRPr>
-            </a:pPr>
-            <a:r>
-              <a:rPr sz="1800" b="0">
+              <a:defRPr sz="3000" b="0">
+                <a:solidFill>
+                  <a:srgbClr val="222222"/>
+                </a:solidFill>
+                <a:latin typeface="Calibri"/>
+              </a:defRPr>
+            </a:pPr>
+            <a:r>
+              <a:rPr sz="3000" b="0">
                 <a:solidFill>
                   <a:srgbClr val="222222"/>
                 </a:solidFill>
@@ -16619,7 +15786,7 @@
 </p:sld>
 </file>
 
-<file path=ppt/slides/slide26.xml><?xml version="1.0" encoding="utf-8"?>
+<file path=ppt/slides/slide24.xml><?xml version="1.0" encoding="utf-8"?>
 <p:sld xmlns:a="http://schemas.openxmlformats.org/drawingml/2006/main" xmlns:p="http://schemas.openxmlformats.org/presentationml/2006/main" xmlns:r="http://schemas.openxmlformats.org/officeDocument/2006/relationships">
   <p:cSld>
     <p:spTree>
@@ -16810,7 +15977,7 @@
                 </a:solidFill>
                 <a:latin typeface="Calibri"/>
               </a:rPr>
-              <a:t>25</a:t>
+              <a:t>23</a:t>
             </a:r>
           </a:p>
         </p:txBody>
@@ -16890,17 +16057,17 @@
                 <a:spcPct val="100000"/>
               </a:lnSpc>
               <a:spcAft>
-                <a:spcPts val="1000"/>
-              </a:spcAft>
-              <a:defRPr sz="1800" b="0">
-                <a:solidFill>
-                  <a:srgbClr val="222222"/>
-                </a:solidFill>
-                <a:latin typeface="Calibri"/>
-              </a:defRPr>
-            </a:pPr>
-            <a:r>
-              <a:rPr sz="1800" b="0">
+                <a:spcPts val="1100"/>
+              </a:spcAft>
+              <a:defRPr sz="2300" b="0">
+                <a:solidFill>
+                  <a:srgbClr val="222222"/>
+                </a:solidFill>
+                <a:latin typeface="Calibri"/>
+              </a:defRPr>
+            </a:pPr>
+            <a:r>
+              <a:rPr sz="2300" b="0">
                 <a:solidFill>
                   <a:srgbClr val="222222"/>
                 </a:solidFill>
@@ -16915,17 +16082,17 @@
                 <a:spcPct val="100000"/>
               </a:lnSpc>
               <a:spcAft>
-                <a:spcPts val="1000"/>
-              </a:spcAft>
-              <a:defRPr sz="1800" b="0">
-                <a:solidFill>
-                  <a:srgbClr val="222222"/>
-                </a:solidFill>
-                <a:latin typeface="Calibri"/>
-              </a:defRPr>
-            </a:pPr>
-            <a:r>
-              <a:rPr sz="1800" b="0">
+                <a:spcPts val="1100"/>
+              </a:spcAft>
+              <a:defRPr sz="2300" b="0">
+                <a:solidFill>
+                  <a:srgbClr val="222222"/>
+                </a:solidFill>
+                <a:latin typeface="Calibri"/>
+              </a:defRPr>
+            </a:pPr>
+            <a:r>
+              <a:rPr sz="2300" b="0">
                 <a:solidFill>
                   <a:srgbClr val="222222"/>
                 </a:solidFill>
@@ -16940,17 +16107,17 @@
                 <a:spcPct val="100000"/>
               </a:lnSpc>
               <a:spcAft>
-                <a:spcPts val="1000"/>
-              </a:spcAft>
-              <a:defRPr sz="1800" b="0">
-                <a:solidFill>
-                  <a:srgbClr val="222222"/>
-                </a:solidFill>
-                <a:latin typeface="Calibri"/>
-              </a:defRPr>
-            </a:pPr>
-            <a:r>
-              <a:rPr sz="1800" b="0">
+                <a:spcPts val="1100"/>
+              </a:spcAft>
+              <a:defRPr sz="2300" b="0">
+                <a:solidFill>
+                  <a:srgbClr val="222222"/>
+                </a:solidFill>
+                <a:latin typeface="Calibri"/>
+              </a:defRPr>
+            </a:pPr>
+            <a:r>
+              <a:rPr sz="2300" b="0">
                 <a:solidFill>
                   <a:srgbClr val="222222"/>
                 </a:solidFill>
@@ -16965,17 +16132,17 @@
                 <a:spcPct val="100000"/>
               </a:lnSpc>
               <a:spcAft>
-                <a:spcPts val="1000"/>
-              </a:spcAft>
-              <a:defRPr sz="1800" b="0">
-                <a:solidFill>
-                  <a:srgbClr val="222222"/>
-                </a:solidFill>
-                <a:latin typeface="Calibri"/>
-              </a:defRPr>
-            </a:pPr>
-            <a:r>
-              <a:rPr sz="1800" b="0">
+                <a:spcPts val="1100"/>
+              </a:spcAft>
+              <a:defRPr sz="2300" b="0">
+                <a:solidFill>
+                  <a:srgbClr val="222222"/>
+                </a:solidFill>
+                <a:latin typeface="Calibri"/>
+              </a:defRPr>
+            </a:pPr>
+            <a:r>
+              <a:rPr sz="2300" b="0">
                 <a:solidFill>
                   <a:srgbClr val="222222"/>
                 </a:solidFill>
@@ -16990,17 +16157,17 @@
                 <a:spcPct val="100000"/>
               </a:lnSpc>
               <a:spcAft>
-                <a:spcPts val="1000"/>
-              </a:spcAft>
-              <a:defRPr sz="1800" b="0">
-                <a:solidFill>
-                  <a:srgbClr val="222222"/>
-                </a:solidFill>
-                <a:latin typeface="Calibri"/>
-              </a:defRPr>
-            </a:pPr>
-            <a:r>
-              <a:rPr sz="1800" b="0">
+                <a:spcPts val="1100"/>
+              </a:spcAft>
+              <a:defRPr sz="2300" b="0">
+                <a:solidFill>
+                  <a:srgbClr val="222222"/>
+                </a:solidFill>
+                <a:latin typeface="Calibri"/>
+              </a:defRPr>
+            </a:pPr>
+            <a:r>
+              <a:rPr sz="2300" b="0">
                 <a:solidFill>
                   <a:srgbClr val="222222"/>
                 </a:solidFill>
@@ -17015,17 +16182,17 @@
                 <a:spcPct val="100000"/>
               </a:lnSpc>
               <a:spcAft>
-                <a:spcPts val="1000"/>
-              </a:spcAft>
-              <a:defRPr sz="1800" b="0">
-                <a:solidFill>
-                  <a:srgbClr val="222222"/>
-                </a:solidFill>
-                <a:latin typeface="Calibri"/>
-              </a:defRPr>
-            </a:pPr>
-            <a:r>
-              <a:rPr sz="1800" b="0">
+                <a:spcPts val="1100"/>
+              </a:spcAft>
+              <a:defRPr sz="2300" b="0">
+                <a:solidFill>
+                  <a:srgbClr val="222222"/>
+                </a:solidFill>
+                <a:latin typeface="Calibri"/>
+              </a:defRPr>
+            </a:pPr>
+            <a:r>
+              <a:rPr sz="2300" b="0">
                 <a:solidFill>
                   <a:srgbClr val="222222"/>
                 </a:solidFill>
@@ -17040,17 +16207,17 @@
                 <a:spcPct val="100000"/>
               </a:lnSpc>
               <a:spcAft>
-                <a:spcPts val="1000"/>
-              </a:spcAft>
-              <a:defRPr sz="1800" b="0">
-                <a:solidFill>
-                  <a:srgbClr val="222222"/>
-                </a:solidFill>
-                <a:latin typeface="Calibri"/>
-              </a:defRPr>
-            </a:pPr>
-            <a:r>
-              <a:rPr sz="1800" b="0">
+                <a:spcPts val="1100"/>
+              </a:spcAft>
+              <a:defRPr sz="2300" b="0">
+                <a:solidFill>
+                  <a:srgbClr val="222222"/>
+                </a:solidFill>
+                <a:latin typeface="Calibri"/>
+              </a:defRPr>
+            </a:pPr>
+            <a:r>
+              <a:rPr sz="2300" b="0">
                 <a:solidFill>
                   <a:srgbClr val="222222"/>
                 </a:solidFill>
@@ -17274,7 +16441,7 @@
         <p:spPr>
           <a:xfrm>
             <a:off x="502920" y="1188720"/>
-            <a:ext cx="11185855" cy="5074920"/>
+            <a:ext cx="11185855" cy="3986784"/>
           </a:xfrm>
           <a:prstGeom prst="rect">
             <a:avLst/>
@@ -17292,7 +16459,7 @@
                 <a:spcPct val="100000"/>
               </a:lnSpc>
               <a:spcAft>
-                <a:spcPts val="900"/>
+                <a:spcPts val="600"/>
               </a:spcAft>
               <a:defRPr sz="1800" b="0">
                 <a:solidFill>
@@ -17317,7 +16484,7 @@
                 <a:spcPct val="100000"/>
               </a:lnSpc>
               <a:spcAft>
-                <a:spcPts val="900"/>
+                <a:spcPts val="600"/>
               </a:spcAft>
               <a:defRPr sz="1800" b="0">
                 <a:solidFill>
@@ -17333,7 +16500,7 @@
                 <a:spcPct val="100000"/>
               </a:lnSpc>
               <a:spcAft>
-                <a:spcPts val="900"/>
+                <a:spcPts val="600"/>
               </a:spcAft>
               <a:defRPr sz="1800" b="0">
                 <a:solidFill>
@@ -17352,240 +16519,54 @@
               <a:t>This course is NOT more features. The vehicle does the same things it did on the beginner programs.</a:t>
             </a:r>
           </a:p>
-        </p:txBody>
-      </p:sp>
-    </p:spTree>
-  </p:cSld>
-  <p:clrMapOvr>
-    <a:masterClrMapping/>
-  </p:clrMapOvr>
-</p:sld>
-</file>
-
-<file path=ppt/slides/slide4.xml><?xml version="1.0" encoding="utf-8"?>
-<p:sld xmlns:a="http://schemas.openxmlformats.org/drawingml/2006/main" xmlns:p="http://schemas.openxmlformats.org/presentationml/2006/main" xmlns:r="http://schemas.openxmlformats.org/officeDocument/2006/relationships">
-  <p:cSld>
-    <p:spTree>
-      <p:nvGrpSpPr>
-        <p:cNvPr id="1" name=""/>
-        <p:cNvGrpSpPr/>
-        <p:nvPr/>
-      </p:nvGrpSpPr>
-      <p:grpSpPr/>
-      <p:sp>
-        <p:nvSpPr>
-          <p:cNvPr id="2" name="Title 1"/>
-          <p:cNvSpPr>
-            <a:spLocks noGrp="1"/>
-          </p:cNvSpPr>
-          <p:nvPr>
-            <p:ph type="title"/>
-          </p:nvPr>
-        </p:nvSpPr>
-        <p:spPr>
-          <a:xfrm>
-            <a:off x="502920" y="274320"/>
-            <a:ext cx="11185855" cy="777240"/>
-          </a:xfrm>
-        </p:spPr>
-        <p:txBody>
-          <a:bodyPr wrap="square" anchor="b"/>
-          <a:lstStyle/>
           <a:p>
             <a:pPr algn="l">
               <a:lnSpc>
                 <a:spcPct val="100000"/>
               </a:lnSpc>
               <a:spcAft>
-                <a:spcPts val="0"/>
-              </a:spcAft>
-              <a:defRPr sz="2800" b="1">
-                <a:solidFill>
-                  <a:srgbClr val="1F3A5F"/>
-                </a:solidFill>
-                <a:latin typeface="Calibri"/>
-              </a:defRPr>
-            </a:pPr>
-            <a:r>
-              <a:rPr sz="2800" b="1">
-                <a:solidFill>
-                  <a:srgbClr val="1F3A5F"/>
-                </a:solidFill>
-                <a:latin typeface="Calibri"/>
-              </a:rPr>
-              <a:t>Who this course is for, and what it is not  (continued)</a:t>
-            </a:r>
-          </a:p>
-        </p:txBody>
-      </p:sp>
-      <p:sp>
-        <p:nvSpPr>
-          <p:cNvPr id="3" name="Rectangle 2"/>
-          <p:cNvSpPr/>
-          <p:nvPr/>
-        </p:nvSpPr>
-        <p:spPr>
-          <a:xfrm>
-            <a:off x="502920" y="1097280"/>
-            <a:ext cx="11185855" cy="19050"/>
-          </a:xfrm>
-          <a:prstGeom prst="rect">
-            <a:avLst/>
-          </a:prstGeom>
-          <a:solidFill>
-            <a:srgbClr val="C8D2DE"/>
-          </a:solidFill>
-          <a:ln>
-            <a:noFill/>
-          </a:ln>
-          <a:effectLst/>
-        </p:spPr>
-        <p:style>
-          <a:lnRef idx="1">
-            <a:schemeClr val="accent1"/>
-          </a:lnRef>
-          <a:fillRef idx="3">
-            <a:schemeClr val="accent1"/>
-          </a:fillRef>
-          <a:effectRef idx="2">
-            <a:schemeClr val="accent1"/>
-          </a:effectRef>
-          <a:fontRef idx="minor">
-            <a:schemeClr val="lt1"/>
-          </a:fontRef>
-        </p:style>
-        <p:txBody>
-          <a:bodyPr rtlCol="0" anchor="ctr"/>
-          <a:lstStyle/>
-          <a:p>
-            <a:pPr algn="ctr"/>
-          </a:p>
-        </p:txBody>
-      </p:sp>
-      <p:sp>
-        <p:nvSpPr>
-          <p:cNvPr id="4" name="TextBox 3"/>
-          <p:cNvSpPr txBox="1"/>
-          <p:nvPr/>
-        </p:nvSpPr>
-        <p:spPr>
-          <a:xfrm>
-            <a:off x="502920" y="6382512"/>
-            <a:ext cx="10545775" cy="274320"/>
-          </a:xfrm>
-          <a:prstGeom prst="rect">
-            <a:avLst/>
-          </a:prstGeom>
-          <a:noFill/>
-        </p:spPr>
-        <p:txBody>
-          <a:bodyPr wrap="square" lIns="0" tIns="0">
-            <a:spAutoFit/>
-          </a:bodyPr>
-          <a:lstStyle/>
+                <a:spcPts val="600"/>
+              </a:spcAft>
+              <a:defRPr sz="1800" b="0">
+                <a:solidFill>
+                  <a:srgbClr val="222222"/>
+                </a:solidFill>
+                <a:latin typeface="Calibri"/>
+              </a:defRPr>
+            </a:pPr>
+          </a:p>
           <a:p>
             <a:pPr algn="l">
               <a:lnSpc>
                 <a:spcPct val="100000"/>
               </a:lnSpc>
               <a:spcAft>
-                <a:spcPts val="0"/>
-              </a:spcAft>
-              <a:defRPr sz="1000" b="0">
-                <a:solidFill>
-                  <a:srgbClr val="666666"/>
-                </a:solidFill>
-                <a:latin typeface="Calibri"/>
-              </a:defRPr>
-            </a:pPr>
-            <a:r>
-              <a:rPr sz="1000" b="0">
-                <a:solidFill>
-                  <a:srgbClr val="666666"/>
-                </a:solidFill>
-                <a:latin typeface="Calibri"/>
-              </a:rPr>
-              <a:t>Pathfinder Advanced - Op Program 12  |  Lesson 1</a:t>
-            </a:r>
-          </a:p>
-        </p:txBody>
-      </p:sp>
-      <p:sp>
-        <p:nvSpPr>
-          <p:cNvPr id="5" name="TextBox 4"/>
-          <p:cNvSpPr txBox="1"/>
-          <p:nvPr/>
-        </p:nvSpPr>
-        <p:spPr>
-          <a:xfrm>
-            <a:off x="11231575" y="6382512"/>
-            <a:ext cx="457200" cy="274320"/>
-          </a:xfrm>
-          <a:prstGeom prst="rect">
-            <a:avLst/>
-          </a:prstGeom>
-          <a:noFill/>
-        </p:spPr>
-        <p:txBody>
-          <a:bodyPr wrap="square" lIns="0" tIns="0">
-            <a:spAutoFit/>
-          </a:bodyPr>
-          <a:lstStyle/>
-          <a:p>
-            <a:pPr algn="r">
-              <a:lnSpc>
-                <a:spcPct val="100000"/>
-              </a:lnSpc>
-              <a:spcAft>
-                <a:spcPts val="0"/>
-              </a:spcAft>
-              <a:defRPr sz="1000" b="0">
-                <a:solidFill>
-                  <a:srgbClr val="666666"/>
-                </a:solidFill>
-                <a:latin typeface="Calibri"/>
-              </a:defRPr>
-            </a:pPr>
-            <a:r>
-              <a:rPr sz="1000" b="0">
-                <a:solidFill>
-                  <a:srgbClr val="666666"/>
-                </a:solidFill>
-                <a:latin typeface="Calibri"/>
-              </a:rPr>
-              <a:t>3</a:t>
-            </a:r>
-          </a:p>
-        </p:txBody>
-      </p:sp>
-      <p:sp>
-        <p:nvSpPr>
-          <p:cNvPr id="6" name="TextBox 5"/>
-          <p:cNvSpPr txBox="1"/>
-          <p:nvPr/>
-        </p:nvSpPr>
-        <p:spPr>
-          <a:xfrm>
-            <a:off x="502920" y="1188720"/>
-            <a:ext cx="11185855" cy="4023360"/>
-          </a:xfrm>
-          <a:prstGeom prst="rect">
-            <a:avLst/>
-          </a:prstGeom>
-          <a:noFill/>
-        </p:spPr>
-        <p:txBody>
-          <a:bodyPr wrap="square" lIns="0" tIns="0" rIns="0" bIns="0">
-            <a:spAutoFit/>
-          </a:bodyPr>
-          <a:lstStyle/>
+                <a:spcPts val="600"/>
+              </a:spcAft>
+              <a:defRPr sz="1800" b="0">
+                <a:solidFill>
+                  <a:srgbClr val="222222"/>
+                </a:solidFill>
+                <a:latin typeface="Calibri"/>
+              </a:defRPr>
+            </a:pPr>
+            <a:r>
+              <a:rPr sz="1800" b="0">
+                <a:solidFill>
+                  <a:srgbClr val="222222"/>
+                </a:solidFill>
+                <a:latin typeface="Calibri"/>
+              </a:rPr>
+              <a:t>It is about how the program is BUILT: how you split 1300 lines so that somebody else can find things in it, how you make animations that never block the motors, how you store settings that survive a power cycle, and how you make a machine test its own hardware.</a:t>
+            </a:r>
+          </a:p>
           <a:p>
             <a:pPr algn="l">
               <a:lnSpc>
                 <a:spcPct val="100000"/>
               </a:lnSpc>
               <a:spcAft>
-                <a:spcPts val="900"/>
+                <a:spcPts val="600"/>
               </a:spcAft>
               <a:defRPr sz="1800" b="0">
                 <a:solidFill>
@@ -17594,15 +16575,6 @@
                 <a:latin typeface="Calibri"/>
               </a:defRPr>
             </a:pPr>
-            <a:r>
-              <a:rPr sz="1800" b="0">
-                <a:solidFill>
-                  <a:srgbClr val="222222"/>
-                </a:solidFill>
-                <a:latin typeface="Calibri"/>
-              </a:rPr>
-              <a:t>It is about how the program is BUILT: how you split 1300 lines so that somebody else can find things in it, how you make animations that never block the motors, how you store settings that survive a power cycle, and how you make a machine test its own hardware.</a:t>
-            </a:r>
           </a:p>
           <a:p>
             <a:pPr algn="l">
@@ -17610,23 +16582,7 @@
                 <a:spcPct val="100000"/>
               </a:lnSpc>
               <a:spcAft>
-                <a:spcPts val="900"/>
-              </a:spcAft>
-              <a:defRPr sz="1800" b="0">
-                <a:solidFill>
-                  <a:srgbClr val="222222"/>
-                </a:solidFill>
-                <a:latin typeface="Calibri"/>
-              </a:defRPr>
-            </a:pPr>
-          </a:p>
-          <a:p>
-            <a:pPr algn="l">
-              <a:lnSpc>
-                <a:spcPct val="100000"/>
-              </a:lnSpc>
-              <a:spcAft>
-                <a:spcPts val="900"/>
+                <a:spcPts val="600"/>
               </a:spcAft>
               <a:defRPr sz="1800" b="0">
                 <a:solidFill>
@@ -17721,7 +16677,7 @@
 </p:sld>
 </file>
 
-<file path=ppt/slides/slide5.xml><?xml version="1.0" encoding="utf-8"?>
+<file path=ppt/slides/slide4.xml><?xml version="1.0" encoding="utf-8"?>
 <p:sld xmlns:a="http://schemas.openxmlformats.org/drawingml/2006/main" xmlns:p="http://schemas.openxmlformats.org/presentationml/2006/main" xmlns:r="http://schemas.openxmlformats.org/officeDocument/2006/relationships">
   <p:cSld>
     <p:spTree>
@@ -17912,7 +16868,7 @@
                 </a:solidFill>
                 <a:latin typeface="Calibri"/>
               </a:rPr>
-              <a:t>4</a:t>
+              <a:t>3</a:t>
             </a:r>
           </a:p>
         </p:txBody>
@@ -17927,7 +16883,7 @@
         </p:nvGraphicFramePr>
         <p:xfrm>
           <a:off x="502920" y="1188720"/>
-          <a:ext cx="11185854" cy="1790700"/>
+          <a:ext cx="11185854" cy="5029200"/>
         </p:xfrm>
         <a:graphic>
           <a:graphicData uri="http://schemas.openxmlformats.org/drawingml/2006/table">
@@ -17940,14 +16896,14 @@
                 <a:gridCol w="4372652"/>
                 <a:gridCol w="5897996"/>
               </a:tblGrid>
-              <a:tr h="298450">
+              <a:tr h="838200">
                 <a:tc>
                   <a:txBody>
                     <a:bodyPr/>
                     <a:lstStyle/>
                     <a:p>
                       <a:r>
-                        <a:rPr sz="1400" b="1">
+                        <a:rPr sz="2400" b="1">
                           <a:solidFill>
                             <a:srgbClr val="FFFFFF"/>
                           </a:solidFill>
@@ -17969,7 +16925,7 @@
                     <a:lstStyle/>
                     <a:p>
                       <a:r>
-                        <a:rPr sz="1400" b="1">
+                        <a:rPr sz="2400" b="1">
                           <a:solidFill>
                             <a:srgbClr val="FFFFFF"/>
                           </a:solidFill>
@@ -17991,7 +16947,7 @@
                     <a:lstStyle/>
                     <a:p>
                       <a:r>
-                        <a:rPr sz="1400" b="1">
+                        <a:rPr sz="2400" b="1">
                           <a:solidFill>
                             <a:srgbClr val="FFFFFF"/>
                           </a:solidFill>
@@ -18008,14 +16964,14 @@
                   </a:tcPr>
                 </a:tc>
               </a:tr>
-              <a:tr h="298450">
+              <a:tr h="838200">
                 <a:tc>
                   <a:txBody>
                     <a:bodyPr/>
                     <a:lstStyle/>
                     <a:p>
                       <a:r>
-                        <a:rPr sz="1400">
+                        <a:rPr sz="2400">
                           <a:solidFill>
                             <a:srgbClr val="222222"/>
                           </a:solidFill>
@@ -18037,7 +16993,7 @@
                     <a:lstStyle/>
                     <a:p>
                       <a:r>
-                        <a:rPr sz="1400">
+                        <a:rPr sz="2400">
                           <a:solidFill>
                             <a:srgbClr val="222222"/>
                           </a:solidFill>
@@ -18059,7 +17015,7 @@
                     <a:lstStyle/>
                     <a:p>
                       <a:r>
-                        <a:rPr sz="1400">
+                        <a:rPr sz="2400">
                           <a:solidFill>
                             <a:srgbClr val="222222"/>
                           </a:solidFill>
@@ -18076,14 +17032,14 @@
                   </a:tcPr>
                 </a:tc>
               </a:tr>
-              <a:tr h="298450">
+              <a:tr h="838200">
                 <a:tc>
                   <a:txBody>
                     <a:bodyPr/>
                     <a:lstStyle/>
                     <a:p>
                       <a:r>
-                        <a:rPr sz="1400">
+                        <a:rPr sz="2400">
                           <a:solidFill>
                             <a:srgbClr val="222222"/>
                           </a:solidFill>
@@ -18105,7 +17061,7 @@
                     <a:lstStyle/>
                     <a:p>
                       <a:r>
-                        <a:rPr sz="1400">
+                        <a:rPr sz="2400">
                           <a:solidFill>
                             <a:srgbClr val="222222"/>
                           </a:solidFill>
@@ -18127,7 +17083,7 @@
                     <a:lstStyle/>
                     <a:p>
                       <a:r>
-                        <a:rPr sz="1400">
+                        <a:rPr sz="2400">
                           <a:solidFill>
                             <a:srgbClr val="222222"/>
                           </a:solidFill>
@@ -18144,14 +17100,14 @@
                   </a:tcPr>
                 </a:tc>
               </a:tr>
-              <a:tr h="298450">
+              <a:tr h="838200">
                 <a:tc>
                   <a:txBody>
                     <a:bodyPr/>
                     <a:lstStyle/>
                     <a:p>
                       <a:r>
-                        <a:rPr sz="1400">
+                        <a:rPr sz="2400">
                           <a:solidFill>
                             <a:srgbClr val="222222"/>
                           </a:solidFill>
@@ -18173,7 +17129,7 @@
                     <a:lstStyle/>
                     <a:p>
                       <a:r>
-                        <a:rPr sz="1400">
+                        <a:rPr sz="2400">
                           <a:solidFill>
                             <a:srgbClr val="222222"/>
                           </a:solidFill>
@@ -18195,7 +17151,7 @@
                     <a:lstStyle/>
                     <a:p>
                       <a:r>
-                        <a:rPr sz="1400">
+                        <a:rPr sz="2400">
                           <a:solidFill>
                             <a:srgbClr val="222222"/>
                           </a:solidFill>
@@ -18212,14 +17168,14 @@
                   </a:tcPr>
                 </a:tc>
               </a:tr>
-              <a:tr h="298450">
+              <a:tr h="838200">
                 <a:tc>
                   <a:txBody>
                     <a:bodyPr/>
                     <a:lstStyle/>
                     <a:p>
                       <a:r>
-                        <a:rPr sz="1400">
+                        <a:rPr sz="2400">
                           <a:solidFill>
                             <a:srgbClr val="222222"/>
                           </a:solidFill>
@@ -18241,7 +17197,7 @@
                     <a:lstStyle/>
                     <a:p>
                       <a:r>
-                        <a:rPr sz="1400">
+                        <a:rPr sz="2400">
                           <a:solidFill>
                             <a:srgbClr val="222222"/>
                           </a:solidFill>
@@ -18263,7 +17219,7 @@
                     <a:lstStyle/>
                     <a:p>
                       <a:r>
-                        <a:rPr sz="1400">
+                        <a:rPr sz="2400">
                           <a:solidFill>
                             <a:srgbClr val="222222"/>
                           </a:solidFill>
@@ -18280,14 +17236,14 @@
                   </a:tcPr>
                 </a:tc>
               </a:tr>
-              <a:tr h="298450">
+              <a:tr h="838200">
                 <a:tc>
                   <a:txBody>
                     <a:bodyPr/>
                     <a:lstStyle/>
                     <a:p>
                       <a:r>
-                        <a:rPr sz="1400">
+                        <a:rPr sz="2400">
                           <a:solidFill>
                             <a:srgbClr val="222222"/>
                           </a:solidFill>
@@ -18309,7 +17265,7 @@
                     <a:lstStyle/>
                     <a:p>
                       <a:r>
-                        <a:rPr sz="1400">
+                        <a:rPr sz="2400">
                           <a:solidFill>
                             <a:srgbClr val="222222"/>
                           </a:solidFill>
@@ -18331,13 +17287,703 @@
                     <a:lstStyle/>
                     <a:p>
                       <a:r>
-                        <a:rPr sz="1400">
+                        <a:rPr sz="2400">
                           <a:solidFill>
                             <a:srgbClr val="222222"/>
                           </a:solidFill>
                           <a:latin typeface="Calibri"/>
                         </a:rPr>
                         <a:t>A machine that can check itself</a:t>
+                      </a:r>
+                    </a:p>
+                  </a:txBody>
+                  <a:tcPr marL="73152" marT="18288" marB="18288">
+                    <a:solidFill>
+                      <a:srgbClr val="FFFFFF"/>
+                    </a:solidFill>
+                  </a:tcPr>
+                </a:tc>
+              </a:tr>
+            </a:tbl>
+          </a:graphicData>
+        </a:graphic>
+      </p:graphicFrame>
+    </p:spTree>
+  </p:cSld>
+  <p:clrMapOvr>
+    <a:masterClrMapping/>
+  </p:clrMapOvr>
+</p:sld>
+</file>
+
+<file path=ppt/slides/slide5.xml><?xml version="1.0" encoding="utf-8"?>
+<p:sld xmlns:a="http://schemas.openxmlformats.org/drawingml/2006/main" xmlns:p="http://schemas.openxmlformats.org/presentationml/2006/main" xmlns:r="http://schemas.openxmlformats.org/officeDocument/2006/relationships">
+  <p:cSld>
+    <p:spTree>
+      <p:nvGrpSpPr>
+        <p:cNvPr id="1" name=""/>
+        <p:cNvGrpSpPr/>
+        <p:nvPr/>
+      </p:nvGrpSpPr>
+      <p:grpSpPr/>
+      <p:sp>
+        <p:nvSpPr>
+          <p:cNvPr id="2" name="Title 1"/>
+          <p:cNvSpPr>
+            <a:spLocks noGrp="1"/>
+          </p:cNvSpPr>
+          <p:nvPr>
+            <p:ph type="title"/>
+          </p:nvPr>
+        </p:nvSpPr>
+        <p:spPr>
+          <a:xfrm>
+            <a:off x="502920" y="274320"/>
+            <a:ext cx="11185855" cy="777240"/>
+          </a:xfrm>
+        </p:spPr>
+        <p:txBody>
+          <a:bodyPr wrap="square" anchor="b"/>
+          <a:lstStyle/>
+          <a:p>
+            <a:pPr algn="l">
+              <a:lnSpc>
+                <a:spcPct val="100000"/>
+              </a:lnSpc>
+              <a:spcAft>
+                <a:spcPts val="0"/>
+              </a:spcAft>
+              <a:defRPr sz="2800" b="1">
+                <a:solidFill>
+                  <a:srgbClr val="1F3A5F"/>
+                </a:solidFill>
+                <a:latin typeface="Calibri"/>
+              </a:defRPr>
+            </a:pPr>
+            <a:r>
+              <a:rPr sz="2800" b="1">
+                <a:solidFill>
+                  <a:srgbClr val="1F3A5F"/>
+                </a:solidFill>
+                <a:latin typeface="Calibri"/>
+              </a:rPr>
+              <a:t>Today, in order</a:t>
+            </a:r>
+          </a:p>
+        </p:txBody>
+      </p:sp>
+      <p:sp>
+        <p:nvSpPr>
+          <p:cNvPr id="3" name="Rectangle 2"/>
+          <p:cNvSpPr/>
+          <p:nvPr/>
+        </p:nvSpPr>
+        <p:spPr>
+          <a:xfrm>
+            <a:off x="502920" y="1097280"/>
+            <a:ext cx="11185855" cy="19050"/>
+          </a:xfrm>
+          <a:prstGeom prst="rect">
+            <a:avLst/>
+          </a:prstGeom>
+          <a:solidFill>
+            <a:srgbClr val="C8D2DE"/>
+          </a:solidFill>
+          <a:ln>
+            <a:noFill/>
+          </a:ln>
+          <a:effectLst/>
+        </p:spPr>
+        <p:style>
+          <a:lnRef idx="1">
+            <a:schemeClr val="accent1"/>
+          </a:lnRef>
+          <a:fillRef idx="3">
+            <a:schemeClr val="accent1"/>
+          </a:fillRef>
+          <a:effectRef idx="2">
+            <a:schemeClr val="accent1"/>
+          </a:effectRef>
+          <a:fontRef idx="minor">
+            <a:schemeClr val="lt1"/>
+          </a:fontRef>
+        </p:style>
+        <p:txBody>
+          <a:bodyPr rtlCol="0" anchor="ctr"/>
+          <a:lstStyle/>
+          <a:p>
+            <a:pPr algn="ctr"/>
+          </a:p>
+        </p:txBody>
+      </p:sp>
+      <p:sp>
+        <p:nvSpPr>
+          <p:cNvPr id="4" name="TextBox 3"/>
+          <p:cNvSpPr txBox="1"/>
+          <p:nvPr/>
+        </p:nvSpPr>
+        <p:spPr>
+          <a:xfrm>
+            <a:off x="502920" y="6382512"/>
+            <a:ext cx="10545775" cy="274320"/>
+          </a:xfrm>
+          <a:prstGeom prst="rect">
+            <a:avLst/>
+          </a:prstGeom>
+          <a:noFill/>
+        </p:spPr>
+        <p:txBody>
+          <a:bodyPr wrap="square" lIns="0" tIns="0">
+            <a:spAutoFit/>
+          </a:bodyPr>
+          <a:lstStyle/>
+          <a:p>
+            <a:pPr algn="l">
+              <a:lnSpc>
+                <a:spcPct val="100000"/>
+              </a:lnSpc>
+              <a:spcAft>
+                <a:spcPts val="0"/>
+              </a:spcAft>
+              <a:defRPr sz="1000" b="0">
+                <a:solidFill>
+                  <a:srgbClr val="666666"/>
+                </a:solidFill>
+                <a:latin typeface="Calibri"/>
+              </a:defRPr>
+            </a:pPr>
+            <a:r>
+              <a:rPr sz="1000" b="0">
+                <a:solidFill>
+                  <a:srgbClr val="666666"/>
+                </a:solidFill>
+                <a:latin typeface="Calibri"/>
+              </a:rPr>
+              <a:t>Pathfinder Advanced - Op Program 12  |  Lesson 1</a:t>
+            </a:r>
+          </a:p>
+        </p:txBody>
+      </p:sp>
+      <p:sp>
+        <p:nvSpPr>
+          <p:cNvPr id="5" name="TextBox 4"/>
+          <p:cNvSpPr txBox="1"/>
+          <p:nvPr/>
+        </p:nvSpPr>
+        <p:spPr>
+          <a:xfrm>
+            <a:off x="11231575" y="6382512"/>
+            <a:ext cx="457200" cy="274320"/>
+          </a:xfrm>
+          <a:prstGeom prst="rect">
+            <a:avLst/>
+          </a:prstGeom>
+          <a:noFill/>
+        </p:spPr>
+        <p:txBody>
+          <a:bodyPr wrap="square" lIns="0" tIns="0">
+            <a:spAutoFit/>
+          </a:bodyPr>
+          <a:lstStyle/>
+          <a:p>
+            <a:pPr algn="r">
+              <a:lnSpc>
+                <a:spcPct val="100000"/>
+              </a:lnSpc>
+              <a:spcAft>
+                <a:spcPts val="0"/>
+              </a:spcAft>
+              <a:defRPr sz="1000" b="0">
+                <a:solidFill>
+                  <a:srgbClr val="666666"/>
+                </a:solidFill>
+                <a:latin typeface="Calibri"/>
+              </a:defRPr>
+            </a:pPr>
+            <a:r>
+              <a:rPr sz="1000" b="0">
+                <a:solidFill>
+                  <a:srgbClr val="666666"/>
+                </a:solidFill>
+                <a:latin typeface="Calibri"/>
+              </a:rPr>
+              <a:t>4</a:t>
+            </a:r>
+          </a:p>
+        </p:txBody>
+      </p:sp>
+      <p:graphicFrame>
+        <p:nvGraphicFramePr>
+          <p:cNvPr id="6" name="Table 5"/>
+          <p:cNvGraphicFramePr>
+            <a:graphicFrameLocks noGrp="1"/>
+          </p:cNvGraphicFramePr>
+          <p:nvPr/>
+        </p:nvGraphicFramePr>
+        <p:xfrm>
+          <a:off x="502920" y="1188720"/>
+          <a:ext cx="11185854" cy="4968875"/>
+        </p:xfrm>
+        <a:graphic>
+          <a:graphicData uri="http://schemas.openxmlformats.org/drawingml/2006/table">
+            <a:tbl>
+              <a:tblPr firstRow="1" bandRow="1">
+                <a:tableStyleId>{5C22544A-7EE6-4342-B048-85BDC9FD1C3A}</a:tableStyleId>
+              </a:tblPr>
+              <a:tblGrid>
+                <a:gridCol w="1118585"/>
+                <a:gridCol w="10067269"/>
+              </a:tblGrid>
+              <a:tr h="496887">
+                <a:tc>
+                  <a:txBody>
+                    <a:bodyPr/>
+                    <a:lstStyle/>
+                    <a:p>
+                      <a:r>
+                        <a:rPr sz="2650" b="1">
+                          <a:solidFill>
+                            <a:srgbClr val="FFFFFF"/>
+                          </a:solidFill>
+                          <a:latin typeface="Calibri"/>
+                        </a:rPr>
+                        <a:t>Time</a:t>
+                      </a:r>
+                    </a:p>
+                  </a:txBody>
+                  <a:tcPr marL="73152" marT="18288" marB="18288">
+                    <a:solidFill>
+                      <a:srgbClr val="1F3A5F"/>
+                    </a:solidFill>
+                  </a:tcPr>
+                </a:tc>
+                <a:tc>
+                  <a:txBody>
+                    <a:bodyPr/>
+                    <a:lstStyle/>
+                    <a:p>
+                      <a:r>
+                        <a:rPr sz="2650" b="1">
+                          <a:solidFill>
+                            <a:srgbClr val="FFFFFF"/>
+                          </a:solidFill>
+                          <a:latin typeface="Calibri"/>
+                        </a:rPr>
+                        <a:t>What we do</a:t>
+                      </a:r>
+                    </a:p>
+                  </a:txBody>
+                  <a:tcPr marL="73152" marT="18288" marB="18288">
+                    <a:solidFill>
+                      <a:srgbClr val="1F3A5F"/>
+                    </a:solidFill>
+                  </a:tcPr>
+                </a:tc>
+              </a:tr>
+              <a:tr h="496887">
+                <a:tc>
+                  <a:txBody>
+                    <a:bodyPr/>
+                    <a:lstStyle/>
+                    <a:p>
+                      <a:r>
+                        <a:rPr sz="2650">
+                          <a:solidFill>
+                            <a:srgbClr val="222222"/>
+                          </a:solidFill>
+                          <a:latin typeface="Calibri"/>
+                        </a:rPr>
+                        <a:t>0:00</a:t>
+                      </a:r>
+                    </a:p>
+                  </a:txBody>
+                  <a:tcPr marL="73152" marT="18288" marB="18288">
+                    <a:solidFill>
+                      <a:srgbClr val="FFFFFF"/>
+                    </a:solidFill>
+                  </a:tcPr>
+                </a:tc>
+                <a:tc>
+                  <a:txBody>
+                    <a:bodyPr/>
+                    <a:lstStyle/>
+                    <a:p>
+                      <a:r>
+                        <a:rPr sz="2650">
+                          <a:solidFill>
+                            <a:srgbClr val="222222"/>
+                          </a:solidFill>
+                          <a:latin typeface="Calibri"/>
+                        </a:rPr>
+                        <a:t>What changed from Op 11.2, and why</a:t>
+                      </a:r>
+                    </a:p>
+                  </a:txBody>
+                  <a:tcPr marL="73152" marT="18288" marB="18288">
+                    <a:solidFill>
+                      <a:srgbClr val="FFFFFF"/>
+                    </a:solidFill>
+                  </a:tcPr>
+                </a:tc>
+              </a:tr>
+              <a:tr h="496887">
+                <a:tc>
+                  <a:txBody>
+                    <a:bodyPr/>
+                    <a:lstStyle/>
+                    <a:p>
+                      <a:r>
+                        <a:rPr sz="2650">
+                          <a:solidFill>
+                            <a:srgbClr val="222222"/>
+                          </a:solidFill>
+                          <a:latin typeface="Calibri"/>
+                        </a:rPr>
+                        <a:t>0:30</a:t>
+                      </a:r>
+                    </a:p>
+                  </a:txBody>
+                  <a:tcPr marL="73152" marT="18288" marB="18288">
+                    <a:solidFill>
+                      <a:srgbClr val="EEF3F8"/>
+                    </a:solidFill>
+                  </a:tcPr>
+                </a:tc>
+                <a:tc>
+                  <a:txBody>
+                    <a:bodyPr/>
+                    <a:lstStyle/>
+                    <a:p>
+                      <a:r>
+                        <a:rPr sz="2650">
+                          <a:solidFill>
+                            <a:srgbClr val="222222"/>
+                          </a:solidFill>
+                          <a:latin typeface="Calibri"/>
+                        </a:rPr>
+                        <a:t>One binary, two vehicles: capability flags</a:t>
+                      </a:r>
+                    </a:p>
+                  </a:txBody>
+                  <a:tcPr marL="73152" marT="18288" marB="18288">
+                    <a:solidFill>
+                      <a:srgbClr val="EEF3F8"/>
+                    </a:solidFill>
+                  </a:tcPr>
+                </a:tc>
+              </a:tr>
+              <a:tr h="496887">
+                <a:tc>
+                  <a:txBody>
+                    <a:bodyPr/>
+                    <a:lstStyle/>
+                    <a:p>
+                      <a:r>
+                        <a:rPr sz="2650">
+                          <a:solidFill>
+                            <a:srgbClr val="222222"/>
+                          </a:solidFill>
+                          <a:latin typeface="Calibri"/>
+                        </a:rPr>
+                        <a:t>0:50</a:t>
+                      </a:r>
+                    </a:p>
+                  </a:txBody>
+                  <a:tcPr marL="73152" marT="18288" marB="18288">
+                    <a:solidFill>
+                      <a:srgbClr val="FFFFFF"/>
+                    </a:solidFill>
+                  </a:tcPr>
+                </a:tc>
+                <a:tc>
+                  <a:txBody>
+                    <a:bodyPr/>
+                    <a:lstStyle/>
+                    <a:p>
+                      <a:r>
+                        <a:rPr sz="2650">
+                          <a:solidFill>
+                            <a:srgbClr val="222222"/>
+                          </a:solidFill>
+                          <a:latin typeface="Calibri"/>
+                        </a:rPr>
+                        <a:t>How Arduino tabs really work, and why Config.h is a header</a:t>
+                      </a:r>
+                    </a:p>
+                  </a:txBody>
+                  <a:tcPr marL="73152" marT="18288" marB="18288">
+                    <a:solidFill>
+                      <a:srgbClr val="FFFFFF"/>
+                    </a:solidFill>
+                  </a:tcPr>
+                </a:tc>
+              </a:tr>
+              <a:tr h="496887">
+                <a:tc>
+                  <a:txBody>
+                    <a:bodyPr/>
+                    <a:lstStyle/>
+                    <a:p>
+                      <a:r>
+                        <a:rPr sz="2650">
+                          <a:solidFill>
+                            <a:srgbClr val="222222"/>
+                          </a:solidFill>
+                          <a:latin typeface="Calibri"/>
+                        </a:rPr>
+                        <a:t>1:15</a:t>
+                      </a:r>
+                    </a:p>
+                  </a:txBody>
+                  <a:tcPr marL="73152" marT="18288" marB="18288">
+                    <a:solidFill>
+                      <a:srgbClr val="EEF3F8"/>
+                    </a:solidFill>
+                  </a:tcPr>
+                </a:tc>
+                <a:tc>
+                  <a:txBody>
+                    <a:bodyPr/>
+                    <a:lstStyle/>
+                    <a:p>
+                      <a:r>
+                        <a:rPr sz="2650">
+                          <a:solidFill>
+                            <a:srgbClr val="222222"/>
+                          </a:solidFill>
+                          <a:latin typeface="Calibri"/>
+                        </a:rPr>
+                        <a:t>BREAK  (10 minutes)</a:t>
+                      </a:r>
+                    </a:p>
+                  </a:txBody>
+                  <a:tcPr marL="73152" marT="18288" marB="18288">
+                    <a:solidFill>
+                      <a:srgbClr val="EEF3F8"/>
+                    </a:solidFill>
+                  </a:tcPr>
+                </a:tc>
+              </a:tr>
+              <a:tr h="496887">
+                <a:tc>
+                  <a:txBody>
+                    <a:bodyPr/>
+                    <a:lstStyle/>
+                    <a:p>
+                      <a:r>
+                        <a:rPr sz="2650">
+                          <a:solidFill>
+                            <a:srgbClr val="222222"/>
+                          </a:solidFill>
+                          <a:latin typeface="Calibri"/>
+                        </a:rPr>
+                        <a:t>1:25</a:t>
+                      </a:r>
+                    </a:p>
+                  </a:txBody>
+                  <a:tcPr marL="73152" marT="18288" marB="18288">
+                    <a:solidFill>
+                      <a:srgbClr val="FFFFFF"/>
+                    </a:solidFill>
+                  </a:tcPr>
+                </a:tc>
+                <a:tc>
+                  <a:txBody>
+                    <a:bodyPr/>
+                    <a:lstStyle/>
+                    <a:p>
+                      <a:r>
+                        <a:rPr sz="2650">
+                          <a:solidFill>
+                            <a:srgbClr val="222222"/>
+                          </a:solidFill>
+                          <a:latin typeface="Calibri"/>
+                        </a:rPr>
+                        <a:t>Upload a1a_tabs_and_config. Break it on purpose</a:t>
+                      </a:r>
+                    </a:p>
+                  </a:txBody>
+                  <a:tcPr marL="73152" marT="18288" marB="18288">
+                    <a:solidFill>
+                      <a:srgbClr val="FFFFFF"/>
+                    </a:solidFill>
+                  </a:tcPr>
+                </a:tc>
+              </a:tr>
+              <a:tr h="496887">
+                <a:tc>
+                  <a:txBody>
+                    <a:bodyPr/>
+                    <a:lstStyle/>
+                    <a:p>
+                      <a:r>
+                        <a:rPr sz="2650">
+                          <a:solidFill>
+                            <a:srgbClr val="222222"/>
+                          </a:solidFill>
+                          <a:latin typeface="Calibri"/>
+                        </a:rPr>
+                        <a:t>1:55</a:t>
+                      </a:r>
+                    </a:p>
+                  </a:txBody>
+                  <a:tcPr marL="73152" marT="18288" marB="18288">
+                    <a:solidFill>
+                      <a:srgbClr val="EEF3F8"/>
+                    </a:solidFill>
+                  </a:tcPr>
+                </a:tc>
+                <a:tc>
+                  <a:txBody>
+                    <a:bodyPr/>
+                    <a:lstStyle/>
+                    <a:p>
+                      <a:r>
+                        <a:rPr sz="2650">
+                          <a:solidFill>
+                            <a:srgbClr val="222222"/>
+                          </a:solidFill>
+                          <a:latin typeface="Calibri"/>
+                        </a:rPr>
+                        <a:t>A serial console: reading without blocking, and parsing</a:t>
+                      </a:r>
+                    </a:p>
+                  </a:txBody>
+                  <a:tcPr marL="73152" marT="18288" marB="18288">
+                    <a:solidFill>
+                      <a:srgbClr val="EEF3F8"/>
+                    </a:solidFill>
+                  </a:tcPr>
+                </a:tc>
+              </a:tr>
+              <a:tr h="496887">
+                <a:tc>
+                  <a:txBody>
+                    <a:bodyPr/>
+                    <a:lstStyle/>
+                    <a:p>
+                      <a:r>
+                        <a:rPr sz="2650">
+                          <a:solidFill>
+                            <a:srgbClr val="222222"/>
+                          </a:solidFill>
+                          <a:latin typeface="Calibri"/>
+                        </a:rPr>
+                        <a:t>2:15</a:t>
+                      </a:r>
+                    </a:p>
+                  </a:txBody>
+                  <a:tcPr marL="73152" marT="18288" marB="18288">
+                    <a:solidFill>
+                      <a:srgbClr val="FFFFFF"/>
+                    </a:solidFill>
+                  </a:tcPr>
+                </a:tc>
+                <a:tc>
+                  <a:txBody>
+                    <a:bodyPr/>
+                    <a:lstStyle/>
+                    <a:p>
+                      <a:r>
+                        <a:rPr sz="2650">
+                          <a:solidFill>
+                            <a:srgbClr val="222222"/>
+                          </a:solidFill>
+                          <a:latin typeface="Calibri"/>
+                        </a:rPr>
+                        <a:t>BREAK  (10 minutes)</a:t>
+                      </a:r>
+                    </a:p>
+                  </a:txBody>
+                  <a:tcPr marL="73152" marT="18288" marB="18288">
+                    <a:solidFill>
+                      <a:srgbClr val="FFFFFF"/>
+                    </a:solidFill>
+                  </a:tcPr>
+                </a:tc>
+              </a:tr>
+              <a:tr h="496887">
+                <a:tc>
+                  <a:txBody>
+                    <a:bodyPr/>
+                    <a:lstStyle/>
+                    <a:p>
+                      <a:r>
+                        <a:rPr sz="2650">
+                          <a:solidFill>
+                            <a:srgbClr val="222222"/>
+                          </a:solidFill>
+                          <a:latin typeface="Calibri"/>
+                        </a:rPr>
+                        <a:t>2:25</a:t>
+                      </a:r>
+                    </a:p>
+                  </a:txBody>
+                  <a:tcPr marL="73152" marT="18288" marB="18288">
+                    <a:solidFill>
+                      <a:srgbClr val="EEF3F8"/>
+                    </a:solidFill>
+                  </a:tcPr>
+                </a:tc>
+                <a:tc>
+                  <a:txBody>
+                    <a:bodyPr/>
+                    <a:lstStyle/>
+                    <a:p>
+                      <a:r>
+                        <a:rPr sz="2650">
+                          <a:solidFill>
+                            <a:srgbClr val="222222"/>
+                          </a:solidFill>
+                          <a:latin typeface="Calibri"/>
+                        </a:rPr>
+                        <a:t>Upload a1b_serial_console</a:t>
+                      </a:r>
+                    </a:p>
+                  </a:txBody>
+                  <a:tcPr marL="73152" marT="18288" marB="18288">
+                    <a:solidFill>
+                      <a:srgbClr val="EEF3F8"/>
+                    </a:solidFill>
+                  </a:tcPr>
+                </a:tc>
+              </a:tr>
+              <a:tr h="496892">
+                <a:tc>
+                  <a:txBody>
+                    <a:bodyPr/>
+                    <a:lstStyle/>
+                    <a:p>
+                      <a:r>
+                        <a:rPr sz="2650">
+                          <a:solidFill>
+                            <a:srgbClr val="222222"/>
+                          </a:solidFill>
+                          <a:latin typeface="Calibri"/>
+                        </a:rPr>
+                        <a:t>2:45</a:t>
+                      </a:r>
+                    </a:p>
+                  </a:txBody>
+                  <a:tcPr marL="73152" marT="18288" marB="18288">
+                    <a:solidFill>
+                      <a:srgbClr val="FFFFFF"/>
+                    </a:solidFill>
+                  </a:tcPr>
+                </a:tc>
+                <a:tc>
+                  <a:txBody>
+                    <a:bodyPr/>
+                    <a:lstStyle/>
+                    <a:p>
+                      <a:r>
+                        <a:rPr sz="2650">
+                          <a:solidFill>
+                            <a:srgbClr val="222222"/>
+                          </a:solidFill>
+                          <a:latin typeface="Calibri"/>
+                        </a:rPr>
+                        <a:t>The boot sequence of Op Program 12, line by line</a:t>
                       </a:r>
                     </a:p>
                   </a:txBody>
@@ -18411,7 +18057,7 @@
                 </a:solidFill>
                 <a:latin typeface="Calibri"/>
               </a:rPr>
-              <a:t>Today, in order</a:t>
+              <a:t>Op Program 11.2 to 12  -  what changed</a:t>
             </a:r>
           </a:p>
         </p:txBody>
@@ -18566,7 +18212,7 @@
         </p:nvGraphicFramePr>
         <p:xfrm>
           <a:off x="502920" y="1188720"/>
-          <a:ext cx="11185854" cy="2984500"/>
+          <a:ext cx="11185854" cy="3797300"/>
         </p:xfrm>
         <a:graphic>
           <a:graphicData uri="http://schemas.openxmlformats.org/drawingml/2006/table">
@@ -18575,10 +18221,10 @@
                 <a:tableStyleId>{5C22544A-7EE6-4342-B048-85BDC9FD1C3A}</a:tableStyleId>
               </a:tblPr>
               <a:tblGrid>
-                <a:gridCol w="1118585"/>
-                <a:gridCol w="10067269"/>
+                <a:gridCol w="3660825"/>
+                <a:gridCol w="7525029"/>
               </a:tblGrid>
-              <a:tr h="298450">
+              <a:tr h="421922">
                 <a:tc>
                   <a:txBody>
                     <a:bodyPr/>
@@ -18591,7 +18237,7 @@
                           </a:solidFill>
                           <a:latin typeface="Calibri"/>
                         </a:rPr>
-                        <a:t>Time</a:t>
+                        <a:t>Change</a:t>
                       </a:r>
                     </a:p>
                   </a:txBody>
@@ -18613,7 +18259,7 @@
                           </a:solidFill>
                           <a:latin typeface="Calibri"/>
                         </a:rPr>
-                        <a:t>What we do</a:t>
+                        <a:t>Why</a:t>
                       </a:r>
                     </a:p>
                   </a:txBody>
@@ -18624,7 +18270,7 @@
                   </a:tcPr>
                 </a:tc>
               </a:tr>
-              <a:tr h="298450">
+              <a:tr h="421922">
                 <a:tc>
                   <a:txBody>
                     <a:bodyPr/>
@@ -18637,7 +18283,7 @@
                           </a:solidFill>
                           <a:latin typeface="Calibri"/>
                         </a:rPr>
-                        <a:t>0:00</a:t>
+                        <a:t>FastLED replaced with Adafruit NeoPixel</a:t>
                       </a:r>
                     </a:p>
                   </a:txBody>
@@ -18659,7 +18305,7 @@
                           </a:solidFill>
                           <a:latin typeface="Calibri"/>
                         </a:rPr>
-                        <a:t>What changed from Op 11.2, and why</a:t>
+                        <a:t>FastLED 3.10.5 auto-enables an ESP-DSP FFT backend that does not build against the bluepad32 4.1.0 SDK. 11.2 stopped compiling.</a:t>
                       </a:r>
                     </a:p>
                   </a:txBody>
@@ -18670,7 +18316,7 @@
                   </a:tcPr>
                 </a:tc>
               </a:tr>
-              <a:tr h="298450">
+              <a:tr h="421922">
                 <a:tc>
                   <a:txBody>
                     <a:bodyPr/>
@@ -18683,7 +18329,7 @@
                           </a:solidFill>
                           <a:latin typeface="Calibri"/>
                         </a:rPr>
-                        <a:t>0:30</a:t>
+                        <a:t>Servo travel corrected to 1.0 - 2.0 ms</a:t>
                       </a:r>
                     </a:p>
                   </a:txBody>
@@ -18705,7 +18351,7 @@
                           </a:solidFill>
                           <a:latin typeface="Calibri"/>
                         </a:rPr>
-                        <a:t>One binary, two vehicles: capability flags</a:t>
+                        <a:t>11.2 used 0.5 - 2.5 ms, which can drive a servo into its end stops.</a:t>
                       </a:r>
                     </a:p>
                   </a:txBody>
@@ -18716,7 +18362,7 @@
                   </a:tcPr>
                 </a:tc>
               </a:tr>
-              <a:tr h="298450">
+              <a:tr h="421922">
                 <a:tc>
                   <a:txBody>
                     <a:bodyPr/>
@@ -18729,7 +18375,7 @@
                           </a:solidFill>
                           <a:latin typeface="Calibri"/>
                         </a:rPr>
-                        <a:t>0:50</a:t>
+                        <a:t>Paired address saved to EEPROM</a:t>
                       </a:r>
                     </a:p>
                   </a:txBody>
@@ -18751,7 +18397,7 @@
                           </a:solidFill>
                           <a:latin typeface="Calibri"/>
                         </a:rPr>
-                        <a:t>How Arduino tabs really work, and why Config.h is a header</a:t>
+                        <a:t>11.2 only added to the allowlist at runtime, so a reboot could leave a vehicle refusing its own controller.</a:t>
                       </a:r>
                     </a:p>
                   </a:txBody>
@@ -18762,7 +18408,7 @@
                   </a:tcPr>
                 </a:tc>
               </a:tr>
-              <a:tr h="298450">
+              <a:tr h="421922">
                 <a:tc>
                   <a:txBody>
                     <a:bodyPr/>
@@ -18775,7 +18421,7 @@
                           </a:solidFill>
                           <a:latin typeface="Calibri"/>
                         </a:rPr>
-                        <a:t>1:15</a:t>
+                        <a:t>Addresses print most significant byte first</a:t>
                       </a:r>
                     </a:p>
                   </a:txBody>
@@ -18797,7 +18443,7 @@
                           </a:solidFill>
                           <a:latin typeface="Calibri"/>
                         </a:rPr>
-                        <a:t>BREAK  (10 minutes)</a:t>
+                        <a:t>11.2 printed them backwards, so the address it told you to use was the reverse of the real one.</a:t>
                       </a:r>
                     </a:p>
                   </a:txBody>
@@ -18808,7 +18454,7 @@
                   </a:tcPr>
                 </a:tc>
               </a:tr>
-              <a:tr h="298450">
+              <a:tr h="421922">
                 <a:tc>
                   <a:txBody>
                     <a:bodyPr/>
@@ -18821,7 +18467,7 @@
                           </a:solidFill>
                           <a:latin typeface="Calibri"/>
                         </a:rPr>
-                        <a:t>1:25</a:t>
+                        <a:t>Speed ramping always reaches its target</a:t>
                       </a:r>
                     </a:p>
                   </a:txBody>
@@ -18843,7 +18489,7 @@
                           </a:solidFill>
                           <a:latin typeface="Calibri"/>
                         </a:rPr>
-                        <a:t>Upload a1a_tabs_and_config. Break it on purpose</a:t>
+                        <a:t>Integer truncation stalled the old ramp one count short, forever.</a:t>
                       </a:r>
                     </a:p>
                   </a:txBody>
@@ -18854,7 +18500,7 @@
                   </a:tcPr>
                 </a:tc>
               </a:tr>
-              <a:tr h="298450">
+              <a:tr h="421922">
                 <a:tc>
                   <a:txBody>
                     <a:bodyPr/>
@@ -18867,7 +18513,7 @@
                           </a:solidFill>
                           <a:latin typeface="Calibri"/>
                         </a:rPr>
-                        <a:t>1:55</a:t>
+                        <a:t>Self-test compares against the measured baseline</a:t>
                       </a:r>
                     </a:p>
                   </a:txBody>
@@ -18889,7 +18535,7 @@
                           </a:solidFill>
                           <a:latin typeface="Calibri"/>
                         </a:rPr>
-                        <a:t>A serial console: reading without blocking, and parsing</a:t>
+                        <a:t>11.2 measured a baseline, printed it, then used fixed absolutes.</a:t>
                       </a:r>
                     </a:p>
                   </a:txBody>
@@ -18900,7 +18546,7 @@
                   </a:tcPr>
                 </a:tc>
               </a:tr>
-              <a:tr h="298450">
+              <a:tr h="421922">
                 <a:tc>
                   <a:txBody>
                     <a:bodyPr/>
@@ -18913,7 +18559,7 @@
                           </a:solidFill>
                           <a:latin typeface="Calibri"/>
                         </a:rPr>
-                        <a:t>2:15</a:t>
+                        <a:t>Standby lighting redrawn only when it changes</a:t>
                       </a:r>
                     </a:p>
                   </a:txBody>
@@ -18935,696 +18581,6 @@
                           </a:solidFill>
                           <a:latin typeface="Calibri"/>
                         </a:rPr>
-                        <a:t>BREAK  (10 minutes)</a:t>
-                      </a:r>
-                    </a:p>
-                  </a:txBody>
-                  <a:tcPr marL="73152" marT="18288" marB="18288">
-                    <a:solidFill>
-                      <a:srgbClr val="FFFFFF"/>
-                    </a:solidFill>
-                  </a:tcPr>
-                </a:tc>
-              </a:tr>
-              <a:tr h="298450">
-                <a:tc>
-                  <a:txBody>
-                    <a:bodyPr/>
-                    <a:lstStyle/>
-                    <a:p>
-                      <a:r>
-                        <a:rPr sz="1400">
-                          <a:solidFill>
-                            <a:srgbClr val="222222"/>
-                          </a:solidFill>
-                          <a:latin typeface="Calibri"/>
-                        </a:rPr>
-                        <a:t>2:25</a:t>
-                      </a:r>
-                    </a:p>
-                  </a:txBody>
-                  <a:tcPr marL="73152" marT="18288" marB="18288">
-                    <a:solidFill>
-                      <a:srgbClr val="EEF3F8"/>
-                    </a:solidFill>
-                  </a:tcPr>
-                </a:tc>
-                <a:tc>
-                  <a:txBody>
-                    <a:bodyPr/>
-                    <a:lstStyle/>
-                    <a:p>
-                      <a:r>
-                        <a:rPr sz="1400">
-                          <a:solidFill>
-                            <a:srgbClr val="222222"/>
-                          </a:solidFill>
-                          <a:latin typeface="Calibri"/>
-                        </a:rPr>
-                        <a:t>Upload a1b_serial_console</a:t>
-                      </a:r>
-                    </a:p>
-                  </a:txBody>
-                  <a:tcPr marL="73152" marT="18288" marB="18288">
-                    <a:solidFill>
-                      <a:srgbClr val="EEF3F8"/>
-                    </a:solidFill>
-                  </a:tcPr>
-                </a:tc>
-              </a:tr>
-              <a:tr h="298450">
-                <a:tc>
-                  <a:txBody>
-                    <a:bodyPr/>
-                    <a:lstStyle/>
-                    <a:p>
-                      <a:r>
-                        <a:rPr sz="1400">
-                          <a:solidFill>
-                            <a:srgbClr val="222222"/>
-                          </a:solidFill>
-                          <a:latin typeface="Calibri"/>
-                        </a:rPr>
-                        <a:t>2:45</a:t>
-                      </a:r>
-                    </a:p>
-                  </a:txBody>
-                  <a:tcPr marL="73152" marT="18288" marB="18288">
-                    <a:solidFill>
-                      <a:srgbClr val="FFFFFF"/>
-                    </a:solidFill>
-                  </a:tcPr>
-                </a:tc>
-                <a:tc>
-                  <a:txBody>
-                    <a:bodyPr/>
-                    <a:lstStyle/>
-                    <a:p>
-                      <a:r>
-                        <a:rPr sz="1400">
-                          <a:solidFill>
-                            <a:srgbClr val="222222"/>
-                          </a:solidFill>
-                          <a:latin typeface="Calibri"/>
-                        </a:rPr>
-                        <a:t>The boot sequence of Op Program 12, line by line</a:t>
-                      </a:r>
-                    </a:p>
-                  </a:txBody>
-                  <a:tcPr marL="73152" marT="18288" marB="18288">
-                    <a:solidFill>
-                      <a:srgbClr val="FFFFFF"/>
-                    </a:solidFill>
-                  </a:tcPr>
-                </a:tc>
-              </a:tr>
-            </a:tbl>
-          </a:graphicData>
-        </a:graphic>
-      </p:graphicFrame>
-    </p:spTree>
-  </p:cSld>
-  <p:clrMapOvr>
-    <a:masterClrMapping/>
-  </p:clrMapOvr>
-</p:sld>
-</file>
-
-<file path=ppt/slides/slide7.xml><?xml version="1.0" encoding="utf-8"?>
-<p:sld xmlns:a="http://schemas.openxmlformats.org/drawingml/2006/main" xmlns:p="http://schemas.openxmlformats.org/presentationml/2006/main" xmlns:r="http://schemas.openxmlformats.org/officeDocument/2006/relationships">
-  <p:cSld>
-    <p:spTree>
-      <p:nvGrpSpPr>
-        <p:cNvPr id="1" name=""/>
-        <p:cNvGrpSpPr/>
-        <p:nvPr/>
-      </p:nvGrpSpPr>
-      <p:grpSpPr/>
-      <p:sp>
-        <p:nvSpPr>
-          <p:cNvPr id="2" name="Title 1"/>
-          <p:cNvSpPr>
-            <a:spLocks noGrp="1"/>
-          </p:cNvSpPr>
-          <p:nvPr>
-            <p:ph type="title"/>
-          </p:nvPr>
-        </p:nvSpPr>
-        <p:spPr>
-          <a:xfrm>
-            <a:off x="502920" y="274320"/>
-            <a:ext cx="11185855" cy="777240"/>
-          </a:xfrm>
-        </p:spPr>
-        <p:txBody>
-          <a:bodyPr wrap="square" anchor="b"/>
-          <a:lstStyle/>
-          <a:p>
-            <a:pPr algn="l">
-              <a:lnSpc>
-                <a:spcPct val="100000"/>
-              </a:lnSpc>
-              <a:spcAft>
-                <a:spcPts val="0"/>
-              </a:spcAft>
-              <a:defRPr sz="2800" b="1">
-                <a:solidFill>
-                  <a:srgbClr val="1F3A5F"/>
-                </a:solidFill>
-                <a:latin typeface="Calibri"/>
-              </a:defRPr>
-            </a:pPr>
-            <a:r>
-              <a:rPr sz="2800" b="1">
-                <a:solidFill>
-                  <a:srgbClr val="1F3A5F"/>
-                </a:solidFill>
-                <a:latin typeface="Calibri"/>
-              </a:rPr>
-              <a:t>Op Program 11.2 to 12  -  what changed</a:t>
-            </a:r>
-          </a:p>
-        </p:txBody>
-      </p:sp>
-      <p:sp>
-        <p:nvSpPr>
-          <p:cNvPr id="3" name="Rectangle 2"/>
-          <p:cNvSpPr/>
-          <p:nvPr/>
-        </p:nvSpPr>
-        <p:spPr>
-          <a:xfrm>
-            <a:off x="502920" y="1097280"/>
-            <a:ext cx="11185855" cy="19050"/>
-          </a:xfrm>
-          <a:prstGeom prst="rect">
-            <a:avLst/>
-          </a:prstGeom>
-          <a:solidFill>
-            <a:srgbClr val="C8D2DE"/>
-          </a:solidFill>
-          <a:ln>
-            <a:noFill/>
-          </a:ln>
-          <a:effectLst/>
-        </p:spPr>
-        <p:style>
-          <a:lnRef idx="1">
-            <a:schemeClr val="accent1"/>
-          </a:lnRef>
-          <a:fillRef idx="3">
-            <a:schemeClr val="accent1"/>
-          </a:fillRef>
-          <a:effectRef idx="2">
-            <a:schemeClr val="accent1"/>
-          </a:effectRef>
-          <a:fontRef idx="minor">
-            <a:schemeClr val="lt1"/>
-          </a:fontRef>
-        </p:style>
-        <p:txBody>
-          <a:bodyPr rtlCol="0" anchor="ctr"/>
-          <a:lstStyle/>
-          <a:p>
-            <a:pPr algn="ctr"/>
-          </a:p>
-        </p:txBody>
-      </p:sp>
-      <p:sp>
-        <p:nvSpPr>
-          <p:cNvPr id="4" name="TextBox 3"/>
-          <p:cNvSpPr txBox="1"/>
-          <p:nvPr/>
-        </p:nvSpPr>
-        <p:spPr>
-          <a:xfrm>
-            <a:off x="502920" y="6382512"/>
-            <a:ext cx="10545775" cy="274320"/>
-          </a:xfrm>
-          <a:prstGeom prst="rect">
-            <a:avLst/>
-          </a:prstGeom>
-          <a:noFill/>
-        </p:spPr>
-        <p:txBody>
-          <a:bodyPr wrap="square" lIns="0" tIns="0">
-            <a:spAutoFit/>
-          </a:bodyPr>
-          <a:lstStyle/>
-          <a:p>
-            <a:pPr algn="l">
-              <a:lnSpc>
-                <a:spcPct val="100000"/>
-              </a:lnSpc>
-              <a:spcAft>
-                <a:spcPts val="0"/>
-              </a:spcAft>
-              <a:defRPr sz="1000" b="0">
-                <a:solidFill>
-                  <a:srgbClr val="666666"/>
-                </a:solidFill>
-                <a:latin typeface="Calibri"/>
-              </a:defRPr>
-            </a:pPr>
-            <a:r>
-              <a:rPr sz="1000" b="0">
-                <a:solidFill>
-                  <a:srgbClr val="666666"/>
-                </a:solidFill>
-                <a:latin typeface="Calibri"/>
-              </a:rPr>
-              <a:t>Pathfinder Advanced - Op Program 12  |  Lesson 1</a:t>
-            </a:r>
-          </a:p>
-        </p:txBody>
-      </p:sp>
-      <p:sp>
-        <p:nvSpPr>
-          <p:cNvPr id="5" name="TextBox 4"/>
-          <p:cNvSpPr txBox="1"/>
-          <p:nvPr/>
-        </p:nvSpPr>
-        <p:spPr>
-          <a:xfrm>
-            <a:off x="11231575" y="6382512"/>
-            <a:ext cx="457200" cy="274320"/>
-          </a:xfrm>
-          <a:prstGeom prst="rect">
-            <a:avLst/>
-          </a:prstGeom>
-          <a:noFill/>
-        </p:spPr>
-        <p:txBody>
-          <a:bodyPr wrap="square" lIns="0" tIns="0">
-            <a:spAutoFit/>
-          </a:bodyPr>
-          <a:lstStyle/>
-          <a:p>
-            <a:pPr algn="r">
-              <a:lnSpc>
-                <a:spcPct val="100000"/>
-              </a:lnSpc>
-              <a:spcAft>
-                <a:spcPts val="0"/>
-              </a:spcAft>
-              <a:defRPr sz="1000" b="0">
-                <a:solidFill>
-                  <a:srgbClr val="666666"/>
-                </a:solidFill>
-                <a:latin typeface="Calibri"/>
-              </a:defRPr>
-            </a:pPr>
-            <a:r>
-              <a:rPr sz="1000" b="0">
-                <a:solidFill>
-                  <a:srgbClr val="666666"/>
-                </a:solidFill>
-                <a:latin typeface="Calibri"/>
-              </a:rPr>
-              <a:t>6</a:t>
-            </a:r>
-          </a:p>
-        </p:txBody>
-      </p:sp>
-      <p:graphicFrame>
-        <p:nvGraphicFramePr>
-          <p:cNvPr id="6" name="Table 5"/>
-          <p:cNvGraphicFramePr>
-            <a:graphicFrameLocks noGrp="1"/>
-          </p:cNvGraphicFramePr>
-          <p:nvPr/>
-        </p:nvGraphicFramePr>
-        <p:xfrm>
-          <a:off x="502920" y="1188720"/>
-          <a:ext cx="11185854" cy="2971800"/>
-        </p:xfrm>
-        <a:graphic>
-          <a:graphicData uri="http://schemas.openxmlformats.org/drawingml/2006/table">
-            <a:tbl>
-              <a:tblPr firstRow="1" bandRow="1">
-                <a:tableStyleId>{5C22544A-7EE6-4342-B048-85BDC9FD1C3A}</a:tableStyleId>
-              </a:tblPr>
-              <a:tblGrid>
-                <a:gridCol w="3660825"/>
-                <a:gridCol w="7525029"/>
-              </a:tblGrid>
-              <a:tr h="330200">
-                <a:tc>
-                  <a:txBody>
-                    <a:bodyPr/>
-                    <a:lstStyle/>
-                    <a:p>
-                      <a:r>
-                        <a:rPr sz="1200" b="1">
-                          <a:solidFill>
-                            <a:srgbClr val="FFFFFF"/>
-                          </a:solidFill>
-                          <a:latin typeface="Calibri"/>
-                        </a:rPr>
-                        <a:t>Change</a:t>
-                      </a:r>
-                    </a:p>
-                  </a:txBody>
-                  <a:tcPr marL="73152" marT="18288" marB="18288">
-                    <a:solidFill>
-                      <a:srgbClr val="1F3A5F"/>
-                    </a:solidFill>
-                  </a:tcPr>
-                </a:tc>
-                <a:tc>
-                  <a:txBody>
-                    <a:bodyPr/>
-                    <a:lstStyle/>
-                    <a:p>
-                      <a:r>
-                        <a:rPr sz="1200" b="1">
-                          <a:solidFill>
-                            <a:srgbClr val="FFFFFF"/>
-                          </a:solidFill>
-                          <a:latin typeface="Calibri"/>
-                        </a:rPr>
-                        <a:t>Why</a:t>
-                      </a:r>
-                    </a:p>
-                  </a:txBody>
-                  <a:tcPr marL="73152" marT="18288" marB="18288">
-                    <a:solidFill>
-                      <a:srgbClr val="1F3A5F"/>
-                    </a:solidFill>
-                  </a:tcPr>
-                </a:tc>
-              </a:tr>
-              <a:tr h="330200">
-                <a:tc>
-                  <a:txBody>
-                    <a:bodyPr/>
-                    <a:lstStyle/>
-                    <a:p>
-                      <a:r>
-                        <a:rPr sz="1200">
-                          <a:solidFill>
-                            <a:srgbClr val="222222"/>
-                          </a:solidFill>
-                          <a:latin typeface="Calibri"/>
-                        </a:rPr>
-                        <a:t>FastLED replaced with Adafruit NeoPixel</a:t>
-                      </a:r>
-                    </a:p>
-                  </a:txBody>
-                  <a:tcPr marL="73152" marT="18288" marB="18288">
-                    <a:solidFill>
-                      <a:srgbClr val="FFFFFF"/>
-                    </a:solidFill>
-                  </a:tcPr>
-                </a:tc>
-                <a:tc>
-                  <a:txBody>
-                    <a:bodyPr/>
-                    <a:lstStyle/>
-                    <a:p>
-                      <a:r>
-                        <a:rPr sz="1200">
-                          <a:solidFill>
-                            <a:srgbClr val="222222"/>
-                          </a:solidFill>
-                          <a:latin typeface="Calibri"/>
-                        </a:rPr>
-                        <a:t>FastLED 3.10.5 auto-enables an ESP-DSP FFT backend that does not build against the bluepad32 4.1.0 SDK. 11.2 stopped compiling.</a:t>
-                      </a:r>
-                    </a:p>
-                  </a:txBody>
-                  <a:tcPr marL="73152" marT="18288" marB="18288">
-                    <a:solidFill>
-                      <a:srgbClr val="FFFFFF"/>
-                    </a:solidFill>
-                  </a:tcPr>
-                </a:tc>
-              </a:tr>
-              <a:tr h="330200">
-                <a:tc>
-                  <a:txBody>
-                    <a:bodyPr/>
-                    <a:lstStyle/>
-                    <a:p>
-                      <a:r>
-                        <a:rPr sz="1200">
-                          <a:solidFill>
-                            <a:srgbClr val="222222"/>
-                          </a:solidFill>
-                          <a:latin typeface="Calibri"/>
-                        </a:rPr>
-                        <a:t>Servo travel corrected to 1.0 - 2.0 ms</a:t>
-                      </a:r>
-                    </a:p>
-                  </a:txBody>
-                  <a:tcPr marL="73152" marT="18288" marB="18288">
-                    <a:solidFill>
-                      <a:srgbClr val="EEF3F8"/>
-                    </a:solidFill>
-                  </a:tcPr>
-                </a:tc>
-                <a:tc>
-                  <a:txBody>
-                    <a:bodyPr/>
-                    <a:lstStyle/>
-                    <a:p>
-                      <a:r>
-                        <a:rPr sz="1200">
-                          <a:solidFill>
-                            <a:srgbClr val="222222"/>
-                          </a:solidFill>
-                          <a:latin typeface="Calibri"/>
-                        </a:rPr>
-                        <a:t>11.2 used 0.5 - 2.5 ms, which can drive a servo into its end stops.</a:t>
-                      </a:r>
-                    </a:p>
-                  </a:txBody>
-                  <a:tcPr marL="73152" marT="18288" marB="18288">
-                    <a:solidFill>
-                      <a:srgbClr val="EEF3F8"/>
-                    </a:solidFill>
-                  </a:tcPr>
-                </a:tc>
-              </a:tr>
-              <a:tr h="330200">
-                <a:tc>
-                  <a:txBody>
-                    <a:bodyPr/>
-                    <a:lstStyle/>
-                    <a:p>
-                      <a:r>
-                        <a:rPr sz="1200">
-                          <a:solidFill>
-                            <a:srgbClr val="222222"/>
-                          </a:solidFill>
-                          <a:latin typeface="Calibri"/>
-                        </a:rPr>
-                        <a:t>Paired address saved to EEPROM</a:t>
-                      </a:r>
-                    </a:p>
-                  </a:txBody>
-                  <a:tcPr marL="73152" marT="18288" marB="18288">
-                    <a:solidFill>
-                      <a:srgbClr val="FFFFFF"/>
-                    </a:solidFill>
-                  </a:tcPr>
-                </a:tc>
-                <a:tc>
-                  <a:txBody>
-                    <a:bodyPr/>
-                    <a:lstStyle/>
-                    <a:p>
-                      <a:r>
-                        <a:rPr sz="1200">
-                          <a:solidFill>
-                            <a:srgbClr val="222222"/>
-                          </a:solidFill>
-                          <a:latin typeface="Calibri"/>
-                        </a:rPr>
-                        <a:t>11.2 only added to the allowlist at runtime, so a reboot could leave a vehicle refusing its own controller.</a:t>
-                      </a:r>
-                    </a:p>
-                  </a:txBody>
-                  <a:tcPr marL="73152" marT="18288" marB="18288">
-                    <a:solidFill>
-                      <a:srgbClr val="FFFFFF"/>
-                    </a:solidFill>
-                  </a:tcPr>
-                </a:tc>
-              </a:tr>
-              <a:tr h="330200">
-                <a:tc>
-                  <a:txBody>
-                    <a:bodyPr/>
-                    <a:lstStyle/>
-                    <a:p>
-                      <a:r>
-                        <a:rPr sz="1200">
-                          <a:solidFill>
-                            <a:srgbClr val="222222"/>
-                          </a:solidFill>
-                          <a:latin typeface="Calibri"/>
-                        </a:rPr>
-                        <a:t>Addresses print most significant byte first</a:t>
-                      </a:r>
-                    </a:p>
-                  </a:txBody>
-                  <a:tcPr marL="73152" marT="18288" marB="18288">
-                    <a:solidFill>
-                      <a:srgbClr val="EEF3F8"/>
-                    </a:solidFill>
-                  </a:tcPr>
-                </a:tc>
-                <a:tc>
-                  <a:txBody>
-                    <a:bodyPr/>
-                    <a:lstStyle/>
-                    <a:p>
-                      <a:r>
-                        <a:rPr sz="1200">
-                          <a:solidFill>
-                            <a:srgbClr val="222222"/>
-                          </a:solidFill>
-                          <a:latin typeface="Calibri"/>
-                        </a:rPr>
-                        <a:t>11.2 printed them backwards, so the address it told you to use was the reverse of the real one.</a:t>
-                      </a:r>
-                    </a:p>
-                  </a:txBody>
-                  <a:tcPr marL="73152" marT="18288" marB="18288">
-                    <a:solidFill>
-                      <a:srgbClr val="EEF3F8"/>
-                    </a:solidFill>
-                  </a:tcPr>
-                </a:tc>
-              </a:tr>
-              <a:tr h="330200">
-                <a:tc>
-                  <a:txBody>
-                    <a:bodyPr/>
-                    <a:lstStyle/>
-                    <a:p>
-                      <a:r>
-                        <a:rPr sz="1200">
-                          <a:solidFill>
-                            <a:srgbClr val="222222"/>
-                          </a:solidFill>
-                          <a:latin typeface="Calibri"/>
-                        </a:rPr>
-                        <a:t>Speed ramping always reaches its target</a:t>
-                      </a:r>
-                    </a:p>
-                  </a:txBody>
-                  <a:tcPr marL="73152" marT="18288" marB="18288">
-                    <a:solidFill>
-                      <a:srgbClr val="FFFFFF"/>
-                    </a:solidFill>
-                  </a:tcPr>
-                </a:tc>
-                <a:tc>
-                  <a:txBody>
-                    <a:bodyPr/>
-                    <a:lstStyle/>
-                    <a:p>
-                      <a:r>
-                        <a:rPr sz="1200">
-                          <a:solidFill>
-                            <a:srgbClr val="222222"/>
-                          </a:solidFill>
-                          <a:latin typeface="Calibri"/>
-                        </a:rPr>
-                        <a:t>Integer truncation stalled the old ramp one count short, forever.</a:t>
-                      </a:r>
-                    </a:p>
-                  </a:txBody>
-                  <a:tcPr marL="73152" marT="18288" marB="18288">
-                    <a:solidFill>
-                      <a:srgbClr val="FFFFFF"/>
-                    </a:solidFill>
-                  </a:tcPr>
-                </a:tc>
-              </a:tr>
-              <a:tr h="330200">
-                <a:tc>
-                  <a:txBody>
-                    <a:bodyPr/>
-                    <a:lstStyle/>
-                    <a:p>
-                      <a:r>
-                        <a:rPr sz="1200">
-                          <a:solidFill>
-                            <a:srgbClr val="222222"/>
-                          </a:solidFill>
-                          <a:latin typeface="Calibri"/>
-                        </a:rPr>
-                        <a:t>Self-test compares against the measured baseline</a:t>
-                      </a:r>
-                    </a:p>
-                  </a:txBody>
-                  <a:tcPr marL="73152" marT="18288" marB="18288">
-                    <a:solidFill>
-                      <a:srgbClr val="EEF3F8"/>
-                    </a:solidFill>
-                  </a:tcPr>
-                </a:tc>
-                <a:tc>
-                  <a:txBody>
-                    <a:bodyPr/>
-                    <a:lstStyle/>
-                    <a:p>
-                      <a:r>
-                        <a:rPr sz="1200">
-                          <a:solidFill>
-                            <a:srgbClr val="222222"/>
-                          </a:solidFill>
-                          <a:latin typeface="Calibri"/>
-                        </a:rPr>
-                        <a:t>11.2 measured a baseline, printed it, then used fixed absolutes.</a:t>
-                      </a:r>
-                    </a:p>
-                  </a:txBody>
-                  <a:tcPr marL="73152" marT="18288" marB="18288">
-                    <a:solidFill>
-                      <a:srgbClr val="EEF3F8"/>
-                    </a:solidFill>
-                  </a:tcPr>
-                </a:tc>
-              </a:tr>
-              <a:tr h="330200">
-                <a:tc>
-                  <a:txBody>
-                    <a:bodyPr/>
-                    <a:lstStyle/>
-                    <a:p>
-                      <a:r>
-                        <a:rPr sz="1200">
-                          <a:solidFill>
-                            <a:srgbClr val="222222"/>
-                          </a:solidFill>
-                          <a:latin typeface="Calibri"/>
-                        </a:rPr>
-                        <a:t>Standby lighting redrawn only when it changes</a:t>
-                      </a:r>
-                    </a:p>
-                  </a:txBody>
-                  <a:tcPr marL="73152" marT="18288" marB="18288">
-                    <a:solidFill>
-                      <a:srgbClr val="FFFFFF"/>
-                    </a:solidFill>
-                  </a:tcPr>
-                </a:tc>
-                <a:tc>
-                  <a:txBody>
-                    <a:bodyPr/>
-                    <a:lstStyle/>
-                    <a:p>
-                      <a:r>
-                        <a:rPr sz="1200">
-                          <a:solidFill>
-                            <a:srgbClr val="222222"/>
-                          </a:solidFill>
-                          <a:latin typeface="Calibri"/>
-                        </a:rPr>
                         <a:t>11.2 pushed 32 LEDs on every pass of loop().</a:t>
                       </a:r>
                     </a:p>
@@ -19636,14 +18592,14 @@
                   </a:tcPr>
                 </a:tc>
               </a:tr>
-              <a:tr h="330200">
+              <a:tr h="421924">
                 <a:tc>
                   <a:txBody>
                     <a:bodyPr/>
                     <a:lstStyle/>
                     <a:p>
                       <a:r>
-                        <a:rPr sz="1200">
+                        <a:rPr sz="1400">
                           <a:solidFill>
                             <a:srgbClr val="222222"/>
                           </a:solidFill>
@@ -19665,7 +18621,7 @@
                     <a:lstStyle/>
                     <a:p>
                       <a:r>
-                        <a:rPr sz="1200">
+                        <a:rPr sz="1400">
                           <a:solidFill>
                             <a:srgbClr val="222222"/>
                           </a:solidFill>
@@ -19760,7 +18716,7 @@
 </p:sld>
 </file>
 
-<file path=ppt/slides/slide8.xml><?xml version="1.0" encoding="utf-8"?>
+<file path=ppt/slides/slide7.xml><?xml version="1.0" encoding="utf-8"?>
 <p:sld xmlns:a="http://schemas.openxmlformats.org/drawingml/2006/main" xmlns:p="http://schemas.openxmlformats.org/presentationml/2006/main" xmlns:r="http://schemas.openxmlformats.org/officeDocument/2006/relationships">
   <p:cSld>
     <p:spTree>
@@ -19951,7 +18907,7 @@
                 </a:solidFill>
                 <a:latin typeface="Calibri"/>
               </a:rPr>
-              <a:t>7</a:t>
+              <a:t>6</a:t>
             </a:r>
           </a:p>
         </p:txBody>
@@ -19985,7 +18941,7 @@
               <a:spcAft>
                 <a:spcPts val="600"/>
               </a:spcAft>
-              <a:defRPr sz="1800" b="1">
+              <a:defRPr sz="1900" b="1">
                 <a:solidFill>
                   <a:srgbClr val="0E7C86"/>
                 </a:solidFill>
@@ -19993,7 +18949,7 @@
               </a:defRPr>
             </a:pPr>
             <a:r>
-              <a:rPr sz="1800" b="1">
+              <a:rPr sz="1900" b="1">
                 <a:solidFill>
                   <a:srgbClr val="0E7C86"/>
                 </a:solidFill>
@@ -20031,7 +18987,7 @@
                 <a:spcPct val="100000"/>
               </a:lnSpc>
               <a:spcAft>
-                <a:spcPts val="400"/>
+                <a:spcPts val="800"/>
               </a:spcAft>
               <a:defRPr sz="1800" b="0">
                 <a:solidFill>
@@ -20056,7 +19012,7 @@
                 <a:spcPct val="100000"/>
               </a:lnSpc>
               <a:spcAft>
-                <a:spcPts val="400"/>
+                <a:spcPts val="800"/>
               </a:spcAft>
               <a:defRPr sz="1800" b="0">
                 <a:solidFill>
@@ -20081,7 +19037,7 @@
                 <a:spcPct val="100000"/>
               </a:lnSpc>
               <a:spcAft>
-                <a:spcPts val="400"/>
+                <a:spcPts val="800"/>
               </a:spcAft>
               <a:defRPr sz="1800" b="0">
                 <a:solidFill>
@@ -20097,7 +19053,7 @@
                 <a:spcPct val="100000"/>
               </a:lnSpc>
               <a:spcAft>
-                <a:spcPts val="400"/>
+                <a:spcPts val="800"/>
               </a:spcAft>
               <a:defRPr sz="1800" b="0">
                 <a:solidFill>
@@ -20147,7 +19103,7 @@
               <a:spcAft>
                 <a:spcPts val="600"/>
               </a:spcAft>
-              <a:defRPr sz="1800" b="1">
+              <a:defRPr sz="1900" b="1">
                 <a:solidFill>
                   <a:srgbClr val="0E7C86"/>
                 </a:solidFill>
@@ -20155,7 +19111,7 @@
               </a:defRPr>
             </a:pPr>
             <a:r>
-              <a:rPr sz="1800" b="1">
+              <a:rPr sz="1900" b="1">
                 <a:solidFill>
                   <a:srgbClr val="0E7C86"/>
                 </a:solidFill>
@@ -20193,7 +19149,7 @@
                 <a:spcPct val="100000"/>
               </a:lnSpc>
               <a:spcAft>
-                <a:spcPts val="400"/>
+                <a:spcPts val="800"/>
               </a:spcAft>
               <a:defRPr sz="1800" b="0">
                 <a:solidFill>
@@ -20218,7 +19174,7 @@
                 <a:spcPct val="100000"/>
               </a:lnSpc>
               <a:spcAft>
-                <a:spcPts val="400"/>
+                <a:spcPts val="800"/>
               </a:spcAft>
               <a:defRPr sz="1800" b="0">
                 <a:solidFill>
@@ -20243,7 +19199,7 @@
                 <a:spcPct val="100000"/>
               </a:lnSpc>
               <a:spcAft>
-                <a:spcPts val="400"/>
+                <a:spcPts val="800"/>
               </a:spcAft>
               <a:defRPr sz="1800" b="0">
                 <a:solidFill>
@@ -20268,7 +19224,7 @@
                 <a:spcPct val="100000"/>
               </a:lnSpc>
               <a:spcAft>
-                <a:spcPts val="400"/>
+                <a:spcPts val="800"/>
               </a:spcAft>
               <a:defRPr sz="1800" b="0">
                 <a:solidFill>
@@ -20293,7 +19249,7 @@
                 <a:spcPct val="100000"/>
               </a:lnSpc>
               <a:spcAft>
-                <a:spcPts val="400"/>
+                <a:spcPts val="800"/>
               </a:spcAft>
               <a:defRPr sz="1800" b="0">
                 <a:solidFill>
@@ -20318,7 +19274,7 @@
                 <a:spcPct val="100000"/>
               </a:lnSpc>
               <a:spcAft>
-                <a:spcPts val="400"/>
+                <a:spcPts val="800"/>
               </a:spcAft>
               <a:defRPr sz="1800" b="0">
                 <a:solidFill>
@@ -20347,7 +19303,7 @@
 </p:sld>
 </file>
 
-<file path=ppt/slides/slide9.xml><?xml version="1.0" encoding="utf-8"?>
+<file path=ppt/slides/slide8.xml><?xml version="1.0" encoding="utf-8"?>
 <p:sld xmlns:a="http://schemas.openxmlformats.org/drawingml/2006/main" xmlns:p="http://schemas.openxmlformats.org/presentationml/2006/main" xmlns:r="http://schemas.openxmlformats.org/officeDocument/2006/relationships">
   <p:cSld>
     <p:spTree>
@@ -20538,7 +19494,7 @@
                 </a:solidFill>
                 <a:latin typeface="Calibri"/>
               </a:rPr>
-              <a:t>8</a:t>
+              <a:t>7</a:t>
             </a:r>
           </a:p>
         </p:txBody>
@@ -20572,7 +19528,7 @@
               <a:spcAft>
                 <a:spcPts val="600"/>
               </a:spcAft>
-              <a:defRPr sz="1800" b="1">
+              <a:defRPr sz="1900" b="1">
                 <a:solidFill>
                   <a:srgbClr val="0E7C86"/>
                 </a:solidFill>
@@ -20580,7 +19536,7 @@
               </a:defRPr>
             </a:pPr>
             <a:r>
-              <a:rPr sz="1800" b="1">
+              <a:rPr sz="1900" b="1">
                 <a:solidFill>
                   <a:srgbClr val="0E7C86"/>
                 </a:solidFill>
@@ -20600,7 +19556,7 @@
         <p:spPr>
           <a:xfrm>
             <a:off x="6324447" y="1700784"/>
-            <a:ext cx="5364327" cy="3419856"/>
+            <a:ext cx="5364327" cy="3474720"/>
           </a:xfrm>
           <a:prstGeom prst="rect">
             <a:avLst/>
@@ -20618,7 +19574,7 @@
                 <a:spcPct val="100000"/>
               </a:lnSpc>
               <a:spcAft>
-                <a:spcPts val="400"/>
+                <a:spcPts val="800"/>
               </a:spcAft>
               <a:defRPr sz="1800" b="0">
                 <a:solidFill>
@@ -20634,7 +19590,7 @@
                 <a:spcPct val="100000"/>
               </a:lnSpc>
               <a:spcAft>
-                <a:spcPts val="400"/>
+                <a:spcPts val="800"/>
               </a:spcAft>
               <a:defRPr sz="1800" b="0">
                 <a:solidFill>
@@ -20659,7 +19615,7 @@
                 <a:spcPct val="100000"/>
               </a:lnSpc>
               <a:spcAft>
-                <a:spcPts val="400"/>
+                <a:spcPts val="800"/>
               </a:spcAft>
               <a:defRPr sz="1800" b="0">
                 <a:solidFill>
@@ -20742,6 +19698,413 @@
                 <a:latin typeface="Calibri"/>
               </a:rPr>
               <a:t>Detect what is there rather than being told what is there. A configuration that can disagree with the hardware eventually will.</a:t>
+            </a:r>
+          </a:p>
+        </p:txBody>
+      </p:sp>
+    </p:spTree>
+  </p:cSld>
+  <p:clrMapOvr>
+    <a:masterClrMapping/>
+  </p:clrMapOvr>
+</p:sld>
+</file>
+
+<file path=ppt/slides/slide9.xml><?xml version="1.0" encoding="utf-8"?>
+<p:sld xmlns:a="http://schemas.openxmlformats.org/drawingml/2006/main" xmlns:p="http://schemas.openxmlformats.org/presentationml/2006/main" xmlns:r="http://schemas.openxmlformats.org/officeDocument/2006/relationships">
+  <p:cSld>
+    <p:spTree>
+      <p:nvGrpSpPr>
+        <p:cNvPr id="1" name=""/>
+        <p:cNvGrpSpPr/>
+        <p:nvPr/>
+      </p:nvGrpSpPr>
+      <p:grpSpPr/>
+      <p:sp>
+        <p:nvSpPr>
+          <p:cNvPr id="2" name="Title 1"/>
+          <p:cNvSpPr>
+            <a:spLocks noGrp="1"/>
+          </p:cNvSpPr>
+          <p:nvPr>
+            <p:ph type="title"/>
+          </p:nvPr>
+        </p:nvSpPr>
+        <p:spPr>
+          <a:xfrm>
+            <a:off x="502920" y="274320"/>
+            <a:ext cx="11185855" cy="777240"/>
+          </a:xfrm>
+        </p:spPr>
+        <p:txBody>
+          <a:bodyPr wrap="square" anchor="b"/>
+          <a:lstStyle/>
+          <a:p>
+            <a:pPr algn="l">
+              <a:lnSpc>
+                <a:spcPct val="100000"/>
+              </a:lnSpc>
+              <a:spcAft>
+                <a:spcPts val="0"/>
+              </a:spcAft>
+              <a:defRPr sz="2800" b="1">
+                <a:solidFill>
+                  <a:srgbClr val="1F3A5F"/>
+                </a:solidFill>
+                <a:latin typeface="Calibri"/>
+              </a:defRPr>
+            </a:pPr>
+            <a:r>
+              <a:rPr sz="2800" b="1">
+                <a:solidFill>
+                  <a:srgbClr val="1F3A5F"/>
+                </a:solidFill>
+                <a:latin typeface="Calibri"/>
+              </a:rPr>
+              <a:t>How Arduino tabs actually work</a:t>
+            </a:r>
+          </a:p>
+        </p:txBody>
+      </p:sp>
+      <p:sp>
+        <p:nvSpPr>
+          <p:cNvPr id="3" name="Rectangle 2"/>
+          <p:cNvSpPr/>
+          <p:nvPr/>
+        </p:nvSpPr>
+        <p:spPr>
+          <a:xfrm>
+            <a:off x="502920" y="1097280"/>
+            <a:ext cx="11185855" cy="19050"/>
+          </a:xfrm>
+          <a:prstGeom prst="rect">
+            <a:avLst/>
+          </a:prstGeom>
+          <a:solidFill>
+            <a:srgbClr val="C8D2DE"/>
+          </a:solidFill>
+          <a:ln>
+            <a:noFill/>
+          </a:ln>
+          <a:effectLst/>
+        </p:spPr>
+        <p:style>
+          <a:lnRef idx="1">
+            <a:schemeClr val="accent1"/>
+          </a:lnRef>
+          <a:fillRef idx="3">
+            <a:schemeClr val="accent1"/>
+          </a:fillRef>
+          <a:effectRef idx="2">
+            <a:schemeClr val="accent1"/>
+          </a:effectRef>
+          <a:fontRef idx="minor">
+            <a:schemeClr val="lt1"/>
+          </a:fontRef>
+        </p:style>
+        <p:txBody>
+          <a:bodyPr rtlCol="0" anchor="ctr"/>
+          <a:lstStyle/>
+          <a:p>
+            <a:pPr algn="ctr"/>
+          </a:p>
+        </p:txBody>
+      </p:sp>
+      <p:sp>
+        <p:nvSpPr>
+          <p:cNvPr id="4" name="TextBox 3"/>
+          <p:cNvSpPr txBox="1"/>
+          <p:nvPr/>
+        </p:nvSpPr>
+        <p:spPr>
+          <a:xfrm>
+            <a:off x="502920" y="6382512"/>
+            <a:ext cx="10545775" cy="274320"/>
+          </a:xfrm>
+          <a:prstGeom prst="rect">
+            <a:avLst/>
+          </a:prstGeom>
+          <a:noFill/>
+        </p:spPr>
+        <p:txBody>
+          <a:bodyPr wrap="square" lIns="0" tIns="0">
+            <a:spAutoFit/>
+          </a:bodyPr>
+          <a:lstStyle/>
+          <a:p>
+            <a:pPr algn="l">
+              <a:lnSpc>
+                <a:spcPct val="100000"/>
+              </a:lnSpc>
+              <a:spcAft>
+                <a:spcPts val="0"/>
+              </a:spcAft>
+              <a:defRPr sz="1000" b="0">
+                <a:solidFill>
+                  <a:srgbClr val="666666"/>
+                </a:solidFill>
+                <a:latin typeface="Calibri"/>
+              </a:defRPr>
+            </a:pPr>
+            <a:r>
+              <a:rPr sz="1000" b="0">
+                <a:solidFill>
+                  <a:srgbClr val="666666"/>
+                </a:solidFill>
+                <a:latin typeface="Calibri"/>
+              </a:rPr>
+              <a:t>Pathfinder Advanced - Op Program 12  |  Lesson 1</a:t>
+            </a:r>
+          </a:p>
+        </p:txBody>
+      </p:sp>
+      <p:sp>
+        <p:nvSpPr>
+          <p:cNvPr id="5" name="TextBox 4"/>
+          <p:cNvSpPr txBox="1"/>
+          <p:nvPr/>
+        </p:nvSpPr>
+        <p:spPr>
+          <a:xfrm>
+            <a:off x="11231575" y="6382512"/>
+            <a:ext cx="457200" cy="274320"/>
+          </a:xfrm>
+          <a:prstGeom prst="rect">
+            <a:avLst/>
+          </a:prstGeom>
+          <a:noFill/>
+        </p:spPr>
+        <p:txBody>
+          <a:bodyPr wrap="square" lIns="0" tIns="0">
+            <a:spAutoFit/>
+          </a:bodyPr>
+          <a:lstStyle/>
+          <a:p>
+            <a:pPr algn="r">
+              <a:lnSpc>
+                <a:spcPct val="100000"/>
+              </a:lnSpc>
+              <a:spcAft>
+                <a:spcPts val="0"/>
+              </a:spcAft>
+              <a:defRPr sz="1000" b="0">
+                <a:solidFill>
+                  <a:srgbClr val="666666"/>
+                </a:solidFill>
+                <a:latin typeface="Calibri"/>
+              </a:defRPr>
+            </a:pPr>
+            <a:r>
+              <a:rPr sz="1000" b="0">
+                <a:solidFill>
+                  <a:srgbClr val="666666"/>
+                </a:solidFill>
+                <a:latin typeface="Calibri"/>
+              </a:rPr>
+              <a:t>8</a:t>
+            </a:r>
+          </a:p>
+        </p:txBody>
+      </p:sp>
+      <p:sp>
+        <p:nvSpPr>
+          <p:cNvPr id="6" name="TextBox 5"/>
+          <p:cNvSpPr txBox="1"/>
+          <p:nvPr/>
+        </p:nvSpPr>
+        <p:spPr>
+          <a:xfrm>
+            <a:off x="502920" y="1188720"/>
+            <a:ext cx="11185855" cy="530352"/>
+          </a:xfrm>
+          <a:prstGeom prst="rect">
+            <a:avLst/>
+          </a:prstGeom>
+          <a:noFill/>
+        </p:spPr>
+        <p:txBody>
+          <a:bodyPr wrap="square" lIns="0" tIns="0" rIns="0" bIns="0">
+            <a:spAutoFit/>
+          </a:bodyPr>
+          <a:lstStyle/>
+          <a:p>
+            <a:pPr algn="l">
+              <a:lnSpc>
+                <a:spcPct val="100000"/>
+              </a:lnSpc>
+              <a:spcAft>
+                <a:spcPts val="600"/>
+              </a:spcAft>
+              <a:defRPr sz="1900" b="1">
+                <a:solidFill>
+                  <a:srgbClr val="0E7C86"/>
+                </a:solidFill>
+                <a:latin typeface="Calibri"/>
+              </a:defRPr>
+            </a:pPr>
+            <a:r>
+              <a:rPr sz="1900" b="1">
+                <a:solidFill>
+                  <a:srgbClr val="0E7C86"/>
+                </a:solidFill>
+                <a:latin typeface="Calibri"/>
+              </a:rPr>
+              <a:t>Convenient, and exactly one trap</a:t>
+            </a:r>
+          </a:p>
+        </p:txBody>
+      </p:sp>
+      <p:sp>
+        <p:nvSpPr>
+          <p:cNvPr id="7" name="TextBox 6"/>
+          <p:cNvSpPr txBox="1"/>
+          <p:nvPr/>
+        </p:nvSpPr>
+        <p:spPr>
+          <a:xfrm>
+            <a:off x="502920" y="1755648"/>
+            <a:ext cx="11185855" cy="4507992"/>
+          </a:xfrm>
+          <a:prstGeom prst="rect">
+            <a:avLst/>
+          </a:prstGeom>
+          <a:noFill/>
+        </p:spPr>
+        <p:txBody>
+          <a:bodyPr wrap="square" lIns="0" tIns="0" rIns="0" bIns="0">
+            <a:spAutoFit/>
+          </a:bodyPr>
+          <a:lstStyle/>
+          <a:p>
+            <a:pPr algn="l">
+              <a:lnSpc>
+                <a:spcPct val="100000"/>
+              </a:lnSpc>
+              <a:spcAft>
+                <a:spcPts val="600"/>
+              </a:spcAft>
+              <a:defRPr sz="2600" b="0">
+                <a:solidFill>
+                  <a:srgbClr val="222222"/>
+                </a:solidFill>
+                <a:latin typeface="Calibri"/>
+              </a:defRPr>
+            </a:pPr>
+            <a:r>
+              <a:rPr sz="2600" b="0">
+                <a:solidFill>
+                  <a:srgbClr val="222222"/>
+                </a:solidFill>
+                <a:latin typeface="Calibri"/>
+              </a:rPr>
+              <a:t>Every .ino file in the sketch folder is a tab in the IDE.</a:t>
+            </a:r>
+          </a:p>
+          <a:p>
+            <a:pPr algn="l">
+              <a:lnSpc>
+                <a:spcPct val="100000"/>
+              </a:lnSpc>
+              <a:spcAft>
+                <a:spcPts val="600"/>
+              </a:spcAft>
+              <a:defRPr sz="2600" b="0">
+                <a:solidFill>
+                  <a:srgbClr val="222222"/>
+                </a:solidFill>
+                <a:latin typeface="Calibri"/>
+              </a:defRPr>
+            </a:pPr>
+            <a:r>
+              <a:rPr sz="2600" b="0">
+                <a:solidFill>
+                  <a:srgbClr val="222222"/>
+                </a:solidFill>
+                <a:latin typeface="Calibri"/>
+              </a:rPr>
+              <a:t>Before compiling, the IDE CONCATENATES them into one file - the one named after the folder first, then the rest alphabetically - and generates function prototypes at the top.</a:t>
+            </a:r>
+          </a:p>
+          <a:p>
+            <a:pPr algn="l">
+              <a:lnSpc>
+                <a:spcPct val="100000"/>
+              </a:lnSpc>
+              <a:spcAft>
+                <a:spcPts val="600"/>
+              </a:spcAft>
+              <a:defRPr sz="2600" b="0">
+                <a:solidFill>
+                  <a:srgbClr val="222222"/>
+                </a:solidFill>
+                <a:latin typeface="Calibri"/>
+              </a:defRPr>
+            </a:pPr>
+          </a:p>
+          <a:p>
+            <a:pPr algn="l">
+              <a:lnSpc>
+                <a:spcPct val="100000"/>
+              </a:lnSpc>
+              <a:spcAft>
+                <a:spcPts val="600"/>
+              </a:spcAft>
+              <a:defRPr sz="2600" b="0">
+                <a:solidFill>
+                  <a:srgbClr val="222222"/>
+                </a:solidFill>
+                <a:latin typeface="Calibri"/>
+              </a:defRPr>
+            </a:pPr>
+            <a:r>
+              <a:rPr sz="2600" b="0">
+                <a:solidFill>
+                  <a:srgbClr val="222222"/>
+                </a:solidFill>
+                <a:latin typeface="Calibri"/>
+              </a:rPr>
+              <a:t>Two consequences you have to know:</a:t>
+            </a:r>
+          </a:p>
+          <a:p>
+            <a:pPr algn="l">
+              <a:lnSpc>
+                <a:spcPct val="100000"/>
+              </a:lnSpc>
+              <a:spcAft>
+                <a:spcPts val="600"/>
+              </a:spcAft>
+              <a:defRPr sz="2600" b="0">
+                <a:solidFill>
+                  <a:srgbClr val="222222"/>
+                </a:solidFill>
+                <a:latin typeface="Calibri"/>
+              </a:defRPr>
+            </a:pPr>
+          </a:p>
+          <a:p>
+            <a:pPr lvl="1" algn="l">
+              <a:lnSpc>
+                <a:spcPct val="100000"/>
+              </a:lnSpc>
+              <a:spcAft>
+                <a:spcPts val="600"/>
+              </a:spcAft>
+              <a:defRPr sz="2600" b="0">
+                <a:solidFill>
+                  <a:srgbClr val="222222"/>
+                </a:solidFill>
+                <a:latin typeface="Calibri"/>
+              </a:defRPr>
+            </a:pPr>
+            <a:r>
+              <a:rPr sz="2600" b="0">
+                <a:solidFill>
+                  <a:srgbClr val="222222"/>
+                </a:solidFill>
+                <a:latin typeface="Calibri"/>
+              </a:rPr>
+              <a:t>Functions and globals are shared across tabs with NO header needed. Lighting.ino can call strip and read NUM_LEDS with no include.</a:t>
             </a:r>
           </a:p>
         </p:txBody>

--- a/ground-vehicle/docs/courses/advanced/l1_architecture_and_toolchain.pptx
+++ b/ground-vehicle/docs/courses/advanced/l1_architecture_and_toolchain.pptx
@@ -1362,7 +1362,7 @@
               <a:rPr sz="1200">
                 <a:latin typeface="Calibri"/>
               </a:rPr>
-              <a:t>Settings first, because everything after may depend on them. Then detect the hardware, because behaviour branches on it.</a:t>
+              <a:t>Settings first, because everything after may depend on them. Then detect the hardware, because behavior branches on it.</a:t>
             </a:r>
           </a:p>
           <a:p>
@@ -1476,7 +1476,7 @@
               <a:rPr sz="1200">
                 <a:latin typeface="Calibri"/>
               </a:rPr>
-              <a:t>Settings first, because everything after may depend on them. Then detect the hardware, because behaviour branches on it.</a:t>
+              <a:t>Settings first, because everything after may depend on them. Then detect the hardware, because behavior branches on it.</a:t>
             </a:r>
           </a:p>
           <a:p>
@@ -7128,7 +7128,7 @@
                           </a:solidFill>
                           <a:latin typeface="Calibri"/>
                         </a:rPr>
-                        <a:t>Colour helpers, every animation, the lighting state machine</a:t>
+                        <a:t>Color helpers, every animation, the lighting state machine</a:t>
                       </a:r>
                     </a:p>
                   </a:txBody>
@@ -8981,7 +8981,7 @@
                 </a:solidFill>
                 <a:latin typeface="Calibri"/>
               </a:rPr>
-              <a:t>pair      change its behaviour without a laptop full of toolchains</a:t>
+              <a:t>pair      change its behavior without a laptop full of toolchains</a:t>
             </a:r>
           </a:p>
           <a:p>
@@ -16025,7 +16025,7 @@
                 </a:solidFill>
                 <a:latin typeface="Calibri"/>
               </a:rPr>
-              <a:t>Next lesson: motors, and integer maths that quietly lies to you.</a:t>
+              <a:t>Next lesson: motors, and integer math that quietly lies to you.</a:t>
             </a:r>
           </a:p>
         </p:txBody>
@@ -17089,7 +17089,7 @@
                           </a:solidFill>
                           <a:latin typeface="Calibri"/>
                         </a:rPr>
-                        <a:t>Control quality, and integer maths that lies</a:t>
+                        <a:t>Control quality, and integer math that lies</a:t>
                       </a:r>
                     </a:p>
                   </a:txBody>
@@ -19069,7 +19069,7 @@
                 </a:solidFill>
                 <a:latin typeface="Calibri"/>
               </a:rPr>
-              <a:t>The answer: DETECT the hardware at boot and switch behaviour on what is actually there.</a:t>
+              <a:t>The answer: DETECT the hardware at boot and switch behavior on what is actually there.</a:t>
             </a:r>
           </a:p>
         </p:txBody>

--- a/ground-vehicle/docs/courses/advanced/l1_architecture_and_toolchain.pptx
+++ b/ground-vehicle/docs/courses/advanced/l1_architecture_and_toolchain.pptx
@@ -8189,7 +8189,7 @@
         <p:spPr>
           <a:xfrm>
             <a:off x="502920" y="1901952"/>
-            <a:ext cx="5387187" cy="4361688"/>
+            <a:ext cx="6249137" cy="4361688"/>
           </a:xfrm>
           <a:prstGeom prst="rect">
             <a:avLst/>
@@ -8361,8 +8361,8 @@
         </p:nvSpPr>
         <p:spPr>
           <a:xfrm>
-            <a:off x="6301587" y="1901952"/>
-            <a:ext cx="5387187" cy="365760"/>
+            <a:off x="7163537" y="1901952"/>
+            <a:ext cx="4525238" cy="365760"/>
           </a:xfrm>
           <a:prstGeom prst="rect">
             <a:avLst/>
@@ -8409,8 +8409,8 @@
         </p:nvSpPr>
         <p:spPr>
           <a:xfrm>
-            <a:off x="6301587" y="2304288"/>
-            <a:ext cx="5387187" cy="1778508"/>
+            <a:off x="7163537" y="2304288"/>
+            <a:ext cx="4525238" cy="1672143"/>
           </a:xfrm>
           <a:prstGeom prst="rect">
             <a:avLst/>
@@ -8430,15 +8430,15 @@
               <a:spcAft>
                 <a:spcPts val="300"/>
               </a:spcAft>
-              <a:defRPr sz="2600" b="0">
-                <a:solidFill>
-                  <a:srgbClr val="222222"/>
-                </a:solidFill>
-                <a:latin typeface="Calibri"/>
-              </a:defRPr>
-            </a:pPr>
-            <a:r>
-              <a:rPr sz="2600" b="0">
+              <a:defRPr sz="2500" b="0">
+                <a:solidFill>
+                  <a:srgbClr val="222222"/>
+                </a:solidFill>
+                <a:latin typeface="Calibri"/>
+              </a:defRPr>
+            </a:pPr>
+            <a:r>
+              <a:rPr sz="2500" b="0">
                 <a:solidFill>
                   <a:srgbClr val="222222"/>
                 </a:solidFill>
@@ -8457,8 +8457,8 @@
         </p:nvSpPr>
         <p:spPr>
           <a:xfrm>
-            <a:off x="6301587" y="4119372"/>
-            <a:ext cx="5387187" cy="365760"/>
+            <a:off x="7163537" y="4049583"/>
+            <a:ext cx="4525238" cy="365760"/>
           </a:xfrm>
           <a:prstGeom prst="rect">
             <a:avLst/>
@@ -8505,8 +8505,8 @@
         </p:nvSpPr>
         <p:spPr>
           <a:xfrm>
-            <a:off x="6301587" y="4521708"/>
-            <a:ext cx="5387187" cy="1778508"/>
+            <a:off x="7163537" y="4451919"/>
+            <a:ext cx="4525238" cy="1811720"/>
           </a:xfrm>
           <a:prstGeom prst="rect">
             <a:avLst/>
@@ -8526,15 +8526,15 @@
               <a:spcAft>
                 <a:spcPts val="300"/>
               </a:spcAft>
-              <a:defRPr sz="2300" b="0">
-                <a:solidFill>
-                  <a:srgbClr val="222222"/>
-                </a:solidFill>
-                <a:latin typeface="Calibri"/>
-              </a:defRPr>
-            </a:pPr>
-            <a:r>
-              <a:rPr sz="2300" b="0">
+              <a:defRPr sz="2100" b="0">
+                <a:solidFill>
+                  <a:srgbClr val="222222"/>
+                </a:solidFill>
+                <a:latin typeface="Calibri"/>
+              </a:defRPr>
+            </a:pPr>
+            <a:r>
+              <a:rPr sz="2100" b="0">
                 <a:solidFill>
                   <a:srgbClr val="222222"/>
                 </a:solidFill>
@@ -8551,15 +8551,15 @@
               <a:spcAft>
                 <a:spcPts val="300"/>
               </a:spcAft>
-              <a:defRPr sz="2300" b="0">
-                <a:solidFill>
-                  <a:srgbClr val="222222"/>
-                </a:solidFill>
-                <a:latin typeface="Calibri"/>
-              </a:defRPr>
-            </a:pPr>
-            <a:r>
-              <a:rPr sz="2300" b="0">
+              <a:defRPr sz="2100" b="0">
+                <a:solidFill>
+                  <a:srgbClr val="222222"/>
+                </a:solidFill>
+                <a:latin typeface="Calibri"/>
+              </a:defRPr>
+            </a:pPr>
+            <a:r>
+              <a:rPr sz="2100" b="0">
                 <a:solidFill>
                   <a:srgbClr val="222222"/>
                 </a:solidFill>
@@ -10738,7 +10738,7 @@
         <p:spPr>
           <a:xfrm>
             <a:off x="502920" y="1901952"/>
-            <a:ext cx="5387187" cy="4361688"/>
+            <a:ext cx="6249137" cy="4361688"/>
           </a:xfrm>
           <a:prstGeom prst="rect">
             <a:avLst/>
@@ -10758,15 +10758,15 @@
               <a:spcAft>
                 <a:spcPts val="800"/>
               </a:spcAft>
-              <a:defRPr sz="1800" b="0">
-                <a:solidFill>
-                  <a:srgbClr val="222222"/>
-                </a:solidFill>
-                <a:latin typeface="Calibri"/>
-              </a:defRPr>
-            </a:pPr>
-            <a:r>
-              <a:rPr sz="1800" b="0">
+              <a:defRPr sz="1900" b="0">
+                <a:solidFill>
+                  <a:srgbClr val="222222"/>
+                </a:solidFill>
+                <a:latin typeface="Calibri"/>
+              </a:defRPr>
+            </a:pPr>
+            <a:r>
+              <a:rPr sz="1900" b="0">
                 <a:solidFill>
                   <a:srgbClr val="222222"/>
                 </a:solidFill>
@@ -10783,15 +10783,15 @@
               <a:spcAft>
                 <a:spcPts val="800"/>
               </a:spcAft>
-              <a:defRPr sz="1800" b="0">
-                <a:solidFill>
-                  <a:srgbClr val="222222"/>
-                </a:solidFill>
-                <a:latin typeface="Calibri"/>
-              </a:defRPr>
-            </a:pPr>
-            <a:r>
-              <a:rPr sz="1800" b="0">
+              <a:defRPr sz="1900" b="0">
+                <a:solidFill>
+                  <a:srgbClr val="222222"/>
+                </a:solidFill>
+                <a:latin typeface="Calibri"/>
+              </a:defRPr>
+            </a:pPr>
+            <a:r>
+              <a:rPr sz="1900" b="0">
                 <a:solidFill>
                   <a:srgbClr val="222222"/>
                 </a:solidFill>
@@ -10808,15 +10808,15 @@
               <a:spcAft>
                 <a:spcPts val="800"/>
               </a:spcAft>
-              <a:defRPr sz="1800" b="0">
-                <a:solidFill>
-                  <a:srgbClr val="222222"/>
-                </a:solidFill>
-                <a:latin typeface="Calibri"/>
-              </a:defRPr>
-            </a:pPr>
-            <a:r>
-              <a:rPr sz="1800" b="0">
+              <a:defRPr sz="1900" b="0">
+                <a:solidFill>
+                  <a:srgbClr val="222222"/>
+                </a:solidFill>
+                <a:latin typeface="Calibri"/>
+              </a:defRPr>
+            </a:pPr>
+            <a:r>
+              <a:rPr sz="1900" b="0">
                 <a:solidFill>
                   <a:srgbClr val="222222"/>
                 </a:solidFill>
@@ -10833,15 +10833,15 @@
               <a:spcAft>
                 <a:spcPts val="800"/>
               </a:spcAft>
-              <a:defRPr sz="1800" b="0">
-                <a:solidFill>
-                  <a:srgbClr val="222222"/>
-                </a:solidFill>
-                <a:latin typeface="Calibri"/>
-              </a:defRPr>
-            </a:pPr>
-            <a:r>
-              <a:rPr sz="1800" b="0">
+              <a:defRPr sz="1900" b="0">
+                <a:solidFill>
+                  <a:srgbClr val="222222"/>
+                </a:solidFill>
+                <a:latin typeface="Calibri"/>
+              </a:defRPr>
+            </a:pPr>
+            <a:r>
+              <a:rPr sz="1900" b="0">
                 <a:solidFill>
                   <a:srgbClr val="222222"/>
                 </a:solidFill>
@@ -10858,15 +10858,15 @@
               <a:spcAft>
                 <a:spcPts val="800"/>
               </a:spcAft>
-              <a:defRPr sz="1800" b="0">
-                <a:solidFill>
-                  <a:srgbClr val="222222"/>
-                </a:solidFill>
-                <a:latin typeface="Calibri"/>
-              </a:defRPr>
-            </a:pPr>
-            <a:r>
-              <a:rPr sz="1800" b="0">
+              <a:defRPr sz="1900" b="0">
+                <a:solidFill>
+                  <a:srgbClr val="222222"/>
+                </a:solidFill>
+                <a:latin typeface="Calibri"/>
+              </a:defRPr>
+            </a:pPr>
+            <a:r>
+              <a:rPr sz="1900" b="0">
                 <a:solidFill>
                   <a:srgbClr val="222222"/>
                 </a:solidFill>
@@ -10883,15 +10883,15 @@
               <a:spcAft>
                 <a:spcPts val="800"/>
               </a:spcAft>
-              <a:defRPr sz="1800" b="0">
-                <a:solidFill>
-                  <a:srgbClr val="222222"/>
-                </a:solidFill>
-                <a:latin typeface="Calibri"/>
-              </a:defRPr>
-            </a:pPr>
-            <a:r>
-              <a:rPr sz="1800" b="0">
+              <a:defRPr sz="1900" b="0">
+                <a:solidFill>
+                  <a:srgbClr val="222222"/>
+                </a:solidFill>
+                <a:latin typeface="Calibri"/>
+              </a:defRPr>
+            </a:pPr>
+            <a:r>
+              <a:rPr sz="1900" b="0">
                 <a:solidFill>
                   <a:srgbClr val="222222"/>
                 </a:solidFill>
@@ -10910,8 +10910,8 @@
         </p:nvSpPr>
         <p:spPr>
           <a:xfrm>
-            <a:off x="6301587" y="1901952"/>
-            <a:ext cx="5387187" cy="365760"/>
+            <a:off x="7163537" y="1901952"/>
+            <a:ext cx="4525238" cy="365760"/>
           </a:xfrm>
           <a:prstGeom prst="rect">
             <a:avLst/>
@@ -10958,8 +10958,8 @@
         </p:nvSpPr>
         <p:spPr>
           <a:xfrm>
-            <a:off x="6301587" y="2304288"/>
-            <a:ext cx="5387187" cy="1778508"/>
+            <a:off x="7163537" y="2304288"/>
+            <a:ext cx="4525238" cy="1741932"/>
           </a:xfrm>
           <a:prstGeom prst="rect">
             <a:avLst/>
@@ -10979,15 +10979,15 @@
               <a:spcAft>
                 <a:spcPts val="300"/>
               </a:spcAft>
-              <a:defRPr sz="2600" b="0">
-                <a:solidFill>
-                  <a:srgbClr val="222222"/>
-                </a:solidFill>
-                <a:latin typeface="Calibri"/>
-              </a:defRPr>
-            </a:pPr>
-            <a:r>
-              <a:rPr sz="2600" b="0">
+              <a:defRPr sz="2400" b="0">
+                <a:solidFill>
+                  <a:srgbClr val="222222"/>
+                </a:solidFill>
+                <a:latin typeface="Calibri"/>
+              </a:defRPr>
+            </a:pPr>
+            <a:r>
+              <a:rPr sz="2400" b="0">
                 <a:solidFill>
                   <a:srgbClr val="222222"/>
                 </a:solidFill>
@@ -11006,8 +11006,8 @@
         </p:nvSpPr>
         <p:spPr>
           <a:xfrm>
-            <a:off x="6301587" y="4119372"/>
-            <a:ext cx="5387187" cy="365760"/>
+            <a:off x="7163537" y="4119372"/>
+            <a:ext cx="4525238" cy="365760"/>
           </a:xfrm>
           <a:prstGeom prst="rect">
             <a:avLst/>
@@ -11054,8 +11054,8 @@
         </p:nvSpPr>
         <p:spPr>
           <a:xfrm>
-            <a:off x="6301587" y="4521708"/>
-            <a:ext cx="5387187" cy="1778508"/>
+            <a:off x="7163537" y="4521708"/>
+            <a:ext cx="4525238" cy="1741932"/>
           </a:xfrm>
           <a:prstGeom prst="rect">
             <a:avLst/>
@@ -11075,15 +11075,15 @@
               <a:spcAft>
                 <a:spcPts val="300"/>
               </a:spcAft>
-              <a:defRPr sz="2600" b="0">
-                <a:solidFill>
-                  <a:srgbClr val="222222"/>
-                </a:solidFill>
-                <a:latin typeface="Calibri"/>
-              </a:defRPr>
-            </a:pPr>
-            <a:r>
-              <a:rPr sz="2600" b="0">
+              <a:defRPr sz="2400" b="0">
+                <a:solidFill>
+                  <a:srgbClr val="222222"/>
+                </a:solidFill>
+                <a:latin typeface="Calibri"/>
+              </a:defRPr>
+            </a:pPr>
+            <a:r>
+              <a:rPr sz="2400" b="0">
                 <a:solidFill>
                   <a:srgbClr val="222222"/>
                 </a:solidFill>

--- a/ground-vehicle/docs/courses/advanced/l1_architecture_and_toolchain.pptx
+++ b/ground-vehicle/docs/courses/advanced/l1_architecture_and_toolchain.pptx
@@ -6012,6 +6012,22 @@
               <a:spcAft>
                 <a:spcPts val="100"/>
               </a:spcAft>
+              <a:defRPr sz="600" b="0">
+                <a:solidFill>
+                  <a:srgbClr val="666666"/>
+                </a:solidFill>
+                <a:latin typeface="Calibri"/>
+              </a:defRPr>
+            </a:pPr>
+          </a:p>
+          <a:p>
+            <a:pPr algn="l">
+              <a:lnSpc>
+                <a:spcPct val="100000"/>
+              </a:lnSpc>
+              <a:spcAft>
+                <a:spcPts val="100"/>
+              </a:spcAft>
               <a:defRPr sz="1200" b="0">
                 <a:solidFill>
                   <a:srgbClr val="666666"/>
@@ -6019,6 +6035,15 @@
                 <a:latin typeface="Calibri"/>
               </a:defRPr>
             </a:pPr>
+            <a:r>
+              <a:rPr sz="1200" b="0">
+                <a:solidFill>
+                  <a:srgbClr val="666666"/>
+                </a:solidFill>
+                <a:latin typeface="Calibri"/>
+              </a:rPr>
+              <a:t>Kevin Bowen, President  -  kbowen6@icloud.com</a:t>
+            </a:r>
           </a:p>
           <a:p>
             <a:pPr algn="l">
@@ -6042,7 +6067,7 @@
                 </a:solidFill>
                 <a:latin typeface="Calibri"/>
               </a:rPr>
-              <a:t>Kevin Bowen, President  -  kbowen6@icloud.com</a:t>
+              <a:t>Malcom Graham, VP Education      Louis Parker, VP Technology</a:t>
             </a:r>
           </a:p>
           <a:p>
@@ -6067,7 +6092,7 @@
                 </a:solidFill>
                 <a:latin typeface="Calibri"/>
               </a:rPr>
-              <a:t>Malcom Graham, VP Education      Louis Parker, VP Technology</a:t>
+              <a:t>Valen Farre, System Engineer      Gary Howland, Animation</a:t>
             </a:r>
           </a:p>
           <a:p>
@@ -6092,7 +6117,7 @@
                 </a:solidFill>
                 <a:latin typeface="Calibri"/>
               </a:rPr>
-              <a:t>Valen Farre, System Engineer      Gary Howland, Animation</a:t>
+              <a:t>Eddie Revollo, Artificial Intelligence</a:t>
             </a:r>
           </a:p>
           <a:p>
@@ -6117,7 +6142,7 @@
                 </a:solidFill>
                 <a:latin typeface="Calibri"/>
               </a:rPr>
-              <a:t>Eddie Revollo, Artificial Intelligence</a:t>
+              <a:t>Interns: Oscar Canazales, Krishnansh Vemulapalli, Soham Gangal, Erik Olsen</a:t>
             </a:r>
           </a:p>
           <a:p>
@@ -6128,32 +6153,7 @@
               <a:spcAft>
                 <a:spcPts val="100"/>
               </a:spcAft>
-              <a:defRPr sz="1200" b="0">
-                <a:solidFill>
-                  <a:srgbClr val="666666"/>
-                </a:solidFill>
-                <a:latin typeface="Calibri"/>
-              </a:defRPr>
-            </a:pPr>
-            <a:r>
-              <a:rPr sz="1200" b="0">
-                <a:solidFill>
-                  <a:srgbClr val="666666"/>
-                </a:solidFill>
-                <a:latin typeface="Calibri"/>
-              </a:rPr>
-              <a:t>Interns: Oscar Canazales, Krishnansh Vemulapalli, Soham Gangal, Erik Olsen</a:t>
-            </a:r>
-          </a:p>
-          <a:p>
-            <a:pPr algn="l">
-              <a:lnSpc>
-                <a:spcPct val="100000"/>
-              </a:lnSpc>
-              <a:spcAft>
-                <a:spcPts val="100"/>
-              </a:spcAft>
-              <a:defRPr sz="1200" b="0">
+              <a:defRPr sz="600" b="0">
                 <a:solidFill>
                   <a:srgbClr val="666666"/>
                 </a:solidFill>
@@ -6493,6 +6493,22 @@
               <a:spcAft>
                 <a:spcPts val="600"/>
               </a:spcAft>
+              <a:defRPr sz="1350" b="0">
+                <a:solidFill>
+                  <a:srgbClr val="222222"/>
+                </a:solidFill>
+                <a:latin typeface="Calibri"/>
+              </a:defRPr>
+            </a:pPr>
+          </a:p>
+          <a:p>
+            <a:pPr lvl="1" algn="l">
+              <a:lnSpc>
+                <a:spcPct val="100000"/>
+              </a:lnSpc>
+              <a:spcAft>
+                <a:spcPts val="600"/>
+              </a:spcAft>
               <a:defRPr sz="2700" b="0">
                 <a:solidFill>
                   <a:srgbClr val="222222"/>
@@ -6500,41 +6516,25 @@
                 <a:latin typeface="Calibri"/>
               </a:defRPr>
             </a:pPr>
-          </a:p>
-          <a:p>
-            <a:pPr lvl="1" algn="l">
+            <a:r>
+              <a:rPr sz="2700" b="0">
+                <a:solidFill>
+                  <a:srgbClr val="222222"/>
+                </a:solidFill>
+                <a:latin typeface="Calibri"/>
+              </a:rPr>
+              <a:t>TYPES are not. The generated prototypes go ABOVE your code, so a prototype mentioning an enum or struct you declared in a tab will not compile - the type is not defined yet at that point.</a:t>
+            </a:r>
+          </a:p>
+          <a:p>
+            <a:pPr algn="l">
               <a:lnSpc>
                 <a:spcPct val="100000"/>
               </a:lnSpc>
               <a:spcAft>
                 <a:spcPts val="600"/>
               </a:spcAft>
-              <a:defRPr sz="2700" b="0">
-                <a:solidFill>
-                  <a:srgbClr val="222222"/>
-                </a:solidFill>
-                <a:latin typeface="Calibri"/>
-              </a:defRPr>
-            </a:pPr>
-            <a:r>
-              <a:rPr sz="2700" b="0">
-                <a:solidFill>
-                  <a:srgbClr val="222222"/>
-                </a:solidFill>
-                <a:latin typeface="Calibri"/>
-              </a:rPr>
-              <a:t>TYPES are not. The generated prototypes go ABOVE your code, so a prototype mentioning an enum or struct you declared in a tab will not compile - the type is not defined yet at that point.</a:t>
-            </a:r>
-          </a:p>
-          <a:p>
-            <a:pPr algn="l">
-              <a:lnSpc>
-                <a:spcPct val="100000"/>
-              </a:lnSpc>
-              <a:spcAft>
-                <a:spcPts val="600"/>
-              </a:spcAft>
-              <a:defRPr sz="2700" b="0">
+              <a:defRPr sz="1350" b="0">
                 <a:solidFill>
                   <a:srgbClr val="222222"/>
                 </a:solidFill>
@@ -8831,7 +8831,7 @@
         <p:spPr>
           <a:xfrm>
             <a:off x="502920" y="1755648"/>
-            <a:ext cx="5364327" cy="4507992"/>
+            <a:ext cx="11185855" cy="4507992"/>
           </a:xfrm>
           <a:prstGeom prst="rect">
             <a:avLst/>
@@ -8849,17 +8849,17 @@
                 <a:spcPct val="100000"/>
               </a:lnSpc>
               <a:spcAft>
-                <a:spcPts val="900"/>
-              </a:spcAft>
-              <a:defRPr sz="1900" b="0">
-                <a:solidFill>
-                  <a:srgbClr val="222222"/>
-                </a:solidFill>
-                <a:latin typeface="Calibri"/>
-              </a:defRPr>
-            </a:pPr>
-            <a:r>
-              <a:rPr sz="1900" b="0">
+                <a:spcPts val="600"/>
+              </a:spcAft>
+              <a:defRPr sz="1800" b="0">
+                <a:solidFill>
+                  <a:srgbClr val="222222"/>
+                </a:solidFill>
+                <a:latin typeface="Calibri"/>
+              </a:defRPr>
+            </a:pPr>
+            <a:r>
+              <a:rPr sz="1800" b="0">
                 <a:solidFill>
                   <a:srgbClr val="222222"/>
                 </a:solidFill>
@@ -8874,9 +8874,9 @@
                 <a:spcPct val="100000"/>
               </a:lnSpc>
               <a:spcAft>
-                <a:spcPts val="900"/>
-              </a:spcAft>
-              <a:defRPr sz="1900" b="0">
+                <a:spcPts val="600"/>
+              </a:spcAft>
+              <a:defRPr sz="900" b="0">
                 <a:solidFill>
                   <a:srgbClr val="222222"/>
                 </a:solidFill>
@@ -8890,17 +8890,17 @@
                 <a:spcPct val="100000"/>
               </a:lnSpc>
               <a:spcAft>
-                <a:spcPts val="900"/>
-              </a:spcAft>
-              <a:defRPr sz="1900" b="0">
-                <a:solidFill>
-                  <a:srgbClr val="222222"/>
-                </a:solidFill>
-                <a:latin typeface="Calibri"/>
-              </a:defRPr>
-            </a:pPr>
-            <a:r>
-              <a:rPr sz="1900" b="0">
+                <a:spcPts val="600"/>
+              </a:spcAft>
+              <a:defRPr sz="1800" b="0">
+                <a:solidFill>
+                  <a:srgbClr val="222222"/>
+                </a:solidFill>
+                <a:latin typeface="Calibri"/>
+              </a:defRPr>
+            </a:pPr>
+            <a:r>
+              <a:rPr sz="1800" b="0">
                 <a:solidFill>
                   <a:srgbClr val="222222"/>
                 </a:solidFill>
@@ -8915,17 +8915,17 @@
                 <a:spcPct val="100000"/>
               </a:lnSpc>
               <a:spcAft>
-                <a:spcPts val="900"/>
-              </a:spcAft>
-              <a:defRPr sz="1900" b="0">
-                <a:solidFill>
-                  <a:srgbClr val="222222"/>
-                </a:solidFill>
-                <a:latin typeface="Calibri"/>
-              </a:defRPr>
-            </a:pPr>
-            <a:r>
-              <a:rPr sz="1900" b="0">
+                <a:spcPts val="600"/>
+              </a:spcAft>
+              <a:defRPr sz="1800" b="0">
+                <a:solidFill>
+                  <a:srgbClr val="222222"/>
+                </a:solidFill>
+                <a:latin typeface="Calibri"/>
+              </a:defRPr>
+            </a:pPr>
+            <a:r>
+              <a:rPr sz="1800" b="0">
                 <a:solidFill>
                   <a:srgbClr val="222222"/>
                 </a:solidFill>
@@ -8940,17 +8940,17 @@
                 <a:spcPct val="100000"/>
               </a:lnSpc>
               <a:spcAft>
-                <a:spcPts val="900"/>
-              </a:spcAft>
-              <a:defRPr sz="1900" b="0">
-                <a:solidFill>
-                  <a:srgbClr val="222222"/>
-                </a:solidFill>
-                <a:latin typeface="Calibri"/>
-              </a:defRPr>
-            </a:pPr>
-            <a:r>
-              <a:rPr sz="1900" b="0">
+                <a:spcPts val="600"/>
+              </a:spcAft>
+              <a:defRPr sz="1800" b="0">
+                <a:solidFill>
+                  <a:srgbClr val="222222"/>
+                </a:solidFill>
+                <a:latin typeface="Calibri"/>
+              </a:defRPr>
+            </a:pPr>
+            <a:r>
+              <a:rPr sz="1800" b="0">
                 <a:solidFill>
                   <a:srgbClr val="222222"/>
                 </a:solidFill>
@@ -8965,17 +8965,17 @@
                 <a:spcPct val="100000"/>
               </a:lnSpc>
               <a:spcAft>
-                <a:spcPts val="900"/>
-              </a:spcAft>
-              <a:defRPr sz="1900" b="0">
-                <a:solidFill>
-                  <a:srgbClr val="222222"/>
-                </a:solidFill>
-                <a:latin typeface="Calibri"/>
-              </a:defRPr>
-            </a:pPr>
-            <a:r>
-              <a:rPr sz="1900" b="0">
+                <a:spcPts val="600"/>
+              </a:spcAft>
+              <a:defRPr sz="1800" b="0">
+                <a:solidFill>
+                  <a:srgbClr val="222222"/>
+                </a:solidFill>
+                <a:latin typeface="Calibri"/>
+              </a:defRPr>
+            </a:pPr>
+            <a:r>
+              <a:rPr sz="1800" b="0">
                 <a:solidFill>
                   <a:srgbClr val="222222"/>
                 </a:solidFill>
@@ -8990,17 +8990,17 @@
                 <a:spcPct val="100000"/>
               </a:lnSpc>
               <a:spcAft>
-                <a:spcPts val="900"/>
-              </a:spcAft>
-              <a:defRPr sz="1900" b="0">
-                <a:solidFill>
-                  <a:srgbClr val="222222"/>
-                </a:solidFill>
-                <a:latin typeface="Calibri"/>
-              </a:defRPr>
-            </a:pPr>
-            <a:r>
-              <a:rPr sz="1900" b="0">
+                <a:spcPts val="600"/>
+              </a:spcAft>
+              <a:defRPr sz="1800" b="0">
+                <a:solidFill>
+                  <a:srgbClr val="222222"/>
+                </a:solidFill>
+                <a:latin typeface="Calibri"/>
+              </a:defRPr>
+            </a:pPr>
+            <a:r>
+              <a:rPr sz="1800" b="0">
                 <a:solidFill>
                   <a:srgbClr val="222222"/>
                 </a:solidFill>
@@ -9009,46 +9009,39 @@
               <a:t>dynamics  retune the deadzones between races</a:t>
             </a:r>
           </a:p>
-        </p:txBody>
-      </p:sp>
-      <p:sp>
-        <p:nvSpPr>
-          <p:cNvPr id="8" name="TextBox 7"/>
-          <p:cNvSpPr txBox="1"/>
-          <p:nvPr/>
-        </p:nvSpPr>
-        <p:spPr>
-          <a:xfrm>
-            <a:off x="6324447" y="1755648"/>
-            <a:ext cx="5364327" cy="4507992"/>
-          </a:xfrm>
-          <a:prstGeom prst="rect">
-            <a:avLst/>
-          </a:prstGeom>
-          <a:noFill/>
-        </p:spPr>
-        <p:txBody>
-          <a:bodyPr wrap="square" lIns="0" tIns="0" rIns="0" bIns="0">
-            <a:spAutoFit/>
-          </a:bodyPr>
-          <a:lstStyle/>
           <a:p>
             <a:pPr algn="l">
               <a:lnSpc>
                 <a:spcPct val="100000"/>
               </a:lnSpc>
               <a:spcAft>
-                <a:spcPts val="900"/>
-              </a:spcAft>
-              <a:defRPr sz="2000" b="0">
-                <a:solidFill>
-                  <a:srgbClr val="222222"/>
-                </a:solidFill>
-                <a:latin typeface="Calibri"/>
-              </a:defRPr>
-            </a:pPr>
-            <a:r>
-              <a:rPr sz="2000" b="0">
+                <a:spcPts val="600"/>
+              </a:spcAft>
+              <a:defRPr sz="900" b="0">
+                <a:solidFill>
+                  <a:srgbClr val="222222"/>
+                </a:solidFill>
+                <a:latin typeface="Calibri"/>
+              </a:defRPr>
+            </a:pPr>
+          </a:p>
+          <a:p>
+            <a:pPr algn="l">
+              <a:lnSpc>
+                <a:spcPct val="100000"/>
+              </a:lnSpc>
+              <a:spcAft>
+                <a:spcPts val="600"/>
+              </a:spcAft>
+              <a:defRPr sz="1800" b="0">
+                <a:solidFill>
+                  <a:srgbClr val="222222"/>
+                </a:solidFill>
+                <a:latin typeface="Calibri"/>
+              </a:defRPr>
+            </a:pPr>
+            <a:r>
+              <a:rPr sz="1800" b="0">
                 <a:solidFill>
                   <a:srgbClr val="222222"/>
                 </a:solidFill>
@@ -9063,9 +9056,9 @@
                 <a:spcPct val="100000"/>
               </a:lnSpc>
               <a:spcAft>
-                <a:spcPts val="900"/>
-              </a:spcAft>
-              <a:defRPr sz="2000" b="0">
+                <a:spcPts val="600"/>
+              </a:spcAft>
+              <a:defRPr sz="900" b="0">
                 <a:solidFill>
                   <a:srgbClr val="222222"/>
                 </a:solidFill>
@@ -9079,17 +9072,17 @@
                 <a:spcPct val="100000"/>
               </a:lnSpc>
               <a:spcAft>
-                <a:spcPts val="900"/>
-              </a:spcAft>
-              <a:defRPr sz="2000" b="0">
-                <a:solidFill>
-                  <a:srgbClr val="222222"/>
-                </a:solidFill>
-                <a:latin typeface="Calibri"/>
-              </a:defRPr>
-            </a:pPr>
-            <a:r>
-              <a:rPr sz="2000" b="0">
+                <a:spcPts val="600"/>
+              </a:spcAft>
+              <a:defRPr sz="1800" b="0">
+                <a:solidFill>
+                  <a:srgbClr val="222222"/>
+                </a:solidFill>
+                <a:latin typeface="Calibri"/>
+              </a:defRPr>
+            </a:pPr>
+            <a:r>
+              <a:rPr sz="1800" b="0">
                 <a:solidFill>
                   <a:srgbClr val="222222"/>
                 </a:solidFill>
@@ -15284,15 +15277,15 @@
               <a:spcAft>
                 <a:spcPts val="600"/>
               </a:spcAft>
-              <a:defRPr sz="2200" b="0">
-                <a:solidFill>
-                  <a:srgbClr val="222222"/>
-                </a:solidFill>
-                <a:latin typeface="Calibri"/>
-              </a:defRPr>
-            </a:pPr>
-            <a:r>
-              <a:rPr sz="2200" b="0">
+              <a:defRPr sz="2300" b="0">
+                <a:solidFill>
+                  <a:srgbClr val="222222"/>
+                </a:solidFill>
+                <a:latin typeface="Calibri"/>
+              </a:defRPr>
+            </a:pPr>
+            <a:r>
+              <a:rPr sz="2300" b="0">
                 <a:solidFill>
                   <a:srgbClr val="222222"/>
                 </a:solidFill>
@@ -15309,7 +15302,7 @@
               <a:spcAft>
                 <a:spcPts val="600"/>
               </a:spcAft>
-              <a:defRPr sz="2200" b="0">
+              <a:defRPr sz="1150" b="0">
                 <a:solidFill>
                   <a:srgbClr val="222222"/>
                 </a:solidFill>
@@ -15325,15 +15318,15 @@
               <a:spcAft>
                 <a:spcPts val="600"/>
               </a:spcAft>
-              <a:defRPr sz="2200" b="0">
-                <a:solidFill>
-                  <a:srgbClr val="222222"/>
-                </a:solidFill>
-                <a:latin typeface="Calibri"/>
-              </a:defRPr>
-            </a:pPr>
-            <a:r>
-              <a:rPr sz="2200" b="0">
+              <a:defRPr sz="2300" b="0">
+                <a:solidFill>
+                  <a:srgbClr val="222222"/>
+                </a:solidFill>
+                <a:latin typeface="Calibri"/>
+              </a:defRPr>
+            </a:pPr>
+            <a:r>
+              <a:rPr sz="2300" b="0">
                 <a:solidFill>
                   <a:srgbClr val="222222"/>
                 </a:solidFill>
@@ -15350,15 +15343,15 @@
               <a:spcAft>
                 <a:spcPts val="600"/>
               </a:spcAft>
-              <a:defRPr sz="2200" b="0">
-                <a:solidFill>
-                  <a:srgbClr val="222222"/>
-                </a:solidFill>
-                <a:latin typeface="Calibri"/>
-              </a:defRPr>
-            </a:pPr>
-            <a:r>
-              <a:rPr sz="2200" b="0">
+              <a:defRPr sz="2300" b="0">
+                <a:solidFill>
+                  <a:srgbClr val="222222"/>
+                </a:solidFill>
+                <a:latin typeface="Calibri"/>
+              </a:defRPr>
+            </a:pPr>
+            <a:r>
+              <a:rPr sz="2300" b="0">
                 <a:solidFill>
                   <a:srgbClr val="222222"/>
                 </a:solidFill>
@@ -15375,15 +15368,15 @@
               <a:spcAft>
                 <a:spcPts val="600"/>
               </a:spcAft>
-              <a:defRPr sz="2200" b="0">
-                <a:solidFill>
-                  <a:srgbClr val="222222"/>
-                </a:solidFill>
-                <a:latin typeface="Calibri"/>
-              </a:defRPr>
-            </a:pPr>
-            <a:r>
-              <a:rPr sz="2200" b="0">
+              <a:defRPr sz="2300" b="0">
+                <a:solidFill>
+                  <a:srgbClr val="222222"/>
+                </a:solidFill>
+                <a:latin typeface="Calibri"/>
+              </a:defRPr>
+            </a:pPr>
+            <a:r>
+              <a:rPr sz="2300" b="0">
                 <a:solidFill>
                   <a:srgbClr val="222222"/>
                 </a:solidFill>
@@ -15400,15 +15393,15 @@
               <a:spcAft>
                 <a:spcPts val="600"/>
               </a:spcAft>
-              <a:defRPr sz="2200" b="0">
-                <a:solidFill>
-                  <a:srgbClr val="222222"/>
-                </a:solidFill>
-                <a:latin typeface="Calibri"/>
-              </a:defRPr>
-            </a:pPr>
-            <a:r>
-              <a:rPr sz="2200" b="0">
+              <a:defRPr sz="2300" b="0">
+                <a:solidFill>
+                  <a:srgbClr val="222222"/>
+                </a:solidFill>
+                <a:latin typeface="Calibri"/>
+              </a:defRPr>
+            </a:pPr>
+            <a:r>
+              <a:rPr sz="2300" b="0">
                 <a:solidFill>
                   <a:srgbClr val="222222"/>
                 </a:solidFill>
@@ -15425,15 +15418,15 @@
               <a:spcAft>
                 <a:spcPts val="600"/>
               </a:spcAft>
-              <a:defRPr sz="2200" b="0">
-                <a:solidFill>
-                  <a:srgbClr val="222222"/>
-                </a:solidFill>
-                <a:latin typeface="Calibri"/>
-              </a:defRPr>
-            </a:pPr>
-            <a:r>
-              <a:rPr sz="2200" b="0">
+              <a:defRPr sz="2300" b="0">
+                <a:solidFill>
+                  <a:srgbClr val="222222"/>
+                </a:solidFill>
+                <a:latin typeface="Calibri"/>
+              </a:defRPr>
+            </a:pPr>
+            <a:r>
+              <a:rPr sz="2300" b="0">
                 <a:solidFill>
                   <a:srgbClr val="222222"/>
                 </a:solidFill>
@@ -15450,15 +15443,15 @@
               <a:spcAft>
                 <a:spcPts val="600"/>
               </a:spcAft>
-              <a:defRPr sz="2200" b="0">
-                <a:solidFill>
-                  <a:srgbClr val="222222"/>
-                </a:solidFill>
-                <a:latin typeface="Calibri"/>
-              </a:defRPr>
-            </a:pPr>
-            <a:r>
-              <a:rPr sz="2200" b="0">
+              <a:defRPr sz="2300" b="0">
+                <a:solidFill>
+                  <a:srgbClr val="222222"/>
+                </a:solidFill>
+                <a:latin typeface="Calibri"/>
+              </a:defRPr>
+            </a:pPr>
+            <a:r>
+              <a:rPr sz="2300" b="0">
                 <a:solidFill>
                   <a:srgbClr val="222222"/>
                 </a:solidFill>
@@ -15702,6 +15695,22 @@
               <a:spcAft>
                 <a:spcPts val="900"/>
               </a:spcAft>
+              <a:defRPr sz="1500" b="0">
+                <a:solidFill>
+                  <a:srgbClr val="222222"/>
+                </a:solidFill>
+                <a:latin typeface="Calibri"/>
+              </a:defRPr>
+            </a:pPr>
+          </a:p>
+          <a:p>
+            <a:pPr algn="l">
+              <a:lnSpc>
+                <a:spcPct val="100000"/>
+              </a:lnSpc>
+              <a:spcAft>
+                <a:spcPts val="900"/>
+              </a:spcAft>
               <a:defRPr sz="3000" b="0">
                 <a:solidFill>
                   <a:srgbClr val="222222"/>
@@ -15709,6 +15718,15 @@
                 <a:latin typeface="Calibri"/>
               </a:defRPr>
             </a:pPr>
+            <a:r>
+              <a:rPr sz="3000" b="0">
+                <a:solidFill>
+                  <a:srgbClr val="222222"/>
+                </a:solidFill>
+                <a:latin typeface="Calibri"/>
+              </a:rPr>
+              <a:t>Notice what that order gives you: the vocabulary first, then the skeleton, then the detail. Going the other way means reading Lighting.ino with no idea what led_mode is or who sets it.</a:t>
+            </a:r>
           </a:p>
           <a:p>
             <a:pPr algn="l">
@@ -15718,32 +15736,7 @@
               <a:spcAft>
                 <a:spcPts val="900"/>
               </a:spcAft>
-              <a:defRPr sz="3000" b="0">
-                <a:solidFill>
-                  <a:srgbClr val="222222"/>
-                </a:solidFill>
-                <a:latin typeface="Calibri"/>
-              </a:defRPr>
-            </a:pPr>
-            <a:r>
-              <a:rPr sz="3000" b="0">
-                <a:solidFill>
-                  <a:srgbClr val="222222"/>
-                </a:solidFill>
-                <a:latin typeface="Calibri"/>
-              </a:rPr>
-              <a:t>Notice what that order gives you: the vocabulary first, then the skeleton, then the detail. Going the other way means reading Lighting.ino with no idea what led_mode is or who sets it.</a:t>
-            </a:r>
-          </a:p>
-          <a:p>
-            <a:pPr algn="l">
-              <a:lnSpc>
-                <a:spcPct val="100000"/>
-              </a:lnSpc>
-              <a:spcAft>
-                <a:spcPts val="900"/>
-              </a:spcAft>
-              <a:defRPr sz="3000" b="0">
+              <a:defRPr sz="1500" b="0">
                 <a:solidFill>
                   <a:srgbClr val="222222"/>
                 </a:solidFill>
@@ -16461,15 +16454,15 @@
               <a:spcAft>
                 <a:spcPts val="600"/>
               </a:spcAft>
-              <a:defRPr sz="1800" b="0">
-                <a:solidFill>
-                  <a:srgbClr val="222222"/>
-                </a:solidFill>
-                <a:latin typeface="Calibri"/>
-              </a:defRPr>
-            </a:pPr>
-            <a:r>
-              <a:rPr sz="1800" b="0">
+              <a:defRPr sz="2000" b="0">
+                <a:solidFill>
+                  <a:srgbClr val="222222"/>
+                </a:solidFill>
+                <a:latin typeface="Calibri"/>
+              </a:defRPr>
+            </a:pPr>
+            <a:r>
+              <a:rPr sz="2000" b="0">
                 <a:solidFill>
                   <a:srgbClr val="222222"/>
                 </a:solidFill>
@@ -16486,7 +16479,7 @@
               <a:spcAft>
                 <a:spcPts val="600"/>
               </a:spcAft>
-              <a:defRPr sz="1800" b="0">
+              <a:defRPr sz="1000" b="0">
                 <a:solidFill>
                   <a:srgbClr val="222222"/>
                 </a:solidFill>
@@ -16502,15 +16495,15 @@
               <a:spcAft>
                 <a:spcPts val="600"/>
               </a:spcAft>
-              <a:defRPr sz="1800" b="0">
-                <a:solidFill>
-                  <a:srgbClr val="222222"/>
-                </a:solidFill>
-                <a:latin typeface="Calibri"/>
-              </a:defRPr>
-            </a:pPr>
-            <a:r>
-              <a:rPr sz="1800" b="0">
+              <a:defRPr sz="2000" b="0">
+                <a:solidFill>
+                  <a:srgbClr val="222222"/>
+                </a:solidFill>
+                <a:latin typeface="Calibri"/>
+              </a:defRPr>
+            </a:pPr>
+            <a:r>
+              <a:rPr sz="2000" b="0">
                 <a:solidFill>
                   <a:srgbClr val="222222"/>
                 </a:solidFill>
@@ -16527,7 +16520,7 @@
               <a:spcAft>
                 <a:spcPts val="600"/>
               </a:spcAft>
-              <a:defRPr sz="1800" b="0">
+              <a:defRPr sz="1000" b="0">
                 <a:solidFill>
                   <a:srgbClr val="222222"/>
                 </a:solidFill>
@@ -16543,15 +16536,15 @@
               <a:spcAft>
                 <a:spcPts val="600"/>
               </a:spcAft>
-              <a:defRPr sz="1800" b="0">
-                <a:solidFill>
-                  <a:srgbClr val="222222"/>
-                </a:solidFill>
-                <a:latin typeface="Calibri"/>
-              </a:defRPr>
-            </a:pPr>
-            <a:r>
-              <a:rPr sz="1800" b="0">
+              <a:defRPr sz="2000" b="0">
+                <a:solidFill>
+                  <a:srgbClr val="222222"/>
+                </a:solidFill>
+                <a:latin typeface="Calibri"/>
+              </a:defRPr>
+            </a:pPr>
+            <a:r>
+              <a:rPr sz="2000" b="0">
                 <a:solidFill>
                   <a:srgbClr val="222222"/>
                 </a:solidFill>
@@ -16568,7 +16561,7 @@
               <a:spcAft>
                 <a:spcPts val="600"/>
               </a:spcAft>
-              <a:defRPr sz="1800" b="0">
+              <a:defRPr sz="1000" b="0">
                 <a:solidFill>
                   <a:srgbClr val="222222"/>
                 </a:solidFill>
@@ -16584,15 +16577,15 @@
               <a:spcAft>
                 <a:spcPts val="600"/>
               </a:spcAft>
-              <a:defRPr sz="1800" b="0">
-                <a:solidFill>
-                  <a:srgbClr val="222222"/>
-                </a:solidFill>
-                <a:latin typeface="Calibri"/>
-              </a:defRPr>
-            </a:pPr>
-            <a:r>
-              <a:rPr sz="1800" b="0">
+              <a:defRPr sz="2000" b="0">
+                <a:solidFill>
+                  <a:srgbClr val="222222"/>
+                </a:solidFill>
+                <a:latin typeface="Calibri"/>
+              </a:defRPr>
+            </a:pPr>
+            <a:r>
+              <a:rPr sz="2000" b="0">
                 <a:solidFill>
                   <a:srgbClr val="222222"/>
                 </a:solidFill>
@@ -19039,7 +19032,7 @@
               <a:spcAft>
                 <a:spcPts val="800"/>
               </a:spcAft>
-              <a:defRPr sz="1800" b="0">
+              <a:defRPr sz="900" b="0">
                 <a:solidFill>
                   <a:srgbClr val="222222"/>
                 </a:solidFill>
@@ -19576,7 +19569,7 @@
               <a:spcAft>
                 <a:spcPts val="800"/>
               </a:spcAft>
-              <a:defRPr sz="1800" b="0">
+              <a:defRPr sz="900" b="0">
                 <a:solidFill>
                   <a:srgbClr val="222222"/>
                 </a:solidFill>
@@ -19983,15 +19976,15 @@
               <a:spcAft>
                 <a:spcPts val="600"/>
               </a:spcAft>
-              <a:defRPr sz="2600" b="0">
-                <a:solidFill>
-                  <a:srgbClr val="222222"/>
-                </a:solidFill>
-                <a:latin typeface="Calibri"/>
-              </a:defRPr>
-            </a:pPr>
-            <a:r>
-              <a:rPr sz="2600" b="0">
+              <a:defRPr sz="2700" b="0">
+                <a:solidFill>
+                  <a:srgbClr val="222222"/>
+                </a:solidFill>
+                <a:latin typeface="Calibri"/>
+              </a:defRPr>
+            </a:pPr>
+            <a:r>
+              <a:rPr sz="2700" b="0">
                 <a:solidFill>
                   <a:srgbClr val="222222"/>
                 </a:solidFill>
@@ -20008,15 +20001,15 @@
               <a:spcAft>
                 <a:spcPts val="600"/>
               </a:spcAft>
-              <a:defRPr sz="2600" b="0">
-                <a:solidFill>
-                  <a:srgbClr val="222222"/>
-                </a:solidFill>
-                <a:latin typeface="Calibri"/>
-              </a:defRPr>
-            </a:pPr>
-            <a:r>
-              <a:rPr sz="2600" b="0">
+              <a:defRPr sz="2700" b="0">
+                <a:solidFill>
+                  <a:srgbClr val="222222"/>
+                </a:solidFill>
+                <a:latin typeface="Calibri"/>
+              </a:defRPr>
+            </a:pPr>
+            <a:r>
+              <a:rPr sz="2700" b="0">
                 <a:solidFill>
                   <a:srgbClr val="222222"/>
                 </a:solidFill>
@@ -20033,7 +20026,7 @@
               <a:spcAft>
                 <a:spcPts val="600"/>
               </a:spcAft>
-              <a:defRPr sz="2600" b="0">
+              <a:defRPr sz="1350" b="0">
                 <a:solidFill>
                   <a:srgbClr val="222222"/>
                 </a:solidFill>
@@ -20049,15 +20042,15 @@
               <a:spcAft>
                 <a:spcPts val="600"/>
               </a:spcAft>
-              <a:defRPr sz="2600" b="0">
-                <a:solidFill>
-                  <a:srgbClr val="222222"/>
-                </a:solidFill>
-                <a:latin typeface="Calibri"/>
-              </a:defRPr>
-            </a:pPr>
-            <a:r>
-              <a:rPr sz="2600" b="0">
+              <a:defRPr sz="2700" b="0">
+                <a:solidFill>
+                  <a:srgbClr val="222222"/>
+                </a:solidFill>
+                <a:latin typeface="Calibri"/>
+              </a:defRPr>
+            </a:pPr>
+            <a:r>
+              <a:rPr sz="2700" b="0">
                 <a:solidFill>
                   <a:srgbClr val="222222"/>
                 </a:solidFill>
@@ -20074,7 +20067,7 @@
               <a:spcAft>
                 <a:spcPts val="600"/>
               </a:spcAft>
-              <a:defRPr sz="2600" b="0">
+              <a:defRPr sz="1350" b="0">
                 <a:solidFill>
                   <a:srgbClr val="222222"/>
                 </a:solidFill>
@@ -20090,15 +20083,15 @@
               <a:spcAft>
                 <a:spcPts val="600"/>
               </a:spcAft>
-              <a:defRPr sz="2600" b="0">
-                <a:solidFill>
-                  <a:srgbClr val="222222"/>
-                </a:solidFill>
-                <a:latin typeface="Calibri"/>
-              </a:defRPr>
-            </a:pPr>
-            <a:r>
-              <a:rPr sz="2600" b="0">
+              <a:defRPr sz="2700" b="0">
+                <a:solidFill>
+                  <a:srgbClr val="222222"/>
+                </a:solidFill>
+                <a:latin typeface="Calibri"/>
+              </a:defRPr>
+            </a:pPr>
+            <a:r>
+              <a:rPr sz="2700" b="0">
                 <a:solidFill>
                   <a:srgbClr val="222222"/>
                 </a:solidFill>

--- a/ground-vehicle/docs/courses/advanced/l1_architecture_and_toolchain.pptx
+++ b/ground-vehicle/docs/courses/advanced/l1_architecture_and_toolchain.pptx
@@ -26,9 +26,6 @@
     <p:sldId id="274" r:id="rId26"/>
     <p:sldId id="275" r:id="rId27"/>
     <p:sldId id="276" r:id="rId28"/>
-    <p:sldId id="277" r:id="rId29"/>
-    <p:sldId id="278" r:id="rId30"/>
-    <p:sldId id="279" r:id="rId31"/>
   </p:sldIdLst>
   <p:sldSz cx="12191695" cy="6858000" type="screen4x3"/>
   <p:notesSz cx="6858000" cy="9144000"/>
@@ -617,40 +614,7 @@
               <a:rPr sz="1200">
                 <a:latin typeface="Calibri"/>
               </a:rPr>
-              <a:t>(Continued from the previous slide - the same notes apply.)</a:t>
-            </a:r>
-          </a:p>
-          <a:p/>
-          <a:p>
-            <a:r>
-              <a:rPr sz="1200">
-                <a:latin typeface="Calibri"/>
-              </a:rPr>
-              <a:t>This is the slide the activity is built on. Go slowly.</a:t>
-            </a:r>
-          </a:p>
-          <a:p>
-            <a:r>
-              <a:rPr sz="1200">
-                <a:latin typeface="Calibri"/>
-              </a:rPr>
-              <a:t>The IDE concatenates the tabs and generates prototypes ABOVE your code. Draw that on the board - the ordering is the whole explanation.</a:t>
-            </a:r>
-          </a:p>
-          <a:p>
-            <a:r>
-              <a:rPr sz="1200">
-                <a:latin typeface="Calibri"/>
-              </a:rPr>
-              <a:t>Functions and globals cross tabs freely. Types do not, because the generated prototype mentions a type that is not defined yet at that point.</a:t>
-            </a:r>
-          </a:p>
-          <a:p>
-            <a:r>
-              <a:rPr sz="1200">
-                <a:latin typeface="Calibri"/>
-              </a:rPr>
-              <a:t>That is precisely why Config.h is a real header. Not style - necessity.</a:t>
+              <a:t>Twenty seconds. First activity.</a:t>
             </a:r>
           </a:p>
         </p:txBody>
@@ -723,7 +687,7 @@
               <a:rPr sz="1200">
                 <a:latin typeface="Calibri"/>
               </a:rPr>
-              <a:t>Eight files, one subsystem each. Read the table, then say the rule underneath it: each tab owns its own state and others go through its functions.</a:t>
+              <a:t>Step 5 is the whole point of this activity. Do not warn them what the error will look like.</a:t>
             </a:r>
           </a:p>
           <a:p>
@@ -731,7 +695,7 @@
               <a:rPr sz="1200">
                 <a:latin typeface="Calibri"/>
               </a:rPr>
-              <a:t>The note is the honest part: nothing in the compiler enforces this. Every tab can see every global. It is a convention held by discipline.</a:t>
+              <a:t>The error points at a line they did not write, in generated code. That experience is worth more than the explanation on the previous slide.</a:t>
             </a:r>
           </a:p>
           <a:p>
@@ -739,7 +703,23 @@
               <a:rPr sz="1200">
                 <a:latin typeface="Calibri"/>
               </a:rPr>
-              <a:t>Ask what happens when somebody breaks the convention. The answer is that the program still compiles, which is exactly why it is dangerous.</a:t>
+              <a:t>Answer to the first question: the error is on a generated prototype line, not on any line in their file.</a:t>
+            </a:r>
+          </a:p>
+          <a:p>
+            <a:r>
+              <a:rPr sz="1200">
+                <a:latin typeface="Calibri"/>
+              </a:rPr>
+              <a:t>Answer to the second: functions are only NAMED in the prototype, but a type has to be DEFINED before the prototype that mentions it.</a:t>
+            </a:r>
+          </a:p>
+          <a:p>
+            <a:r>
+              <a:rPr sz="1200">
+                <a:latin typeface="Calibri"/>
+              </a:rPr>
+              <a:t>Thirty minutes, and it is worth every one of them.</a:t>
             </a:r>
           </a:p>
         </p:txBody>
@@ -812,7 +792,31 @@
               <a:rPr sz="1200">
                 <a:latin typeface="Calibri"/>
               </a:rPr>
-              <a:t>Twenty seconds. First activity.</a:t>
+              <a:t>A compiled binary is opaque. You can see what it does, not what it thinks. That is the framing.</a:t>
+            </a:r>
+          </a:p>
+          <a:p>
+            <a:r>
+              <a:rPr sz="1200">
+                <a:latin typeface="Calibri"/>
+              </a:rPr>
+              <a:t>The four commands on the slide are the four things people actually want at a track event.</a:t>
+            </a:r>
+          </a:p>
+          <a:p>
+            <a:r>
+              <a:rPr sz="1200">
+                <a:latin typeface="Calibri"/>
+              </a:rPr>
+              <a:t>Tuning stops being an edit-compile-upload cycle and becomes a conversation. That is a real productivity difference, not a nicety.</a:t>
+            </a:r>
+          </a:p>
+          <a:p>
+            <a:r>
+              <a:rPr sz="1200">
+                <a:latin typeface="Calibri"/>
+              </a:rPr>
+              <a:t>Industrial controllers, network switches and flight computers all have one. This is standard practice, not a toy.</a:t>
             </a:r>
           </a:p>
         </p:txBody>
@@ -885,7 +889,7 @@
               <a:rPr sz="1200">
                 <a:latin typeface="Calibri"/>
               </a:rPr>
-              <a:t>Step 5 is the whole point of this activity. Do not warn them what the error will look like.</a:t>
+              <a:t>Serial.readStringUntil() WAITS. On a moving vehicle that is unacceptable. Say it plainly.</a:t>
             </a:r>
           </a:p>
           <a:p>
@@ -893,7 +897,7 @@
               <a:rPr sz="1200">
                 <a:latin typeface="Calibri"/>
               </a:rPr>
-              <a:t>The error points at a line they did not write, in generated code. That experience is worth more than the explanation on the previous slide.</a:t>
+              <a:t>This version takes whatever bytes have arrived and returns immediately, every time. That is the non-blocking pattern from beginner Lesson 5, applied to input.</a:t>
             </a:r>
           </a:p>
           <a:p>
@@ -901,7 +905,7 @@
               <a:rPr sz="1200">
                 <a:latin typeface="Calibri"/>
               </a:rPr>
-              <a:t>Answer to the first question: the error is on a generated prototype line, not on any line in their file.</a:t>
+              <a:t>The line-ending handling looks like paranoia until you watch a console appear broken because the Serial Monitor dropdown was set differently.</a:t>
             </a:r>
           </a:p>
           <a:p>
@@ -909,15 +913,7 @@
               <a:rPr sz="1200">
                 <a:latin typeface="Calibri"/>
               </a:rPr>
-              <a:t>Answer to the second: functions are only NAMED in the prototype, but a type has to be DEFINED before the prototype that mentions it.</a:t>
-            </a:r>
-          </a:p>
-          <a:p>
-            <a:r>
-              <a:rPr sz="1200">
-                <a:latin typeface="Calibri"/>
-              </a:rPr>
-              <a:t>Thirty minutes, and it is worth every one of them.</a:t>
+              <a:t>The printable-character and length checks are the input validation. Worth pointing out that they are not optional.</a:t>
             </a:r>
           </a:p>
         </p:txBody>
@@ -990,31 +986,7 @@
               <a:rPr sz="1200">
                 <a:latin typeface="Calibri"/>
               </a:rPr>
-              <a:t>A compiled binary is opaque. You can see what it does, not what it thinks. That is the framing.</a:t>
-            </a:r>
-          </a:p>
-          <a:p>
-            <a:r>
-              <a:rPr sz="1200">
-                <a:latin typeface="Calibri"/>
-              </a:rPr>
-              <a:t>The four commands on the slide are the four things people actually want at a track event.</a:t>
-            </a:r>
-          </a:p>
-          <a:p>
-            <a:r>
-              <a:rPr sz="1200">
-                <a:latin typeface="Calibri"/>
-              </a:rPr>
-              <a:t>Tuning stops being an edit-compile-upload cycle and becomes a conversation. That is a real productivity difference, not a nicety.</a:t>
-            </a:r>
-          </a:p>
-          <a:p>
-            <a:r>
-              <a:rPr sz="1200">
-                <a:latin typeface="Calibri"/>
-              </a:rPr>
-              <a:t>Industrial controllers, network switches and flight computers all have one. This is standard practice, not a toy.</a:t>
+              <a:t>Twenty seconds. Second activity.</a:t>
             </a:r>
           </a:p>
         </p:txBody>
@@ -1087,7 +1059,7 @@
               <a:rPr sz="1200">
                 <a:latin typeface="Calibri"/>
               </a:rPr>
-              <a:t>Serial.readStringUntil() WAITS. On a moving vehicle that is unacceptable. Say it plainly.</a:t>
+              <a:t>Step 4 is the one people skip. Make them try all four line-ending settings - it is the fastest way to appreciate the previous slide.</a:t>
             </a:r>
           </a:p>
           <a:p>
@@ -1095,7 +1067,7 @@
               <a:rPr sz="1200">
                 <a:latin typeface="Calibri"/>
               </a:rPr>
-              <a:t>This version takes whatever bytes have arrived and returns immediately, every time. That is the non-blocking pattern from beginner Lesson 5, applied to input.</a:t>
+              <a:t>Step 5 is the first thing they write themselves today.</a:t>
             </a:r>
           </a:p>
           <a:p>
@@ -1103,7 +1075,7 @@
               <a:rPr sz="1200">
                 <a:latin typeface="Calibri"/>
               </a:rPr>
-              <a:t>The line-ending handling looks like paranoia until you watch a console appear broken because the Serial Monitor dropdown was set differently.</a:t>
+              <a:t>Step 6 sends them into the real program to find the same three problems solved there. That is the bridge to the rest of the course.</a:t>
             </a:r>
           </a:p>
           <a:p>
@@ -1111,7 +1083,7 @@
               <a:rPr sz="1200">
                 <a:latin typeface="Calibri"/>
               </a:rPr>
-              <a:t>The printable-character and length checks are the input validation. Worth pointing out that they are not optional.</a:t>
+              <a:t>The answer to the question: toInt() returns 0 for anything unparseable, so a typo silently becomes a valid-looking zero. Range checking is what catches it.</a:t>
             </a:r>
           </a:p>
         </p:txBody>
@@ -1184,7 +1156,39 @@
               <a:rPr sz="1200">
                 <a:latin typeface="Calibri"/>
               </a:rPr>
-              <a:t>Twenty seconds. Second activity.</a:t>
+              <a:t>The order is the lesson, not the code. Walk down it and ask why each step is where it is.</a:t>
+            </a:r>
+          </a:p>
+          <a:p>
+            <a:r>
+              <a:rPr sz="1200">
+                <a:latin typeface="Calibri"/>
+              </a:rPr>
+              <a:t>Settings first, because everything after may depend on them. Then detect the hardware, because behavior branches on it.</a:t>
+            </a:r>
+          </a:p>
+          <a:p>
+            <a:r>
+              <a:rPr sz="1200">
+                <a:latin typeface="Calibri"/>
+              </a:rPr>
+              <a:t>Motors before lights, because getting the outputs into a safe state matters more than anything pretty.</a:t>
+            </a:r>
+          </a:p>
+          <a:p>
+            <a:r>
+              <a:rPr sz="1200">
+                <a:latin typeface="Calibri"/>
+              </a:rPr>
+              <a:t>Radio last, because a controller connecting to a half-initialised vehicle is the worst possible moment.</a:t>
+            </a:r>
+          </a:p>
+          <a:p>
+            <a:r>
+              <a:rPr sz="1200">
+                <a:latin typeface="Calibri"/>
+              </a:rPr>
+              <a:t>Ask them to justify a different order. Making them defend it is better than telling them.</a:t>
             </a:r>
           </a:p>
         </p:txBody>
@@ -1257,15 +1261,16 @@
               <a:rPr sz="1200">
                 <a:latin typeface="Calibri"/>
               </a:rPr>
-              <a:t>Step 4 is the one people skip. Make them try all four line-ending settings - it is the fastest way to appreciate the previous slide.</a:t>
-            </a:r>
-          </a:p>
+              <a:t>(Continued from the previous slide - the same notes apply.)</a:t>
+            </a:r>
+          </a:p>
+          <a:p/>
           <a:p>
             <a:r>
               <a:rPr sz="1200">
                 <a:latin typeface="Calibri"/>
               </a:rPr>
-              <a:t>Step 5 is the first thing they write themselves today.</a:t>
+              <a:t>The order is the lesson, not the code. Walk down it and ask why each step is where it is.</a:t>
             </a:r>
           </a:p>
           <a:p>
@@ -1273,7 +1278,7 @@
               <a:rPr sz="1200">
                 <a:latin typeface="Calibri"/>
               </a:rPr>
-              <a:t>Step 6 sends them into the real program to find the same three problems solved there. That is the bridge to the rest of the course.</a:t>
+              <a:t>Settings first, because everything after may depend on them. Then detect the hardware, because behavior branches on it.</a:t>
             </a:r>
           </a:p>
           <a:p>
@@ -1281,7 +1286,23 @@
               <a:rPr sz="1200">
                 <a:latin typeface="Calibri"/>
               </a:rPr>
-              <a:t>The answer to the question: toInt() returns 0 for anything unparseable, so a typo silently becomes a valid-looking zero. Range checking is what catches it.</a:t>
+              <a:t>Motors before lights, because getting the outputs into a safe state matters more than anything pretty.</a:t>
+            </a:r>
+          </a:p>
+          <a:p>
+            <a:r>
+              <a:rPr sz="1200">
+                <a:latin typeface="Calibri"/>
+              </a:rPr>
+              <a:t>Radio last, because a controller connecting to a half-initialised vehicle is the worst possible moment.</a:t>
+            </a:r>
+          </a:p>
+          <a:p>
+            <a:r>
+              <a:rPr sz="1200">
+                <a:latin typeface="Calibri"/>
+              </a:rPr>
+              <a:t>Ask them to justify a different order. Making them defend it is better than telling them.</a:t>
             </a:r>
           </a:p>
         </p:txBody>
@@ -1354,7 +1375,7 @@
               <a:rPr sz="1200">
                 <a:latin typeface="Calibri"/>
               </a:rPr>
-              <a:t>The order is the lesson, not the code. Walk down it and ask why each step is where it is.</a:t>
+              <a:t>Walk it left to right with a real vehicle in your hand, touching each box as you name it.</a:t>
             </a:r>
           </a:p>
           <a:p>
@@ -1362,7 +1383,7 @@
               <a:rPr sz="1200">
                 <a:latin typeface="Calibri"/>
               </a:rPr>
-              <a:t>Settings first, because everything after may depend on them. Then detect the hardware, because behavior branches on it.</a:t>
+              <a:t>The point of the diagram is that nothing here is magic - every arrow is a wire or a radio link you can point at.</a:t>
             </a:r>
           </a:p>
           <a:p>
@@ -1370,7 +1391,7 @@
               <a:rPr sz="1200">
                 <a:latin typeface="Calibri"/>
               </a:rPr>
-              <a:t>Motors before lights, because getting the outputs into a safe state matters more than anything pretty.</a:t>
+              <a:t>Ask where THEIR program sits. The answer is the ESP32 box, and everything either side of it is fixed hardware they inherit.</a:t>
             </a:r>
           </a:p>
           <a:p>
@@ -1378,15 +1399,7 @@
               <a:rPr sz="1200">
                 <a:latin typeface="Calibri"/>
               </a:rPr>
-              <a:t>Radio last, because a controller connecting to a half-initialised vehicle is the worst possible moment.</a:t>
-            </a:r>
-          </a:p>
-          <a:p>
-            <a:r>
-              <a:rPr sz="1200">
-                <a:latin typeface="Calibri"/>
-              </a:rPr>
-              <a:t>Ask them to justify a different order. Making them defend it is better than telling them.</a:t>
+              <a:t>Come back to this slide whenever somebody is stuck: naming which box the fault is in is most of the debugging.</a:t>
             </a:r>
           </a:p>
         </p:txBody>
@@ -1459,16 +1472,15 @@
               <a:rPr sz="1200">
                 <a:latin typeface="Calibri"/>
               </a:rPr>
-              <a:t>(Continued from the previous slide - the same notes apply.)</a:t>
-            </a:r>
-          </a:p>
-          <a:p/>
+              <a:t>This is reference, not teaching. Point at it and move on.</a:t>
+            </a:r>
+          </a:p>
           <a:p>
             <a:r>
               <a:rPr sz="1200">
                 <a:latin typeface="Calibri"/>
               </a:rPr>
-              <a:t>The order is the lesson, not the code. Walk down it and ask why each step is where it is.</a:t>
+              <a:t>The note is the one thing to say out loud: GPIO 34 to 39 are input only and have no internal pull-up, which is why the self-test jumper needs an external pull-down.</a:t>
             </a:r>
           </a:p>
           <a:p>
@@ -1476,31 +1488,7 @@
               <a:rPr sz="1200">
                 <a:latin typeface="Calibri"/>
               </a:rPr>
-              <a:t>Settings first, because everything after may depend on them. Then detect the hardware, because behavior branches on it.</a:t>
-            </a:r>
-          </a:p>
-          <a:p>
-            <a:r>
-              <a:rPr sz="1200">
-                <a:latin typeface="Calibri"/>
-              </a:rPr>
-              <a:t>Motors before lights, because getting the outputs into a safe state matters more than anything pretty.</a:t>
-            </a:r>
-          </a:p>
-          <a:p>
-            <a:r>
-              <a:rPr sz="1200">
-                <a:latin typeface="Calibri"/>
-              </a:rPr>
-              <a:t>Radio last, because a controller connecting to a half-initialised vehicle is the worst possible moment.</a:t>
-            </a:r>
-          </a:p>
-          <a:p>
-            <a:r>
-              <a:rPr sz="1200">
-                <a:latin typeface="Calibri"/>
-              </a:rPr>
-              <a:t>Ask them to justify a different order. Making them defend it is better than telling them.</a:t>
+              <a:t>Worth printing for the rest of the course.</a:t>
             </a:r>
           </a:p>
         </p:txBody>
@@ -1646,7 +1634,7 @@
               <a:rPr sz="1200">
                 <a:latin typeface="Calibri"/>
               </a:rPr>
-              <a:t>Walk it left to right with a real vehicle in your hand, touching each box as you name it.</a:t>
+              <a:t>This is the most useful slide in the lesson for anybody who will read somebody else's code again - which is all of them.</a:t>
             </a:r>
           </a:p>
           <a:p>
@@ -1654,7 +1642,7 @@
               <a:rPr sz="1200">
                 <a:latin typeface="Calibri"/>
               </a:rPr>
-              <a:t>The point of the diagram is that nothing here is magic - every arrow is a wire or a radio link you can point at.</a:t>
+              <a:t>Vocabulary first, then skeleton, then detail. Say why: reading Lighting.ino with no idea what led_mode is or who sets it is wasted time.</a:t>
             </a:r>
           </a:p>
           <a:p>
@@ -1662,7 +1650,7 @@
               <a:rPr sz="1200">
                 <a:latin typeface="Calibri"/>
               </a:rPr>
-              <a:t>Ask where THEIR program sits. The answer is the ESP32 box, and everything either side of it is fixed hardware they inherit.</a:t>
+              <a:t>Run the ten-minute exercise properly. Time it, and get answers from three different groups.</a:t>
             </a:r>
           </a:p>
           <a:p>
@@ -1670,7 +1658,7 @@
               <a:rPr sz="1200">
                 <a:latin typeface="Calibri"/>
               </a:rPr>
-              <a:t>Come back to this slide whenever somebody is stuck: naming which box the fault is in is most of the debugging.</a:t>
+              <a:t>Point out that Config.h tells you what the program can DO, because it tells you what somebody thought was worth tuning.</a:t>
             </a:r>
           </a:p>
         </p:txBody>
@@ -1743,298 +1731,6 @@
               <a:rPr sz="1200">
                 <a:latin typeface="Calibri"/>
               </a:rPr>
-              <a:t>This is reference, not teaching. Point at it and move on.</a:t>
-            </a:r>
-          </a:p>
-          <a:p>
-            <a:r>
-              <a:rPr sz="1200">
-                <a:latin typeface="Calibri"/>
-              </a:rPr>
-              <a:t>The note is the one thing to say out loud: GPIO 34 to 39 are input only and have no internal pull-up, which is why the self-test jumper needs an external pull-down.</a:t>
-            </a:r>
-          </a:p>
-          <a:p>
-            <a:r>
-              <a:rPr sz="1200">
-                <a:latin typeface="Calibri"/>
-              </a:rPr>
-              <a:t>Worth printing for the rest of the course.</a:t>
-            </a:r>
-          </a:p>
-        </p:txBody>
-      </p:sp>
-      <p:sp>
-        <p:nvSpPr>
-          <p:cNvPr id="4" name="Slide Number Placeholder 3"/>
-          <p:cNvSpPr>
-            <a:spLocks noGrp="1"/>
-          </p:cNvSpPr>
-          <p:nvPr>
-            <p:ph type="sldNum" idx="5" sz="quarter"/>
-          </p:nvPr>
-        </p:nvSpPr>
-        <p:spPr/>
-      </p:sp>
-    </p:spTree>
-  </p:cSld>
-  <p:clrMapOvr>
-    <a:masterClrMapping/>
-  </p:clrMapOvr>
-</p:notes>
-</file>
-
-<file path=ppt/notesSlides/notesSlide22.xml><?xml version="1.0" encoding="utf-8"?>
-<p:notes xmlns:a="http://schemas.openxmlformats.org/drawingml/2006/main" xmlns:p="http://schemas.openxmlformats.org/presentationml/2006/main" xmlns:r="http://schemas.openxmlformats.org/officeDocument/2006/relationships">
-  <p:cSld>
-    <p:spTree>
-      <p:nvGrpSpPr>
-        <p:cNvPr id="1" name=""/>
-        <p:cNvGrpSpPr/>
-        <p:nvPr/>
-      </p:nvGrpSpPr>
-      <p:grpSpPr>
-        <a:xfrm>
-          <a:off x="0" y="0"/>
-          <a:ext cx="0" cy="0"/>
-          <a:chOff x="0" y="0"/>
-          <a:chExt cx="0" cy="0"/>
-        </a:xfrm>
-      </p:grpSpPr>
-      <p:sp>
-        <p:nvSpPr>
-          <p:cNvPr id="2" name="Slide Image Placeholder 1"/>
-          <p:cNvSpPr>
-            <a:spLocks noGrp="1"/>
-          </p:cNvSpPr>
-          <p:nvPr>
-            <p:ph type="sldImg" idx="2"/>
-          </p:nvPr>
-        </p:nvSpPr>
-        <p:spPr/>
-      </p:sp>
-      <p:sp>
-        <p:nvSpPr>
-          <p:cNvPr id="3" name="Notes Placeholder 2"/>
-          <p:cNvSpPr>
-            <a:spLocks noGrp="1"/>
-          </p:cNvSpPr>
-          <p:nvPr>
-            <p:ph type="body" idx="3" sz="quarter"/>
-          </p:nvPr>
-        </p:nvSpPr>
-        <p:spPr/>
-        <p:txBody>
-          <a:bodyPr/>
-          <a:lstStyle/>
-          <a:p>
-            <a:r>
-              <a:rPr sz="1200">
-                <a:latin typeface="Calibri"/>
-              </a:rPr>
-              <a:t>This is the most useful slide in the lesson for anybody who will read somebody else's code again - which is all of them.</a:t>
-            </a:r>
-          </a:p>
-          <a:p>
-            <a:r>
-              <a:rPr sz="1200">
-                <a:latin typeface="Calibri"/>
-              </a:rPr>
-              <a:t>Vocabulary first, then skeleton, then detail. Say why: reading Lighting.ino with no idea what led_mode is or who sets it is wasted time.</a:t>
-            </a:r>
-          </a:p>
-          <a:p>
-            <a:r>
-              <a:rPr sz="1200">
-                <a:latin typeface="Calibri"/>
-              </a:rPr>
-              <a:t>Run the ten-minute exercise properly. Time it, and get answers from three different groups.</a:t>
-            </a:r>
-          </a:p>
-          <a:p>
-            <a:r>
-              <a:rPr sz="1200">
-                <a:latin typeface="Calibri"/>
-              </a:rPr>
-              <a:t>Point out that Config.h tells you what the program can DO, because it tells you what somebody thought was worth tuning.</a:t>
-            </a:r>
-          </a:p>
-        </p:txBody>
-      </p:sp>
-      <p:sp>
-        <p:nvSpPr>
-          <p:cNvPr id="4" name="Slide Number Placeholder 3"/>
-          <p:cNvSpPr>
-            <a:spLocks noGrp="1"/>
-          </p:cNvSpPr>
-          <p:nvPr>
-            <p:ph type="sldNum" idx="5" sz="quarter"/>
-          </p:nvPr>
-        </p:nvSpPr>
-        <p:spPr/>
-      </p:sp>
-    </p:spTree>
-  </p:cSld>
-  <p:clrMapOvr>
-    <a:masterClrMapping/>
-  </p:clrMapOvr>
-</p:notes>
-</file>
-
-<file path=ppt/notesSlides/notesSlide23.xml><?xml version="1.0" encoding="utf-8"?>
-<p:notes xmlns:a="http://schemas.openxmlformats.org/drawingml/2006/main" xmlns:p="http://schemas.openxmlformats.org/presentationml/2006/main" xmlns:r="http://schemas.openxmlformats.org/officeDocument/2006/relationships">
-  <p:cSld>
-    <p:spTree>
-      <p:nvGrpSpPr>
-        <p:cNvPr id="1" name=""/>
-        <p:cNvGrpSpPr/>
-        <p:nvPr/>
-      </p:nvGrpSpPr>
-      <p:grpSpPr>
-        <a:xfrm>
-          <a:off x="0" y="0"/>
-          <a:ext cx="0" cy="0"/>
-          <a:chOff x="0" y="0"/>
-          <a:chExt cx="0" cy="0"/>
-        </a:xfrm>
-      </p:grpSpPr>
-      <p:sp>
-        <p:nvSpPr>
-          <p:cNvPr id="2" name="Slide Image Placeholder 1"/>
-          <p:cNvSpPr>
-            <a:spLocks noGrp="1"/>
-          </p:cNvSpPr>
-          <p:nvPr>
-            <p:ph type="sldImg" idx="2"/>
-          </p:nvPr>
-        </p:nvSpPr>
-        <p:spPr/>
-      </p:sp>
-      <p:sp>
-        <p:nvSpPr>
-          <p:cNvPr id="3" name="Notes Placeholder 2"/>
-          <p:cNvSpPr>
-            <a:spLocks noGrp="1"/>
-          </p:cNvSpPr>
-          <p:nvPr>
-            <p:ph type="body" idx="3" sz="quarter"/>
-          </p:nvPr>
-        </p:nvSpPr>
-        <p:spPr/>
-        <p:txBody>
-          <a:bodyPr/>
-          <a:lstStyle/>
-          <a:p>
-            <a:r>
-              <a:rPr sz="1200">
-                <a:latin typeface="Calibri"/>
-              </a:rPr>
-              <a:t>(Continued from the previous slide - the same notes apply.)</a:t>
-            </a:r>
-          </a:p>
-          <a:p/>
-          <a:p>
-            <a:r>
-              <a:rPr sz="1200">
-                <a:latin typeface="Calibri"/>
-              </a:rPr>
-              <a:t>This is the most useful slide in the lesson for anybody who will read somebody else's code again - which is all of them.</a:t>
-            </a:r>
-          </a:p>
-          <a:p>
-            <a:r>
-              <a:rPr sz="1200">
-                <a:latin typeface="Calibri"/>
-              </a:rPr>
-              <a:t>Vocabulary first, then skeleton, then detail. Say why: reading Lighting.ino with no idea what led_mode is or who sets it is wasted time.</a:t>
-            </a:r>
-          </a:p>
-          <a:p>
-            <a:r>
-              <a:rPr sz="1200">
-                <a:latin typeface="Calibri"/>
-              </a:rPr>
-              <a:t>Run the ten-minute exercise properly. Time it, and get answers from three different groups.</a:t>
-            </a:r>
-          </a:p>
-          <a:p>
-            <a:r>
-              <a:rPr sz="1200">
-                <a:latin typeface="Calibri"/>
-              </a:rPr>
-              <a:t>Point out that Config.h tells you what the program can DO, because it tells you what somebody thought was worth tuning.</a:t>
-            </a:r>
-          </a:p>
-        </p:txBody>
-      </p:sp>
-      <p:sp>
-        <p:nvSpPr>
-          <p:cNvPr id="4" name="Slide Number Placeholder 3"/>
-          <p:cNvSpPr>
-            <a:spLocks noGrp="1"/>
-          </p:cNvSpPr>
-          <p:nvPr>
-            <p:ph type="sldNum" idx="5" sz="quarter"/>
-          </p:nvPr>
-        </p:nvSpPr>
-        <p:spPr/>
-      </p:sp>
-    </p:spTree>
-  </p:cSld>
-  <p:clrMapOvr>
-    <a:masterClrMapping/>
-  </p:clrMapOvr>
-</p:notes>
-</file>
-
-<file path=ppt/notesSlides/notesSlide24.xml><?xml version="1.0" encoding="utf-8"?>
-<p:notes xmlns:a="http://schemas.openxmlformats.org/drawingml/2006/main" xmlns:p="http://schemas.openxmlformats.org/presentationml/2006/main" xmlns:r="http://schemas.openxmlformats.org/officeDocument/2006/relationships">
-  <p:cSld>
-    <p:spTree>
-      <p:nvGrpSpPr>
-        <p:cNvPr id="1" name=""/>
-        <p:cNvGrpSpPr/>
-        <p:nvPr/>
-      </p:nvGrpSpPr>
-      <p:grpSpPr>
-        <a:xfrm>
-          <a:off x="0" y="0"/>
-          <a:ext cx="0" cy="0"/>
-          <a:chOff x="0" y="0"/>
-          <a:chExt cx="0" cy="0"/>
-        </a:xfrm>
-      </p:grpSpPr>
-      <p:sp>
-        <p:nvSpPr>
-          <p:cNvPr id="2" name="Slide Image Placeholder 1"/>
-          <p:cNvSpPr>
-            <a:spLocks noGrp="1"/>
-          </p:cNvSpPr>
-          <p:nvPr>
-            <p:ph type="sldImg" idx="2"/>
-          </p:nvPr>
-        </p:nvSpPr>
-        <p:spPr/>
-      </p:sp>
-      <p:sp>
-        <p:nvSpPr>
-          <p:cNvPr id="3" name="Notes Placeholder 2"/>
-          <p:cNvSpPr>
-            <a:spLocks noGrp="1"/>
-          </p:cNvSpPr>
-          <p:nvPr>
-            <p:ph type="body" idx="3" sz="quarter"/>
-          </p:nvPr>
-        </p:nvSpPr>
-        <p:spPr/>
-        <p:txBody>
-          <a:bodyPr/>
-          <a:lstStyle/>
-          <a:p>
-            <a:r>
-              <a:rPr sz="1200">
-                <a:latin typeface="Calibri"/>
-              </a:rPr>
               <a:t>Conversation, not a test.</a:t>
             </a:r>
           </a:p>
@@ -2585,16 +2281,15 @@
               <a:rPr sz="1200">
                 <a:latin typeface="Calibri"/>
               </a:rPr>
-              <a:t>(Continued from the previous slide - the same notes apply.)</a:t>
-            </a:r>
-          </a:p>
-          <a:p/>
+              <a:t>This is the slide the activity is built on. Go slowly.</a:t>
+            </a:r>
+          </a:p>
           <a:p>
             <a:r>
               <a:rPr sz="1200">
                 <a:latin typeface="Calibri"/>
               </a:rPr>
-              <a:t>Two vehicles, one binary. Set the problem up before showing the solution.</a:t>
+              <a:t>The IDE concatenates the tabs and generates prototypes ABOVE your code. Draw that on the board - the ordering is the whole explanation.</a:t>
             </a:r>
           </a:p>
           <a:p>
@@ -2602,7 +2297,7 @@
               <a:rPr sz="1200">
                 <a:latin typeface="Calibri"/>
               </a:rPr>
-              <a:t>Two separate builds is the obvious answer and the wrong one. Ask why - somebody eventually flashes the wrong image.</a:t>
+              <a:t>Functions and globals cross tabs freely. Types do not, because the generated prototype mentions a type that is not defined yet at that point.</a:t>
             </a:r>
           </a:p>
           <a:p>
@@ -2610,15 +2305,7 @@
               <a:rPr sz="1200">
                 <a:latin typeface="Calibri"/>
               </a:rPr>
-              <a:t>Detect what is there rather than being told what is there. That sentence is the transferable idea.</a:t>
-            </a:r>
-          </a:p>
-          <a:p>
-            <a:r>
-              <a:rPr sz="1200">
-                <a:latin typeface="Calibri"/>
-              </a:rPr>
-              <a:t>Bit flags rather than booleans: one byte carries several independent capabilities and a test is a single &amp; operation. Show the arithmetic if anybody is shaky on bitwise operators.</a:t>
+              <a:t>That is precisely why Config.h is a real header. Not style - necessity.</a:t>
             </a:r>
           </a:p>
         </p:txBody>
@@ -2691,7 +2378,7 @@
               <a:rPr sz="1200">
                 <a:latin typeface="Calibri"/>
               </a:rPr>
-              <a:t>This is the slide the activity is built on. Go slowly.</a:t>
+              <a:t>Eight files, one subsystem each. Read the table, then say the rule underneath it: each tab owns its own state and others go through its functions.</a:t>
             </a:r>
           </a:p>
           <a:p>
@@ -2699,7 +2386,7 @@
               <a:rPr sz="1200">
                 <a:latin typeface="Calibri"/>
               </a:rPr>
-              <a:t>The IDE concatenates the tabs and generates prototypes ABOVE your code. Draw that on the board - the ordering is the whole explanation.</a:t>
+              <a:t>The note is the honest part: nothing in the compiler enforces this. Every tab can see every global. It is a convention held by discipline.</a:t>
             </a:r>
           </a:p>
           <a:p>
@@ -2707,15 +2394,7 @@
               <a:rPr sz="1200">
                 <a:latin typeface="Calibri"/>
               </a:rPr>
-              <a:t>Functions and globals cross tabs freely. Types do not, because the generated prototype mentions a type that is not defined yet at that point.</a:t>
-            </a:r>
-          </a:p>
-          <a:p>
-            <a:r>
-              <a:rPr sz="1200">
-                <a:latin typeface="Calibri"/>
-              </a:rPr>
-              <a:t>That is precisely why Config.h is a real header. Not style - necessity.</a:t>
+              <a:t>Ask what happens when somebody breaks the convention. The answer is that the program still compiles, which is exactly why it is dangerous.</a:t>
             </a:r>
           </a:p>
         </p:txBody>
@@ -6319,7 +5998,7 @@
                 </a:solidFill>
                 <a:latin typeface="Calibri"/>
               </a:rPr>
-              <a:t>How Arduino tabs actually work  (continued)</a:t>
+              <a:t>Where we are</a:t>
             </a:r>
           </a:p>
         </p:txBody>
@@ -6460,1139 +6139,6 @@
                 <a:latin typeface="Calibri"/>
               </a:rPr>
               <a:t>9</a:t>
-            </a:r>
-          </a:p>
-        </p:txBody>
-      </p:sp>
-      <p:sp>
-        <p:nvSpPr>
-          <p:cNvPr id="6" name="TextBox 5"/>
-          <p:cNvSpPr txBox="1"/>
-          <p:nvPr/>
-        </p:nvSpPr>
-        <p:spPr>
-          <a:xfrm>
-            <a:off x="502920" y="1188720"/>
-            <a:ext cx="11185855" cy="3986784"/>
-          </a:xfrm>
-          <a:prstGeom prst="rect">
-            <a:avLst/>
-          </a:prstGeom>
-          <a:noFill/>
-        </p:spPr>
-        <p:txBody>
-          <a:bodyPr wrap="square" lIns="0" tIns="0" rIns="0" bIns="0">
-            <a:spAutoFit/>
-          </a:bodyPr>
-          <a:lstStyle/>
-          <a:p>
-            <a:pPr algn="l">
-              <a:lnSpc>
-                <a:spcPct val="100000"/>
-              </a:lnSpc>
-              <a:spcAft>
-                <a:spcPts val="600"/>
-              </a:spcAft>
-              <a:defRPr sz="1350" b="0">
-                <a:solidFill>
-                  <a:srgbClr val="222222"/>
-                </a:solidFill>
-                <a:latin typeface="Calibri"/>
-              </a:defRPr>
-            </a:pPr>
-          </a:p>
-          <a:p>
-            <a:pPr lvl="1" algn="l">
-              <a:lnSpc>
-                <a:spcPct val="100000"/>
-              </a:lnSpc>
-              <a:spcAft>
-                <a:spcPts val="600"/>
-              </a:spcAft>
-              <a:defRPr sz="2700" b="0">
-                <a:solidFill>
-                  <a:srgbClr val="222222"/>
-                </a:solidFill>
-                <a:latin typeface="Calibri"/>
-              </a:defRPr>
-            </a:pPr>
-            <a:r>
-              <a:rPr sz="2700" b="0">
-                <a:solidFill>
-                  <a:srgbClr val="222222"/>
-                </a:solidFill>
-                <a:latin typeface="Calibri"/>
-              </a:rPr>
-              <a:t>TYPES are not. The generated prototypes go ABOVE your code, so a prototype mentioning an enum or struct you declared in a tab will not compile - the type is not defined yet at that point.</a:t>
-            </a:r>
-          </a:p>
-          <a:p>
-            <a:pPr algn="l">
-              <a:lnSpc>
-                <a:spcPct val="100000"/>
-              </a:lnSpc>
-              <a:spcAft>
-                <a:spcPts val="600"/>
-              </a:spcAft>
-              <a:defRPr sz="1350" b="0">
-                <a:solidFill>
-                  <a:srgbClr val="222222"/>
-                </a:solidFill>
-                <a:latin typeface="Calibri"/>
-              </a:defRPr>
-            </a:pPr>
-          </a:p>
-          <a:p>
-            <a:pPr algn="l">
-              <a:lnSpc>
-                <a:spcPct val="100000"/>
-              </a:lnSpc>
-              <a:spcAft>
-                <a:spcPts val="600"/>
-              </a:spcAft>
-              <a:defRPr sz="2700" b="0">
-                <a:solidFill>
-                  <a:srgbClr val="222222"/>
-                </a:solidFill>
-                <a:latin typeface="Calibri"/>
-              </a:defRPr>
-            </a:pPr>
-            <a:r>
-              <a:rPr sz="2700" b="0">
-                <a:solidFill>
-                  <a:srgbClr val="222222"/>
-                </a:solidFill>
-                <a:latin typeface="Calibri"/>
-              </a:rPr>
-              <a:t>That is precisely why Config.h is a real header rather than a ninth tab. A header is #included by the main sketch, so everything in it is defined before the generated prototypes appear.</a:t>
-            </a:r>
-          </a:p>
-        </p:txBody>
-      </p:sp>
-      <p:sp>
-        <p:nvSpPr>
-          <p:cNvPr id="7" name="Rounded Rectangle 6"/>
-          <p:cNvSpPr/>
-          <p:nvPr/>
-        </p:nvSpPr>
-        <p:spPr>
-          <a:xfrm>
-            <a:off x="502920" y="5303520"/>
-            <a:ext cx="11185855" cy="960120"/>
-          </a:xfrm>
-          <a:prstGeom prst="roundRect">
-            <a:avLst>
-              <a:gd name="adj" fmla="val 4000"/>
-            </a:avLst>
-          </a:prstGeom>
-          <a:solidFill>
-            <a:srgbClr val="EEF3F8"/>
-          </a:solidFill>
-          <a:ln w="12700">
-            <a:solidFill>
-              <a:srgbClr val="0E7C86"/>
-            </a:solidFill>
-          </a:ln>
-          <a:effectLst/>
-        </p:spPr>
-        <p:style>
-          <a:lnRef idx="1">
-            <a:schemeClr val="accent1"/>
-          </a:lnRef>
-          <a:fillRef idx="3">
-            <a:schemeClr val="accent1"/>
-          </a:fillRef>
-          <a:effectRef idx="2">
-            <a:schemeClr val="accent1"/>
-          </a:effectRef>
-          <a:fontRef idx="minor">
-            <a:schemeClr val="lt1"/>
-          </a:fontRef>
-        </p:style>
-        <p:txBody>
-          <a:bodyPr rtlCol="0" anchor="ctr" wrap="square" lIns="164592" rIns="164592" tIns="73152" bIns="73152"/>
-          <a:lstStyle/>
-          <a:p>
-            <a:pPr algn="l"/>
-            <a:r>
-              <a:rPr sz="1300" b="1">
-                <a:solidFill>
-                  <a:srgbClr val="0E7C86"/>
-                </a:solidFill>
-                <a:latin typeface="Calibri"/>
-              </a:rPr>
-              <a:t>KEY POINT   </a:t>
-            </a:r>
-            <a:r>
-              <a:rPr sz="1500">
-                <a:solidFill>
-                  <a:srgbClr val="222222"/>
-                </a:solidFill>
-                <a:latin typeface="Calibri"/>
-              </a:rPr>
-              <a:t>Op 12's Config.h opens with a paragraph saying this. Now you know what it is warning you about.</a:t>
-            </a:r>
-          </a:p>
-        </p:txBody>
-      </p:sp>
-    </p:spTree>
-  </p:cSld>
-  <p:clrMapOvr>
-    <a:masterClrMapping/>
-  </p:clrMapOvr>
-</p:sld>
-</file>
-
-<file path=ppt/slides/slide11.xml><?xml version="1.0" encoding="utf-8"?>
-<p:sld xmlns:a="http://schemas.openxmlformats.org/drawingml/2006/main" xmlns:p="http://schemas.openxmlformats.org/presentationml/2006/main" xmlns:r="http://schemas.openxmlformats.org/officeDocument/2006/relationships">
-  <p:cSld>
-    <p:spTree>
-      <p:nvGrpSpPr>
-        <p:cNvPr id="1" name=""/>
-        <p:cNvGrpSpPr/>
-        <p:nvPr/>
-      </p:nvGrpSpPr>
-      <p:grpSpPr/>
-      <p:sp>
-        <p:nvSpPr>
-          <p:cNvPr id="2" name="Title 1"/>
-          <p:cNvSpPr>
-            <a:spLocks noGrp="1"/>
-          </p:cNvSpPr>
-          <p:nvPr>
-            <p:ph type="title"/>
-          </p:nvPr>
-        </p:nvSpPr>
-        <p:spPr>
-          <a:xfrm>
-            <a:off x="502920" y="274320"/>
-            <a:ext cx="11185855" cy="777240"/>
-          </a:xfrm>
-        </p:spPr>
-        <p:txBody>
-          <a:bodyPr wrap="square" anchor="b"/>
-          <a:lstStyle/>
-          <a:p>
-            <a:pPr algn="l">
-              <a:lnSpc>
-                <a:spcPct val="100000"/>
-              </a:lnSpc>
-              <a:spcAft>
-                <a:spcPts val="0"/>
-              </a:spcAft>
-              <a:defRPr sz="2800" b="1">
-                <a:solidFill>
-                  <a:srgbClr val="1F3A5F"/>
-                </a:solidFill>
-                <a:latin typeface="Calibri"/>
-              </a:defRPr>
-            </a:pPr>
-            <a:r>
-              <a:rPr sz="2800" b="1">
-                <a:solidFill>
-                  <a:srgbClr val="1F3A5F"/>
-                </a:solidFill>
-                <a:latin typeface="Calibri"/>
-              </a:rPr>
-              <a:t>The eight files, and what each one owns</a:t>
-            </a:r>
-          </a:p>
-        </p:txBody>
-      </p:sp>
-      <p:sp>
-        <p:nvSpPr>
-          <p:cNvPr id="3" name="Rectangle 2"/>
-          <p:cNvSpPr/>
-          <p:nvPr/>
-        </p:nvSpPr>
-        <p:spPr>
-          <a:xfrm>
-            <a:off x="502920" y="1097280"/>
-            <a:ext cx="11185855" cy="19050"/>
-          </a:xfrm>
-          <a:prstGeom prst="rect">
-            <a:avLst/>
-          </a:prstGeom>
-          <a:solidFill>
-            <a:srgbClr val="C8D2DE"/>
-          </a:solidFill>
-          <a:ln>
-            <a:noFill/>
-          </a:ln>
-          <a:effectLst/>
-        </p:spPr>
-        <p:style>
-          <a:lnRef idx="1">
-            <a:schemeClr val="accent1"/>
-          </a:lnRef>
-          <a:fillRef idx="3">
-            <a:schemeClr val="accent1"/>
-          </a:fillRef>
-          <a:effectRef idx="2">
-            <a:schemeClr val="accent1"/>
-          </a:effectRef>
-          <a:fontRef idx="minor">
-            <a:schemeClr val="lt1"/>
-          </a:fontRef>
-        </p:style>
-        <p:txBody>
-          <a:bodyPr rtlCol="0" anchor="ctr"/>
-          <a:lstStyle/>
-          <a:p>
-            <a:pPr algn="ctr"/>
-          </a:p>
-        </p:txBody>
-      </p:sp>
-      <p:sp>
-        <p:nvSpPr>
-          <p:cNvPr id="4" name="TextBox 3"/>
-          <p:cNvSpPr txBox="1"/>
-          <p:nvPr/>
-        </p:nvSpPr>
-        <p:spPr>
-          <a:xfrm>
-            <a:off x="502920" y="6382512"/>
-            <a:ext cx="10545775" cy="274320"/>
-          </a:xfrm>
-          <a:prstGeom prst="rect">
-            <a:avLst/>
-          </a:prstGeom>
-          <a:noFill/>
-        </p:spPr>
-        <p:txBody>
-          <a:bodyPr wrap="square" lIns="0" tIns="0">
-            <a:spAutoFit/>
-          </a:bodyPr>
-          <a:lstStyle/>
-          <a:p>
-            <a:pPr algn="l">
-              <a:lnSpc>
-                <a:spcPct val="100000"/>
-              </a:lnSpc>
-              <a:spcAft>
-                <a:spcPts val="0"/>
-              </a:spcAft>
-              <a:defRPr sz="1000" b="0">
-                <a:solidFill>
-                  <a:srgbClr val="666666"/>
-                </a:solidFill>
-                <a:latin typeface="Calibri"/>
-              </a:defRPr>
-            </a:pPr>
-            <a:r>
-              <a:rPr sz="1000" b="0">
-                <a:solidFill>
-                  <a:srgbClr val="666666"/>
-                </a:solidFill>
-                <a:latin typeface="Calibri"/>
-              </a:rPr>
-              <a:t>Pathfinder Advanced - Op Program 12  |  Lesson 1</a:t>
-            </a:r>
-          </a:p>
-        </p:txBody>
-      </p:sp>
-      <p:sp>
-        <p:nvSpPr>
-          <p:cNvPr id="5" name="TextBox 4"/>
-          <p:cNvSpPr txBox="1"/>
-          <p:nvPr/>
-        </p:nvSpPr>
-        <p:spPr>
-          <a:xfrm>
-            <a:off x="11231575" y="6382512"/>
-            <a:ext cx="457200" cy="274320"/>
-          </a:xfrm>
-          <a:prstGeom prst="rect">
-            <a:avLst/>
-          </a:prstGeom>
-          <a:noFill/>
-        </p:spPr>
-        <p:txBody>
-          <a:bodyPr wrap="square" lIns="0" tIns="0">
-            <a:spAutoFit/>
-          </a:bodyPr>
-          <a:lstStyle/>
-          <a:p>
-            <a:pPr algn="r">
-              <a:lnSpc>
-                <a:spcPct val="100000"/>
-              </a:lnSpc>
-              <a:spcAft>
-                <a:spcPts val="0"/>
-              </a:spcAft>
-              <a:defRPr sz="1000" b="0">
-                <a:solidFill>
-                  <a:srgbClr val="666666"/>
-                </a:solidFill>
-                <a:latin typeface="Calibri"/>
-              </a:defRPr>
-            </a:pPr>
-            <a:r>
-              <a:rPr sz="1000" b="0">
-                <a:solidFill>
-                  <a:srgbClr val="666666"/>
-                </a:solidFill>
-                <a:latin typeface="Calibri"/>
-              </a:rPr>
-              <a:t>10</a:t>
-            </a:r>
-          </a:p>
-        </p:txBody>
-      </p:sp>
-      <p:sp>
-        <p:nvSpPr>
-          <p:cNvPr id="6" name="TextBox 5"/>
-          <p:cNvSpPr txBox="1"/>
-          <p:nvPr/>
-        </p:nvSpPr>
-        <p:spPr>
-          <a:xfrm>
-            <a:off x="502920" y="1188720"/>
-            <a:ext cx="11185855" cy="457200"/>
-          </a:xfrm>
-          <a:prstGeom prst="rect">
-            <a:avLst/>
-          </a:prstGeom>
-          <a:noFill/>
-        </p:spPr>
-        <p:txBody>
-          <a:bodyPr wrap="square" lIns="0" tIns="0" rIns="0" bIns="0">
-            <a:spAutoFit/>
-          </a:bodyPr>
-          <a:lstStyle/>
-          <a:p>
-            <a:pPr algn="l">
-              <a:lnSpc>
-                <a:spcPct val="100000"/>
-              </a:lnSpc>
-              <a:spcAft>
-                <a:spcPts val="600"/>
-              </a:spcAft>
-              <a:defRPr sz="1400" b="0">
-                <a:solidFill>
-                  <a:srgbClr val="222222"/>
-                </a:solidFill>
-                <a:latin typeface="Calibri"/>
-              </a:defRPr>
-            </a:pPr>
-            <a:r>
-              <a:rPr sz="1400" b="0">
-                <a:solidFill>
-                  <a:srgbClr val="222222"/>
-                </a:solidFill>
-                <a:latin typeface="Calibri"/>
-              </a:rPr>
-              <a:t>One subsystem per file. The rule that makes it work: each tab owns its own state, and other tabs go through its functions.</a:t>
-            </a:r>
-          </a:p>
-        </p:txBody>
-      </p:sp>
-      <p:graphicFrame>
-        <p:nvGraphicFramePr>
-          <p:cNvPr id="7" name="Table 6"/>
-          <p:cNvGraphicFramePr>
-            <a:graphicFrameLocks noGrp="1"/>
-          </p:cNvGraphicFramePr>
-          <p:nvPr/>
-        </p:nvGraphicFramePr>
-        <p:xfrm>
-          <a:off x="502920" y="1691640"/>
-          <a:ext cx="11185854" cy="3328987"/>
-        </p:xfrm>
-        <a:graphic>
-          <a:graphicData uri="http://schemas.openxmlformats.org/drawingml/2006/table">
-            <a:tbl>
-              <a:tblPr firstRow="1" bandRow="1">
-                <a:tableStyleId>{5C22544A-7EE6-4342-B048-85BDC9FD1C3A}</a:tableStyleId>
-              </a:tblPr>
-              <a:tblGrid>
-                <a:gridCol w="3457446"/>
-                <a:gridCol w="7728408"/>
-              </a:tblGrid>
-              <a:tr h="369887">
-                <a:tc>
-                  <a:txBody>
-                    <a:bodyPr/>
-                    <a:lstStyle/>
-                    <a:p>
-                      <a:r>
-                        <a:rPr sz="1850" b="1">
-                          <a:solidFill>
-                            <a:srgbClr val="FFFFFF"/>
-                          </a:solidFill>
-                          <a:latin typeface="Calibri"/>
-                        </a:rPr>
-                        <a:t>File</a:t>
-                      </a:r>
-                    </a:p>
-                  </a:txBody>
-                  <a:tcPr marL="73152" marT="18288" marB="18288">
-                    <a:solidFill>
-                      <a:srgbClr val="1F3A5F"/>
-                    </a:solidFill>
-                  </a:tcPr>
-                </a:tc>
-                <a:tc>
-                  <a:txBody>
-                    <a:bodyPr/>
-                    <a:lstStyle/>
-                    <a:p>
-                      <a:r>
-                        <a:rPr sz="1850" b="1">
-                          <a:solidFill>
-                            <a:srgbClr val="FFFFFF"/>
-                          </a:solidFill>
-                          <a:latin typeface="Calibri"/>
-                        </a:rPr>
-                        <a:t>Owns</a:t>
-                      </a:r>
-                    </a:p>
-                  </a:txBody>
-                  <a:tcPr marL="73152" marT="18288" marB="18288">
-                    <a:solidFill>
-                      <a:srgbClr val="1F3A5F"/>
-                    </a:solidFill>
-                  </a:tcPr>
-                </a:tc>
-              </a:tr>
-              <a:tr h="369887">
-                <a:tc>
-                  <a:txBody>
-                    <a:bodyPr/>
-                    <a:lstStyle/>
-                    <a:p>
-                      <a:r>
-                        <a:rPr sz="1850">
-                          <a:solidFill>
-                            <a:srgbClr val="222222"/>
-                          </a:solidFill>
-                          <a:latin typeface="Consolas"/>
-                        </a:rPr>
-                        <a:t>Pathfinder_Op_Program12.ino</a:t>
-                      </a:r>
-                    </a:p>
-                  </a:txBody>
-                  <a:tcPr marL="73152" marT="18288" marB="18288">
-                    <a:solidFill>
-                      <a:srgbClr val="FFFFFF"/>
-                    </a:solidFill>
-                  </a:tcPr>
-                </a:tc>
-                <a:tc>
-                  <a:txBody>
-                    <a:bodyPr/>
-                    <a:lstStyle/>
-                    <a:p>
-                      <a:r>
-                        <a:rPr sz="1850">
-                          <a:solidFill>
-                            <a:srgbClr val="222222"/>
-                          </a:solidFill>
-                          <a:latin typeface="Calibri"/>
-                        </a:rPr>
-                        <a:t>setup(), loop(), the hardware objects, the shared state</a:t>
-                      </a:r>
-                    </a:p>
-                  </a:txBody>
-                  <a:tcPr marL="73152" marT="18288" marB="18288">
-                    <a:solidFill>
-                      <a:srgbClr val="FFFFFF"/>
-                    </a:solidFill>
-                  </a:tcPr>
-                </a:tc>
-              </a:tr>
-              <a:tr h="369887">
-                <a:tc>
-                  <a:txBody>
-                    <a:bodyPr/>
-                    <a:lstStyle/>
-                    <a:p>
-                      <a:r>
-                        <a:rPr sz="1850">
-                          <a:solidFill>
-                            <a:srgbClr val="222222"/>
-                          </a:solidFill>
-                          <a:latin typeface="Calibri"/>
-                        </a:rPr>
-                        <a:t>Config.h</a:t>
-                      </a:r>
-                    </a:p>
-                  </a:txBody>
-                  <a:tcPr marL="73152" marT="18288" marB="18288">
-                    <a:solidFill>
-                      <a:srgbClr val="EEF3F8"/>
-                    </a:solidFill>
-                  </a:tcPr>
-                </a:tc>
-                <a:tc>
-                  <a:txBody>
-                    <a:bodyPr/>
-                    <a:lstStyle/>
-                    <a:p>
-                      <a:r>
-                        <a:rPr sz="1850">
-                          <a:solidFill>
-                            <a:srgbClr val="222222"/>
-                          </a:solidFill>
-                          <a:latin typeface="Calibri"/>
-                        </a:rPr>
-                        <a:t>Every tunable number and every custom type</a:t>
-                      </a:r>
-                    </a:p>
-                  </a:txBody>
-                  <a:tcPr marL="73152" marT="18288" marB="18288">
-                    <a:solidFill>
-                      <a:srgbClr val="EEF3F8"/>
-                    </a:solidFill>
-                  </a:tcPr>
-                </a:tc>
-              </a:tr>
-              <a:tr h="369887">
-                <a:tc>
-                  <a:txBody>
-                    <a:bodyPr/>
-                    <a:lstStyle/>
-                    <a:p>
-                      <a:r>
-                        <a:rPr sz="1850">
-                          <a:solidFill>
-                            <a:srgbClr val="222222"/>
-                          </a:solidFill>
-                          <a:latin typeface="Calibri"/>
-                        </a:rPr>
-                        <a:t>Motors.ino</a:t>
-                      </a:r>
-                    </a:p>
-                  </a:txBody>
-                  <a:tcPr marL="73152" marT="18288" marB="18288">
-                    <a:solidFill>
-                      <a:srgbClr val="FFFFFF"/>
-                    </a:solidFill>
-                  </a:tcPr>
-                </a:tc>
-                <a:tc>
-                  <a:txBody>
-                    <a:bodyPr/>
-                    <a:lstStyle/>
-                    <a:p>
-                      <a:r>
-                        <a:rPr sz="1850">
-                          <a:solidFill>
-                            <a:srgbClr val="222222"/>
-                          </a:solidFill>
-                          <a:latin typeface="Calibri"/>
-                        </a:rPr>
-                        <a:t>PWM setup, drive modes, ramping, servos, throttle modes</a:t>
-                      </a:r>
-                    </a:p>
-                  </a:txBody>
-                  <a:tcPr marL="73152" marT="18288" marB="18288">
-                    <a:solidFill>
-                      <a:srgbClr val="FFFFFF"/>
-                    </a:solidFill>
-                  </a:tcPr>
-                </a:tc>
-              </a:tr>
-              <a:tr h="369887">
-                <a:tc>
-                  <a:txBody>
-                    <a:bodyPr/>
-                    <a:lstStyle/>
-                    <a:p>
-                      <a:r>
-                        <a:rPr sz="1850">
-                          <a:solidFill>
-                            <a:srgbClr val="222222"/>
-                          </a:solidFill>
-                          <a:latin typeface="Calibri"/>
-                        </a:rPr>
-                        <a:t>Lighting.ino</a:t>
-                      </a:r>
-                    </a:p>
-                  </a:txBody>
-                  <a:tcPr marL="73152" marT="18288" marB="18288">
-                    <a:solidFill>
-                      <a:srgbClr val="EEF3F8"/>
-                    </a:solidFill>
-                  </a:tcPr>
-                </a:tc>
-                <a:tc>
-                  <a:txBody>
-                    <a:bodyPr/>
-                    <a:lstStyle/>
-                    <a:p>
-                      <a:r>
-                        <a:rPr sz="1850">
-                          <a:solidFill>
-                            <a:srgbClr val="222222"/>
-                          </a:solidFill>
-                          <a:latin typeface="Calibri"/>
-                        </a:rPr>
-                        <a:t>Color helpers, every animation, the lighting state machine</a:t>
-                      </a:r>
-                    </a:p>
-                  </a:txBody>
-                  <a:tcPr marL="73152" marT="18288" marB="18288">
-                    <a:solidFill>
-                      <a:srgbClr val="EEF3F8"/>
-                    </a:solidFill>
-                  </a:tcPr>
-                </a:tc>
-              </a:tr>
-              <a:tr h="369887">
-                <a:tc>
-                  <a:txBody>
-                    <a:bodyPr/>
-                    <a:lstStyle/>
-                    <a:p>
-                      <a:r>
-                        <a:rPr sz="1850">
-                          <a:solidFill>
-                            <a:srgbClr val="222222"/>
-                          </a:solidFill>
-                          <a:latin typeface="Calibri"/>
-                        </a:rPr>
-                        <a:t>Bluetooth.ino</a:t>
-                      </a:r>
-                    </a:p>
-                  </a:txBody>
-                  <a:tcPr marL="73152" marT="18288" marB="18288">
-                    <a:solidFill>
-                      <a:srgbClr val="FFFFFF"/>
-                    </a:solidFill>
-                  </a:tcPr>
-                </a:tc>
-                <a:tc>
-                  <a:txBody>
-                    <a:bodyPr/>
-                    <a:lstStyle/>
-                    <a:p>
-                      <a:r>
-                        <a:rPr sz="1850">
-                          <a:solidFill>
-                            <a:srgbClr val="222222"/>
-                          </a:solidFill>
-                          <a:latin typeface="Calibri"/>
-                        </a:rPr>
-                        <a:t>Connection callbacks, the allowlist, the pairing workflow</a:t>
-                      </a:r>
-                    </a:p>
-                  </a:txBody>
-                  <a:tcPr marL="73152" marT="18288" marB="18288">
-                    <a:solidFill>
-                      <a:srgbClr val="FFFFFF"/>
-                    </a:solidFill>
-                  </a:tcPr>
-                </a:tc>
-              </a:tr>
-              <a:tr h="369887">
-                <a:tc>
-                  <a:txBody>
-                    <a:bodyPr/>
-                    <a:lstStyle/>
-                    <a:p>
-                      <a:r>
-                        <a:rPr sz="1850">
-                          <a:solidFill>
-                            <a:srgbClr val="222222"/>
-                          </a:solidFill>
-                          <a:latin typeface="Calibri"/>
-                        </a:rPr>
-                        <a:t>Console.ino</a:t>
-                      </a:r>
-                    </a:p>
-                  </a:txBody>
-                  <a:tcPr marL="73152" marT="18288" marB="18288">
-                    <a:solidFill>
-                      <a:srgbClr val="EEF3F8"/>
-                    </a:solidFill>
-                  </a:tcPr>
-                </a:tc>
-                <a:tc>
-                  <a:txBody>
-                    <a:bodyPr/>
-                    <a:lstStyle/>
-                    <a:p>
-                      <a:r>
-                        <a:rPr sz="1850">
-                          <a:solidFill>
-                            <a:srgbClr val="222222"/>
-                          </a:solidFill>
-                          <a:latin typeface="Calibri"/>
-                        </a:rPr>
-                        <a:t>The serial command interface, EEPROM settings, diagnostics</a:t>
-                      </a:r>
-                    </a:p>
-                  </a:txBody>
-                  <a:tcPr marL="73152" marT="18288" marB="18288">
-                    <a:solidFill>
-                      <a:srgbClr val="EEF3F8"/>
-                    </a:solidFill>
-                  </a:tcPr>
-                </a:tc>
-              </a:tr>
-              <a:tr h="369887">
-                <a:tc>
-                  <a:txBody>
-                    <a:bodyPr/>
-                    <a:lstStyle/>
-                    <a:p>
-                      <a:r>
-                        <a:rPr sz="1850">
-                          <a:solidFill>
-                            <a:srgbClr val="222222"/>
-                          </a:solidFill>
-                          <a:latin typeface="Calibri"/>
-                        </a:rPr>
-                        <a:t>Sensors.ino</a:t>
-                      </a:r>
-                    </a:p>
-                  </a:txBody>
-                  <a:tcPr marL="73152" marT="18288" marB="18288">
-                    <a:solidFill>
-                      <a:srgbClr val="FFFFFF"/>
-                    </a:solidFill>
-                  </a:tcPr>
-                </a:tc>
-                <a:tc>
-                  <a:txBody>
-                    <a:bodyPr/>
-                    <a:lstStyle/>
-                    <a:p>
-                      <a:r>
-                        <a:rPr sz="1850">
-                          <a:solidFill>
-                            <a:srgbClr val="222222"/>
-                          </a:solidFill>
-                          <a:latin typeface="Calibri"/>
-                        </a:rPr>
-                        <a:t>The INA219 driver</a:t>
-                      </a:r>
-                    </a:p>
-                  </a:txBody>
-                  <a:tcPr marL="73152" marT="18288" marB="18288">
-                    <a:solidFill>
-                      <a:srgbClr val="FFFFFF"/>
-                    </a:solidFill>
-                  </a:tcPr>
-                </a:tc>
-              </a:tr>
-              <a:tr h="369891">
-                <a:tc>
-                  <a:txBody>
-                    <a:bodyPr/>
-                    <a:lstStyle/>
-                    <a:p>
-                      <a:r>
-                        <a:rPr sz="1850">
-                          <a:solidFill>
-                            <a:srgbClr val="222222"/>
-                          </a:solidFill>
-                          <a:latin typeface="Calibri"/>
-                        </a:rPr>
-                        <a:t>SelfTest.ino</a:t>
-                      </a:r>
-                    </a:p>
-                  </a:txBody>
-                  <a:tcPr marL="73152" marT="18288" marB="18288">
-                    <a:solidFill>
-                      <a:srgbClr val="EEF3F8"/>
-                    </a:solidFill>
-                  </a:tcPr>
-                </a:tc>
-                <a:tc>
-                  <a:txBody>
-                    <a:bodyPr/>
-                    <a:lstStyle/>
-                    <a:p>
-                      <a:r>
-                        <a:rPr sz="1850">
-                          <a:solidFill>
-                            <a:srgbClr val="222222"/>
-                          </a:solidFill>
-                          <a:latin typeface="Calibri"/>
-                        </a:rPr>
-                        <a:t>The powered motor check</a:t>
-                      </a:r>
-                    </a:p>
-                  </a:txBody>
-                  <a:tcPr marL="73152" marT="18288" marB="18288">
-                    <a:solidFill>
-                      <a:srgbClr val="EEF3F8"/>
-                    </a:solidFill>
-                  </a:tcPr>
-                </a:tc>
-              </a:tr>
-            </a:tbl>
-          </a:graphicData>
-        </a:graphic>
-      </p:graphicFrame>
-      <p:sp>
-        <p:nvSpPr>
-          <p:cNvPr id="8" name="Rounded Rectangle 7"/>
-          <p:cNvSpPr/>
-          <p:nvPr/>
-        </p:nvSpPr>
-        <p:spPr>
-          <a:xfrm>
-            <a:off x="502920" y="5303520"/>
-            <a:ext cx="11185855" cy="960120"/>
-          </a:xfrm>
-          <a:prstGeom prst="roundRect">
-            <a:avLst>
-              <a:gd name="adj" fmla="val 4000"/>
-            </a:avLst>
-          </a:prstGeom>
-          <a:solidFill>
-            <a:srgbClr val="EEF3F8"/>
-          </a:solidFill>
-          <a:ln w="12700">
-            <a:solidFill>
-              <a:srgbClr val="0E7C86"/>
-            </a:solidFill>
-          </a:ln>
-          <a:effectLst/>
-        </p:spPr>
-        <p:style>
-          <a:lnRef idx="1">
-            <a:schemeClr val="accent1"/>
-          </a:lnRef>
-          <a:fillRef idx="3">
-            <a:schemeClr val="accent1"/>
-          </a:fillRef>
-          <a:effectRef idx="2">
-            <a:schemeClr val="accent1"/>
-          </a:effectRef>
-          <a:fontRef idx="minor">
-            <a:schemeClr val="lt1"/>
-          </a:fontRef>
-        </p:style>
-        <p:txBody>
-          <a:bodyPr rtlCol="0" anchor="ctr" wrap="square" lIns="164592" rIns="164592" tIns="73152" bIns="73152"/>
-          <a:lstStyle/>
-          <a:p>
-            <a:pPr algn="l"/>
-            <a:r>
-              <a:rPr sz="1300" b="1">
-                <a:solidFill>
-                  <a:srgbClr val="0E7C86"/>
-                </a:solidFill>
-                <a:latin typeface="Calibri"/>
-              </a:rPr>
-              <a:t>KEY POINT   </a:t>
-            </a:r>
-            <a:r>
-              <a:rPr sz="1500">
-                <a:solidFill>
-                  <a:srgbClr val="222222"/>
-                </a:solidFill>
-                <a:latin typeface="Calibri"/>
-              </a:rPr>
-              <a:t>Nothing in the compiler enforces that. Every tab can see every global. It is a convention, and it is the only thing standing between you and 1292 lines again.</a:t>
-            </a:r>
-          </a:p>
-        </p:txBody>
-      </p:sp>
-    </p:spTree>
-  </p:cSld>
-  <p:clrMapOvr>
-    <a:masterClrMapping/>
-  </p:clrMapOvr>
-</p:sld>
-</file>
-
-<file path=ppt/slides/slide12.xml><?xml version="1.0" encoding="utf-8"?>
-<p:sld xmlns:a="http://schemas.openxmlformats.org/drawingml/2006/main" xmlns:p="http://schemas.openxmlformats.org/presentationml/2006/main" xmlns:r="http://schemas.openxmlformats.org/officeDocument/2006/relationships">
-  <p:cSld>
-    <p:spTree>
-      <p:nvGrpSpPr>
-        <p:cNvPr id="1" name=""/>
-        <p:cNvGrpSpPr/>
-        <p:nvPr/>
-      </p:nvGrpSpPr>
-      <p:grpSpPr/>
-      <p:sp>
-        <p:nvSpPr>
-          <p:cNvPr id="2" name="Title 1"/>
-          <p:cNvSpPr>
-            <a:spLocks noGrp="1"/>
-          </p:cNvSpPr>
-          <p:nvPr>
-            <p:ph type="title"/>
-          </p:nvPr>
-        </p:nvSpPr>
-        <p:spPr>
-          <a:xfrm>
-            <a:off x="502920" y="274320"/>
-            <a:ext cx="11185855" cy="777240"/>
-          </a:xfrm>
-        </p:spPr>
-        <p:txBody>
-          <a:bodyPr wrap="square" anchor="b"/>
-          <a:lstStyle/>
-          <a:p>
-            <a:pPr algn="l">
-              <a:lnSpc>
-                <a:spcPct val="100000"/>
-              </a:lnSpc>
-              <a:spcAft>
-                <a:spcPts val="0"/>
-              </a:spcAft>
-              <a:defRPr sz="2800" b="1">
-                <a:solidFill>
-                  <a:srgbClr val="1F3A5F"/>
-                </a:solidFill>
-                <a:latin typeface="Calibri"/>
-              </a:defRPr>
-            </a:pPr>
-            <a:r>
-              <a:rPr sz="2800" b="1">
-                <a:solidFill>
-                  <a:srgbClr val="1F3A5F"/>
-                </a:solidFill>
-                <a:latin typeface="Calibri"/>
-              </a:rPr>
-              <a:t>Where we are</a:t>
-            </a:r>
-          </a:p>
-        </p:txBody>
-      </p:sp>
-      <p:sp>
-        <p:nvSpPr>
-          <p:cNvPr id="3" name="Rectangle 2"/>
-          <p:cNvSpPr/>
-          <p:nvPr/>
-        </p:nvSpPr>
-        <p:spPr>
-          <a:xfrm>
-            <a:off x="502920" y="1097280"/>
-            <a:ext cx="11185855" cy="19050"/>
-          </a:xfrm>
-          <a:prstGeom prst="rect">
-            <a:avLst/>
-          </a:prstGeom>
-          <a:solidFill>
-            <a:srgbClr val="C8D2DE"/>
-          </a:solidFill>
-          <a:ln>
-            <a:noFill/>
-          </a:ln>
-          <a:effectLst/>
-        </p:spPr>
-        <p:style>
-          <a:lnRef idx="1">
-            <a:schemeClr val="accent1"/>
-          </a:lnRef>
-          <a:fillRef idx="3">
-            <a:schemeClr val="accent1"/>
-          </a:fillRef>
-          <a:effectRef idx="2">
-            <a:schemeClr val="accent1"/>
-          </a:effectRef>
-          <a:fontRef idx="minor">
-            <a:schemeClr val="lt1"/>
-          </a:fontRef>
-        </p:style>
-        <p:txBody>
-          <a:bodyPr rtlCol="0" anchor="ctr"/>
-          <a:lstStyle/>
-          <a:p>
-            <a:pPr algn="ctr"/>
-          </a:p>
-        </p:txBody>
-      </p:sp>
-      <p:sp>
-        <p:nvSpPr>
-          <p:cNvPr id="4" name="TextBox 3"/>
-          <p:cNvSpPr txBox="1"/>
-          <p:nvPr/>
-        </p:nvSpPr>
-        <p:spPr>
-          <a:xfrm>
-            <a:off x="502920" y="6382512"/>
-            <a:ext cx="10545775" cy="274320"/>
-          </a:xfrm>
-          <a:prstGeom prst="rect">
-            <a:avLst/>
-          </a:prstGeom>
-          <a:noFill/>
-        </p:spPr>
-        <p:txBody>
-          <a:bodyPr wrap="square" lIns="0" tIns="0">
-            <a:spAutoFit/>
-          </a:bodyPr>
-          <a:lstStyle/>
-          <a:p>
-            <a:pPr algn="l">
-              <a:lnSpc>
-                <a:spcPct val="100000"/>
-              </a:lnSpc>
-              <a:spcAft>
-                <a:spcPts val="0"/>
-              </a:spcAft>
-              <a:defRPr sz="1000" b="0">
-                <a:solidFill>
-                  <a:srgbClr val="666666"/>
-                </a:solidFill>
-                <a:latin typeface="Calibri"/>
-              </a:defRPr>
-            </a:pPr>
-            <a:r>
-              <a:rPr sz="1000" b="0">
-                <a:solidFill>
-                  <a:srgbClr val="666666"/>
-                </a:solidFill>
-                <a:latin typeface="Calibri"/>
-              </a:rPr>
-              <a:t>Pathfinder Advanced - Op Program 12  |  Lesson 1</a:t>
-            </a:r>
-          </a:p>
-        </p:txBody>
-      </p:sp>
-      <p:sp>
-        <p:nvSpPr>
-          <p:cNvPr id="5" name="TextBox 4"/>
-          <p:cNvSpPr txBox="1"/>
-          <p:nvPr/>
-        </p:nvSpPr>
-        <p:spPr>
-          <a:xfrm>
-            <a:off x="11231575" y="6382512"/>
-            <a:ext cx="457200" cy="274320"/>
-          </a:xfrm>
-          <a:prstGeom prst="rect">
-            <a:avLst/>
-          </a:prstGeom>
-          <a:noFill/>
-        </p:spPr>
-        <p:txBody>
-          <a:bodyPr wrap="square" lIns="0" tIns="0">
-            <a:spAutoFit/>
-          </a:bodyPr>
-          <a:lstStyle/>
-          <a:p>
-            <a:pPr algn="r">
-              <a:lnSpc>
-                <a:spcPct val="100000"/>
-              </a:lnSpc>
-              <a:spcAft>
-                <a:spcPts val="0"/>
-              </a:spcAft>
-              <a:defRPr sz="1000" b="0">
-                <a:solidFill>
-                  <a:srgbClr val="666666"/>
-                </a:solidFill>
-                <a:latin typeface="Calibri"/>
-              </a:defRPr>
-            </a:pPr>
-            <a:r>
-              <a:rPr sz="1000" b="0">
-                <a:solidFill>
-                  <a:srgbClr val="666666"/>
-                </a:solidFill>
-                <a:latin typeface="Calibri"/>
-              </a:rPr>
-              <a:t>11</a:t>
             </a:r>
           </a:p>
         </p:txBody>
@@ -7911,7 +6457,7 @@
 </p:sld>
 </file>
 
-<file path=ppt/slides/slide13.xml><?xml version="1.0" encoding="utf-8"?>
+<file path=ppt/slides/slide11.xml><?xml version="1.0" encoding="utf-8"?>
 <p:sld xmlns:a="http://schemas.openxmlformats.org/drawingml/2006/main" xmlns:p="http://schemas.openxmlformats.org/presentationml/2006/main" xmlns:r="http://schemas.openxmlformats.org/officeDocument/2006/relationships">
   <p:cSld>
     <p:spTree>
@@ -8102,7 +6648,7 @@
                 </a:solidFill>
                 <a:latin typeface="Calibri"/>
               </a:rPr>
-              <a:t>12</a:t>
+              <a:t>10</a:t>
             </a:r>
           </a:p>
         </p:txBody>
@@ -8578,7 +7124,7 @@
 </p:sld>
 </file>
 
-<file path=ppt/slides/slide14.xml><?xml version="1.0" encoding="utf-8"?>
+<file path=ppt/slides/slide12.xml><?xml version="1.0" encoding="utf-8"?>
 <p:sld xmlns:a="http://schemas.openxmlformats.org/drawingml/2006/main" xmlns:p="http://schemas.openxmlformats.org/presentationml/2006/main" xmlns:r="http://schemas.openxmlformats.org/officeDocument/2006/relationships">
   <p:cSld>
     <p:spTree>
@@ -8769,7 +7315,7 @@
                 </a:solidFill>
                 <a:latin typeface="Calibri"/>
               </a:rPr>
-              <a:t>13</a:t>
+              <a:t>11</a:t>
             </a:r>
           </a:p>
         </p:txBody>
@@ -9101,7 +7647,7 @@
 </p:sld>
 </file>
 
-<file path=ppt/slides/slide15.xml><?xml version="1.0" encoding="utf-8"?>
+<file path=ppt/slides/slide13.xml><?xml version="1.0" encoding="utf-8"?>
 <p:sld xmlns:a="http://schemas.openxmlformats.org/drawingml/2006/main" xmlns:p="http://schemas.openxmlformats.org/presentationml/2006/main" xmlns:r="http://schemas.openxmlformats.org/officeDocument/2006/relationships">
   <p:cSld>
     <p:spTree>
@@ -9292,7 +7838,7 @@
                 </a:solidFill>
                 <a:latin typeface="Calibri"/>
               </a:rPr>
-              <a:t>14</a:t>
+              <a:t>12</a:t>
             </a:r>
           </a:p>
         </p:txBody>
@@ -9895,7 +8441,7 @@
 </p:sld>
 </file>
 
-<file path=ppt/slides/slide16.xml><?xml version="1.0" encoding="utf-8"?>
+<file path=ppt/slides/slide14.xml><?xml version="1.0" encoding="utf-8"?>
 <p:sld xmlns:a="http://schemas.openxmlformats.org/drawingml/2006/main" xmlns:p="http://schemas.openxmlformats.org/presentationml/2006/main" xmlns:r="http://schemas.openxmlformats.org/officeDocument/2006/relationships">
   <p:cSld>
     <p:spTree>
@@ -10086,7 +8632,7 @@
                 </a:solidFill>
                 <a:latin typeface="Calibri"/>
               </a:rPr>
-              <a:t>15</a:t>
+              <a:t>13</a:t>
             </a:r>
           </a:p>
         </p:txBody>
@@ -10453,7 +8999,7 @@
 </p:sld>
 </file>
 
-<file path=ppt/slides/slide17.xml><?xml version="1.0" encoding="utf-8"?>
+<file path=ppt/slides/slide15.xml><?xml version="1.0" encoding="utf-8"?>
 <p:sld xmlns:a="http://schemas.openxmlformats.org/drawingml/2006/main" xmlns:p="http://schemas.openxmlformats.org/presentationml/2006/main" xmlns:r="http://schemas.openxmlformats.org/officeDocument/2006/relationships">
   <p:cSld>
     <p:spTree>
@@ -10644,7 +9190,7 @@
                 </a:solidFill>
                 <a:latin typeface="Calibri"/>
               </a:rPr>
-              <a:t>16</a:t>
+              <a:t>14</a:t>
             </a:r>
           </a:p>
         </p:txBody>
@@ -11095,7 +9641,7 @@
 </p:sld>
 </file>
 
-<file path=ppt/slides/slide18.xml><?xml version="1.0" encoding="utf-8"?>
+<file path=ppt/slides/slide16.xml><?xml version="1.0" encoding="utf-8"?>
 <p:sld xmlns:a="http://schemas.openxmlformats.org/drawingml/2006/main" xmlns:p="http://schemas.openxmlformats.org/presentationml/2006/main" xmlns:r="http://schemas.openxmlformats.org/officeDocument/2006/relationships">
   <p:cSld>
     <p:spTree>
@@ -11286,7 +9832,7 @@
                 </a:solidFill>
                 <a:latin typeface="Calibri"/>
               </a:rPr>
-              <a:t>17</a:t>
+              <a:t>15</a:t>
             </a:r>
           </a:p>
         </p:txBody>
@@ -12002,7 +10548,7 @@
 </p:sld>
 </file>
 
-<file path=ppt/slides/slide19.xml><?xml version="1.0" encoding="utf-8"?>
+<file path=ppt/slides/slide17.xml><?xml version="1.0" encoding="utf-8"?>
 <p:sld xmlns:a="http://schemas.openxmlformats.org/drawingml/2006/main" xmlns:p="http://schemas.openxmlformats.org/presentationml/2006/main" xmlns:r="http://schemas.openxmlformats.org/officeDocument/2006/relationships">
   <p:cSld>
     <p:spTree>
@@ -12193,7 +10739,7 @@
                 </a:solidFill>
                 <a:latin typeface="Calibri"/>
               </a:rPr>
-              <a:t>18</a:t>
+              <a:t>16</a:t>
             </a:r>
           </a:p>
         </p:txBody>
@@ -12409,7 +10955,7 @@
 </p:sld>
 </file>
 
-<file path=ppt/slides/slide2.xml><?xml version="1.0" encoding="utf-8"?>
+<file path=ppt/slides/slide18.xml><?xml version="1.0" encoding="utf-8"?>
 <p:sld xmlns:a="http://schemas.openxmlformats.org/drawingml/2006/main" xmlns:p="http://schemas.openxmlformats.org/presentationml/2006/main" xmlns:r="http://schemas.openxmlformats.org/officeDocument/2006/relationships">
   <p:cSld>
     <p:spTree>
@@ -12460,7 +11006,7 @@
                 </a:solidFill>
                 <a:latin typeface="Calibri"/>
               </a:rPr>
-              <a:t>What you will be able to do by the end</a:t>
+              <a:t>How a command gets from your thumb to a wheel</a:t>
             </a:r>
           </a:p>
         </p:txBody>
@@ -12600,407 +11146,7 @@
                 </a:solidFill>
                 <a:latin typeface="Calibri"/>
               </a:rPr>
-              <a:t>1</a:t>
-            </a:r>
-          </a:p>
-        </p:txBody>
-      </p:sp>
-      <p:sp>
-        <p:nvSpPr>
-          <p:cNvPr id="6" name="TextBox 5"/>
-          <p:cNvSpPr txBox="1"/>
-          <p:nvPr/>
-        </p:nvSpPr>
-        <p:spPr>
-          <a:xfrm>
-            <a:off x="502920" y="1188720"/>
-            <a:ext cx="11185855" cy="502920"/>
-          </a:xfrm>
-          <a:prstGeom prst="rect">
-            <a:avLst/>
-          </a:prstGeom>
-          <a:noFill/>
-        </p:spPr>
-        <p:txBody>
-          <a:bodyPr wrap="square" lIns="0" tIns="0" rIns="0" bIns="0">
-            <a:spAutoFit/>
-          </a:bodyPr>
-          <a:lstStyle/>
-          <a:p>
-            <a:pPr algn="l">
-              <a:lnSpc>
-                <a:spcPct val="100000"/>
-              </a:lnSpc>
-              <a:spcAft>
-                <a:spcPts val="600"/>
-              </a:spcAft>
-              <a:defRPr sz="1900" b="1">
-                <a:solidFill>
-                  <a:srgbClr val="0E7C86"/>
-                </a:solidFill>
-                <a:latin typeface="Calibri"/>
-              </a:defRPr>
-            </a:pPr>
-            <a:r>
-              <a:rPr sz="1900" b="1">
-                <a:solidFill>
-                  <a:srgbClr val="0E7C86"/>
-                </a:solidFill>
-                <a:latin typeface="Calibri"/>
-              </a:rPr>
-              <a:t>By the end of this lesson you will be able to:</a:t>
-            </a:r>
-          </a:p>
-        </p:txBody>
-      </p:sp>
-      <p:sp>
-        <p:nvSpPr>
-          <p:cNvPr id="7" name="TextBox 6"/>
-          <p:cNvSpPr txBox="1"/>
-          <p:nvPr/>
-        </p:nvSpPr>
-        <p:spPr>
-          <a:xfrm>
-            <a:off x="502920" y="1737360"/>
-            <a:ext cx="11185855" cy="4526280"/>
-          </a:xfrm>
-          <a:prstGeom prst="rect">
-            <a:avLst/>
-          </a:prstGeom>
-          <a:noFill/>
-        </p:spPr>
-        <p:txBody>
-          <a:bodyPr wrap="square" lIns="0" tIns="0" rIns="0" bIns="0">
-            <a:spAutoFit/>
-          </a:bodyPr>
-          <a:lstStyle/>
-          <a:p>
-            <a:pPr algn="l">
-              <a:lnSpc>
-                <a:spcPct val="100000"/>
-              </a:lnSpc>
-              <a:spcAft>
-                <a:spcPts val="1300"/>
-              </a:spcAft>
-              <a:defRPr sz="1900" b="0">
-                <a:solidFill>
-                  <a:srgbClr val="222222"/>
-                </a:solidFill>
-                <a:latin typeface="Calibri"/>
-              </a:defRPr>
-            </a:pPr>
-            <a:r>
-              <a:rPr sz="1900" b="0">
-                <a:solidFill>
-                  <a:srgbClr val="222222"/>
-                </a:solidFill>
-                <a:latin typeface="Calibri"/>
-              </a:rPr>
-              <a:t>1.   Explain how the Arduino IDE assembles a multi-tab sketch, and why a type has to live in a header</a:t>
-            </a:r>
-          </a:p>
-          <a:p>
-            <a:pPr algn="l">
-              <a:lnSpc>
-                <a:spcPct val="100000"/>
-              </a:lnSpc>
-              <a:spcAft>
-                <a:spcPts val="1300"/>
-              </a:spcAft>
-              <a:defRPr sz="1900" b="0">
-                <a:solidFill>
-                  <a:srgbClr val="222222"/>
-                </a:solidFill>
-                <a:latin typeface="Calibri"/>
-              </a:defRPr>
-            </a:pPr>
-            <a:r>
-              <a:rPr sz="1900" b="0">
-                <a:solidFill>
-                  <a:srgbClr val="222222"/>
-                </a:solidFill>
-                <a:latin typeface="Calibri"/>
-              </a:rPr>
-              <a:t>2.   Split a program by subsystem without breaking it</a:t>
-            </a:r>
-          </a:p>
-          <a:p>
-            <a:pPr algn="l">
-              <a:lnSpc>
-                <a:spcPct val="100000"/>
-              </a:lnSpc>
-              <a:spcAft>
-                <a:spcPts val="1300"/>
-              </a:spcAft>
-              <a:defRPr sz="1900" b="0">
-                <a:solidFill>
-                  <a:srgbClr val="222222"/>
-                </a:solidFill>
-                <a:latin typeface="Calibri"/>
-              </a:defRPr>
-            </a:pPr>
-            <a:r>
-              <a:rPr sz="1900" b="0">
-                <a:solidFill>
-                  <a:srgbClr val="222222"/>
-                </a:solidFill>
-                <a:latin typeface="Calibri"/>
-              </a:rPr>
-              <a:t>3.   Say why the program detects its hardware rather than being told about it</a:t>
-            </a:r>
-          </a:p>
-          <a:p>
-            <a:pPr algn="l">
-              <a:lnSpc>
-                <a:spcPct val="100000"/>
-              </a:lnSpc>
-              <a:spcAft>
-                <a:spcPts val="1300"/>
-              </a:spcAft>
-              <a:defRPr sz="1900" b="0">
-                <a:solidFill>
-                  <a:srgbClr val="222222"/>
-                </a:solidFill>
-                <a:latin typeface="Calibri"/>
-              </a:defRPr>
-            </a:pPr>
-            <a:r>
-              <a:rPr sz="1900" b="0">
-                <a:solidFill>
-                  <a:srgbClr val="222222"/>
-                </a:solidFill>
-                <a:latin typeface="Calibri"/>
-              </a:rPr>
-              <a:t>4.   Write a serial console that does not block the vehicle</a:t>
-            </a:r>
-          </a:p>
-          <a:p>
-            <a:pPr algn="l">
-              <a:lnSpc>
-                <a:spcPct val="100000"/>
-              </a:lnSpc>
-              <a:spcAft>
-                <a:spcPts val="1300"/>
-              </a:spcAft>
-              <a:defRPr sz="1900" b="0">
-                <a:solidFill>
-                  <a:srgbClr val="222222"/>
-                </a:solidFill>
-                <a:latin typeface="Calibri"/>
-              </a:defRPr>
-            </a:pPr>
-            <a:r>
-              <a:rPr sz="1900" b="0">
-                <a:solidFill>
-                  <a:srgbClr val="222222"/>
-                </a:solidFill>
-                <a:latin typeface="Calibri"/>
-              </a:rPr>
-              <a:t>5.   Read the boot sequence of Op Program 12 and justify its order</a:t>
-            </a:r>
-          </a:p>
-        </p:txBody>
-      </p:sp>
-    </p:spTree>
-  </p:cSld>
-  <p:clrMapOvr>
-    <a:masterClrMapping/>
-  </p:clrMapOvr>
-</p:sld>
-</file>
-
-<file path=ppt/slides/slide20.xml><?xml version="1.0" encoding="utf-8"?>
-<p:sld xmlns:a="http://schemas.openxmlformats.org/drawingml/2006/main" xmlns:p="http://schemas.openxmlformats.org/presentationml/2006/main" xmlns:r="http://schemas.openxmlformats.org/officeDocument/2006/relationships">
-  <p:cSld>
-    <p:spTree>
-      <p:nvGrpSpPr>
-        <p:cNvPr id="1" name=""/>
-        <p:cNvGrpSpPr/>
-        <p:nvPr/>
-      </p:nvGrpSpPr>
-      <p:grpSpPr/>
-      <p:sp>
-        <p:nvSpPr>
-          <p:cNvPr id="2" name="Title 1"/>
-          <p:cNvSpPr>
-            <a:spLocks noGrp="1"/>
-          </p:cNvSpPr>
-          <p:nvPr>
-            <p:ph type="title"/>
-          </p:nvPr>
-        </p:nvSpPr>
-        <p:spPr>
-          <a:xfrm>
-            <a:off x="502920" y="274320"/>
-            <a:ext cx="11185855" cy="777240"/>
-          </a:xfrm>
-        </p:spPr>
-        <p:txBody>
-          <a:bodyPr wrap="square" anchor="b"/>
-          <a:lstStyle/>
-          <a:p>
-            <a:pPr algn="l">
-              <a:lnSpc>
-                <a:spcPct val="100000"/>
-              </a:lnSpc>
-              <a:spcAft>
-                <a:spcPts val="0"/>
-              </a:spcAft>
-              <a:defRPr sz="2800" b="1">
-                <a:solidFill>
-                  <a:srgbClr val="1F3A5F"/>
-                </a:solidFill>
-                <a:latin typeface="Calibri"/>
-              </a:defRPr>
-            </a:pPr>
-            <a:r>
-              <a:rPr sz="2800" b="1">
-                <a:solidFill>
-                  <a:srgbClr val="1F3A5F"/>
-                </a:solidFill>
-                <a:latin typeface="Calibri"/>
-              </a:rPr>
-              <a:t>How a command gets from your thumb to a wheel</a:t>
-            </a:r>
-          </a:p>
-        </p:txBody>
-      </p:sp>
-      <p:sp>
-        <p:nvSpPr>
-          <p:cNvPr id="3" name="Rectangle 2"/>
-          <p:cNvSpPr/>
-          <p:nvPr/>
-        </p:nvSpPr>
-        <p:spPr>
-          <a:xfrm>
-            <a:off x="502920" y="1097280"/>
-            <a:ext cx="11185855" cy="19050"/>
-          </a:xfrm>
-          <a:prstGeom prst="rect">
-            <a:avLst/>
-          </a:prstGeom>
-          <a:solidFill>
-            <a:srgbClr val="C8D2DE"/>
-          </a:solidFill>
-          <a:ln>
-            <a:noFill/>
-          </a:ln>
-          <a:effectLst/>
-        </p:spPr>
-        <p:style>
-          <a:lnRef idx="1">
-            <a:schemeClr val="accent1"/>
-          </a:lnRef>
-          <a:fillRef idx="3">
-            <a:schemeClr val="accent1"/>
-          </a:fillRef>
-          <a:effectRef idx="2">
-            <a:schemeClr val="accent1"/>
-          </a:effectRef>
-          <a:fontRef idx="minor">
-            <a:schemeClr val="lt1"/>
-          </a:fontRef>
-        </p:style>
-        <p:txBody>
-          <a:bodyPr rtlCol="0" anchor="ctr"/>
-          <a:lstStyle/>
-          <a:p>
-            <a:pPr algn="ctr"/>
-          </a:p>
-        </p:txBody>
-      </p:sp>
-      <p:sp>
-        <p:nvSpPr>
-          <p:cNvPr id="4" name="TextBox 3"/>
-          <p:cNvSpPr txBox="1"/>
-          <p:nvPr/>
-        </p:nvSpPr>
-        <p:spPr>
-          <a:xfrm>
-            <a:off x="502920" y="6382512"/>
-            <a:ext cx="10545775" cy="274320"/>
-          </a:xfrm>
-          <a:prstGeom prst="rect">
-            <a:avLst/>
-          </a:prstGeom>
-          <a:noFill/>
-        </p:spPr>
-        <p:txBody>
-          <a:bodyPr wrap="square" lIns="0" tIns="0">
-            <a:spAutoFit/>
-          </a:bodyPr>
-          <a:lstStyle/>
-          <a:p>
-            <a:pPr algn="l">
-              <a:lnSpc>
-                <a:spcPct val="100000"/>
-              </a:lnSpc>
-              <a:spcAft>
-                <a:spcPts val="0"/>
-              </a:spcAft>
-              <a:defRPr sz="1000" b="0">
-                <a:solidFill>
-                  <a:srgbClr val="666666"/>
-                </a:solidFill>
-                <a:latin typeface="Calibri"/>
-              </a:defRPr>
-            </a:pPr>
-            <a:r>
-              <a:rPr sz="1000" b="0">
-                <a:solidFill>
-                  <a:srgbClr val="666666"/>
-                </a:solidFill>
-                <a:latin typeface="Calibri"/>
-              </a:rPr>
-              <a:t>Pathfinder Advanced - Op Program 12  |  Lesson 1</a:t>
-            </a:r>
-          </a:p>
-        </p:txBody>
-      </p:sp>
-      <p:sp>
-        <p:nvSpPr>
-          <p:cNvPr id="5" name="TextBox 4"/>
-          <p:cNvSpPr txBox="1"/>
-          <p:nvPr/>
-        </p:nvSpPr>
-        <p:spPr>
-          <a:xfrm>
-            <a:off x="11231575" y="6382512"/>
-            <a:ext cx="457200" cy="274320"/>
-          </a:xfrm>
-          <a:prstGeom prst="rect">
-            <a:avLst/>
-          </a:prstGeom>
-          <a:noFill/>
-        </p:spPr>
-        <p:txBody>
-          <a:bodyPr wrap="square" lIns="0" tIns="0">
-            <a:spAutoFit/>
-          </a:bodyPr>
-          <a:lstStyle/>
-          <a:p>
-            <a:pPr algn="r">
-              <a:lnSpc>
-                <a:spcPct val="100000"/>
-              </a:lnSpc>
-              <a:spcAft>
-                <a:spcPts val="0"/>
-              </a:spcAft>
-              <a:defRPr sz="1000" b="0">
-                <a:solidFill>
-                  <a:srgbClr val="666666"/>
-                </a:solidFill>
-                <a:latin typeface="Calibri"/>
-              </a:defRPr>
-            </a:pPr>
-            <a:r>
-              <a:rPr sz="1000" b="0">
-                <a:solidFill>
-                  <a:srgbClr val="666666"/>
-                </a:solidFill>
-                <a:latin typeface="Calibri"/>
-              </a:rPr>
-              <a:t>19</a:t>
+              <a:t>17</a:t>
             </a:r>
           </a:p>
         </p:txBody>
@@ -14047,7 +12193,7 @@
 </p:sld>
 </file>
 
-<file path=ppt/slides/slide21.xml><?xml version="1.0" encoding="utf-8"?>
+<file path=ppt/slides/slide19.xml><?xml version="1.0" encoding="utf-8"?>
 <p:sld xmlns:a="http://schemas.openxmlformats.org/drawingml/2006/main" xmlns:p="http://schemas.openxmlformats.org/presentationml/2006/main" xmlns:r="http://schemas.openxmlformats.org/officeDocument/2006/relationships">
   <p:cSld>
     <p:spTree>
@@ -14238,7 +12384,7 @@
                 </a:solidFill>
                 <a:latin typeface="Calibri"/>
               </a:rPr>
-              <a:t>20</a:t>
+              <a:t>18</a:t>
             </a:r>
           </a:p>
         </p:txBody>
@@ -15004,7 +13150,7 @@
 </p:sld>
 </file>
 
-<file path=ppt/slides/slide22.xml><?xml version="1.0" encoding="utf-8"?>
+<file path=ppt/slides/slide2.xml><?xml version="1.0" encoding="utf-8"?>
 <p:sld xmlns:a="http://schemas.openxmlformats.org/drawingml/2006/main" xmlns:p="http://schemas.openxmlformats.org/presentationml/2006/main" xmlns:r="http://schemas.openxmlformats.org/officeDocument/2006/relationships">
   <p:cSld>
     <p:spTree>
@@ -15055,7 +13201,7 @@
                 </a:solidFill>
                 <a:latin typeface="Calibri"/>
               </a:rPr>
-              <a:t>Reading a program you did not write</a:t>
+              <a:t>What you will be able to do by the end</a:t>
             </a:r>
           </a:p>
         </p:txBody>
@@ -15195,7 +13341,7 @@
                 </a:solidFill>
                 <a:latin typeface="Calibri"/>
               </a:rPr>
-              <a:t>21</a:t>
+              <a:t>1</a:t>
             </a:r>
           </a:p>
         </p:txBody>
@@ -15209,7 +13355,7 @@
         <p:spPr>
           <a:xfrm>
             <a:off x="502920" y="1188720"/>
-            <a:ext cx="11185855" cy="530352"/>
+            <a:ext cx="11185855" cy="502920"/>
           </a:xfrm>
           <a:prstGeom prst="rect">
             <a:avLst/>
@@ -15243,7 +13389,7 @@
                 </a:solidFill>
                 <a:latin typeface="Calibri"/>
               </a:rPr>
-              <a:t>Header, then Config.h, then setup(), then loop()</a:t>
+              <a:t>By the end of this lesson you will be able to:</a:t>
             </a:r>
           </a:p>
         </p:txBody>
@@ -15256,8 +13402,8 @@
         </p:nvSpPr>
         <p:spPr>
           <a:xfrm>
-            <a:off x="502920" y="1755648"/>
-            <a:ext cx="11185855" cy="4507992"/>
+            <a:off x="502920" y="1737360"/>
+            <a:ext cx="11185855" cy="4526280"/>
           </a:xfrm>
           <a:prstGeom prst="rect">
             <a:avLst/>
@@ -15275,23 +13421,23 @@
                 <a:spcPct val="100000"/>
               </a:lnSpc>
               <a:spcAft>
-                <a:spcPts val="600"/>
-              </a:spcAft>
-              <a:defRPr sz="2300" b="0">
-                <a:solidFill>
-                  <a:srgbClr val="222222"/>
-                </a:solidFill>
-                <a:latin typeface="Calibri"/>
-              </a:defRPr>
-            </a:pPr>
-            <a:r>
-              <a:rPr sz="2300" b="0">
-                <a:solidFill>
-                  <a:srgbClr val="222222"/>
-                </a:solidFill>
-                <a:latin typeface="Calibri"/>
-              </a:rPr>
-              <a:t>You are about to be handed 1300 lines across eight files. Reading it front to back is the slowest possible way in.</a:t>
+                <a:spcPts val="1300"/>
+              </a:spcAft>
+              <a:defRPr sz="1900" b="0">
+                <a:solidFill>
+                  <a:srgbClr val="222222"/>
+                </a:solidFill>
+                <a:latin typeface="Calibri"/>
+              </a:defRPr>
+            </a:pPr>
+            <a:r>
+              <a:rPr sz="1900" b="0">
+                <a:solidFill>
+                  <a:srgbClr val="222222"/>
+                </a:solidFill>
+                <a:latin typeface="Calibri"/>
+              </a:rPr>
+              <a:t>1.   Explain how the Arduino IDE assembles a multi-tab sketch, and why a type has to live in a header</a:t>
             </a:r>
           </a:p>
           <a:p>
@@ -15300,15 +13446,24 @@
                 <a:spcPct val="100000"/>
               </a:lnSpc>
               <a:spcAft>
-                <a:spcPts val="600"/>
-              </a:spcAft>
-              <a:defRPr sz="1150" b="0">
-                <a:solidFill>
-                  <a:srgbClr val="222222"/>
-                </a:solidFill>
-                <a:latin typeface="Calibri"/>
-              </a:defRPr>
-            </a:pPr>
+                <a:spcPts val="1300"/>
+              </a:spcAft>
+              <a:defRPr sz="1900" b="0">
+                <a:solidFill>
+                  <a:srgbClr val="222222"/>
+                </a:solidFill>
+                <a:latin typeface="Calibri"/>
+              </a:defRPr>
+            </a:pPr>
+            <a:r>
+              <a:rPr sz="1900" b="0">
+                <a:solidFill>
+                  <a:srgbClr val="222222"/>
+                </a:solidFill>
+                <a:latin typeface="Calibri"/>
+              </a:rPr>
+              <a:t>2.   Split a program by subsystem without breaking it</a:t>
+            </a:r>
           </a:p>
           <a:p>
             <a:pPr algn="l">
@@ -15316,148 +13471,73 @@
                 <a:spcPct val="100000"/>
               </a:lnSpc>
               <a:spcAft>
-                <a:spcPts val="600"/>
-              </a:spcAft>
-              <a:defRPr sz="2300" b="0">
-                <a:solidFill>
-                  <a:srgbClr val="222222"/>
-                </a:solidFill>
-                <a:latin typeface="Calibri"/>
-              </a:defRPr>
-            </a:pPr>
-            <a:r>
-              <a:rPr sz="2300" b="0">
-                <a:solidFill>
-                  <a:srgbClr val="222222"/>
-                </a:solidFill>
-                <a:latin typeface="Calibri"/>
-              </a:rPr>
-              <a:t>A better order:</a:t>
-            </a:r>
-          </a:p>
-          <a:p>
-            <a:pPr lvl="1" algn="l">
-              <a:lnSpc>
-                <a:spcPct val="100000"/>
-              </a:lnSpc>
-              <a:spcAft>
-                <a:spcPts val="600"/>
-              </a:spcAft>
-              <a:defRPr sz="2300" b="0">
-                <a:solidFill>
-                  <a:srgbClr val="222222"/>
-                </a:solidFill>
-                <a:latin typeface="Calibri"/>
-              </a:defRPr>
-            </a:pPr>
-            <a:r>
-              <a:rPr sz="2300" b="0">
-                <a:solidFill>
-                  <a:srgbClr val="222222"/>
-                </a:solidFill>
-                <a:latin typeface="Calibri"/>
-              </a:rPr>
-              <a:t>1.  The header comment. It tells you the hardware, the controls, and - in this case - the change log.</a:t>
-            </a:r>
-          </a:p>
-          <a:p>
-            <a:pPr lvl="1" algn="l">
-              <a:lnSpc>
-                <a:spcPct val="100000"/>
-              </a:lnSpc>
-              <a:spcAft>
-                <a:spcPts val="600"/>
-              </a:spcAft>
-              <a:defRPr sz="2300" b="0">
-                <a:solidFill>
-                  <a:srgbClr val="222222"/>
-                </a:solidFill>
-                <a:latin typeface="Calibri"/>
-              </a:defRPr>
-            </a:pPr>
-            <a:r>
-              <a:rPr sz="2300" b="0">
-                <a:solidFill>
-                  <a:srgbClr val="222222"/>
-                </a:solidFill>
-                <a:latin typeface="Calibri"/>
-              </a:rPr>
-              <a:t>2.  Config.h. Every number the program cares about, in one place. You learn what it can do from what it lets you tune.</a:t>
-            </a:r>
-          </a:p>
-          <a:p>
-            <a:pPr lvl="1" algn="l">
-              <a:lnSpc>
-                <a:spcPct val="100000"/>
-              </a:lnSpc>
-              <a:spcAft>
-                <a:spcPts val="600"/>
-              </a:spcAft>
-              <a:defRPr sz="2300" b="0">
-                <a:solidFill>
-                  <a:srgbClr val="222222"/>
-                </a:solidFill>
-                <a:latin typeface="Calibri"/>
-              </a:defRPr>
-            </a:pPr>
-            <a:r>
-              <a:rPr sz="2300" b="0">
-                <a:solidFill>
-                  <a:srgbClr val="222222"/>
-                </a:solidFill>
-                <a:latin typeface="Calibri"/>
-              </a:rPr>
-              <a:t>3.  setup(). What has to be true before anything runs.</a:t>
-            </a:r>
-          </a:p>
-          <a:p>
-            <a:pPr lvl="1" algn="l">
-              <a:lnSpc>
-                <a:spcPct val="100000"/>
-              </a:lnSpc>
-              <a:spcAft>
-                <a:spcPts val="600"/>
-              </a:spcAft>
-              <a:defRPr sz="2300" b="0">
-                <a:solidFill>
-                  <a:srgbClr val="222222"/>
-                </a:solidFill>
-                <a:latin typeface="Calibri"/>
-              </a:defRPr>
-            </a:pPr>
-            <a:r>
-              <a:rPr sz="2300" b="0">
-                <a:solidFill>
-                  <a:srgbClr val="222222"/>
-                </a:solidFill>
-                <a:latin typeface="Calibri"/>
-              </a:rPr>
-              <a:t>4.  loop(). The whole shape of the program in one screen.</a:t>
-            </a:r>
-          </a:p>
-          <a:p>
-            <a:pPr lvl="1" algn="l">
-              <a:lnSpc>
-                <a:spcPct val="100000"/>
-              </a:lnSpc>
-              <a:spcAft>
-                <a:spcPts val="600"/>
-              </a:spcAft>
-              <a:defRPr sz="2300" b="0">
-                <a:solidFill>
-                  <a:srgbClr val="222222"/>
-                </a:solidFill>
-                <a:latin typeface="Calibri"/>
-              </a:defRPr>
-            </a:pPr>
-            <a:r>
-              <a:rPr sz="2300" b="0">
-                <a:solidFill>
-                  <a:srgbClr val="222222"/>
-                </a:solidFill>
-                <a:latin typeface="Calibri"/>
-              </a:rPr>
-              <a:t>5.  Only then, the subsystem that interests you.</a:t>
+                <a:spcPts val="1300"/>
+              </a:spcAft>
+              <a:defRPr sz="1900" b="0">
+                <a:solidFill>
+                  <a:srgbClr val="222222"/>
+                </a:solidFill>
+                <a:latin typeface="Calibri"/>
+              </a:defRPr>
+            </a:pPr>
+            <a:r>
+              <a:rPr sz="1900" b="0">
+                <a:solidFill>
+                  <a:srgbClr val="222222"/>
+                </a:solidFill>
+                <a:latin typeface="Calibri"/>
+              </a:rPr>
+              <a:t>3.   Say why the program detects its hardware rather than being told about it</a:t>
+            </a:r>
+          </a:p>
+          <a:p>
+            <a:pPr algn="l">
+              <a:lnSpc>
+                <a:spcPct val="100000"/>
+              </a:lnSpc>
+              <a:spcAft>
+                <a:spcPts val="1300"/>
+              </a:spcAft>
+              <a:defRPr sz="1900" b="0">
+                <a:solidFill>
+                  <a:srgbClr val="222222"/>
+                </a:solidFill>
+                <a:latin typeface="Calibri"/>
+              </a:defRPr>
+            </a:pPr>
+            <a:r>
+              <a:rPr sz="1900" b="0">
+                <a:solidFill>
+                  <a:srgbClr val="222222"/>
+                </a:solidFill>
+                <a:latin typeface="Calibri"/>
+              </a:rPr>
+              <a:t>4.   Write a serial console that does not block the vehicle</a:t>
+            </a:r>
+          </a:p>
+          <a:p>
+            <a:pPr algn="l">
+              <a:lnSpc>
+                <a:spcPct val="100000"/>
+              </a:lnSpc>
+              <a:spcAft>
+                <a:spcPts val="1300"/>
+              </a:spcAft>
+              <a:defRPr sz="1900" b="0">
+                <a:solidFill>
+                  <a:srgbClr val="222222"/>
+                </a:solidFill>
+                <a:latin typeface="Calibri"/>
+              </a:defRPr>
+            </a:pPr>
+            <a:r>
+              <a:rPr sz="1900" b="0">
+                <a:solidFill>
+                  <a:srgbClr val="222222"/>
+                </a:solidFill>
+                <a:latin typeface="Calibri"/>
+              </a:rPr>
+              <a:t>5.   Read the boot sequence of Op Program 12 and justify its order</a:t>
             </a:r>
           </a:p>
         </p:txBody>
@@ -15470,7 +13550,7 @@
 </p:sld>
 </file>
 
-<file path=ppt/slides/slide23.xml><?xml version="1.0" encoding="utf-8"?>
+<file path=ppt/slides/slide20.xml><?xml version="1.0" encoding="utf-8"?>
 <p:sld xmlns:a="http://schemas.openxmlformats.org/drawingml/2006/main" xmlns:p="http://schemas.openxmlformats.org/presentationml/2006/main" xmlns:r="http://schemas.openxmlformats.org/officeDocument/2006/relationships">
   <p:cSld>
     <p:spTree>
@@ -15521,7 +13601,7 @@
                 </a:solidFill>
                 <a:latin typeface="Calibri"/>
               </a:rPr>
-              <a:t>Reading a program you did not write  (continued)</a:t>
+              <a:t>Reading a program you did not write</a:t>
             </a:r>
           </a:p>
         </p:txBody>
@@ -15661,7 +13741,7 @@
                 </a:solidFill>
                 <a:latin typeface="Calibri"/>
               </a:rPr>
-              <a:t>22</a:t>
+              <a:t>19</a:t>
             </a:r>
           </a:p>
         </p:txBody>
@@ -15675,7 +13755,7 @@
         <p:spPr>
           <a:xfrm>
             <a:off x="502920" y="1188720"/>
-            <a:ext cx="11185855" cy="5074920"/>
+            <a:ext cx="11185855" cy="530352"/>
           </a:xfrm>
           <a:prstGeom prst="rect">
             <a:avLst/>
@@ -15693,39 +13773,196 @@
                 <a:spcPct val="100000"/>
               </a:lnSpc>
               <a:spcAft>
-                <a:spcPts val="900"/>
-              </a:spcAft>
-              <a:defRPr sz="1500" b="0">
-                <a:solidFill>
-                  <a:srgbClr val="222222"/>
-                </a:solidFill>
-                <a:latin typeface="Calibri"/>
-              </a:defRPr>
-            </a:pPr>
-          </a:p>
+                <a:spcPts val="600"/>
+              </a:spcAft>
+              <a:defRPr sz="1900" b="1">
+                <a:solidFill>
+                  <a:srgbClr val="0E7C86"/>
+                </a:solidFill>
+                <a:latin typeface="Calibri"/>
+              </a:defRPr>
+            </a:pPr>
+            <a:r>
+              <a:rPr sz="1900" b="1">
+                <a:solidFill>
+                  <a:srgbClr val="0E7C86"/>
+                </a:solidFill>
+                <a:latin typeface="Calibri"/>
+              </a:rPr>
+              <a:t>Header, then Config.h, then setup(), then loop()</a:t>
+            </a:r>
+          </a:p>
+        </p:txBody>
+      </p:sp>
+      <p:sp>
+        <p:nvSpPr>
+          <p:cNvPr id="7" name="TextBox 6"/>
+          <p:cNvSpPr txBox="1"/>
+          <p:nvPr/>
+        </p:nvSpPr>
+        <p:spPr>
+          <a:xfrm>
+            <a:off x="502920" y="1755648"/>
+            <a:ext cx="11185855" cy="4507992"/>
+          </a:xfrm>
+          <a:prstGeom prst="rect">
+            <a:avLst/>
+          </a:prstGeom>
+          <a:noFill/>
+        </p:spPr>
+        <p:txBody>
+          <a:bodyPr wrap="square" lIns="0" tIns="0" rIns="0" bIns="0">
+            <a:spAutoFit/>
+          </a:bodyPr>
+          <a:lstStyle/>
           <a:p>
             <a:pPr algn="l">
               <a:lnSpc>
                 <a:spcPct val="100000"/>
               </a:lnSpc>
               <a:spcAft>
-                <a:spcPts val="900"/>
-              </a:spcAft>
-              <a:defRPr sz="3000" b="0">
-                <a:solidFill>
-                  <a:srgbClr val="222222"/>
-                </a:solidFill>
-                <a:latin typeface="Calibri"/>
-              </a:defRPr>
-            </a:pPr>
-            <a:r>
-              <a:rPr sz="3000" b="0">
-                <a:solidFill>
-                  <a:srgbClr val="222222"/>
-                </a:solidFill>
-                <a:latin typeface="Calibri"/>
-              </a:rPr>
-              <a:t>Notice what that order gives you: the vocabulary first, then the skeleton, then the detail. Going the other way means reading Lighting.ino with no idea what led_mode is or who sets it.</a:t>
+                <a:spcPts val="600"/>
+              </a:spcAft>
+              <a:defRPr sz="2000" b="0">
+                <a:solidFill>
+                  <a:srgbClr val="222222"/>
+                </a:solidFill>
+                <a:latin typeface="Calibri"/>
+              </a:defRPr>
+            </a:pPr>
+            <a:r>
+              <a:rPr sz="2000" b="0">
+                <a:solidFill>
+                  <a:srgbClr val="222222"/>
+                </a:solidFill>
+                <a:latin typeface="Calibri"/>
+              </a:rPr>
+              <a:t>You are about to be handed 1300 lines across eight files. Front to back is the slowest possible way in. A better order:</a:t>
+            </a:r>
+          </a:p>
+          <a:p>
+            <a:pPr lvl="1" algn="l">
+              <a:lnSpc>
+                <a:spcPct val="100000"/>
+              </a:lnSpc>
+              <a:spcAft>
+                <a:spcPts val="600"/>
+              </a:spcAft>
+              <a:defRPr sz="2000" b="0">
+                <a:solidFill>
+                  <a:srgbClr val="222222"/>
+                </a:solidFill>
+                <a:latin typeface="Calibri"/>
+              </a:defRPr>
+            </a:pPr>
+            <a:r>
+              <a:rPr sz="2000" b="0">
+                <a:solidFill>
+                  <a:srgbClr val="222222"/>
+                </a:solidFill>
+                <a:latin typeface="Calibri"/>
+              </a:rPr>
+              <a:t>1.  The header comment: the hardware, the controls, and in this case the change log.</a:t>
+            </a:r>
+          </a:p>
+          <a:p>
+            <a:pPr lvl="1" algn="l">
+              <a:lnSpc>
+                <a:spcPct val="100000"/>
+              </a:lnSpc>
+              <a:spcAft>
+                <a:spcPts val="600"/>
+              </a:spcAft>
+              <a:defRPr sz="2000" b="0">
+                <a:solidFill>
+                  <a:srgbClr val="222222"/>
+                </a:solidFill>
+                <a:latin typeface="Calibri"/>
+              </a:defRPr>
+            </a:pPr>
+            <a:r>
+              <a:rPr sz="2000" b="0">
+                <a:solidFill>
+                  <a:srgbClr val="222222"/>
+                </a:solidFill>
+                <a:latin typeface="Calibri"/>
+              </a:rPr>
+              <a:t>2.  Config.h. Every number the program cares about, in one place. What it lets you tune tells you what it can do.</a:t>
+            </a:r>
+          </a:p>
+          <a:p>
+            <a:pPr lvl="1" algn="l">
+              <a:lnSpc>
+                <a:spcPct val="100000"/>
+              </a:lnSpc>
+              <a:spcAft>
+                <a:spcPts val="600"/>
+              </a:spcAft>
+              <a:defRPr sz="2000" b="0">
+                <a:solidFill>
+                  <a:srgbClr val="222222"/>
+                </a:solidFill>
+                <a:latin typeface="Calibri"/>
+              </a:defRPr>
+            </a:pPr>
+            <a:r>
+              <a:rPr sz="2000" b="0">
+                <a:solidFill>
+                  <a:srgbClr val="222222"/>
+                </a:solidFill>
+                <a:latin typeface="Calibri"/>
+              </a:rPr>
+              <a:t>3.  setup(). What has to be true before anything runs.</a:t>
+            </a:r>
+          </a:p>
+          <a:p>
+            <a:pPr lvl="1" algn="l">
+              <a:lnSpc>
+                <a:spcPct val="100000"/>
+              </a:lnSpc>
+              <a:spcAft>
+                <a:spcPts val="600"/>
+              </a:spcAft>
+              <a:defRPr sz="2000" b="0">
+                <a:solidFill>
+                  <a:srgbClr val="222222"/>
+                </a:solidFill>
+                <a:latin typeface="Calibri"/>
+              </a:defRPr>
+            </a:pPr>
+            <a:r>
+              <a:rPr sz="2000" b="0">
+                <a:solidFill>
+                  <a:srgbClr val="222222"/>
+                </a:solidFill>
+                <a:latin typeface="Calibri"/>
+              </a:rPr>
+              <a:t>4.  loop(). The whole shape, in one screen.</a:t>
+            </a:r>
+          </a:p>
+          <a:p>
+            <a:pPr lvl="1" algn="l">
+              <a:lnSpc>
+                <a:spcPct val="100000"/>
+              </a:lnSpc>
+              <a:spcAft>
+                <a:spcPts val="600"/>
+              </a:spcAft>
+              <a:defRPr sz="2000" b="0">
+                <a:solidFill>
+                  <a:srgbClr val="222222"/>
+                </a:solidFill>
+                <a:latin typeface="Calibri"/>
+              </a:defRPr>
+            </a:pPr>
+            <a:r>
+              <a:rPr sz="2000" b="0">
+                <a:solidFill>
+                  <a:srgbClr val="222222"/>
+                </a:solidFill>
+                <a:latin typeface="Calibri"/>
+              </a:rPr>
+              <a:t>5.  Only then, the subsystem that interests you.</a:t>
             </a:r>
           </a:p>
           <a:p>
@@ -15734,15 +13971,24 @@
                 <a:spcPct val="100000"/>
               </a:lnSpc>
               <a:spcAft>
-                <a:spcPts val="900"/>
-              </a:spcAft>
-              <a:defRPr sz="1500" b="0">
-                <a:solidFill>
-                  <a:srgbClr val="222222"/>
-                </a:solidFill>
-                <a:latin typeface="Calibri"/>
-              </a:defRPr>
-            </a:pPr>
+                <a:spcPts val="600"/>
+              </a:spcAft>
+              <a:defRPr sz="2000" b="0">
+                <a:solidFill>
+                  <a:srgbClr val="222222"/>
+                </a:solidFill>
+                <a:latin typeface="Calibri"/>
+              </a:defRPr>
+            </a:pPr>
+            <a:r>
+              <a:rPr sz="2000" b="0">
+                <a:solidFill>
+                  <a:srgbClr val="222222"/>
+                </a:solidFill>
+                <a:latin typeface="Calibri"/>
+              </a:rPr>
+              <a:t>Vocabulary first, then skeleton, then detail. The other way round means reading Lighting.ino with no idea what led_mode is or who sets it.</a:t>
+            </a:r>
           </a:p>
           <a:p>
             <a:pPr algn="l">
@@ -15750,23 +13996,23 @@
                 <a:spcPct val="100000"/>
               </a:lnSpc>
               <a:spcAft>
-                <a:spcPts val="900"/>
-              </a:spcAft>
-              <a:defRPr sz="3000" b="0">
-                <a:solidFill>
-                  <a:srgbClr val="222222"/>
-                </a:solidFill>
-                <a:latin typeface="Calibri"/>
-              </a:defRPr>
-            </a:pPr>
-            <a:r>
-              <a:rPr sz="3000" b="0">
-                <a:solidFill>
-                  <a:srgbClr val="222222"/>
-                </a:solidFill>
-                <a:latin typeface="Calibri"/>
-              </a:rPr>
-              <a:t>EXERCISE, ten minutes. Open Pathfinder_Op_Program12, read in that order, and write down three questions. We will answer them over the next four lessons.</a:t>
+                <a:spcPts val="600"/>
+              </a:spcAft>
+              <a:defRPr sz="2000" b="0">
+                <a:solidFill>
+                  <a:srgbClr val="222222"/>
+                </a:solidFill>
+                <a:latin typeface="Calibri"/>
+              </a:defRPr>
+            </a:pPr>
+            <a:r>
+              <a:rPr sz="2000" b="0">
+                <a:solidFill>
+                  <a:srgbClr val="222222"/>
+                </a:solidFill>
+                <a:latin typeface="Calibri"/>
+              </a:rPr>
+              <a:t>EXERCISE, ten minutes. Read Op 12 in that order and write down three questions. We will answer them over the next four lessons.</a:t>
             </a:r>
           </a:p>
         </p:txBody>
@@ -15779,7 +14025,7 @@
 </p:sld>
 </file>
 
-<file path=ppt/slides/slide24.xml><?xml version="1.0" encoding="utf-8"?>
+<file path=ppt/slides/slide21.xml><?xml version="1.0" encoding="utf-8"?>
 <p:sld xmlns:a="http://schemas.openxmlformats.org/drawingml/2006/main" xmlns:p="http://schemas.openxmlformats.org/presentationml/2006/main" xmlns:r="http://schemas.openxmlformats.org/officeDocument/2006/relationships">
   <p:cSld>
     <p:spTree>
@@ -15970,7 +14216,7 @@
                 </a:solidFill>
                 <a:latin typeface="Calibri"/>
               </a:rPr>
-              <a:t>23</a:t>
+              <a:t>20</a:t>
             </a:r>
           </a:p>
         </p:txBody>
@@ -18914,7 +17160,7 @@
         <p:spPr>
           <a:xfrm>
             <a:off x="502920" y="1188720"/>
-            <a:ext cx="5364327" cy="457200"/>
+            <a:ext cx="3833090" cy="457200"/>
           </a:xfrm>
           <a:prstGeom prst="rect">
             <a:avLst/>
@@ -18962,7 +17208,7 @@
         <p:spPr>
           <a:xfrm>
             <a:off x="502920" y="1700784"/>
-            <a:ext cx="5364327" cy="4562856"/>
+            <a:ext cx="3833090" cy="3474720"/>
           </a:xfrm>
           <a:prstGeom prst="rect">
             <a:avLst/>
@@ -19032,22 +17278,6 @@
               <a:spcAft>
                 <a:spcPts val="800"/>
               </a:spcAft>
-              <a:defRPr sz="900" b="0">
-                <a:solidFill>
-                  <a:srgbClr val="222222"/>
-                </a:solidFill>
-                <a:latin typeface="Calibri"/>
-              </a:defRPr>
-            </a:pPr>
-          </a:p>
-          <a:p>
-            <a:pPr algn="l">
-              <a:lnSpc>
-                <a:spcPct val="100000"/>
-              </a:lnSpc>
-              <a:spcAft>
-                <a:spcPts val="800"/>
-              </a:spcAft>
               <a:defRPr sz="1800" b="0">
                 <a:solidFill>
                   <a:srgbClr val="222222"/>
@@ -19062,7 +17292,7 @@
                 </a:solidFill>
                 <a:latin typeface="Calibri"/>
               </a:rPr>
-              <a:t>The answer: DETECT the hardware at boot and switch behavior on what is actually there.</a:t>
+              <a:t>The answer: DETECT the hardware at boot, and switch behavior on what is actually there.</a:t>
             </a:r>
           </a:p>
         </p:txBody>
@@ -19075,8 +17305,8 @@
         </p:nvSpPr>
         <p:spPr>
           <a:xfrm>
-            <a:off x="6324447" y="1188720"/>
-            <a:ext cx="5364327" cy="457200"/>
+            <a:off x="4793210" y="1188720"/>
+            <a:ext cx="6895565" cy="457200"/>
           </a:xfrm>
           <a:prstGeom prst="rect">
             <a:avLst/>
@@ -19123,8 +17353,8 @@
         </p:nvSpPr>
         <p:spPr>
           <a:xfrm>
-            <a:off x="6324447" y="1700784"/>
-            <a:ext cx="5364327" cy="4562856"/>
+            <a:off x="4793210" y="1700784"/>
+            <a:ext cx="6895565" cy="3474720"/>
           </a:xfrm>
           <a:prstGeom prst="rect">
             <a:avLst/>
@@ -19142,7 +17372,7 @@
                 <a:spcPct val="100000"/>
               </a:lnSpc>
               <a:spcAft>
-                <a:spcPts val="800"/>
+                <a:spcPts val="400"/>
               </a:spcAft>
               <a:defRPr sz="1800" b="0">
                 <a:solidFill>
@@ -19167,7 +17397,7 @@
                 <a:spcPct val="100000"/>
               </a:lnSpc>
               <a:spcAft>
-                <a:spcPts val="800"/>
+                <a:spcPts val="400"/>
               </a:spcAft>
               <a:defRPr sz="1800" b="0">
                 <a:solidFill>
@@ -19192,7 +17422,7 @@
                 <a:spcPct val="100000"/>
               </a:lnSpc>
               <a:spcAft>
-                <a:spcPts val="800"/>
+                <a:spcPts val="400"/>
               </a:spcAft>
               <a:defRPr sz="1800" b="0">
                 <a:solidFill>
@@ -19217,7 +17447,7 @@
                 <a:spcPct val="100000"/>
               </a:lnSpc>
               <a:spcAft>
-                <a:spcPts val="800"/>
+                <a:spcPts val="400"/>
               </a:spcAft>
               <a:defRPr sz="1800" b="0">
                 <a:solidFill>
@@ -19242,7 +17472,7 @@
                 <a:spcPct val="100000"/>
               </a:lnSpc>
               <a:spcAft>
-                <a:spcPts val="800"/>
+                <a:spcPts val="400"/>
               </a:spcAft>
               <a:defRPr sz="1800" b="0">
                 <a:solidFill>
@@ -19267,7 +17497,7 @@
                 <a:spcPct val="100000"/>
               </a:lnSpc>
               <a:spcAft>
-                <a:spcPts val="800"/>
+                <a:spcPts val="400"/>
               </a:spcAft>
               <a:defRPr sz="1800" b="0">
                 <a:solidFill>
@@ -19286,304 +17516,38 @@
               <a:t>}</a:t>
             </a:r>
           </a:p>
-        </p:txBody>
-      </p:sp>
-    </p:spTree>
-  </p:cSld>
-  <p:clrMapOvr>
-    <a:masterClrMapping/>
-  </p:clrMapOvr>
-</p:sld>
-</file>
-
-<file path=ppt/slides/slide8.xml><?xml version="1.0" encoding="utf-8"?>
-<p:sld xmlns:a="http://schemas.openxmlformats.org/drawingml/2006/main" xmlns:p="http://schemas.openxmlformats.org/presentationml/2006/main" xmlns:r="http://schemas.openxmlformats.org/officeDocument/2006/relationships">
-  <p:cSld>
-    <p:spTree>
-      <p:nvGrpSpPr>
-        <p:cNvPr id="1" name=""/>
-        <p:cNvGrpSpPr/>
-        <p:nvPr/>
-      </p:nvGrpSpPr>
-      <p:grpSpPr/>
-      <p:sp>
-        <p:nvSpPr>
-          <p:cNvPr id="2" name="Title 1"/>
-          <p:cNvSpPr>
-            <a:spLocks noGrp="1"/>
-          </p:cNvSpPr>
-          <p:nvPr>
-            <p:ph type="title"/>
-          </p:nvPr>
-        </p:nvSpPr>
-        <p:spPr>
-          <a:xfrm>
-            <a:off x="502920" y="274320"/>
-            <a:ext cx="11185855" cy="777240"/>
-          </a:xfrm>
-        </p:spPr>
-        <p:txBody>
-          <a:bodyPr wrap="square" anchor="b"/>
-          <a:lstStyle/>
           <a:p>
             <a:pPr algn="l">
               <a:lnSpc>
                 <a:spcPct val="100000"/>
               </a:lnSpc>
               <a:spcAft>
-                <a:spcPts val="0"/>
-              </a:spcAft>
-              <a:defRPr sz="2800" b="1">
-                <a:solidFill>
-                  <a:srgbClr val="1F3A5F"/>
-                </a:solidFill>
-                <a:latin typeface="Calibri"/>
-              </a:defRPr>
-            </a:pPr>
-            <a:r>
-              <a:rPr sz="2800" b="1">
-                <a:solidFill>
-                  <a:srgbClr val="1F3A5F"/>
-                </a:solidFill>
-                <a:latin typeface="Calibri"/>
-              </a:rPr>
-              <a:t>One binary, two vehicles  (continued)</a:t>
-            </a:r>
-          </a:p>
-        </p:txBody>
-      </p:sp>
-      <p:sp>
-        <p:nvSpPr>
-          <p:cNvPr id="3" name="Rectangle 2"/>
-          <p:cNvSpPr/>
-          <p:nvPr/>
-        </p:nvSpPr>
-        <p:spPr>
-          <a:xfrm>
-            <a:off x="502920" y="1097280"/>
-            <a:ext cx="11185855" cy="19050"/>
-          </a:xfrm>
-          <a:prstGeom prst="rect">
-            <a:avLst/>
-          </a:prstGeom>
-          <a:solidFill>
-            <a:srgbClr val="C8D2DE"/>
-          </a:solidFill>
-          <a:ln>
-            <a:noFill/>
-          </a:ln>
-          <a:effectLst/>
-        </p:spPr>
-        <p:style>
-          <a:lnRef idx="1">
-            <a:schemeClr val="accent1"/>
-          </a:lnRef>
-          <a:fillRef idx="3">
-            <a:schemeClr val="accent1"/>
-          </a:fillRef>
-          <a:effectRef idx="2">
-            <a:schemeClr val="accent1"/>
-          </a:effectRef>
-          <a:fontRef idx="minor">
-            <a:schemeClr val="lt1"/>
-          </a:fontRef>
-        </p:style>
-        <p:txBody>
-          <a:bodyPr rtlCol="0" anchor="ctr"/>
-          <a:lstStyle/>
-          <a:p>
-            <a:pPr algn="ctr"/>
-          </a:p>
-        </p:txBody>
-      </p:sp>
-      <p:sp>
-        <p:nvSpPr>
-          <p:cNvPr id="4" name="TextBox 3"/>
-          <p:cNvSpPr txBox="1"/>
-          <p:nvPr/>
-        </p:nvSpPr>
-        <p:spPr>
-          <a:xfrm>
-            <a:off x="502920" y="6382512"/>
-            <a:ext cx="10545775" cy="274320"/>
-          </a:xfrm>
-          <a:prstGeom prst="rect">
-            <a:avLst/>
-          </a:prstGeom>
-          <a:noFill/>
-        </p:spPr>
-        <p:txBody>
-          <a:bodyPr wrap="square" lIns="0" tIns="0">
-            <a:spAutoFit/>
-          </a:bodyPr>
-          <a:lstStyle/>
+                <a:spcPts val="400"/>
+              </a:spcAft>
+              <a:defRPr sz="1800" b="0">
+                <a:solidFill>
+                  <a:srgbClr val="222222"/>
+                </a:solidFill>
+                <a:latin typeface="Calibri"/>
+              </a:defRPr>
+            </a:pPr>
+            <a:r>
+              <a:rPr sz="1800" b="0">
+                <a:solidFill>
+                  <a:srgbClr val="222222"/>
+                </a:solidFill>
+                <a:latin typeface="Calibri"/>
+              </a:rPr>
+              <a:t>Bit FLAGS, not booleans, so one byte carries several independent capabilities and a test is a single &amp;.</a:t>
+            </a:r>
+          </a:p>
           <a:p>
             <a:pPr algn="l">
               <a:lnSpc>
                 <a:spcPct val="100000"/>
               </a:lnSpc>
               <a:spcAft>
-                <a:spcPts val="0"/>
-              </a:spcAft>
-              <a:defRPr sz="1000" b="0">
-                <a:solidFill>
-                  <a:srgbClr val="666666"/>
-                </a:solidFill>
-                <a:latin typeface="Calibri"/>
-              </a:defRPr>
-            </a:pPr>
-            <a:r>
-              <a:rPr sz="1000" b="0">
-                <a:solidFill>
-                  <a:srgbClr val="666666"/>
-                </a:solidFill>
-                <a:latin typeface="Calibri"/>
-              </a:rPr>
-              <a:t>Pathfinder Advanced - Op Program 12  |  Lesson 1</a:t>
-            </a:r>
-          </a:p>
-        </p:txBody>
-      </p:sp>
-      <p:sp>
-        <p:nvSpPr>
-          <p:cNvPr id="5" name="TextBox 4"/>
-          <p:cNvSpPr txBox="1"/>
-          <p:nvPr/>
-        </p:nvSpPr>
-        <p:spPr>
-          <a:xfrm>
-            <a:off x="11231575" y="6382512"/>
-            <a:ext cx="457200" cy="274320"/>
-          </a:xfrm>
-          <a:prstGeom prst="rect">
-            <a:avLst/>
-          </a:prstGeom>
-          <a:noFill/>
-        </p:spPr>
-        <p:txBody>
-          <a:bodyPr wrap="square" lIns="0" tIns="0">
-            <a:spAutoFit/>
-          </a:bodyPr>
-          <a:lstStyle/>
-          <a:p>
-            <a:pPr algn="r">
-              <a:lnSpc>
-                <a:spcPct val="100000"/>
-              </a:lnSpc>
-              <a:spcAft>
-                <a:spcPts val="0"/>
-              </a:spcAft>
-              <a:defRPr sz="1000" b="0">
-                <a:solidFill>
-                  <a:srgbClr val="666666"/>
-                </a:solidFill>
-                <a:latin typeface="Calibri"/>
-              </a:defRPr>
-            </a:pPr>
-            <a:r>
-              <a:rPr sz="1000" b="0">
-                <a:solidFill>
-                  <a:srgbClr val="666666"/>
-                </a:solidFill>
-                <a:latin typeface="Calibri"/>
-              </a:rPr>
-              <a:t>7</a:t>
-            </a:r>
-          </a:p>
-        </p:txBody>
-      </p:sp>
-      <p:sp>
-        <p:nvSpPr>
-          <p:cNvPr id="6" name="TextBox 5"/>
-          <p:cNvSpPr txBox="1"/>
-          <p:nvPr/>
-        </p:nvSpPr>
-        <p:spPr>
-          <a:xfrm>
-            <a:off x="6324447" y="1188720"/>
-            <a:ext cx="5364327" cy="457200"/>
-          </a:xfrm>
-          <a:prstGeom prst="rect">
-            <a:avLst/>
-          </a:prstGeom>
-          <a:noFill/>
-        </p:spPr>
-        <p:txBody>
-          <a:bodyPr wrap="square" lIns="0" tIns="0" rIns="0" bIns="0">
-            <a:spAutoFit/>
-          </a:bodyPr>
-          <a:lstStyle/>
-          <a:p>
-            <a:pPr algn="l">
-              <a:lnSpc>
-                <a:spcPct val="100000"/>
-              </a:lnSpc>
-              <a:spcAft>
-                <a:spcPts val="600"/>
-              </a:spcAft>
-              <a:defRPr sz="1900" b="1">
-                <a:solidFill>
-                  <a:srgbClr val="0E7C86"/>
-                </a:solidFill>
-                <a:latin typeface="Calibri"/>
-              </a:defRPr>
-            </a:pPr>
-            <a:r>
-              <a:rPr sz="1900" b="1">
-                <a:solidFill>
-                  <a:srgbClr val="0E7C86"/>
-                </a:solidFill>
-                <a:latin typeface="Calibri"/>
-              </a:rPr>
-              <a:t>How Op 12 does it (cont.)</a:t>
-            </a:r>
-          </a:p>
-        </p:txBody>
-      </p:sp>
-      <p:sp>
-        <p:nvSpPr>
-          <p:cNvPr id="7" name="TextBox 6"/>
-          <p:cNvSpPr txBox="1"/>
-          <p:nvPr/>
-        </p:nvSpPr>
-        <p:spPr>
-          <a:xfrm>
-            <a:off x="6324447" y="1700784"/>
-            <a:ext cx="5364327" cy="3474720"/>
-          </a:xfrm>
-          <a:prstGeom prst="rect">
-            <a:avLst/>
-          </a:prstGeom>
-          <a:noFill/>
-        </p:spPr>
-        <p:txBody>
-          <a:bodyPr wrap="square" lIns="0" tIns="0" rIns="0" bIns="0">
-            <a:spAutoFit/>
-          </a:bodyPr>
-          <a:lstStyle/>
-          <a:p>
-            <a:pPr algn="l">
-              <a:lnSpc>
-                <a:spcPct val="100000"/>
-              </a:lnSpc>
-              <a:spcAft>
-                <a:spcPts val="800"/>
-              </a:spcAft>
-              <a:defRPr sz="900" b="0">
-                <a:solidFill>
-                  <a:srgbClr val="222222"/>
-                </a:solidFill>
-                <a:latin typeface="Calibri"/>
-              </a:defRPr>
-            </a:pPr>
-          </a:p>
-          <a:p>
-            <a:pPr algn="l">
-              <a:lnSpc>
-                <a:spcPct val="100000"/>
-              </a:lnSpc>
-              <a:spcAft>
-                <a:spcPts val="800"/>
+                <a:spcPts val="400"/>
               </a:spcAft>
               <a:defRPr sz="1800" b="0">
                 <a:solidFill>
@@ -19599,39 +17563,14 @@
                 </a:solidFill>
                 <a:latin typeface="Calibri"/>
               </a:rPr>
-              <a:t>Bit FLAGS, not booleans, so one byte can carry several independent capabilities and a test is a single &amp; operation.</a:t>
-            </a:r>
-          </a:p>
-          <a:p>
-            <a:pPr algn="l">
-              <a:lnSpc>
-                <a:spcPct val="100000"/>
-              </a:lnSpc>
-              <a:spcAft>
-                <a:spcPts val="800"/>
-              </a:spcAft>
-              <a:defRPr sz="1800" b="0">
-                <a:solidFill>
-                  <a:srgbClr val="222222"/>
-                </a:solidFill>
-                <a:latin typeface="Calibri"/>
-              </a:defRPr>
-            </a:pPr>
-            <a:r>
-              <a:rPr sz="1800" b="0">
-                <a:solidFill>
-                  <a:srgbClr val="222222"/>
-                </a:solidFill>
-                <a:latin typeface="Calibri"/>
-              </a:rPr>
-              <a:t>Every feature that needs the sensor checks its flag first and is a no-op without it.</a:t>
-            </a:r>
-          </a:p>
-        </p:txBody>
-      </p:sp>
-      <p:sp>
-        <p:nvSpPr>
-          <p:cNvPr id="8" name="Rounded Rectangle 7"/>
+              <a:t>Every feature that needs the sensor checks its flag first, and is a no-op without it.</a:t>
+            </a:r>
+          </a:p>
+        </p:txBody>
+      </p:sp>
+      <p:sp>
+        <p:nvSpPr>
+          <p:cNvPr id="10" name="Rounded Rectangle 9"/>
           <p:cNvSpPr/>
           <p:nvPr/>
         </p:nvSpPr>
@@ -19703,7 +17642,7 @@
 </p:sld>
 </file>
 
-<file path=ppt/slides/slide9.xml><?xml version="1.0" encoding="utf-8"?>
+<file path=ppt/slides/slide8.xml><?xml version="1.0" encoding="utf-8"?>
 <p:sld xmlns:a="http://schemas.openxmlformats.org/drawingml/2006/main" xmlns:p="http://schemas.openxmlformats.org/presentationml/2006/main" xmlns:r="http://schemas.openxmlformats.org/officeDocument/2006/relationships">
   <p:cSld>
     <p:spTree>
@@ -19894,7 +17833,7 @@
                 </a:solidFill>
                 <a:latin typeface="Calibri"/>
               </a:rPr>
-              <a:t>8</a:t>
+              <a:t>7</a:t>
             </a:r>
           </a:p>
         </p:txBody>
@@ -19956,7 +17895,7 @@
         <p:spPr>
           <a:xfrm>
             <a:off x="502920" y="1755648"/>
-            <a:ext cx="11185855" cy="4507992"/>
+            <a:ext cx="11185855" cy="3419856"/>
           </a:xfrm>
           <a:prstGeom prst="rect">
             <a:avLst/>
@@ -19976,15 +17915,15 @@
               <a:spcAft>
                 <a:spcPts val="600"/>
               </a:spcAft>
-              <a:defRPr sz="2700" b="0">
-                <a:solidFill>
-                  <a:srgbClr val="222222"/>
-                </a:solidFill>
-                <a:latin typeface="Calibri"/>
-              </a:defRPr>
-            </a:pPr>
-            <a:r>
-              <a:rPr sz="2700" b="0">
+              <a:defRPr sz="1800" b="0">
+                <a:solidFill>
+                  <a:srgbClr val="222222"/>
+                </a:solidFill>
+                <a:latin typeface="Calibri"/>
+              </a:defRPr>
+            </a:pPr>
+            <a:r>
+              <a:rPr sz="1800" b="0">
                 <a:solidFill>
                   <a:srgbClr val="222222"/>
                 </a:solidFill>
@@ -20001,21 +17940,21 @@
               <a:spcAft>
                 <a:spcPts val="600"/>
               </a:spcAft>
-              <a:defRPr sz="2700" b="0">
-                <a:solidFill>
-                  <a:srgbClr val="222222"/>
-                </a:solidFill>
-                <a:latin typeface="Calibri"/>
-              </a:defRPr>
-            </a:pPr>
-            <a:r>
-              <a:rPr sz="2700" b="0">
-                <a:solidFill>
-                  <a:srgbClr val="222222"/>
-                </a:solidFill>
-                <a:latin typeface="Calibri"/>
-              </a:rPr>
-              <a:t>Before compiling, the IDE CONCATENATES them into one file - the one named after the folder first, then the rest alphabetically - and generates function prototypes at the top.</a:t>
+              <a:defRPr sz="1800" b="0">
+                <a:solidFill>
+                  <a:srgbClr val="222222"/>
+                </a:solidFill>
+                <a:latin typeface="Calibri"/>
+              </a:defRPr>
+            </a:pPr>
+            <a:r>
+              <a:rPr sz="1800" b="0">
+                <a:solidFill>
+                  <a:srgbClr val="222222"/>
+                </a:solidFill>
+                <a:latin typeface="Calibri"/>
+              </a:rPr>
+              <a:t>Before compiling, the IDE CONCATENATES them into one file - the one named after the folder first, then the rest alphabetically - and generates prototypes at the top.</a:t>
             </a:r>
           </a:p>
           <a:p>
@@ -20026,13 +17965,72 @@
               <a:spcAft>
                 <a:spcPts val="600"/>
               </a:spcAft>
-              <a:defRPr sz="1350" b="0">
-                <a:solidFill>
-                  <a:srgbClr val="222222"/>
-                </a:solidFill>
-                <a:latin typeface="Calibri"/>
-              </a:defRPr>
-            </a:pPr>
+              <a:defRPr sz="1800" b="0">
+                <a:solidFill>
+                  <a:srgbClr val="222222"/>
+                </a:solidFill>
+                <a:latin typeface="Calibri"/>
+              </a:defRPr>
+            </a:pPr>
+            <a:r>
+              <a:rPr sz="1800" b="0">
+                <a:solidFill>
+                  <a:srgbClr val="222222"/>
+                </a:solidFill>
+                <a:latin typeface="Calibri"/>
+              </a:rPr>
+              <a:t>Two consequences you have to know:</a:t>
+            </a:r>
+          </a:p>
+          <a:p>
+            <a:pPr lvl="1" algn="l">
+              <a:lnSpc>
+                <a:spcPct val="100000"/>
+              </a:lnSpc>
+              <a:spcAft>
+                <a:spcPts val="600"/>
+              </a:spcAft>
+              <a:defRPr sz="1800" b="0">
+                <a:solidFill>
+                  <a:srgbClr val="222222"/>
+                </a:solidFill>
+                <a:latin typeface="Calibri"/>
+              </a:defRPr>
+            </a:pPr>
+            <a:r>
+              <a:rPr sz="1800" b="0">
+                <a:solidFill>
+                  <a:srgbClr val="222222"/>
+                </a:solidFill>
+                <a:latin typeface="Calibri"/>
+              </a:rPr>
+              <a:t>Functions and globals cross tabs with NO header needed. Lighting.ino can call strip and read NUM_LEDS with no include.</a:t>
+            </a:r>
+          </a:p>
+          <a:p>
+            <a:pPr lvl="1" algn="l">
+              <a:lnSpc>
+                <a:spcPct val="100000"/>
+              </a:lnSpc>
+              <a:spcAft>
+                <a:spcPts val="600"/>
+              </a:spcAft>
+              <a:defRPr sz="1800" b="0">
+                <a:solidFill>
+                  <a:srgbClr val="222222"/>
+                </a:solidFill>
+                <a:latin typeface="Calibri"/>
+              </a:defRPr>
+            </a:pPr>
+            <a:r>
+              <a:rPr sz="1800" b="0">
+                <a:solidFill>
+                  <a:srgbClr val="222222"/>
+                </a:solidFill>
+                <a:latin typeface="Calibri"/>
+              </a:rPr>
+              <a:t>TYPES do not. The generated prototypes go ABOVE your code, so a prototype mentioning an enum or struct you declared in a tab will not compile - the type is not defined yet.</a:t>
+            </a:r>
           </a:p>
           <a:p>
             <a:pPr algn="l">
@@ -20042,62 +18040,845 @@
               <a:spcAft>
                 <a:spcPts val="600"/>
               </a:spcAft>
-              <a:defRPr sz="2700" b="0">
-                <a:solidFill>
-                  <a:srgbClr val="222222"/>
-                </a:solidFill>
-                <a:latin typeface="Calibri"/>
-              </a:defRPr>
-            </a:pPr>
-            <a:r>
-              <a:rPr sz="2700" b="0">
-                <a:solidFill>
-                  <a:srgbClr val="222222"/>
-                </a:solidFill>
-                <a:latin typeface="Calibri"/>
-              </a:rPr>
-              <a:t>Two consequences you have to know:</a:t>
-            </a:r>
-          </a:p>
+              <a:defRPr sz="1800" b="0">
+                <a:solidFill>
+                  <a:srgbClr val="222222"/>
+                </a:solidFill>
+                <a:latin typeface="Calibri"/>
+              </a:defRPr>
+            </a:pPr>
+            <a:r>
+              <a:rPr sz="1800" b="0">
+                <a:solidFill>
+                  <a:srgbClr val="222222"/>
+                </a:solidFill>
+                <a:latin typeface="Calibri"/>
+              </a:rPr>
+              <a:t>That is precisely why Config.h is a real header rather than a ninth tab. It is #included by the main sketch, so it is defined before the prototypes appear.</a:t>
+            </a:r>
+          </a:p>
+        </p:txBody>
+      </p:sp>
+      <p:sp>
+        <p:nvSpPr>
+          <p:cNvPr id="8" name="Rounded Rectangle 7"/>
+          <p:cNvSpPr/>
+          <p:nvPr/>
+        </p:nvSpPr>
+        <p:spPr>
+          <a:xfrm>
+            <a:off x="502920" y="5303520"/>
+            <a:ext cx="11185855" cy="960120"/>
+          </a:xfrm>
+          <a:prstGeom prst="roundRect">
+            <a:avLst>
+              <a:gd name="adj" fmla="val 4000"/>
+            </a:avLst>
+          </a:prstGeom>
+          <a:solidFill>
+            <a:srgbClr val="EEF3F8"/>
+          </a:solidFill>
+          <a:ln w="12700">
+            <a:solidFill>
+              <a:srgbClr val="0E7C86"/>
+            </a:solidFill>
+          </a:ln>
+          <a:effectLst/>
+        </p:spPr>
+        <p:style>
+          <a:lnRef idx="1">
+            <a:schemeClr val="accent1"/>
+          </a:lnRef>
+          <a:fillRef idx="3">
+            <a:schemeClr val="accent1"/>
+          </a:fillRef>
+          <a:effectRef idx="2">
+            <a:schemeClr val="accent1"/>
+          </a:effectRef>
+          <a:fontRef idx="minor">
+            <a:schemeClr val="lt1"/>
+          </a:fontRef>
+        </p:style>
+        <p:txBody>
+          <a:bodyPr rtlCol="0" anchor="ctr" wrap="square" lIns="164592" rIns="164592" tIns="73152" bIns="73152"/>
+          <a:lstStyle/>
+          <a:p>
+            <a:pPr algn="l"/>
+            <a:r>
+              <a:rPr sz="1300" b="1">
+                <a:solidFill>
+                  <a:srgbClr val="0E7C86"/>
+                </a:solidFill>
+                <a:latin typeface="Calibri"/>
+              </a:rPr>
+              <a:t>KEY POINT   </a:t>
+            </a:r>
+            <a:r>
+              <a:rPr sz="1500">
+                <a:solidFill>
+                  <a:srgbClr val="222222"/>
+                </a:solidFill>
+                <a:latin typeface="Calibri"/>
+              </a:rPr>
+              <a:t>Op 12's Config.h opens with a paragraph saying this. Now you know what it is warning you about.</a:t>
+            </a:r>
+          </a:p>
+        </p:txBody>
+      </p:sp>
+    </p:spTree>
+  </p:cSld>
+  <p:clrMapOvr>
+    <a:masterClrMapping/>
+  </p:clrMapOvr>
+</p:sld>
+</file>
+
+<file path=ppt/slides/slide9.xml><?xml version="1.0" encoding="utf-8"?>
+<p:sld xmlns:a="http://schemas.openxmlformats.org/drawingml/2006/main" xmlns:p="http://schemas.openxmlformats.org/presentationml/2006/main" xmlns:r="http://schemas.openxmlformats.org/officeDocument/2006/relationships">
+  <p:cSld>
+    <p:spTree>
+      <p:nvGrpSpPr>
+        <p:cNvPr id="1" name=""/>
+        <p:cNvGrpSpPr/>
+        <p:nvPr/>
+      </p:nvGrpSpPr>
+      <p:grpSpPr/>
+      <p:sp>
+        <p:nvSpPr>
+          <p:cNvPr id="2" name="Title 1"/>
+          <p:cNvSpPr>
+            <a:spLocks noGrp="1"/>
+          </p:cNvSpPr>
+          <p:nvPr>
+            <p:ph type="title"/>
+          </p:nvPr>
+        </p:nvSpPr>
+        <p:spPr>
+          <a:xfrm>
+            <a:off x="502920" y="274320"/>
+            <a:ext cx="11185855" cy="777240"/>
+          </a:xfrm>
+        </p:spPr>
+        <p:txBody>
+          <a:bodyPr wrap="square" anchor="b"/>
+          <a:lstStyle/>
           <a:p>
             <a:pPr algn="l">
               <a:lnSpc>
                 <a:spcPct val="100000"/>
               </a:lnSpc>
               <a:spcAft>
+                <a:spcPts val="0"/>
+              </a:spcAft>
+              <a:defRPr sz="2800" b="1">
+                <a:solidFill>
+                  <a:srgbClr val="1F3A5F"/>
+                </a:solidFill>
+                <a:latin typeface="Calibri"/>
+              </a:defRPr>
+            </a:pPr>
+            <a:r>
+              <a:rPr sz="2800" b="1">
+                <a:solidFill>
+                  <a:srgbClr val="1F3A5F"/>
+                </a:solidFill>
+                <a:latin typeface="Calibri"/>
+              </a:rPr>
+              <a:t>The eight files, and what each one owns</a:t>
+            </a:r>
+          </a:p>
+        </p:txBody>
+      </p:sp>
+      <p:sp>
+        <p:nvSpPr>
+          <p:cNvPr id="3" name="Rectangle 2"/>
+          <p:cNvSpPr/>
+          <p:nvPr/>
+        </p:nvSpPr>
+        <p:spPr>
+          <a:xfrm>
+            <a:off x="502920" y="1097280"/>
+            <a:ext cx="11185855" cy="19050"/>
+          </a:xfrm>
+          <a:prstGeom prst="rect">
+            <a:avLst/>
+          </a:prstGeom>
+          <a:solidFill>
+            <a:srgbClr val="C8D2DE"/>
+          </a:solidFill>
+          <a:ln>
+            <a:noFill/>
+          </a:ln>
+          <a:effectLst/>
+        </p:spPr>
+        <p:style>
+          <a:lnRef idx="1">
+            <a:schemeClr val="accent1"/>
+          </a:lnRef>
+          <a:fillRef idx="3">
+            <a:schemeClr val="accent1"/>
+          </a:fillRef>
+          <a:effectRef idx="2">
+            <a:schemeClr val="accent1"/>
+          </a:effectRef>
+          <a:fontRef idx="minor">
+            <a:schemeClr val="lt1"/>
+          </a:fontRef>
+        </p:style>
+        <p:txBody>
+          <a:bodyPr rtlCol="0" anchor="ctr"/>
+          <a:lstStyle/>
+          <a:p>
+            <a:pPr algn="ctr"/>
+          </a:p>
+        </p:txBody>
+      </p:sp>
+      <p:sp>
+        <p:nvSpPr>
+          <p:cNvPr id="4" name="TextBox 3"/>
+          <p:cNvSpPr txBox="1"/>
+          <p:nvPr/>
+        </p:nvSpPr>
+        <p:spPr>
+          <a:xfrm>
+            <a:off x="502920" y="6382512"/>
+            <a:ext cx="10545775" cy="274320"/>
+          </a:xfrm>
+          <a:prstGeom prst="rect">
+            <a:avLst/>
+          </a:prstGeom>
+          <a:noFill/>
+        </p:spPr>
+        <p:txBody>
+          <a:bodyPr wrap="square" lIns="0" tIns="0">
+            <a:spAutoFit/>
+          </a:bodyPr>
+          <a:lstStyle/>
+          <a:p>
+            <a:pPr algn="l">
+              <a:lnSpc>
+                <a:spcPct val="100000"/>
+              </a:lnSpc>
+              <a:spcAft>
+                <a:spcPts val="0"/>
+              </a:spcAft>
+              <a:defRPr sz="1000" b="0">
+                <a:solidFill>
+                  <a:srgbClr val="666666"/>
+                </a:solidFill>
+                <a:latin typeface="Calibri"/>
+              </a:defRPr>
+            </a:pPr>
+            <a:r>
+              <a:rPr sz="1000" b="0">
+                <a:solidFill>
+                  <a:srgbClr val="666666"/>
+                </a:solidFill>
+                <a:latin typeface="Calibri"/>
+              </a:rPr>
+              <a:t>Pathfinder Advanced - Op Program 12  |  Lesson 1</a:t>
+            </a:r>
+          </a:p>
+        </p:txBody>
+      </p:sp>
+      <p:sp>
+        <p:nvSpPr>
+          <p:cNvPr id="5" name="TextBox 4"/>
+          <p:cNvSpPr txBox="1"/>
+          <p:nvPr/>
+        </p:nvSpPr>
+        <p:spPr>
+          <a:xfrm>
+            <a:off x="11231575" y="6382512"/>
+            <a:ext cx="457200" cy="274320"/>
+          </a:xfrm>
+          <a:prstGeom prst="rect">
+            <a:avLst/>
+          </a:prstGeom>
+          <a:noFill/>
+        </p:spPr>
+        <p:txBody>
+          <a:bodyPr wrap="square" lIns="0" tIns="0">
+            <a:spAutoFit/>
+          </a:bodyPr>
+          <a:lstStyle/>
+          <a:p>
+            <a:pPr algn="r">
+              <a:lnSpc>
+                <a:spcPct val="100000"/>
+              </a:lnSpc>
+              <a:spcAft>
+                <a:spcPts val="0"/>
+              </a:spcAft>
+              <a:defRPr sz="1000" b="0">
+                <a:solidFill>
+                  <a:srgbClr val="666666"/>
+                </a:solidFill>
+                <a:latin typeface="Calibri"/>
+              </a:defRPr>
+            </a:pPr>
+            <a:r>
+              <a:rPr sz="1000" b="0">
+                <a:solidFill>
+                  <a:srgbClr val="666666"/>
+                </a:solidFill>
+                <a:latin typeface="Calibri"/>
+              </a:rPr>
+              <a:t>8</a:t>
+            </a:r>
+          </a:p>
+        </p:txBody>
+      </p:sp>
+      <p:sp>
+        <p:nvSpPr>
+          <p:cNvPr id="6" name="TextBox 5"/>
+          <p:cNvSpPr txBox="1"/>
+          <p:nvPr/>
+        </p:nvSpPr>
+        <p:spPr>
+          <a:xfrm>
+            <a:off x="502920" y="1188720"/>
+            <a:ext cx="11185855" cy="457200"/>
+          </a:xfrm>
+          <a:prstGeom prst="rect">
+            <a:avLst/>
+          </a:prstGeom>
+          <a:noFill/>
+        </p:spPr>
+        <p:txBody>
+          <a:bodyPr wrap="square" lIns="0" tIns="0" rIns="0" bIns="0">
+            <a:spAutoFit/>
+          </a:bodyPr>
+          <a:lstStyle/>
+          <a:p>
+            <a:pPr algn="l">
+              <a:lnSpc>
+                <a:spcPct val="100000"/>
+              </a:lnSpc>
+              <a:spcAft>
                 <a:spcPts val="600"/>
               </a:spcAft>
-              <a:defRPr sz="1350" b="0">
-                <a:solidFill>
-                  <a:srgbClr val="222222"/>
-                </a:solidFill>
-                <a:latin typeface="Calibri"/>
-              </a:defRPr>
-            </a:pPr>
-          </a:p>
-          <a:p>
-            <a:pPr lvl="1" algn="l">
-              <a:lnSpc>
-                <a:spcPct val="100000"/>
-              </a:lnSpc>
-              <a:spcAft>
-                <a:spcPts val="600"/>
-              </a:spcAft>
-              <a:defRPr sz="2700" b="0">
-                <a:solidFill>
-                  <a:srgbClr val="222222"/>
-                </a:solidFill>
-                <a:latin typeface="Calibri"/>
-              </a:defRPr>
-            </a:pPr>
-            <a:r>
-              <a:rPr sz="2700" b="0">
-                <a:solidFill>
-                  <a:srgbClr val="222222"/>
-                </a:solidFill>
-                <a:latin typeface="Calibri"/>
-              </a:rPr>
-              <a:t>Functions and globals are shared across tabs with NO header needed. Lighting.ino can call strip and read NUM_LEDS with no include.</a:t>
+              <a:defRPr sz="1400" b="0">
+                <a:solidFill>
+                  <a:srgbClr val="222222"/>
+                </a:solidFill>
+                <a:latin typeface="Calibri"/>
+              </a:defRPr>
+            </a:pPr>
+            <a:r>
+              <a:rPr sz="1400" b="0">
+                <a:solidFill>
+                  <a:srgbClr val="222222"/>
+                </a:solidFill>
+                <a:latin typeface="Calibri"/>
+              </a:rPr>
+              <a:t>One subsystem per file. The rule that makes it work: each tab owns its own state, and other tabs go through its functions.</a:t>
+            </a:r>
+          </a:p>
+        </p:txBody>
+      </p:sp>
+      <p:graphicFrame>
+        <p:nvGraphicFramePr>
+          <p:cNvPr id="7" name="Table 6"/>
+          <p:cNvGraphicFramePr>
+            <a:graphicFrameLocks noGrp="1"/>
+          </p:cNvGraphicFramePr>
+          <p:nvPr/>
+        </p:nvGraphicFramePr>
+        <p:xfrm>
+          <a:off x="502920" y="1691640"/>
+          <a:ext cx="11185854" cy="3328987"/>
+        </p:xfrm>
+        <a:graphic>
+          <a:graphicData uri="http://schemas.openxmlformats.org/drawingml/2006/table">
+            <a:tbl>
+              <a:tblPr firstRow="1" bandRow="1">
+                <a:tableStyleId>{5C22544A-7EE6-4342-B048-85BDC9FD1C3A}</a:tableStyleId>
+              </a:tblPr>
+              <a:tblGrid>
+                <a:gridCol w="3457446"/>
+                <a:gridCol w="7728408"/>
+              </a:tblGrid>
+              <a:tr h="369887">
+                <a:tc>
+                  <a:txBody>
+                    <a:bodyPr/>
+                    <a:lstStyle/>
+                    <a:p>
+                      <a:r>
+                        <a:rPr sz="1850" b="1">
+                          <a:solidFill>
+                            <a:srgbClr val="FFFFFF"/>
+                          </a:solidFill>
+                          <a:latin typeface="Calibri"/>
+                        </a:rPr>
+                        <a:t>File</a:t>
+                      </a:r>
+                    </a:p>
+                  </a:txBody>
+                  <a:tcPr marL="73152" marT="18288" marB="18288">
+                    <a:solidFill>
+                      <a:srgbClr val="1F3A5F"/>
+                    </a:solidFill>
+                  </a:tcPr>
+                </a:tc>
+                <a:tc>
+                  <a:txBody>
+                    <a:bodyPr/>
+                    <a:lstStyle/>
+                    <a:p>
+                      <a:r>
+                        <a:rPr sz="1850" b="1">
+                          <a:solidFill>
+                            <a:srgbClr val="FFFFFF"/>
+                          </a:solidFill>
+                          <a:latin typeface="Calibri"/>
+                        </a:rPr>
+                        <a:t>Owns</a:t>
+                      </a:r>
+                    </a:p>
+                  </a:txBody>
+                  <a:tcPr marL="73152" marT="18288" marB="18288">
+                    <a:solidFill>
+                      <a:srgbClr val="1F3A5F"/>
+                    </a:solidFill>
+                  </a:tcPr>
+                </a:tc>
+              </a:tr>
+              <a:tr h="369887">
+                <a:tc>
+                  <a:txBody>
+                    <a:bodyPr/>
+                    <a:lstStyle/>
+                    <a:p>
+                      <a:r>
+                        <a:rPr sz="1850">
+                          <a:solidFill>
+                            <a:srgbClr val="222222"/>
+                          </a:solidFill>
+                          <a:latin typeface="Consolas"/>
+                        </a:rPr>
+                        <a:t>Pathfinder_Op_Program12.ino</a:t>
+                      </a:r>
+                    </a:p>
+                  </a:txBody>
+                  <a:tcPr marL="73152" marT="18288" marB="18288">
+                    <a:solidFill>
+                      <a:srgbClr val="FFFFFF"/>
+                    </a:solidFill>
+                  </a:tcPr>
+                </a:tc>
+                <a:tc>
+                  <a:txBody>
+                    <a:bodyPr/>
+                    <a:lstStyle/>
+                    <a:p>
+                      <a:r>
+                        <a:rPr sz="1850">
+                          <a:solidFill>
+                            <a:srgbClr val="222222"/>
+                          </a:solidFill>
+                          <a:latin typeface="Calibri"/>
+                        </a:rPr>
+                        <a:t>setup(), loop(), the hardware objects, the shared state</a:t>
+                      </a:r>
+                    </a:p>
+                  </a:txBody>
+                  <a:tcPr marL="73152" marT="18288" marB="18288">
+                    <a:solidFill>
+                      <a:srgbClr val="FFFFFF"/>
+                    </a:solidFill>
+                  </a:tcPr>
+                </a:tc>
+              </a:tr>
+              <a:tr h="369887">
+                <a:tc>
+                  <a:txBody>
+                    <a:bodyPr/>
+                    <a:lstStyle/>
+                    <a:p>
+                      <a:r>
+                        <a:rPr sz="1850">
+                          <a:solidFill>
+                            <a:srgbClr val="222222"/>
+                          </a:solidFill>
+                          <a:latin typeface="Calibri"/>
+                        </a:rPr>
+                        <a:t>Config.h</a:t>
+                      </a:r>
+                    </a:p>
+                  </a:txBody>
+                  <a:tcPr marL="73152" marT="18288" marB="18288">
+                    <a:solidFill>
+                      <a:srgbClr val="EEF3F8"/>
+                    </a:solidFill>
+                  </a:tcPr>
+                </a:tc>
+                <a:tc>
+                  <a:txBody>
+                    <a:bodyPr/>
+                    <a:lstStyle/>
+                    <a:p>
+                      <a:r>
+                        <a:rPr sz="1850">
+                          <a:solidFill>
+                            <a:srgbClr val="222222"/>
+                          </a:solidFill>
+                          <a:latin typeface="Calibri"/>
+                        </a:rPr>
+                        <a:t>Every tunable number and every custom type</a:t>
+                      </a:r>
+                    </a:p>
+                  </a:txBody>
+                  <a:tcPr marL="73152" marT="18288" marB="18288">
+                    <a:solidFill>
+                      <a:srgbClr val="EEF3F8"/>
+                    </a:solidFill>
+                  </a:tcPr>
+                </a:tc>
+              </a:tr>
+              <a:tr h="369887">
+                <a:tc>
+                  <a:txBody>
+                    <a:bodyPr/>
+                    <a:lstStyle/>
+                    <a:p>
+                      <a:r>
+                        <a:rPr sz="1850">
+                          <a:solidFill>
+                            <a:srgbClr val="222222"/>
+                          </a:solidFill>
+                          <a:latin typeface="Calibri"/>
+                        </a:rPr>
+                        <a:t>Motors.ino</a:t>
+                      </a:r>
+                    </a:p>
+                  </a:txBody>
+                  <a:tcPr marL="73152" marT="18288" marB="18288">
+                    <a:solidFill>
+                      <a:srgbClr val="FFFFFF"/>
+                    </a:solidFill>
+                  </a:tcPr>
+                </a:tc>
+                <a:tc>
+                  <a:txBody>
+                    <a:bodyPr/>
+                    <a:lstStyle/>
+                    <a:p>
+                      <a:r>
+                        <a:rPr sz="1850">
+                          <a:solidFill>
+                            <a:srgbClr val="222222"/>
+                          </a:solidFill>
+                          <a:latin typeface="Calibri"/>
+                        </a:rPr>
+                        <a:t>PWM setup, drive modes, ramping, servos, throttle modes</a:t>
+                      </a:r>
+                    </a:p>
+                  </a:txBody>
+                  <a:tcPr marL="73152" marT="18288" marB="18288">
+                    <a:solidFill>
+                      <a:srgbClr val="FFFFFF"/>
+                    </a:solidFill>
+                  </a:tcPr>
+                </a:tc>
+              </a:tr>
+              <a:tr h="369887">
+                <a:tc>
+                  <a:txBody>
+                    <a:bodyPr/>
+                    <a:lstStyle/>
+                    <a:p>
+                      <a:r>
+                        <a:rPr sz="1850">
+                          <a:solidFill>
+                            <a:srgbClr val="222222"/>
+                          </a:solidFill>
+                          <a:latin typeface="Calibri"/>
+                        </a:rPr>
+                        <a:t>Lighting.ino</a:t>
+                      </a:r>
+                    </a:p>
+                  </a:txBody>
+                  <a:tcPr marL="73152" marT="18288" marB="18288">
+                    <a:solidFill>
+                      <a:srgbClr val="EEF3F8"/>
+                    </a:solidFill>
+                  </a:tcPr>
+                </a:tc>
+                <a:tc>
+                  <a:txBody>
+                    <a:bodyPr/>
+                    <a:lstStyle/>
+                    <a:p>
+                      <a:r>
+                        <a:rPr sz="1850">
+                          <a:solidFill>
+                            <a:srgbClr val="222222"/>
+                          </a:solidFill>
+                          <a:latin typeface="Calibri"/>
+                        </a:rPr>
+                        <a:t>Color helpers, every animation, the lighting state machine</a:t>
+                      </a:r>
+                    </a:p>
+                  </a:txBody>
+                  <a:tcPr marL="73152" marT="18288" marB="18288">
+                    <a:solidFill>
+                      <a:srgbClr val="EEF3F8"/>
+                    </a:solidFill>
+                  </a:tcPr>
+                </a:tc>
+              </a:tr>
+              <a:tr h="369887">
+                <a:tc>
+                  <a:txBody>
+                    <a:bodyPr/>
+                    <a:lstStyle/>
+                    <a:p>
+                      <a:r>
+                        <a:rPr sz="1850">
+                          <a:solidFill>
+                            <a:srgbClr val="222222"/>
+                          </a:solidFill>
+                          <a:latin typeface="Calibri"/>
+                        </a:rPr>
+                        <a:t>Bluetooth.ino</a:t>
+                      </a:r>
+                    </a:p>
+                  </a:txBody>
+                  <a:tcPr marL="73152" marT="18288" marB="18288">
+                    <a:solidFill>
+                      <a:srgbClr val="FFFFFF"/>
+                    </a:solidFill>
+                  </a:tcPr>
+                </a:tc>
+                <a:tc>
+                  <a:txBody>
+                    <a:bodyPr/>
+                    <a:lstStyle/>
+                    <a:p>
+                      <a:r>
+                        <a:rPr sz="1850">
+                          <a:solidFill>
+                            <a:srgbClr val="222222"/>
+                          </a:solidFill>
+                          <a:latin typeface="Calibri"/>
+                        </a:rPr>
+                        <a:t>Connection callbacks, the allowlist, the pairing workflow</a:t>
+                      </a:r>
+                    </a:p>
+                  </a:txBody>
+                  <a:tcPr marL="73152" marT="18288" marB="18288">
+                    <a:solidFill>
+                      <a:srgbClr val="FFFFFF"/>
+                    </a:solidFill>
+                  </a:tcPr>
+                </a:tc>
+              </a:tr>
+              <a:tr h="369887">
+                <a:tc>
+                  <a:txBody>
+                    <a:bodyPr/>
+                    <a:lstStyle/>
+                    <a:p>
+                      <a:r>
+                        <a:rPr sz="1850">
+                          <a:solidFill>
+                            <a:srgbClr val="222222"/>
+                          </a:solidFill>
+                          <a:latin typeface="Calibri"/>
+                        </a:rPr>
+                        <a:t>Console.ino</a:t>
+                      </a:r>
+                    </a:p>
+                  </a:txBody>
+                  <a:tcPr marL="73152" marT="18288" marB="18288">
+                    <a:solidFill>
+                      <a:srgbClr val="EEF3F8"/>
+                    </a:solidFill>
+                  </a:tcPr>
+                </a:tc>
+                <a:tc>
+                  <a:txBody>
+                    <a:bodyPr/>
+                    <a:lstStyle/>
+                    <a:p>
+                      <a:r>
+                        <a:rPr sz="1850">
+                          <a:solidFill>
+                            <a:srgbClr val="222222"/>
+                          </a:solidFill>
+                          <a:latin typeface="Calibri"/>
+                        </a:rPr>
+                        <a:t>The serial command interface, EEPROM settings, diagnostics</a:t>
+                      </a:r>
+                    </a:p>
+                  </a:txBody>
+                  <a:tcPr marL="73152" marT="18288" marB="18288">
+                    <a:solidFill>
+                      <a:srgbClr val="EEF3F8"/>
+                    </a:solidFill>
+                  </a:tcPr>
+                </a:tc>
+              </a:tr>
+              <a:tr h="369887">
+                <a:tc>
+                  <a:txBody>
+                    <a:bodyPr/>
+                    <a:lstStyle/>
+                    <a:p>
+                      <a:r>
+                        <a:rPr sz="1850">
+                          <a:solidFill>
+                            <a:srgbClr val="222222"/>
+                          </a:solidFill>
+                          <a:latin typeface="Calibri"/>
+                        </a:rPr>
+                        <a:t>Sensors.ino</a:t>
+                      </a:r>
+                    </a:p>
+                  </a:txBody>
+                  <a:tcPr marL="73152" marT="18288" marB="18288">
+                    <a:solidFill>
+                      <a:srgbClr val="FFFFFF"/>
+                    </a:solidFill>
+                  </a:tcPr>
+                </a:tc>
+                <a:tc>
+                  <a:txBody>
+                    <a:bodyPr/>
+                    <a:lstStyle/>
+                    <a:p>
+                      <a:r>
+                        <a:rPr sz="1850">
+                          <a:solidFill>
+                            <a:srgbClr val="222222"/>
+                          </a:solidFill>
+                          <a:latin typeface="Calibri"/>
+                        </a:rPr>
+                        <a:t>The INA219 driver</a:t>
+                      </a:r>
+                    </a:p>
+                  </a:txBody>
+                  <a:tcPr marL="73152" marT="18288" marB="18288">
+                    <a:solidFill>
+                      <a:srgbClr val="FFFFFF"/>
+                    </a:solidFill>
+                  </a:tcPr>
+                </a:tc>
+              </a:tr>
+              <a:tr h="369891">
+                <a:tc>
+                  <a:txBody>
+                    <a:bodyPr/>
+                    <a:lstStyle/>
+                    <a:p>
+                      <a:r>
+                        <a:rPr sz="1850">
+                          <a:solidFill>
+                            <a:srgbClr val="222222"/>
+                          </a:solidFill>
+                          <a:latin typeface="Calibri"/>
+                        </a:rPr>
+                        <a:t>SelfTest.ino</a:t>
+                      </a:r>
+                    </a:p>
+                  </a:txBody>
+                  <a:tcPr marL="73152" marT="18288" marB="18288">
+                    <a:solidFill>
+                      <a:srgbClr val="EEF3F8"/>
+                    </a:solidFill>
+                  </a:tcPr>
+                </a:tc>
+                <a:tc>
+                  <a:txBody>
+                    <a:bodyPr/>
+                    <a:lstStyle/>
+                    <a:p>
+                      <a:r>
+                        <a:rPr sz="1850">
+                          <a:solidFill>
+                            <a:srgbClr val="222222"/>
+                          </a:solidFill>
+                          <a:latin typeface="Calibri"/>
+                        </a:rPr>
+                        <a:t>The powered motor check</a:t>
+                      </a:r>
+                    </a:p>
+                  </a:txBody>
+                  <a:tcPr marL="73152" marT="18288" marB="18288">
+                    <a:solidFill>
+                      <a:srgbClr val="EEF3F8"/>
+                    </a:solidFill>
+                  </a:tcPr>
+                </a:tc>
+              </a:tr>
+            </a:tbl>
+          </a:graphicData>
+        </a:graphic>
+      </p:graphicFrame>
+      <p:sp>
+        <p:nvSpPr>
+          <p:cNvPr id="8" name="Rounded Rectangle 7"/>
+          <p:cNvSpPr/>
+          <p:nvPr/>
+        </p:nvSpPr>
+        <p:spPr>
+          <a:xfrm>
+            <a:off x="502920" y="5303520"/>
+            <a:ext cx="11185855" cy="960120"/>
+          </a:xfrm>
+          <a:prstGeom prst="roundRect">
+            <a:avLst>
+              <a:gd name="adj" fmla="val 4000"/>
+            </a:avLst>
+          </a:prstGeom>
+          <a:solidFill>
+            <a:srgbClr val="EEF3F8"/>
+          </a:solidFill>
+          <a:ln w="12700">
+            <a:solidFill>
+              <a:srgbClr val="0E7C86"/>
+            </a:solidFill>
+          </a:ln>
+          <a:effectLst/>
+        </p:spPr>
+        <p:style>
+          <a:lnRef idx="1">
+            <a:schemeClr val="accent1"/>
+          </a:lnRef>
+          <a:fillRef idx="3">
+            <a:schemeClr val="accent1"/>
+          </a:fillRef>
+          <a:effectRef idx="2">
+            <a:schemeClr val="accent1"/>
+          </a:effectRef>
+          <a:fontRef idx="minor">
+            <a:schemeClr val="lt1"/>
+          </a:fontRef>
+        </p:style>
+        <p:txBody>
+          <a:bodyPr rtlCol="0" anchor="ctr" wrap="square" lIns="164592" rIns="164592" tIns="73152" bIns="73152"/>
+          <a:lstStyle/>
+          <a:p>
+            <a:pPr algn="l"/>
+            <a:r>
+              <a:rPr sz="1300" b="1">
+                <a:solidFill>
+                  <a:srgbClr val="0E7C86"/>
+                </a:solidFill>
+                <a:latin typeface="Calibri"/>
+              </a:rPr>
+              <a:t>KEY POINT   </a:t>
+            </a:r>
+            <a:r>
+              <a:rPr sz="1500">
+                <a:solidFill>
+                  <a:srgbClr val="222222"/>
+                </a:solidFill>
+                <a:latin typeface="Calibri"/>
+              </a:rPr>
+              <a:t>Nothing in the compiler enforces that. Every tab can see every global. It is a convention, and it is the only thing standing between you and 1292 lines again.</a:t>
             </a:r>
           </a:p>
         </p:txBody>

--- a/ground-vehicle/docs/courses/advanced/l1_architecture_and_toolchain.pptx
+++ b/ground-vehicle/docs/courses/advanced/l1_architecture_and_toolchain.pptx
@@ -5959,22 +5959,24 @@
       <p:grpSpPr/>
       <p:sp>
         <p:nvSpPr>
-          <p:cNvPr id="2" name="Title 1"/>
-          <p:cNvSpPr>
-            <a:spLocks noGrp="1"/>
-          </p:cNvSpPr>
-          <p:nvPr>
-            <p:ph type="title"/>
-          </p:nvPr>
+          <p:cNvPr id="2" name="TextBox 1"/>
+          <p:cNvSpPr txBox="1"/>
+          <p:nvPr/>
         </p:nvSpPr>
         <p:spPr>
           <a:xfrm>
-            <a:off x="502920" y="274320"/>
-            <a:ext cx="11185855" cy="777240"/>
+            <a:off x="502920" y="6382512"/>
+            <a:ext cx="10545775" cy="274320"/>
           </a:xfrm>
+          <a:prstGeom prst="rect">
+            <a:avLst/>
+          </a:prstGeom>
+          <a:noFill/>
         </p:spPr>
         <p:txBody>
-          <a:bodyPr wrap="square" anchor="b"/>
+          <a:bodyPr wrap="square" lIns="0" tIns="0">
+            <a:spAutoFit/>
+          </a:bodyPr>
           <a:lstStyle/>
           <a:p>
             <a:pPr algn="l">
@@ -5984,41 +5986,89 @@
               <a:spcAft>
                 <a:spcPts val="0"/>
               </a:spcAft>
-              <a:defRPr sz="2800" b="1">
-                <a:solidFill>
-                  <a:srgbClr val="1F3A5F"/>
-                </a:solidFill>
-                <a:latin typeface="Calibri"/>
-              </a:defRPr>
-            </a:pPr>
-            <a:r>
-              <a:rPr sz="2800" b="1">
-                <a:solidFill>
-                  <a:srgbClr val="1F3A5F"/>
-                </a:solidFill>
-                <a:latin typeface="Calibri"/>
-              </a:rPr>
-              <a:t>Where we are</a:t>
-            </a:r>
-          </a:p>
-        </p:txBody>
-      </p:sp>
-      <p:sp>
-        <p:nvSpPr>
-          <p:cNvPr id="3" name="Rectangle 2"/>
+              <a:defRPr sz="1000" b="0">
+                <a:solidFill>
+                  <a:srgbClr val="666666"/>
+                </a:solidFill>
+                <a:latin typeface="Calibri"/>
+              </a:defRPr>
+            </a:pPr>
+            <a:r>
+              <a:rPr sz="1000" b="0">
+                <a:solidFill>
+                  <a:srgbClr val="666666"/>
+                </a:solidFill>
+                <a:latin typeface="Calibri"/>
+              </a:rPr>
+              <a:t>Pathfinder Advanced - Op Program 12  |  Lesson 1</a:t>
+            </a:r>
+          </a:p>
+        </p:txBody>
+      </p:sp>
+      <p:sp>
+        <p:nvSpPr>
+          <p:cNvPr id="3" name="TextBox 2"/>
+          <p:cNvSpPr txBox="1"/>
+          <p:nvPr/>
+        </p:nvSpPr>
+        <p:spPr>
+          <a:xfrm>
+            <a:off x="11231575" y="6382512"/>
+            <a:ext cx="457200" cy="274320"/>
+          </a:xfrm>
+          <a:prstGeom prst="rect">
+            <a:avLst/>
+          </a:prstGeom>
+          <a:noFill/>
+        </p:spPr>
+        <p:txBody>
+          <a:bodyPr wrap="square" lIns="0" tIns="0">
+            <a:spAutoFit/>
+          </a:bodyPr>
+          <a:lstStyle/>
+          <a:p>
+            <a:pPr algn="r">
+              <a:lnSpc>
+                <a:spcPct val="100000"/>
+              </a:lnSpc>
+              <a:spcAft>
+                <a:spcPts val="0"/>
+              </a:spcAft>
+              <a:defRPr sz="1000" b="0">
+                <a:solidFill>
+                  <a:srgbClr val="666666"/>
+                </a:solidFill>
+                <a:latin typeface="Calibri"/>
+              </a:defRPr>
+            </a:pPr>
+            <a:r>
+              <a:rPr sz="1000" b="0">
+                <a:solidFill>
+                  <a:srgbClr val="666666"/>
+                </a:solidFill>
+                <a:latin typeface="Calibri"/>
+              </a:rPr>
+              <a:t>9</a:t>
+            </a:r>
+          </a:p>
+        </p:txBody>
+      </p:sp>
+      <p:sp>
+        <p:nvSpPr>
+          <p:cNvPr id="4" name="Rectangle 3"/>
           <p:cNvSpPr/>
           <p:nvPr/>
         </p:nvSpPr>
         <p:spPr>
           <a:xfrm>
-            <a:off x="502920" y="1097280"/>
-            <a:ext cx="11185855" cy="19050"/>
+            <a:off x="0" y="1234440"/>
+            <a:ext cx="256032" cy="1554480"/>
           </a:xfrm>
           <a:prstGeom prst="rect">
             <a:avLst/>
           </a:prstGeom>
           <a:solidFill>
-            <a:srgbClr val="C8D2DE"/>
+            <a:srgbClr val="0E7C86"/>
           </a:solidFill>
           <a:ln>
             <a:noFill/>
@@ -6049,14 +6099,14 @@
       </p:sp>
       <p:sp>
         <p:nvSpPr>
-          <p:cNvPr id="4" name="TextBox 3"/>
+          <p:cNvPr id="5" name="TextBox 4"/>
           <p:cNvSpPr txBox="1"/>
           <p:nvPr/>
         </p:nvSpPr>
         <p:spPr>
           <a:xfrm>
-            <a:off x="502920" y="6382512"/>
-            <a:ext cx="10545775" cy="274320"/>
+            <a:off x="777240" y="1325880"/>
+            <a:ext cx="10515600" cy="1051560"/>
           </a:xfrm>
           <a:prstGeom prst="rect">
             <a:avLst/>
@@ -6064,7 +6114,7 @@
           <a:noFill/>
         </p:spPr>
         <p:txBody>
-          <a:bodyPr wrap="square" lIns="0" tIns="0">
+          <a:bodyPr wrap="square" lIns="0" tIns="0" rIns="0" bIns="0">
             <a:spAutoFit/>
           </a:bodyPr>
           <a:lstStyle/>
@@ -6076,35 +6126,35 @@
               <a:spcAft>
                 <a:spcPts val="0"/>
               </a:spcAft>
-              <a:defRPr sz="1000" b="0">
-                <a:solidFill>
-                  <a:srgbClr val="666666"/>
-                </a:solidFill>
-                <a:latin typeface="Calibri"/>
-              </a:defRPr>
-            </a:pPr>
-            <a:r>
-              <a:rPr sz="1000" b="0">
-                <a:solidFill>
-                  <a:srgbClr val="666666"/>
-                </a:solidFill>
-                <a:latin typeface="Calibri"/>
-              </a:rPr>
-              <a:t>Pathfinder Advanced - Op Program 12  |  Lesson 1</a:t>
-            </a:r>
-          </a:p>
-        </p:txBody>
-      </p:sp>
-      <p:sp>
-        <p:nvSpPr>
-          <p:cNvPr id="5" name="TextBox 4"/>
+              <a:defRPr sz="3600" b="1">
+                <a:solidFill>
+                  <a:srgbClr val="1F3A5F"/>
+                </a:solidFill>
+                <a:latin typeface="Calibri"/>
+              </a:defRPr>
+            </a:pPr>
+            <a:r>
+              <a:rPr sz="3600" b="1">
+                <a:solidFill>
+                  <a:srgbClr val="1F3A5F"/>
+                </a:solidFill>
+                <a:latin typeface="Calibri"/>
+              </a:rPr>
+              <a:t>Tabs and Config.h</a:t>
+            </a:r>
+          </a:p>
+        </p:txBody>
+      </p:sp>
+      <p:sp>
+        <p:nvSpPr>
+          <p:cNvPr id="6" name="TextBox 5"/>
           <p:cNvSpPr txBox="1"/>
           <p:nvPr/>
         </p:nvSpPr>
         <p:spPr>
           <a:xfrm>
-            <a:off x="11231575" y="6382512"/>
-            <a:ext cx="457200" cy="274320"/>
+            <a:off x="777240" y="2423160"/>
+            <a:ext cx="10515600" cy="685800"/>
           </a:xfrm>
           <a:prstGeom prst="rect">
             <a:avLst/>
@@ -6112,19 +6162,19 @@
           <a:noFill/>
         </p:spPr>
         <p:txBody>
-          <a:bodyPr wrap="square" lIns="0" tIns="0">
+          <a:bodyPr wrap="square" lIns="0" tIns="0" rIns="0" bIns="0">
             <a:spAutoFit/>
           </a:bodyPr>
           <a:lstStyle/>
           <a:p>
-            <a:pPr algn="r">
-              <a:lnSpc>
-                <a:spcPct val="100000"/>
-              </a:lnSpc>
-              <a:spcAft>
-                <a:spcPts val="0"/>
-              </a:spcAft>
-              <a:defRPr sz="1000" b="0">
+            <a:pPr algn="l">
+              <a:lnSpc>
+                <a:spcPct val="100000"/>
+              </a:lnSpc>
+              <a:spcAft>
+                <a:spcPts val="400"/>
+              </a:spcAft>
+              <a:defRPr sz="1600" b="0">
                 <a:solidFill>
                   <a:srgbClr val="666666"/>
                 </a:solidFill>
@@ -6132,27 +6182,27 @@
               </a:defRPr>
             </a:pPr>
             <a:r>
-              <a:rPr sz="1000" b="0">
+              <a:rPr sz="1600" b="0">
                 <a:solidFill>
                   <a:srgbClr val="666666"/>
                 </a:solidFill>
                 <a:latin typeface="Calibri"/>
               </a:rPr>
-              <a:t>9</a:t>
-            </a:r>
-          </a:p>
-        </p:txBody>
-      </p:sp>
-      <p:sp>
-        <p:nvSpPr>
-          <p:cNvPr id="6" name="Rounded Rectangle 5"/>
+              <a:t>About 30 minutes</a:t>
+            </a:r>
+          </a:p>
+        </p:txBody>
+      </p:sp>
+      <p:sp>
+        <p:nvSpPr>
+          <p:cNvPr id="7" name="Rounded Rectangle 6"/>
           <p:cNvSpPr/>
           <p:nvPr/>
         </p:nvSpPr>
         <p:spPr>
           <a:xfrm>
-            <a:off x="502920" y="2240280"/>
-            <a:ext cx="3631082" cy="1737360"/>
+            <a:off x="502920" y="3886200"/>
+            <a:ext cx="3631082" cy="1325880"/>
           </a:xfrm>
           <a:prstGeom prst="roundRect">
             <a:avLst>
@@ -6215,14 +6265,14 @@
       </p:sp>
       <p:sp>
         <p:nvSpPr>
-          <p:cNvPr id="7" name="TextBox 6"/>
+          <p:cNvPr id="8" name="TextBox 7"/>
           <p:cNvSpPr txBox="1"/>
           <p:nvPr/>
         </p:nvSpPr>
         <p:spPr>
           <a:xfrm>
-            <a:off x="502920" y="1856232"/>
-            <a:ext cx="3631082" cy="347472"/>
+            <a:off x="502920" y="3520440"/>
+            <a:ext cx="3631082" cy="310896"/>
           </a:xfrm>
           <a:prstGeom prst="rect">
             <a:avLst/>
@@ -6240,9 +6290,9 @@
                 <a:spcPct val="100000"/>
               </a:lnSpc>
               <a:spcAft>
-                <a:spcPts val="600"/>
-              </a:spcAft>
-              <a:defRPr sz="1200" b="1">
+                <a:spcPts val="200"/>
+              </a:spcAft>
+              <a:defRPr sz="1100" b="1">
                 <a:solidFill>
                   <a:srgbClr val="0E7C86"/>
                 </a:solidFill>
@@ -6250,7 +6300,7 @@
               </a:defRPr>
             </a:pPr>
             <a:r>
-              <a:rPr sz="1200" b="1">
+              <a:rPr sz="1100" b="1">
                 <a:solidFill>
                   <a:srgbClr val="0E7C86"/>
                 </a:solidFill>
@@ -6263,14 +6313,14 @@
       </p:sp>
       <p:sp>
         <p:nvSpPr>
-          <p:cNvPr id="8" name="Rounded Rectangle 7"/>
+          <p:cNvPr id="9" name="Rounded Rectangle 8"/>
           <p:cNvSpPr/>
           <p:nvPr/>
         </p:nvSpPr>
         <p:spPr>
           <a:xfrm>
-            <a:off x="4280306" y="2240280"/>
-            <a:ext cx="3631082" cy="1737360"/>
+            <a:off x="4280306" y="3886200"/>
+            <a:ext cx="3631082" cy="1325880"/>
           </a:xfrm>
           <a:prstGeom prst="roundRect">
             <a:avLst>
@@ -6333,14 +6383,14 @@
       </p:sp>
       <p:sp>
         <p:nvSpPr>
-          <p:cNvPr id="9" name="TextBox 8"/>
+          <p:cNvPr id="10" name="TextBox 9"/>
           <p:cNvSpPr txBox="1"/>
           <p:nvPr/>
         </p:nvSpPr>
         <p:spPr>
           <a:xfrm>
-            <a:off x="4280306" y="1856232"/>
-            <a:ext cx="3631082" cy="347472"/>
+            <a:off x="4280306" y="3520440"/>
+            <a:ext cx="3631082" cy="310896"/>
           </a:xfrm>
           <a:prstGeom prst="rect">
             <a:avLst/>
@@ -6358,9 +6408,9 @@
                 <a:spcPct val="100000"/>
               </a:lnSpc>
               <a:spcAft>
-                <a:spcPts val="600"/>
-              </a:spcAft>
-              <a:defRPr sz="1200" b="1">
+                <a:spcPts val="200"/>
+              </a:spcAft>
+              <a:defRPr sz="1100" b="1">
                 <a:solidFill>
                   <a:srgbClr val="0E7C86"/>
                 </a:solidFill>
@@ -6368,7 +6418,7 @@
               </a:defRPr>
             </a:pPr>
             <a:r>
-              <a:rPr sz="1200" b="1">
+              <a:rPr sz="1100" b="1">
                 <a:solidFill>
                   <a:srgbClr val="0E7C86"/>
                 </a:solidFill>
@@ -6381,14 +6431,14 @@
       </p:sp>
       <p:sp>
         <p:nvSpPr>
-          <p:cNvPr id="10" name="Rounded Rectangle 9"/>
+          <p:cNvPr id="11" name="Rounded Rectangle 10"/>
           <p:cNvSpPr/>
           <p:nvPr/>
         </p:nvSpPr>
         <p:spPr>
           <a:xfrm>
-            <a:off x="8057692" y="2240280"/>
-            <a:ext cx="3631082" cy="1737360"/>
+            <a:off x="8057692" y="3886200"/>
+            <a:ext cx="3631082" cy="1325880"/>
           </a:xfrm>
           <a:prstGeom prst="roundRect">
             <a:avLst>
@@ -8453,22 +8503,24 @@
       <p:grpSpPr/>
       <p:sp>
         <p:nvSpPr>
-          <p:cNvPr id="2" name="Title 1"/>
-          <p:cNvSpPr>
-            <a:spLocks noGrp="1"/>
-          </p:cNvSpPr>
-          <p:nvPr>
-            <p:ph type="title"/>
-          </p:nvPr>
+          <p:cNvPr id="2" name="TextBox 1"/>
+          <p:cNvSpPr txBox="1"/>
+          <p:nvPr/>
         </p:nvSpPr>
         <p:spPr>
           <a:xfrm>
-            <a:off x="502920" y="274320"/>
-            <a:ext cx="11185855" cy="777240"/>
+            <a:off x="502920" y="6382512"/>
+            <a:ext cx="10545775" cy="274320"/>
           </a:xfrm>
+          <a:prstGeom prst="rect">
+            <a:avLst/>
+          </a:prstGeom>
+          <a:noFill/>
         </p:spPr>
         <p:txBody>
-          <a:bodyPr wrap="square" anchor="b"/>
+          <a:bodyPr wrap="square" lIns="0" tIns="0">
+            <a:spAutoFit/>
+          </a:bodyPr>
           <a:lstStyle/>
           <a:p>
             <a:pPr algn="l">
@@ -8478,41 +8530,89 @@
               <a:spcAft>
                 <a:spcPts val="0"/>
               </a:spcAft>
-              <a:defRPr sz="2800" b="1">
-                <a:solidFill>
-                  <a:srgbClr val="1F3A5F"/>
-                </a:solidFill>
-                <a:latin typeface="Calibri"/>
-              </a:defRPr>
-            </a:pPr>
-            <a:r>
-              <a:rPr sz="2800" b="1">
-                <a:solidFill>
-                  <a:srgbClr val="1F3A5F"/>
-                </a:solidFill>
-                <a:latin typeface="Calibri"/>
-              </a:rPr>
-              <a:t>Where we are</a:t>
-            </a:r>
-          </a:p>
-        </p:txBody>
-      </p:sp>
-      <p:sp>
-        <p:nvSpPr>
-          <p:cNvPr id="3" name="Rectangle 2"/>
+              <a:defRPr sz="1000" b="0">
+                <a:solidFill>
+                  <a:srgbClr val="666666"/>
+                </a:solidFill>
+                <a:latin typeface="Calibri"/>
+              </a:defRPr>
+            </a:pPr>
+            <a:r>
+              <a:rPr sz="1000" b="0">
+                <a:solidFill>
+                  <a:srgbClr val="666666"/>
+                </a:solidFill>
+                <a:latin typeface="Calibri"/>
+              </a:rPr>
+              <a:t>Pathfinder Advanced - Op Program 12  |  Lesson 1</a:t>
+            </a:r>
+          </a:p>
+        </p:txBody>
+      </p:sp>
+      <p:sp>
+        <p:nvSpPr>
+          <p:cNvPr id="3" name="TextBox 2"/>
+          <p:cNvSpPr txBox="1"/>
+          <p:nvPr/>
+        </p:nvSpPr>
+        <p:spPr>
+          <a:xfrm>
+            <a:off x="11231575" y="6382512"/>
+            <a:ext cx="457200" cy="274320"/>
+          </a:xfrm>
+          <a:prstGeom prst="rect">
+            <a:avLst/>
+          </a:prstGeom>
+          <a:noFill/>
+        </p:spPr>
+        <p:txBody>
+          <a:bodyPr wrap="square" lIns="0" tIns="0">
+            <a:spAutoFit/>
+          </a:bodyPr>
+          <a:lstStyle/>
+          <a:p>
+            <a:pPr algn="r">
+              <a:lnSpc>
+                <a:spcPct val="100000"/>
+              </a:lnSpc>
+              <a:spcAft>
+                <a:spcPts val="0"/>
+              </a:spcAft>
+              <a:defRPr sz="1000" b="0">
+                <a:solidFill>
+                  <a:srgbClr val="666666"/>
+                </a:solidFill>
+                <a:latin typeface="Calibri"/>
+              </a:defRPr>
+            </a:pPr>
+            <a:r>
+              <a:rPr sz="1000" b="0">
+                <a:solidFill>
+                  <a:srgbClr val="666666"/>
+                </a:solidFill>
+                <a:latin typeface="Calibri"/>
+              </a:rPr>
+              <a:t>13</a:t>
+            </a:r>
+          </a:p>
+        </p:txBody>
+      </p:sp>
+      <p:sp>
+        <p:nvSpPr>
+          <p:cNvPr id="4" name="Rectangle 3"/>
           <p:cNvSpPr/>
           <p:nvPr/>
         </p:nvSpPr>
         <p:spPr>
           <a:xfrm>
-            <a:off x="502920" y="1097280"/>
-            <a:ext cx="11185855" cy="19050"/>
+            <a:off x="0" y="1234440"/>
+            <a:ext cx="256032" cy="1554480"/>
           </a:xfrm>
           <a:prstGeom prst="rect">
             <a:avLst/>
           </a:prstGeom>
           <a:solidFill>
-            <a:srgbClr val="C8D2DE"/>
+            <a:srgbClr val="0E7C86"/>
           </a:solidFill>
           <a:ln>
             <a:noFill/>
@@ -8543,14 +8643,14 @@
       </p:sp>
       <p:sp>
         <p:nvSpPr>
-          <p:cNvPr id="4" name="TextBox 3"/>
+          <p:cNvPr id="5" name="TextBox 4"/>
           <p:cNvSpPr txBox="1"/>
           <p:nvPr/>
         </p:nvSpPr>
         <p:spPr>
           <a:xfrm>
-            <a:off x="502920" y="6382512"/>
-            <a:ext cx="10545775" cy="274320"/>
+            <a:off x="777240" y="1325880"/>
+            <a:ext cx="10515600" cy="1051560"/>
           </a:xfrm>
           <a:prstGeom prst="rect">
             <a:avLst/>
@@ -8558,7 +8658,7 @@
           <a:noFill/>
         </p:spPr>
         <p:txBody>
-          <a:bodyPr wrap="square" lIns="0" tIns="0">
+          <a:bodyPr wrap="square" lIns="0" tIns="0" rIns="0" bIns="0">
             <a:spAutoFit/>
           </a:bodyPr>
           <a:lstStyle/>
@@ -8570,35 +8670,35 @@
               <a:spcAft>
                 <a:spcPts val="0"/>
               </a:spcAft>
-              <a:defRPr sz="1000" b="0">
-                <a:solidFill>
-                  <a:srgbClr val="666666"/>
-                </a:solidFill>
-                <a:latin typeface="Calibri"/>
-              </a:defRPr>
-            </a:pPr>
-            <a:r>
-              <a:rPr sz="1000" b="0">
-                <a:solidFill>
-                  <a:srgbClr val="666666"/>
-                </a:solidFill>
-                <a:latin typeface="Calibri"/>
-              </a:rPr>
-              <a:t>Pathfinder Advanced - Op Program 12  |  Lesson 1</a:t>
-            </a:r>
-          </a:p>
-        </p:txBody>
-      </p:sp>
-      <p:sp>
-        <p:nvSpPr>
-          <p:cNvPr id="5" name="TextBox 4"/>
+              <a:defRPr sz="3600" b="1">
+                <a:solidFill>
+                  <a:srgbClr val="1F3A5F"/>
+                </a:solidFill>
+                <a:latin typeface="Calibri"/>
+              </a:defRPr>
+            </a:pPr>
+            <a:r>
+              <a:rPr sz="3600" b="1">
+                <a:solidFill>
+                  <a:srgbClr val="1F3A5F"/>
+                </a:solidFill>
+                <a:latin typeface="Calibri"/>
+              </a:rPr>
+              <a:t>The console</a:t>
+            </a:r>
+          </a:p>
+        </p:txBody>
+      </p:sp>
+      <p:sp>
+        <p:nvSpPr>
+          <p:cNvPr id="6" name="TextBox 5"/>
           <p:cNvSpPr txBox="1"/>
           <p:nvPr/>
         </p:nvSpPr>
         <p:spPr>
           <a:xfrm>
-            <a:off x="11231575" y="6382512"/>
-            <a:ext cx="457200" cy="274320"/>
+            <a:off x="777240" y="2423160"/>
+            <a:ext cx="10515600" cy="685800"/>
           </a:xfrm>
           <a:prstGeom prst="rect">
             <a:avLst/>
@@ -8606,19 +8706,19 @@
           <a:noFill/>
         </p:spPr>
         <p:txBody>
-          <a:bodyPr wrap="square" lIns="0" tIns="0">
+          <a:bodyPr wrap="square" lIns="0" tIns="0" rIns="0" bIns="0">
             <a:spAutoFit/>
           </a:bodyPr>
           <a:lstStyle/>
           <a:p>
-            <a:pPr algn="r">
-              <a:lnSpc>
-                <a:spcPct val="100000"/>
-              </a:lnSpc>
-              <a:spcAft>
-                <a:spcPts val="0"/>
-              </a:spcAft>
-              <a:defRPr sz="1000" b="0">
+            <a:pPr algn="l">
+              <a:lnSpc>
+                <a:spcPct val="100000"/>
+              </a:lnSpc>
+              <a:spcAft>
+                <a:spcPts val="400"/>
+              </a:spcAft>
+              <a:defRPr sz="1600" b="0">
                 <a:solidFill>
                   <a:srgbClr val="666666"/>
                 </a:solidFill>
@@ -8626,27 +8726,27 @@
               </a:defRPr>
             </a:pPr>
             <a:r>
-              <a:rPr sz="1000" b="0">
+              <a:rPr sz="1600" b="0">
                 <a:solidFill>
                   <a:srgbClr val="666666"/>
                 </a:solidFill>
                 <a:latin typeface="Calibri"/>
               </a:rPr>
-              <a:t>13</a:t>
-            </a:r>
-          </a:p>
-        </p:txBody>
-      </p:sp>
-      <p:sp>
-        <p:nvSpPr>
-          <p:cNvPr id="6" name="Rounded Rectangle 5"/>
+              <a:t>About 25 minutes</a:t>
+            </a:r>
+          </a:p>
+        </p:txBody>
+      </p:sp>
+      <p:sp>
+        <p:nvSpPr>
+          <p:cNvPr id="7" name="Rounded Rectangle 6"/>
           <p:cNvSpPr/>
           <p:nvPr/>
         </p:nvSpPr>
         <p:spPr>
           <a:xfrm>
-            <a:off x="502920" y="2240280"/>
-            <a:ext cx="3631082" cy="1737360"/>
+            <a:off x="502920" y="3886200"/>
+            <a:ext cx="3631082" cy="1325880"/>
           </a:xfrm>
           <a:prstGeom prst="roundRect">
             <a:avLst>
@@ -8709,14 +8809,14 @@
       </p:sp>
       <p:sp>
         <p:nvSpPr>
-          <p:cNvPr id="7" name="TextBox 6"/>
+          <p:cNvPr id="8" name="TextBox 7"/>
           <p:cNvSpPr txBox="1"/>
           <p:nvPr/>
         </p:nvSpPr>
         <p:spPr>
           <a:xfrm>
-            <a:off x="502920" y="1856232"/>
-            <a:ext cx="3631082" cy="347472"/>
+            <a:off x="502920" y="3520440"/>
+            <a:ext cx="3631082" cy="310896"/>
           </a:xfrm>
           <a:prstGeom prst="rect">
             <a:avLst/>
@@ -8734,9 +8834,9 @@
                 <a:spcPct val="100000"/>
               </a:lnSpc>
               <a:spcAft>
-                <a:spcPts val="600"/>
-              </a:spcAft>
-              <a:defRPr sz="1200" b="1">
+                <a:spcPts val="200"/>
+              </a:spcAft>
+              <a:defRPr sz="1100" b="1">
                 <a:solidFill>
                   <a:srgbClr val="0E7C86"/>
                 </a:solidFill>
@@ -8744,7 +8844,7 @@
               </a:defRPr>
             </a:pPr>
             <a:r>
-              <a:rPr sz="1200" b="1">
+              <a:rPr sz="1100" b="1">
                 <a:solidFill>
                   <a:srgbClr val="0E7C86"/>
                 </a:solidFill>
@@ -8757,14 +8857,14 @@
       </p:sp>
       <p:sp>
         <p:nvSpPr>
-          <p:cNvPr id="8" name="Rounded Rectangle 7"/>
+          <p:cNvPr id="9" name="Rounded Rectangle 8"/>
           <p:cNvSpPr/>
           <p:nvPr/>
         </p:nvSpPr>
         <p:spPr>
           <a:xfrm>
-            <a:off x="4280306" y="2240280"/>
-            <a:ext cx="3631082" cy="1737360"/>
+            <a:off x="4280306" y="3886200"/>
+            <a:ext cx="3631082" cy="1325880"/>
           </a:xfrm>
           <a:prstGeom prst="roundRect">
             <a:avLst>
@@ -8827,14 +8927,14 @@
       </p:sp>
       <p:sp>
         <p:nvSpPr>
-          <p:cNvPr id="9" name="TextBox 8"/>
+          <p:cNvPr id="10" name="TextBox 9"/>
           <p:cNvSpPr txBox="1"/>
           <p:nvPr/>
         </p:nvSpPr>
         <p:spPr>
           <a:xfrm>
-            <a:off x="4280306" y="1856232"/>
-            <a:ext cx="3631082" cy="347472"/>
+            <a:off x="4280306" y="3520440"/>
+            <a:ext cx="3631082" cy="310896"/>
           </a:xfrm>
           <a:prstGeom prst="rect">
             <a:avLst/>
@@ -8852,9 +8952,9 @@
                 <a:spcPct val="100000"/>
               </a:lnSpc>
               <a:spcAft>
-                <a:spcPts val="600"/>
-              </a:spcAft>
-              <a:defRPr sz="1200" b="1">
+                <a:spcPts val="200"/>
+              </a:spcAft>
+              <a:defRPr sz="1100" b="1">
                 <a:solidFill>
                   <a:srgbClr val="0E7C86"/>
                 </a:solidFill>
@@ -8862,7 +8962,7 @@
               </a:defRPr>
             </a:pPr>
             <a:r>
-              <a:rPr sz="1200" b="1">
+              <a:rPr sz="1100" b="1">
                 <a:solidFill>
                   <a:srgbClr val="0E7C86"/>
                 </a:solidFill>
@@ -8875,14 +8975,14 @@
       </p:sp>
       <p:sp>
         <p:nvSpPr>
-          <p:cNvPr id="10" name="Rounded Rectangle 9"/>
+          <p:cNvPr id="11" name="Rounded Rectangle 10"/>
           <p:cNvSpPr/>
           <p:nvPr/>
         </p:nvSpPr>
         <p:spPr>
           <a:xfrm>
-            <a:off x="8057692" y="2240280"/>
-            <a:ext cx="3631082" cy="1737360"/>
+            <a:off x="8057692" y="3886200"/>
+            <a:ext cx="3631082" cy="1325880"/>
           </a:xfrm>
           <a:prstGeom prst="roundRect">
             <a:avLst>
@@ -8945,14 +9045,14 @@
       </p:sp>
       <p:sp>
         <p:nvSpPr>
-          <p:cNvPr id="11" name="TextBox 10"/>
+          <p:cNvPr id="12" name="TextBox 11"/>
           <p:cNvSpPr txBox="1"/>
           <p:nvPr/>
         </p:nvSpPr>
         <p:spPr>
           <a:xfrm>
-            <a:off x="8057692" y="1856232"/>
-            <a:ext cx="3631082" cy="347472"/>
+            <a:off x="8057692" y="3520440"/>
+            <a:ext cx="3631082" cy="310896"/>
           </a:xfrm>
           <a:prstGeom prst="rect">
             <a:avLst/>
@@ -8970,9 +9070,9 @@
                 <a:spcPct val="100000"/>
               </a:lnSpc>
               <a:spcAft>
-                <a:spcPts val="600"/>
-              </a:spcAft>
-              <a:defRPr sz="1200" b="1">
+                <a:spcPts val="200"/>
+              </a:spcAft>
+              <a:defRPr sz="1100" b="1">
                 <a:solidFill>
                   <a:srgbClr val="0E7C86"/>
                 </a:solidFill>
@@ -8980,7 +9080,7 @@
               </a:defRPr>
             </a:pPr>
             <a:r>
-              <a:rPr sz="1200" b="1">
+              <a:rPr sz="1100" b="1">
                 <a:solidFill>
                   <a:srgbClr val="0E7C86"/>
                 </a:solidFill>

--- a/ground-vehicle/docs/courses/advanced/l1_architecture_and_toolchain.pptx
+++ b/ground-vehicle/docs/courses/advanced/l1_architecture_and_toolchain.pptx
@@ -614,7 +614,23 @@
               <a:rPr sz="1200">
                 <a:latin typeface="Calibri"/>
               </a:rPr>
-              <a:t>Twenty seconds. First activity.</a:t>
+              <a:t>Eight files, one subsystem each. Read the table, then say the rule underneath it: each tab owns its own state and others go through its functions.</a:t>
+            </a:r>
+          </a:p>
+          <a:p>
+            <a:r>
+              <a:rPr sz="1200">
+                <a:latin typeface="Calibri"/>
+              </a:rPr>
+              <a:t>The note is the honest part: nothing in the compiler enforces this. Every tab can see every global. It is a convention held by discipline.</a:t>
+            </a:r>
+          </a:p>
+          <a:p>
+            <a:r>
+              <a:rPr sz="1200">
+                <a:latin typeface="Calibri"/>
+              </a:rPr>
+              <a:t>Ask what happens when somebody breaks the convention. The answer is that the program still compiles, which is exactly why it is dangerous.</a:t>
             </a:r>
           </a:p>
         </p:txBody>
@@ -792,31 +808,7 @@
               <a:rPr sz="1200">
                 <a:latin typeface="Calibri"/>
               </a:rPr>
-              <a:t>A compiled binary is opaque. You can see what it does, not what it thinks. That is the framing.</a:t>
-            </a:r>
-          </a:p>
-          <a:p>
-            <a:r>
-              <a:rPr sz="1200">
-                <a:latin typeface="Calibri"/>
-              </a:rPr>
-              <a:t>The four commands on the slide are the four things people actually want at a track event.</a:t>
-            </a:r>
-          </a:p>
-          <a:p>
-            <a:r>
-              <a:rPr sz="1200">
-                <a:latin typeface="Calibri"/>
-              </a:rPr>
-              <a:t>Tuning stops being an edit-compile-upload cycle and becomes a conversation. That is a real productivity difference, not a nicety.</a:t>
-            </a:r>
-          </a:p>
-          <a:p>
-            <a:r>
-              <a:rPr sz="1200">
-                <a:latin typeface="Calibri"/>
-              </a:rPr>
-              <a:t>Industrial controllers, network switches and flight computers all have one. This is standard practice, not a toy.</a:t>
+              <a:t>Twenty seconds. Second activity.</a:t>
             </a:r>
           </a:p>
         </p:txBody>
@@ -889,7 +881,7 @@
               <a:rPr sz="1200">
                 <a:latin typeface="Calibri"/>
               </a:rPr>
-              <a:t>Serial.readStringUntil() WAITS. On a moving vehicle that is unacceptable. Say it plainly.</a:t>
+              <a:t>A compiled binary is opaque. You can see what it does, not what it thinks. That is the framing.</a:t>
             </a:r>
           </a:p>
           <a:p>
@@ -897,7 +889,7 @@
               <a:rPr sz="1200">
                 <a:latin typeface="Calibri"/>
               </a:rPr>
-              <a:t>This version takes whatever bytes have arrived and returns immediately, every time. That is the non-blocking pattern from beginner Lesson 5, applied to input.</a:t>
+              <a:t>The four commands on the slide are the four things people actually want at a track event.</a:t>
             </a:r>
           </a:p>
           <a:p>
@@ -905,7 +897,7 @@
               <a:rPr sz="1200">
                 <a:latin typeface="Calibri"/>
               </a:rPr>
-              <a:t>The line-ending handling looks like paranoia until you watch a console appear broken because the Serial Monitor dropdown was set differently.</a:t>
+              <a:t>Tuning stops being an edit-compile-upload cycle and becomes a conversation. That is a real productivity difference, not a nicety.</a:t>
             </a:r>
           </a:p>
           <a:p>
@@ -913,7 +905,7 @@
               <a:rPr sz="1200">
                 <a:latin typeface="Calibri"/>
               </a:rPr>
-              <a:t>The printable-character and length checks are the input validation. Worth pointing out that they are not optional.</a:t>
+              <a:t>Industrial controllers, network switches and flight computers all have one. This is standard practice, not a toy.</a:t>
             </a:r>
           </a:p>
         </p:txBody>
@@ -986,7 +978,31 @@
               <a:rPr sz="1200">
                 <a:latin typeface="Calibri"/>
               </a:rPr>
-              <a:t>Twenty seconds. Second activity.</a:t>
+              <a:t>Serial.readStringUntil() WAITS. On a moving vehicle that is unacceptable. Say it plainly.</a:t>
+            </a:r>
+          </a:p>
+          <a:p>
+            <a:r>
+              <a:rPr sz="1200">
+                <a:latin typeface="Calibri"/>
+              </a:rPr>
+              <a:t>This version takes whatever bytes have arrived and returns immediately, every time. That is the non-blocking pattern from beginner Lesson 5, applied to input.</a:t>
+            </a:r>
+          </a:p>
+          <a:p>
+            <a:r>
+              <a:rPr sz="1200">
+                <a:latin typeface="Calibri"/>
+              </a:rPr>
+              <a:t>The line-ending handling looks like paranoia until you watch a console appear broken because the Serial Monitor dropdown was set differently.</a:t>
+            </a:r>
+          </a:p>
+          <a:p>
+            <a:r>
+              <a:rPr sz="1200">
+                <a:latin typeface="Calibri"/>
+              </a:rPr>
+              <a:t>The printable-character and length checks are the input validation. Worth pointing out that they are not optional.</a:t>
             </a:r>
           </a:p>
         </p:txBody>
@@ -2281,31 +2297,7 @@
               <a:rPr sz="1200">
                 <a:latin typeface="Calibri"/>
               </a:rPr>
-              <a:t>This is the slide the activity is built on. Go slowly.</a:t>
-            </a:r>
-          </a:p>
-          <a:p>
-            <a:r>
-              <a:rPr sz="1200">
-                <a:latin typeface="Calibri"/>
-              </a:rPr>
-              <a:t>The IDE concatenates the tabs and generates prototypes ABOVE your code. Draw that on the board - the ordering is the whole explanation.</a:t>
-            </a:r>
-          </a:p>
-          <a:p>
-            <a:r>
-              <a:rPr sz="1200">
-                <a:latin typeface="Calibri"/>
-              </a:rPr>
-              <a:t>Functions and globals cross tabs freely. Types do not, because the generated prototype mentions a type that is not defined yet at that point.</a:t>
-            </a:r>
-          </a:p>
-          <a:p>
-            <a:r>
-              <a:rPr sz="1200">
-                <a:latin typeface="Calibri"/>
-              </a:rPr>
-              <a:t>That is precisely why Config.h is a real header. Not style - necessity.</a:t>
+              <a:t>Twenty seconds. First activity.</a:t>
             </a:r>
           </a:p>
         </p:txBody>
@@ -2378,7 +2370,7 @@
               <a:rPr sz="1200">
                 <a:latin typeface="Calibri"/>
               </a:rPr>
-              <a:t>Eight files, one subsystem each. Read the table, then say the rule underneath it: each tab owns its own state and others go through its functions.</a:t>
+              <a:t>This is the slide the activity is built on. Go slowly.</a:t>
             </a:r>
           </a:p>
           <a:p>
@@ -2386,7 +2378,7 @@
               <a:rPr sz="1200">
                 <a:latin typeface="Calibri"/>
               </a:rPr>
-              <a:t>The note is the honest part: nothing in the compiler enforces this. Every tab can see every global. It is a convention held by discipline.</a:t>
+              <a:t>The IDE concatenates the tabs and generates prototypes ABOVE your code. Draw that on the board - the ordering is the whole explanation.</a:t>
             </a:r>
           </a:p>
           <a:p>
@@ -2394,7 +2386,15 @@
               <a:rPr sz="1200">
                 <a:latin typeface="Calibri"/>
               </a:rPr>
-              <a:t>Ask what happens when somebody breaks the convention. The answer is that the program still compiles, which is exactly why it is dangerous.</a:t>
+              <a:t>Functions and globals cross tabs freely. Types do not, because the generated prototype mentions a type that is not defined yet at that point.</a:t>
+            </a:r>
+          </a:p>
+          <a:p>
+            <a:r>
+              <a:rPr sz="1200">
+                <a:latin typeface="Calibri"/>
+              </a:rPr>
+              <a:t>That is precisely why Config.h is a real header. Not style - necessity.</a:t>
             </a:r>
           </a:p>
         </p:txBody>
@@ -5959,7 +5959,97 @@
       <p:grpSpPr/>
       <p:sp>
         <p:nvSpPr>
-          <p:cNvPr id="2" name="TextBox 1"/>
+          <p:cNvPr id="2" name="Title 1"/>
+          <p:cNvSpPr>
+            <a:spLocks noGrp="1"/>
+          </p:cNvSpPr>
+          <p:nvPr>
+            <p:ph type="title"/>
+          </p:nvPr>
+        </p:nvSpPr>
+        <p:spPr>
+          <a:xfrm>
+            <a:off x="502920" y="274320"/>
+            <a:ext cx="11185855" cy="777240"/>
+          </a:xfrm>
+        </p:spPr>
+        <p:txBody>
+          <a:bodyPr wrap="square" anchor="b"/>
+          <a:lstStyle/>
+          <a:p>
+            <a:pPr algn="l">
+              <a:lnSpc>
+                <a:spcPct val="100000"/>
+              </a:lnSpc>
+              <a:spcAft>
+                <a:spcPts val="0"/>
+              </a:spcAft>
+              <a:defRPr sz="2800" b="1">
+                <a:solidFill>
+                  <a:srgbClr val="1F3A5F"/>
+                </a:solidFill>
+                <a:latin typeface="Calibri"/>
+              </a:defRPr>
+            </a:pPr>
+            <a:r>
+              <a:rPr sz="2800" b="1">
+                <a:solidFill>
+                  <a:srgbClr val="1F3A5F"/>
+                </a:solidFill>
+                <a:latin typeface="Calibri"/>
+              </a:rPr>
+              <a:t>The eight files, and what each one owns</a:t>
+            </a:r>
+          </a:p>
+        </p:txBody>
+      </p:sp>
+      <p:sp>
+        <p:nvSpPr>
+          <p:cNvPr id="3" name="Rectangle 2"/>
+          <p:cNvSpPr/>
+          <p:nvPr/>
+        </p:nvSpPr>
+        <p:spPr>
+          <a:xfrm>
+            <a:off x="502920" y="1097280"/>
+            <a:ext cx="11185855" cy="19050"/>
+          </a:xfrm>
+          <a:prstGeom prst="rect">
+            <a:avLst/>
+          </a:prstGeom>
+          <a:solidFill>
+            <a:srgbClr val="C8D2DE"/>
+          </a:solidFill>
+          <a:ln>
+            <a:noFill/>
+          </a:ln>
+          <a:effectLst/>
+        </p:spPr>
+        <p:style>
+          <a:lnRef idx="1">
+            <a:schemeClr val="accent1"/>
+          </a:lnRef>
+          <a:fillRef idx="3">
+            <a:schemeClr val="accent1"/>
+          </a:fillRef>
+          <a:effectRef idx="2">
+            <a:schemeClr val="accent1"/>
+          </a:effectRef>
+          <a:fontRef idx="minor">
+            <a:schemeClr val="lt1"/>
+          </a:fontRef>
+        </p:style>
+        <p:txBody>
+          <a:bodyPr rtlCol="0" anchor="ctr"/>
+          <a:lstStyle/>
+          <a:p>
+            <a:pPr algn="ctr"/>
+          </a:p>
+        </p:txBody>
+      </p:sp>
+      <p:sp>
+        <p:nvSpPr>
+          <p:cNvPr id="4" name="TextBox 3"/>
           <p:cNvSpPr txBox="1"/>
           <p:nvPr/>
         </p:nvSpPr>
@@ -6007,7 +6097,7 @@
       </p:sp>
       <p:sp>
         <p:nvSpPr>
-          <p:cNvPr id="3" name="TextBox 2"/>
+          <p:cNvPr id="5" name="TextBox 4"/>
           <p:cNvSpPr txBox="1"/>
           <p:nvPr/>
         </p:nvSpPr>
@@ -6049,6 +6139,1341 @@
                 <a:latin typeface="Calibri"/>
               </a:rPr>
               <a:t>9</a:t>
+            </a:r>
+          </a:p>
+        </p:txBody>
+      </p:sp>
+      <p:sp>
+        <p:nvSpPr>
+          <p:cNvPr id="6" name="TextBox 5"/>
+          <p:cNvSpPr txBox="1"/>
+          <p:nvPr/>
+        </p:nvSpPr>
+        <p:spPr>
+          <a:xfrm>
+            <a:off x="502920" y="1188720"/>
+            <a:ext cx="11185855" cy="457200"/>
+          </a:xfrm>
+          <a:prstGeom prst="rect">
+            <a:avLst/>
+          </a:prstGeom>
+          <a:noFill/>
+        </p:spPr>
+        <p:txBody>
+          <a:bodyPr wrap="square" lIns="0" tIns="0" rIns="0" bIns="0">
+            <a:spAutoFit/>
+          </a:bodyPr>
+          <a:lstStyle/>
+          <a:p>
+            <a:pPr algn="l">
+              <a:lnSpc>
+                <a:spcPct val="100000"/>
+              </a:lnSpc>
+              <a:spcAft>
+                <a:spcPts val="600"/>
+              </a:spcAft>
+              <a:defRPr sz="1400" b="0">
+                <a:solidFill>
+                  <a:srgbClr val="222222"/>
+                </a:solidFill>
+                <a:latin typeface="Calibri"/>
+              </a:defRPr>
+            </a:pPr>
+            <a:r>
+              <a:rPr sz="1400" b="0">
+                <a:solidFill>
+                  <a:srgbClr val="222222"/>
+                </a:solidFill>
+                <a:latin typeface="Calibri"/>
+              </a:rPr>
+              <a:t>One subsystem per file. The rule that makes it work: each tab owns its own state, and other tabs go through its functions.</a:t>
+            </a:r>
+          </a:p>
+        </p:txBody>
+      </p:sp>
+      <p:graphicFrame>
+        <p:nvGraphicFramePr>
+          <p:cNvPr id="7" name="Table 6"/>
+          <p:cNvGraphicFramePr>
+            <a:graphicFrameLocks noGrp="1"/>
+          </p:cNvGraphicFramePr>
+          <p:nvPr/>
+        </p:nvGraphicFramePr>
+        <p:xfrm>
+          <a:off x="502920" y="1691640"/>
+          <a:ext cx="11185854" cy="3328987"/>
+        </p:xfrm>
+        <a:graphic>
+          <a:graphicData uri="http://schemas.openxmlformats.org/drawingml/2006/table">
+            <a:tbl>
+              <a:tblPr firstRow="1" bandRow="1">
+                <a:tableStyleId>{5C22544A-7EE6-4342-B048-85BDC9FD1C3A}</a:tableStyleId>
+              </a:tblPr>
+              <a:tblGrid>
+                <a:gridCol w="3457446"/>
+                <a:gridCol w="7728408"/>
+              </a:tblGrid>
+              <a:tr h="369887">
+                <a:tc>
+                  <a:txBody>
+                    <a:bodyPr/>
+                    <a:lstStyle/>
+                    <a:p>
+                      <a:r>
+                        <a:rPr sz="1850" b="1">
+                          <a:solidFill>
+                            <a:srgbClr val="FFFFFF"/>
+                          </a:solidFill>
+                          <a:latin typeface="Calibri"/>
+                        </a:rPr>
+                        <a:t>File</a:t>
+                      </a:r>
+                    </a:p>
+                  </a:txBody>
+                  <a:tcPr marL="73152" marT="18288" marB="18288">
+                    <a:solidFill>
+                      <a:srgbClr val="1F3A5F"/>
+                    </a:solidFill>
+                  </a:tcPr>
+                </a:tc>
+                <a:tc>
+                  <a:txBody>
+                    <a:bodyPr/>
+                    <a:lstStyle/>
+                    <a:p>
+                      <a:r>
+                        <a:rPr sz="1850" b="1">
+                          <a:solidFill>
+                            <a:srgbClr val="FFFFFF"/>
+                          </a:solidFill>
+                          <a:latin typeface="Calibri"/>
+                        </a:rPr>
+                        <a:t>Owns</a:t>
+                      </a:r>
+                    </a:p>
+                  </a:txBody>
+                  <a:tcPr marL="73152" marT="18288" marB="18288">
+                    <a:solidFill>
+                      <a:srgbClr val="1F3A5F"/>
+                    </a:solidFill>
+                  </a:tcPr>
+                </a:tc>
+              </a:tr>
+              <a:tr h="369887">
+                <a:tc>
+                  <a:txBody>
+                    <a:bodyPr/>
+                    <a:lstStyle/>
+                    <a:p>
+                      <a:r>
+                        <a:rPr sz="1850">
+                          <a:solidFill>
+                            <a:srgbClr val="222222"/>
+                          </a:solidFill>
+                          <a:latin typeface="Consolas"/>
+                        </a:rPr>
+                        <a:t>Pathfinder_Op_Program12.ino</a:t>
+                      </a:r>
+                    </a:p>
+                  </a:txBody>
+                  <a:tcPr marL="73152" marT="18288" marB="18288">
+                    <a:solidFill>
+                      <a:srgbClr val="FFFFFF"/>
+                    </a:solidFill>
+                  </a:tcPr>
+                </a:tc>
+                <a:tc>
+                  <a:txBody>
+                    <a:bodyPr/>
+                    <a:lstStyle/>
+                    <a:p>
+                      <a:r>
+                        <a:rPr sz="1850">
+                          <a:solidFill>
+                            <a:srgbClr val="222222"/>
+                          </a:solidFill>
+                          <a:latin typeface="Calibri"/>
+                        </a:rPr>
+                        <a:t>setup(), loop(), the hardware objects, the shared state</a:t>
+                      </a:r>
+                    </a:p>
+                  </a:txBody>
+                  <a:tcPr marL="73152" marT="18288" marB="18288">
+                    <a:solidFill>
+                      <a:srgbClr val="FFFFFF"/>
+                    </a:solidFill>
+                  </a:tcPr>
+                </a:tc>
+              </a:tr>
+              <a:tr h="369887">
+                <a:tc>
+                  <a:txBody>
+                    <a:bodyPr/>
+                    <a:lstStyle/>
+                    <a:p>
+                      <a:r>
+                        <a:rPr sz="1850">
+                          <a:solidFill>
+                            <a:srgbClr val="222222"/>
+                          </a:solidFill>
+                          <a:latin typeface="Calibri"/>
+                        </a:rPr>
+                        <a:t>Config.h</a:t>
+                      </a:r>
+                    </a:p>
+                  </a:txBody>
+                  <a:tcPr marL="73152" marT="18288" marB="18288">
+                    <a:solidFill>
+                      <a:srgbClr val="EEF3F8"/>
+                    </a:solidFill>
+                  </a:tcPr>
+                </a:tc>
+                <a:tc>
+                  <a:txBody>
+                    <a:bodyPr/>
+                    <a:lstStyle/>
+                    <a:p>
+                      <a:r>
+                        <a:rPr sz="1850">
+                          <a:solidFill>
+                            <a:srgbClr val="222222"/>
+                          </a:solidFill>
+                          <a:latin typeface="Calibri"/>
+                        </a:rPr>
+                        <a:t>Every tunable number and every custom type</a:t>
+                      </a:r>
+                    </a:p>
+                  </a:txBody>
+                  <a:tcPr marL="73152" marT="18288" marB="18288">
+                    <a:solidFill>
+                      <a:srgbClr val="EEF3F8"/>
+                    </a:solidFill>
+                  </a:tcPr>
+                </a:tc>
+              </a:tr>
+              <a:tr h="369887">
+                <a:tc>
+                  <a:txBody>
+                    <a:bodyPr/>
+                    <a:lstStyle/>
+                    <a:p>
+                      <a:r>
+                        <a:rPr sz="1850">
+                          <a:solidFill>
+                            <a:srgbClr val="222222"/>
+                          </a:solidFill>
+                          <a:latin typeface="Calibri"/>
+                        </a:rPr>
+                        <a:t>Motors.ino</a:t>
+                      </a:r>
+                    </a:p>
+                  </a:txBody>
+                  <a:tcPr marL="73152" marT="18288" marB="18288">
+                    <a:solidFill>
+                      <a:srgbClr val="FFFFFF"/>
+                    </a:solidFill>
+                  </a:tcPr>
+                </a:tc>
+                <a:tc>
+                  <a:txBody>
+                    <a:bodyPr/>
+                    <a:lstStyle/>
+                    <a:p>
+                      <a:r>
+                        <a:rPr sz="1850">
+                          <a:solidFill>
+                            <a:srgbClr val="222222"/>
+                          </a:solidFill>
+                          <a:latin typeface="Calibri"/>
+                        </a:rPr>
+                        <a:t>PWM setup, drive modes, ramping, servos, throttle modes</a:t>
+                      </a:r>
+                    </a:p>
+                  </a:txBody>
+                  <a:tcPr marL="73152" marT="18288" marB="18288">
+                    <a:solidFill>
+                      <a:srgbClr val="FFFFFF"/>
+                    </a:solidFill>
+                  </a:tcPr>
+                </a:tc>
+              </a:tr>
+              <a:tr h="369887">
+                <a:tc>
+                  <a:txBody>
+                    <a:bodyPr/>
+                    <a:lstStyle/>
+                    <a:p>
+                      <a:r>
+                        <a:rPr sz="1850">
+                          <a:solidFill>
+                            <a:srgbClr val="222222"/>
+                          </a:solidFill>
+                          <a:latin typeface="Calibri"/>
+                        </a:rPr>
+                        <a:t>Lighting.ino</a:t>
+                      </a:r>
+                    </a:p>
+                  </a:txBody>
+                  <a:tcPr marL="73152" marT="18288" marB="18288">
+                    <a:solidFill>
+                      <a:srgbClr val="EEF3F8"/>
+                    </a:solidFill>
+                  </a:tcPr>
+                </a:tc>
+                <a:tc>
+                  <a:txBody>
+                    <a:bodyPr/>
+                    <a:lstStyle/>
+                    <a:p>
+                      <a:r>
+                        <a:rPr sz="1850">
+                          <a:solidFill>
+                            <a:srgbClr val="222222"/>
+                          </a:solidFill>
+                          <a:latin typeface="Calibri"/>
+                        </a:rPr>
+                        <a:t>Color helpers, every animation, the lighting state machine</a:t>
+                      </a:r>
+                    </a:p>
+                  </a:txBody>
+                  <a:tcPr marL="73152" marT="18288" marB="18288">
+                    <a:solidFill>
+                      <a:srgbClr val="EEF3F8"/>
+                    </a:solidFill>
+                  </a:tcPr>
+                </a:tc>
+              </a:tr>
+              <a:tr h="369887">
+                <a:tc>
+                  <a:txBody>
+                    <a:bodyPr/>
+                    <a:lstStyle/>
+                    <a:p>
+                      <a:r>
+                        <a:rPr sz="1850">
+                          <a:solidFill>
+                            <a:srgbClr val="222222"/>
+                          </a:solidFill>
+                          <a:latin typeface="Calibri"/>
+                        </a:rPr>
+                        <a:t>Bluetooth.ino</a:t>
+                      </a:r>
+                    </a:p>
+                  </a:txBody>
+                  <a:tcPr marL="73152" marT="18288" marB="18288">
+                    <a:solidFill>
+                      <a:srgbClr val="FFFFFF"/>
+                    </a:solidFill>
+                  </a:tcPr>
+                </a:tc>
+                <a:tc>
+                  <a:txBody>
+                    <a:bodyPr/>
+                    <a:lstStyle/>
+                    <a:p>
+                      <a:r>
+                        <a:rPr sz="1850">
+                          <a:solidFill>
+                            <a:srgbClr val="222222"/>
+                          </a:solidFill>
+                          <a:latin typeface="Calibri"/>
+                        </a:rPr>
+                        <a:t>Connection callbacks, the allowlist, the pairing workflow</a:t>
+                      </a:r>
+                    </a:p>
+                  </a:txBody>
+                  <a:tcPr marL="73152" marT="18288" marB="18288">
+                    <a:solidFill>
+                      <a:srgbClr val="FFFFFF"/>
+                    </a:solidFill>
+                  </a:tcPr>
+                </a:tc>
+              </a:tr>
+              <a:tr h="369887">
+                <a:tc>
+                  <a:txBody>
+                    <a:bodyPr/>
+                    <a:lstStyle/>
+                    <a:p>
+                      <a:r>
+                        <a:rPr sz="1850">
+                          <a:solidFill>
+                            <a:srgbClr val="222222"/>
+                          </a:solidFill>
+                          <a:latin typeface="Calibri"/>
+                        </a:rPr>
+                        <a:t>Console.ino</a:t>
+                      </a:r>
+                    </a:p>
+                  </a:txBody>
+                  <a:tcPr marL="73152" marT="18288" marB="18288">
+                    <a:solidFill>
+                      <a:srgbClr val="EEF3F8"/>
+                    </a:solidFill>
+                  </a:tcPr>
+                </a:tc>
+                <a:tc>
+                  <a:txBody>
+                    <a:bodyPr/>
+                    <a:lstStyle/>
+                    <a:p>
+                      <a:r>
+                        <a:rPr sz="1850">
+                          <a:solidFill>
+                            <a:srgbClr val="222222"/>
+                          </a:solidFill>
+                          <a:latin typeface="Calibri"/>
+                        </a:rPr>
+                        <a:t>The serial command interface, EEPROM settings, diagnostics</a:t>
+                      </a:r>
+                    </a:p>
+                  </a:txBody>
+                  <a:tcPr marL="73152" marT="18288" marB="18288">
+                    <a:solidFill>
+                      <a:srgbClr val="EEF3F8"/>
+                    </a:solidFill>
+                  </a:tcPr>
+                </a:tc>
+              </a:tr>
+              <a:tr h="369887">
+                <a:tc>
+                  <a:txBody>
+                    <a:bodyPr/>
+                    <a:lstStyle/>
+                    <a:p>
+                      <a:r>
+                        <a:rPr sz="1850">
+                          <a:solidFill>
+                            <a:srgbClr val="222222"/>
+                          </a:solidFill>
+                          <a:latin typeface="Calibri"/>
+                        </a:rPr>
+                        <a:t>Sensors.ino</a:t>
+                      </a:r>
+                    </a:p>
+                  </a:txBody>
+                  <a:tcPr marL="73152" marT="18288" marB="18288">
+                    <a:solidFill>
+                      <a:srgbClr val="FFFFFF"/>
+                    </a:solidFill>
+                  </a:tcPr>
+                </a:tc>
+                <a:tc>
+                  <a:txBody>
+                    <a:bodyPr/>
+                    <a:lstStyle/>
+                    <a:p>
+                      <a:r>
+                        <a:rPr sz="1850">
+                          <a:solidFill>
+                            <a:srgbClr val="222222"/>
+                          </a:solidFill>
+                          <a:latin typeface="Calibri"/>
+                        </a:rPr>
+                        <a:t>The INA219 driver</a:t>
+                      </a:r>
+                    </a:p>
+                  </a:txBody>
+                  <a:tcPr marL="73152" marT="18288" marB="18288">
+                    <a:solidFill>
+                      <a:srgbClr val="FFFFFF"/>
+                    </a:solidFill>
+                  </a:tcPr>
+                </a:tc>
+              </a:tr>
+              <a:tr h="369891">
+                <a:tc>
+                  <a:txBody>
+                    <a:bodyPr/>
+                    <a:lstStyle/>
+                    <a:p>
+                      <a:r>
+                        <a:rPr sz="1850">
+                          <a:solidFill>
+                            <a:srgbClr val="222222"/>
+                          </a:solidFill>
+                          <a:latin typeface="Calibri"/>
+                        </a:rPr>
+                        <a:t>SelfTest.ino</a:t>
+                      </a:r>
+                    </a:p>
+                  </a:txBody>
+                  <a:tcPr marL="73152" marT="18288" marB="18288">
+                    <a:solidFill>
+                      <a:srgbClr val="EEF3F8"/>
+                    </a:solidFill>
+                  </a:tcPr>
+                </a:tc>
+                <a:tc>
+                  <a:txBody>
+                    <a:bodyPr/>
+                    <a:lstStyle/>
+                    <a:p>
+                      <a:r>
+                        <a:rPr sz="1850">
+                          <a:solidFill>
+                            <a:srgbClr val="222222"/>
+                          </a:solidFill>
+                          <a:latin typeface="Calibri"/>
+                        </a:rPr>
+                        <a:t>The powered motor check</a:t>
+                      </a:r>
+                    </a:p>
+                  </a:txBody>
+                  <a:tcPr marL="73152" marT="18288" marB="18288">
+                    <a:solidFill>
+                      <a:srgbClr val="EEF3F8"/>
+                    </a:solidFill>
+                  </a:tcPr>
+                </a:tc>
+              </a:tr>
+            </a:tbl>
+          </a:graphicData>
+        </a:graphic>
+      </p:graphicFrame>
+      <p:sp>
+        <p:nvSpPr>
+          <p:cNvPr id="8" name="Rounded Rectangle 7"/>
+          <p:cNvSpPr/>
+          <p:nvPr/>
+        </p:nvSpPr>
+        <p:spPr>
+          <a:xfrm>
+            <a:off x="502920" y="5303520"/>
+            <a:ext cx="11185855" cy="960120"/>
+          </a:xfrm>
+          <a:prstGeom prst="roundRect">
+            <a:avLst>
+              <a:gd name="adj" fmla="val 4000"/>
+            </a:avLst>
+          </a:prstGeom>
+          <a:solidFill>
+            <a:srgbClr val="EEF3F8"/>
+          </a:solidFill>
+          <a:ln w="12700">
+            <a:solidFill>
+              <a:srgbClr val="0E7C86"/>
+            </a:solidFill>
+          </a:ln>
+          <a:effectLst/>
+        </p:spPr>
+        <p:style>
+          <a:lnRef idx="1">
+            <a:schemeClr val="accent1"/>
+          </a:lnRef>
+          <a:fillRef idx="3">
+            <a:schemeClr val="accent1"/>
+          </a:fillRef>
+          <a:effectRef idx="2">
+            <a:schemeClr val="accent1"/>
+          </a:effectRef>
+          <a:fontRef idx="minor">
+            <a:schemeClr val="lt1"/>
+          </a:fontRef>
+        </p:style>
+        <p:txBody>
+          <a:bodyPr rtlCol="0" anchor="ctr" wrap="square" lIns="164592" rIns="164592" tIns="73152" bIns="73152"/>
+          <a:lstStyle/>
+          <a:p>
+            <a:pPr algn="l"/>
+            <a:r>
+              <a:rPr sz="1300" b="1">
+                <a:solidFill>
+                  <a:srgbClr val="0E7C86"/>
+                </a:solidFill>
+                <a:latin typeface="Calibri"/>
+              </a:rPr>
+              <a:t>KEY POINT   </a:t>
+            </a:r>
+            <a:r>
+              <a:rPr sz="1500">
+                <a:solidFill>
+                  <a:srgbClr val="222222"/>
+                </a:solidFill>
+                <a:latin typeface="Calibri"/>
+              </a:rPr>
+              <a:t>Nothing in the compiler enforces that. Every tab can see every global. It is a convention, and it is the only thing standing between you and 1292 lines again.</a:t>
+            </a:r>
+          </a:p>
+        </p:txBody>
+      </p:sp>
+    </p:spTree>
+  </p:cSld>
+  <p:clrMapOvr>
+    <a:masterClrMapping/>
+  </p:clrMapOvr>
+</p:sld>
+</file>
+
+<file path=ppt/slides/slide11.xml><?xml version="1.0" encoding="utf-8"?>
+<p:sld xmlns:a="http://schemas.openxmlformats.org/drawingml/2006/main" xmlns:p="http://schemas.openxmlformats.org/presentationml/2006/main" xmlns:r="http://schemas.openxmlformats.org/officeDocument/2006/relationships">
+  <p:cSld>
+    <p:spTree>
+      <p:nvGrpSpPr>
+        <p:cNvPr id="1" name=""/>
+        <p:cNvGrpSpPr/>
+        <p:nvPr/>
+      </p:nvGrpSpPr>
+      <p:grpSpPr/>
+      <p:sp>
+        <p:nvSpPr>
+          <p:cNvPr id="2" name="Title 1"/>
+          <p:cNvSpPr>
+            <a:spLocks noGrp="1"/>
+          </p:cNvSpPr>
+          <p:nvPr>
+            <p:ph type="title"/>
+          </p:nvPr>
+        </p:nvSpPr>
+        <p:spPr>
+          <a:xfrm>
+            <a:off x="502920" y="274320"/>
+            <a:ext cx="11185855" cy="777240"/>
+          </a:xfrm>
+        </p:spPr>
+        <p:txBody>
+          <a:bodyPr wrap="square" anchor="b"/>
+          <a:lstStyle/>
+          <a:p>
+            <a:pPr algn="l">
+              <a:lnSpc>
+                <a:spcPct val="100000"/>
+              </a:lnSpc>
+              <a:spcAft>
+                <a:spcPts val="0"/>
+              </a:spcAft>
+              <a:defRPr sz="2800" b="1">
+                <a:solidFill>
+                  <a:srgbClr val="1F3A5F"/>
+                </a:solidFill>
+                <a:latin typeface="Calibri"/>
+              </a:defRPr>
+            </a:pPr>
+            <a:r>
+              <a:rPr sz="2800" b="1">
+                <a:solidFill>
+                  <a:srgbClr val="1F3A5F"/>
+                </a:solidFill>
+                <a:latin typeface="Calibri"/>
+              </a:rPr>
+              <a:t>Do it now  -  three files, one program</a:t>
+            </a:r>
+          </a:p>
+        </p:txBody>
+      </p:sp>
+      <p:sp>
+        <p:nvSpPr>
+          <p:cNvPr id="3" name="Rectangle 2"/>
+          <p:cNvSpPr/>
+          <p:nvPr/>
+        </p:nvSpPr>
+        <p:spPr>
+          <a:xfrm>
+            <a:off x="502920" y="1097280"/>
+            <a:ext cx="11185855" cy="19050"/>
+          </a:xfrm>
+          <a:prstGeom prst="rect">
+            <a:avLst/>
+          </a:prstGeom>
+          <a:solidFill>
+            <a:srgbClr val="C8D2DE"/>
+          </a:solidFill>
+          <a:ln>
+            <a:noFill/>
+          </a:ln>
+          <a:effectLst/>
+        </p:spPr>
+        <p:style>
+          <a:lnRef idx="1">
+            <a:schemeClr val="accent1"/>
+          </a:lnRef>
+          <a:fillRef idx="3">
+            <a:schemeClr val="accent1"/>
+          </a:fillRef>
+          <a:effectRef idx="2">
+            <a:schemeClr val="accent1"/>
+          </a:effectRef>
+          <a:fontRef idx="minor">
+            <a:schemeClr val="lt1"/>
+          </a:fontRef>
+        </p:style>
+        <p:txBody>
+          <a:bodyPr rtlCol="0" anchor="ctr"/>
+          <a:lstStyle/>
+          <a:p>
+            <a:pPr algn="ctr"/>
+          </a:p>
+        </p:txBody>
+      </p:sp>
+      <p:sp>
+        <p:nvSpPr>
+          <p:cNvPr id="4" name="TextBox 3"/>
+          <p:cNvSpPr txBox="1"/>
+          <p:nvPr/>
+        </p:nvSpPr>
+        <p:spPr>
+          <a:xfrm>
+            <a:off x="502920" y="6382512"/>
+            <a:ext cx="10545775" cy="274320"/>
+          </a:xfrm>
+          <a:prstGeom prst="rect">
+            <a:avLst/>
+          </a:prstGeom>
+          <a:noFill/>
+        </p:spPr>
+        <p:txBody>
+          <a:bodyPr wrap="square" lIns="0" tIns="0">
+            <a:spAutoFit/>
+          </a:bodyPr>
+          <a:lstStyle/>
+          <a:p>
+            <a:pPr algn="l">
+              <a:lnSpc>
+                <a:spcPct val="100000"/>
+              </a:lnSpc>
+              <a:spcAft>
+                <a:spcPts val="0"/>
+              </a:spcAft>
+              <a:defRPr sz="1000" b="0">
+                <a:solidFill>
+                  <a:srgbClr val="666666"/>
+                </a:solidFill>
+                <a:latin typeface="Calibri"/>
+              </a:defRPr>
+            </a:pPr>
+            <a:r>
+              <a:rPr sz="1000" b="0">
+                <a:solidFill>
+                  <a:srgbClr val="666666"/>
+                </a:solidFill>
+                <a:latin typeface="Calibri"/>
+              </a:rPr>
+              <a:t>Pathfinder Advanced - Op Program 12  |  Lesson 1</a:t>
+            </a:r>
+          </a:p>
+        </p:txBody>
+      </p:sp>
+      <p:sp>
+        <p:nvSpPr>
+          <p:cNvPr id="5" name="TextBox 4"/>
+          <p:cNvSpPr txBox="1"/>
+          <p:nvPr/>
+        </p:nvSpPr>
+        <p:spPr>
+          <a:xfrm>
+            <a:off x="11231575" y="6382512"/>
+            <a:ext cx="457200" cy="274320"/>
+          </a:xfrm>
+          <a:prstGeom prst="rect">
+            <a:avLst/>
+          </a:prstGeom>
+          <a:noFill/>
+        </p:spPr>
+        <p:txBody>
+          <a:bodyPr wrap="square" lIns="0" tIns="0">
+            <a:spAutoFit/>
+          </a:bodyPr>
+          <a:lstStyle/>
+          <a:p>
+            <a:pPr algn="r">
+              <a:lnSpc>
+                <a:spcPct val="100000"/>
+              </a:lnSpc>
+              <a:spcAft>
+                <a:spcPts val="0"/>
+              </a:spcAft>
+              <a:defRPr sz="1000" b="0">
+                <a:solidFill>
+                  <a:srgbClr val="666666"/>
+                </a:solidFill>
+                <a:latin typeface="Calibri"/>
+              </a:defRPr>
+            </a:pPr>
+            <a:r>
+              <a:rPr sz="1000" b="0">
+                <a:solidFill>
+                  <a:srgbClr val="666666"/>
+                </a:solidFill>
+                <a:latin typeface="Calibri"/>
+              </a:rPr>
+              <a:t>10</a:t>
+            </a:r>
+          </a:p>
+        </p:txBody>
+      </p:sp>
+      <p:sp>
+        <p:nvSpPr>
+          <p:cNvPr id="6" name="Rounded Rectangle 5"/>
+          <p:cNvSpPr/>
+          <p:nvPr/>
+        </p:nvSpPr>
+        <p:spPr>
+          <a:xfrm>
+            <a:off x="502920" y="1188720"/>
+            <a:ext cx="11185855" cy="530352"/>
+          </a:xfrm>
+          <a:prstGeom prst="roundRect">
+            <a:avLst>
+              <a:gd name="adj" fmla="val 4000"/>
+            </a:avLst>
+          </a:prstGeom>
+          <a:solidFill>
+            <a:srgbClr val="0E7C86"/>
+          </a:solidFill>
+          <a:ln>
+            <a:noFill/>
+          </a:ln>
+          <a:effectLst/>
+        </p:spPr>
+        <p:style>
+          <a:lnRef idx="1">
+            <a:schemeClr val="accent1"/>
+          </a:lnRef>
+          <a:fillRef idx="3">
+            <a:schemeClr val="accent1"/>
+          </a:fillRef>
+          <a:effectRef idx="2">
+            <a:schemeClr val="accent1"/>
+          </a:effectRef>
+          <a:fontRef idx="minor">
+            <a:schemeClr val="lt1"/>
+          </a:fontRef>
+        </p:style>
+        <p:txBody>
+          <a:bodyPr rtlCol="0" anchor="ctr" wrap="square" lIns="182880"/>
+          <a:lstStyle/>
+          <a:p>
+            <a:pPr algn="l"/>
+            <a:r>
+              <a:rPr sz="1300" b="1">
+                <a:solidFill>
+                  <a:srgbClr val="FFFFFF"/>
+                </a:solidFill>
+                <a:latin typeface="Calibri"/>
+              </a:rPr>
+              <a:t>UPLOAD AND RUN:   </a:t>
+            </a:r>
+            <a:r>
+              <a:rPr sz="1500" b="1">
+                <a:solidFill>
+                  <a:srgbClr val="FFFFFF"/>
+                </a:solidFill>
+                <a:latin typeface="Consolas"/>
+              </a:rPr>
+              <a:t>a1a_tabs_and_config</a:t>
+            </a:r>
+            <a:r>
+              <a:rPr sz="1200">
+                <a:solidFill>
+                  <a:srgbClr val="FFFFFF"/>
+                </a:solidFill>
+                <a:latin typeface="Calibri"/>
+              </a:rPr>
+              <a:t>     (30 minutes)</a:t>
+            </a:r>
+          </a:p>
+        </p:txBody>
+      </p:sp>
+      <p:sp>
+        <p:nvSpPr>
+          <p:cNvPr id="7" name="TextBox 6"/>
+          <p:cNvSpPr txBox="1"/>
+          <p:nvPr/>
+        </p:nvSpPr>
+        <p:spPr>
+          <a:xfrm>
+            <a:off x="502920" y="1901952"/>
+            <a:ext cx="6249137" cy="4361688"/>
+          </a:xfrm>
+          <a:prstGeom prst="rect">
+            <a:avLst/>
+          </a:prstGeom>
+          <a:noFill/>
+        </p:spPr>
+        <p:txBody>
+          <a:bodyPr wrap="square" lIns="0" tIns="0" rIns="0" bIns="0">
+            <a:spAutoFit/>
+          </a:bodyPr>
+          <a:lstStyle/>
+          <a:p>
+            <a:pPr algn="l">
+              <a:lnSpc>
+                <a:spcPct val="100000"/>
+              </a:lnSpc>
+              <a:spcAft>
+                <a:spcPts val="800"/>
+              </a:spcAft>
+              <a:defRPr sz="1800" b="0">
+                <a:solidFill>
+                  <a:srgbClr val="222222"/>
+                </a:solidFill>
+                <a:latin typeface="Calibri"/>
+              </a:defRPr>
+            </a:pPr>
+            <a:r>
+              <a:rPr sz="1800" b="0">
+                <a:solidFill>
+                  <a:srgbClr val="222222"/>
+                </a:solidFill>
+                <a:latin typeface="Calibri"/>
+              </a:rPr>
+              <a:t>1.  Open it. Look at the tab bar: the sketch, Config.h, Blinker.ino.</a:t>
+            </a:r>
+          </a:p>
+          <a:p>
+            <a:pPr algn="l">
+              <a:lnSpc>
+                <a:spcPct val="100000"/>
+              </a:lnSpc>
+              <a:spcAft>
+                <a:spcPts val="800"/>
+              </a:spcAft>
+              <a:defRPr sz="1800" b="0">
+                <a:solidFill>
+                  <a:srgbClr val="222222"/>
+                </a:solidFill>
+                <a:latin typeface="Calibri"/>
+              </a:defRPr>
+            </a:pPr>
+            <a:r>
+              <a:rPr sz="1800" b="0">
+                <a:solidFill>
+                  <a:srgbClr val="222222"/>
+                </a:solidFill>
+                <a:latin typeface="Calibri"/>
+              </a:rPr>
+              <a:t>2.  Upload it. It blinks and reports, and swaps speed every 5 s.</a:t>
+            </a:r>
+          </a:p>
+          <a:p>
+            <a:pPr algn="l">
+              <a:lnSpc>
+                <a:spcPct val="100000"/>
+              </a:lnSpc>
+              <a:spcAft>
+                <a:spcPts val="800"/>
+              </a:spcAft>
+              <a:defRPr sz="1800" b="0">
+                <a:solidFill>
+                  <a:srgbClr val="222222"/>
+                </a:solidFill>
+                <a:latin typeface="Calibri"/>
+              </a:defRPr>
+            </a:pPr>
+            <a:r>
+              <a:rPr sz="1800" b="0">
+                <a:solidFill>
+                  <a:srgbClr val="222222"/>
+                </a:solidFill>
+                <a:latin typeface="Calibri"/>
+              </a:rPr>
+              <a:t>3.  Change BLINK_SLOW_MS in Config.h. Notice you touched neither .ino file.</a:t>
+            </a:r>
+          </a:p>
+          <a:p>
+            <a:pPr algn="l">
+              <a:lnSpc>
+                <a:spcPct val="100000"/>
+              </a:lnSpc>
+              <a:spcAft>
+                <a:spcPts val="800"/>
+              </a:spcAft>
+              <a:defRPr sz="1800" b="0">
+                <a:solidFill>
+                  <a:srgbClr val="222222"/>
+                </a:solidFill>
+                <a:latin typeface="Calibri"/>
+              </a:defRPr>
+            </a:pPr>
+            <a:r>
+              <a:rPr sz="1800" b="0">
+                <a:solidFill>
+                  <a:srgbClr val="222222"/>
+                </a:solidFill>
+                <a:latin typeface="Calibri"/>
+              </a:rPr>
+              <a:t>4.  Add a fourth file, Reporter.ino, with a function in it. Call it from loop(). Notice you declared it nowhere.</a:t>
+            </a:r>
+          </a:p>
+          <a:p>
+            <a:pPr algn="l">
+              <a:lnSpc>
+                <a:spcPct val="100000"/>
+              </a:lnSpc>
+              <a:spcAft>
+                <a:spcPts val="800"/>
+              </a:spcAft>
+              <a:defRPr sz="1800" b="0">
+                <a:solidFill>
+                  <a:srgbClr val="222222"/>
+                </a:solidFill>
+                <a:latin typeface="Calibri"/>
+              </a:defRPr>
+            </a:pPr>
+            <a:r>
+              <a:rPr sz="1800" b="0">
+                <a:solidFill>
+                  <a:srgbClr val="222222"/>
+                </a:solidFill>
+                <a:latin typeface="Calibri"/>
+              </a:rPr>
+              <a:t>5.  Now MOVE the BlinkMode enum out of Config.h and into Blinker.ino. Compile. READ THE ERROR CAREFULLY.</a:t>
+            </a:r>
+          </a:p>
+          <a:p>
+            <a:pPr algn="l">
+              <a:lnSpc>
+                <a:spcPct val="100000"/>
+              </a:lnSpc>
+              <a:spcAft>
+                <a:spcPts val="800"/>
+              </a:spcAft>
+              <a:defRPr sz="1800" b="0">
+                <a:solidFill>
+                  <a:srgbClr val="222222"/>
+                </a:solidFill>
+                <a:latin typeface="Calibri"/>
+              </a:defRPr>
+            </a:pPr>
+            <a:r>
+              <a:rPr sz="1800" b="0">
+                <a:solidFill>
+                  <a:srgbClr val="222222"/>
+                </a:solidFill>
+                <a:latin typeface="Calibri"/>
+              </a:rPr>
+              <a:t>6.  Put it back.</a:t>
+            </a:r>
+          </a:p>
+        </p:txBody>
+      </p:sp>
+      <p:sp>
+        <p:nvSpPr>
+          <p:cNvPr id="8" name="TextBox 7"/>
+          <p:cNvSpPr txBox="1"/>
+          <p:nvPr/>
+        </p:nvSpPr>
+        <p:spPr>
+          <a:xfrm>
+            <a:off x="7163537" y="1901952"/>
+            <a:ext cx="4525238" cy="365760"/>
+          </a:xfrm>
+          <a:prstGeom prst="rect">
+            <a:avLst/>
+          </a:prstGeom>
+          <a:noFill/>
+        </p:spPr>
+        <p:txBody>
+          <a:bodyPr wrap="square" lIns="0" tIns="0" rIns="0" bIns="0">
+            <a:spAutoFit/>
+          </a:bodyPr>
+          <a:lstStyle/>
+          <a:p>
+            <a:pPr algn="l">
+              <a:lnSpc>
+                <a:spcPct val="100000"/>
+              </a:lnSpc>
+              <a:spcAft>
+                <a:spcPts val="200"/>
+              </a:spcAft>
+              <a:defRPr sz="1800" b="1">
+                <a:solidFill>
+                  <a:srgbClr val="0E7C86"/>
+                </a:solidFill>
+                <a:latin typeface="Calibri"/>
+              </a:defRPr>
+            </a:pPr>
+            <a:r>
+              <a:rPr sz="1800" b="1">
+                <a:solidFill>
+                  <a:srgbClr val="0E7C86"/>
+                </a:solidFill>
+                <a:latin typeface="Calibri"/>
+              </a:rPr>
+              <a:t>What you should see</a:t>
+            </a:r>
+          </a:p>
+        </p:txBody>
+      </p:sp>
+      <p:sp>
+        <p:nvSpPr>
+          <p:cNvPr id="9" name="TextBox 8"/>
+          <p:cNvSpPr txBox="1"/>
+          <p:nvPr/>
+        </p:nvSpPr>
+        <p:spPr>
+          <a:xfrm>
+            <a:off x="7163537" y="2304288"/>
+            <a:ext cx="4525238" cy="1672143"/>
+          </a:xfrm>
+          <a:prstGeom prst="rect">
+            <a:avLst/>
+          </a:prstGeom>
+          <a:noFill/>
+        </p:spPr>
+        <p:txBody>
+          <a:bodyPr wrap="square" lIns="0" tIns="0" rIns="0" bIns="0">
+            <a:spAutoFit/>
+          </a:bodyPr>
+          <a:lstStyle/>
+          <a:p>
+            <a:pPr algn="l">
+              <a:lnSpc>
+                <a:spcPct val="100000"/>
+              </a:lnSpc>
+              <a:spcAft>
+                <a:spcPts val="300"/>
+              </a:spcAft>
+              <a:defRPr sz="2500" b="0">
+                <a:solidFill>
+                  <a:srgbClr val="222222"/>
+                </a:solidFill>
+                <a:latin typeface="Calibri"/>
+              </a:defRPr>
+            </a:pPr>
+            <a:r>
+              <a:rPr sz="2500" b="0">
+                <a:solidFill>
+                  <a:srgbClr val="222222"/>
+                </a:solidFill>
+                <a:latin typeface="Calibri"/>
+              </a:rPr>
+              <a:t>Step 5 fails with an error about BlinkMode not naming a type, pointing at a line you did not write.</a:t>
+            </a:r>
+          </a:p>
+        </p:txBody>
+      </p:sp>
+      <p:sp>
+        <p:nvSpPr>
+          <p:cNvPr id="10" name="TextBox 9"/>
+          <p:cNvSpPr txBox="1"/>
+          <p:nvPr/>
+        </p:nvSpPr>
+        <p:spPr>
+          <a:xfrm>
+            <a:off x="7163537" y="4049583"/>
+            <a:ext cx="4525238" cy="365760"/>
+          </a:xfrm>
+          <a:prstGeom prst="rect">
+            <a:avLst/>
+          </a:prstGeom>
+          <a:noFill/>
+        </p:spPr>
+        <p:txBody>
+          <a:bodyPr wrap="square" lIns="0" tIns="0" rIns="0" bIns="0">
+            <a:spAutoFit/>
+          </a:bodyPr>
+          <a:lstStyle/>
+          <a:p>
+            <a:pPr algn="l">
+              <a:lnSpc>
+                <a:spcPct val="100000"/>
+              </a:lnSpc>
+              <a:spcAft>
+                <a:spcPts val="200"/>
+              </a:spcAft>
+              <a:defRPr sz="1800" b="1">
+                <a:solidFill>
+                  <a:srgbClr val="0E7C86"/>
+                </a:solidFill>
+                <a:latin typeface="Calibri"/>
+              </a:defRPr>
+            </a:pPr>
+            <a:r>
+              <a:rPr sz="1800" b="1">
+                <a:solidFill>
+                  <a:srgbClr val="0E7C86"/>
+                </a:solidFill>
+                <a:latin typeface="Calibri"/>
+              </a:rPr>
+              <a:t>Answer these</a:t>
+            </a:r>
+          </a:p>
+        </p:txBody>
+      </p:sp>
+      <p:sp>
+        <p:nvSpPr>
+          <p:cNvPr id="11" name="TextBox 10"/>
+          <p:cNvSpPr txBox="1"/>
+          <p:nvPr/>
+        </p:nvSpPr>
+        <p:spPr>
+          <a:xfrm>
+            <a:off x="7163537" y="4451919"/>
+            <a:ext cx="4525238" cy="1811720"/>
+          </a:xfrm>
+          <a:prstGeom prst="rect">
+            <a:avLst/>
+          </a:prstGeom>
+          <a:noFill/>
+        </p:spPr>
+        <p:txBody>
+          <a:bodyPr wrap="square" lIns="0" tIns="0" rIns="0" bIns="0">
+            <a:spAutoFit/>
+          </a:bodyPr>
+          <a:lstStyle/>
+          <a:p>
+            <a:pPr algn="l">
+              <a:lnSpc>
+                <a:spcPct val="100000"/>
+              </a:lnSpc>
+              <a:spcAft>
+                <a:spcPts val="300"/>
+              </a:spcAft>
+              <a:defRPr sz="2100" b="0">
+                <a:solidFill>
+                  <a:srgbClr val="222222"/>
+                </a:solidFill>
+                <a:latin typeface="Calibri"/>
+              </a:defRPr>
+            </a:pPr>
+            <a:r>
+              <a:rPr sz="2100" b="0">
+                <a:solidFill>
+                  <a:srgbClr val="222222"/>
+                </a:solidFill>
+                <a:latin typeface="Calibri"/>
+              </a:rPr>
+              <a:t>Whose line is the error actually on?</a:t>
+            </a:r>
+          </a:p>
+          <a:p>
+            <a:pPr algn="l">
+              <a:lnSpc>
+                <a:spcPct val="100000"/>
+              </a:lnSpc>
+              <a:spcAft>
+                <a:spcPts val="300"/>
+              </a:spcAft>
+              <a:defRPr sz="2100" b="0">
+                <a:solidFill>
+                  <a:srgbClr val="222222"/>
+                </a:solidFill>
+                <a:latin typeface="Calibri"/>
+              </a:defRPr>
+            </a:pPr>
+            <a:r>
+              <a:rPr sz="2100" b="0">
+                <a:solidFill>
+                  <a:srgbClr val="222222"/>
+                </a:solidFill>
+                <a:latin typeface="Calibri"/>
+              </a:rPr>
+              <a:t>Why does moving a FUNCTION between tabs work fine, but moving a TYPE does not?</a:t>
+            </a:r>
+          </a:p>
+        </p:txBody>
+      </p:sp>
+    </p:spTree>
+  </p:cSld>
+  <p:clrMapOvr>
+    <a:masterClrMapping/>
+  </p:clrMapOvr>
+</p:sld>
+</file>
+
+<file path=ppt/slides/slide12.xml><?xml version="1.0" encoding="utf-8"?>
+<p:sld xmlns:a="http://schemas.openxmlformats.org/drawingml/2006/main" xmlns:p="http://schemas.openxmlformats.org/presentationml/2006/main" xmlns:r="http://schemas.openxmlformats.org/officeDocument/2006/relationships">
+  <p:cSld>
+    <p:spTree>
+      <p:nvGrpSpPr>
+        <p:cNvPr id="1" name=""/>
+        <p:cNvGrpSpPr/>
+        <p:nvPr/>
+      </p:nvGrpSpPr>
+      <p:grpSpPr/>
+      <p:sp>
+        <p:nvSpPr>
+          <p:cNvPr id="2" name="TextBox 1"/>
+          <p:cNvSpPr txBox="1"/>
+          <p:nvPr/>
+        </p:nvSpPr>
+        <p:spPr>
+          <a:xfrm>
+            <a:off x="502920" y="6382512"/>
+            <a:ext cx="10545775" cy="274320"/>
+          </a:xfrm>
+          <a:prstGeom prst="rect">
+            <a:avLst/>
+          </a:prstGeom>
+          <a:noFill/>
+        </p:spPr>
+        <p:txBody>
+          <a:bodyPr wrap="square" lIns="0" tIns="0">
+            <a:spAutoFit/>
+          </a:bodyPr>
+          <a:lstStyle/>
+          <a:p>
+            <a:pPr algn="l">
+              <a:lnSpc>
+                <a:spcPct val="100000"/>
+              </a:lnSpc>
+              <a:spcAft>
+                <a:spcPts val="0"/>
+              </a:spcAft>
+              <a:defRPr sz="1000" b="0">
+                <a:solidFill>
+                  <a:srgbClr val="666666"/>
+                </a:solidFill>
+                <a:latin typeface="Calibri"/>
+              </a:defRPr>
+            </a:pPr>
+            <a:r>
+              <a:rPr sz="1000" b="0">
+                <a:solidFill>
+                  <a:srgbClr val="666666"/>
+                </a:solidFill>
+                <a:latin typeface="Calibri"/>
+              </a:rPr>
+              <a:t>Pathfinder Advanced - Op Program 12  |  Lesson 1</a:t>
+            </a:r>
+          </a:p>
+        </p:txBody>
+      </p:sp>
+      <p:sp>
+        <p:nvSpPr>
+          <p:cNvPr id="3" name="TextBox 2"/>
+          <p:cNvSpPr txBox="1"/>
+          <p:nvPr/>
+        </p:nvSpPr>
+        <p:spPr>
+          <a:xfrm>
+            <a:off x="11231575" y="6382512"/>
+            <a:ext cx="457200" cy="274320"/>
+          </a:xfrm>
+          <a:prstGeom prst="rect">
+            <a:avLst/>
+          </a:prstGeom>
+          <a:noFill/>
+        </p:spPr>
+        <p:txBody>
+          <a:bodyPr wrap="square" lIns="0" tIns="0">
+            <a:spAutoFit/>
+          </a:bodyPr>
+          <a:lstStyle/>
+          <a:p>
+            <a:pPr algn="r">
+              <a:lnSpc>
+                <a:spcPct val="100000"/>
+              </a:lnSpc>
+              <a:spcAft>
+                <a:spcPts val="0"/>
+              </a:spcAft>
+              <a:defRPr sz="1000" b="0">
+                <a:solidFill>
+                  <a:srgbClr val="666666"/>
+                </a:solidFill>
+                <a:latin typeface="Calibri"/>
+              </a:defRPr>
+            </a:pPr>
+            <a:r>
+              <a:rPr sz="1000" b="0">
+                <a:solidFill>
+                  <a:srgbClr val="666666"/>
+                </a:solidFill>
+                <a:latin typeface="Calibri"/>
+              </a:rPr>
+              <a:t>11</a:t>
             </a:r>
           </a:p>
         </p:txBody>
@@ -6140,7 +7565,7 @@
                 </a:solidFill>
                 <a:latin typeface="Calibri"/>
               </a:rPr>
-              <a:t>Tabs and Config.h</a:t>
+              <a:t>The console</a:t>
             </a:r>
           </a:p>
         </p:txBody>
@@ -6188,7 +7613,7 @@
                 </a:solidFill>
                 <a:latin typeface="Calibri"/>
               </a:rPr>
-              <a:t>About 30 minutes</a:t>
+              <a:t>About 40 minutes</a:t>
             </a:r>
           </a:p>
         </p:txBody>
@@ -6328,6 +7753,124 @@
             </a:avLst>
           </a:prstGeom>
           <a:solidFill>
+            <a:srgbClr val="EEF3F8"/>
+          </a:solidFill>
+          <a:ln w="12700">
+            <a:solidFill>
+              <a:srgbClr val="0E7C86"/>
+            </a:solidFill>
+          </a:ln>
+          <a:effectLst/>
+        </p:spPr>
+        <p:style>
+          <a:lnRef idx="1">
+            <a:schemeClr val="accent1"/>
+          </a:lnRef>
+          <a:fillRef idx="3">
+            <a:schemeClr val="accent1"/>
+          </a:fillRef>
+          <a:effectRef idx="2">
+            <a:schemeClr val="accent1"/>
+          </a:effectRef>
+          <a:fontRef idx="minor">
+            <a:schemeClr val="lt1"/>
+          </a:fontRef>
+        </p:style>
+        <p:txBody>
+          <a:bodyPr rtlCol="0" anchor="ctr" wrap="square" lIns="73152" rIns="73152"/>
+          <a:lstStyle/>
+          <a:p>
+            <a:pPr algn="ctr">
+              <a:lnSpc>
+                <a:spcPct val="100000"/>
+              </a:lnSpc>
+              <a:spcAft>
+                <a:spcPts val="0"/>
+              </a:spcAft>
+              <a:defRPr sz="1700" b="0">
+                <a:solidFill>
+                  <a:srgbClr val="1F3A5F"/>
+                </a:solidFill>
+                <a:latin typeface="Calibri"/>
+              </a:defRPr>
+            </a:pPr>
+            <a:r>
+              <a:rPr sz="1700" b="0">
+                <a:solidFill>
+                  <a:srgbClr val="1F3A5F"/>
+                </a:solidFill>
+                <a:latin typeface="Calibri"/>
+              </a:rPr>
+              <a:t>Tabs and Config.h</a:t>
+            </a:r>
+          </a:p>
+        </p:txBody>
+      </p:sp>
+      <p:sp>
+        <p:nvSpPr>
+          <p:cNvPr id="10" name="TextBox 9"/>
+          <p:cNvSpPr txBox="1"/>
+          <p:nvPr/>
+        </p:nvSpPr>
+        <p:spPr>
+          <a:xfrm>
+            <a:off x="4280306" y="3520440"/>
+            <a:ext cx="3631082" cy="310896"/>
+          </a:xfrm>
+          <a:prstGeom prst="rect">
+            <a:avLst/>
+          </a:prstGeom>
+          <a:noFill/>
+        </p:spPr>
+        <p:txBody>
+          <a:bodyPr wrap="square" lIns="0" tIns="0" rIns="0" bIns="0">
+            <a:spAutoFit/>
+          </a:bodyPr>
+          <a:lstStyle/>
+          <a:p>
+            <a:pPr algn="ctr">
+              <a:lnSpc>
+                <a:spcPct val="100000"/>
+              </a:lnSpc>
+              <a:spcAft>
+                <a:spcPts val="200"/>
+              </a:spcAft>
+              <a:defRPr sz="1100" b="1">
+                <a:solidFill>
+                  <a:srgbClr val="0E7C86"/>
+                </a:solidFill>
+                <a:latin typeface="Calibri"/>
+              </a:defRPr>
+            </a:pPr>
+            <a:r>
+              <a:rPr sz="1100" b="1">
+                <a:solidFill>
+                  <a:srgbClr val="0E7C86"/>
+                </a:solidFill>
+                <a:latin typeface="Calibri"/>
+              </a:rPr>
+              <a:t>done</a:t>
+            </a:r>
+          </a:p>
+        </p:txBody>
+      </p:sp>
+      <p:sp>
+        <p:nvSpPr>
+          <p:cNvPr id="11" name="Rounded Rectangle 10"/>
+          <p:cNvSpPr/>
+          <p:nvPr/>
+        </p:nvSpPr>
+        <p:spPr>
+          <a:xfrm>
+            <a:off x="8057692" y="3886200"/>
+            <a:ext cx="3631082" cy="1325880"/>
+          </a:xfrm>
+          <a:prstGeom prst="roundRect">
+            <a:avLst>
+              <a:gd name="adj" fmla="val 8000"/>
+            </a:avLst>
+          </a:prstGeom>
+          <a:solidFill>
             <a:srgbClr val="D6ECEE"/>
           </a:solidFill>
           <a:ln w="25400">
@@ -6376,20 +7919,20 @@
                 </a:solidFill>
                 <a:latin typeface="Calibri"/>
               </a:rPr>
-              <a:t>Tabs and Config.h</a:t>
-            </a:r>
-          </a:p>
-        </p:txBody>
-      </p:sp>
-      <p:sp>
-        <p:nvSpPr>
-          <p:cNvPr id="10" name="TextBox 9"/>
+              <a:t>The console</a:t>
+            </a:r>
+          </a:p>
+        </p:txBody>
+      </p:sp>
+      <p:sp>
+        <p:nvSpPr>
+          <p:cNvPr id="12" name="TextBox 11"/>
           <p:cNvSpPr txBox="1"/>
           <p:nvPr/>
         </p:nvSpPr>
         <p:spPr>
           <a:xfrm>
-            <a:off x="4280306" y="3520440"/>
+            <a:off x="8057692" y="3520440"/>
             <a:ext cx="3631082" cy="310896"/>
           </a:xfrm>
           <a:prstGeom prst="rect">
@@ -6425,76 +7968,6 @@
                 <a:latin typeface="Calibri"/>
               </a:rPr>
               <a:t>NOW</a:t>
-            </a:r>
-          </a:p>
-        </p:txBody>
-      </p:sp>
-      <p:sp>
-        <p:nvSpPr>
-          <p:cNvPr id="11" name="Rounded Rectangle 10"/>
-          <p:cNvSpPr/>
-          <p:nvPr/>
-        </p:nvSpPr>
-        <p:spPr>
-          <a:xfrm>
-            <a:off x="8057692" y="3886200"/>
-            <a:ext cx="3631082" cy="1325880"/>
-          </a:xfrm>
-          <a:prstGeom prst="roundRect">
-            <a:avLst>
-              <a:gd name="adj" fmla="val 8000"/>
-            </a:avLst>
-          </a:prstGeom>
-          <a:solidFill>
-            <a:srgbClr val="FFFFFF"/>
-          </a:solidFill>
-          <a:ln w="12700">
-            <a:solidFill>
-              <a:srgbClr val="C8D2DE"/>
-            </a:solidFill>
-          </a:ln>
-          <a:effectLst/>
-        </p:spPr>
-        <p:style>
-          <a:lnRef idx="1">
-            <a:schemeClr val="accent1"/>
-          </a:lnRef>
-          <a:fillRef idx="3">
-            <a:schemeClr val="accent1"/>
-          </a:fillRef>
-          <a:effectRef idx="2">
-            <a:schemeClr val="accent1"/>
-          </a:effectRef>
-          <a:fontRef idx="minor">
-            <a:schemeClr val="lt1"/>
-          </a:fontRef>
-        </p:style>
-        <p:txBody>
-          <a:bodyPr rtlCol="0" anchor="ctr" wrap="square" lIns="73152" rIns="73152"/>
-          <a:lstStyle/>
-          <a:p>
-            <a:pPr algn="ctr">
-              <a:lnSpc>
-                <a:spcPct val="100000"/>
-              </a:lnSpc>
-              <a:spcAft>
-                <a:spcPts val="0"/>
-              </a:spcAft>
-              <a:defRPr sz="1700" b="0">
-                <a:solidFill>
-                  <a:srgbClr val="666666"/>
-                </a:solidFill>
-                <a:latin typeface="Calibri"/>
-              </a:defRPr>
-            </a:pPr>
-            <a:r>
-              <a:rPr sz="1700" b="0">
-                <a:solidFill>
-                  <a:srgbClr val="666666"/>
-                </a:solidFill>
-                <a:latin typeface="Calibri"/>
-              </a:rPr>
-              <a:t>The console</a:t>
             </a:r>
           </a:p>
         </p:txBody>
@@ -6507,7 +7980,7 @@
 </p:sld>
 </file>
 
-<file path=ppt/slides/slide11.xml><?xml version="1.0" encoding="utf-8"?>
+<file path=ppt/slides/slide13.xml><?xml version="1.0" encoding="utf-8"?>
 <p:sld xmlns:a="http://schemas.openxmlformats.org/drawingml/2006/main" xmlns:p="http://schemas.openxmlformats.org/presentationml/2006/main" xmlns:r="http://schemas.openxmlformats.org/officeDocument/2006/relationships">
   <p:cSld>
     <p:spTree>
@@ -6558,7 +8031,7 @@
                 </a:solidFill>
                 <a:latin typeface="Calibri"/>
               </a:rPr>
-              <a:t>Do it now  -  three files, one program</a:t>
+              <a:t>Why a console changes what a vehicle is</a:t>
             </a:r>
           </a:p>
         </p:txBody>
@@ -6698,94 +8171,21 @@
                 </a:solidFill>
                 <a:latin typeface="Calibri"/>
               </a:rPr>
-              <a:t>10</a:t>
-            </a:r>
-          </a:p>
-        </p:txBody>
-      </p:sp>
-      <p:sp>
-        <p:nvSpPr>
-          <p:cNvPr id="6" name="Rounded Rectangle 5"/>
-          <p:cNvSpPr/>
+              <a:t>12</a:t>
+            </a:r>
+          </a:p>
+        </p:txBody>
+      </p:sp>
+      <p:sp>
+        <p:nvSpPr>
+          <p:cNvPr id="6" name="TextBox 5"/>
+          <p:cNvSpPr txBox="1"/>
           <p:nvPr/>
         </p:nvSpPr>
         <p:spPr>
           <a:xfrm>
             <a:off x="502920" y="1188720"/>
             <a:ext cx="11185855" cy="530352"/>
-          </a:xfrm>
-          <a:prstGeom prst="roundRect">
-            <a:avLst>
-              <a:gd name="adj" fmla="val 4000"/>
-            </a:avLst>
-          </a:prstGeom>
-          <a:solidFill>
-            <a:srgbClr val="0E7C86"/>
-          </a:solidFill>
-          <a:ln>
-            <a:noFill/>
-          </a:ln>
-          <a:effectLst/>
-        </p:spPr>
-        <p:style>
-          <a:lnRef idx="1">
-            <a:schemeClr val="accent1"/>
-          </a:lnRef>
-          <a:fillRef idx="3">
-            <a:schemeClr val="accent1"/>
-          </a:fillRef>
-          <a:effectRef idx="2">
-            <a:schemeClr val="accent1"/>
-          </a:effectRef>
-          <a:fontRef idx="minor">
-            <a:schemeClr val="lt1"/>
-          </a:fontRef>
-        </p:style>
-        <p:txBody>
-          <a:bodyPr rtlCol="0" anchor="ctr" wrap="square" lIns="182880"/>
-          <a:lstStyle/>
-          <a:p>
-            <a:pPr algn="l"/>
-            <a:r>
-              <a:rPr sz="1300" b="1">
-                <a:solidFill>
-                  <a:srgbClr val="FFFFFF"/>
-                </a:solidFill>
-                <a:latin typeface="Calibri"/>
-              </a:rPr>
-              <a:t>UPLOAD AND RUN:   </a:t>
-            </a:r>
-            <a:r>
-              <a:rPr sz="1500" b="1">
-                <a:solidFill>
-                  <a:srgbClr val="FFFFFF"/>
-                </a:solidFill>
-                <a:latin typeface="Consolas"/>
-              </a:rPr>
-              <a:t>a1a_tabs_and_config</a:t>
-            </a:r>
-            <a:r>
-              <a:rPr sz="1200">
-                <a:solidFill>
-                  <a:srgbClr val="FFFFFF"/>
-                </a:solidFill>
-                <a:latin typeface="Calibri"/>
-              </a:rPr>
-              <a:t>     (30 minutes)</a:t>
-            </a:r>
-          </a:p>
-        </p:txBody>
-      </p:sp>
-      <p:sp>
-        <p:nvSpPr>
-          <p:cNvPr id="7" name="TextBox 6"/>
-          <p:cNvSpPr txBox="1"/>
-          <p:nvPr/>
-        </p:nvSpPr>
-        <p:spPr>
-          <a:xfrm>
-            <a:off x="502920" y="1901952"/>
-            <a:ext cx="6249137" cy="4361688"/>
           </a:xfrm>
           <a:prstGeom prst="rect">
             <a:avLst/>
@@ -6803,162 +8203,37 @@
                 <a:spcPct val="100000"/>
               </a:lnSpc>
               <a:spcAft>
-                <a:spcPts val="800"/>
-              </a:spcAft>
-              <a:defRPr sz="1800" b="0">
-                <a:solidFill>
-                  <a:srgbClr val="222222"/>
-                </a:solidFill>
-                <a:latin typeface="Calibri"/>
-              </a:defRPr>
-            </a:pPr>
-            <a:r>
-              <a:rPr sz="1800" b="0">
-                <a:solidFill>
-                  <a:srgbClr val="222222"/>
-                </a:solidFill>
-                <a:latin typeface="Calibri"/>
-              </a:rPr>
-              <a:t>1.  Open it. Look at the tab bar: the sketch, Config.h, Blinker.ino.</a:t>
-            </a:r>
-          </a:p>
-          <a:p>
-            <a:pPr algn="l">
-              <a:lnSpc>
-                <a:spcPct val="100000"/>
-              </a:lnSpc>
-              <a:spcAft>
-                <a:spcPts val="800"/>
-              </a:spcAft>
-              <a:defRPr sz="1800" b="0">
-                <a:solidFill>
-                  <a:srgbClr val="222222"/>
-                </a:solidFill>
-                <a:latin typeface="Calibri"/>
-              </a:defRPr>
-            </a:pPr>
-            <a:r>
-              <a:rPr sz="1800" b="0">
-                <a:solidFill>
-                  <a:srgbClr val="222222"/>
-                </a:solidFill>
-                <a:latin typeface="Calibri"/>
-              </a:rPr>
-              <a:t>2.  Upload it. It blinks and reports, and swaps speed every 5 s.</a:t>
-            </a:r>
-          </a:p>
-          <a:p>
-            <a:pPr algn="l">
-              <a:lnSpc>
-                <a:spcPct val="100000"/>
-              </a:lnSpc>
-              <a:spcAft>
-                <a:spcPts val="800"/>
-              </a:spcAft>
-              <a:defRPr sz="1800" b="0">
-                <a:solidFill>
-                  <a:srgbClr val="222222"/>
-                </a:solidFill>
-                <a:latin typeface="Calibri"/>
-              </a:defRPr>
-            </a:pPr>
-            <a:r>
-              <a:rPr sz="1800" b="0">
-                <a:solidFill>
-                  <a:srgbClr val="222222"/>
-                </a:solidFill>
-                <a:latin typeface="Calibri"/>
-              </a:rPr>
-              <a:t>3.  Change BLINK_SLOW_MS in Config.h. Notice you touched neither .ino file.</a:t>
-            </a:r>
-          </a:p>
-          <a:p>
-            <a:pPr algn="l">
-              <a:lnSpc>
-                <a:spcPct val="100000"/>
-              </a:lnSpc>
-              <a:spcAft>
-                <a:spcPts val="800"/>
-              </a:spcAft>
-              <a:defRPr sz="1800" b="0">
-                <a:solidFill>
-                  <a:srgbClr val="222222"/>
-                </a:solidFill>
-                <a:latin typeface="Calibri"/>
-              </a:defRPr>
-            </a:pPr>
-            <a:r>
-              <a:rPr sz="1800" b="0">
-                <a:solidFill>
-                  <a:srgbClr val="222222"/>
-                </a:solidFill>
-                <a:latin typeface="Calibri"/>
-              </a:rPr>
-              <a:t>4.  Add a fourth file, Reporter.ino, with a function in it. Call it from loop(). Notice you declared it nowhere.</a:t>
-            </a:r>
-          </a:p>
-          <a:p>
-            <a:pPr algn="l">
-              <a:lnSpc>
-                <a:spcPct val="100000"/>
-              </a:lnSpc>
-              <a:spcAft>
-                <a:spcPts val="800"/>
-              </a:spcAft>
-              <a:defRPr sz="1800" b="0">
-                <a:solidFill>
-                  <a:srgbClr val="222222"/>
-                </a:solidFill>
-                <a:latin typeface="Calibri"/>
-              </a:defRPr>
-            </a:pPr>
-            <a:r>
-              <a:rPr sz="1800" b="0">
-                <a:solidFill>
-                  <a:srgbClr val="222222"/>
-                </a:solidFill>
-                <a:latin typeface="Calibri"/>
-              </a:rPr>
-              <a:t>5.  Now MOVE the BlinkMode enum out of Config.h and into Blinker.ino. Compile. READ THE ERROR CAREFULLY.</a:t>
-            </a:r>
-          </a:p>
-          <a:p>
-            <a:pPr algn="l">
-              <a:lnSpc>
-                <a:spcPct val="100000"/>
-              </a:lnSpc>
-              <a:spcAft>
-                <a:spcPts val="800"/>
-              </a:spcAft>
-              <a:defRPr sz="1800" b="0">
-                <a:solidFill>
-                  <a:srgbClr val="222222"/>
-                </a:solidFill>
-                <a:latin typeface="Calibri"/>
-              </a:defRPr>
-            </a:pPr>
-            <a:r>
-              <a:rPr sz="1800" b="0">
-                <a:solidFill>
-                  <a:srgbClr val="222222"/>
-                </a:solidFill>
-                <a:latin typeface="Calibri"/>
-              </a:rPr>
-              <a:t>6.  Put it back.</a:t>
-            </a:r>
-          </a:p>
-        </p:txBody>
-      </p:sp>
-      <p:sp>
-        <p:nvSpPr>
-          <p:cNvPr id="8" name="TextBox 7"/>
+                <a:spcPts val="600"/>
+              </a:spcAft>
+              <a:defRPr sz="1900" b="1">
+                <a:solidFill>
+                  <a:srgbClr val="0E7C86"/>
+                </a:solidFill>
+                <a:latin typeface="Calibri"/>
+              </a:defRPr>
+            </a:pPr>
+            <a:r>
+              <a:rPr sz="1900" b="1">
+                <a:solidFill>
+                  <a:srgbClr val="0E7C86"/>
+                </a:solidFill>
+                <a:latin typeface="Calibri"/>
+              </a:rPr>
+              <a:t>From opaque binary to something you can ask questions</a:t>
+            </a:r>
+          </a:p>
+        </p:txBody>
+      </p:sp>
+      <p:sp>
+        <p:nvSpPr>
+          <p:cNvPr id="7" name="TextBox 6"/>
           <p:cNvSpPr txBox="1"/>
           <p:nvPr/>
         </p:nvSpPr>
         <p:spPr>
           <a:xfrm>
-            <a:off x="7163537" y="1901952"/>
-            <a:ext cx="4525238" cy="365760"/>
+            <a:off x="502920" y="1755648"/>
+            <a:ext cx="11185855" cy="4507992"/>
           </a:xfrm>
           <a:prstGeom prst="rect">
             <a:avLst/>
@@ -6976,168 +8251,181 @@
                 <a:spcPct val="100000"/>
               </a:lnSpc>
               <a:spcAft>
-                <a:spcPts val="200"/>
-              </a:spcAft>
-              <a:defRPr sz="1800" b="1">
-                <a:solidFill>
-                  <a:srgbClr val="0E7C86"/>
-                </a:solidFill>
-                <a:latin typeface="Calibri"/>
-              </a:defRPr>
-            </a:pPr>
-            <a:r>
-              <a:rPr sz="1800" b="1">
-                <a:solidFill>
-                  <a:srgbClr val="0E7C86"/>
-                </a:solidFill>
-                <a:latin typeface="Calibri"/>
-              </a:rPr>
-              <a:t>What you should see</a:t>
-            </a:r>
-          </a:p>
-        </p:txBody>
-      </p:sp>
-      <p:sp>
-        <p:nvSpPr>
-          <p:cNvPr id="9" name="TextBox 8"/>
-          <p:cNvSpPr txBox="1"/>
-          <p:nvPr/>
-        </p:nvSpPr>
-        <p:spPr>
-          <a:xfrm>
-            <a:off x="7163537" y="2304288"/>
-            <a:ext cx="4525238" cy="1672143"/>
-          </a:xfrm>
-          <a:prstGeom prst="rect">
-            <a:avLst/>
-          </a:prstGeom>
-          <a:noFill/>
-        </p:spPr>
-        <p:txBody>
-          <a:bodyPr wrap="square" lIns="0" tIns="0" rIns="0" bIns="0">
-            <a:spAutoFit/>
-          </a:bodyPr>
-          <a:lstStyle/>
+                <a:spcPts val="600"/>
+              </a:spcAft>
+              <a:defRPr sz="1800" b="0">
+                <a:solidFill>
+                  <a:srgbClr val="222222"/>
+                </a:solidFill>
+                <a:latin typeface="Calibri"/>
+              </a:defRPr>
+            </a:pPr>
+            <a:r>
+              <a:rPr sz="1800" b="0">
+                <a:solidFill>
+                  <a:srgbClr val="222222"/>
+                </a:solidFill>
+                <a:latin typeface="Calibri"/>
+              </a:rPr>
+              <a:t>A compiled binary is opaque. You can see what it does, not what it thinks.</a:t>
+            </a:r>
+          </a:p>
           <a:p>
             <a:pPr algn="l">
               <a:lnSpc>
                 <a:spcPct val="100000"/>
               </a:lnSpc>
               <a:spcAft>
-                <a:spcPts val="300"/>
-              </a:spcAft>
-              <a:defRPr sz="2500" b="0">
-                <a:solidFill>
-                  <a:srgbClr val="222222"/>
-                </a:solidFill>
-                <a:latin typeface="Calibri"/>
-              </a:defRPr>
-            </a:pPr>
-            <a:r>
-              <a:rPr sz="2500" b="0">
-                <a:solidFill>
-                  <a:srgbClr val="222222"/>
-                </a:solidFill>
-                <a:latin typeface="Calibri"/>
-              </a:rPr>
-              <a:t>Step 5 fails with an error about BlinkMode not naming a type, pointing at a line you did not write.</a:t>
-            </a:r>
-          </a:p>
-        </p:txBody>
-      </p:sp>
-      <p:sp>
-        <p:nvSpPr>
-          <p:cNvPr id="10" name="TextBox 9"/>
-          <p:cNvSpPr txBox="1"/>
-          <p:nvPr/>
-        </p:nvSpPr>
-        <p:spPr>
-          <a:xfrm>
-            <a:off x="7163537" y="4049583"/>
-            <a:ext cx="4525238" cy="365760"/>
-          </a:xfrm>
-          <a:prstGeom prst="rect">
-            <a:avLst/>
-          </a:prstGeom>
-          <a:noFill/>
-        </p:spPr>
-        <p:txBody>
-          <a:bodyPr wrap="square" lIns="0" tIns="0" rIns="0" bIns="0">
-            <a:spAutoFit/>
-          </a:bodyPr>
-          <a:lstStyle/>
+                <a:spcPts val="600"/>
+              </a:spcAft>
+              <a:defRPr sz="900" b="0">
+                <a:solidFill>
+                  <a:srgbClr val="222222"/>
+                </a:solidFill>
+                <a:latin typeface="Calibri"/>
+              </a:defRPr>
+            </a:pPr>
+          </a:p>
           <a:p>
             <a:pPr algn="l">
               <a:lnSpc>
                 <a:spcPct val="100000"/>
               </a:lnSpc>
               <a:spcAft>
-                <a:spcPts val="200"/>
-              </a:spcAft>
-              <a:defRPr sz="1800" b="1">
-                <a:solidFill>
-                  <a:srgbClr val="0E7C86"/>
-                </a:solidFill>
-                <a:latin typeface="Calibri"/>
-              </a:defRPr>
-            </a:pPr>
-            <a:r>
-              <a:rPr sz="1800" b="1">
-                <a:solidFill>
-                  <a:srgbClr val="0E7C86"/>
-                </a:solidFill>
-                <a:latin typeface="Calibri"/>
-              </a:rPr>
-              <a:t>Answer these</a:t>
-            </a:r>
-          </a:p>
-        </p:txBody>
-      </p:sp>
-      <p:sp>
-        <p:nvSpPr>
-          <p:cNvPr id="11" name="TextBox 10"/>
-          <p:cNvSpPr txBox="1"/>
-          <p:nvPr/>
-        </p:nvSpPr>
-        <p:spPr>
-          <a:xfrm>
-            <a:off x="7163537" y="4451919"/>
-            <a:ext cx="4525238" cy="1811720"/>
-          </a:xfrm>
-          <a:prstGeom prst="rect">
-            <a:avLst/>
-          </a:prstGeom>
-          <a:noFill/>
-        </p:spPr>
-        <p:txBody>
-          <a:bodyPr wrap="square" lIns="0" tIns="0" rIns="0" bIns="0">
-            <a:spAutoFit/>
-          </a:bodyPr>
-          <a:lstStyle/>
+                <a:spcPts val="600"/>
+              </a:spcAft>
+              <a:defRPr sz="1800" b="0">
+                <a:solidFill>
+                  <a:srgbClr val="222222"/>
+                </a:solidFill>
+                <a:latin typeface="Calibri"/>
+              </a:defRPr>
+            </a:pPr>
+            <a:r>
+              <a:rPr sz="1800" b="0">
+                <a:solidFill>
+                  <a:srgbClr val="222222"/>
+                </a:solidFill>
+                <a:latin typeface="Calibri"/>
+              </a:rPr>
+              <a:t>A serial console turns it into something you can interrogate:</a:t>
+            </a:r>
+          </a:p>
+          <a:p>
+            <a:pPr lvl="1" algn="l">
+              <a:lnSpc>
+                <a:spcPct val="100000"/>
+              </a:lnSpc>
+              <a:spcAft>
+                <a:spcPts val="600"/>
+              </a:spcAft>
+              <a:defRPr sz="1800" b="0">
+                <a:solidFill>
+                  <a:srgbClr val="222222"/>
+                </a:solidFill>
+                <a:latin typeface="Calibri"/>
+              </a:defRPr>
+            </a:pPr>
+            <a:r>
+              <a:rPr sz="1800" b="0">
+                <a:solidFill>
+                  <a:srgbClr val="222222"/>
+                </a:solidFill>
+                <a:latin typeface="Calibri"/>
+              </a:rPr>
+              <a:t>help      what can this thing do</a:t>
+            </a:r>
+          </a:p>
+          <a:p>
+            <a:pPr lvl="1" algn="l">
+              <a:lnSpc>
+                <a:spcPct val="100000"/>
+              </a:lnSpc>
+              <a:spcAft>
+                <a:spcPts val="600"/>
+              </a:spcAft>
+              <a:defRPr sz="1800" b="0">
+                <a:solidFill>
+                  <a:srgbClr val="222222"/>
+                </a:solidFill>
+                <a:latin typeface="Calibri"/>
+              </a:defRPr>
+            </a:pPr>
+            <a:r>
+              <a:rPr sz="1800" b="0">
+                <a:solidFill>
+                  <a:srgbClr val="222222"/>
+                </a:solidFill>
+                <a:latin typeface="Calibri"/>
+              </a:rPr>
+              <a:t>diag      what does it think is happening right now</a:t>
+            </a:r>
+          </a:p>
+          <a:p>
+            <a:pPr lvl="1" algn="l">
+              <a:lnSpc>
+                <a:spcPct val="100000"/>
+              </a:lnSpc>
+              <a:spcAft>
+                <a:spcPts val="600"/>
+              </a:spcAft>
+              <a:defRPr sz="1800" b="0">
+                <a:solidFill>
+                  <a:srgbClr val="222222"/>
+                </a:solidFill>
+                <a:latin typeface="Calibri"/>
+              </a:defRPr>
+            </a:pPr>
+            <a:r>
+              <a:rPr sz="1800" b="0">
+                <a:solidFill>
+                  <a:srgbClr val="222222"/>
+                </a:solidFill>
+                <a:latin typeface="Calibri"/>
+              </a:rPr>
+              <a:t>pair      change its behavior without a laptop full of toolchains</a:t>
+            </a:r>
+          </a:p>
+          <a:p>
+            <a:pPr lvl="1" algn="l">
+              <a:lnSpc>
+                <a:spcPct val="100000"/>
+              </a:lnSpc>
+              <a:spcAft>
+                <a:spcPts val="600"/>
+              </a:spcAft>
+              <a:defRPr sz="1800" b="0">
+                <a:solidFill>
+                  <a:srgbClr val="222222"/>
+                </a:solidFill>
+                <a:latin typeface="Calibri"/>
+              </a:defRPr>
+            </a:pPr>
+            <a:r>
+              <a:rPr sz="1800" b="0">
+                <a:solidFill>
+                  <a:srgbClr val="222222"/>
+                </a:solidFill>
+                <a:latin typeface="Calibri"/>
+              </a:rPr>
+              <a:t>dynamics  retune the deadzones between races</a:t>
+            </a:r>
+          </a:p>
           <a:p>
             <a:pPr algn="l">
               <a:lnSpc>
                 <a:spcPct val="100000"/>
               </a:lnSpc>
               <a:spcAft>
-                <a:spcPts val="300"/>
-              </a:spcAft>
-              <a:defRPr sz="2100" b="0">
-                <a:solidFill>
-                  <a:srgbClr val="222222"/>
-                </a:solidFill>
-                <a:latin typeface="Calibri"/>
-              </a:defRPr>
-            </a:pPr>
-            <a:r>
-              <a:rPr sz="2100" b="0">
-                <a:solidFill>
-                  <a:srgbClr val="222222"/>
-                </a:solidFill>
-                <a:latin typeface="Calibri"/>
-              </a:rPr>
-              <a:t>Whose line is the error actually on?</a:t>
-            </a:r>
+                <a:spcPts val="600"/>
+              </a:spcAft>
+              <a:defRPr sz="900" b="0">
+                <a:solidFill>
+                  <a:srgbClr val="222222"/>
+                </a:solidFill>
+                <a:latin typeface="Calibri"/>
+              </a:defRPr>
+            </a:pPr>
           </a:p>
           <a:p>
             <a:pPr algn="l">
@@ -7145,23 +8433,64 @@
                 <a:spcPct val="100000"/>
               </a:lnSpc>
               <a:spcAft>
-                <a:spcPts val="300"/>
-              </a:spcAft>
-              <a:defRPr sz="2100" b="0">
-                <a:solidFill>
-                  <a:srgbClr val="222222"/>
-                </a:solidFill>
-                <a:latin typeface="Calibri"/>
-              </a:defRPr>
-            </a:pPr>
-            <a:r>
-              <a:rPr sz="2100" b="0">
-                <a:solidFill>
-                  <a:srgbClr val="222222"/>
-                </a:solidFill>
-                <a:latin typeface="Calibri"/>
-              </a:rPr>
-              <a:t>Why does moving a FUNCTION between tabs work fine, but moving a TYPE does not?</a:t>
+                <a:spcPts val="600"/>
+              </a:spcAft>
+              <a:defRPr sz="1800" b="0">
+                <a:solidFill>
+                  <a:srgbClr val="222222"/>
+                </a:solidFill>
+                <a:latin typeface="Calibri"/>
+              </a:defRPr>
+            </a:pPr>
+            <a:r>
+              <a:rPr sz="1800" b="0">
+                <a:solidFill>
+                  <a:srgbClr val="222222"/>
+                </a:solidFill>
+                <a:latin typeface="Calibri"/>
+              </a:rPr>
+              <a:t>The practical difference: at a track event, tuning a vehicle stops being an edit-compile-upload cycle and becomes a conversation. On Op 12 those settings then go to EEPROM, so the tuning survives.</a:t>
+            </a:r>
+          </a:p>
+          <a:p>
+            <a:pPr algn="l">
+              <a:lnSpc>
+                <a:spcPct val="100000"/>
+              </a:lnSpc>
+              <a:spcAft>
+                <a:spcPts val="600"/>
+              </a:spcAft>
+              <a:defRPr sz="900" b="0">
+                <a:solidFill>
+                  <a:srgbClr val="222222"/>
+                </a:solidFill>
+                <a:latin typeface="Calibri"/>
+              </a:defRPr>
+            </a:pPr>
+          </a:p>
+          <a:p>
+            <a:pPr algn="l">
+              <a:lnSpc>
+                <a:spcPct val="100000"/>
+              </a:lnSpc>
+              <a:spcAft>
+                <a:spcPts val="600"/>
+              </a:spcAft>
+              <a:defRPr sz="1800" b="0">
+                <a:solidFill>
+                  <a:srgbClr val="222222"/>
+                </a:solidFill>
+                <a:latin typeface="Calibri"/>
+              </a:defRPr>
+            </a:pPr>
+            <a:r>
+              <a:rPr sz="1800" b="0">
+                <a:solidFill>
+                  <a:srgbClr val="222222"/>
+                </a:solidFill>
+                <a:latin typeface="Calibri"/>
+              </a:rPr>
+              <a:t>This is not a toy idea. Industrial controllers, network switches and flight computers all have one, for exactly this reason.</a:t>
             </a:r>
           </a:p>
         </p:txBody>
@@ -7174,7 +8503,7 @@
 </p:sld>
 </file>
 
-<file path=ppt/slides/slide12.xml><?xml version="1.0" encoding="utf-8"?>
+<file path=ppt/slides/slide14.xml><?xml version="1.0" encoding="utf-8"?>
 <p:sld xmlns:a="http://schemas.openxmlformats.org/drawingml/2006/main" xmlns:p="http://schemas.openxmlformats.org/presentationml/2006/main" xmlns:r="http://schemas.openxmlformats.org/officeDocument/2006/relationships">
   <p:cSld>
     <p:spTree>
@@ -7225,7 +8554,7 @@
                 </a:solidFill>
                 <a:latin typeface="Calibri"/>
               </a:rPr>
-              <a:t>Why a console changes what a vehicle is</a:t>
+              <a:t>Reading a line without stopping the vehicle</a:t>
             </a:r>
           </a:p>
         </p:txBody>
@@ -7365,530 +8694,7 @@
                 </a:solidFill>
                 <a:latin typeface="Calibri"/>
               </a:rPr>
-              <a:t>11</a:t>
-            </a:r>
-          </a:p>
-        </p:txBody>
-      </p:sp>
-      <p:sp>
-        <p:nvSpPr>
-          <p:cNvPr id="6" name="TextBox 5"/>
-          <p:cNvSpPr txBox="1"/>
-          <p:nvPr/>
-        </p:nvSpPr>
-        <p:spPr>
-          <a:xfrm>
-            <a:off x="502920" y="1188720"/>
-            <a:ext cx="11185855" cy="530352"/>
-          </a:xfrm>
-          <a:prstGeom prst="rect">
-            <a:avLst/>
-          </a:prstGeom>
-          <a:noFill/>
-        </p:spPr>
-        <p:txBody>
-          <a:bodyPr wrap="square" lIns="0" tIns="0" rIns="0" bIns="0">
-            <a:spAutoFit/>
-          </a:bodyPr>
-          <a:lstStyle/>
-          <a:p>
-            <a:pPr algn="l">
-              <a:lnSpc>
-                <a:spcPct val="100000"/>
-              </a:lnSpc>
-              <a:spcAft>
-                <a:spcPts val="600"/>
-              </a:spcAft>
-              <a:defRPr sz="1900" b="1">
-                <a:solidFill>
-                  <a:srgbClr val="0E7C86"/>
-                </a:solidFill>
-                <a:latin typeface="Calibri"/>
-              </a:defRPr>
-            </a:pPr>
-            <a:r>
-              <a:rPr sz="1900" b="1">
-                <a:solidFill>
-                  <a:srgbClr val="0E7C86"/>
-                </a:solidFill>
-                <a:latin typeface="Calibri"/>
-              </a:rPr>
-              <a:t>From opaque binary to something you can ask questions</a:t>
-            </a:r>
-          </a:p>
-        </p:txBody>
-      </p:sp>
-      <p:sp>
-        <p:nvSpPr>
-          <p:cNvPr id="7" name="TextBox 6"/>
-          <p:cNvSpPr txBox="1"/>
-          <p:nvPr/>
-        </p:nvSpPr>
-        <p:spPr>
-          <a:xfrm>
-            <a:off x="502920" y="1755648"/>
-            <a:ext cx="11185855" cy="4507992"/>
-          </a:xfrm>
-          <a:prstGeom prst="rect">
-            <a:avLst/>
-          </a:prstGeom>
-          <a:noFill/>
-        </p:spPr>
-        <p:txBody>
-          <a:bodyPr wrap="square" lIns="0" tIns="0" rIns="0" bIns="0">
-            <a:spAutoFit/>
-          </a:bodyPr>
-          <a:lstStyle/>
-          <a:p>
-            <a:pPr algn="l">
-              <a:lnSpc>
-                <a:spcPct val="100000"/>
-              </a:lnSpc>
-              <a:spcAft>
-                <a:spcPts val="600"/>
-              </a:spcAft>
-              <a:defRPr sz="1800" b="0">
-                <a:solidFill>
-                  <a:srgbClr val="222222"/>
-                </a:solidFill>
-                <a:latin typeface="Calibri"/>
-              </a:defRPr>
-            </a:pPr>
-            <a:r>
-              <a:rPr sz="1800" b="0">
-                <a:solidFill>
-                  <a:srgbClr val="222222"/>
-                </a:solidFill>
-                <a:latin typeface="Calibri"/>
-              </a:rPr>
-              <a:t>A compiled binary is opaque. You can see what it does, not what it thinks.</a:t>
-            </a:r>
-          </a:p>
-          <a:p>
-            <a:pPr algn="l">
-              <a:lnSpc>
-                <a:spcPct val="100000"/>
-              </a:lnSpc>
-              <a:spcAft>
-                <a:spcPts val="600"/>
-              </a:spcAft>
-              <a:defRPr sz="900" b="0">
-                <a:solidFill>
-                  <a:srgbClr val="222222"/>
-                </a:solidFill>
-                <a:latin typeface="Calibri"/>
-              </a:defRPr>
-            </a:pPr>
-          </a:p>
-          <a:p>
-            <a:pPr algn="l">
-              <a:lnSpc>
-                <a:spcPct val="100000"/>
-              </a:lnSpc>
-              <a:spcAft>
-                <a:spcPts val="600"/>
-              </a:spcAft>
-              <a:defRPr sz="1800" b="0">
-                <a:solidFill>
-                  <a:srgbClr val="222222"/>
-                </a:solidFill>
-                <a:latin typeface="Calibri"/>
-              </a:defRPr>
-            </a:pPr>
-            <a:r>
-              <a:rPr sz="1800" b="0">
-                <a:solidFill>
-                  <a:srgbClr val="222222"/>
-                </a:solidFill>
-                <a:latin typeface="Calibri"/>
-              </a:rPr>
-              <a:t>A serial console turns it into something you can interrogate:</a:t>
-            </a:r>
-          </a:p>
-          <a:p>
-            <a:pPr lvl="1" algn="l">
-              <a:lnSpc>
-                <a:spcPct val="100000"/>
-              </a:lnSpc>
-              <a:spcAft>
-                <a:spcPts val="600"/>
-              </a:spcAft>
-              <a:defRPr sz="1800" b="0">
-                <a:solidFill>
-                  <a:srgbClr val="222222"/>
-                </a:solidFill>
-                <a:latin typeface="Calibri"/>
-              </a:defRPr>
-            </a:pPr>
-            <a:r>
-              <a:rPr sz="1800" b="0">
-                <a:solidFill>
-                  <a:srgbClr val="222222"/>
-                </a:solidFill>
-                <a:latin typeface="Calibri"/>
-              </a:rPr>
-              <a:t>help      what can this thing do</a:t>
-            </a:r>
-          </a:p>
-          <a:p>
-            <a:pPr lvl="1" algn="l">
-              <a:lnSpc>
-                <a:spcPct val="100000"/>
-              </a:lnSpc>
-              <a:spcAft>
-                <a:spcPts val="600"/>
-              </a:spcAft>
-              <a:defRPr sz="1800" b="0">
-                <a:solidFill>
-                  <a:srgbClr val="222222"/>
-                </a:solidFill>
-                <a:latin typeface="Calibri"/>
-              </a:defRPr>
-            </a:pPr>
-            <a:r>
-              <a:rPr sz="1800" b="0">
-                <a:solidFill>
-                  <a:srgbClr val="222222"/>
-                </a:solidFill>
-                <a:latin typeface="Calibri"/>
-              </a:rPr>
-              <a:t>diag      what does it think is happening right now</a:t>
-            </a:r>
-          </a:p>
-          <a:p>
-            <a:pPr lvl="1" algn="l">
-              <a:lnSpc>
-                <a:spcPct val="100000"/>
-              </a:lnSpc>
-              <a:spcAft>
-                <a:spcPts val="600"/>
-              </a:spcAft>
-              <a:defRPr sz="1800" b="0">
-                <a:solidFill>
-                  <a:srgbClr val="222222"/>
-                </a:solidFill>
-                <a:latin typeface="Calibri"/>
-              </a:defRPr>
-            </a:pPr>
-            <a:r>
-              <a:rPr sz="1800" b="0">
-                <a:solidFill>
-                  <a:srgbClr val="222222"/>
-                </a:solidFill>
-                <a:latin typeface="Calibri"/>
-              </a:rPr>
-              <a:t>pair      change its behavior without a laptop full of toolchains</a:t>
-            </a:r>
-          </a:p>
-          <a:p>
-            <a:pPr lvl="1" algn="l">
-              <a:lnSpc>
-                <a:spcPct val="100000"/>
-              </a:lnSpc>
-              <a:spcAft>
-                <a:spcPts val="600"/>
-              </a:spcAft>
-              <a:defRPr sz="1800" b="0">
-                <a:solidFill>
-                  <a:srgbClr val="222222"/>
-                </a:solidFill>
-                <a:latin typeface="Calibri"/>
-              </a:defRPr>
-            </a:pPr>
-            <a:r>
-              <a:rPr sz="1800" b="0">
-                <a:solidFill>
-                  <a:srgbClr val="222222"/>
-                </a:solidFill>
-                <a:latin typeface="Calibri"/>
-              </a:rPr>
-              <a:t>dynamics  retune the deadzones between races</a:t>
-            </a:r>
-          </a:p>
-          <a:p>
-            <a:pPr algn="l">
-              <a:lnSpc>
-                <a:spcPct val="100000"/>
-              </a:lnSpc>
-              <a:spcAft>
-                <a:spcPts val="600"/>
-              </a:spcAft>
-              <a:defRPr sz="900" b="0">
-                <a:solidFill>
-                  <a:srgbClr val="222222"/>
-                </a:solidFill>
-                <a:latin typeface="Calibri"/>
-              </a:defRPr>
-            </a:pPr>
-          </a:p>
-          <a:p>
-            <a:pPr algn="l">
-              <a:lnSpc>
-                <a:spcPct val="100000"/>
-              </a:lnSpc>
-              <a:spcAft>
-                <a:spcPts val="600"/>
-              </a:spcAft>
-              <a:defRPr sz="1800" b="0">
-                <a:solidFill>
-                  <a:srgbClr val="222222"/>
-                </a:solidFill>
-                <a:latin typeface="Calibri"/>
-              </a:defRPr>
-            </a:pPr>
-            <a:r>
-              <a:rPr sz="1800" b="0">
-                <a:solidFill>
-                  <a:srgbClr val="222222"/>
-                </a:solidFill>
-                <a:latin typeface="Calibri"/>
-              </a:rPr>
-              <a:t>The practical difference: at a track event, tuning a vehicle stops being an edit-compile-upload cycle and becomes a conversation. On Op 12 those settings then go to EEPROM, so the tuning survives.</a:t>
-            </a:r>
-          </a:p>
-          <a:p>
-            <a:pPr algn="l">
-              <a:lnSpc>
-                <a:spcPct val="100000"/>
-              </a:lnSpc>
-              <a:spcAft>
-                <a:spcPts val="600"/>
-              </a:spcAft>
-              <a:defRPr sz="900" b="0">
-                <a:solidFill>
-                  <a:srgbClr val="222222"/>
-                </a:solidFill>
-                <a:latin typeface="Calibri"/>
-              </a:defRPr>
-            </a:pPr>
-          </a:p>
-          <a:p>
-            <a:pPr algn="l">
-              <a:lnSpc>
-                <a:spcPct val="100000"/>
-              </a:lnSpc>
-              <a:spcAft>
-                <a:spcPts val="600"/>
-              </a:spcAft>
-              <a:defRPr sz="1800" b="0">
-                <a:solidFill>
-                  <a:srgbClr val="222222"/>
-                </a:solidFill>
-                <a:latin typeface="Calibri"/>
-              </a:defRPr>
-            </a:pPr>
-            <a:r>
-              <a:rPr sz="1800" b="0">
-                <a:solidFill>
-                  <a:srgbClr val="222222"/>
-                </a:solidFill>
-                <a:latin typeface="Calibri"/>
-              </a:rPr>
-              <a:t>This is not a toy idea. Industrial controllers, network switches and flight computers all have one, for exactly this reason.</a:t>
-            </a:r>
-          </a:p>
-        </p:txBody>
-      </p:sp>
-    </p:spTree>
-  </p:cSld>
-  <p:clrMapOvr>
-    <a:masterClrMapping/>
-  </p:clrMapOvr>
-</p:sld>
-</file>
-
-<file path=ppt/slides/slide13.xml><?xml version="1.0" encoding="utf-8"?>
-<p:sld xmlns:a="http://schemas.openxmlformats.org/drawingml/2006/main" xmlns:p="http://schemas.openxmlformats.org/presentationml/2006/main" xmlns:r="http://schemas.openxmlformats.org/officeDocument/2006/relationships">
-  <p:cSld>
-    <p:spTree>
-      <p:nvGrpSpPr>
-        <p:cNvPr id="1" name=""/>
-        <p:cNvGrpSpPr/>
-        <p:nvPr/>
-      </p:nvGrpSpPr>
-      <p:grpSpPr/>
-      <p:sp>
-        <p:nvSpPr>
-          <p:cNvPr id="2" name="Title 1"/>
-          <p:cNvSpPr>
-            <a:spLocks noGrp="1"/>
-          </p:cNvSpPr>
-          <p:nvPr>
-            <p:ph type="title"/>
-          </p:nvPr>
-        </p:nvSpPr>
-        <p:spPr>
-          <a:xfrm>
-            <a:off x="502920" y="274320"/>
-            <a:ext cx="11185855" cy="777240"/>
-          </a:xfrm>
-        </p:spPr>
-        <p:txBody>
-          <a:bodyPr wrap="square" anchor="b"/>
-          <a:lstStyle/>
-          <a:p>
-            <a:pPr algn="l">
-              <a:lnSpc>
-                <a:spcPct val="100000"/>
-              </a:lnSpc>
-              <a:spcAft>
-                <a:spcPts val="0"/>
-              </a:spcAft>
-              <a:defRPr sz="2800" b="1">
-                <a:solidFill>
-                  <a:srgbClr val="1F3A5F"/>
-                </a:solidFill>
-                <a:latin typeface="Calibri"/>
-              </a:defRPr>
-            </a:pPr>
-            <a:r>
-              <a:rPr sz="2800" b="1">
-                <a:solidFill>
-                  <a:srgbClr val="1F3A5F"/>
-                </a:solidFill>
-                <a:latin typeface="Calibri"/>
-              </a:rPr>
-              <a:t>Reading a line without stopping the vehicle</a:t>
-            </a:r>
-          </a:p>
-        </p:txBody>
-      </p:sp>
-      <p:sp>
-        <p:nvSpPr>
-          <p:cNvPr id="3" name="Rectangle 2"/>
-          <p:cNvSpPr/>
-          <p:nvPr/>
-        </p:nvSpPr>
-        <p:spPr>
-          <a:xfrm>
-            <a:off x="502920" y="1097280"/>
-            <a:ext cx="11185855" cy="19050"/>
-          </a:xfrm>
-          <a:prstGeom prst="rect">
-            <a:avLst/>
-          </a:prstGeom>
-          <a:solidFill>
-            <a:srgbClr val="C8D2DE"/>
-          </a:solidFill>
-          <a:ln>
-            <a:noFill/>
-          </a:ln>
-          <a:effectLst/>
-        </p:spPr>
-        <p:style>
-          <a:lnRef idx="1">
-            <a:schemeClr val="accent1"/>
-          </a:lnRef>
-          <a:fillRef idx="3">
-            <a:schemeClr val="accent1"/>
-          </a:fillRef>
-          <a:effectRef idx="2">
-            <a:schemeClr val="accent1"/>
-          </a:effectRef>
-          <a:fontRef idx="minor">
-            <a:schemeClr val="lt1"/>
-          </a:fontRef>
-        </p:style>
-        <p:txBody>
-          <a:bodyPr rtlCol="0" anchor="ctr"/>
-          <a:lstStyle/>
-          <a:p>
-            <a:pPr algn="ctr"/>
-          </a:p>
-        </p:txBody>
-      </p:sp>
-      <p:sp>
-        <p:nvSpPr>
-          <p:cNvPr id="4" name="TextBox 3"/>
-          <p:cNvSpPr txBox="1"/>
-          <p:nvPr/>
-        </p:nvSpPr>
-        <p:spPr>
-          <a:xfrm>
-            <a:off x="502920" y="6382512"/>
-            <a:ext cx="10545775" cy="274320"/>
-          </a:xfrm>
-          <a:prstGeom prst="rect">
-            <a:avLst/>
-          </a:prstGeom>
-          <a:noFill/>
-        </p:spPr>
-        <p:txBody>
-          <a:bodyPr wrap="square" lIns="0" tIns="0">
-            <a:spAutoFit/>
-          </a:bodyPr>
-          <a:lstStyle/>
-          <a:p>
-            <a:pPr algn="l">
-              <a:lnSpc>
-                <a:spcPct val="100000"/>
-              </a:lnSpc>
-              <a:spcAft>
-                <a:spcPts val="0"/>
-              </a:spcAft>
-              <a:defRPr sz="1000" b="0">
-                <a:solidFill>
-                  <a:srgbClr val="666666"/>
-                </a:solidFill>
-                <a:latin typeface="Calibri"/>
-              </a:defRPr>
-            </a:pPr>
-            <a:r>
-              <a:rPr sz="1000" b="0">
-                <a:solidFill>
-                  <a:srgbClr val="666666"/>
-                </a:solidFill>
-                <a:latin typeface="Calibri"/>
-              </a:rPr>
-              <a:t>Pathfinder Advanced - Op Program 12  |  Lesson 1</a:t>
-            </a:r>
-          </a:p>
-        </p:txBody>
-      </p:sp>
-      <p:sp>
-        <p:nvSpPr>
-          <p:cNvPr id="5" name="TextBox 4"/>
-          <p:cNvSpPr txBox="1"/>
-          <p:nvPr/>
-        </p:nvSpPr>
-        <p:spPr>
-          <a:xfrm>
-            <a:off x="11231575" y="6382512"/>
-            <a:ext cx="457200" cy="274320"/>
-          </a:xfrm>
-          <a:prstGeom prst="rect">
-            <a:avLst/>
-          </a:prstGeom>
-          <a:noFill/>
-        </p:spPr>
-        <p:txBody>
-          <a:bodyPr wrap="square" lIns="0" tIns="0">
-            <a:spAutoFit/>
-          </a:bodyPr>
-          <a:lstStyle/>
-          <a:p>
-            <a:pPr algn="r">
-              <a:lnSpc>
-                <a:spcPct val="100000"/>
-              </a:lnSpc>
-              <a:spcAft>
-                <a:spcPts val="0"/>
-              </a:spcAft>
-              <a:defRPr sz="1000" b="0">
-                <a:solidFill>
-                  <a:srgbClr val="666666"/>
-                </a:solidFill>
-                <a:latin typeface="Calibri"/>
-              </a:defRPr>
-            </a:pPr>
-            <a:r>
-              <a:rPr sz="1000" b="0">
-                <a:solidFill>
-                  <a:srgbClr val="666666"/>
-                </a:solidFill>
-                <a:latin typeface="Calibri"/>
-              </a:rPr>
-              <a:t>12</a:t>
+              <a:t>13</a:t>
             </a:r>
           </a:p>
         </p:txBody>
@@ -8479,614 +9285,6 @@
                 <a:latin typeface="Calibri"/>
               </a:rPr>
               <a:t>The length cap matters. Without it a stuck sender grows the String until the ESP32 runs out of heap.</a:t>
-            </a:r>
-          </a:p>
-        </p:txBody>
-      </p:sp>
-    </p:spTree>
-  </p:cSld>
-  <p:clrMapOvr>
-    <a:masterClrMapping/>
-  </p:clrMapOvr>
-</p:sld>
-</file>
-
-<file path=ppt/slides/slide14.xml><?xml version="1.0" encoding="utf-8"?>
-<p:sld xmlns:a="http://schemas.openxmlformats.org/drawingml/2006/main" xmlns:p="http://schemas.openxmlformats.org/presentationml/2006/main" xmlns:r="http://schemas.openxmlformats.org/officeDocument/2006/relationships">
-  <p:cSld>
-    <p:spTree>
-      <p:nvGrpSpPr>
-        <p:cNvPr id="1" name=""/>
-        <p:cNvGrpSpPr/>
-        <p:nvPr/>
-      </p:nvGrpSpPr>
-      <p:grpSpPr/>
-      <p:sp>
-        <p:nvSpPr>
-          <p:cNvPr id="2" name="TextBox 1"/>
-          <p:cNvSpPr txBox="1"/>
-          <p:nvPr/>
-        </p:nvSpPr>
-        <p:spPr>
-          <a:xfrm>
-            <a:off x="502920" y="6382512"/>
-            <a:ext cx="10545775" cy="274320"/>
-          </a:xfrm>
-          <a:prstGeom prst="rect">
-            <a:avLst/>
-          </a:prstGeom>
-          <a:noFill/>
-        </p:spPr>
-        <p:txBody>
-          <a:bodyPr wrap="square" lIns="0" tIns="0">
-            <a:spAutoFit/>
-          </a:bodyPr>
-          <a:lstStyle/>
-          <a:p>
-            <a:pPr algn="l">
-              <a:lnSpc>
-                <a:spcPct val="100000"/>
-              </a:lnSpc>
-              <a:spcAft>
-                <a:spcPts val="0"/>
-              </a:spcAft>
-              <a:defRPr sz="1000" b="0">
-                <a:solidFill>
-                  <a:srgbClr val="666666"/>
-                </a:solidFill>
-                <a:latin typeface="Calibri"/>
-              </a:defRPr>
-            </a:pPr>
-            <a:r>
-              <a:rPr sz="1000" b="0">
-                <a:solidFill>
-                  <a:srgbClr val="666666"/>
-                </a:solidFill>
-                <a:latin typeface="Calibri"/>
-              </a:rPr>
-              <a:t>Pathfinder Advanced - Op Program 12  |  Lesson 1</a:t>
-            </a:r>
-          </a:p>
-        </p:txBody>
-      </p:sp>
-      <p:sp>
-        <p:nvSpPr>
-          <p:cNvPr id="3" name="TextBox 2"/>
-          <p:cNvSpPr txBox="1"/>
-          <p:nvPr/>
-        </p:nvSpPr>
-        <p:spPr>
-          <a:xfrm>
-            <a:off x="11231575" y="6382512"/>
-            <a:ext cx="457200" cy="274320"/>
-          </a:xfrm>
-          <a:prstGeom prst="rect">
-            <a:avLst/>
-          </a:prstGeom>
-          <a:noFill/>
-        </p:spPr>
-        <p:txBody>
-          <a:bodyPr wrap="square" lIns="0" tIns="0">
-            <a:spAutoFit/>
-          </a:bodyPr>
-          <a:lstStyle/>
-          <a:p>
-            <a:pPr algn="r">
-              <a:lnSpc>
-                <a:spcPct val="100000"/>
-              </a:lnSpc>
-              <a:spcAft>
-                <a:spcPts val="0"/>
-              </a:spcAft>
-              <a:defRPr sz="1000" b="0">
-                <a:solidFill>
-                  <a:srgbClr val="666666"/>
-                </a:solidFill>
-                <a:latin typeface="Calibri"/>
-              </a:defRPr>
-            </a:pPr>
-            <a:r>
-              <a:rPr sz="1000" b="0">
-                <a:solidFill>
-                  <a:srgbClr val="666666"/>
-                </a:solidFill>
-                <a:latin typeface="Calibri"/>
-              </a:rPr>
-              <a:t>13</a:t>
-            </a:r>
-          </a:p>
-        </p:txBody>
-      </p:sp>
-      <p:sp>
-        <p:nvSpPr>
-          <p:cNvPr id="4" name="Rectangle 3"/>
-          <p:cNvSpPr/>
-          <p:nvPr/>
-        </p:nvSpPr>
-        <p:spPr>
-          <a:xfrm>
-            <a:off x="0" y="1234440"/>
-            <a:ext cx="256032" cy="1554480"/>
-          </a:xfrm>
-          <a:prstGeom prst="rect">
-            <a:avLst/>
-          </a:prstGeom>
-          <a:solidFill>
-            <a:srgbClr val="0E7C86"/>
-          </a:solidFill>
-          <a:ln>
-            <a:noFill/>
-          </a:ln>
-          <a:effectLst/>
-        </p:spPr>
-        <p:style>
-          <a:lnRef idx="1">
-            <a:schemeClr val="accent1"/>
-          </a:lnRef>
-          <a:fillRef idx="3">
-            <a:schemeClr val="accent1"/>
-          </a:fillRef>
-          <a:effectRef idx="2">
-            <a:schemeClr val="accent1"/>
-          </a:effectRef>
-          <a:fontRef idx="minor">
-            <a:schemeClr val="lt1"/>
-          </a:fontRef>
-        </p:style>
-        <p:txBody>
-          <a:bodyPr rtlCol="0" anchor="ctr"/>
-          <a:lstStyle/>
-          <a:p>
-            <a:pPr algn="ctr"/>
-          </a:p>
-        </p:txBody>
-      </p:sp>
-      <p:sp>
-        <p:nvSpPr>
-          <p:cNvPr id="5" name="TextBox 4"/>
-          <p:cNvSpPr txBox="1"/>
-          <p:nvPr/>
-        </p:nvSpPr>
-        <p:spPr>
-          <a:xfrm>
-            <a:off x="777240" y="1325880"/>
-            <a:ext cx="10515600" cy="1051560"/>
-          </a:xfrm>
-          <a:prstGeom prst="rect">
-            <a:avLst/>
-          </a:prstGeom>
-          <a:noFill/>
-        </p:spPr>
-        <p:txBody>
-          <a:bodyPr wrap="square" lIns="0" tIns="0" rIns="0" bIns="0">
-            <a:spAutoFit/>
-          </a:bodyPr>
-          <a:lstStyle/>
-          <a:p>
-            <a:pPr algn="l">
-              <a:lnSpc>
-                <a:spcPct val="100000"/>
-              </a:lnSpc>
-              <a:spcAft>
-                <a:spcPts val="0"/>
-              </a:spcAft>
-              <a:defRPr sz="3600" b="1">
-                <a:solidFill>
-                  <a:srgbClr val="1F3A5F"/>
-                </a:solidFill>
-                <a:latin typeface="Calibri"/>
-              </a:defRPr>
-            </a:pPr>
-            <a:r>
-              <a:rPr sz="3600" b="1">
-                <a:solidFill>
-                  <a:srgbClr val="1F3A5F"/>
-                </a:solidFill>
-                <a:latin typeface="Calibri"/>
-              </a:rPr>
-              <a:t>The console</a:t>
-            </a:r>
-          </a:p>
-        </p:txBody>
-      </p:sp>
-      <p:sp>
-        <p:nvSpPr>
-          <p:cNvPr id="6" name="TextBox 5"/>
-          <p:cNvSpPr txBox="1"/>
-          <p:nvPr/>
-        </p:nvSpPr>
-        <p:spPr>
-          <a:xfrm>
-            <a:off x="777240" y="2423160"/>
-            <a:ext cx="10515600" cy="685800"/>
-          </a:xfrm>
-          <a:prstGeom prst="rect">
-            <a:avLst/>
-          </a:prstGeom>
-          <a:noFill/>
-        </p:spPr>
-        <p:txBody>
-          <a:bodyPr wrap="square" lIns="0" tIns="0" rIns="0" bIns="0">
-            <a:spAutoFit/>
-          </a:bodyPr>
-          <a:lstStyle/>
-          <a:p>
-            <a:pPr algn="l">
-              <a:lnSpc>
-                <a:spcPct val="100000"/>
-              </a:lnSpc>
-              <a:spcAft>
-                <a:spcPts val="400"/>
-              </a:spcAft>
-              <a:defRPr sz="1600" b="0">
-                <a:solidFill>
-                  <a:srgbClr val="666666"/>
-                </a:solidFill>
-                <a:latin typeface="Calibri"/>
-              </a:defRPr>
-            </a:pPr>
-            <a:r>
-              <a:rPr sz="1600" b="0">
-                <a:solidFill>
-                  <a:srgbClr val="666666"/>
-                </a:solidFill>
-                <a:latin typeface="Calibri"/>
-              </a:rPr>
-              <a:t>About 25 minutes</a:t>
-            </a:r>
-          </a:p>
-        </p:txBody>
-      </p:sp>
-      <p:sp>
-        <p:nvSpPr>
-          <p:cNvPr id="7" name="Rounded Rectangle 6"/>
-          <p:cNvSpPr/>
-          <p:nvPr/>
-        </p:nvSpPr>
-        <p:spPr>
-          <a:xfrm>
-            <a:off x="502920" y="3886200"/>
-            <a:ext cx="3631082" cy="1325880"/>
-          </a:xfrm>
-          <a:prstGeom prst="roundRect">
-            <a:avLst>
-              <a:gd name="adj" fmla="val 8000"/>
-            </a:avLst>
-          </a:prstGeom>
-          <a:solidFill>
-            <a:srgbClr val="EEF3F8"/>
-          </a:solidFill>
-          <a:ln w="12700">
-            <a:solidFill>
-              <a:srgbClr val="0E7C86"/>
-            </a:solidFill>
-          </a:ln>
-          <a:effectLst/>
-        </p:spPr>
-        <p:style>
-          <a:lnRef idx="1">
-            <a:schemeClr val="accent1"/>
-          </a:lnRef>
-          <a:fillRef idx="3">
-            <a:schemeClr val="accent1"/>
-          </a:fillRef>
-          <a:effectRef idx="2">
-            <a:schemeClr val="accent1"/>
-          </a:effectRef>
-          <a:fontRef idx="minor">
-            <a:schemeClr val="lt1"/>
-          </a:fontRef>
-        </p:style>
-        <p:txBody>
-          <a:bodyPr rtlCol="0" anchor="ctr" wrap="square" lIns="73152" rIns="73152"/>
-          <a:lstStyle/>
-          <a:p>
-            <a:pPr algn="ctr">
-              <a:lnSpc>
-                <a:spcPct val="100000"/>
-              </a:lnSpc>
-              <a:spcAft>
-                <a:spcPts val="0"/>
-              </a:spcAft>
-              <a:defRPr sz="1700" b="0">
-                <a:solidFill>
-                  <a:srgbClr val="1F3A5F"/>
-                </a:solidFill>
-                <a:latin typeface="Calibri"/>
-              </a:defRPr>
-            </a:pPr>
-            <a:r>
-              <a:rPr sz="1700" b="0">
-                <a:solidFill>
-                  <a:srgbClr val="1F3A5F"/>
-                </a:solidFill>
-                <a:latin typeface="Calibri"/>
-              </a:rPr>
-              <a:t>Architecture</a:t>
-            </a:r>
-          </a:p>
-        </p:txBody>
-      </p:sp>
-      <p:sp>
-        <p:nvSpPr>
-          <p:cNvPr id="8" name="TextBox 7"/>
-          <p:cNvSpPr txBox="1"/>
-          <p:nvPr/>
-        </p:nvSpPr>
-        <p:spPr>
-          <a:xfrm>
-            <a:off x="502920" y="3520440"/>
-            <a:ext cx="3631082" cy="310896"/>
-          </a:xfrm>
-          <a:prstGeom prst="rect">
-            <a:avLst/>
-          </a:prstGeom>
-          <a:noFill/>
-        </p:spPr>
-        <p:txBody>
-          <a:bodyPr wrap="square" lIns="0" tIns="0" rIns="0" bIns="0">
-            <a:spAutoFit/>
-          </a:bodyPr>
-          <a:lstStyle/>
-          <a:p>
-            <a:pPr algn="ctr">
-              <a:lnSpc>
-                <a:spcPct val="100000"/>
-              </a:lnSpc>
-              <a:spcAft>
-                <a:spcPts val="200"/>
-              </a:spcAft>
-              <a:defRPr sz="1100" b="1">
-                <a:solidFill>
-                  <a:srgbClr val="0E7C86"/>
-                </a:solidFill>
-                <a:latin typeface="Calibri"/>
-              </a:defRPr>
-            </a:pPr>
-            <a:r>
-              <a:rPr sz="1100" b="1">
-                <a:solidFill>
-                  <a:srgbClr val="0E7C86"/>
-                </a:solidFill>
-                <a:latin typeface="Calibri"/>
-              </a:rPr>
-              <a:t>done</a:t>
-            </a:r>
-          </a:p>
-        </p:txBody>
-      </p:sp>
-      <p:sp>
-        <p:nvSpPr>
-          <p:cNvPr id="9" name="Rounded Rectangle 8"/>
-          <p:cNvSpPr/>
-          <p:nvPr/>
-        </p:nvSpPr>
-        <p:spPr>
-          <a:xfrm>
-            <a:off x="4280306" y="3886200"/>
-            <a:ext cx="3631082" cy="1325880"/>
-          </a:xfrm>
-          <a:prstGeom prst="roundRect">
-            <a:avLst>
-              <a:gd name="adj" fmla="val 8000"/>
-            </a:avLst>
-          </a:prstGeom>
-          <a:solidFill>
-            <a:srgbClr val="EEF3F8"/>
-          </a:solidFill>
-          <a:ln w="12700">
-            <a:solidFill>
-              <a:srgbClr val="0E7C86"/>
-            </a:solidFill>
-          </a:ln>
-          <a:effectLst/>
-        </p:spPr>
-        <p:style>
-          <a:lnRef idx="1">
-            <a:schemeClr val="accent1"/>
-          </a:lnRef>
-          <a:fillRef idx="3">
-            <a:schemeClr val="accent1"/>
-          </a:fillRef>
-          <a:effectRef idx="2">
-            <a:schemeClr val="accent1"/>
-          </a:effectRef>
-          <a:fontRef idx="minor">
-            <a:schemeClr val="lt1"/>
-          </a:fontRef>
-        </p:style>
-        <p:txBody>
-          <a:bodyPr rtlCol="0" anchor="ctr" wrap="square" lIns="73152" rIns="73152"/>
-          <a:lstStyle/>
-          <a:p>
-            <a:pPr algn="ctr">
-              <a:lnSpc>
-                <a:spcPct val="100000"/>
-              </a:lnSpc>
-              <a:spcAft>
-                <a:spcPts val="0"/>
-              </a:spcAft>
-              <a:defRPr sz="1700" b="0">
-                <a:solidFill>
-                  <a:srgbClr val="1F3A5F"/>
-                </a:solidFill>
-                <a:latin typeface="Calibri"/>
-              </a:defRPr>
-            </a:pPr>
-            <a:r>
-              <a:rPr sz="1700" b="0">
-                <a:solidFill>
-                  <a:srgbClr val="1F3A5F"/>
-                </a:solidFill>
-                <a:latin typeface="Calibri"/>
-              </a:rPr>
-              <a:t>Tabs and Config.h</a:t>
-            </a:r>
-          </a:p>
-        </p:txBody>
-      </p:sp>
-      <p:sp>
-        <p:nvSpPr>
-          <p:cNvPr id="10" name="TextBox 9"/>
-          <p:cNvSpPr txBox="1"/>
-          <p:nvPr/>
-        </p:nvSpPr>
-        <p:spPr>
-          <a:xfrm>
-            <a:off x="4280306" y="3520440"/>
-            <a:ext cx="3631082" cy="310896"/>
-          </a:xfrm>
-          <a:prstGeom prst="rect">
-            <a:avLst/>
-          </a:prstGeom>
-          <a:noFill/>
-        </p:spPr>
-        <p:txBody>
-          <a:bodyPr wrap="square" lIns="0" tIns="0" rIns="0" bIns="0">
-            <a:spAutoFit/>
-          </a:bodyPr>
-          <a:lstStyle/>
-          <a:p>
-            <a:pPr algn="ctr">
-              <a:lnSpc>
-                <a:spcPct val="100000"/>
-              </a:lnSpc>
-              <a:spcAft>
-                <a:spcPts val="200"/>
-              </a:spcAft>
-              <a:defRPr sz="1100" b="1">
-                <a:solidFill>
-                  <a:srgbClr val="0E7C86"/>
-                </a:solidFill>
-                <a:latin typeface="Calibri"/>
-              </a:defRPr>
-            </a:pPr>
-            <a:r>
-              <a:rPr sz="1100" b="1">
-                <a:solidFill>
-                  <a:srgbClr val="0E7C86"/>
-                </a:solidFill>
-                <a:latin typeface="Calibri"/>
-              </a:rPr>
-              <a:t>done</a:t>
-            </a:r>
-          </a:p>
-        </p:txBody>
-      </p:sp>
-      <p:sp>
-        <p:nvSpPr>
-          <p:cNvPr id="11" name="Rounded Rectangle 10"/>
-          <p:cNvSpPr/>
-          <p:nvPr/>
-        </p:nvSpPr>
-        <p:spPr>
-          <a:xfrm>
-            <a:off x="8057692" y="3886200"/>
-            <a:ext cx="3631082" cy="1325880"/>
-          </a:xfrm>
-          <a:prstGeom prst="roundRect">
-            <a:avLst>
-              <a:gd name="adj" fmla="val 8000"/>
-            </a:avLst>
-          </a:prstGeom>
-          <a:solidFill>
-            <a:srgbClr val="D6ECEE"/>
-          </a:solidFill>
-          <a:ln w="25400">
-            <a:solidFill>
-              <a:srgbClr val="0E7C86"/>
-            </a:solidFill>
-          </a:ln>
-          <a:effectLst/>
-        </p:spPr>
-        <p:style>
-          <a:lnRef idx="1">
-            <a:schemeClr val="accent1"/>
-          </a:lnRef>
-          <a:fillRef idx="3">
-            <a:schemeClr val="accent1"/>
-          </a:fillRef>
-          <a:effectRef idx="2">
-            <a:schemeClr val="accent1"/>
-          </a:effectRef>
-          <a:fontRef idx="minor">
-            <a:schemeClr val="lt1"/>
-          </a:fontRef>
-        </p:style>
-        <p:txBody>
-          <a:bodyPr rtlCol="0" anchor="ctr" wrap="square" lIns="73152" rIns="73152"/>
-          <a:lstStyle/>
-          <a:p>
-            <a:pPr algn="ctr">
-              <a:lnSpc>
-                <a:spcPct val="100000"/>
-              </a:lnSpc>
-              <a:spcAft>
-                <a:spcPts val="0"/>
-              </a:spcAft>
-              <a:defRPr sz="1700" b="1">
-                <a:solidFill>
-                  <a:srgbClr val="1F3A5F"/>
-                </a:solidFill>
-                <a:latin typeface="Calibri"/>
-              </a:defRPr>
-            </a:pPr>
-            <a:r>
-              <a:rPr sz="1700" b="1">
-                <a:solidFill>
-                  <a:srgbClr val="1F3A5F"/>
-                </a:solidFill>
-                <a:latin typeface="Calibri"/>
-              </a:rPr>
-              <a:t>The console</a:t>
-            </a:r>
-          </a:p>
-        </p:txBody>
-      </p:sp>
-      <p:sp>
-        <p:nvSpPr>
-          <p:cNvPr id="12" name="TextBox 11"/>
-          <p:cNvSpPr txBox="1"/>
-          <p:nvPr/>
-        </p:nvSpPr>
-        <p:spPr>
-          <a:xfrm>
-            <a:off x="8057692" y="3520440"/>
-            <a:ext cx="3631082" cy="310896"/>
-          </a:xfrm>
-          <a:prstGeom prst="rect">
-            <a:avLst/>
-          </a:prstGeom>
-          <a:noFill/>
-        </p:spPr>
-        <p:txBody>
-          <a:bodyPr wrap="square" lIns="0" tIns="0" rIns="0" bIns="0">
-            <a:spAutoFit/>
-          </a:bodyPr>
-          <a:lstStyle/>
-          <a:p>
-            <a:pPr algn="ctr">
-              <a:lnSpc>
-                <a:spcPct val="100000"/>
-              </a:lnSpc>
-              <a:spcAft>
-                <a:spcPts val="200"/>
-              </a:spcAft>
-              <a:defRPr sz="1100" b="1">
-                <a:solidFill>
-                  <a:srgbClr val="0E7C86"/>
-                </a:solidFill>
-                <a:latin typeface="Calibri"/>
-              </a:defRPr>
-            </a:pPr>
-            <a:r>
-              <a:rPr sz="1100" b="1">
-                <a:solidFill>
-                  <a:srgbClr val="0E7C86"/>
-                </a:solidFill>
-                <a:latin typeface="Calibri"/>
-              </a:rPr>
-              <a:t>NOW</a:t>
             </a:r>
           </a:p>
         </p:txBody>
@@ -17754,6 +17952,566 @@
       <p:grpSpPr/>
       <p:sp>
         <p:nvSpPr>
+          <p:cNvPr id="2" name="TextBox 1"/>
+          <p:cNvSpPr txBox="1"/>
+          <p:nvPr/>
+        </p:nvSpPr>
+        <p:spPr>
+          <a:xfrm>
+            <a:off x="502920" y="6382512"/>
+            <a:ext cx="10545775" cy="274320"/>
+          </a:xfrm>
+          <a:prstGeom prst="rect">
+            <a:avLst/>
+          </a:prstGeom>
+          <a:noFill/>
+        </p:spPr>
+        <p:txBody>
+          <a:bodyPr wrap="square" lIns="0" tIns="0">
+            <a:spAutoFit/>
+          </a:bodyPr>
+          <a:lstStyle/>
+          <a:p>
+            <a:pPr algn="l">
+              <a:lnSpc>
+                <a:spcPct val="100000"/>
+              </a:lnSpc>
+              <a:spcAft>
+                <a:spcPts val="0"/>
+              </a:spcAft>
+              <a:defRPr sz="1000" b="0">
+                <a:solidFill>
+                  <a:srgbClr val="666666"/>
+                </a:solidFill>
+                <a:latin typeface="Calibri"/>
+              </a:defRPr>
+            </a:pPr>
+            <a:r>
+              <a:rPr sz="1000" b="0">
+                <a:solidFill>
+                  <a:srgbClr val="666666"/>
+                </a:solidFill>
+                <a:latin typeface="Calibri"/>
+              </a:rPr>
+              <a:t>Pathfinder Advanced - Op Program 12  |  Lesson 1</a:t>
+            </a:r>
+          </a:p>
+        </p:txBody>
+      </p:sp>
+      <p:sp>
+        <p:nvSpPr>
+          <p:cNvPr id="3" name="TextBox 2"/>
+          <p:cNvSpPr txBox="1"/>
+          <p:nvPr/>
+        </p:nvSpPr>
+        <p:spPr>
+          <a:xfrm>
+            <a:off x="11231575" y="6382512"/>
+            <a:ext cx="457200" cy="274320"/>
+          </a:xfrm>
+          <a:prstGeom prst="rect">
+            <a:avLst/>
+          </a:prstGeom>
+          <a:noFill/>
+        </p:spPr>
+        <p:txBody>
+          <a:bodyPr wrap="square" lIns="0" tIns="0">
+            <a:spAutoFit/>
+          </a:bodyPr>
+          <a:lstStyle/>
+          <a:p>
+            <a:pPr algn="r">
+              <a:lnSpc>
+                <a:spcPct val="100000"/>
+              </a:lnSpc>
+              <a:spcAft>
+                <a:spcPts val="0"/>
+              </a:spcAft>
+              <a:defRPr sz="1000" b="0">
+                <a:solidFill>
+                  <a:srgbClr val="666666"/>
+                </a:solidFill>
+                <a:latin typeface="Calibri"/>
+              </a:defRPr>
+            </a:pPr>
+            <a:r>
+              <a:rPr sz="1000" b="0">
+                <a:solidFill>
+                  <a:srgbClr val="666666"/>
+                </a:solidFill>
+                <a:latin typeface="Calibri"/>
+              </a:rPr>
+              <a:t>7</a:t>
+            </a:r>
+          </a:p>
+        </p:txBody>
+      </p:sp>
+      <p:sp>
+        <p:nvSpPr>
+          <p:cNvPr id="4" name="Rectangle 3"/>
+          <p:cNvSpPr/>
+          <p:nvPr/>
+        </p:nvSpPr>
+        <p:spPr>
+          <a:xfrm>
+            <a:off x="0" y="1234440"/>
+            <a:ext cx="256032" cy="1554480"/>
+          </a:xfrm>
+          <a:prstGeom prst="rect">
+            <a:avLst/>
+          </a:prstGeom>
+          <a:solidFill>
+            <a:srgbClr val="0E7C86"/>
+          </a:solidFill>
+          <a:ln>
+            <a:noFill/>
+          </a:ln>
+          <a:effectLst/>
+        </p:spPr>
+        <p:style>
+          <a:lnRef idx="1">
+            <a:schemeClr val="accent1"/>
+          </a:lnRef>
+          <a:fillRef idx="3">
+            <a:schemeClr val="accent1"/>
+          </a:fillRef>
+          <a:effectRef idx="2">
+            <a:schemeClr val="accent1"/>
+          </a:effectRef>
+          <a:fontRef idx="minor">
+            <a:schemeClr val="lt1"/>
+          </a:fontRef>
+        </p:style>
+        <p:txBody>
+          <a:bodyPr rtlCol="0" anchor="ctr"/>
+          <a:lstStyle/>
+          <a:p>
+            <a:pPr algn="ctr"/>
+          </a:p>
+        </p:txBody>
+      </p:sp>
+      <p:sp>
+        <p:nvSpPr>
+          <p:cNvPr id="5" name="TextBox 4"/>
+          <p:cNvSpPr txBox="1"/>
+          <p:nvPr/>
+        </p:nvSpPr>
+        <p:spPr>
+          <a:xfrm>
+            <a:off x="777240" y="1325880"/>
+            <a:ext cx="10515600" cy="1051560"/>
+          </a:xfrm>
+          <a:prstGeom prst="rect">
+            <a:avLst/>
+          </a:prstGeom>
+          <a:noFill/>
+        </p:spPr>
+        <p:txBody>
+          <a:bodyPr wrap="square" lIns="0" tIns="0" rIns="0" bIns="0">
+            <a:spAutoFit/>
+          </a:bodyPr>
+          <a:lstStyle/>
+          <a:p>
+            <a:pPr algn="l">
+              <a:lnSpc>
+                <a:spcPct val="100000"/>
+              </a:lnSpc>
+              <a:spcAft>
+                <a:spcPts val="0"/>
+              </a:spcAft>
+              <a:defRPr sz="3600" b="1">
+                <a:solidFill>
+                  <a:srgbClr val="1F3A5F"/>
+                </a:solidFill>
+                <a:latin typeface="Calibri"/>
+              </a:defRPr>
+            </a:pPr>
+            <a:r>
+              <a:rPr sz="3600" b="1">
+                <a:solidFill>
+                  <a:srgbClr val="1F3A5F"/>
+                </a:solidFill>
+                <a:latin typeface="Calibri"/>
+              </a:rPr>
+              <a:t>Tabs and Config.h</a:t>
+            </a:r>
+          </a:p>
+        </p:txBody>
+      </p:sp>
+      <p:sp>
+        <p:nvSpPr>
+          <p:cNvPr id="6" name="TextBox 5"/>
+          <p:cNvSpPr txBox="1"/>
+          <p:nvPr/>
+        </p:nvSpPr>
+        <p:spPr>
+          <a:xfrm>
+            <a:off x="777240" y="2423160"/>
+            <a:ext cx="10515600" cy="685800"/>
+          </a:xfrm>
+          <a:prstGeom prst="rect">
+            <a:avLst/>
+          </a:prstGeom>
+          <a:noFill/>
+        </p:spPr>
+        <p:txBody>
+          <a:bodyPr wrap="square" lIns="0" tIns="0" rIns="0" bIns="0">
+            <a:spAutoFit/>
+          </a:bodyPr>
+          <a:lstStyle/>
+          <a:p>
+            <a:pPr algn="l">
+              <a:lnSpc>
+                <a:spcPct val="100000"/>
+              </a:lnSpc>
+              <a:spcAft>
+                <a:spcPts val="400"/>
+              </a:spcAft>
+              <a:defRPr sz="1600" b="0">
+                <a:solidFill>
+                  <a:srgbClr val="666666"/>
+                </a:solidFill>
+                <a:latin typeface="Calibri"/>
+              </a:defRPr>
+            </a:pPr>
+            <a:r>
+              <a:rPr sz="1600" b="0">
+                <a:solidFill>
+                  <a:srgbClr val="666666"/>
+                </a:solidFill>
+                <a:latin typeface="Calibri"/>
+              </a:rPr>
+              <a:t>About 55 minutes</a:t>
+            </a:r>
+          </a:p>
+        </p:txBody>
+      </p:sp>
+      <p:sp>
+        <p:nvSpPr>
+          <p:cNvPr id="7" name="Rounded Rectangle 6"/>
+          <p:cNvSpPr/>
+          <p:nvPr/>
+        </p:nvSpPr>
+        <p:spPr>
+          <a:xfrm>
+            <a:off x="502920" y="3886200"/>
+            <a:ext cx="3631082" cy="1325880"/>
+          </a:xfrm>
+          <a:prstGeom prst="roundRect">
+            <a:avLst>
+              <a:gd name="adj" fmla="val 8000"/>
+            </a:avLst>
+          </a:prstGeom>
+          <a:solidFill>
+            <a:srgbClr val="EEF3F8"/>
+          </a:solidFill>
+          <a:ln w="12700">
+            <a:solidFill>
+              <a:srgbClr val="0E7C86"/>
+            </a:solidFill>
+          </a:ln>
+          <a:effectLst/>
+        </p:spPr>
+        <p:style>
+          <a:lnRef idx="1">
+            <a:schemeClr val="accent1"/>
+          </a:lnRef>
+          <a:fillRef idx="3">
+            <a:schemeClr val="accent1"/>
+          </a:fillRef>
+          <a:effectRef idx="2">
+            <a:schemeClr val="accent1"/>
+          </a:effectRef>
+          <a:fontRef idx="minor">
+            <a:schemeClr val="lt1"/>
+          </a:fontRef>
+        </p:style>
+        <p:txBody>
+          <a:bodyPr rtlCol="0" anchor="ctr" wrap="square" lIns="73152" rIns="73152"/>
+          <a:lstStyle/>
+          <a:p>
+            <a:pPr algn="ctr">
+              <a:lnSpc>
+                <a:spcPct val="100000"/>
+              </a:lnSpc>
+              <a:spcAft>
+                <a:spcPts val="0"/>
+              </a:spcAft>
+              <a:defRPr sz="1700" b="0">
+                <a:solidFill>
+                  <a:srgbClr val="1F3A5F"/>
+                </a:solidFill>
+                <a:latin typeface="Calibri"/>
+              </a:defRPr>
+            </a:pPr>
+            <a:r>
+              <a:rPr sz="1700" b="0">
+                <a:solidFill>
+                  <a:srgbClr val="1F3A5F"/>
+                </a:solidFill>
+                <a:latin typeface="Calibri"/>
+              </a:rPr>
+              <a:t>Architecture</a:t>
+            </a:r>
+          </a:p>
+        </p:txBody>
+      </p:sp>
+      <p:sp>
+        <p:nvSpPr>
+          <p:cNvPr id="8" name="TextBox 7"/>
+          <p:cNvSpPr txBox="1"/>
+          <p:nvPr/>
+        </p:nvSpPr>
+        <p:spPr>
+          <a:xfrm>
+            <a:off x="502920" y="3520440"/>
+            <a:ext cx="3631082" cy="310896"/>
+          </a:xfrm>
+          <a:prstGeom prst="rect">
+            <a:avLst/>
+          </a:prstGeom>
+          <a:noFill/>
+        </p:spPr>
+        <p:txBody>
+          <a:bodyPr wrap="square" lIns="0" tIns="0" rIns="0" bIns="0">
+            <a:spAutoFit/>
+          </a:bodyPr>
+          <a:lstStyle/>
+          <a:p>
+            <a:pPr algn="ctr">
+              <a:lnSpc>
+                <a:spcPct val="100000"/>
+              </a:lnSpc>
+              <a:spcAft>
+                <a:spcPts val="200"/>
+              </a:spcAft>
+              <a:defRPr sz="1100" b="1">
+                <a:solidFill>
+                  <a:srgbClr val="0E7C86"/>
+                </a:solidFill>
+                <a:latin typeface="Calibri"/>
+              </a:defRPr>
+            </a:pPr>
+            <a:r>
+              <a:rPr sz="1100" b="1">
+                <a:solidFill>
+                  <a:srgbClr val="0E7C86"/>
+                </a:solidFill>
+                <a:latin typeface="Calibri"/>
+              </a:rPr>
+              <a:t>done</a:t>
+            </a:r>
+          </a:p>
+        </p:txBody>
+      </p:sp>
+      <p:sp>
+        <p:nvSpPr>
+          <p:cNvPr id="9" name="Rounded Rectangle 8"/>
+          <p:cNvSpPr/>
+          <p:nvPr/>
+        </p:nvSpPr>
+        <p:spPr>
+          <a:xfrm>
+            <a:off x="4280306" y="3886200"/>
+            <a:ext cx="3631082" cy="1325880"/>
+          </a:xfrm>
+          <a:prstGeom prst="roundRect">
+            <a:avLst>
+              <a:gd name="adj" fmla="val 8000"/>
+            </a:avLst>
+          </a:prstGeom>
+          <a:solidFill>
+            <a:srgbClr val="D6ECEE"/>
+          </a:solidFill>
+          <a:ln w="25400">
+            <a:solidFill>
+              <a:srgbClr val="0E7C86"/>
+            </a:solidFill>
+          </a:ln>
+          <a:effectLst/>
+        </p:spPr>
+        <p:style>
+          <a:lnRef idx="1">
+            <a:schemeClr val="accent1"/>
+          </a:lnRef>
+          <a:fillRef idx="3">
+            <a:schemeClr val="accent1"/>
+          </a:fillRef>
+          <a:effectRef idx="2">
+            <a:schemeClr val="accent1"/>
+          </a:effectRef>
+          <a:fontRef idx="minor">
+            <a:schemeClr val="lt1"/>
+          </a:fontRef>
+        </p:style>
+        <p:txBody>
+          <a:bodyPr rtlCol="0" anchor="ctr" wrap="square" lIns="73152" rIns="73152"/>
+          <a:lstStyle/>
+          <a:p>
+            <a:pPr algn="ctr">
+              <a:lnSpc>
+                <a:spcPct val="100000"/>
+              </a:lnSpc>
+              <a:spcAft>
+                <a:spcPts val="0"/>
+              </a:spcAft>
+              <a:defRPr sz="1700" b="1">
+                <a:solidFill>
+                  <a:srgbClr val="1F3A5F"/>
+                </a:solidFill>
+                <a:latin typeface="Calibri"/>
+              </a:defRPr>
+            </a:pPr>
+            <a:r>
+              <a:rPr sz="1700" b="1">
+                <a:solidFill>
+                  <a:srgbClr val="1F3A5F"/>
+                </a:solidFill>
+                <a:latin typeface="Calibri"/>
+              </a:rPr>
+              <a:t>Tabs and Config.h</a:t>
+            </a:r>
+          </a:p>
+        </p:txBody>
+      </p:sp>
+      <p:sp>
+        <p:nvSpPr>
+          <p:cNvPr id="10" name="TextBox 9"/>
+          <p:cNvSpPr txBox="1"/>
+          <p:nvPr/>
+        </p:nvSpPr>
+        <p:spPr>
+          <a:xfrm>
+            <a:off x="4280306" y="3520440"/>
+            <a:ext cx="3631082" cy="310896"/>
+          </a:xfrm>
+          <a:prstGeom prst="rect">
+            <a:avLst/>
+          </a:prstGeom>
+          <a:noFill/>
+        </p:spPr>
+        <p:txBody>
+          <a:bodyPr wrap="square" lIns="0" tIns="0" rIns="0" bIns="0">
+            <a:spAutoFit/>
+          </a:bodyPr>
+          <a:lstStyle/>
+          <a:p>
+            <a:pPr algn="ctr">
+              <a:lnSpc>
+                <a:spcPct val="100000"/>
+              </a:lnSpc>
+              <a:spcAft>
+                <a:spcPts val="200"/>
+              </a:spcAft>
+              <a:defRPr sz="1100" b="1">
+                <a:solidFill>
+                  <a:srgbClr val="0E7C86"/>
+                </a:solidFill>
+                <a:latin typeface="Calibri"/>
+              </a:defRPr>
+            </a:pPr>
+            <a:r>
+              <a:rPr sz="1100" b="1">
+                <a:solidFill>
+                  <a:srgbClr val="0E7C86"/>
+                </a:solidFill>
+                <a:latin typeface="Calibri"/>
+              </a:rPr>
+              <a:t>NOW</a:t>
+            </a:r>
+          </a:p>
+        </p:txBody>
+      </p:sp>
+      <p:sp>
+        <p:nvSpPr>
+          <p:cNvPr id="11" name="Rounded Rectangle 10"/>
+          <p:cNvSpPr/>
+          <p:nvPr/>
+        </p:nvSpPr>
+        <p:spPr>
+          <a:xfrm>
+            <a:off x="8057692" y="3886200"/>
+            <a:ext cx="3631082" cy="1325880"/>
+          </a:xfrm>
+          <a:prstGeom prst="roundRect">
+            <a:avLst>
+              <a:gd name="adj" fmla="val 8000"/>
+            </a:avLst>
+          </a:prstGeom>
+          <a:solidFill>
+            <a:srgbClr val="FFFFFF"/>
+          </a:solidFill>
+          <a:ln w="12700">
+            <a:solidFill>
+              <a:srgbClr val="C8D2DE"/>
+            </a:solidFill>
+          </a:ln>
+          <a:effectLst/>
+        </p:spPr>
+        <p:style>
+          <a:lnRef idx="1">
+            <a:schemeClr val="accent1"/>
+          </a:lnRef>
+          <a:fillRef idx="3">
+            <a:schemeClr val="accent1"/>
+          </a:fillRef>
+          <a:effectRef idx="2">
+            <a:schemeClr val="accent1"/>
+          </a:effectRef>
+          <a:fontRef idx="minor">
+            <a:schemeClr val="lt1"/>
+          </a:fontRef>
+        </p:style>
+        <p:txBody>
+          <a:bodyPr rtlCol="0" anchor="ctr" wrap="square" lIns="73152" rIns="73152"/>
+          <a:lstStyle/>
+          <a:p>
+            <a:pPr algn="ctr">
+              <a:lnSpc>
+                <a:spcPct val="100000"/>
+              </a:lnSpc>
+              <a:spcAft>
+                <a:spcPts val="0"/>
+              </a:spcAft>
+              <a:defRPr sz="1700" b="0">
+                <a:solidFill>
+                  <a:srgbClr val="666666"/>
+                </a:solidFill>
+                <a:latin typeface="Calibri"/>
+              </a:defRPr>
+            </a:pPr>
+            <a:r>
+              <a:rPr sz="1700" b="0">
+                <a:solidFill>
+                  <a:srgbClr val="666666"/>
+                </a:solidFill>
+                <a:latin typeface="Calibri"/>
+              </a:rPr>
+              <a:t>The console</a:t>
+            </a:r>
+          </a:p>
+        </p:txBody>
+      </p:sp>
+    </p:spTree>
+  </p:cSld>
+  <p:clrMapOvr>
+    <a:masterClrMapping/>
+  </p:clrMapOvr>
+</p:sld>
+</file>
+
+<file path=ppt/slides/slide9.xml><?xml version="1.0" encoding="utf-8"?>
+<p:sld xmlns:a="http://schemas.openxmlformats.org/drawingml/2006/main" xmlns:p="http://schemas.openxmlformats.org/presentationml/2006/main" xmlns:r="http://schemas.openxmlformats.org/officeDocument/2006/relationships">
+  <p:cSld>
+    <p:spTree>
+      <p:nvGrpSpPr>
+        <p:cNvPr id="1" name=""/>
+        <p:cNvGrpSpPr/>
+        <p:nvPr/>
+      </p:nvGrpSpPr>
+      <p:grpSpPr/>
+      <p:sp>
+        <p:nvSpPr>
           <p:cNvPr id="2" name="Title 1"/>
           <p:cNvSpPr>
             <a:spLocks noGrp="1"/>
@@ -17933,7 +18691,7 @@
                 </a:solidFill>
                 <a:latin typeface="Calibri"/>
               </a:rPr>
-              <a:t>7</a:t>
+              <a:t>8</a:t>
             </a:r>
           </a:p>
         </p:txBody>
@@ -18221,764 +18979,6 @@
                 <a:latin typeface="Calibri"/>
               </a:rPr>
               <a:t>Op 12's Config.h opens with a paragraph saying this. Now you know what it is warning you about.</a:t>
-            </a:r>
-          </a:p>
-        </p:txBody>
-      </p:sp>
-    </p:spTree>
-  </p:cSld>
-  <p:clrMapOvr>
-    <a:masterClrMapping/>
-  </p:clrMapOvr>
-</p:sld>
-</file>
-
-<file path=ppt/slides/slide9.xml><?xml version="1.0" encoding="utf-8"?>
-<p:sld xmlns:a="http://schemas.openxmlformats.org/drawingml/2006/main" xmlns:p="http://schemas.openxmlformats.org/presentationml/2006/main" xmlns:r="http://schemas.openxmlformats.org/officeDocument/2006/relationships">
-  <p:cSld>
-    <p:spTree>
-      <p:nvGrpSpPr>
-        <p:cNvPr id="1" name=""/>
-        <p:cNvGrpSpPr/>
-        <p:nvPr/>
-      </p:nvGrpSpPr>
-      <p:grpSpPr/>
-      <p:sp>
-        <p:nvSpPr>
-          <p:cNvPr id="2" name="Title 1"/>
-          <p:cNvSpPr>
-            <a:spLocks noGrp="1"/>
-          </p:cNvSpPr>
-          <p:nvPr>
-            <p:ph type="title"/>
-          </p:nvPr>
-        </p:nvSpPr>
-        <p:spPr>
-          <a:xfrm>
-            <a:off x="502920" y="274320"/>
-            <a:ext cx="11185855" cy="777240"/>
-          </a:xfrm>
-        </p:spPr>
-        <p:txBody>
-          <a:bodyPr wrap="square" anchor="b"/>
-          <a:lstStyle/>
-          <a:p>
-            <a:pPr algn="l">
-              <a:lnSpc>
-                <a:spcPct val="100000"/>
-              </a:lnSpc>
-              <a:spcAft>
-                <a:spcPts val="0"/>
-              </a:spcAft>
-              <a:defRPr sz="2800" b="1">
-                <a:solidFill>
-                  <a:srgbClr val="1F3A5F"/>
-                </a:solidFill>
-                <a:latin typeface="Calibri"/>
-              </a:defRPr>
-            </a:pPr>
-            <a:r>
-              <a:rPr sz="2800" b="1">
-                <a:solidFill>
-                  <a:srgbClr val="1F3A5F"/>
-                </a:solidFill>
-                <a:latin typeface="Calibri"/>
-              </a:rPr>
-              <a:t>The eight files, and what each one owns</a:t>
-            </a:r>
-          </a:p>
-        </p:txBody>
-      </p:sp>
-      <p:sp>
-        <p:nvSpPr>
-          <p:cNvPr id="3" name="Rectangle 2"/>
-          <p:cNvSpPr/>
-          <p:nvPr/>
-        </p:nvSpPr>
-        <p:spPr>
-          <a:xfrm>
-            <a:off x="502920" y="1097280"/>
-            <a:ext cx="11185855" cy="19050"/>
-          </a:xfrm>
-          <a:prstGeom prst="rect">
-            <a:avLst/>
-          </a:prstGeom>
-          <a:solidFill>
-            <a:srgbClr val="C8D2DE"/>
-          </a:solidFill>
-          <a:ln>
-            <a:noFill/>
-          </a:ln>
-          <a:effectLst/>
-        </p:spPr>
-        <p:style>
-          <a:lnRef idx="1">
-            <a:schemeClr val="accent1"/>
-          </a:lnRef>
-          <a:fillRef idx="3">
-            <a:schemeClr val="accent1"/>
-          </a:fillRef>
-          <a:effectRef idx="2">
-            <a:schemeClr val="accent1"/>
-          </a:effectRef>
-          <a:fontRef idx="minor">
-            <a:schemeClr val="lt1"/>
-          </a:fontRef>
-        </p:style>
-        <p:txBody>
-          <a:bodyPr rtlCol="0" anchor="ctr"/>
-          <a:lstStyle/>
-          <a:p>
-            <a:pPr algn="ctr"/>
-          </a:p>
-        </p:txBody>
-      </p:sp>
-      <p:sp>
-        <p:nvSpPr>
-          <p:cNvPr id="4" name="TextBox 3"/>
-          <p:cNvSpPr txBox="1"/>
-          <p:nvPr/>
-        </p:nvSpPr>
-        <p:spPr>
-          <a:xfrm>
-            <a:off x="502920" y="6382512"/>
-            <a:ext cx="10545775" cy="274320"/>
-          </a:xfrm>
-          <a:prstGeom prst="rect">
-            <a:avLst/>
-          </a:prstGeom>
-          <a:noFill/>
-        </p:spPr>
-        <p:txBody>
-          <a:bodyPr wrap="square" lIns="0" tIns="0">
-            <a:spAutoFit/>
-          </a:bodyPr>
-          <a:lstStyle/>
-          <a:p>
-            <a:pPr algn="l">
-              <a:lnSpc>
-                <a:spcPct val="100000"/>
-              </a:lnSpc>
-              <a:spcAft>
-                <a:spcPts val="0"/>
-              </a:spcAft>
-              <a:defRPr sz="1000" b="0">
-                <a:solidFill>
-                  <a:srgbClr val="666666"/>
-                </a:solidFill>
-                <a:latin typeface="Calibri"/>
-              </a:defRPr>
-            </a:pPr>
-            <a:r>
-              <a:rPr sz="1000" b="0">
-                <a:solidFill>
-                  <a:srgbClr val="666666"/>
-                </a:solidFill>
-                <a:latin typeface="Calibri"/>
-              </a:rPr>
-              <a:t>Pathfinder Advanced - Op Program 12  |  Lesson 1</a:t>
-            </a:r>
-          </a:p>
-        </p:txBody>
-      </p:sp>
-      <p:sp>
-        <p:nvSpPr>
-          <p:cNvPr id="5" name="TextBox 4"/>
-          <p:cNvSpPr txBox="1"/>
-          <p:nvPr/>
-        </p:nvSpPr>
-        <p:spPr>
-          <a:xfrm>
-            <a:off x="11231575" y="6382512"/>
-            <a:ext cx="457200" cy="274320"/>
-          </a:xfrm>
-          <a:prstGeom prst="rect">
-            <a:avLst/>
-          </a:prstGeom>
-          <a:noFill/>
-        </p:spPr>
-        <p:txBody>
-          <a:bodyPr wrap="square" lIns="0" tIns="0">
-            <a:spAutoFit/>
-          </a:bodyPr>
-          <a:lstStyle/>
-          <a:p>
-            <a:pPr algn="r">
-              <a:lnSpc>
-                <a:spcPct val="100000"/>
-              </a:lnSpc>
-              <a:spcAft>
-                <a:spcPts val="0"/>
-              </a:spcAft>
-              <a:defRPr sz="1000" b="0">
-                <a:solidFill>
-                  <a:srgbClr val="666666"/>
-                </a:solidFill>
-                <a:latin typeface="Calibri"/>
-              </a:defRPr>
-            </a:pPr>
-            <a:r>
-              <a:rPr sz="1000" b="0">
-                <a:solidFill>
-                  <a:srgbClr val="666666"/>
-                </a:solidFill>
-                <a:latin typeface="Calibri"/>
-              </a:rPr>
-              <a:t>8</a:t>
-            </a:r>
-          </a:p>
-        </p:txBody>
-      </p:sp>
-      <p:sp>
-        <p:nvSpPr>
-          <p:cNvPr id="6" name="TextBox 5"/>
-          <p:cNvSpPr txBox="1"/>
-          <p:nvPr/>
-        </p:nvSpPr>
-        <p:spPr>
-          <a:xfrm>
-            <a:off x="502920" y="1188720"/>
-            <a:ext cx="11185855" cy="457200"/>
-          </a:xfrm>
-          <a:prstGeom prst="rect">
-            <a:avLst/>
-          </a:prstGeom>
-          <a:noFill/>
-        </p:spPr>
-        <p:txBody>
-          <a:bodyPr wrap="square" lIns="0" tIns="0" rIns="0" bIns="0">
-            <a:spAutoFit/>
-          </a:bodyPr>
-          <a:lstStyle/>
-          <a:p>
-            <a:pPr algn="l">
-              <a:lnSpc>
-                <a:spcPct val="100000"/>
-              </a:lnSpc>
-              <a:spcAft>
-                <a:spcPts val="600"/>
-              </a:spcAft>
-              <a:defRPr sz="1400" b="0">
-                <a:solidFill>
-                  <a:srgbClr val="222222"/>
-                </a:solidFill>
-                <a:latin typeface="Calibri"/>
-              </a:defRPr>
-            </a:pPr>
-            <a:r>
-              <a:rPr sz="1400" b="0">
-                <a:solidFill>
-                  <a:srgbClr val="222222"/>
-                </a:solidFill>
-                <a:latin typeface="Calibri"/>
-              </a:rPr>
-              <a:t>One subsystem per file. The rule that makes it work: each tab owns its own state, and other tabs go through its functions.</a:t>
-            </a:r>
-          </a:p>
-        </p:txBody>
-      </p:sp>
-      <p:graphicFrame>
-        <p:nvGraphicFramePr>
-          <p:cNvPr id="7" name="Table 6"/>
-          <p:cNvGraphicFramePr>
-            <a:graphicFrameLocks noGrp="1"/>
-          </p:cNvGraphicFramePr>
-          <p:nvPr/>
-        </p:nvGraphicFramePr>
-        <p:xfrm>
-          <a:off x="502920" y="1691640"/>
-          <a:ext cx="11185854" cy="3328987"/>
-        </p:xfrm>
-        <a:graphic>
-          <a:graphicData uri="http://schemas.openxmlformats.org/drawingml/2006/table">
-            <a:tbl>
-              <a:tblPr firstRow="1" bandRow="1">
-                <a:tableStyleId>{5C22544A-7EE6-4342-B048-85BDC9FD1C3A}</a:tableStyleId>
-              </a:tblPr>
-              <a:tblGrid>
-                <a:gridCol w="3457446"/>
-                <a:gridCol w="7728408"/>
-              </a:tblGrid>
-              <a:tr h="369887">
-                <a:tc>
-                  <a:txBody>
-                    <a:bodyPr/>
-                    <a:lstStyle/>
-                    <a:p>
-                      <a:r>
-                        <a:rPr sz="1850" b="1">
-                          <a:solidFill>
-                            <a:srgbClr val="FFFFFF"/>
-                          </a:solidFill>
-                          <a:latin typeface="Calibri"/>
-                        </a:rPr>
-                        <a:t>File</a:t>
-                      </a:r>
-                    </a:p>
-                  </a:txBody>
-                  <a:tcPr marL="73152" marT="18288" marB="18288">
-                    <a:solidFill>
-                      <a:srgbClr val="1F3A5F"/>
-                    </a:solidFill>
-                  </a:tcPr>
-                </a:tc>
-                <a:tc>
-                  <a:txBody>
-                    <a:bodyPr/>
-                    <a:lstStyle/>
-                    <a:p>
-                      <a:r>
-                        <a:rPr sz="1850" b="1">
-                          <a:solidFill>
-                            <a:srgbClr val="FFFFFF"/>
-                          </a:solidFill>
-                          <a:latin typeface="Calibri"/>
-                        </a:rPr>
-                        <a:t>Owns</a:t>
-                      </a:r>
-                    </a:p>
-                  </a:txBody>
-                  <a:tcPr marL="73152" marT="18288" marB="18288">
-                    <a:solidFill>
-                      <a:srgbClr val="1F3A5F"/>
-                    </a:solidFill>
-                  </a:tcPr>
-                </a:tc>
-              </a:tr>
-              <a:tr h="369887">
-                <a:tc>
-                  <a:txBody>
-                    <a:bodyPr/>
-                    <a:lstStyle/>
-                    <a:p>
-                      <a:r>
-                        <a:rPr sz="1850">
-                          <a:solidFill>
-                            <a:srgbClr val="222222"/>
-                          </a:solidFill>
-                          <a:latin typeface="Consolas"/>
-                        </a:rPr>
-                        <a:t>Pathfinder_Op_Program12.ino</a:t>
-                      </a:r>
-                    </a:p>
-                  </a:txBody>
-                  <a:tcPr marL="73152" marT="18288" marB="18288">
-                    <a:solidFill>
-                      <a:srgbClr val="FFFFFF"/>
-                    </a:solidFill>
-                  </a:tcPr>
-                </a:tc>
-                <a:tc>
-                  <a:txBody>
-                    <a:bodyPr/>
-                    <a:lstStyle/>
-                    <a:p>
-                      <a:r>
-                        <a:rPr sz="1850">
-                          <a:solidFill>
-                            <a:srgbClr val="222222"/>
-                          </a:solidFill>
-                          <a:latin typeface="Calibri"/>
-                        </a:rPr>
-                        <a:t>setup(), loop(), the hardware objects, the shared state</a:t>
-                      </a:r>
-                    </a:p>
-                  </a:txBody>
-                  <a:tcPr marL="73152" marT="18288" marB="18288">
-                    <a:solidFill>
-                      <a:srgbClr val="FFFFFF"/>
-                    </a:solidFill>
-                  </a:tcPr>
-                </a:tc>
-              </a:tr>
-              <a:tr h="369887">
-                <a:tc>
-                  <a:txBody>
-                    <a:bodyPr/>
-                    <a:lstStyle/>
-                    <a:p>
-                      <a:r>
-                        <a:rPr sz="1850">
-                          <a:solidFill>
-                            <a:srgbClr val="222222"/>
-                          </a:solidFill>
-                          <a:latin typeface="Calibri"/>
-                        </a:rPr>
-                        <a:t>Config.h</a:t>
-                      </a:r>
-                    </a:p>
-                  </a:txBody>
-                  <a:tcPr marL="73152" marT="18288" marB="18288">
-                    <a:solidFill>
-                      <a:srgbClr val="EEF3F8"/>
-                    </a:solidFill>
-                  </a:tcPr>
-                </a:tc>
-                <a:tc>
-                  <a:txBody>
-                    <a:bodyPr/>
-                    <a:lstStyle/>
-                    <a:p>
-                      <a:r>
-                        <a:rPr sz="1850">
-                          <a:solidFill>
-                            <a:srgbClr val="222222"/>
-                          </a:solidFill>
-                          <a:latin typeface="Calibri"/>
-                        </a:rPr>
-                        <a:t>Every tunable number and every custom type</a:t>
-                      </a:r>
-                    </a:p>
-                  </a:txBody>
-                  <a:tcPr marL="73152" marT="18288" marB="18288">
-                    <a:solidFill>
-                      <a:srgbClr val="EEF3F8"/>
-                    </a:solidFill>
-                  </a:tcPr>
-                </a:tc>
-              </a:tr>
-              <a:tr h="369887">
-                <a:tc>
-                  <a:txBody>
-                    <a:bodyPr/>
-                    <a:lstStyle/>
-                    <a:p>
-                      <a:r>
-                        <a:rPr sz="1850">
-                          <a:solidFill>
-                            <a:srgbClr val="222222"/>
-                          </a:solidFill>
-                          <a:latin typeface="Calibri"/>
-                        </a:rPr>
-                        <a:t>Motors.ino</a:t>
-                      </a:r>
-                    </a:p>
-                  </a:txBody>
-                  <a:tcPr marL="73152" marT="18288" marB="18288">
-                    <a:solidFill>
-                      <a:srgbClr val="FFFFFF"/>
-                    </a:solidFill>
-                  </a:tcPr>
-                </a:tc>
-                <a:tc>
-                  <a:txBody>
-                    <a:bodyPr/>
-                    <a:lstStyle/>
-                    <a:p>
-                      <a:r>
-                        <a:rPr sz="1850">
-                          <a:solidFill>
-                            <a:srgbClr val="222222"/>
-                          </a:solidFill>
-                          <a:latin typeface="Calibri"/>
-                        </a:rPr>
-                        <a:t>PWM setup, drive modes, ramping, servos, throttle modes</a:t>
-                      </a:r>
-                    </a:p>
-                  </a:txBody>
-                  <a:tcPr marL="73152" marT="18288" marB="18288">
-                    <a:solidFill>
-                      <a:srgbClr val="FFFFFF"/>
-                    </a:solidFill>
-                  </a:tcPr>
-                </a:tc>
-              </a:tr>
-              <a:tr h="369887">
-                <a:tc>
-                  <a:txBody>
-                    <a:bodyPr/>
-                    <a:lstStyle/>
-                    <a:p>
-                      <a:r>
-                        <a:rPr sz="1850">
-                          <a:solidFill>
-                            <a:srgbClr val="222222"/>
-                          </a:solidFill>
-                          <a:latin typeface="Calibri"/>
-                        </a:rPr>
-                        <a:t>Lighting.ino</a:t>
-                      </a:r>
-                    </a:p>
-                  </a:txBody>
-                  <a:tcPr marL="73152" marT="18288" marB="18288">
-                    <a:solidFill>
-                      <a:srgbClr val="EEF3F8"/>
-                    </a:solidFill>
-                  </a:tcPr>
-                </a:tc>
-                <a:tc>
-                  <a:txBody>
-                    <a:bodyPr/>
-                    <a:lstStyle/>
-                    <a:p>
-                      <a:r>
-                        <a:rPr sz="1850">
-                          <a:solidFill>
-                            <a:srgbClr val="222222"/>
-                          </a:solidFill>
-                          <a:latin typeface="Calibri"/>
-                        </a:rPr>
-                        <a:t>Color helpers, every animation, the lighting state machine</a:t>
-                      </a:r>
-                    </a:p>
-                  </a:txBody>
-                  <a:tcPr marL="73152" marT="18288" marB="18288">
-                    <a:solidFill>
-                      <a:srgbClr val="EEF3F8"/>
-                    </a:solidFill>
-                  </a:tcPr>
-                </a:tc>
-              </a:tr>
-              <a:tr h="369887">
-                <a:tc>
-                  <a:txBody>
-                    <a:bodyPr/>
-                    <a:lstStyle/>
-                    <a:p>
-                      <a:r>
-                        <a:rPr sz="1850">
-                          <a:solidFill>
-                            <a:srgbClr val="222222"/>
-                          </a:solidFill>
-                          <a:latin typeface="Calibri"/>
-                        </a:rPr>
-                        <a:t>Bluetooth.ino</a:t>
-                      </a:r>
-                    </a:p>
-                  </a:txBody>
-                  <a:tcPr marL="73152" marT="18288" marB="18288">
-                    <a:solidFill>
-                      <a:srgbClr val="FFFFFF"/>
-                    </a:solidFill>
-                  </a:tcPr>
-                </a:tc>
-                <a:tc>
-                  <a:txBody>
-                    <a:bodyPr/>
-                    <a:lstStyle/>
-                    <a:p>
-                      <a:r>
-                        <a:rPr sz="1850">
-                          <a:solidFill>
-                            <a:srgbClr val="222222"/>
-                          </a:solidFill>
-                          <a:latin typeface="Calibri"/>
-                        </a:rPr>
-                        <a:t>Connection callbacks, the allowlist, the pairing workflow</a:t>
-                      </a:r>
-                    </a:p>
-                  </a:txBody>
-                  <a:tcPr marL="73152" marT="18288" marB="18288">
-                    <a:solidFill>
-                      <a:srgbClr val="FFFFFF"/>
-                    </a:solidFill>
-                  </a:tcPr>
-                </a:tc>
-              </a:tr>
-              <a:tr h="369887">
-                <a:tc>
-                  <a:txBody>
-                    <a:bodyPr/>
-                    <a:lstStyle/>
-                    <a:p>
-                      <a:r>
-                        <a:rPr sz="1850">
-                          <a:solidFill>
-                            <a:srgbClr val="222222"/>
-                          </a:solidFill>
-                          <a:latin typeface="Calibri"/>
-                        </a:rPr>
-                        <a:t>Console.ino</a:t>
-                      </a:r>
-                    </a:p>
-                  </a:txBody>
-                  <a:tcPr marL="73152" marT="18288" marB="18288">
-                    <a:solidFill>
-                      <a:srgbClr val="EEF3F8"/>
-                    </a:solidFill>
-                  </a:tcPr>
-                </a:tc>
-                <a:tc>
-                  <a:txBody>
-                    <a:bodyPr/>
-                    <a:lstStyle/>
-                    <a:p>
-                      <a:r>
-                        <a:rPr sz="1850">
-                          <a:solidFill>
-                            <a:srgbClr val="222222"/>
-                          </a:solidFill>
-                          <a:latin typeface="Calibri"/>
-                        </a:rPr>
-                        <a:t>The serial command interface, EEPROM settings, diagnostics</a:t>
-                      </a:r>
-                    </a:p>
-                  </a:txBody>
-                  <a:tcPr marL="73152" marT="18288" marB="18288">
-                    <a:solidFill>
-                      <a:srgbClr val="EEF3F8"/>
-                    </a:solidFill>
-                  </a:tcPr>
-                </a:tc>
-              </a:tr>
-              <a:tr h="369887">
-                <a:tc>
-                  <a:txBody>
-                    <a:bodyPr/>
-                    <a:lstStyle/>
-                    <a:p>
-                      <a:r>
-                        <a:rPr sz="1850">
-                          <a:solidFill>
-                            <a:srgbClr val="222222"/>
-                          </a:solidFill>
-                          <a:latin typeface="Calibri"/>
-                        </a:rPr>
-                        <a:t>Sensors.ino</a:t>
-                      </a:r>
-                    </a:p>
-                  </a:txBody>
-                  <a:tcPr marL="73152" marT="18288" marB="18288">
-                    <a:solidFill>
-                      <a:srgbClr val="FFFFFF"/>
-                    </a:solidFill>
-                  </a:tcPr>
-                </a:tc>
-                <a:tc>
-                  <a:txBody>
-                    <a:bodyPr/>
-                    <a:lstStyle/>
-                    <a:p>
-                      <a:r>
-                        <a:rPr sz="1850">
-                          <a:solidFill>
-                            <a:srgbClr val="222222"/>
-                          </a:solidFill>
-                          <a:latin typeface="Calibri"/>
-                        </a:rPr>
-                        <a:t>The INA219 driver</a:t>
-                      </a:r>
-                    </a:p>
-                  </a:txBody>
-                  <a:tcPr marL="73152" marT="18288" marB="18288">
-                    <a:solidFill>
-                      <a:srgbClr val="FFFFFF"/>
-                    </a:solidFill>
-                  </a:tcPr>
-                </a:tc>
-              </a:tr>
-              <a:tr h="369891">
-                <a:tc>
-                  <a:txBody>
-                    <a:bodyPr/>
-                    <a:lstStyle/>
-                    <a:p>
-                      <a:r>
-                        <a:rPr sz="1850">
-                          <a:solidFill>
-                            <a:srgbClr val="222222"/>
-                          </a:solidFill>
-                          <a:latin typeface="Calibri"/>
-                        </a:rPr>
-                        <a:t>SelfTest.ino</a:t>
-                      </a:r>
-                    </a:p>
-                  </a:txBody>
-                  <a:tcPr marL="73152" marT="18288" marB="18288">
-                    <a:solidFill>
-                      <a:srgbClr val="EEF3F8"/>
-                    </a:solidFill>
-                  </a:tcPr>
-                </a:tc>
-                <a:tc>
-                  <a:txBody>
-                    <a:bodyPr/>
-                    <a:lstStyle/>
-                    <a:p>
-                      <a:r>
-                        <a:rPr sz="1850">
-                          <a:solidFill>
-                            <a:srgbClr val="222222"/>
-                          </a:solidFill>
-                          <a:latin typeface="Calibri"/>
-                        </a:rPr>
-                        <a:t>The powered motor check</a:t>
-                      </a:r>
-                    </a:p>
-                  </a:txBody>
-                  <a:tcPr marL="73152" marT="18288" marB="18288">
-                    <a:solidFill>
-                      <a:srgbClr val="EEF3F8"/>
-                    </a:solidFill>
-                  </a:tcPr>
-                </a:tc>
-              </a:tr>
-            </a:tbl>
-          </a:graphicData>
-        </a:graphic>
-      </p:graphicFrame>
-      <p:sp>
-        <p:nvSpPr>
-          <p:cNvPr id="8" name="Rounded Rectangle 7"/>
-          <p:cNvSpPr/>
-          <p:nvPr/>
-        </p:nvSpPr>
-        <p:spPr>
-          <a:xfrm>
-            <a:off x="502920" y="5303520"/>
-            <a:ext cx="11185855" cy="960120"/>
-          </a:xfrm>
-          <a:prstGeom prst="roundRect">
-            <a:avLst>
-              <a:gd name="adj" fmla="val 4000"/>
-            </a:avLst>
-          </a:prstGeom>
-          <a:solidFill>
-            <a:srgbClr val="EEF3F8"/>
-          </a:solidFill>
-          <a:ln w="12700">
-            <a:solidFill>
-              <a:srgbClr val="0E7C86"/>
-            </a:solidFill>
-          </a:ln>
-          <a:effectLst/>
-        </p:spPr>
-        <p:style>
-          <a:lnRef idx="1">
-            <a:schemeClr val="accent1"/>
-          </a:lnRef>
-          <a:fillRef idx="3">
-            <a:schemeClr val="accent1"/>
-          </a:fillRef>
-          <a:effectRef idx="2">
-            <a:schemeClr val="accent1"/>
-          </a:effectRef>
-          <a:fontRef idx="minor">
-            <a:schemeClr val="lt1"/>
-          </a:fontRef>
-        </p:style>
-        <p:txBody>
-          <a:bodyPr rtlCol="0" anchor="ctr" wrap="square" lIns="164592" rIns="164592" tIns="73152" bIns="73152"/>
-          <a:lstStyle/>
-          <a:p>
-            <a:pPr algn="l"/>
-            <a:r>
-              <a:rPr sz="1300" b="1">
-                <a:solidFill>
-                  <a:srgbClr val="0E7C86"/>
-                </a:solidFill>
-                <a:latin typeface="Calibri"/>
-              </a:rPr>
-              <a:t>KEY POINT   </a:t>
-            </a:r>
-            <a:r>
-              <a:rPr sz="1500">
-                <a:solidFill>
-                  <a:srgbClr val="222222"/>
-                </a:solidFill>
-                <a:latin typeface="Calibri"/>
-              </a:rPr>
-              <a:t>Nothing in the compiler enforces that. Every tab can see every global. It is a convention, and it is the only thing standing between you and 1292 lines again.</a:t>
             </a:r>
           </a:p>
         </p:txBody>

--- a/ground-vehicle/docs/courses/advanced/l1_architecture_and_toolchain.pptx
+++ b/ground-vehicle/docs/courses/advanced/l1_architecture_and_toolchain.pptx
@@ -6138,7 +6138,7 @@
                 </a:solidFill>
                 <a:latin typeface="Calibri"/>
               </a:rPr>
-              <a:t>9</a:t>
+              <a:t>10</a:t>
             </a:r>
           </a:p>
         </p:txBody>
@@ -6210,8 +6210,8 @@
                 <a:tableStyleId>{5C22544A-7EE6-4342-B048-85BDC9FD1C3A}</a:tableStyleId>
               </a:tblPr>
               <a:tblGrid>
-                <a:gridCol w="3457446"/>
-                <a:gridCol w="7728408"/>
+                <a:gridCol w="3730244"/>
+                <a:gridCol w="7455610"/>
               </a:tblGrid>
               <a:tr h="369887">
                 <a:tc>
@@ -6896,7 +6896,7 @@
                 </a:solidFill>
                 <a:latin typeface="Calibri"/>
               </a:rPr>
-              <a:t>10</a:t>
+              <a:t>11</a:t>
             </a:r>
           </a:p>
         </p:txBody>
@@ -7473,7 +7473,7 @@
                 </a:solidFill>
                 <a:latin typeface="Calibri"/>
               </a:rPr>
-              <a:t>11</a:t>
+              <a:t>12</a:t>
             </a:r>
           </a:p>
         </p:txBody>
@@ -8171,7 +8171,7 @@
                 </a:solidFill>
                 <a:latin typeface="Calibri"/>
               </a:rPr>
-              <a:t>12</a:t>
+              <a:t>13</a:t>
             </a:r>
           </a:p>
         </p:txBody>
@@ -8694,7 +8694,7 @@
                 </a:solidFill>
                 <a:latin typeface="Calibri"/>
               </a:rPr>
-              <a:t>13</a:t>
+              <a:t>14</a:t>
             </a:r>
           </a:p>
         </p:txBody>
@@ -9488,7 +9488,7 @@
                 </a:solidFill>
                 <a:latin typeface="Calibri"/>
               </a:rPr>
-              <a:t>14</a:t>
+              <a:t>15</a:t>
             </a:r>
           </a:p>
         </p:txBody>
@@ -10130,7 +10130,7 @@
                 </a:solidFill>
                 <a:latin typeface="Calibri"/>
               </a:rPr>
-              <a:t>15</a:t>
+              <a:t>16</a:t>
             </a:r>
           </a:p>
         </p:txBody>
@@ -11037,7 +11037,7 @@
                 </a:solidFill>
                 <a:latin typeface="Calibri"/>
               </a:rPr>
-              <a:t>16</a:t>
+              <a:t>17</a:t>
             </a:r>
           </a:p>
         </p:txBody>
@@ -11444,7 +11444,7 @@
                 </a:solidFill>
                 <a:latin typeface="Calibri"/>
               </a:rPr>
-              <a:t>17</a:t>
+              <a:t>18</a:t>
             </a:r>
           </a:p>
         </p:txBody>
@@ -12682,7 +12682,7 @@
                 </a:solidFill>
                 <a:latin typeface="Calibri"/>
               </a:rPr>
-              <a:t>18</a:t>
+              <a:t>19</a:t>
             </a:r>
           </a:p>
         </p:txBody>
@@ -13639,7 +13639,7 @@
                 </a:solidFill>
                 <a:latin typeface="Calibri"/>
               </a:rPr>
-              <a:t>1</a:t>
+              <a:t>2</a:t>
             </a:r>
           </a:p>
         </p:txBody>
@@ -14039,7 +14039,7 @@
                 </a:solidFill>
                 <a:latin typeface="Calibri"/>
               </a:rPr>
-              <a:t>19</a:t>
+              <a:t>20</a:t>
             </a:r>
           </a:p>
         </p:txBody>
@@ -14514,7 +14514,7 @@
                 </a:solidFill>
                 <a:latin typeface="Calibri"/>
               </a:rPr>
-              <a:t>20</a:t>
+              <a:t>21</a:t>
             </a:r>
           </a:p>
         </p:txBody>
@@ -14964,7 +14964,7 @@
                 </a:solidFill>
                 <a:latin typeface="Calibri"/>
               </a:rPr>
-              <a:t>2</a:t>
+              <a:t>3</a:t>
             </a:r>
           </a:p>
         </p:txBody>
@@ -15405,7 +15405,7 @@
                 </a:solidFill>
                 <a:latin typeface="Calibri"/>
               </a:rPr>
-              <a:t>3</a:t>
+              <a:t>4</a:t>
             </a:r>
           </a:p>
         </p:txBody>
@@ -15420,7 +15420,7 @@
         </p:nvGraphicFramePr>
         <p:xfrm>
           <a:off x="502920" y="1188720"/>
-          <a:ext cx="11185854" cy="5029200"/>
+          <a:ext cx="11185854" cy="4997450"/>
         </p:xfrm>
         <a:graphic>
           <a:graphicData uri="http://schemas.openxmlformats.org/drawingml/2006/table">
@@ -15429,18 +15429,18 @@
                 <a:tableStyleId>{5C22544A-7EE6-4342-B048-85BDC9FD1C3A}</a:tableStyleId>
               </a:tblPr>
               <a:tblGrid>
-                <a:gridCol w="915206"/>
-                <a:gridCol w="4372652"/>
-                <a:gridCol w="5897996"/>
+                <a:gridCol w="1168400"/>
+                <a:gridCol w="4281036"/>
+                <a:gridCol w="5736418"/>
               </a:tblGrid>
-              <a:tr h="838200">
+              <a:tr h="832908">
                 <a:tc>
                   <a:txBody>
                     <a:bodyPr/>
                     <a:lstStyle/>
                     <a:p>
                       <a:r>
-                        <a:rPr sz="2400" b="1">
+                        <a:rPr sz="2600" b="1">
                           <a:solidFill>
                             <a:srgbClr val="FFFFFF"/>
                           </a:solidFill>
@@ -15462,7 +15462,7 @@
                     <a:lstStyle/>
                     <a:p>
                       <a:r>
-                        <a:rPr sz="2400" b="1">
+                        <a:rPr sz="2600" b="1">
                           <a:solidFill>
                             <a:srgbClr val="FFFFFF"/>
                           </a:solidFill>
@@ -15484,7 +15484,7 @@
                     <a:lstStyle/>
                     <a:p>
                       <a:r>
-                        <a:rPr sz="2400" b="1">
+                        <a:rPr sz="2600" b="1">
                           <a:solidFill>
                             <a:srgbClr val="FFFFFF"/>
                           </a:solidFill>
@@ -15501,14 +15501,14 @@
                   </a:tcPr>
                 </a:tc>
               </a:tr>
-              <a:tr h="838200">
+              <a:tr h="832908">
                 <a:tc>
                   <a:txBody>
                     <a:bodyPr/>
                     <a:lstStyle/>
                     <a:p>
                       <a:r>
-                        <a:rPr sz="2400">
+                        <a:rPr sz="2600">
                           <a:solidFill>
                             <a:srgbClr val="222222"/>
                           </a:solidFill>
@@ -15530,7 +15530,7 @@
                     <a:lstStyle/>
                     <a:p>
                       <a:r>
-                        <a:rPr sz="2400">
+                        <a:rPr sz="2600">
                           <a:solidFill>
                             <a:srgbClr val="222222"/>
                           </a:solidFill>
@@ -15552,7 +15552,7 @@
                     <a:lstStyle/>
                     <a:p>
                       <a:r>
-                        <a:rPr sz="2400">
+                        <a:rPr sz="2600">
                           <a:solidFill>
                             <a:srgbClr val="222222"/>
                           </a:solidFill>
@@ -15569,14 +15569,14 @@
                   </a:tcPr>
                 </a:tc>
               </a:tr>
-              <a:tr h="838200">
+              <a:tr h="832908">
                 <a:tc>
                   <a:txBody>
                     <a:bodyPr/>
                     <a:lstStyle/>
                     <a:p>
                       <a:r>
-                        <a:rPr sz="2400">
+                        <a:rPr sz="2600">
                           <a:solidFill>
                             <a:srgbClr val="222222"/>
                           </a:solidFill>
@@ -15598,7 +15598,7 @@
                     <a:lstStyle/>
                     <a:p>
                       <a:r>
-                        <a:rPr sz="2400">
+                        <a:rPr sz="2600">
                           <a:solidFill>
                             <a:srgbClr val="222222"/>
                           </a:solidFill>
@@ -15620,7 +15620,7 @@
                     <a:lstStyle/>
                     <a:p>
                       <a:r>
-                        <a:rPr sz="2400">
+                        <a:rPr sz="2600">
                           <a:solidFill>
                             <a:srgbClr val="222222"/>
                           </a:solidFill>
@@ -15637,14 +15637,14 @@
                   </a:tcPr>
                 </a:tc>
               </a:tr>
-              <a:tr h="838200">
+              <a:tr h="832908">
                 <a:tc>
                   <a:txBody>
                     <a:bodyPr/>
                     <a:lstStyle/>
                     <a:p>
                       <a:r>
-                        <a:rPr sz="2400">
+                        <a:rPr sz="2600">
                           <a:solidFill>
                             <a:srgbClr val="222222"/>
                           </a:solidFill>
@@ -15666,7 +15666,7 @@
                     <a:lstStyle/>
                     <a:p>
                       <a:r>
-                        <a:rPr sz="2400">
+                        <a:rPr sz="2600">
                           <a:solidFill>
                             <a:srgbClr val="222222"/>
                           </a:solidFill>
@@ -15688,7 +15688,7 @@
                     <a:lstStyle/>
                     <a:p>
                       <a:r>
-                        <a:rPr sz="2400">
+                        <a:rPr sz="2600">
                           <a:solidFill>
                             <a:srgbClr val="222222"/>
                           </a:solidFill>
@@ -15705,14 +15705,14 @@
                   </a:tcPr>
                 </a:tc>
               </a:tr>
-              <a:tr h="838200">
+              <a:tr h="832908">
                 <a:tc>
                   <a:txBody>
                     <a:bodyPr/>
                     <a:lstStyle/>
                     <a:p>
                       <a:r>
-                        <a:rPr sz="2400">
+                        <a:rPr sz="2600">
                           <a:solidFill>
                             <a:srgbClr val="222222"/>
                           </a:solidFill>
@@ -15734,7 +15734,7 @@
                     <a:lstStyle/>
                     <a:p>
                       <a:r>
-                        <a:rPr sz="2400">
+                        <a:rPr sz="2600">
                           <a:solidFill>
                             <a:srgbClr val="222222"/>
                           </a:solidFill>
@@ -15756,7 +15756,7 @@
                     <a:lstStyle/>
                     <a:p>
                       <a:r>
-                        <a:rPr sz="2400">
+                        <a:rPr sz="2600">
                           <a:solidFill>
                             <a:srgbClr val="222222"/>
                           </a:solidFill>
@@ -15773,14 +15773,14 @@
                   </a:tcPr>
                 </a:tc>
               </a:tr>
-              <a:tr h="838200">
+              <a:tr h="832910">
                 <a:tc>
                   <a:txBody>
                     <a:bodyPr/>
                     <a:lstStyle/>
                     <a:p>
                       <a:r>
-                        <a:rPr sz="2400">
+                        <a:rPr sz="2600">
                           <a:solidFill>
                             <a:srgbClr val="222222"/>
                           </a:solidFill>
@@ -15802,7 +15802,7 @@
                     <a:lstStyle/>
                     <a:p>
                       <a:r>
-                        <a:rPr sz="2400">
+                        <a:rPr sz="2600">
                           <a:solidFill>
                             <a:srgbClr val="222222"/>
                           </a:solidFill>
@@ -15824,7 +15824,7 @@
                     <a:lstStyle/>
                     <a:p>
                       <a:r>
-                        <a:rPr sz="2400">
+                        <a:rPr sz="2600">
                           <a:solidFill>
                             <a:srgbClr val="222222"/>
                           </a:solidFill>
@@ -16044,7 +16044,7 @@
                 </a:solidFill>
                 <a:latin typeface="Calibri"/>
               </a:rPr>
-              <a:t>4</a:t>
+              <a:t>5</a:t>
             </a:r>
           </a:p>
         </p:txBody>
@@ -16734,7 +16734,7 @@
                 </a:solidFill>
                 <a:latin typeface="Calibri"/>
               </a:rPr>
-              <a:t>5</a:t>
+              <a:t>6</a:t>
             </a:r>
           </a:p>
         </p:txBody>
@@ -17444,7 +17444,7 @@
                 </a:solidFill>
                 <a:latin typeface="Calibri"/>
               </a:rPr>
-              <a:t>6</a:t>
+              <a:t>7</a:t>
             </a:r>
           </a:p>
         </p:txBody>
@@ -18041,7 +18041,7 @@
                 </a:solidFill>
                 <a:latin typeface="Calibri"/>
               </a:rPr>
-              <a:t>7</a:t>
+              <a:t>8</a:t>
             </a:r>
           </a:p>
         </p:txBody>
@@ -18691,7 +18691,7 @@
                 </a:solidFill>
                 <a:latin typeface="Calibri"/>
               </a:rPr>
-              <a:t>8</a:t>
+              <a:t>9</a:t>
             </a:r>
           </a:p>
         </p:txBody>

--- a/ground-vehicle/docs/courses/advanced/l1_architecture_and_toolchain.pptx
+++ b/ground-vehicle/docs/courses/advanced/l1_architecture_and_toolchain.pptx
@@ -6686,7 +6686,7 @@
               <a:t>KEY POINT   </a:t>
             </a:r>
             <a:r>
-              <a:rPr sz="1500">
+              <a:rPr sz="1800">
                 <a:solidFill>
                   <a:srgbClr val="222222"/>
                 </a:solidFill>
@@ -12472,7 +12472,7 @@
               <a:t>KEY POINT   </a:t>
             </a:r>
             <a:r>
-              <a:rPr sz="1500">
+              <a:rPr sz="1800">
                 <a:solidFill>
                   <a:srgbClr val="222222"/>
                 </a:solidFill>
@@ -13429,7 +13429,7 @@
               <a:t>WATCH OUT   </a:t>
             </a:r>
             <a:r>
-              <a:rPr sz="1500">
+              <a:rPr sz="1800">
                 <a:solidFill>
                   <a:srgbClr val="222222"/>
                 </a:solidFill>
@@ -15195,7 +15195,7 @@
               <a:t>KEY POINT   </a:t>
             </a:r>
             <a:r>
-              <a:rPr sz="1500">
+              <a:rPr sz="1800">
                 <a:solidFill>
                   <a:srgbClr val="222222"/>
                 </a:solidFill>
@@ -17234,7 +17234,7 @@
               <a:t>KEY POINT   </a:t>
             </a:r>
             <a:r>
-              <a:rPr sz="1500">
+              <a:rPr sz="1800">
                 <a:solidFill>
                   <a:srgbClr val="222222"/>
                 </a:solidFill>
@@ -17921,7 +17921,7 @@
               <a:t>KEY POINT   </a:t>
             </a:r>
             <a:r>
-              <a:rPr sz="1500">
+              <a:rPr sz="1800">
                 <a:solidFill>
                   <a:srgbClr val="222222"/>
                 </a:solidFill>
@@ -18972,7 +18972,7 @@
               <a:t>KEY POINT   </a:t>
             </a:r>
             <a:r>
-              <a:rPr sz="1500">
+              <a:rPr sz="1800">
                 <a:solidFill>
                   <a:srgbClr val="222222"/>
                 </a:solidFill>

--- a/ground-vehicle/docs/courses/advanced/l1_architecture_and_toolchain.pptx
+++ b/ground-vehicle/docs/courses/advanced/l1_architecture_and_toolchain.pptx
@@ -10556,138 +10556,6 @@
               <a:t> </a:t>
             </a:r>
           </a:p>
-          <a:p>
-            <a:pPr algn="l">
-              <a:lnSpc>
-                <a:spcPct val="100000"/>
-              </a:lnSpc>
-              <a:spcAft>
-                <a:spcPts val="0"/>
-              </a:spcAft>
-              <a:defRPr sz="1400">
-                <a:latin typeface="Consolas"/>
-              </a:defRPr>
-            </a:pPr>
-            <a:r>
-              <a:rPr sz="1400" b="1">
-                <a:solidFill>
-                  <a:srgbClr val="0E7C86"/>
-                </a:solidFill>
-                <a:latin typeface="Consolas"/>
-              </a:rPr>
-              <a:t>  setup_motors();              // outputs safe FIRST</a:t>
-            </a:r>
-          </a:p>
-          <a:p>
-            <a:pPr algn="l">
-              <a:lnSpc>
-                <a:spcPct val="100000"/>
-              </a:lnSpc>
-              <a:spcAft>
-                <a:spcPts val="0"/>
-              </a:spcAft>
-              <a:defRPr sz="1400">
-                <a:latin typeface="Consolas"/>
-              </a:defRPr>
-            </a:pPr>
-            <a:r>
-              <a:rPr sz="1400" b="1">
-                <a:solidFill>
-                  <a:srgbClr val="0E7C86"/>
-                </a:solidFill>
-                <a:latin typeface="Consolas"/>
-              </a:rPr>
-              <a:t>  setup_servos();</a:t>
-            </a:r>
-          </a:p>
-          <a:p>
-            <a:pPr algn="l">
-              <a:lnSpc>
-                <a:spcPct val="100000"/>
-              </a:lnSpc>
-              <a:spcAft>
-                <a:spcPts val="0"/>
-              </a:spcAft>
-              <a:defRPr sz="1400">
-                <a:latin typeface="Consolas"/>
-              </a:defRPr>
-            </a:pPr>
-            <a:r>
-              <a:rPr sz="1400">
-                <a:solidFill>
-                  <a:srgbClr val="222222"/>
-                </a:solidFill>
-                <a:latin typeface="Consolas"/>
-              </a:rPr>
-              <a:t> </a:t>
-            </a:r>
-          </a:p>
-          <a:p>
-            <a:pPr algn="l">
-              <a:lnSpc>
-                <a:spcPct val="100000"/>
-              </a:lnSpc>
-              <a:spcAft>
-                <a:spcPts val="0"/>
-              </a:spcAft>
-              <a:defRPr sz="1400">
-                <a:latin typeface="Consolas"/>
-              </a:defRPr>
-            </a:pPr>
-            <a:r>
-              <a:rPr sz="1400">
-                <a:solidFill>
-                  <a:srgbClr val="222222"/>
-                </a:solidFill>
-                <a:latin typeface="Consolas"/>
-              </a:rPr>
-              <a:t>  strip.begin();               // then the lights</a:t>
-            </a:r>
-          </a:p>
-          <a:p>
-            <a:pPr algn="l">
-              <a:lnSpc>
-                <a:spcPct val="100000"/>
-              </a:lnSpc>
-              <a:spcAft>
-                <a:spcPts val="0"/>
-              </a:spcAft>
-              <a:defRPr sz="1400">
-                <a:latin typeface="Consolas"/>
-              </a:defRPr>
-            </a:pPr>
-            <a:r>
-              <a:rPr sz="1400">
-                <a:solidFill>
-                  <a:srgbClr val="222222"/>
-                </a:solidFill>
-                <a:latin typeface="Consolas"/>
-              </a:rPr>
-              <a:t>  set_disconnected_lighting();</a:t>
-            </a:r>
-          </a:p>
-          <a:p>
-            <a:pPr algn="l">
-              <a:lnSpc>
-                <a:spcPct val="100000"/>
-              </a:lnSpc>
-              <a:spcAft>
-                <a:spcPts val="0"/>
-              </a:spcAft>
-              <a:defRPr sz="1400">
-                <a:latin typeface="Consolas"/>
-              </a:defRPr>
-            </a:pPr>
-            <a:r>
-              <a:rPr sz="1400">
-                <a:solidFill>
-                  <a:srgbClr val="222222"/>
-                </a:solidFill>
-                <a:latin typeface="Consolas"/>
-              </a:rPr>
-              <a:t> </a:t>
-            </a:r>
-          </a:p>
         </p:txBody>
       </p:sp>
       <p:sp>
@@ -11133,6 +11001,138 @@
         <p:txBody>
           <a:bodyPr rtlCol="0" anchor="t" wrap="square" lIns="146304" tIns="91440" bIns="73152"/>
           <a:lstStyle/>
+          <a:p>
+            <a:pPr algn="l">
+              <a:lnSpc>
+                <a:spcPct val="100000"/>
+              </a:lnSpc>
+              <a:spcAft>
+                <a:spcPts val="0"/>
+              </a:spcAft>
+              <a:defRPr sz="1400">
+                <a:latin typeface="Consolas"/>
+              </a:defRPr>
+            </a:pPr>
+            <a:r>
+              <a:rPr sz="1400">
+                <a:solidFill>
+                  <a:srgbClr val="222222"/>
+                </a:solidFill>
+                <a:latin typeface="Consolas"/>
+              </a:rPr>
+              <a:t>  setup_motors();              // outputs safe FIRST</a:t>
+            </a:r>
+          </a:p>
+          <a:p>
+            <a:pPr algn="l">
+              <a:lnSpc>
+                <a:spcPct val="100000"/>
+              </a:lnSpc>
+              <a:spcAft>
+                <a:spcPts val="0"/>
+              </a:spcAft>
+              <a:defRPr sz="1400">
+                <a:latin typeface="Consolas"/>
+              </a:defRPr>
+            </a:pPr>
+            <a:r>
+              <a:rPr sz="1400">
+                <a:solidFill>
+                  <a:srgbClr val="222222"/>
+                </a:solidFill>
+                <a:latin typeface="Consolas"/>
+              </a:rPr>
+              <a:t>  setup_servos();</a:t>
+            </a:r>
+          </a:p>
+          <a:p>
+            <a:pPr algn="l">
+              <a:lnSpc>
+                <a:spcPct val="100000"/>
+              </a:lnSpc>
+              <a:spcAft>
+                <a:spcPts val="0"/>
+              </a:spcAft>
+              <a:defRPr sz="1400">
+                <a:latin typeface="Consolas"/>
+              </a:defRPr>
+            </a:pPr>
+            <a:r>
+              <a:rPr sz="1400">
+                <a:solidFill>
+                  <a:srgbClr val="222222"/>
+                </a:solidFill>
+                <a:latin typeface="Consolas"/>
+              </a:rPr>
+              <a:t> </a:t>
+            </a:r>
+          </a:p>
+          <a:p>
+            <a:pPr algn="l">
+              <a:lnSpc>
+                <a:spcPct val="100000"/>
+              </a:lnSpc>
+              <a:spcAft>
+                <a:spcPts val="0"/>
+              </a:spcAft>
+              <a:defRPr sz="1400">
+                <a:latin typeface="Consolas"/>
+              </a:defRPr>
+            </a:pPr>
+            <a:r>
+              <a:rPr sz="1400">
+                <a:solidFill>
+                  <a:srgbClr val="222222"/>
+                </a:solidFill>
+                <a:latin typeface="Consolas"/>
+              </a:rPr>
+              <a:t>  strip.begin();               // then the lights</a:t>
+            </a:r>
+          </a:p>
+          <a:p>
+            <a:pPr algn="l">
+              <a:lnSpc>
+                <a:spcPct val="100000"/>
+              </a:lnSpc>
+              <a:spcAft>
+                <a:spcPts val="0"/>
+              </a:spcAft>
+              <a:defRPr sz="1400">
+                <a:latin typeface="Consolas"/>
+              </a:defRPr>
+            </a:pPr>
+            <a:r>
+              <a:rPr sz="1400">
+                <a:solidFill>
+                  <a:srgbClr val="222222"/>
+                </a:solidFill>
+                <a:latin typeface="Consolas"/>
+              </a:rPr>
+              <a:t>  set_disconnected_lighting();</a:t>
+            </a:r>
+          </a:p>
+          <a:p>
+            <a:pPr algn="l">
+              <a:lnSpc>
+                <a:spcPct val="100000"/>
+              </a:lnSpc>
+              <a:spcAft>
+                <a:spcPts val="0"/>
+              </a:spcAft>
+              <a:defRPr sz="1400">
+                <a:latin typeface="Consolas"/>
+              </a:defRPr>
+            </a:pPr>
+            <a:r>
+              <a:rPr sz="1400">
+                <a:solidFill>
+                  <a:srgbClr val="222222"/>
+                </a:solidFill>
+                <a:latin typeface="Consolas"/>
+              </a:rPr>
+              <a:t> </a:t>
+            </a:r>
+          </a:p>
           <a:p>
             <a:pPr algn="l">
               <a:lnSpc>
